--- a/docs/thesis/pictures.pptx
+++ b/docs/thesis/pictures.pptx
@@ -111,6 +111,11 @@
       </a:defRPr>
     </a:lvl9pPr>
   </p:defaultTextStyle>
+  <p:extLst>
+    <p:ext uri="{EFAFB233-063F-42B5-8137-9DF3F51BA10A}">
+      <p15:sldGuideLst xmlns:p15="http://schemas.microsoft.com/office/powerpoint/2012/main"/>
+    </p:ext>
+  </p:extLst>
 </p:presentation>
 </file>
 
@@ -208,7 +213,7 @@
           <a:p>
             <a:fld id="{C66A8157-93E0-41B4-A777-149D15F966ED}" type="datetimeFigureOut">
               <a:rPr lang="zh-CN" altLang="en-US" smtClean="0"/>
-              <a:t>2026/4/25</a:t>
+              <a:t>2026/4/26</a:t>
             </a:fld>
             <a:endParaRPr lang="zh-CN" altLang="en-US"/>
           </a:p>
@@ -882,7 +887,7 @@
           <a:p>
             <a:fld id="{E7097275-6DBD-4E45-A854-72B05E8D007C}" type="datetimeFigureOut">
               <a:rPr lang="zh-CN" altLang="en-US" smtClean="0"/>
-              <a:t>2026/4/25</a:t>
+              <a:t>2026/4/26</a:t>
             </a:fld>
             <a:endParaRPr lang="zh-CN" altLang="en-US"/>
           </a:p>
@@ -1080,7 +1085,7 @@
           <a:p>
             <a:fld id="{E7097275-6DBD-4E45-A854-72B05E8D007C}" type="datetimeFigureOut">
               <a:rPr lang="zh-CN" altLang="en-US" smtClean="0"/>
-              <a:t>2026/4/25</a:t>
+              <a:t>2026/4/26</a:t>
             </a:fld>
             <a:endParaRPr lang="zh-CN" altLang="en-US"/>
           </a:p>
@@ -1288,7 +1293,7 @@
           <a:p>
             <a:fld id="{E7097275-6DBD-4E45-A854-72B05E8D007C}" type="datetimeFigureOut">
               <a:rPr lang="zh-CN" altLang="en-US" smtClean="0"/>
-              <a:t>2026/4/25</a:t>
+              <a:t>2026/4/26</a:t>
             </a:fld>
             <a:endParaRPr lang="zh-CN" altLang="en-US"/>
           </a:p>
@@ -1486,7 +1491,7 @@
           <a:p>
             <a:fld id="{E7097275-6DBD-4E45-A854-72B05E8D007C}" type="datetimeFigureOut">
               <a:rPr lang="zh-CN" altLang="en-US" smtClean="0"/>
-              <a:t>2026/4/25</a:t>
+              <a:t>2026/4/26</a:t>
             </a:fld>
             <a:endParaRPr lang="zh-CN" altLang="en-US"/>
           </a:p>
@@ -1761,7 +1766,7 @@
           <a:p>
             <a:fld id="{E7097275-6DBD-4E45-A854-72B05E8D007C}" type="datetimeFigureOut">
               <a:rPr lang="zh-CN" altLang="en-US" smtClean="0"/>
-              <a:t>2026/4/25</a:t>
+              <a:t>2026/4/26</a:t>
             </a:fld>
             <a:endParaRPr lang="zh-CN" altLang="en-US"/>
           </a:p>
@@ -2026,7 +2031,7 @@
           <a:p>
             <a:fld id="{E7097275-6DBD-4E45-A854-72B05E8D007C}" type="datetimeFigureOut">
               <a:rPr lang="zh-CN" altLang="en-US" smtClean="0"/>
-              <a:t>2026/4/25</a:t>
+              <a:t>2026/4/26</a:t>
             </a:fld>
             <a:endParaRPr lang="zh-CN" altLang="en-US"/>
           </a:p>
@@ -2438,7 +2443,7 @@
           <a:p>
             <a:fld id="{E7097275-6DBD-4E45-A854-72B05E8D007C}" type="datetimeFigureOut">
               <a:rPr lang="zh-CN" altLang="en-US" smtClean="0"/>
-              <a:t>2026/4/25</a:t>
+              <a:t>2026/4/26</a:t>
             </a:fld>
             <a:endParaRPr lang="zh-CN" altLang="en-US"/>
           </a:p>
@@ -2579,7 +2584,7 @@
           <a:p>
             <a:fld id="{E7097275-6DBD-4E45-A854-72B05E8D007C}" type="datetimeFigureOut">
               <a:rPr lang="zh-CN" altLang="en-US" smtClean="0"/>
-              <a:t>2026/4/25</a:t>
+              <a:t>2026/4/26</a:t>
             </a:fld>
             <a:endParaRPr lang="zh-CN" altLang="en-US"/>
           </a:p>
@@ -2692,7 +2697,7 @@
           <a:p>
             <a:fld id="{E7097275-6DBD-4E45-A854-72B05E8D007C}" type="datetimeFigureOut">
               <a:rPr lang="zh-CN" altLang="en-US" smtClean="0"/>
-              <a:t>2026/4/25</a:t>
+              <a:t>2026/4/26</a:t>
             </a:fld>
             <a:endParaRPr lang="zh-CN" altLang="en-US"/>
           </a:p>
@@ -3003,7 +3008,7 @@
           <a:p>
             <a:fld id="{E7097275-6DBD-4E45-A854-72B05E8D007C}" type="datetimeFigureOut">
               <a:rPr lang="zh-CN" altLang="en-US" smtClean="0"/>
-              <a:t>2026/4/25</a:t>
+              <a:t>2026/4/26</a:t>
             </a:fld>
             <a:endParaRPr lang="zh-CN" altLang="en-US"/>
           </a:p>
@@ -3291,7 +3296,7 @@
           <a:p>
             <a:fld id="{E7097275-6DBD-4E45-A854-72B05E8D007C}" type="datetimeFigureOut">
               <a:rPr lang="zh-CN" altLang="en-US" smtClean="0"/>
-              <a:t>2026/4/25</a:t>
+              <a:t>2026/4/26</a:t>
             </a:fld>
             <a:endParaRPr lang="zh-CN" altLang="en-US"/>
           </a:p>
@@ -3532,7 +3537,7 @@
           <a:p>
             <a:fld id="{E7097275-6DBD-4E45-A854-72B05E8D007C}" type="datetimeFigureOut">
               <a:rPr lang="zh-CN" altLang="en-US" smtClean="0"/>
-              <a:t>2026/4/25</a:t>
+              <a:t>2026/4/26</a:t>
             </a:fld>
             <a:endParaRPr lang="zh-CN" altLang="en-US"/>
           </a:p>
@@ -3964,7 +3969,7 @@
         <p:spPr>
           <a:xfrm>
             <a:off x="102899" y="2615221"/>
-            <a:ext cx="2858860" cy="3539430"/>
+            <a:ext cx="2704971" cy="3539430"/>
           </a:xfrm>
           <a:prstGeom prst="rect">
             <a:avLst/>
@@ -4005,11 +4010,14 @@
           <a:p>
             <a:r>
               <a:rPr lang="en-US" altLang="zh-CN" sz="1600" dirty="0">
+                <a:solidFill>
+                  <a:srgbClr val="00B0F0"/>
+                </a:solidFill>
                 <a:latin typeface="Times New Roman" panose="02020603050405020304" pitchFamily="18" charset="0"/>
                 <a:ea typeface="宋体" panose="02010600030101010101" pitchFamily="2" charset="-122"/>
                 <a:cs typeface="Times New Roman" panose="02020603050405020304" pitchFamily="18" charset="0"/>
               </a:rPr>
-              <a:t>  0 LOAD_FAST     0 (x)</a:t>
+              <a:t>  0 LOAD_FAST     (x)</a:t>
             </a:r>
           </a:p>
           <a:p>
@@ -4019,7 +4027,7 @@
                 <a:ea typeface="宋体" panose="02010600030101010101" pitchFamily="2" charset="-122"/>
                 <a:cs typeface="Times New Roman" panose="02020603050405020304" pitchFamily="18" charset="0"/>
               </a:rPr>
-              <a:t>  2 LOAD_FAST     1 (y)</a:t>
+              <a:t>  2 LOAD_FAST     (y)</a:t>
             </a:r>
           </a:p>
           <a:p>
@@ -4029,7 +4037,7 @@
                 <a:ea typeface="宋体" panose="02010600030101010101" pitchFamily="2" charset="-122"/>
                 <a:cs typeface="Times New Roman" panose="02020603050405020304" pitchFamily="18" charset="0"/>
               </a:rPr>
-              <a:t>  4 BINARY_OP      0 (+)</a:t>
+              <a:t>  4 BINARY_OP      (+)</a:t>
             </a:r>
           </a:p>
           <a:p>
@@ -4092,7 +4100,7 @@
                 <a:ea typeface="宋体" panose="02010600030101010101" pitchFamily="2" charset="-122"/>
                 <a:cs typeface="Times New Roman" panose="02020603050405020304" pitchFamily="18" charset="0"/>
               </a:rPr>
-              <a:t> 10 LOAD_GLOBAL  1 (callee)</a:t>
+              <a:t> 10 LOAD_GLOBAL  (callee)</a:t>
             </a:r>
           </a:p>
           <a:p>
@@ -4102,7 +4110,7 @@
                 <a:ea typeface="宋体" panose="02010600030101010101" pitchFamily="2" charset="-122"/>
                 <a:cs typeface="Times New Roman" panose="02020603050405020304" pitchFamily="18" charset="0"/>
               </a:rPr>
-              <a:t> 20 LOAD_FAST         0 (a)</a:t>
+              <a:t> 20 LOAD_FAST         (a)</a:t>
             </a:r>
           </a:p>
           <a:p>
@@ -4112,7 +4120,7 @@
                 <a:ea typeface="宋体" panose="02010600030101010101" pitchFamily="2" charset="-122"/>
                 <a:cs typeface="Times New Roman" panose="02020603050405020304" pitchFamily="18" charset="0"/>
               </a:rPr>
-              <a:t> 22 LOAD_FAST         1 (b)</a:t>
+              <a:t> 22 LOAD_FAST         (b)</a:t>
             </a:r>
           </a:p>
           <a:p>
@@ -4122,7 +4130,18 @@
                 <a:ea typeface="宋体" panose="02010600030101010101" pitchFamily="2" charset="-122"/>
                 <a:cs typeface="Times New Roman" panose="02020603050405020304" pitchFamily="18" charset="0"/>
               </a:rPr>
-              <a:t> 24 CALL                     2</a:t>
+              <a:t> </a:t>
+            </a:r>
+            <a:r>
+              <a:rPr lang="en-US" altLang="zh-CN" sz="1600" b="1" dirty="0">
+                <a:solidFill>
+                  <a:srgbClr val="FF0000"/>
+                </a:solidFill>
+                <a:latin typeface="Times New Roman" panose="02020603050405020304" pitchFamily="18" charset="0"/>
+                <a:ea typeface="宋体" panose="02010600030101010101" pitchFamily="2" charset="-122"/>
+                <a:cs typeface="Times New Roman" panose="02020603050405020304" pitchFamily="18" charset="0"/>
+              </a:rPr>
+              <a:t>24 CALL                     2</a:t>
             </a:r>
           </a:p>
           <a:p>
@@ -4132,7 +4151,18 @@
                 <a:ea typeface="宋体" panose="02010600030101010101" pitchFamily="2" charset="-122"/>
                 <a:cs typeface="Times New Roman" panose="02020603050405020304" pitchFamily="18" charset="0"/>
               </a:rPr>
-              <a:t> 32 STORE_FAST        2 (c)</a:t>
+              <a:t> </a:t>
+            </a:r>
+            <a:r>
+              <a:rPr lang="en-US" altLang="zh-CN" sz="1600" dirty="0">
+                <a:solidFill>
+                  <a:srgbClr val="00B050"/>
+                </a:solidFill>
+                <a:latin typeface="Times New Roman" panose="02020603050405020304" pitchFamily="18" charset="0"/>
+                <a:ea typeface="宋体" panose="02010600030101010101" pitchFamily="2" charset="-122"/>
+                <a:cs typeface="Times New Roman" panose="02020603050405020304" pitchFamily="18" charset="0"/>
+              </a:rPr>
+              <a:t>32 STORE_FAST        (c)</a:t>
             </a:r>
           </a:p>
           <a:p>
@@ -4232,6 +4262,9 @@
             </a:r>
             <a:r>
               <a:rPr lang="en-US" altLang="zh-CN" sz="1600" dirty="0">
+                <a:solidFill>
+                  <a:srgbClr val="00B0F0"/>
+                </a:solidFill>
                 <a:latin typeface="Times New Roman" panose="02020603050405020304" pitchFamily="18" charset="0"/>
                 <a:ea typeface="宋体" panose="02010600030101010101" pitchFamily="2" charset="-122"/>
                 <a:cs typeface="Times New Roman" panose="02020603050405020304" pitchFamily="18" charset="0"/>
@@ -4239,6 +4272,9 @@
               <a:t>0</a:t>
             </a:r>
             <a:endParaRPr lang="zh-CN" altLang="en-US" sz="1600" dirty="0">
+              <a:solidFill>
+                <a:srgbClr val="00B0F0"/>
+              </a:solidFill>
               <a:latin typeface="Times New Roman" panose="02020603050405020304" pitchFamily="18" charset="0"/>
               <a:ea typeface="宋体" panose="02010600030101010101" pitchFamily="2" charset="-122"/>
               <a:cs typeface="Times New Roman" panose="02020603050405020304" pitchFamily="18" charset="0"/>
@@ -4687,6 +4723,9 @@
                     </a:r>
                     <a:r>
                       <a:rPr lang="en-US" altLang="zh-CN" sz="1600" dirty="0">
+                        <a:solidFill>
+                          <a:srgbClr val="FF0000"/>
+                        </a:solidFill>
                         <a:latin typeface="Times New Roman" panose="02020603050405020304" pitchFamily="18" charset="0"/>
                         <a:ea typeface="宋体" panose="02010600030101010101" pitchFamily="2" charset="-122"/>
                         <a:cs typeface="Times New Roman" panose="02020603050405020304" pitchFamily="18" charset="0"/>
@@ -4694,6 +4733,9 @@
                       <a:t>24</a:t>
                     </a:r>
                     <a:endParaRPr lang="zh-CN" altLang="en-US" sz="1600" dirty="0">
+                      <a:solidFill>
+                        <a:srgbClr val="FF0000"/>
+                      </a:solidFill>
                       <a:latin typeface="Times New Roman" panose="02020603050405020304" pitchFamily="18" charset="0"/>
                       <a:ea typeface="宋体" panose="02010600030101010101" pitchFamily="2" charset="-122"/>
                       <a:cs typeface="Times New Roman" panose="02020603050405020304" pitchFamily="18" charset="0"/>
@@ -5320,6 +5362,9 @@
                       </a:r>
                       <a:r>
                         <a:rPr lang="en-US" altLang="zh-CN" sz="1600" dirty="0">
+                          <a:solidFill>
+                            <a:srgbClr val="00B050"/>
+                          </a:solidFill>
                           <a:latin typeface="Times New Roman" panose="02020603050405020304" pitchFamily="18" charset="0"/>
                           <a:ea typeface="宋体" panose="02010600030101010101" pitchFamily="2" charset="-122"/>
                           <a:cs typeface="Times New Roman" panose="02020603050405020304" pitchFamily="18" charset="0"/>
@@ -5327,6 +5372,9 @@
                         <a:t>32</a:t>
                       </a:r>
                       <a:endParaRPr lang="zh-CN" altLang="en-US" sz="1600" dirty="0">
+                        <a:solidFill>
+                          <a:srgbClr val="00B050"/>
+                        </a:solidFill>
                         <a:latin typeface="Times New Roman" panose="02020603050405020304" pitchFamily="18" charset="0"/>
                         <a:ea typeface="宋体" panose="02010600030101010101" pitchFamily="2" charset="-122"/>
                         <a:cs typeface="Times New Roman" panose="02020603050405020304" pitchFamily="18" charset="0"/>
@@ -5519,6 +5567,28 @@
                   </a:rPr>
                   <a:t>callee()</a:t>
                 </a:r>
+              </a:p>
+              <a:p>
+                <a:pPr algn="ctr"/>
+                <a:r>
+                  <a:rPr lang="zh-CN" altLang="en-US" sz="1400" b="1" dirty="0">
+                    <a:solidFill>
+                      <a:schemeClr val="tx1"/>
+                    </a:solidFill>
+                    <a:latin typeface="Times New Roman" panose="02020603050405020304" pitchFamily="18" charset="0"/>
+                    <a:ea typeface="宋体" panose="02010600030101010101" pitchFamily="2" charset="-122"/>
+                    <a:cs typeface="Times New Roman" panose="02020603050405020304" pitchFamily="18" charset="0"/>
+                  </a:rPr>
+                  <a:t>栈帧</a:t>
+                </a:r>
+                <a:endParaRPr lang="en-US" altLang="zh-CN" sz="1400" b="1" dirty="0">
+                  <a:solidFill>
+                    <a:schemeClr val="tx1"/>
+                  </a:solidFill>
+                  <a:latin typeface="Times New Roman" panose="02020603050405020304" pitchFamily="18" charset="0"/>
+                  <a:ea typeface="宋体" panose="02010600030101010101" pitchFamily="2" charset="-122"/>
+                  <a:cs typeface="Times New Roman" panose="02020603050405020304" pitchFamily="18" charset="0"/>
+                </a:endParaRPr>
               </a:p>
               <a:p>
                 <a:pPr algn="ctr"/>
@@ -5961,6 +6031,9 @@
                     </a:r>
                     <a:r>
                       <a:rPr lang="en-US" altLang="zh-CN" sz="1600" dirty="0">
+                        <a:solidFill>
+                          <a:srgbClr val="00B050"/>
+                        </a:solidFill>
                         <a:latin typeface="Times New Roman" panose="02020603050405020304" pitchFamily="18" charset="0"/>
                         <a:ea typeface="宋体" panose="02010600030101010101" pitchFamily="2" charset="-122"/>
                         <a:cs typeface="Times New Roman" panose="02020603050405020304" pitchFamily="18" charset="0"/>
@@ -5968,6 +6041,9 @@
                       <a:t>32</a:t>
                     </a:r>
                     <a:endParaRPr lang="zh-CN" altLang="en-US" sz="1600" dirty="0">
+                      <a:solidFill>
+                        <a:srgbClr val="00B050"/>
+                      </a:solidFill>
                       <a:latin typeface="Times New Roman" panose="02020603050405020304" pitchFamily="18" charset="0"/>
                       <a:ea typeface="宋体" panose="02010600030101010101" pitchFamily="2" charset="-122"/>
                       <a:cs typeface="Times New Roman" panose="02020603050405020304" pitchFamily="18" charset="0"/>
@@ -6215,7 +6291,7 @@
         </p:nvSpPr>
         <p:spPr>
           <a:xfrm>
-            <a:off x="134378" y="369678"/>
+            <a:off x="131267" y="546259"/>
             <a:ext cx="1563248" cy="2062103"/>
           </a:xfrm>
           <a:prstGeom prst="rect">
@@ -6374,6 +6450,28 @@
                 <a:ea typeface="宋体" panose="02010600030101010101" pitchFamily="2" charset="-122"/>
                 <a:cs typeface="Times New Roman" panose="02020603050405020304" pitchFamily="18" charset="0"/>
               </a:rPr>
+              <a:t>栈帧</a:t>
+            </a:r>
+            <a:endParaRPr lang="en-US" altLang="zh-CN" sz="1400" b="1" dirty="0">
+              <a:solidFill>
+                <a:schemeClr val="tx1"/>
+              </a:solidFill>
+              <a:latin typeface="Times New Roman" panose="02020603050405020304" pitchFamily="18" charset="0"/>
+              <a:ea typeface="宋体" panose="02010600030101010101" pitchFamily="2" charset="-122"/>
+              <a:cs typeface="Times New Roman" panose="02020603050405020304" pitchFamily="18" charset="0"/>
+            </a:endParaRPr>
+          </a:p>
+          <a:p>
+            <a:pPr algn="ctr"/>
+            <a:r>
+              <a:rPr lang="zh-CN" altLang="en-US" sz="1400" b="1" dirty="0">
+                <a:solidFill>
+                  <a:schemeClr val="tx1"/>
+                </a:solidFill>
+                <a:latin typeface="Times New Roman" panose="02020603050405020304" pitchFamily="18" charset="0"/>
+                <a:ea typeface="宋体" panose="02010600030101010101" pitchFamily="2" charset="-122"/>
+                <a:cs typeface="Times New Roman" panose="02020603050405020304" pitchFamily="18" charset="0"/>
+              </a:rPr>
               <a:t>出栈</a:t>
             </a:r>
           </a:p>
@@ -6423,8 +6521,8 @@
         </p:nvSpPr>
         <p:spPr>
           <a:xfrm>
-            <a:off x="584133" y="686895"/>
-            <a:ext cx="987666" cy="2092881"/>
+            <a:off x="584132" y="686895"/>
+            <a:ext cx="1027945" cy="2092881"/>
           </a:xfrm>
           <a:prstGeom prst="rect">
             <a:avLst/>
@@ -7179,52 +7277,6 @@
           </p:grpSp>
         </p:grpSp>
       </p:grpSp>
-      <p:cxnSp>
-        <p:nvCxnSpPr>
-          <p:cNvPr id="91" name="连接符: 肘形 90">
-            <a:extLst>
-              <a:ext uri="{FF2B5EF4-FFF2-40B4-BE49-F238E27FC236}">
-                <a16:creationId xmlns:a16="http://schemas.microsoft.com/office/drawing/2014/main" id="{191AC61F-CFCB-4C04-90CD-DEF16AAE5974}"/>
-              </a:ext>
-            </a:extLst>
-          </p:cNvPr>
-          <p:cNvCxnSpPr>
-            <a:cxnSpLocks/>
-          </p:cNvCxnSpPr>
-          <p:nvPr/>
-        </p:nvCxnSpPr>
-        <p:spPr>
-          <a:xfrm rot="5400000" flipH="1" flipV="1">
-            <a:off x="5164291" y="2723693"/>
-            <a:ext cx="2581071" cy="2469329"/>
-          </a:xfrm>
-          <a:prstGeom prst="bentConnector3">
-            <a:avLst>
-              <a:gd name="adj1" fmla="val 58"/>
-            </a:avLst>
-          </a:prstGeom>
-          <a:ln w="28575">
-            <a:solidFill>
-              <a:schemeClr val="tx1"/>
-            </a:solidFill>
-            <a:tailEnd type="triangle"/>
-          </a:ln>
-        </p:spPr>
-        <p:style>
-          <a:lnRef idx="1">
-            <a:schemeClr val="accent1"/>
-          </a:lnRef>
-          <a:fillRef idx="0">
-            <a:schemeClr val="accent1"/>
-          </a:fillRef>
-          <a:effectRef idx="0">
-            <a:schemeClr val="accent1"/>
-          </a:effectRef>
-          <a:fontRef idx="minor">
-            <a:schemeClr val="tx1"/>
-          </a:fontRef>
-        </p:style>
-      </p:cxnSp>
       <p:grpSp>
         <p:nvGrpSpPr>
           <p:cNvPr id="94" name="组合 93">
@@ -8321,51 +8373,6 @@
           </p:cxnSp>
         </p:grpSp>
       </p:grpSp>
-      <p:cxnSp>
-        <p:nvCxnSpPr>
-          <p:cNvPr id="117" name="连接符: 肘形 116">
-            <a:extLst>
-              <a:ext uri="{FF2B5EF4-FFF2-40B4-BE49-F238E27FC236}">
-                <a16:creationId xmlns:a16="http://schemas.microsoft.com/office/drawing/2014/main" id="{31748DCF-3B13-4366-9E26-56E8A75CBD6A}"/>
-              </a:ext>
-            </a:extLst>
-          </p:cNvPr>
-          <p:cNvCxnSpPr>
-            <a:cxnSpLocks/>
-            <a:endCxn id="12" idx="2"/>
-          </p:cNvCxnSpPr>
-          <p:nvPr/>
-        </p:nvCxnSpPr>
-        <p:spPr>
-          <a:xfrm flipV="1">
-            <a:off x="2240437" y="2670155"/>
-            <a:ext cx="4957437" cy="1003128"/>
-          </a:xfrm>
-          <a:prstGeom prst="bentConnector2">
-            <a:avLst/>
-          </a:prstGeom>
-          <a:ln w="28575">
-            <a:solidFill>
-              <a:schemeClr val="tx1"/>
-            </a:solidFill>
-            <a:tailEnd type="triangle"/>
-          </a:ln>
-        </p:spPr>
-        <p:style>
-          <a:lnRef idx="1">
-            <a:schemeClr val="accent1"/>
-          </a:lnRef>
-          <a:fillRef idx="0">
-            <a:schemeClr val="accent1"/>
-          </a:fillRef>
-          <a:effectRef idx="0">
-            <a:schemeClr val="accent1"/>
-          </a:effectRef>
-          <a:fontRef idx="minor">
-            <a:schemeClr val="tx1"/>
-          </a:fontRef>
-        </p:style>
-      </p:cxnSp>
       <p:grpSp>
         <p:nvGrpSpPr>
           <p:cNvPr id="125" name="组合 124">
@@ -8380,7 +8387,7 @@
         </p:nvGrpSpPr>
         <p:grpSpPr>
           <a:xfrm>
-            <a:off x="6659416" y="5553460"/>
+            <a:off x="6626064" y="5502683"/>
             <a:ext cx="1947612" cy="793545"/>
             <a:chOff x="6815388" y="1384056"/>
             <a:chExt cx="1947612" cy="793545"/>
@@ -8714,8 +8721,8 @@
         </p:nvCxnSpPr>
         <p:spPr>
           <a:xfrm>
-            <a:off x="5185336" y="5788329"/>
-            <a:ext cx="1473911" cy="43342"/>
+            <a:off x="5185336" y="5776453"/>
+            <a:ext cx="1443458" cy="0"/>
           </a:xfrm>
           <a:prstGeom prst="straightConnector1">
             <a:avLst/>
@@ -9341,187 +9348,6 @@
           </p:txBody>
         </p:sp>
       </p:grpSp>
-      <p:cxnSp>
-        <p:nvCxnSpPr>
-          <p:cNvPr id="147" name="连接符: 肘形 146">
-            <a:extLst>
-              <a:ext uri="{FF2B5EF4-FFF2-40B4-BE49-F238E27FC236}">
-                <a16:creationId xmlns:a16="http://schemas.microsoft.com/office/drawing/2014/main" id="{94EA9A6C-FC8E-4D85-AAEE-A8B5ECB70626}"/>
-              </a:ext>
-            </a:extLst>
-          </p:cNvPr>
-          <p:cNvCxnSpPr>
-            <a:cxnSpLocks/>
-          </p:cNvCxnSpPr>
-          <p:nvPr/>
-        </p:nvCxnSpPr>
-        <p:spPr>
-          <a:xfrm flipV="1">
-            <a:off x="5027548" y="2653128"/>
-            <a:ext cx="1909585" cy="330595"/>
-          </a:xfrm>
-          <a:prstGeom prst="bentConnector3">
-            <a:avLst>
-              <a:gd name="adj1" fmla="val 100213"/>
-            </a:avLst>
-          </a:prstGeom>
-          <a:ln w="28575">
-            <a:solidFill>
-              <a:schemeClr val="tx1"/>
-            </a:solidFill>
-            <a:tailEnd type="triangle"/>
-          </a:ln>
-        </p:spPr>
-        <p:style>
-          <a:lnRef idx="1">
-            <a:schemeClr val="accent1"/>
-          </a:lnRef>
-          <a:fillRef idx="0">
-            <a:schemeClr val="accent1"/>
-          </a:fillRef>
-          <a:effectRef idx="0">
-            <a:schemeClr val="accent1"/>
-          </a:effectRef>
-          <a:fontRef idx="minor">
-            <a:schemeClr val="tx1"/>
-          </a:fontRef>
-        </p:style>
-      </p:cxnSp>
-      <p:cxnSp>
-        <p:nvCxnSpPr>
-          <p:cNvPr id="160" name="连接符: 肘形 159">
-            <a:extLst>
-              <a:ext uri="{FF2B5EF4-FFF2-40B4-BE49-F238E27FC236}">
-                <a16:creationId xmlns:a16="http://schemas.microsoft.com/office/drawing/2014/main" id="{54F86B02-B007-4E06-B70C-81CB96B86269}"/>
-              </a:ext>
-            </a:extLst>
-          </p:cNvPr>
-          <p:cNvCxnSpPr>
-            <a:cxnSpLocks/>
-          </p:cNvCxnSpPr>
-          <p:nvPr/>
-        </p:nvCxnSpPr>
-        <p:spPr>
-          <a:xfrm rot="10800000" flipV="1">
-            <a:off x="2268005" y="236588"/>
-            <a:ext cx="6220795" cy="2747133"/>
-          </a:xfrm>
-          <a:prstGeom prst="bentConnector3">
-            <a:avLst>
-              <a:gd name="adj1" fmla="val 100018"/>
-            </a:avLst>
-          </a:prstGeom>
-          <a:ln w="28575">
-            <a:solidFill>
-              <a:schemeClr val="tx1"/>
-            </a:solidFill>
-            <a:tailEnd type="triangle"/>
-          </a:ln>
-        </p:spPr>
-        <p:style>
-          <a:lnRef idx="1">
-            <a:schemeClr val="accent1"/>
-          </a:lnRef>
-          <a:fillRef idx="0">
-            <a:schemeClr val="accent1"/>
-          </a:fillRef>
-          <a:effectRef idx="0">
-            <a:schemeClr val="accent1"/>
-          </a:effectRef>
-          <a:fontRef idx="minor">
-            <a:schemeClr val="tx1"/>
-          </a:fontRef>
-        </p:style>
-      </p:cxnSp>
-      <p:cxnSp>
-        <p:nvCxnSpPr>
-          <p:cNvPr id="167" name="连接符: 肘形 166">
-            <a:extLst>
-              <a:ext uri="{FF2B5EF4-FFF2-40B4-BE49-F238E27FC236}">
-                <a16:creationId xmlns:a16="http://schemas.microsoft.com/office/drawing/2014/main" id="{73880740-50AC-4990-960C-7F1C131B8D80}"/>
-              </a:ext>
-            </a:extLst>
-          </p:cNvPr>
-          <p:cNvCxnSpPr>
-            <a:cxnSpLocks/>
-          </p:cNvCxnSpPr>
-          <p:nvPr/>
-        </p:nvCxnSpPr>
-        <p:spPr>
-          <a:xfrm rot="5400000" flipH="1" flipV="1">
-            <a:off x="7004112" y="911395"/>
-            <a:ext cx="2170068" cy="799310"/>
-          </a:xfrm>
-          <a:prstGeom prst="bentConnector3">
-            <a:avLst>
-              <a:gd name="adj1" fmla="val 606"/>
-            </a:avLst>
-          </a:prstGeom>
-          <a:ln w="28575">
-            <a:solidFill>
-              <a:schemeClr val="tx1"/>
-            </a:solidFill>
-          </a:ln>
-        </p:spPr>
-        <p:style>
-          <a:lnRef idx="1">
-            <a:schemeClr val="accent1"/>
-          </a:lnRef>
-          <a:fillRef idx="0">
-            <a:schemeClr val="accent1"/>
-          </a:fillRef>
-          <a:effectRef idx="0">
-            <a:schemeClr val="accent1"/>
-          </a:effectRef>
-          <a:fontRef idx="minor">
-            <a:schemeClr val="tx1"/>
-          </a:fontRef>
-        </p:style>
-      </p:cxnSp>
-      <p:cxnSp>
-        <p:nvCxnSpPr>
-          <p:cNvPr id="181" name="直接箭头连接符 180">
-            <a:extLst>
-              <a:ext uri="{FF2B5EF4-FFF2-40B4-BE49-F238E27FC236}">
-                <a16:creationId xmlns:a16="http://schemas.microsoft.com/office/drawing/2014/main" id="{F5A0C349-4ECB-46F2-9628-196DC585EB46}"/>
-              </a:ext>
-            </a:extLst>
-          </p:cNvPr>
-          <p:cNvCxnSpPr>
-            <a:cxnSpLocks/>
-          </p:cNvCxnSpPr>
-          <p:nvPr/>
-        </p:nvCxnSpPr>
-        <p:spPr>
-          <a:xfrm>
-            <a:off x="5149755" y="2001680"/>
-            <a:ext cx="1059566" cy="7467"/>
-          </a:xfrm>
-          <a:prstGeom prst="straightConnector1">
-            <a:avLst/>
-          </a:prstGeom>
-          <a:ln w="28575">
-            <a:solidFill>
-              <a:schemeClr val="tx1"/>
-            </a:solidFill>
-            <a:tailEnd type="triangle"/>
-          </a:ln>
-        </p:spPr>
-        <p:style>
-          <a:lnRef idx="1">
-            <a:schemeClr val="accent1"/>
-          </a:lnRef>
-          <a:fillRef idx="0">
-            <a:schemeClr val="accent1"/>
-          </a:fillRef>
-          <a:effectRef idx="0">
-            <a:schemeClr val="accent1"/>
-          </a:effectRef>
-          <a:fontRef idx="minor">
-            <a:schemeClr val="tx1"/>
-          </a:fontRef>
-        </p:style>
-      </p:cxnSp>
       <p:sp>
         <p:nvSpPr>
           <p:cNvPr id="183" name="文本框 182">
@@ -9701,6 +9527,716 @@
               </a:rPr>
               <a:t>，栈帧中采用该全局环境，并使用槽位数组保存局部变量</a:t>
             </a:r>
+          </a:p>
+        </p:txBody>
+      </p:sp>
+      <p:grpSp>
+        <p:nvGrpSpPr>
+          <p:cNvPr id="13" name="组合 12">
+            <a:extLst>
+              <a:ext uri="{FF2B5EF4-FFF2-40B4-BE49-F238E27FC236}">
+                <a16:creationId xmlns:a16="http://schemas.microsoft.com/office/drawing/2014/main" id="{8B38EF29-19DF-45E9-9992-73E6E410E6E5}"/>
+              </a:ext>
+            </a:extLst>
+          </p:cNvPr>
+          <p:cNvGrpSpPr/>
+          <p:nvPr/>
+        </p:nvGrpSpPr>
+        <p:grpSpPr>
+          <a:xfrm>
+            <a:off x="5106185" y="1932729"/>
+            <a:ext cx="1103136" cy="136566"/>
+            <a:chOff x="5106185" y="1932729"/>
+            <a:chExt cx="1103136" cy="136566"/>
+          </a:xfrm>
+        </p:grpSpPr>
+        <p:cxnSp>
+          <p:nvCxnSpPr>
+            <p:cNvPr id="181" name="直接箭头连接符 180">
+              <a:extLst>
+                <a:ext uri="{FF2B5EF4-FFF2-40B4-BE49-F238E27FC236}">
+                  <a16:creationId xmlns:a16="http://schemas.microsoft.com/office/drawing/2014/main" id="{F5A0C349-4ECB-46F2-9628-196DC585EB46}"/>
+                </a:ext>
+              </a:extLst>
+            </p:cNvPr>
+            <p:cNvCxnSpPr>
+              <a:cxnSpLocks/>
+            </p:cNvCxnSpPr>
+            <p:nvPr/>
+          </p:nvCxnSpPr>
+          <p:spPr>
+            <a:xfrm>
+              <a:off x="5149755" y="2001680"/>
+              <a:ext cx="1059566" cy="7467"/>
+            </a:xfrm>
+            <a:prstGeom prst="straightConnector1">
+              <a:avLst/>
+            </a:prstGeom>
+            <a:ln w="28575">
+              <a:solidFill>
+                <a:schemeClr val="tx1"/>
+              </a:solidFill>
+              <a:tailEnd type="triangle"/>
+            </a:ln>
+          </p:spPr>
+          <p:style>
+            <a:lnRef idx="1">
+              <a:schemeClr val="accent1"/>
+            </a:lnRef>
+            <a:fillRef idx="0">
+              <a:schemeClr val="accent1"/>
+            </a:fillRef>
+            <a:effectRef idx="0">
+              <a:schemeClr val="accent1"/>
+            </a:effectRef>
+            <a:fontRef idx="minor">
+              <a:schemeClr val="tx1"/>
+            </a:fontRef>
+          </p:style>
+        </p:cxnSp>
+        <p:sp>
+          <p:nvSpPr>
+            <p:cNvPr id="3" name="椭圆 2">
+              <a:extLst>
+                <a:ext uri="{FF2B5EF4-FFF2-40B4-BE49-F238E27FC236}">
+                  <a16:creationId xmlns:a16="http://schemas.microsoft.com/office/drawing/2014/main" id="{4E030E14-C77B-46F2-A9B2-D342D20EF03A}"/>
+                </a:ext>
+              </a:extLst>
+            </p:cNvPr>
+            <p:cNvSpPr/>
+            <p:nvPr/>
+          </p:nvSpPr>
+          <p:spPr>
+            <a:xfrm>
+              <a:off x="5106185" y="1932729"/>
+              <a:ext cx="136566" cy="136566"/>
+            </a:xfrm>
+            <a:prstGeom prst="ellipse">
+              <a:avLst/>
+            </a:prstGeom>
+            <a:solidFill>
+              <a:schemeClr val="tx1"/>
+            </a:solidFill>
+            <a:ln>
+              <a:noFill/>
+            </a:ln>
+          </p:spPr>
+          <p:style>
+            <a:lnRef idx="2">
+              <a:schemeClr val="accent1">
+                <a:shade val="50000"/>
+              </a:schemeClr>
+            </a:lnRef>
+            <a:fillRef idx="1">
+              <a:schemeClr val="accent1"/>
+            </a:fillRef>
+            <a:effectRef idx="0">
+              <a:schemeClr val="accent1"/>
+            </a:effectRef>
+            <a:fontRef idx="minor">
+              <a:schemeClr val="lt1"/>
+            </a:fontRef>
+          </p:style>
+          <p:txBody>
+            <a:bodyPr rtlCol="0" anchor="ctr"/>
+            <a:lstStyle/>
+            <a:p>
+              <a:pPr algn="ctr"/>
+              <a:endParaRPr lang="zh-CN" altLang="en-US"/>
+            </a:p>
+          </p:txBody>
+        </p:sp>
+      </p:grpSp>
+      <p:grpSp>
+        <p:nvGrpSpPr>
+          <p:cNvPr id="42" name="组合 41">
+            <a:extLst>
+              <a:ext uri="{FF2B5EF4-FFF2-40B4-BE49-F238E27FC236}">
+                <a16:creationId xmlns:a16="http://schemas.microsoft.com/office/drawing/2014/main" id="{FC9E1A2B-CA97-4BB0-96DE-53340D99291D}"/>
+              </a:ext>
+            </a:extLst>
+          </p:cNvPr>
+          <p:cNvGrpSpPr/>
+          <p:nvPr/>
+        </p:nvGrpSpPr>
+        <p:grpSpPr>
+          <a:xfrm>
+            <a:off x="5106217" y="2653132"/>
+            <a:ext cx="1830916" cy="407590"/>
+            <a:chOff x="5106217" y="2653132"/>
+            <a:chExt cx="1830916" cy="407590"/>
+          </a:xfrm>
+        </p:grpSpPr>
+        <p:cxnSp>
+          <p:nvCxnSpPr>
+            <p:cNvPr id="147" name="连接符: 肘形 146">
+              <a:extLst>
+                <a:ext uri="{FF2B5EF4-FFF2-40B4-BE49-F238E27FC236}">
+                  <a16:creationId xmlns:a16="http://schemas.microsoft.com/office/drawing/2014/main" id="{94EA9A6C-FC8E-4D85-AAEE-A8B5ECB70626}"/>
+                </a:ext>
+              </a:extLst>
+            </p:cNvPr>
+            <p:cNvCxnSpPr>
+              <a:cxnSpLocks/>
+            </p:cNvCxnSpPr>
+            <p:nvPr/>
+          </p:nvCxnSpPr>
+          <p:spPr>
+            <a:xfrm flipV="1">
+              <a:off x="5206301" y="2653132"/>
+              <a:ext cx="1730832" cy="332822"/>
+            </a:xfrm>
+            <a:prstGeom prst="bentConnector3">
+              <a:avLst>
+                <a:gd name="adj1" fmla="val 100079"/>
+              </a:avLst>
+            </a:prstGeom>
+            <a:ln w="28575">
+              <a:solidFill>
+                <a:schemeClr val="tx1"/>
+              </a:solidFill>
+              <a:tailEnd type="triangle"/>
+            </a:ln>
+          </p:spPr>
+          <p:style>
+            <a:lnRef idx="1">
+              <a:schemeClr val="accent1"/>
+            </a:lnRef>
+            <a:fillRef idx="0">
+              <a:schemeClr val="accent1"/>
+            </a:fillRef>
+            <a:effectRef idx="0">
+              <a:schemeClr val="accent1"/>
+            </a:effectRef>
+            <a:fontRef idx="minor">
+              <a:schemeClr val="tx1"/>
+            </a:fontRef>
+          </p:style>
+        </p:cxnSp>
+        <p:sp>
+          <p:nvSpPr>
+            <p:cNvPr id="95" name="椭圆 94">
+              <a:extLst>
+                <a:ext uri="{FF2B5EF4-FFF2-40B4-BE49-F238E27FC236}">
+                  <a16:creationId xmlns:a16="http://schemas.microsoft.com/office/drawing/2014/main" id="{0678F5DA-9CA9-44CE-AC5E-179035A5A99D}"/>
+                </a:ext>
+              </a:extLst>
+            </p:cNvPr>
+            <p:cNvSpPr/>
+            <p:nvPr/>
+          </p:nvSpPr>
+          <p:spPr>
+            <a:xfrm>
+              <a:off x="5106217" y="2924156"/>
+              <a:ext cx="136566" cy="136566"/>
+            </a:xfrm>
+            <a:prstGeom prst="ellipse">
+              <a:avLst/>
+            </a:prstGeom>
+            <a:solidFill>
+              <a:schemeClr val="tx1"/>
+            </a:solidFill>
+            <a:ln>
+              <a:noFill/>
+            </a:ln>
+          </p:spPr>
+          <p:style>
+            <a:lnRef idx="2">
+              <a:schemeClr val="accent1">
+                <a:shade val="50000"/>
+              </a:schemeClr>
+            </a:lnRef>
+            <a:fillRef idx="1">
+              <a:schemeClr val="accent1"/>
+            </a:fillRef>
+            <a:effectRef idx="0">
+              <a:schemeClr val="accent1"/>
+            </a:effectRef>
+            <a:fontRef idx="minor">
+              <a:schemeClr val="lt1"/>
+            </a:fontRef>
+          </p:style>
+          <p:txBody>
+            <a:bodyPr rtlCol="0" anchor="ctr"/>
+            <a:lstStyle/>
+            <a:p>
+              <a:pPr algn="ctr"/>
+              <a:endParaRPr lang="zh-CN" altLang="en-US"/>
+            </a:p>
+          </p:txBody>
+        </p:sp>
+      </p:grpSp>
+      <p:grpSp>
+        <p:nvGrpSpPr>
+          <p:cNvPr id="41" name="组合 40">
+            <a:extLst>
+              <a:ext uri="{FF2B5EF4-FFF2-40B4-BE49-F238E27FC236}">
+                <a16:creationId xmlns:a16="http://schemas.microsoft.com/office/drawing/2014/main" id="{22754FBB-A294-4B1E-AA34-B48FE1D5315D}"/>
+              </a:ext>
+            </a:extLst>
+          </p:cNvPr>
+          <p:cNvGrpSpPr/>
+          <p:nvPr/>
+        </p:nvGrpSpPr>
+        <p:grpSpPr>
+          <a:xfrm>
+            <a:off x="2152334" y="2670155"/>
+            <a:ext cx="5045540" cy="1076701"/>
+            <a:chOff x="2152334" y="2670155"/>
+            <a:chExt cx="5045540" cy="1076701"/>
+          </a:xfrm>
+        </p:grpSpPr>
+        <p:cxnSp>
+          <p:nvCxnSpPr>
+            <p:cNvPr id="117" name="连接符: 肘形 116">
+              <a:extLst>
+                <a:ext uri="{FF2B5EF4-FFF2-40B4-BE49-F238E27FC236}">
+                  <a16:creationId xmlns:a16="http://schemas.microsoft.com/office/drawing/2014/main" id="{31748DCF-3B13-4366-9E26-56E8A75CBD6A}"/>
+                </a:ext>
+              </a:extLst>
+            </p:cNvPr>
+            <p:cNvCxnSpPr>
+              <a:cxnSpLocks/>
+              <a:endCxn id="12" idx="2"/>
+            </p:cNvCxnSpPr>
+            <p:nvPr/>
+          </p:nvCxnSpPr>
+          <p:spPr>
+            <a:xfrm flipV="1">
+              <a:off x="2240437" y="2670155"/>
+              <a:ext cx="4957437" cy="1003128"/>
+            </a:xfrm>
+            <a:prstGeom prst="bentConnector2">
+              <a:avLst/>
+            </a:prstGeom>
+            <a:ln w="28575">
+              <a:solidFill>
+                <a:schemeClr val="tx1"/>
+              </a:solidFill>
+              <a:tailEnd type="triangle"/>
+            </a:ln>
+          </p:spPr>
+          <p:style>
+            <a:lnRef idx="1">
+              <a:schemeClr val="accent1"/>
+            </a:lnRef>
+            <a:fillRef idx="0">
+              <a:schemeClr val="accent1"/>
+            </a:fillRef>
+            <a:effectRef idx="0">
+              <a:schemeClr val="accent1"/>
+            </a:effectRef>
+            <a:fontRef idx="minor">
+              <a:schemeClr val="tx1"/>
+            </a:fontRef>
+          </p:style>
+        </p:cxnSp>
+        <p:sp>
+          <p:nvSpPr>
+            <p:cNvPr id="96" name="椭圆 95">
+              <a:extLst>
+                <a:ext uri="{FF2B5EF4-FFF2-40B4-BE49-F238E27FC236}">
+                  <a16:creationId xmlns:a16="http://schemas.microsoft.com/office/drawing/2014/main" id="{9500991A-B2B5-4A3E-B71B-B7BBA461B621}"/>
+                </a:ext>
+              </a:extLst>
+            </p:cNvPr>
+            <p:cNvSpPr/>
+            <p:nvPr/>
+          </p:nvSpPr>
+          <p:spPr>
+            <a:xfrm>
+              <a:off x="2152334" y="3610290"/>
+              <a:ext cx="136566" cy="136566"/>
+            </a:xfrm>
+            <a:prstGeom prst="ellipse">
+              <a:avLst/>
+            </a:prstGeom>
+            <a:solidFill>
+              <a:schemeClr val="tx1"/>
+            </a:solidFill>
+            <a:ln>
+              <a:noFill/>
+            </a:ln>
+          </p:spPr>
+          <p:style>
+            <a:lnRef idx="2">
+              <a:schemeClr val="accent1">
+                <a:shade val="50000"/>
+              </a:schemeClr>
+            </a:lnRef>
+            <a:fillRef idx="1">
+              <a:schemeClr val="accent1"/>
+            </a:fillRef>
+            <a:effectRef idx="0">
+              <a:schemeClr val="accent1"/>
+            </a:effectRef>
+            <a:fontRef idx="minor">
+              <a:schemeClr val="lt1"/>
+            </a:fontRef>
+          </p:style>
+          <p:txBody>
+            <a:bodyPr rtlCol="0" anchor="ctr"/>
+            <a:lstStyle/>
+            <a:p>
+              <a:pPr algn="ctr"/>
+              <a:endParaRPr lang="zh-CN" altLang="en-US"/>
+            </a:p>
+          </p:txBody>
+        </p:sp>
+      </p:grpSp>
+      <p:grpSp>
+        <p:nvGrpSpPr>
+          <p:cNvPr id="40" name="组合 39">
+            <a:extLst>
+              <a:ext uri="{FF2B5EF4-FFF2-40B4-BE49-F238E27FC236}">
+                <a16:creationId xmlns:a16="http://schemas.microsoft.com/office/drawing/2014/main" id="{C10FCB00-E024-4873-97DA-307C8459DF6A}"/>
+              </a:ext>
+            </a:extLst>
+          </p:cNvPr>
+          <p:cNvGrpSpPr/>
+          <p:nvPr/>
+        </p:nvGrpSpPr>
+        <p:grpSpPr>
+          <a:xfrm>
+            <a:off x="2268005" y="226016"/>
+            <a:ext cx="6220796" cy="2757705"/>
+            <a:chOff x="2268005" y="226016"/>
+            <a:chExt cx="6220796" cy="2757705"/>
+          </a:xfrm>
+        </p:grpSpPr>
+        <p:cxnSp>
+          <p:nvCxnSpPr>
+            <p:cNvPr id="160" name="连接符: 肘形 159">
+              <a:extLst>
+                <a:ext uri="{FF2B5EF4-FFF2-40B4-BE49-F238E27FC236}">
+                  <a16:creationId xmlns:a16="http://schemas.microsoft.com/office/drawing/2014/main" id="{54F86B02-B007-4E06-B70C-81CB96B86269}"/>
+                </a:ext>
+              </a:extLst>
+            </p:cNvPr>
+            <p:cNvCxnSpPr>
+              <a:cxnSpLocks/>
+            </p:cNvCxnSpPr>
+            <p:nvPr/>
+          </p:nvCxnSpPr>
+          <p:spPr>
+            <a:xfrm rot="10800000" flipV="1">
+              <a:off x="2268005" y="236588"/>
+              <a:ext cx="6220795" cy="2747133"/>
+            </a:xfrm>
+            <a:prstGeom prst="bentConnector3">
+              <a:avLst>
+                <a:gd name="adj1" fmla="val 100018"/>
+              </a:avLst>
+            </a:prstGeom>
+            <a:ln w="28575">
+              <a:solidFill>
+                <a:schemeClr val="tx1"/>
+              </a:solidFill>
+              <a:tailEnd type="triangle"/>
+            </a:ln>
+          </p:spPr>
+          <p:style>
+            <a:lnRef idx="1">
+              <a:schemeClr val="accent1"/>
+            </a:lnRef>
+            <a:fillRef idx="0">
+              <a:schemeClr val="accent1"/>
+            </a:fillRef>
+            <a:effectRef idx="0">
+              <a:schemeClr val="accent1"/>
+            </a:effectRef>
+            <a:fontRef idx="minor">
+              <a:schemeClr val="tx1"/>
+            </a:fontRef>
+          </p:style>
+        </p:cxnSp>
+        <p:grpSp>
+          <p:nvGrpSpPr>
+            <p:cNvPr id="39" name="组合 38">
+              <a:extLst>
+                <a:ext uri="{FF2B5EF4-FFF2-40B4-BE49-F238E27FC236}">
+                  <a16:creationId xmlns:a16="http://schemas.microsoft.com/office/drawing/2014/main" id="{67270E1C-5556-450F-AEEE-1CBB4F6E6F7E}"/>
+                </a:ext>
+              </a:extLst>
+            </p:cNvPr>
+            <p:cNvGrpSpPr/>
+            <p:nvPr/>
+          </p:nvGrpSpPr>
+          <p:grpSpPr>
+            <a:xfrm>
+              <a:off x="7621208" y="226016"/>
+              <a:ext cx="867593" cy="2224990"/>
+              <a:chOff x="7621208" y="226016"/>
+              <a:chExt cx="867593" cy="2224990"/>
+            </a:xfrm>
+          </p:grpSpPr>
+          <p:cxnSp>
+            <p:nvCxnSpPr>
+              <p:cNvPr id="167" name="连接符: 肘形 166">
+                <a:extLst>
+                  <a:ext uri="{FF2B5EF4-FFF2-40B4-BE49-F238E27FC236}">
+                    <a16:creationId xmlns:a16="http://schemas.microsoft.com/office/drawing/2014/main" id="{73880740-50AC-4990-960C-7F1C131B8D80}"/>
+                  </a:ext>
+                </a:extLst>
+              </p:cNvPr>
+              <p:cNvCxnSpPr>
+                <a:cxnSpLocks/>
+              </p:cNvCxnSpPr>
+              <p:nvPr/>
+            </p:nvCxnSpPr>
+            <p:spPr>
+              <a:xfrm rot="5400000" flipH="1" flipV="1">
+                <a:off x="7004112" y="911395"/>
+                <a:ext cx="2170068" cy="799310"/>
+              </a:xfrm>
+              <a:prstGeom prst="bentConnector3">
+                <a:avLst>
+                  <a:gd name="adj1" fmla="val 606"/>
+                </a:avLst>
+              </a:prstGeom>
+              <a:ln w="28575">
+                <a:solidFill>
+                  <a:schemeClr val="tx1"/>
+                </a:solidFill>
+              </a:ln>
+            </p:spPr>
+            <p:style>
+              <a:lnRef idx="1">
+                <a:schemeClr val="accent1"/>
+              </a:lnRef>
+              <a:fillRef idx="0">
+                <a:schemeClr val="accent1"/>
+              </a:fillRef>
+              <a:effectRef idx="0">
+                <a:schemeClr val="accent1"/>
+              </a:effectRef>
+              <a:fontRef idx="minor">
+                <a:schemeClr val="tx1"/>
+              </a:fontRef>
+            </p:style>
+          </p:cxnSp>
+          <p:sp>
+            <p:nvSpPr>
+              <p:cNvPr id="97" name="椭圆 96">
+                <a:extLst>
+                  <a:ext uri="{FF2B5EF4-FFF2-40B4-BE49-F238E27FC236}">
+                    <a16:creationId xmlns:a16="http://schemas.microsoft.com/office/drawing/2014/main" id="{3531DBD7-104A-438F-A77E-35BB8DD8F346}"/>
+                  </a:ext>
+                </a:extLst>
+              </p:cNvPr>
+              <p:cNvSpPr/>
+              <p:nvPr/>
+            </p:nvSpPr>
+            <p:spPr>
+              <a:xfrm>
+                <a:off x="7621208" y="2314440"/>
+                <a:ext cx="136566" cy="136566"/>
+              </a:xfrm>
+              <a:prstGeom prst="ellipse">
+                <a:avLst/>
+              </a:prstGeom>
+              <a:solidFill>
+                <a:schemeClr val="tx1"/>
+              </a:solidFill>
+              <a:ln>
+                <a:noFill/>
+              </a:ln>
+            </p:spPr>
+            <p:style>
+              <a:lnRef idx="2">
+                <a:schemeClr val="accent1">
+                  <a:shade val="50000"/>
+                </a:schemeClr>
+              </a:lnRef>
+              <a:fillRef idx="1">
+                <a:schemeClr val="accent1"/>
+              </a:fillRef>
+              <a:effectRef idx="0">
+                <a:schemeClr val="accent1"/>
+              </a:effectRef>
+              <a:fontRef idx="minor">
+                <a:schemeClr val="lt1"/>
+              </a:fontRef>
+            </p:style>
+            <p:txBody>
+              <a:bodyPr rtlCol="0" anchor="ctr"/>
+              <a:lstStyle/>
+              <a:p>
+                <a:pPr algn="ctr"/>
+                <a:endParaRPr lang="zh-CN" altLang="en-US"/>
+              </a:p>
+            </p:txBody>
+          </p:sp>
+        </p:grpSp>
+      </p:grpSp>
+      <p:grpSp>
+        <p:nvGrpSpPr>
+          <p:cNvPr id="43" name="组合 42">
+            <a:extLst>
+              <a:ext uri="{FF2B5EF4-FFF2-40B4-BE49-F238E27FC236}">
+                <a16:creationId xmlns:a16="http://schemas.microsoft.com/office/drawing/2014/main" id="{29009D70-2A44-498D-8E2B-725E10E01003}"/>
+              </a:ext>
+            </a:extLst>
+          </p:cNvPr>
+          <p:cNvGrpSpPr/>
+          <p:nvPr/>
+        </p:nvGrpSpPr>
+        <p:grpSpPr>
+          <a:xfrm>
+            <a:off x="5106185" y="2673760"/>
+            <a:ext cx="2577368" cy="2652180"/>
+            <a:chOff x="5106185" y="2673760"/>
+            <a:chExt cx="2577368" cy="2652180"/>
+          </a:xfrm>
+        </p:grpSpPr>
+        <p:cxnSp>
+          <p:nvCxnSpPr>
+            <p:cNvPr id="91" name="连接符: 肘形 90">
+              <a:extLst>
+                <a:ext uri="{FF2B5EF4-FFF2-40B4-BE49-F238E27FC236}">
+                  <a16:creationId xmlns:a16="http://schemas.microsoft.com/office/drawing/2014/main" id="{191AC61F-CFCB-4C04-90CD-DEF16AAE5974}"/>
+                </a:ext>
+              </a:extLst>
+            </p:cNvPr>
+            <p:cNvCxnSpPr>
+              <a:cxnSpLocks/>
+            </p:cNvCxnSpPr>
+            <p:nvPr/>
+          </p:nvCxnSpPr>
+          <p:spPr>
+            <a:xfrm rot="5400000" flipH="1" flipV="1">
+              <a:off x="5158353" y="2729631"/>
+              <a:ext cx="2581071" cy="2469329"/>
+            </a:xfrm>
+            <a:prstGeom prst="bentConnector3">
+              <a:avLst>
+                <a:gd name="adj1" fmla="val 58"/>
+              </a:avLst>
+            </a:prstGeom>
+            <a:ln w="28575">
+              <a:solidFill>
+                <a:schemeClr val="tx1"/>
+              </a:solidFill>
+              <a:tailEnd type="triangle"/>
+            </a:ln>
+          </p:spPr>
+          <p:style>
+            <a:lnRef idx="1">
+              <a:schemeClr val="accent1"/>
+            </a:lnRef>
+            <a:fillRef idx="0">
+              <a:schemeClr val="accent1"/>
+            </a:fillRef>
+            <a:effectRef idx="0">
+              <a:schemeClr val="accent1"/>
+            </a:effectRef>
+            <a:fontRef idx="minor">
+              <a:schemeClr val="tx1"/>
+            </a:fontRef>
+          </p:style>
+        </p:cxnSp>
+        <p:sp>
+          <p:nvSpPr>
+            <p:cNvPr id="101" name="椭圆 100">
+              <a:extLst>
+                <a:ext uri="{FF2B5EF4-FFF2-40B4-BE49-F238E27FC236}">
+                  <a16:creationId xmlns:a16="http://schemas.microsoft.com/office/drawing/2014/main" id="{6FBE5D43-7F33-476E-A1A6-3F16D7E3170E}"/>
+                </a:ext>
+              </a:extLst>
+            </p:cNvPr>
+            <p:cNvSpPr/>
+            <p:nvPr/>
+          </p:nvSpPr>
+          <p:spPr>
+            <a:xfrm>
+              <a:off x="5106185" y="5189374"/>
+              <a:ext cx="136566" cy="136566"/>
+            </a:xfrm>
+            <a:prstGeom prst="ellipse">
+              <a:avLst/>
+            </a:prstGeom>
+            <a:solidFill>
+              <a:schemeClr val="tx1"/>
+            </a:solidFill>
+            <a:ln>
+              <a:noFill/>
+            </a:ln>
+          </p:spPr>
+          <p:style>
+            <a:lnRef idx="2">
+              <a:schemeClr val="accent1">
+                <a:shade val="50000"/>
+              </a:schemeClr>
+            </a:lnRef>
+            <a:fillRef idx="1">
+              <a:schemeClr val="accent1"/>
+            </a:fillRef>
+            <a:effectRef idx="0">
+              <a:schemeClr val="accent1"/>
+            </a:effectRef>
+            <a:fontRef idx="minor">
+              <a:schemeClr val="lt1"/>
+            </a:fontRef>
+          </p:style>
+          <p:txBody>
+            <a:bodyPr rtlCol="0" anchor="ctr"/>
+            <a:lstStyle/>
+            <a:p>
+              <a:pPr algn="ctr"/>
+              <a:endParaRPr lang="zh-CN" altLang="en-US"/>
+            </a:p>
+          </p:txBody>
+        </p:sp>
+      </p:grpSp>
+      <p:sp>
+        <p:nvSpPr>
+          <p:cNvPr id="110" name="椭圆 109">
+            <a:extLst>
+              <a:ext uri="{FF2B5EF4-FFF2-40B4-BE49-F238E27FC236}">
+                <a16:creationId xmlns:a16="http://schemas.microsoft.com/office/drawing/2014/main" id="{72FB9ABD-4C6C-419F-9636-318220D43732}"/>
+              </a:ext>
+            </a:extLst>
+          </p:cNvPr>
+          <p:cNvSpPr/>
+          <p:nvPr/>
+        </p:nvSpPr>
+        <p:spPr>
+          <a:xfrm>
+            <a:off x="5123546" y="5714700"/>
+            <a:ext cx="136566" cy="136566"/>
+          </a:xfrm>
+          <a:prstGeom prst="ellipse">
+            <a:avLst/>
+          </a:prstGeom>
+          <a:solidFill>
+            <a:schemeClr val="tx1"/>
+          </a:solidFill>
+          <a:ln>
+            <a:noFill/>
+          </a:ln>
+        </p:spPr>
+        <p:style>
+          <a:lnRef idx="2">
+            <a:schemeClr val="accent1">
+              <a:shade val="50000"/>
+            </a:schemeClr>
+          </a:lnRef>
+          <a:fillRef idx="1">
+            <a:schemeClr val="accent1"/>
+          </a:fillRef>
+          <a:effectRef idx="0">
+            <a:schemeClr val="accent1"/>
+          </a:effectRef>
+          <a:fontRef idx="minor">
+            <a:schemeClr val="lt1"/>
+          </a:fontRef>
+        </p:style>
+        <p:txBody>
+          <a:bodyPr rtlCol="0" anchor="ctr"/>
+          <a:lstStyle/>
+          <a:p>
+            <a:pPr algn="ctr"/>
+            <a:endParaRPr lang="zh-CN" altLang="en-US"/>
           </a:p>
         </p:txBody>
       </p:sp>
@@ -9734,1237 +10270,6 @@
           <a:chExt cx="0" cy="0"/>
         </a:xfrm>
       </p:grpSpPr>
-      <p:grpSp>
-        <p:nvGrpSpPr>
-          <p:cNvPr id="90" name="组合 89">
-            <a:extLst>
-              <a:ext uri="{FF2B5EF4-FFF2-40B4-BE49-F238E27FC236}">
-                <a16:creationId xmlns:a16="http://schemas.microsoft.com/office/drawing/2014/main" id="{180C8327-5556-4827-BC51-448EB40B6FFE}"/>
-              </a:ext>
-            </a:extLst>
-          </p:cNvPr>
-          <p:cNvGrpSpPr/>
-          <p:nvPr/>
-        </p:nvGrpSpPr>
-        <p:grpSpPr>
-          <a:xfrm>
-            <a:off x="3605794" y="1597384"/>
-            <a:ext cx="1358920" cy="725432"/>
-            <a:chOff x="6534909" y="436632"/>
-            <a:chExt cx="1358920" cy="725432"/>
-          </a:xfrm>
-        </p:grpSpPr>
-        <p:sp>
-          <p:nvSpPr>
-            <p:cNvPr id="60" name="矩形 59">
-              <a:extLst>
-                <a:ext uri="{FF2B5EF4-FFF2-40B4-BE49-F238E27FC236}">
-                  <a16:creationId xmlns:a16="http://schemas.microsoft.com/office/drawing/2014/main" id="{FFA6BFC9-12DE-47EF-A55F-C827003FA7CB}"/>
-                </a:ext>
-              </a:extLst>
-            </p:cNvPr>
-            <p:cNvSpPr/>
-            <p:nvPr/>
-          </p:nvSpPr>
-          <p:spPr>
-            <a:xfrm>
-              <a:off x="6534909" y="436634"/>
-              <a:ext cx="1358920" cy="725430"/>
-            </a:xfrm>
-            <a:prstGeom prst="rect">
-              <a:avLst/>
-            </a:prstGeom>
-            <a:noFill/>
-            <a:ln w="28575">
-              <a:solidFill>
-                <a:schemeClr val="tx1"/>
-              </a:solidFill>
-            </a:ln>
-          </p:spPr>
-          <p:style>
-            <a:lnRef idx="2">
-              <a:schemeClr val="accent1">
-                <a:shade val="50000"/>
-              </a:schemeClr>
-            </a:lnRef>
-            <a:fillRef idx="1">
-              <a:schemeClr val="accent1"/>
-            </a:fillRef>
-            <a:effectRef idx="0">
-              <a:schemeClr val="accent1"/>
-            </a:effectRef>
-            <a:fontRef idx="minor">
-              <a:schemeClr val="lt1"/>
-            </a:fontRef>
-          </p:style>
-          <p:txBody>
-            <a:bodyPr rtlCol="0" anchor="ctr"/>
-            <a:lstStyle/>
-            <a:p>
-              <a:pPr algn="ctr"/>
-              <a:endParaRPr lang="zh-CN" altLang="en-US"/>
-            </a:p>
-          </p:txBody>
-        </p:sp>
-        <p:sp>
-          <p:nvSpPr>
-            <p:cNvPr id="61" name="文本框 60">
-              <a:extLst>
-                <a:ext uri="{FF2B5EF4-FFF2-40B4-BE49-F238E27FC236}">
-                  <a16:creationId xmlns:a16="http://schemas.microsoft.com/office/drawing/2014/main" id="{F0FE486C-28FF-4F44-A40B-4133A5036635}"/>
-                </a:ext>
-              </a:extLst>
-            </p:cNvPr>
-            <p:cNvSpPr txBox="1"/>
-            <p:nvPr/>
-          </p:nvSpPr>
-          <p:spPr>
-            <a:xfrm>
-              <a:off x="6560985" y="436632"/>
-              <a:ext cx="1306768" cy="369332"/>
-            </a:xfrm>
-            <a:prstGeom prst="rect">
-              <a:avLst/>
-            </a:prstGeom>
-            <a:noFill/>
-          </p:spPr>
-          <p:txBody>
-            <a:bodyPr wrap="none" rtlCol="0">
-              <a:spAutoFit/>
-            </a:bodyPr>
-            <a:lstStyle/>
-            <a:p>
-              <a:r>
-                <a:rPr lang="en-US" altLang="zh-CN" b="1" dirty="0">
-                  <a:latin typeface="Times New Roman" panose="02020603050405020304" pitchFamily="18" charset="0"/>
-                  <a:cs typeface="Times New Roman" panose="02020603050405020304" pitchFamily="18" charset="0"/>
-                </a:rPr>
-                <a:t>Cell Object</a:t>
-              </a:r>
-              <a:endParaRPr lang="zh-CN" altLang="en-US" b="1" dirty="0">
-                <a:latin typeface="Times New Roman" panose="02020603050405020304" pitchFamily="18" charset="0"/>
-                <a:ea typeface="宋体" panose="02010600030101010101" pitchFamily="2" charset="-122"/>
-                <a:cs typeface="Times New Roman" panose="02020603050405020304" pitchFamily="18" charset="0"/>
-              </a:endParaRPr>
-            </a:p>
-          </p:txBody>
-        </p:sp>
-        <p:sp>
-          <p:nvSpPr>
-            <p:cNvPr id="62" name="文本框 61">
-              <a:extLst>
-                <a:ext uri="{FF2B5EF4-FFF2-40B4-BE49-F238E27FC236}">
-                  <a16:creationId xmlns:a16="http://schemas.microsoft.com/office/drawing/2014/main" id="{0CEAF381-0094-4EE6-BCB2-D39081DBCCA8}"/>
-                </a:ext>
-              </a:extLst>
-            </p:cNvPr>
-            <p:cNvSpPr txBox="1"/>
-            <p:nvPr/>
-          </p:nvSpPr>
-          <p:spPr>
-            <a:xfrm>
-              <a:off x="6691629" y="753659"/>
-              <a:ext cx="1045479" cy="369332"/>
-            </a:xfrm>
-            <a:prstGeom prst="rect">
-              <a:avLst/>
-            </a:prstGeom>
-            <a:noFill/>
-          </p:spPr>
-          <p:txBody>
-            <a:bodyPr wrap="none" rtlCol="0">
-              <a:spAutoFit/>
-            </a:bodyPr>
-            <a:lstStyle/>
-            <a:p>
-              <a:r>
-                <a:rPr lang="en-US" altLang="zh-CN" dirty="0">
-                  <a:latin typeface="Times New Roman" panose="02020603050405020304" pitchFamily="18" charset="0"/>
-                  <a:cs typeface="Times New Roman" panose="02020603050405020304" pitchFamily="18" charset="0"/>
-                </a:rPr>
-                <a:t>value=10</a:t>
-              </a:r>
-              <a:endParaRPr lang="zh-CN" altLang="en-US" dirty="0">
-                <a:latin typeface="Times New Roman" panose="02020603050405020304" pitchFamily="18" charset="0"/>
-                <a:cs typeface="Times New Roman" panose="02020603050405020304" pitchFamily="18" charset="0"/>
-              </a:endParaRPr>
-            </a:p>
-          </p:txBody>
-        </p:sp>
-      </p:grpSp>
-      <p:grpSp>
-        <p:nvGrpSpPr>
-          <p:cNvPr id="76" name="组合 75">
-            <a:extLst>
-              <a:ext uri="{FF2B5EF4-FFF2-40B4-BE49-F238E27FC236}">
-                <a16:creationId xmlns:a16="http://schemas.microsoft.com/office/drawing/2014/main" id="{881337DD-E1D6-479C-9DC2-D3CFF48F1098}"/>
-              </a:ext>
-            </a:extLst>
-          </p:cNvPr>
-          <p:cNvGrpSpPr/>
-          <p:nvPr/>
-        </p:nvGrpSpPr>
-        <p:grpSpPr>
-          <a:xfrm>
-            <a:off x="319146" y="341395"/>
-            <a:ext cx="2555118" cy="1335006"/>
-            <a:chOff x="1720805" y="417595"/>
-            <a:chExt cx="2555118" cy="1335006"/>
-          </a:xfrm>
-        </p:grpSpPr>
-        <p:grpSp>
-          <p:nvGrpSpPr>
-            <p:cNvPr id="23" name="组合 22">
-              <a:extLst>
-                <a:ext uri="{FF2B5EF4-FFF2-40B4-BE49-F238E27FC236}">
-                  <a16:creationId xmlns:a16="http://schemas.microsoft.com/office/drawing/2014/main" id="{2E4FB221-B9F8-4C31-904C-54AE54C28F0C}"/>
-                </a:ext>
-              </a:extLst>
-            </p:cNvPr>
-            <p:cNvGrpSpPr/>
-            <p:nvPr/>
-          </p:nvGrpSpPr>
-          <p:grpSpPr>
-            <a:xfrm>
-              <a:off x="1720805" y="417595"/>
-              <a:ext cx="2555118" cy="1335006"/>
-              <a:chOff x="2025605" y="931945"/>
-              <a:chExt cx="2555118" cy="1335006"/>
-            </a:xfrm>
-          </p:grpSpPr>
-          <p:grpSp>
-            <p:nvGrpSpPr>
-              <p:cNvPr id="8" name="组合 7">
-                <a:extLst>
-                  <a:ext uri="{FF2B5EF4-FFF2-40B4-BE49-F238E27FC236}">
-                    <a16:creationId xmlns:a16="http://schemas.microsoft.com/office/drawing/2014/main" id="{3DAE7417-5239-427B-A18E-277649525350}"/>
-                  </a:ext>
-                </a:extLst>
-              </p:cNvPr>
-              <p:cNvGrpSpPr/>
-              <p:nvPr/>
-            </p:nvGrpSpPr>
-            <p:grpSpPr>
-              <a:xfrm>
-                <a:off x="2025605" y="931945"/>
-                <a:ext cx="2555118" cy="1335006"/>
-                <a:chOff x="3041643" y="523621"/>
-                <a:chExt cx="2555118" cy="1335006"/>
-              </a:xfrm>
-            </p:grpSpPr>
-            <p:cxnSp>
-              <p:nvCxnSpPr>
-                <p:cNvPr id="9" name="直接连接符 8">
-                  <a:extLst>
-                    <a:ext uri="{FF2B5EF4-FFF2-40B4-BE49-F238E27FC236}">
-                      <a16:creationId xmlns:a16="http://schemas.microsoft.com/office/drawing/2014/main" id="{6D0E9870-E8F8-4FB7-A6A0-2F3403617611}"/>
-                    </a:ext>
-                  </a:extLst>
-                </p:cNvPr>
-                <p:cNvCxnSpPr/>
-                <p:nvPr/>
-              </p:nvCxnSpPr>
-              <p:spPr>
-                <a:xfrm>
-                  <a:off x="3041643" y="1375158"/>
-                  <a:ext cx="2555118" cy="0"/>
-                </a:xfrm>
-                <a:prstGeom prst="line">
-                  <a:avLst/>
-                </a:prstGeom>
-                <a:ln w="28575">
-                  <a:solidFill>
-                    <a:schemeClr val="tx1"/>
-                  </a:solidFill>
-                </a:ln>
-              </p:spPr>
-              <p:style>
-                <a:lnRef idx="1">
-                  <a:schemeClr val="accent1"/>
-                </a:lnRef>
-                <a:fillRef idx="0">
-                  <a:schemeClr val="accent1"/>
-                </a:fillRef>
-                <a:effectRef idx="0">
-                  <a:schemeClr val="accent1"/>
-                </a:effectRef>
-                <a:fontRef idx="minor">
-                  <a:schemeClr val="tx1"/>
-                </a:fontRef>
-              </p:style>
-            </p:cxnSp>
-            <p:grpSp>
-              <p:nvGrpSpPr>
-                <p:cNvPr id="10" name="组合 9">
-                  <a:extLst>
-                    <a:ext uri="{FF2B5EF4-FFF2-40B4-BE49-F238E27FC236}">
-                      <a16:creationId xmlns:a16="http://schemas.microsoft.com/office/drawing/2014/main" id="{F87F037B-C92F-406F-B686-D7A520DA4A19}"/>
-                    </a:ext>
-                  </a:extLst>
-                </p:cNvPr>
-                <p:cNvGrpSpPr/>
-                <p:nvPr/>
-              </p:nvGrpSpPr>
-              <p:grpSpPr>
-                <a:xfrm>
-                  <a:off x="3041643" y="523621"/>
-                  <a:ext cx="2555118" cy="1335006"/>
-                  <a:chOff x="3041643" y="523621"/>
-                  <a:chExt cx="2555118" cy="1335006"/>
-                </a:xfrm>
-              </p:grpSpPr>
-              <p:sp>
-                <p:nvSpPr>
-                  <p:cNvPr id="11" name="矩形 10">
-                    <a:extLst>
-                      <a:ext uri="{FF2B5EF4-FFF2-40B4-BE49-F238E27FC236}">
-                        <a16:creationId xmlns:a16="http://schemas.microsoft.com/office/drawing/2014/main" id="{84FA0DD5-C788-46BC-924E-F9E58E7EB76D}"/>
-                      </a:ext>
-                    </a:extLst>
-                  </p:cNvPr>
-                  <p:cNvSpPr/>
-                  <p:nvPr/>
-                </p:nvSpPr>
-                <p:spPr>
-                  <a:xfrm>
-                    <a:off x="3041643" y="523621"/>
-                    <a:ext cx="2555118" cy="1335006"/>
-                  </a:xfrm>
-                  <a:prstGeom prst="rect">
-                    <a:avLst/>
-                  </a:prstGeom>
-                  <a:noFill/>
-                  <a:ln w="28575">
-                    <a:solidFill>
-                      <a:schemeClr val="tx1"/>
-                    </a:solidFill>
-                  </a:ln>
-                </p:spPr>
-                <p:style>
-                  <a:lnRef idx="2">
-                    <a:schemeClr val="accent1">
-                      <a:shade val="50000"/>
-                    </a:schemeClr>
-                  </a:lnRef>
-                  <a:fillRef idx="1">
-                    <a:schemeClr val="accent1"/>
-                  </a:fillRef>
-                  <a:effectRef idx="0">
-                    <a:schemeClr val="accent1"/>
-                  </a:effectRef>
-                  <a:fontRef idx="minor">
-                    <a:schemeClr val="lt1"/>
-                  </a:fontRef>
-                </p:style>
-                <p:txBody>
-                  <a:bodyPr rtlCol="0" anchor="ctr"/>
-                  <a:lstStyle/>
-                  <a:p>
-                    <a:pPr algn="ctr"/>
-                    <a:endParaRPr lang="zh-CN" altLang="en-US" dirty="0"/>
-                  </a:p>
-                </p:txBody>
-              </p:sp>
-              <p:sp>
-                <p:nvSpPr>
-                  <p:cNvPr id="12" name="文本框 11">
-                    <a:extLst>
-                      <a:ext uri="{FF2B5EF4-FFF2-40B4-BE49-F238E27FC236}">
-                        <a16:creationId xmlns:a16="http://schemas.microsoft.com/office/drawing/2014/main" id="{4C4BDEE7-0CC9-4D60-8860-E57E6A5F0035}"/>
-                      </a:ext>
-                    </a:extLst>
-                  </p:cNvPr>
-                  <p:cNvSpPr txBox="1"/>
-                  <p:nvPr/>
-                </p:nvSpPr>
-                <p:spPr>
-                  <a:xfrm>
-                    <a:off x="3100575" y="593470"/>
-                    <a:ext cx="1576072" cy="369332"/>
-                  </a:xfrm>
-                  <a:prstGeom prst="rect">
-                    <a:avLst/>
-                  </a:prstGeom>
-                  <a:noFill/>
-                </p:spPr>
-                <p:txBody>
-                  <a:bodyPr wrap="none" rtlCol="0">
-                    <a:spAutoFit/>
-                  </a:bodyPr>
-                  <a:lstStyle/>
-                  <a:p>
-                    <a:r>
-                      <a:rPr lang="en-US" altLang="zh-CN" b="1" dirty="0">
-                        <a:latin typeface="Times New Roman" panose="02020603050405020304" pitchFamily="18" charset="0"/>
-                        <a:cs typeface="Times New Roman" panose="02020603050405020304" pitchFamily="18" charset="0"/>
-                      </a:rPr>
-                      <a:t>Frame </a:t>
-                    </a:r>
-                    <a:r>
-                      <a:rPr lang="en-US" altLang="zh-CN" b="1" dirty="0">
-                        <a:latin typeface="Times New Roman" panose="02020603050405020304" pitchFamily="18" charset="0"/>
-                        <a:ea typeface="宋体" panose="02010600030101010101" pitchFamily="2" charset="-122"/>
-                        <a:cs typeface="Times New Roman" panose="02020603050405020304" pitchFamily="18" charset="0"/>
-                      </a:rPr>
-                      <a:t>outer()</a:t>
-                    </a:r>
-                    <a:endParaRPr lang="zh-CN" altLang="en-US" b="1" dirty="0">
-                      <a:latin typeface="Times New Roman" panose="02020603050405020304" pitchFamily="18" charset="0"/>
-                      <a:ea typeface="宋体" panose="02010600030101010101" pitchFamily="2" charset="-122"/>
-                      <a:cs typeface="Times New Roman" panose="02020603050405020304" pitchFamily="18" charset="0"/>
-                    </a:endParaRPr>
-                  </a:p>
-                </p:txBody>
-              </p:sp>
-              <p:sp>
-                <p:nvSpPr>
-                  <p:cNvPr id="13" name="文本框 12">
-                    <a:extLst>
-                      <a:ext uri="{FF2B5EF4-FFF2-40B4-BE49-F238E27FC236}">
-                        <a16:creationId xmlns:a16="http://schemas.microsoft.com/office/drawing/2014/main" id="{1D3A5D4B-F9B5-4F47-B146-57667EB36FB7}"/>
-                      </a:ext>
-                    </a:extLst>
-                  </p:cNvPr>
-                  <p:cNvSpPr txBox="1"/>
-                  <p:nvPr/>
-                </p:nvSpPr>
-                <p:spPr>
-                  <a:xfrm>
-                    <a:off x="3100575" y="1032652"/>
-                    <a:ext cx="1007912" cy="338554"/>
-                  </a:xfrm>
-                  <a:prstGeom prst="rect">
-                    <a:avLst/>
-                  </a:prstGeom>
-                  <a:noFill/>
-                </p:spPr>
-                <p:txBody>
-                  <a:bodyPr wrap="square" rtlCol="0">
-                    <a:spAutoFit/>
-                  </a:bodyPr>
-                  <a:lstStyle/>
-                  <a:p>
-                    <a:r>
-                      <a:rPr lang="en-US" altLang="zh-CN" sz="1600" dirty="0">
-                        <a:latin typeface="Times New Roman" panose="02020603050405020304" pitchFamily="18" charset="0"/>
-                        <a:ea typeface="宋体" panose="02010600030101010101" pitchFamily="2" charset="-122"/>
-                        <a:cs typeface="Times New Roman" panose="02020603050405020304" pitchFamily="18" charset="0"/>
-                      </a:rPr>
-                      <a:t>localsplus</a:t>
-                    </a:r>
-                    <a:endParaRPr lang="zh-CN" altLang="en-US" sz="1600" dirty="0">
-                      <a:latin typeface="Times New Roman" panose="02020603050405020304" pitchFamily="18" charset="0"/>
-                      <a:ea typeface="宋体" panose="02010600030101010101" pitchFamily="2" charset="-122"/>
-                      <a:cs typeface="Times New Roman" panose="02020603050405020304" pitchFamily="18" charset="0"/>
-                    </a:endParaRPr>
-                  </a:p>
-                </p:txBody>
-              </p:sp>
-              <p:sp>
-                <p:nvSpPr>
-                  <p:cNvPr id="14" name="文本框 13">
-                    <a:extLst>
-                      <a:ext uri="{FF2B5EF4-FFF2-40B4-BE49-F238E27FC236}">
-                        <a16:creationId xmlns:a16="http://schemas.microsoft.com/office/drawing/2014/main" id="{BD29F049-DEA0-4D9C-8C88-8D16676E896D}"/>
-                      </a:ext>
-                    </a:extLst>
-                  </p:cNvPr>
-                  <p:cNvSpPr txBox="1"/>
-                  <p:nvPr/>
-                </p:nvSpPr>
-                <p:spPr>
-                  <a:xfrm>
-                    <a:off x="3100575" y="1441056"/>
-                    <a:ext cx="404664" cy="338554"/>
-                  </a:xfrm>
-                  <a:prstGeom prst="rect">
-                    <a:avLst/>
-                  </a:prstGeom>
-                  <a:noFill/>
-                </p:spPr>
-                <p:txBody>
-                  <a:bodyPr wrap="square" rtlCol="0">
-                    <a:spAutoFit/>
-                  </a:bodyPr>
-                  <a:lstStyle/>
-                  <a:p>
-                    <a:r>
-                      <a:rPr lang="en-US" altLang="zh-CN" sz="1600" dirty="0">
-                        <a:latin typeface="Times New Roman" panose="02020603050405020304" pitchFamily="18" charset="0"/>
-                        <a:ea typeface="宋体" panose="02010600030101010101" pitchFamily="2" charset="-122"/>
-                        <a:cs typeface="Times New Roman" panose="02020603050405020304" pitchFamily="18" charset="0"/>
-                      </a:rPr>
-                      <a:t>…</a:t>
-                    </a:r>
-                    <a:endParaRPr lang="zh-CN" altLang="en-US" sz="1600" dirty="0">
-                      <a:latin typeface="Times New Roman" panose="02020603050405020304" pitchFamily="18" charset="0"/>
-                      <a:ea typeface="宋体" panose="02010600030101010101" pitchFamily="2" charset="-122"/>
-                      <a:cs typeface="Times New Roman" panose="02020603050405020304" pitchFamily="18" charset="0"/>
-                    </a:endParaRPr>
-                  </a:p>
-                </p:txBody>
-              </p:sp>
-              <p:cxnSp>
-                <p:nvCxnSpPr>
-                  <p:cNvPr id="18" name="直接连接符 17">
-                    <a:extLst>
-                      <a:ext uri="{FF2B5EF4-FFF2-40B4-BE49-F238E27FC236}">
-                        <a16:creationId xmlns:a16="http://schemas.microsoft.com/office/drawing/2014/main" id="{809966E5-6114-4396-BF88-E263FC642CA6}"/>
-                      </a:ext>
-                    </a:extLst>
-                  </p:cNvPr>
-                  <p:cNvCxnSpPr/>
-                  <p:nvPr/>
-                </p:nvCxnSpPr>
-                <p:spPr>
-                  <a:xfrm>
-                    <a:off x="3041643" y="962802"/>
-                    <a:ext cx="2555118" cy="0"/>
-                  </a:xfrm>
-                  <a:prstGeom prst="line">
-                    <a:avLst/>
-                  </a:prstGeom>
-                  <a:ln w="28575">
-                    <a:solidFill>
-                      <a:schemeClr val="tx1"/>
-                    </a:solidFill>
-                  </a:ln>
-                </p:spPr>
-                <p:style>
-                  <a:lnRef idx="1">
-                    <a:schemeClr val="accent1"/>
-                  </a:lnRef>
-                  <a:fillRef idx="0">
-                    <a:schemeClr val="accent1"/>
-                  </a:fillRef>
-                  <a:effectRef idx="0">
-                    <a:schemeClr val="accent1"/>
-                  </a:effectRef>
-                  <a:fontRef idx="minor">
-                    <a:schemeClr val="tx1"/>
-                  </a:fontRef>
-                </p:style>
-              </p:cxnSp>
-              <p:cxnSp>
-                <p:nvCxnSpPr>
-                  <p:cNvPr id="20" name="直接连接符 19">
-                    <a:extLst>
-                      <a:ext uri="{FF2B5EF4-FFF2-40B4-BE49-F238E27FC236}">
-                        <a16:creationId xmlns:a16="http://schemas.microsoft.com/office/drawing/2014/main" id="{D140E5D7-1E6D-488B-81C0-CB008E8D98C4}"/>
-                      </a:ext>
-                    </a:extLst>
-                  </p:cNvPr>
-                  <p:cNvCxnSpPr>
-                    <a:cxnSpLocks/>
-                  </p:cNvCxnSpPr>
-                  <p:nvPr/>
-                </p:nvCxnSpPr>
-                <p:spPr>
-                  <a:xfrm>
-                    <a:off x="4108487" y="962802"/>
-                    <a:ext cx="0" cy="895825"/>
-                  </a:xfrm>
-                  <a:prstGeom prst="line">
-                    <a:avLst/>
-                  </a:prstGeom>
-                  <a:ln w="28575">
-                    <a:solidFill>
-                      <a:schemeClr val="tx1"/>
-                    </a:solidFill>
-                  </a:ln>
-                </p:spPr>
-                <p:style>
-                  <a:lnRef idx="1">
-                    <a:schemeClr val="accent1"/>
-                  </a:lnRef>
-                  <a:fillRef idx="0">
-                    <a:schemeClr val="accent1"/>
-                  </a:fillRef>
-                  <a:effectRef idx="0">
-                    <a:schemeClr val="accent1"/>
-                  </a:effectRef>
-                  <a:fontRef idx="minor">
-                    <a:schemeClr val="tx1"/>
-                  </a:fontRef>
-                </p:style>
-              </p:cxnSp>
-            </p:grpSp>
-          </p:grpSp>
-          <p:sp>
-            <p:nvSpPr>
-              <p:cNvPr id="21" name="文本框 20">
-                <a:extLst>
-                  <a:ext uri="{FF2B5EF4-FFF2-40B4-BE49-F238E27FC236}">
-                    <a16:creationId xmlns:a16="http://schemas.microsoft.com/office/drawing/2014/main" id="{2C1690A6-110A-43BD-B9DE-7BB86991C277}"/>
-                  </a:ext>
-                </a:extLst>
-              </p:cNvPr>
-              <p:cNvSpPr txBox="1"/>
-              <p:nvPr/>
-            </p:nvSpPr>
-            <p:spPr>
-              <a:xfrm>
-                <a:off x="3384085" y="1849380"/>
-                <a:ext cx="404664" cy="338554"/>
-              </a:xfrm>
-              <a:prstGeom prst="rect">
-                <a:avLst/>
-              </a:prstGeom>
-              <a:noFill/>
-            </p:spPr>
-            <p:txBody>
-              <a:bodyPr wrap="square" rtlCol="0">
-                <a:spAutoFit/>
-              </a:bodyPr>
-              <a:lstStyle/>
-              <a:p>
-                <a:r>
-                  <a:rPr lang="en-US" altLang="zh-CN" sz="1600" dirty="0">
-                    <a:latin typeface="Times New Roman" panose="02020603050405020304" pitchFamily="18" charset="0"/>
-                    <a:ea typeface="宋体" panose="02010600030101010101" pitchFamily="2" charset="-122"/>
-                    <a:cs typeface="Times New Roman" panose="02020603050405020304" pitchFamily="18" charset="0"/>
-                  </a:rPr>
-                  <a:t>…</a:t>
-                </a:r>
-                <a:endParaRPr lang="zh-CN" altLang="en-US" sz="1600" dirty="0">
-                  <a:latin typeface="Times New Roman" panose="02020603050405020304" pitchFamily="18" charset="0"/>
-                  <a:ea typeface="宋体" panose="02010600030101010101" pitchFamily="2" charset="-122"/>
-                  <a:cs typeface="Times New Roman" panose="02020603050405020304" pitchFamily="18" charset="0"/>
-                </a:endParaRPr>
-              </a:p>
-            </p:txBody>
-          </p:sp>
-        </p:grpSp>
-        <p:sp>
-          <p:nvSpPr>
-            <p:cNvPr id="59" name="文本框 58">
-              <a:extLst>
-                <a:ext uri="{FF2B5EF4-FFF2-40B4-BE49-F238E27FC236}">
-                  <a16:creationId xmlns:a16="http://schemas.microsoft.com/office/drawing/2014/main" id="{A5FAEA8F-A6D9-4028-BFAC-BF3D500F4682}"/>
-                </a:ext>
-              </a:extLst>
-            </p:cNvPr>
-            <p:cNvSpPr txBox="1"/>
-            <p:nvPr/>
-          </p:nvSpPr>
-          <p:spPr>
-            <a:xfrm>
-              <a:off x="2798064" y="917459"/>
-              <a:ext cx="1460217" cy="338554"/>
-            </a:xfrm>
-            <a:prstGeom prst="rect">
-              <a:avLst/>
-            </a:prstGeom>
-            <a:noFill/>
-          </p:spPr>
-          <p:txBody>
-            <a:bodyPr wrap="square" rtlCol="0">
-              <a:spAutoFit/>
-            </a:bodyPr>
-            <a:lstStyle/>
-            <a:p>
-              <a:r>
-                <a:rPr lang="zh-CN" altLang="en-US" sz="1600" dirty="0">
-                  <a:latin typeface="Times New Roman" panose="02020603050405020304" pitchFamily="18" charset="0"/>
-                  <a:ea typeface="宋体" panose="02010600030101010101" pitchFamily="2" charset="-122"/>
-                  <a:cs typeface="Times New Roman" panose="02020603050405020304" pitchFamily="18" charset="0"/>
-                </a:rPr>
-                <a:t>槽位数组</a:t>
-              </a:r>
-              <a:r>
-                <a:rPr lang="en-US" altLang="zh-CN" sz="1600" dirty="0">
-                  <a:latin typeface="Times New Roman" panose="02020603050405020304" pitchFamily="18" charset="0"/>
-                  <a:ea typeface="宋体" panose="02010600030101010101" pitchFamily="2" charset="-122"/>
-                  <a:cs typeface="Times New Roman" panose="02020603050405020304" pitchFamily="18" charset="0"/>
-                </a:rPr>
-                <a:t>(     )</a:t>
-              </a:r>
-              <a:endParaRPr lang="zh-CN" altLang="en-US" sz="1600" dirty="0">
-                <a:latin typeface="Times New Roman" panose="02020603050405020304" pitchFamily="18" charset="0"/>
-                <a:ea typeface="宋体" panose="02010600030101010101" pitchFamily="2" charset="-122"/>
-                <a:cs typeface="Times New Roman" panose="02020603050405020304" pitchFamily="18" charset="0"/>
-              </a:endParaRPr>
-            </a:p>
-          </p:txBody>
-        </p:sp>
-      </p:grpSp>
-      <p:grpSp>
-        <p:nvGrpSpPr>
-          <p:cNvPr id="64" name="组合 63">
-            <a:extLst>
-              <a:ext uri="{FF2B5EF4-FFF2-40B4-BE49-F238E27FC236}">
-                <a16:creationId xmlns:a16="http://schemas.microsoft.com/office/drawing/2014/main" id="{144A7A32-9963-48D7-9F29-C83419B70D1B}"/>
-              </a:ext>
-            </a:extLst>
-          </p:cNvPr>
-          <p:cNvGrpSpPr/>
-          <p:nvPr/>
-        </p:nvGrpSpPr>
-        <p:grpSpPr>
-          <a:xfrm>
-            <a:off x="319146" y="2119335"/>
-            <a:ext cx="2590394" cy="1335006"/>
-            <a:chOff x="5729970" y="2678194"/>
-            <a:chExt cx="2590394" cy="1335006"/>
-          </a:xfrm>
-        </p:grpSpPr>
-        <p:grpSp>
-          <p:nvGrpSpPr>
-            <p:cNvPr id="33" name="组合 32">
-              <a:extLst>
-                <a:ext uri="{FF2B5EF4-FFF2-40B4-BE49-F238E27FC236}">
-                  <a16:creationId xmlns:a16="http://schemas.microsoft.com/office/drawing/2014/main" id="{CCB9AFAD-27E2-4F49-AFC3-F121627AB55E}"/>
-                </a:ext>
-              </a:extLst>
-            </p:cNvPr>
-            <p:cNvGrpSpPr/>
-            <p:nvPr/>
-          </p:nvGrpSpPr>
-          <p:grpSpPr>
-            <a:xfrm>
-              <a:off x="5729970" y="2678194"/>
-              <a:ext cx="2590394" cy="1335006"/>
-              <a:chOff x="2025605" y="931945"/>
-              <a:chExt cx="2590394" cy="1335006"/>
-            </a:xfrm>
-          </p:grpSpPr>
-          <p:grpSp>
-            <p:nvGrpSpPr>
-              <p:cNvPr id="34" name="组合 33">
-                <a:extLst>
-                  <a:ext uri="{FF2B5EF4-FFF2-40B4-BE49-F238E27FC236}">
-                    <a16:creationId xmlns:a16="http://schemas.microsoft.com/office/drawing/2014/main" id="{3457CECA-DAFF-4D02-A5CD-10A9A3B66DBD}"/>
-                  </a:ext>
-                </a:extLst>
-              </p:cNvPr>
-              <p:cNvGrpSpPr/>
-              <p:nvPr/>
-            </p:nvGrpSpPr>
-            <p:grpSpPr>
-              <a:xfrm>
-                <a:off x="2025605" y="931945"/>
-                <a:ext cx="2590394" cy="1335006"/>
-                <a:chOff x="3041643" y="523621"/>
-                <a:chExt cx="2590394" cy="1335006"/>
-              </a:xfrm>
-            </p:grpSpPr>
-            <p:cxnSp>
-              <p:nvCxnSpPr>
-                <p:cNvPr id="36" name="直接连接符 35">
-                  <a:extLst>
-                    <a:ext uri="{FF2B5EF4-FFF2-40B4-BE49-F238E27FC236}">
-                      <a16:creationId xmlns:a16="http://schemas.microsoft.com/office/drawing/2014/main" id="{04B18D45-136B-4DFB-B963-971B119063A4}"/>
-                    </a:ext>
-                  </a:extLst>
-                </p:cNvPr>
-                <p:cNvCxnSpPr/>
-                <p:nvPr/>
-              </p:nvCxnSpPr>
-              <p:spPr>
-                <a:xfrm>
-                  <a:off x="3041643" y="1375158"/>
-                  <a:ext cx="2555118" cy="0"/>
-                </a:xfrm>
-                <a:prstGeom prst="line">
-                  <a:avLst/>
-                </a:prstGeom>
-                <a:ln w="28575">
-                  <a:solidFill>
-                    <a:schemeClr val="tx1"/>
-                  </a:solidFill>
-                </a:ln>
-              </p:spPr>
-              <p:style>
-                <a:lnRef idx="1">
-                  <a:schemeClr val="accent1"/>
-                </a:lnRef>
-                <a:fillRef idx="0">
-                  <a:schemeClr val="accent1"/>
-                </a:fillRef>
-                <a:effectRef idx="0">
-                  <a:schemeClr val="accent1"/>
-                </a:effectRef>
-                <a:fontRef idx="minor">
-                  <a:schemeClr val="tx1"/>
-                </a:fontRef>
-              </p:style>
-            </p:cxnSp>
-            <p:grpSp>
-              <p:nvGrpSpPr>
-                <p:cNvPr id="37" name="组合 36">
-                  <a:extLst>
-                    <a:ext uri="{FF2B5EF4-FFF2-40B4-BE49-F238E27FC236}">
-                      <a16:creationId xmlns:a16="http://schemas.microsoft.com/office/drawing/2014/main" id="{65997647-BEE7-4D77-A6AF-34DDD216743D}"/>
-                    </a:ext>
-                  </a:extLst>
-                </p:cNvPr>
-                <p:cNvGrpSpPr/>
-                <p:nvPr/>
-              </p:nvGrpSpPr>
-              <p:grpSpPr>
-                <a:xfrm>
-                  <a:off x="3041643" y="523621"/>
-                  <a:ext cx="2590394" cy="1335006"/>
-                  <a:chOff x="3041643" y="523621"/>
-                  <a:chExt cx="2590394" cy="1335006"/>
-                </a:xfrm>
-              </p:grpSpPr>
-              <p:sp>
-                <p:nvSpPr>
-                  <p:cNvPr id="38" name="矩形 37">
-                    <a:extLst>
-                      <a:ext uri="{FF2B5EF4-FFF2-40B4-BE49-F238E27FC236}">
-                        <a16:creationId xmlns:a16="http://schemas.microsoft.com/office/drawing/2014/main" id="{49787E65-B3CD-4E9A-97AA-0FE02C043D50}"/>
-                      </a:ext>
-                    </a:extLst>
-                  </p:cNvPr>
-                  <p:cNvSpPr/>
-                  <p:nvPr/>
-                </p:nvSpPr>
-                <p:spPr>
-                  <a:xfrm>
-                    <a:off x="3041643" y="523621"/>
-                    <a:ext cx="2555118" cy="1335006"/>
-                  </a:xfrm>
-                  <a:prstGeom prst="rect">
-                    <a:avLst/>
-                  </a:prstGeom>
-                  <a:noFill/>
-                  <a:ln w="28575">
-                    <a:solidFill>
-                      <a:schemeClr val="tx1"/>
-                    </a:solidFill>
-                  </a:ln>
-                </p:spPr>
-                <p:style>
-                  <a:lnRef idx="2">
-                    <a:schemeClr val="accent1">
-                      <a:shade val="50000"/>
-                    </a:schemeClr>
-                  </a:lnRef>
-                  <a:fillRef idx="1">
-                    <a:schemeClr val="accent1"/>
-                  </a:fillRef>
-                  <a:effectRef idx="0">
-                    <a:schemeClr val="accent1"/>
-                  </a:effectRef>
-                  <a:fontRef idx="minor">
-                    <a:schemeClr val="lt1"/>
-                  </a:fontRef>
-                </p:style>
-                <p:txBody>
-                  <a:bodyPr rtlCol="0" anchor="ctr"/>
-                  <a:lstStyle/>
-                  <a:p>
-                    <a:pPr algn="ctr"/>
-                    <a:endParaRPr lang="zh-CN" altLang="en-US" dirty="0"/>
-                  </a:p>
-                </p:txBody>
-              </p:sp>
-              <p:sp>
-                <p:nvSpPr>
-                  <p:cNvPr id="39" name="文本框 38">
-                    <a:extLst>
-                      <a:ext uri="{FF2B5EF4-FFF2-40B4-BE49-F238E27FC236}">
-                        <a16:creationId xmlns:a16="http://schemas.microsoft.com/office/drawing/2014/main" id="{791303A7-A9AD-41F6-8B53-F9248487DE28}"/>
-                      </a:ext>
-                    </a:extLst>
-                  </p:cNvPr>
-                  <p:cNvSpPr txBox="1"/>
-                  <p:nvPr/>
-                </p:nvSpPr>
-                <p:spPr>
-                  <a:xfrm>
-                    <a:off x="3100575" y="593470"/>
-                    <a:ext cx="2531462" cy="369332"/>
-                  </a:xfrm>
-                  <a:prstGeom prst="rect">
-                    <a:avLst/>
-                  </a:prstGeom>
-                  <a:noFill/>
-                </p:spPr>
-                <p:txBody>
-                  <a:bodyPr wrap="none" rtlCol="0">
-                    <a:spAutoFit/>
-                  </a:bodyPr>
-                  <a:lstStyle/>
-                  <a:p>
-                    <a:r>
-                      <a:rPr lang="en-US" altLang="zh-CN" b="1" dirty="0">
-                        <a:latin typeface="Times New Roman" panose="02020603050405020304" pitchFamily="18" charset="0"/>
-                        <a:cs typeface="Times New Roman" panose="02020603050405020304" pitchFamily="18" charset="0"/>
-                      </a:rPr>
-                      <a:t>Function </a:t>
-                    </a:r>
-                    <a:r>
-                      <a:rPr lang="en-US" altLang="zh-CN" b="1" dirty="0">
-                        <a:latin typeface="Times New Roman" panose="02020603050405020304" pitchFamily="18" charset="0"/>
-                        <a:ea typeface="宋体" panose="02010600030101010101" pitchFamily="2" charset="-122"/>
-                        <a:cs typeface="Times New Roman" panose="02020603050405020304" pitchFamily="18" charset="0"/>
-                      </a:rPr>
-                      <a:t>Object inner()</a:t>
-                    </a:r>
-                    <a:endParaRPr lang="zh-CN" altLang="en-US" b="1" dirty="0">
-                      <a:latin typeface="Times New Roman" panose="02020603050405020304" pitchFamily="18" charset="0"/>
-                      <a:ea typeface="宋体" panose="02010600030101010101" pitchFamily="2" charset="-122"/>
-                      <a:cs typeface="Times New Roman" panose="02020603050405020304" pitchFamily="18" charset="0"/>
-                    </a:endParaRPr>
-                  </a:p>
-                </p:txBody>
-              </p:sp>
-              <p:sp>
-                <p:nvSpPr>
-                  <p:cNvPr id="40" name="文本框 39">
-                    <a:extLst>
-                      <a:ext uri="{FF2B5EF4-FFF2-40B4-BE49-F238E27FC236}">
-                        <a16:creationId xmlns:a16="http://schemas.microsoft.com/office/drawing/2014/main" id="{2B813025-9BC4-4550-AB28-75C1D1C331DD}"/>
-                      </a:ext>
-                    </a:extLst>
-                  </p:cNvPr>
-                  <p:cNvSpPr txBox="1"/>
-                  <p:nvPr/>
-                </p:nvSpPr>
-                <p:spPr>
-                  <a:xfrm>
-                    <a:off x="3100575" y="1032652"/>
-                    <a:ext cx="869952" cy="338554"/>
-                  </a:xfrm>
-                  <a:prstGeom prst="rect">
-                    <a:avLst/>
-                  </a:prstGeom>
-                  <a:noFill/>
-                </p:spPr>
-                <p:txBody>
-                  <a:bodyPr wrap="square" rtlCol="0">
-                    <a:spAutoFit/>
-                  </a:bodyPr>
-                  <a:lstStyle/>
-                  <a:p>
-                    <a:r>
-                      <a:rPr lang="en-US" altLang="zh-CN" sz="1600" dirty="0">
-                        <a:latin typeface="Times New Roman" panose="02020603050405020304" pitchFamily="18" charset="0"/>
-                        <a:ea typeface="宋体" panose="02010600030101010101" pitchFamily="2" charset="-122"/>
-                        <a:cs typeface="Times New Roman" panose="02020603050405020304" pitchFamily="18" charset="0"/>
-                      </a:rPr>
-                      <a:t>closures</a:t>
-                    </a:r>
-                    <a:endParaRPr lang="zh-CN" altLang="en-US" sz="1600" dirty="0">
-                      <a:latin typeface="Times New Roman" panose="02020603050405020304" pitchFamily="18" charset="0"/>
-                      <a:ea typeface="宋体" panose="02010600030101010101" pitchFamily="2" charset="-122"/>
-                      <a:cs typeface="Times New Roman" panose="02020603050405020304" pitchFamily="18" charset="0"/>
-                    </a:endParaRPr>
-                  </a:p>
-                </p:txBody>
-              </p:sp>
-              <p:sp>
-                <p:nvSpPr>
-                  <p:cNvPr id="41" name="文本框 40">
-                    <a:extLst>
-                      <a:ext uri="{FF2B5EF4-FFF2-40B4-BE49-F238E27FC236}">
-                        <a16:creationId xmlns:a16="http://schemas.microsoft.com/office/drawing/2014/main" id="{3D205C62-5E1F-4ED4-8534-F6D0503C68B6}"/>
-                      </a:ext>
-                    </a:extLst>
-                  </p:cNvPr>
-                  <p:cNvSpPr txBox="1"/>
-                  <p:nvPr/>
-                </p:nvSpPr>
-                <p:spPr>
-                  <a:xfrm>
-                    <a:off x="3100575" y="1441056"/>
-                    <a:ext cx="404664" cy="338554"/>
-                  </a:xfrm>
-                  <a:prstGeom prst="rect">
-                    <a:avLst/>
-                  </a:prstGeom>
-                  <a:noFill/>
-                </p:spPr>
-                <p:txBody>
-                  <a:bodyPr wrap="square" rtlCol="0">
-                    <a:spAutoFit/>
-                  </a:bodyPr>
-                  <a:lstStyle/>
-                  <a:p>
-                    <a:r>
-                      <a:rPr lang="en-US" altLang="zh-CN" sz="1600" dirty="0">
-                        <a:latin typeface="Times New Roman" panose="02020603050405020304" pitchFamily="18" charset="0"/>
-                        <a:ea typeface="宋体" panose="02010600030101010101" pitchFamily="2" charset="-122"/>
-                        <a:cs typeface="Times New Roman" panose="02020603050405020304" pitchFamily="18" charset="0"/>
-                      </a:rPr>
-                      <a:t>…</a:t>
-                    </a:r>
-                    <a:endParaRPr lang="zh-CN" altLang="en-US" sz="1600" dirty="0">
-                      <a:latin typeface="Times New Roman" panose="02020603050405020304" pitchFamily="18" charset="0"/>
-                      <a:ea typeface="宋体" panose="02010600030101010101" pitchFamily="2" charset="-122"/>
-                      <a:cs typeface="Times New Roman" panose="02020603050405020304" pitchFamily="18" charset="0"/>
-                    </a:endParaRPr>
-                  </a:p>
-                </p:txBody>
-              </p:sp>
-              <p:cxnSp>
-                <p:nvCxnSpPr>
-                  <p:cNvPr id="42" name="直接连接符 41">
-                    <a:extLst>
-                      <a:ext uri="{FF2B5EF4-FFF2-40B4-BE49-F238E27FC236}">
-                        <a16:creationId xmlns:a16="http://schemas.microsoft.com/office/drawing/2014/main" id="{17C57E02-B30B-456B-B183-27FF5525664B}"/>
-                      </a:ext>
-                    </a:extLst>
-                  </p:cNvPr>
-                  <p:cNvCxnSpPr/>
-                  <p:nvPr/>
-                </p:nvCxnSpPr>
-                <p:spPr>
-                  <a:xfrm>
-                    <a:off x="3041643" y="962802"/>
-                    <a:ext cx="2555118" cy="0"/>
-                  </a:xfrm>
-                  <a:prstGeom prst="line">
-                    <a:avLst/>
-                  </a:prstGeom>
-                  <a:ln w="28575">
-                    <a:solidFill>
-                      <a:schemeClr val="tx1"/>
-                    </a:solidFill>
-                  </a:ln>
-                </p:spPr>
-                <p:style>
-                  <a:lnRef idx="1">
-                    <a:schemeClr val="accent1"/>
-                  </a:lnRef>
-                  <a:fillRef idx="0">
-                    <a:schemeClr val="accent1"/>
-                  </a:fillRef>
-                  <a:effectRef idx="0">
-                    <a:schemeClr val="accent1"/>
-                  </a:effectRef>
-                  <a:fontRef idx="minor">
-                    <a:schemeClr val="tx1"/>
-                  </a:fontRef>
-                </p:style>
-              </p:cxnSp>
-              <p:cxnSp>
-                <p:nvCxnSpPr>
-                  <p:cNvPr id="43" name="直接连接符 42">
-                    <a:extLst>
-                      <a:ext uri="{FF2B5EF4-FFF2-40B4-BE49-F238E27FC236}">
-                        <a16:creationId xmlns:a16="http://schemas.microsoft.com/office/drawing/2014/main" id="{7540B650-BA9B-4DBB-AD26-E787A838B4F8}"/>
-                      </a:ext>
-                    </a:extLst>
-                  </p:cNvPr>
-                  <p:cNvCxnSpPr>
-                    <a:cxnSpLocks/>
-                  </p:cNvCxnSpPr>
-                  <p:nvPr/>
-                </p:nvCxnSpPr>
-                <p:spPr>
-                  <a:xfrm>
-                    <a:off x="4122351" y="962802"/>
-                    <a:ext cx="0" cy="895825"/>
-                  </a:xfrm>
-                  <a:prstGeom prst="line">
-                    <a:avLst/>
-                  </a:prstGeom>
-                  <a:ln w="28575">
-                    <a:solidFill>
-                      <a:schemeClr val="tx1"/>
-                    </a:solidFill>
-                  </a:ln>
-                </p:spPr>
-                <p:style>
-                  <a:lnRef idx="1">
-                    <a:schemeClr val="accent1"/>
-                  </a:lnRef>
-                  <a:fillRef idx="0">
-                    <a:schemeClr val="accent1"/>
-                  </a:fillRef>
-                  <a:effectRef idx="0">
-                    <a:schemeClr val="accent1"/>
-                  </a:effectRef>
-                  <a:fontRef idx="minor">
-                    <a:schemeClr val="tx1"/>
-                  </a:fontRef>
-                </p:style>
-              </p:cxnSp>
-            </p:grpSp>
-          </p:grpSp>
-          <p:sp>
-            <p:nvSpPr>
-              <p:cNvPr id="35" name="文本框 34">
-                <a:extLst>
-                  <a:ext uri="{FF2B5EF4-FFF2-40B4-BE49-F238E27FC236}">
-                    <a16:creationId xmlns:a16="http://schemas.microsoft.com/office/drawing/2014/main" id="{929DD6A5-341F-41FE-B65D-BEF75BD175EE}"/>
-                  </a:ext>
-                </a:extLst>
-              </p:cNvPr>
-              <p:cNvSpPr txBox="1"/>
-              <p:nvPr/>
-            </p:nvSpPr>
-            <p:spPr>
-              <a:xfrm>
-                <a:off x="3384085" y="1849380"/>
-                <a:ext cx="404664" cy="338554"/>
-              </a:xfrm>
-              <a:prstGeom prst="rect">
-                <a:avLst/>
-              </a:prstGeom>
-              <a:noFill/>
-            </p:spPr>
-            <p:txBody>
-              <a:bodyPr wrap="square" rtlCol="0">
-                <a:spAutoFit/>
-              </a:bodyPr>
-              <a:lstStyle/>
-              <a:p>
-                <a:r>
-                  <a:rPr lang="en-US" altLang="zh-CN" sz="1600" dirty="0">
-                    <a:latin typeface="Times New Roman" panose="02020603050405020304" pitchFamily="18" charset="0"/>
-                    <a:ea typeface="宋体" panose="02010600030101010101" pitchFamily="2" charset="-122"/>
-                    <a:cs typeface="Times New Roman" panose="02020603050405020304" pitchFamily="18" charset="0"/>
-                  </a:rPr>
-                  <a:t>…</a:t>
-                </a:r>
-                <a:endParaRPr lang="zh-CN" altLang="en-US" sz="1600" dirty="0">
-                  <a:latin typeface="Times New Roman" panose="02020603050405020304" pitchFamily="18" charset="0"/>
-                  <a:ea typeface="宋体" panose="02010600030101010101" pitchFamily="2" charset="-122"/>
-                  <a:cs typeface="Times New Roman" panose="02020603050405020304" pitchFamily="18" charset="0"/>
-                </a:endParaRPr>
-              </a:p>
-            </p:txBody>
-          </p:sp>
-        </p:grpSp>
-        <p:sp>
-          <p:nvSpPr>
-            <p:cNvPr id="44" name="文本框 43">
-              <a:extLst>
-                <a:ext uri="{FF2B5EF4-FFF2-40B4-BE49-F238E27FC236}">
-                  <a16:creationId xmlns:a16="http://schemas.microsoft.com/office/drawing/2014/main" id="{8026012F-AEA4-41C1-BA44-8049312235FF}"/>
-                </a:ext>
-              </a:extLst>
-            </p:cNvPr>
-            <p:cNvSpPr txBox="1"/>
-            <p:nvPr/>
-          </p:nvSpPr>
-          <p:spPr>
-            <a:xfrm>
-              <a:off x="6824867" y="3178615"/>
-              <a:ext cx="1392935" cy="338554"/>
-            </a:xfrm>
-            <a:prstGeom prst="rect">
-              <a:avLst/>
-            </a:prstGeom>
-            <a:noFill/>
-          </p:spPr>
-          <p:txBody>
-            <a:bodyPr wrap="square" rtlCol="0">
-              <a:spAutoFit/>
-            </a:bodyPr>
-            <a:lstStyle/>
-            <a:p>
-              <a:r>
-                <a:rPr lang="en-US" altLang="zh-CN" sz="1600" dirty="0">
-                  <a:latin typeface="Times New Roman" panose="02020603050405020304" pitchFamily="18" charset="0"/>
-                  <a:ea typeface="宋体" panose="02010600030101010101" pitchFamily="2" charset="-122"/>
-                  <a:cs typeface="Times New Roman" panose="02020603050405020304" pitchFamily="18" charset="0"/>
-                </a:rPr>
-                <a:t>Tuple(      )</a:t>
-              </a:r>
-              <a:endParaRPr lang="zh-CN" altLang="en-US" sz="1600" dirty="0">
-                <a:latin typeface="Times New Roman" panose="02020603050405020304" pitchFamily="18" charset="0"/>
-                <a:ea typeface="宋体" panose="02010600030101010101" pitchFamily="2" charset="-122"/>
-                <a:cs typeface="Times New Roman" panose="02020603050405020304" pitchFamily="18" charset="0"/>
-              </a:endParaRPr>
-            </a:p>
-          </p:txBody>
-        </p:sp>
-      </p:grpSp>
-      <p:cxnSp>
-        <p:nvCxnSpPr>
-          <p:cNvPr id="111" name="连接符: 肘形 110">
-            <a:extLst>
-              <a:ext uri="{FF2B5EF4-FFF2-40B4-BE49-F238E27FC236}">
-                <a16:creationId xmlns:a16="http://schemas.microsoft.com/office/drawing/2014/main" id="{192E5FCE-E107-4C0B-96E1-2FEDB8F0F53B}"/>
-              </a:ext>
-            </a:extLst>
-          </p:cNvPr>
-          <p:cNvCxnSpPr>
-            <a:cxnSpLocks/>
-            <a:endCxn id="60" idx="0"/>
-          </p:cNvCxnSpPr>
-          <p:nvPr/>
-        </p:nvCxnSpPr>
-        <p:spPr>
-          <a:xfrm>
-            <a:off x="2482850" y="1016000"/>
-            <a:ext cx="1802404" cy="581386"/>
-          </a:xfrm>
-          <a:prstGeom prst="bentConnector2">
-            <a:avLst/>
-          </a:prstGeom>
-          <a:ln w="28575">
-            <a:solidFill>
-              <a:schemeClr val="tx1"/>
-            </a:solidFill>
-            <a:tailEnd type="triangle"/>
-          </a:ln>
-        </p:spPr>
-        <p:style>
-          <a:lnRef idx="1">
-            <a:schemeClr val="accent1"/>
-          </a:lnRef>
-          <a:fillRef idx="0">
-            <a:schemeClr val="accent1"/>
-          </a:fillRef>
-          <a:effectRef idx="0">
-            <a:schemeClr val="accent1"/>
-          </a:effectRef>
-          <a:fontRef idx="minor">
-            <a:schemeClr val="tx1"/>
-          </a:fontRef>
-        </p:style>
-      </p:cxnSp>
-      <p:cxnSp>
-        <p:nvCxnSpPr>
-          <p:cNvPr id="113" name="连接符: 肘形 112">
-            <a:extLst>
-              <a:ext uri="{FF2B5EF4-FFF2-40B4-BE49-F238E27FC236}">
-                <a16:creationId xmlns:a16="http://schemas.microsoft.com/office/drawing/2014/main" id="{0AD260BF-1192-4B69-8A76-C1958737F4D2}"/>
-              </a:ext>
-            </a:extLst>
-          </p:cNvPr>
-          <p:cNvCxnSpPr>
-            <a:endCxn id="60" idx="2"/>
-          </p:cNvCxnSpPr>
-          <p:nvPr/>
-        </p:nvCxnSpPr>
-        <p:spPr>
-          <a:xfrm flipV="1">
-            <a:off x="2171700" y="2322816"/>
-            <a:ext cx="2113554" cy="474827"/>
-          </a:xfrm>
-          <a:prstGeom prst="bentConnector2">
-            <a:avLst/>
-          </a:prstGeom>
-          <a:ln w="28575">
-            <a:solidFill>
-              <a:schemeClr val="tx1"/>
-            </a:solidFill>
-            <a:tailEnd type="triangle"/>
-          </a:ln>
-        </p:spPr>
-        <p:style>
-          <a:lnRef idx="1">
-            <a:schemeClr val="accent1"/>
-          </a:lnRef>
-          <a:fillRef idx="0">
-            <a:schemeClr val="accent1"/>
-          </a:fillRef>
-          <a:effectRef idx="0">
-            <a:schemeClr val="accent1"/>
-          </a:effectRef>
-          <a:fontRef idx="minor">
-            <a:schemeClr val="tx1"/>
-          </a:fontRef>
-        </p:style>
-      </p:cxnSp>
       <p:sp>
         <p:nvSpPr>
           <p:cNvPr id="114" name="文本框 113">
@@ -10979,7 +10284,7 @@
         </p:nvSpPr>
         <p:spPr>
           <a:xfrm>
-            <a:off x="597415" y="3690041"/>
+            <a:off x="470415" y="3643958"/>
             <a:ext cx="4024869" cy="646331"/>
           </a:xfrm>
           <a:prstGeom prst="rect">
@@ -11037,12 +10342,106 @@
           </a:p>
         </p:txBody>
       </p:sp>
+      <p:sp>
+        <p:nvSpPr>
+          <p:cNvPr id="134" name="文本框 133">
+            <a:extLst>
+              <a:ext uri="{FF2B5EF4-FFF2-40B4-BE49-F238E27FC236}">
+                <a16:creationId xmlns:a16="http://schemas.microsoft.com/office/drawing/2014/main" id="{00B9F294-3F63-4480-AECA-AE2C1675AB88}"/>
+              </a:ext>
+            </a:extLst>
+          </p:cNvPr>
+          <p:cNvSpPr txBox="1"/>
+          <p:nvPr/>
+        </p:nvSpPr>
+        <p:spPr>
+          <a:xfrm>
+            <a:off x="5797634" y="3643958"/>
+            <a:ext cx="4450765" cy="646331"/>
+          </a:xfrm>
+          <a:prstGeom prst="rect">
+            <a:avLst/>
+          </a:prstGeom>
+          <a:noFill/>
+        </p:spPr>
+        <p:txBody>
+          <a:bodyPr wrap="square" rtlCol="0">
+            <a:spAutoFit/>
+          </a:bodyPr>
+          <a:lstStyle/>
+          <a:p>
+            <a:r>
+              <a:rPr lang="zh-CN" altLang="en-US" dirty="0">
+                <a:latin typeface="Times New Roman" panose="02020603050405020304" pitchFamily="18" charset="0"/>
+                <a:ea typeface="宋体" panose="02010600030101010101" pitchFamily="2" charset="-122"/>
+                <a:cs typeface="Times New Roman" panose="02020603050405020304" pitchFamily="18" charset="0"/>
+              </a:rPr>
+              <a:t>② </a:t>
+            </a:r>
+            <a:r>
+              <a:rPr lang="en-US" altLang="zh-CN" dirty="0">
+                <a:latin typeface="Times New Roman" panose="02020603050405020304" pitchFamily="18" charset="0"/>
+                <a:ea typeface="宋体" panose="02010600030101010101" pitchFamily="2" charset="-122"/>
+                <a:cs typeface="Times New Roman" panose="02020603050405020304" pitchFamily="18" charset="0"/>
+              </a:rPr>
+              <a:t>outer </a:t>
+            </a:r>
+            <a:r>
+              <a:rPr lang="zh-CN" altLang="en-US" dirty="0">
+                <a:latin typeface="Times New Roman" panose="02020603050405020304" pitchFamily="18" charset="0"/>
+                <a:ea typeface="宋体" panose="02010600030101010101" pitchFamily="2" charset="-122"/>
+                <a:cs typeface="Times New Roman" panose="02020603050405020304" pitchFamily="18" charset="0"/>
+              </a:rPr>
+              <a:t>退出后，栈帧被销毁，但单元对象</a:t>
+            </a:r>
+            <a:endParaRPr lang="en-US" altLang="zh-CN" dirty="0">
+              <a:latin typeface="Times New Roman" panose="02020603050405020304" pitchFamily="18" charset="0"/>
+              <a:ea typeface="宋体" panose="02010600030101010101" pitchFamily="2" charset="-122"/>
+              <a:cs typeface="Times New Roman" panose="02020603050405020304" pitchFamily="18" charset="0"/>
+            </a:endParaRPr>
+          </a:p>
+          <a:p>
+            <a:r>
+              <a:rPr lang="en-US" altLang="zh-CN" dirty="0">
+                <a:latin typeface="Times New Roman" panose="02020603050405020304" pitchFamily="18" charset="0"/>
+                <a:ea typeface="宋体" panose="02010600030101010101" pitchFamily="2" charset="-122"/>
+                <a:cs typeface="Times New Roman" panose="02020603050405020304" pitchFamily="18" charset="0"/>
+              </a:rPr>
+              <a:t>     </a:t>
+            </a:r>
+            <a:r>
+              <a:rPr lang="zh-CN" altLang="en-US" dirty="0">
+                <a:latin typeface="Times New Roman" panose="02020603050405020304" pitchFamily="18" charset="0"/>
+                <a:ea typeface="宋体" panose="02010600030101010101" pitchFamily="2" charset="-122"/>
+                <a:cs typeface="Times New Roman" panose="02020603050405020304" pitchFamily="18" charset="0"/>
+              </a:rPr>
+              <a:t>仍然被</a:t>
+            </a:r>
+            <a:r>
+              <a:rPr lang="en-US" altLang="zh-CN" dirty="0">
+                <a:latin typeface="Times New Roman" panose="02020603050405020304" pitchFamily="18" charset="0"/>
+                <a:ea typeface="宋体" panose="02010600030101010101" pitchFamily="2" charset="-122"/>
+                <a:cs typeface="Times New Roman" panose="02020603050405020304" pitchFamily="18" charset="0"/>
+              </a:rPr>
+              <a:t> inner </a:t>
+            </a:r>
+            <a:r>
+              <a:rPr lang="zh-CN" altLang="en-US" dirty="0">
+                <a:latin typeface="Times New Roman" panose="02020603050405020304" pitchFamily="18" charset="0"/>
+                <a:ea typeface="宋体" panose="02010600030101010101" pitchFamily="2" charset="-122"/>
+                <a:cs typeface="Times New Roman" panose="02020603050405020304" pitchFamily="18" charset="0"/>
+              </a:rPr>
+              <a:t>对象持有，因此保持存活。</a:t>
+            </a:r>
+          </a:p>
+        </p:txBody>
+      </p:sp>
       <p:grpSp>
         <p:nvGrpSpPr>
-          <p:cNvPr id="115" name="组合 114">
+          <p:cNvPr id="5" name="组合 4">
             <a:extLst>
               <a:ext uri="{FF2B5EF4-FFF2-40B4-BE49-F238E27FC236}">
-                <a16:creationId xmlns:a16="http://schemas.microsoft.com/office/drawing/2014/main" id="{F8B66108-91A6-4BBF-A701-BC555DB67970}"/>
+                <a16:creationId xmlns:a16="http://schemas.microsoft.com/office/drawing/2014/main" id="{9C3B75BA-66B0-439B-ABDF-4349453EADC7}"/>
               </a:ext>
             </a:extLst>
           </p:cNvPr>
@@ -11051,18 +10450,18 @@
         </p:nvGrpSpPr>
         <p:grpSpPr>
           <a:xfrm>
-            <a:off x="5722320" y="1293360"/>
-            <a:ext cx="2590394" cy="1335006"/>
-            <a:chOff x="5729970" y="2678194"/>
-            <a:chExt cx="2590394" cy="1335006"/>
+            <a:off x="319146" y="341395"/>
+            <a:ext cx="4645568" cy="3112946"/>
+            <a:chOff x="319146" y="341395"/>
+            <a:chExt cx="4645568" cy="3112946"/>
           </a:xfrm>
         </p:grpSpPr>
         <p:grpSp>
           <p:nvGrpSpPr>
-            <p:cNvPr id="116" name="组合 115">
+            <p:cNvPr id="90" name="组合 89">
               <a:extLst>
                 <a:ext uri="{FF2B5EF4-FFF2-40B4-BE49-F238E27FC236}">
-                  <a16:creationId xmlns:a16="http://schemas.microsoft.com/office/drawing/2014/main" id="{CFA43E56-D7A3-4A15-9DA1-C8E3E47D9104}"/>
+                  <a16:creationId xmlns:a16="http://schemas.microsoft.com/office/drawing/2014/main" id="{180C8327-5556-4827-BC51-448EB40B6FFE}"/>
                 </a:ext>
               </a:extLst>
             </p:cNvPr>
@@ -11071,18 +10470,176 @@
           </p:nvGrpSpPr>
           <p:grpSpPr>
             <a:xfrm>
-              <a:off x="5729970" y="2678194"/>
-              <a:ext cx="2590394" cy="1335006"/>
-              <a:chOff x="2025605" y="931945"/>
-              <a:chExt cx="2590394" cy="1335006"/>
+              <a:off x="3605794" y="1597384"/>
+              <a:ext cx="1358920" cy="725432"/>
+              <a:chOff x="6534909" y="436632"/>
+              <a:chExt cx="1358920" cy="725432"/>
+            </a:xfrm>
+          </p:grpSpPr>
+          <p:sp>
+            <p:nvSpPr>
+              <p:cNvPr id="60" name="矩形 59">
+                <a:extLst>
+                  <a:ext uri="{FF2B5EF4-FFF2-40B4-BE49-F238E27FC236}">
+                    <a16:creationId xmlns:a16="http://schemas.microsoft.com/office/drawing/2014/main" id="{FFA6BFC9-12DE-47EF-A55F-C827003FA7CB}"/>
+                  </a:ext>
+                </a:extLst>
+              </p:cNvPr>
+              <p:cNvSpPr/>
+              <p:nvPr/>
+            </p:nvSpPr>
+            <p:spPr>
+              <a:xfrm>
+                <a:off x="6534909" y="436634"/>
+                <a:ext cx="1358920" cy="725430"/>
+              </a:xfrm>
+              <a:prstGeom prst="rect">
+                <a:avLst/>
+              </a:prstGeom>
+              <a:noFill/>
+              <a:ln w="28575">
+                <a:solidFill>
+                  <a:schemeClr val="tx1"/>
+                </a:solidFill>
+              </a:ln>
+            </p:spPr>
+            <p:style>
+              <a:lnRef idx="2">
+                <a:schemeClr val="accent1">
+                  <a:shade val="50000"/>
+                </a:schemeClr>
+              </a:lnRef>
+              <a:fillRef idx="1">
+                <a:schemeClr val="accent1"/>
+              </a:fillRef>
+              <a:effectRef idx="0">
+                <a:schemeClr val="accent1"/>
+              </a:effectRef>
+              <a:fontRef idx="minor">
+                <a:schemeClr val="lt1"/>
+              </a:fontRef>
+            </p:style>
+            <p:txBody>
+              <a:bodyPr rtlCol="0" anchor="ctr"/>
+              <a:lstStyle/>
+              <a:p>
+                <a:pPr algn="ctr"/>
+                <a:endParaRPr lang="zh-CN" altLang="en-US"/>
+              </a:p>
+            </p:txBody>
+          </p:sp>
+          <p:sp>
+            <p:nvSpPr>
+              <p:cNvPr id="61" name="文本框 60">
+                <a:extLst>
+                  <a:ext uri="{FF2B5EF4-FFF2-40B4-BE49-F238E27FC236}">
+                    <a16:creationId xmlns:a16="http://schemas.microsoft.com/office/drawing/2014/main" id="{F0FE486C-28FF-4F44-A40B-4133A5036635}"/>
+                  </a:ext>
+                </a:extLst>
+              </p:cNvPr>
+              <p:cNvSpPr txBox="1"/>
+              <p:nvPr/>
+            </p:nvSpPr>
+            <p:spPr>
+              <a:xfrm>
+                <a:off x="6560985" y="436632"/>
+                <a:ext cx="1306768" cy="369332"/>
+              </a:xfrm>
+              <a:prstGeom prst="rect">
+                <a:avLst/>
+              </a:prstGeom>
+              <a:noFill/>
+            </p:spPr>
+            <p:txBody>
+              <a:bodyPr wrap="none" rtlCol="0">
+                <a:spAutoFit/>
+              </a:bodyPr>
+              <a:lstStyle/>
+              <a:p>
+                <a:r>
+                  <a:rPr lang="en-US" altLang="zh-CN" b="1" dirty="0">
+                    <a:latin typeface="Times New Roman" panose="02020603050405020304" pitchFamily="18" charset="0"/>
+                    <a:cs typeface="Times New Roman" panose="02020603050405020304" pitchFamily="18" charset="0"/>
+                  </a:rPr>
+                  <a:t>Cell Object</a:t>
+                </a:r>
+                <a:endParaRPr lang="zh-CN" altLang="en-US" b="1" dirty="0">
+                  <a:latin typeface="Times New Roman" panose="02020603050405020304" pitchFamily="18" charset="0"/>
+                  <a:ea typeface="宋体" panose="02010600030101010101" pitchFamily="2" charset="-122"/>
+                  <a:cs typeface="Times New Roman" panose="02020603050405020304" pitchFamily="18" charset="0"/>
+                </a:endParaRPr>
+              </a:p>
+            </p:txBody>
+          </p:sp>
+          <p:sp>
+            <p:nvSpPr>
+              <p:cNvPr id="62" name="文本框 61">
+                <a:extLst>
+                  <a:ext uri="{FF2B5EF4-FFF2-40B4-BE49-F238E27FC236}">
+                    <a16:creationId xmlns:a16="http://schemas.microsoft.com/office/drawing/2014/main" id="{0CEAF381-0094-4EE6-BCB2-D39081DBCCA8}"/>
+                  </a:ext>
+                </a:extLst>
+              </p:cNvPr>
+              <p:cNvSpPr txBox="1"/>
+              <p:nvPr/>
+            </p:nvSpPr>
+            <p:spPr>
+              <a:xfrm>
+                <a:off x="6691629" y="753659"/>
+                <a:ext cx="1045479" cy="369332"/>
+              </a:xfrm>
+              <a:prstGeom prst="rect">
+                <a:avLst/>
+              </a:prstGeom>
+              <a:noFill/>
+            </p:spPr>
+            <p:txBody>
+              <a:bodyPr wrap="none" rtlCol="0">
+                <a:spAutoFit/>
+              </a:bodyPr>
+              <a:lstStyle/>
+              <a:p>
+                <a:r>
+                  <a:rPr lang="en-US" altLang="zh-CN" dirty="0">
+                    <a:latin typeface="Times New Roman" panose="02020603050405020304" pitchFamily="18" charset="0"/>
+                    <a:cs typeface="Times New Roman" panose="02020603050405020304" pitchFamily="18" charset="0"/>
+                  </a:rPr>
+                  <a:t>value=10</a:t>
+                </a:r>
+                <a:endParaRPr lang="zh-CN" altLang="en-US" dirty="0">
+                  <a:latin typeface="Times New Roman" panose="02020603050405020304" pitchFamily="18" charset="0"/>
+                  <a:cs typeface="Times New Roman" panose="02020603050405020304" pitchFamily="18" charset="0"/>
+                </a:endParaRPr>
+              </a:p>
+            </p:txBody>
+          </p:sp>
+        </p:grpSp>
+        <p:grpSp>
+          <p:nvGrpSpPr>
+            <p:cNvPr id="76" name="组合 75">
+              <a:extLst>
+                <a:ext uri="{FF2B5EF4-FFF2-40B4-BE49-F238E27FC236}">
+                  <a16:creationId xmlns:a16="http://schemas.microsoft.com/office/drawing/2014/main" id="{881337DD-E1D6-479C-9DC2-D3CFF48F1098}"/>
+                </a:ext>
+              </a:extLst>
+            </p:cNvPr>
+            <p:cNvGrpSpPr/>
+            <p:nvPr/>
+          </p:nvGrpSpPr>
+          <p:grpSpPr>
+            <a:xfrm>
+              <a:off x="319146" y="341395"/>
+              <a:ext cx="2555118" cy="1335006"/>
+              <a:chOff x="1720805" y="417595"/>
+              <a:chExt cx="2555118" cy="1335006"/>
             </a:xfrm>
           </p:grpSpPr>
           <p:grpSp>
             <p:nvGrpSpPr>
-              <p:cNvPr id="118" name="组合 117">
+              <p:cNvPr id="23" name="组合 22">
                 <a:extLst>
                   <a:ext uri="{FF2B5EF4-FFF2-40B4-BE49-F238E27FC236}">
-                    <a16:creationId xmlns:a16="http://schemas.microsoft.com/office/drawing/2014/main" id="{BC2472E3-0004-4DB3-8F5E-05523B434BC6}"/>
+                    <a16:creationId xmlns:a16="http://schemas.microsoft.com/office/drawing/2014/main" id="{2E4FB221-B9F8-4C31-904C-54AE54C28F0C}"/>
                   </a:ext>
                 </a:extLst>
               </p:cNvPr>
@@ -11091,59 +10648,18 @@
             </p:nvGrpSpPr>
             <p:grpSpPr>
               <a:xfrm>
-                <a:off x="2025605" y="931945"/>
-                <a:ext cx="2590394" cy="1335006"/>
-                <a:chOff x="3041643" y="523621"/>
-                <a:chExt cx="2590394" cy="1335006"/>
+                <a:off x="1720805" y="417595"/>
+                <a:ext cx="2555118" cy="1335006"/>
+                <a:chOff x="2025605" y="931945"/>
+                <a:chExt cx="2555118" cy="1335006"/>
               </a:xfrm>
             </p:grpSpPr>
-            <p:cxnSp>
-              <p:nvCxnSpPr>
-                <p:cNvPr id="120" name="直接连接符 119">
+            <p:grpSp>
+              <p:nvGrpSpPr>
+                <p:cNvPr id="8" name="组合 7">
                   <a:extLst>
                     <a:ext uri="{FF2B5EF4-FFF2-40B4-BE49-F238E27FC236}">
-                      <a16:creationId xmlns:a16="http://schemas.microsoft.com/office/drawing/2014/main" id="{1C33CCFB-C307-4144-B881-B9086108737B}"/>
-                    </a:ext>
-                  </a:extLst>
-                </p:cNvPr>
-                <p:cNvCxnSpPr/>
-                <p:nvPr/>
-              </p:nvCxnSpPr>
-              <p:spPr>
-                <a:xfrm>
-                  <a:off x="3041643" y="1375158"/>
-                  <a:ext cx="2555118" cy="0"/>
-                </a:xfrm>
-                <a:prstGeom prst="line">
-                  <a:avLst/>
-                </a:prstGeom>
-                <a:ln w="28575">
-                  <a:solidFill>
-                    <a:schemeClr val="tx1"/>
-                  </a:solidFill>
-                </a:ln>
-              </p:spPr>
-              <p:style>
-                <a:lnRef idx="1">
-                  <a:schemeClr val="accent1"/>
-                </a:lnRef>
-                <a:fillRef idx="0">
-                  <a:schemeClr val="accent1"/>
-                </a:fillRef>
-                <a:effectRef idx="0">
-                  <a:schemeClr val="accent1"/>
-                </a:effectRef>
-                <a:fontRef idx="minor">
-                  <a:schemeClr val="tx1"/>
-                </a:fontRef>
-              </p:style>
-            </p:cxnSp>
-            <p:grpSp>
-              <p:nvGrpSpPr>
-                <p:cNvPr id="121" name="组合 120">
-                  <a:extLst>
-                    <a:ext uri="{FF2B5EF4-FFF2-40B4-BE49-F238E27FC236}">
-                      <a16:creationId xmlns:a16="http://schemas.microsoft.com/office/drawing/2014/main" id="{66308616-63E1-4888-AF97-A4E05AD91C25}"/>
+                      <a16:creationId xmlns:a16="http://schemas.microsoft.com/office/drawing/2014/main" id="{3DAE7417-5239-427B-A18E-277649525350}"/>
                     </a:ext>
                   </a:extLst>
                 </p:cNvPr>
@@ -11152,209 +10668,18 @@
               </p:nvGrpSpPr>
               <p:grpSpPr>
                 <a:xfrm>
-                  <a:off x="3041643" y="523621"/>
-                  <a:ext cx="2590394" cy="1335006"/>
+                  <a:off x="2025605" y="931945"/>
+                  <a:ext cx="2555118" cy="1335006"/>
                   <a:chOff x="3041643" y="523621"/>
-                  <a:chExt cx="2590394" cy="1335006"/>
+                  <a:chExt cx="2555118" cy="1335006"/>
                 </a:xfrm>
               </p:grpSpPr>
-              <p:sp>
-                <p:nvSpPr>
-                  <p:cNvPr id="122" name="矩形 121">
+              <p:cxnSp>
+                <p:nvCxnSpPr>
+                  <p:cNvPr id="9" name="直接连接符 8">
                     <a:extLst>
                       <a:ext uri="{FF2B5EF4-FFF2-40B4-BE49-F238E27FC236}">
-                        <a16:creationId xmlns:a16="http://schemas.microsoft.com/office/drawing/2014/main" id="{C97EE4D1-A5D7-4C6E-9EB9-B175319986F7}"/>
-                      </a:ext>
-                    </a:extLst>
-                  </p:cNvPr>
-                  <p:cNvSpPr/>
-                  <p:nvPr/>
-                </p:nvSpPr>
-                <p:spPr>
-                  <a:xfrm>
-                    <a:off x="3041643" y="523621"/>
-                    <a:ext cx="2555118" cy="1335006"/>
-                  </a:xfrm>
-                  <a:prstGeom prst="rect">
-                    <a:avLst/>
-                  </a:prstGeom>
-                  <a:noFill/>
-                  <a:ln w="28575">
-                    <a:solidFill>
-                      <a:schemeClr val="tx1"/>
-                    </a:solidFill>
-                  </a:ln>
-                </p:spPr>
-                <p:style>
-                  <a:lnRef idx="2">
-                    <a:schemeClr val="accent1">
-                      <a:shade val="50000"/>
-                    </a:schemeClr>
-                  </a:lnRef>
-                  <a:fillRef idx="1">
-                    <a:schemeClr val="accent1"/>
-                  </a:fillRef>
-                  <a:effectRef idx="0">
-                    <a:schemeClr val="accent1"/>
-                  </a:effectRef>
-                  <a:fontRef idx="minor">
-                    <a:schemeClr val="lt1"/>
-                  </a:fontRef>
-                </p:style>
-                <p:txBody>
-                  <a:bodyPr rtlCol="0" anchor="ctr"/>
-                  <a:lstStyle/>
-                  <a:p>
-                    <a:pPr algn="ctr"/>
-                    <a:endParaRPr lang="zh-CN" altLang="en-US" dirty="0"/>
-                  </a:p>
-                </p:txBody>
-              </p:sp>
-              <p:sp>
-                <p:nvSpPr>
-                  <p:cNvPr id="123" name="文本框 122">
-                    <a:extLst>
-                      <a:ext uri="{FF2B5EF4-FFF2-40B4-BE49-F238E27FC236}">
-                        <a16:creationId xmlns:a16="http://schemas.microsoft.com/office/drawing/2014/main" id="{7BF7D00D-1F18-40F3-80A7-3211D2F98C8B}"/>
-                      </a:ext>
-                    </a:extLst>
-                  </p:cNvPr>
-                  <p:cNvSpPr txBox="1"/>
-                  <p:nvPr/>
-                </p:nvSpPr>
-                <p:spPr>
-                  <a:xfrm>
-                    <a:off x="3100575" y="593470"/>
-                    <a:ext cx="2531462" cy="369332"/>
-                  </a:xfrm>
-                  <a:prstGeom prst="rect">
-                    <a:avLst/>
-                  </a:prstGeom>
-                  <a:noFill/>
-                </p:spPr>
-                <p:txBody>
-                  <a:bodyPr wrap="none" rtlCol="0">
-                    <a:spAutoFit/>
-                  </a:bodyPr>
-                  <a:lstStyle/>
-                  <a:p>
-                    <a:r>
-                      <a:rPr lang="en-US" altLang="zh-CN" b="1" dirty="0">
-                        <a:latin typeface="Times New Roman" panose="02020603050405020304" pitchFamily="18" charset="0"/>
-                        <a:cs typeface="Times New Roman" panose="02020603050405020304" pitchFamily="18" charset="0"/>
-                      </a:rPr>
-                      <a:t>Function </a:t>
-                    </a:r>
-                    <a:r>
-                      <a:rPr lang="en-US" altLang="zh-CN" b="1" dirty="0">
-                        <a:latin typeface="Times New Roman" panose="02020603050405020304" pitchFamily="18" charset="0"/>
-                        <a:ea typeface="宋体" panose="02010600030101010101" pitchFamily="2" charset="-122"/>
-                        <a:cs typeface="Times New Roman" panose="02020603050405020304" pitchFamily="18" charset="0"/>
-                      </a:rPr>
-                      <a:t>Object inner()</a:t>
-                    </a:r>
-                    <a:endParaRPr lang="zh-CN" altLang="en-US" b="1" dirty="0">
-                      <a:latin typeface="Times New Roman" panose="02020603050405020304" pitchFamily="18" charset="0"/>
-                      <a:ea typeface="宋体" panose="02010600030101010101" pitchFamily="2" charset="-122"/>
-                      <a:cs typeface="Times New Roman" panose="02020603050405020304" pitchFamily="18" charset="0"/>
-                    </a:endParaRPr>
-                  </a:p>
-                </p:txBody>
-              </p:sp>
-              <p:sp>
-                <p:nvSpPr>
-                  <p:cNvPr id="124" name="文本框 123">
-                    <a:extLst>
-                      <a:ext uri="{FF2B5EF4-FFF2-40B4-BE49-F238E27FC236}">
-                        <a16:creationId xmlns:a16="http://schemas.microsoft.com/office/drawing/2014/main" id="{3B632C60-8AE7-4932-8BC3-1E25D00BC982}"/>
-                      </a:ext>
-                    </a:extLst>
-                  </p:cNvPr>
-                  <p:cNvSpPr txBox="1"/>
-                  <p:nvPr/>
-                </p:nvSpPr>
-                <p:spPr>
-                  <a:xfrm>
-                    <a:off x="3100575" y="1032652"/>
-                    <a:ext cx="869952" cy="338554"/>
-                  </a:xfrm>
-                  <a:prstGeom prst="rect">
-                    <a:avLst/>
-                  </a:prstGeom>
-                  <a:noFill/>
-                </p:spPr>
-                <p:txBody>
-                  <a:bodyPr wrap="square" rtlCol="0">
-                    <a:spAutoFit/>
-                  </a:bodyPr>
-                  <a:lstStyle/>
-                  <a:p>
-                    <a:r>
-                      <a:rPr lang="en-US" altLang="zh-CN" sz="1600" dirty="0">
-                        <a:latin typeface="Times New Roman" panose="02020603050405020304" pitchFamily="18" charset="0"/>
-                        <a:ea typeface="宋体" panose="02010600030101010101" pitchFamily="2" charset="-122"/>
-                        <a:cs typeface="Times New Roman" panose="02020603050405020304" pitchFamily="18" charset="0"/>
-                      </a:rPr>
-                      <a:t>closures</a:t>
-                    </a:r>
-                    <a:endParaRPr lang="zh-CN" altLang="en-US" sz="1600" dirty="0">
-                      <a:latin typeface="Times New Roman" panose="02020603050405020304" pitchFamily="18" charset="0"/>
-                      <a:ea typeface="宋体" panose="02010600030101010101" pitchFamily="2" charset="-122"/>
-                      <a:cs typeface="Times New Roman" panose="02020603050405020304" pitchFamily="18" charset="0"/>
-                    </a:endParaRPr>
-                  </a:p>
-                </p:txBody>
-              </p:sp>
-              <p:sp>
-                <p:nvSpPr>
-                  <p:cNvPr id="125" name="文本框 124">
-                    <a:extLst>
-                      <a:ext uri="{FF2B5EF4-FFF2-40B4-BE49-F238E27FC236}">
-                        <a16:creationId xmlns:a16="http://schemas.microsoft.com/office/drawing/2014/main" id="{81FE8AA1-4D7F-4668-9BC7-E88F3418626E}"/>
-                      </a:ext>
-                    </a:extLst>
-                  </p:cNvPr>
-                  <p:cNvSpPr txBox="1"/>
-                  <p:nvPr/>
-                </p:nvSpPr>
-                <p:spPr>
-                  <a:xfrm>
-                    <a:off x="3100575" y="1441056"/>
-                    <a:ext cx="404664" cy="338554"/>
-                  </a:xfrm>
-                  <a:prstGeom prst="rect">
-                    <a:avLst/>
-                  </a:prstGeom>
-                  <a:noFill/>
-                </p:spPr>
-                <p:txBody>
-                  <a:bodyPr wrap="square" rtlCol="0">
-                    <a:spAutoFit/>
-                  </a:bodyPr>
-                  <a:lstStyle/>
-                  <a:p>
-                    <a:r>
-                      <a:rPr lang="en-US" altLang="zh-CN" sz="1600" dirty="0">
-                        <a:latin typeface="Times New Roman" panose="02020603050405020304" pitchFamily="18" charset="0"/>
-                        <a:ea typeface="宋体" panose="02010600030101010101" pitchFamily="2" charset="-122"/>
-                        <a:cs typeface="Times New Roman" panose="02020603050405020304" pitchFamily="18" charset="0"/>
-                      </a:rPr>
-                      <a:t>…</a:t>
-                    </a:r>
-                    <a:endParaRPr lang="zh-CN" altLang="en-US" sz="1600" dirty="0">
-                      <a:latin typeface="Times New Roman" panose="02020603050405020304" pitchFamily="18" charset="0"/>
-                      <a:ea typeface="宋体" panose="02010600030101010101" pitchFamily="2" charset="-122"/>
-                      <a:cs typeface="Times New Roman" panose="02020603050405020304" pitchFamily="18" charset="0"/>
-                    </a:endParaRPr>
-                  </a:p>
-                </p:txBody>
-              </p:sp>
-              <p:cxnSp>
-                <p:nvCxnSpPr>
-                  <p:cNvPr id="126" name="直接连接符 125">
-                    <a:extLst>
-                      <a:ext uri="{FF2B5EF4-FFF2-40B4-BE49-F238E27FC236}">
-                        <a16:creationId xmlns:a16="http://schemas.microsoft.com/office/drawing/2014/main" id="{D74583BF-5A82-4C3B-975E-879175B5BCF5}"/>
+                        <a16:creationId xmlns:a16="http://schemas.microsoft.com/office/drawing/2014/main" id="{6D0E9870-E8F8-4FB7-A6A0-2F3403617611}"/>
                       </a:ext>
                     </a:extLst>
                   </p:cNvPr>
@@ -11363,7 +10688,7 @@
                 </p:nvCxnSpPr>
                 <p:spPr>
                   <a:xfrm>
-                    <a:off x="3041643" y="962802"/>
+                    <a:off x="3041643" y="1375158"/>
                     <a:ext cx="2555118" cy="0"/>
                   </a:xfrm>
                   <a:prstGeom prst="line">
@@ -11390,24 +10715,477 @@
                   </a:fontRef>
                 </p:style>
               </p:cxnSp>
-              <p:cxnSp>
-                <p:nvCxnSpPr>
-                  <p:cNvPr id="127" name="直接连接符 126">
+              <p:grpSp>
+                <p:nvGrpSpPr>
+                  <p:cNvPr id="10" name="组合 9">
                     <a:extLst>
                       <a:ext uri="{FF2B5EF4-FFF2-40B4-BE49-F238E27FC236}">
-                        <a16:creationId xmlns:a16="http://schemas.microsoft.com/office/drawing/2014/main" id="{450DCD38-9454-4380-AC4D-345B1F24C85F}"/>
+                        <a16:creationId xmlns:a16="http://schemas.microsoft.com/office/drawing/2014/main" id="{F87F037B-C92F-406F-B686-D7A520DA4A19}"/>
                       </a:ext>
                     </a:extLst>
                   </p:cNvPr>
-                  <p:cNvCxnSpPr>
-                    <a:cxnSpLocks/>
-                  </p:cNvCxnSpPr>
+                  <p:cNvGrpSpPr/>
+                  <p:nvPr/>
+                </p:nvGrpSpPr>
+                <p:grpSpPr>
+                  <a:xfrm>
+                    <a:off x="3041643" y="523621"/>
+                    <a:ext cx="2555118" cy="1335006"/>
+                    <a:chOff x="3041643" y="523621"/>
+                    <a:chExt cx="2555118" cy="1335006"/>
+                  </a:xfrm>
+                </p:grpSpPr>
+                <p:sp>
+                  <p:nvSpPr>
+                    <p:cNvPr id="11" name="矩形 10">
+                      <a:extLst>
+                        <a:ext uri="{FF2B5EF4-FFF2-40B4-BE49-F238E27FC236}">
+                          <a16:creationId xmlns:a16="http://schemas.microsoft.com/office/drawing/2014/main" id="{84FA0DD5-C788-46BC-924E-F9E58E7EB76D}"/>
+                        </a:ext>
+                      </a:extLst>
+                    </p:cNvPr>
+                    <p:cNvSpPr/>
+                    <p:nvPr/>
+                  </p:nvSpPr>
+                  <p:spPr>
+                    <a:xfrm>
+                      <a:off x="3041643" y="523621"/>
+                      <a:ext cx="2555118" cy="1335006"/>
+                    </a:xfrm>
+                    <a:prstGeom prst="rect">
+                      <a:avLst/>
+                    </a:prstGeom>
+                    <a:noFill/>
+                    <a:ln w="28575">
+                      <a:solidFill>
+                        <a:schemeClr val="tx1"/>
+                      </a:solidFill>
+                    </a:ln>
+                  </p:spPr>
+                  <p:style>
+                    <a:lnRef idx="2">
+                      <a:schemeClr val="accent1">
+                        <a:shade val="50000"/>
+                      </a:schemeClr>
+                    </a:lnRef>
+                    <a:fillRef idx="1">
+                      <a:schemeClr val="accent1"/>
+                    </a:fillRef>
+                    <a:effectRef idx="0">
+                      <a:schemeClr val="accent1"/>
+                    </a:effectRef>
+                    <a:fontRef idx="minor">
+                      <a:schemeClr val="lt1"/>
+                    </a:fontRef>
+                  </p:style>
+                  <p:txBody>
+                    <a:bodyPr rtlCol="0" anchor="ctr"/>
+                    <a:lstStyle/>
+                    <a:p>
+                      <a:pPr algn="ctr"/>
+                      <a:endParaRPr lang="zh-CN" altLang="en-US" dirty="0"/>
+                    </a:p>
+                  </p:txBody>
+                </p:sp>
+                <p:sp>
+                  <p:nvSpPr>
+                    <p:cNvPr id="12" name="文本框 11">
+                      <a:extLst>
+                        <a:ext uri="{FF2B5EF4-FFF2-40B4-BE49-F238E27FC236}">
+                          <a16:creationId xmlns:a16="http://schemas.microsoft.com/office/drawing/2014/main" id="{4C4BDEE7-0CC9-4D60-8860-E57E6A5F0035}"/>
+                        </a:ext>
+                      </a:extLst>
+                    </p:cNvPr>
+                    <p:cNvSpPr txBox="1"/>
+                    <p:nvPr/>
+                  </p:nvSpPr>
+                  <p:spPr>
+                    <a:xfrm>
+                      <a:off x="3100575" y="593470"/>
+                      <a:ext cx="1576072" cy="369332"/>
+                    </a:xfrm>
+                    <a:prstGeom prst="rect">
+                      <a:avLst/>
+                    </a:prstGeom>
+                    <a:noFill/>
+                  </p:spPr>
+                  <p:txBody>
+                    <a:bodyPr wrap="none" rtlCol="0">
+                      <a:spAutoFit/>
+                    </a:bodyPr>
+                    <a:lstStyle/>
+                    <a:p>
+                      <a:r>
+                        <a:rPr lang="en-US" altLang="zh-CN" b="1" dirty="0">
+                          <a:latin typeface="Times New Roman" panose="02020603050405020304" pitchFamily="18" charset="0"/>
+                          <a:cs typeface="Times New Roman" panose="02020603050405020304" pitchFamily="18" charset="0"/>
+                        </a:rPr>
+                        <a:t>Frame </a:t>
+                      </a:r>
+                      <a:r>
+                        <a:rPr lang="en-US" altLang="zh-CN" b="1" dirty="0">
+                          <a:latin typeface="Times New Roman" panose="02020603050405020304" pitchFamily="18" charset="0"/>
+                          <a:ea typeface="宋体" panose="02010600030101010101" pitchFamily="2" charset="-122"/>
+                          <a:cs typeface="Times New Roman" panose="02020603050405020304" pitchFamily="18" charset="0"/>
+                        </a:rPr>
+                        <a:t>outer()</a:t>
+                      </a:r>
+                      <a:endParaRPr lang="zh-CN" altLang="en-US" b="1" dirty="0">
+                        <a:latin typeface="Times New Roman" panose="02020603050405020304" pitchFamily="18" charset="0"/>
+                        <a:ea typeface="宋体" panose="02010600030101010101" pitchFamily="2" charset="-122"/>
+                        <a:cs typeface="Times New Roman" panose="02020603050405020304" pitchFamily="18" charset="0"/>
+                      </a:endParaRPr>
+                    </a:p>
+                  </p:txBody>
+                </p:sp>
+                <p:sp>
+                  <p:nvSpPr>
+                    <p:cNvPr id="13" name="文本框 12">
+                      <a:extLst>
+                        <a:ext uri="{FF2B5EF4-FFF2-40B4-BE49-F238E27FC236}">
+                          <a16:creationId xmlns:a16="http://schemas.microsoft.com/office/drawing/2014/main" id="{1D3A5D4B-F9B5-4F47-B146-57667EB36FB7}"/>
+                        </a:ext>
+                      </a:extLst>
+                    </p:cNvPr>
+                    <p:cNvSpPr txBox="1"/>
+                    <p:nvPr/>
+                  </p:nvSpPr>
+                  <p:spPr>
+                    <a:xfrm>
+                      <a:off x="3100575" y="1032652"/>
+                      <a:ext cx="1007912" cy="338554"/>
+                    </a:xfrm>
+                    <a:prstGeom prst="rect">
+                      <a:avLst/>
+                    </a:prstGeom>
+                    <a:noFill/>
+                  </p:spPr>
+                  <p:txBody>
+                    <a:bodyPr wrap="square" rtlCol="0">
+                      <a:spAutoFit/>
+                    </a:bodyPr>
+                    <a:lstStyle/>
+                    <a:p>
+                      <a:r>
+                        <a:rPr lang="en-US" altLang="zh-CN" sz="1600" dirty="0">
+                          <a:latin typeface="Times New Roman" panose="02020603050405020304" pitchFamily="18" charset="0"/>
+                          <a:ea typeface="宋体" panose="02010600030101010101" pitchFamily="2" charset="-122"/>
+                          <a:cs typeface="Times New Roman" panose="02020603050405020304" pitchFamily="18" charset="0"/>
+                        </a:rPr>
+                        <a:t>localsplus</a:t>
+                      </a:r>
+                      <a:endParaRPr lang="zh-CN" altLang="en-US" sz="1600" dirty="0">
+                        <a:latin typeface="Times New Roman" panose="02020603050405020304" pitchFamily="18" charset="0"/>
+                        <a:ea typeface="宋体" panose="02010600030101010101" pitchFamily="2" charset="-122"/>
+                        <a:cs typeface="Times New Roman" panose="02020603050405020304" pitchFamily="18" charset="0"/>
+                      </a:endParaRPr>
+                    </a:p>
+                  </p:txBody>
+                </p:sp>
+                <p:sp>
+                  <p:nvSpPr>
+                    <p:cNvPr id="14" name="文本框 13">
+                      <a:extLst>
+                        <a:ext uri="{FF2B5EF4-FFF2-40B4-BE49-F238E27FC236}">
+                          <a16:creationId xmlns:a16="http://schemas.microsoft.com/office/drawing/2014/main" id="{BD29F049-DEA0-4D9C-8C88-8D16676E896D}"/>
+                        </a:ext>
+                      </a:extLst>
+                    </p:cNvPr>
+                    <p:cNvSpPr txBox="1"/>
+                    <p:nvPr/>
+                  </p:nvSpPr>
+                  <p:spPr>
+                    <a:xfrm>
+                      <a:off x="3100575" y="1441056"/>
+                      <a:ext cx="404664" cy="338554"/>
+                    </a:xfrm>
+                    <a:prstGeom prst="rect">
+                      <a:avLst/>
+                    </a:prstGeom>
+                    <a:noFill/>
+                  </p:spPr>
+                  <p:txBody>
+                    <a:bodyPr wrap="square" rtlCol="0">
+                      <a:spAutoFit/>
+                    </a:bodyPr>
+                    <a:lstStyle/>
+                    <a:p>
+                      <a:r>
+                        <a:rPr lang="en-US" altLang="zh-CN" sz="1600" dirty="0">
+                          <a:latin typeface="Times New Roman" panose="02020603050405020304" pitchFamily="18" charset="0"/>
+                          <a:ea typeface="宋体" panose="02010600030101010101" pitchFamily="2" charset="-122"/>
+                          <a:cs typeface="Times New Roman" panose="02020603050405020304" pitchFamily="18" charset="0"/>
+                        </a:rPr>
+                        <a:t>…</a:t>
+                      </a:r>
+                      <a:endParaRPr lang="zh-CN" altLang="en-US" sz="1600" dirty="0">
+                        <a:latin typeface="Times New Roman" panose="02020603050405020304" pitchFamily="18" charset="0"/>
+                        <a:ea typeface="宋体" panose="02010600030101010101" pitchFamily="2" charset="-122"/>
+                        <a:cs typeface="Times New Roman" panose="02020603050405020304" pitchFamily="18" charset="0"/>
+                      </a:endParaRPr>
+                    </a:p>
+                  </p:txBody>
+                </p:sp>
+                <p:cxnSp>
+                  <p:nvCxnSpPr>
+                    <p:cNvPr id="18" name="直接连接符 17">
+                      <a:extLst>
+                        <a:ext uri="{FF2B5EF4-FFF2-40B4-BE49-F238E27FC236}">
+                          <a16:creationId xmlns:a16="http://schemas.microsoft.com/office/drawing/2014/main" id="{809966E5-6114-4396-BF88-E263FC642CA6}"/>
+                        </a:ext>
+                      </a:extLst>
+                    </p:cNvPr>
+                    <p:cNvCxnSpPr/>
+                    <p:nvPr/>
+                  </p:nvCxnSpPr>
+                  <p:spPr>
+                    <a:xfrm>
+                      <a:off x="3041643" y="962802"/>
+                      <a:ext cx="2555118" cy="0"/>
+                    </a:xfrm>
+                    <a:prstGeom prst="line">
+                      <a:avLst/>
+                    </a:prstGeom>
+                    <a:ln w="28575">
+                      <a:solidFill>
+                        <a:schemeClr val="tx1"/>
+                      </a:solidFill>
+                    </a:ln>
+                  </p:spPr>
+                  <p:style>
+                    <a:lnRef idx="1">
+                      <a:schemeClr val="accent1"/>
+                    </a:lnRef>
+                    <a:fillRef idx="0">
+                      <a:schemeClr val="accent1"/>
+                    </a:fillRef>
+                    <a:effectRef idx="0">
+                      <a:schemeClr val="accent1"/>
+                    </a:effectRef>
+                    <a:fontRef idx="minor">
+                      <a:schemeClr val="tx1"/>
+                    </a:fontRef>
+                  </p:style>
+                </p:cxnSp>
+                <p:cxnSp>
+                  <p:nvCxnSpPr>
+                    <p:cNvPr id="20" name="直接连接符 19">
+                      <a:extLst>
+                        <a:ext uri="{FF2B5EF4-FFF2-40B4-BE49-F238E27FC236}">
+                          <a16:creationId xmlns:a16="http://schemas.microsoft.com/office/drawing/2014/main" id="{D140E5D7-1E6D-488B-81C0-CB008E8D98C4}"/>
+                        </a:ext>
+                      </a:extLst>
+                    </p:cNvPr>
+                    <p:cNvCxnSpPr>
+                      <a:cxnSpLocks/>
+                    </p:cNvCxnSpPr>
+                    <p:nvPr/>
+                  </p:nvCxnSpPr>
+                  <p:spPr>
+                    <a:xfrm>
+                      <a:off x="4108487" y="962802"/>
+                      <a:ext cx="0" cy="895825"/>
+                    </a:xfrm>
+                    <a:prstGeom prst="line">
+                      <a:avLst/>
+                    </a:prstGeom>
+                    <a:ln w="28575">
+                      <a:solidFill>
+                        <a:schemeClr val="tx1"/>
+                      </a:solidFill>
+                    </a:ln>
+                  </p:spPr>
+                  <p:style>
+                    <a:lnRef idx="1">
+                      <a:schemeClr val="accent1"/>
+                    </a:lnRef>
+                    <a:fillRef idx="0">
+                      <a:schemeClr val="accent1"/>
+                    </a:fillRef>
+                    <a:effectRef idx="0">
+                      <a:schemeClr val="accent1"/>
+                    </a:effectRef>
+                    <a:fontRef idx="minor">
+                      <a:schemeClr val="tx1"/>
+                    </a:fontRef>
+                  </p:style>
+                </p:cxnSp>
+              </p:grpSp>
+            </p:grpSp>
+            <p:sp>
+              <p:nvSpPr>
+                <p:cNvPr id="21" name="文本框 20">
+                  <a:extLst>
+                    <a:ext uri="{FF2B5EF4-FFF2-40B4-BE49-F238E27FC236}">
+                      <a16:creationId xmlns:a16="http://schemas.microsoft.com/office/drawing/2014/main" id="{2C1690A6-110A-43BD-B9DE-7BB86991C277}"/>
+                    </a:ext>
+                  </a:extLst>
+                </p:cNvPr>
+                <p:cNvSpPr txBox="1"/>
+                <p:nvPr/>
+              </p:nvSpPr>
+              <p:spPr>
+                <a:xfrm>
+                  <a:off x="3384085" y="1849380"/>
+                  <a:ext cx="404664" cy="338554"/>
+                </a:xfrm>
+                <a:prstGeom prst="rect">
+                  <a:avLst/>
+                </a:prstGeom>
+                <a:noFill/>
+              </p:spPr>
+              <p:txBody>
+                <a:bodyPr wrap="square" rtlCol="0">
+                  <a:spAutoFit/>
+                </a:bodyPr>
+                <a:lstStyle/>
+                <a:p>
+                  <a:r>
+                    <a:rPr lang="en-US" altLang="zh-CN" sz="1600" dirty="0">
+                      <a:latin typeface="Times New Roman" panose="02020603050405020304" pitchFamily="18" charset="0"/>
+                      <a:ea typeface="宋体" panose="02010600030101010101" pitchFamily="2" charset="-122"/>
+                      <a:cs typeface="Times New Roman" panose="02020603050405020304" pitchFamily="18" charset="0"/>
+                    </a:rPr>
+                    <a:t>…</a:t>
+                  </a:r>
+                  <a:endParaRPr lang="zh-CN" altLang="en-US" sz="1600" dirty="0">
+                    <a:latin typeface="Times New Roman" panose="02020603050405020304" pitchFamily="18" charset="0"/>
+                    <a:ea typeface="宋体" panose="02010600030101010101" pitchFamily="2" charset="-122"/>
+                    <a:cs typeface="Times New Roman" panose="02020603050405020304" pitchFamily="18" charset="0"/>
+                  </a:endParaRPr>
+                </a:p>
+              </p:txBody>
+            </p:sp>
+          </p:grpSp>
+          <p:sp>
+            <p:nvSpPr>
+              <p:cNvPr id="59" name="文本框 58">
+                <a:extLst>
+                  <a:ext uri="{FF2B5EF4-FFF2-40B4-BE49-F238E27FC236}">
+                    <a16:creationId xmlns:a16="http://schemas.microsoft.com/office/drawing/2014/main" id="{A5FAEA8F-A6D9-4028-BFAC-BF3D500F4682}"/>
+                  </a:ext>
+                </a:extLst>
+              </p:cNvPr>
+              <p:cNvSpPr txBox="1"/>
+              <p:nvPr/>
+            </p:nvSpPr>
+            <p:spPr>
+              <a:xfrm>
+                <a:off x="2798064" y="917459"/>
+                <a:ext cx="1460217" cy="338554"/>
+              </a:xfrm>
+              <a:prstGeom prst="rect">
+                <a:avLst/>
+              </a:prstGeom>
+              <a:noFill/>
+            </p:spPr>
+            <p:txBody>
+              <a:bodyPr wrap="square" rtlCol="0">
+                <a:spAutoFit/>
+              </a:bodyPr>
+              <a:lstStyle/>
+              <a:p>
+                <a:r>
+                  <a:rPr lang="zh-CN" altLang="en-US" sz="1600" dirty="0">
+                    <a:latin typeface="Times New Roman" panose="02020603050405020304" pitchFamily="18" charset="0"/>
+                    <a:ea typeface="宋体" panose="02010600030101010101" pitchFamily="2" charset="-122"/>
+                    <a:cs typeface="Times New Roman" panose="02020603050405020304" pitchFamily="18" charset="0"/>
+                  </a:rPr>
+                  <a:t>槽位数组</a:t>
+                </a:r>
+                <a:r>
+                  <a:rPr lang="en-US" altLang="zh-CN" sz="1600" dirty="0">
+                    <a:latin typeface="Times New Roman" panose="02020603050405020304" pitchFamily="18" charset="0"/>
+                    <a:ea typeface="宋体" panose="02010600030101010101" pitchFamily="2" charset="-122"/>
+                    <a:cs typeface="Times New Roman" panose="02020603050405020304" pitchFamily="18" charset="0"/>
+                  </a:rPr>
+                  <a:t>(     )</a:t>
+                </a:r>
+                <a:endParaRPr lang="zh-CN" altLang="en-US" sz="1600" dirty="0">
+                  <a:latin typeface="Times New Roman" panose="02020603050405020304" pitchFamily="18" charset="0"/>
+                  <a:ea typeface="宋体" panose="02010600030101010101" pitchFamily="2" charset="-122"/>
+                  <a:cs typeface="Times New Roman" panose="02020603050405020304" pitchFamily="18" charset="0"/>
+                </a:endParaRPr>
+              </a:p>
+            </p:txBody>
+          </p:sp>
+        </p:grpSp>
+        <p:grpSp>
+          <p:nvGrpSpPr>
+            <p:cNvPr id="64" name="组合 63">
+              <a:extLst>
+                <a:ext uri="{FF2B5EF4-FFF2-40B4-BE49-F238E27FC236}">
+                  <a16:creationId xmlns:a16="http://schemas.microsoft.com/office/drawing/2014/main" id="{144A7A32-9963-48D7-9F29-C83419B70D1B}"/>
+                </a:ext>
+              </a:extLst>
+            </p:cNvPr>
+            <p:cNvGrpSpPr/>
+            <p:nvPr/>
+          </p:nvGrpSpPr>
+          <p:grpSpPr>
+            <a:xfrm>
+              <a:off x="319146" y="2119335"/>
+              <a:ext cx="2590394" cy="1335006"/>
+              <a:chOff x="5729970" y="2678194"/>
+              <a:chExt cx="2590394" cy="1335006"/>
+            </a:xfrm>
+          </p:grpSpPr>
+          <p:grpSp>
+            <p:nvGrpSpPr>
+              <p:cNvPr id="33" name="组合 32">
+                <a:extLst>
+                  <a:ext uri="{FF2B5EF4-FFF2-40B4-BE49-F238E27FC236}">
+                    <a16:creationId xmlns:a16="http://schemas.microsoft.com/office/drawing/2014/main" id="{CCB9AFAD-27E2-4F49-AFC3-F121627AB55E}"/>
+                  </a:ext>
+                </a:extLst>
+              </p:cNvPr>
+              <p:cNvGrpSpPr/>
+              <p:nvPr/>
+            </p:nvGrpSpPr>
+            <p:grpSpPr>
+              <a:xfrm>
+                <a:off x="5729970" y="2678194"/>
+                <a:ext cx="2590394" cy="1335006"/>
+                <a:chOff x="2025605" y="931945"/>
+                <a:chExt cx="2590394" cy="1335006"/>
+              </a:xfrm>
+            </p:grpSpPr>
+            <p:grpSp>
+              <p:nvGrpSpPr>
+                <p:cNvPr id="34" name="组合 33">
+                  <a:extLst>
+                    <a:ext uri="{FF2B5EF4-FFF2-40B4-BE49-F238E27FC236}">
+                      <a16:creationId xmlns:a16="http://schemas.microsoft.com/office/drawing/2014/main" id="{3457CECA-DAFF-4D02-A5CD-10A9A3B66DBD}"/>
+                    </a:ext>
+                  </a:extLst>
+                </p:cNvPr>
+                <p:cNvGrpSpPr/>
+                <p:nvPr/>
+              </p:nvGrpSpPr>
+              <p:grpSpPr>
+                <a:xfrm>
+                  <a:off x="2025605" y="931945"/>
+                  <a:ext cx="2590394" cy="1335006"/>
+                  <a:chOff x="3041643" y="523621"/>
+                  <a:chExt cx="2590394" cy="1335006"/>
+                </a:xfrm>
+              </p:grpSpPr>
+              <p:cxnSp>
+                <p:nvCxnSpPr>
+                  <p:cNvPr id="36" name="直接连接符 35">
+                    <a:extLst>
+                      <a:ext uri="{FF2B5EF4-FFF2-40B4-BE49-F238E27FC236}">
+                        <a16:creationId xmlns:a16="http://schemas.microsoft.com/office/drawing/2014/main" id="{04B18D45-136B-4DFB-B963-971B119063A4}"/>
+                      </a:ext>
+                    </a:extLst>
+                  </p:cNvPr>
+                  <p:cNvCxnSpPr/>
                   <p:nvPr/>
                 </p:nvCxnSpPr>
                 <p:spPr>
                   <a:xfrm>
-                    <a:off x="4122351" y="962802"/>
-                    <a:ext cx="0" cy="895825"/>
+                    <a:off x="3041643" y="1375158"/>
+                    <a:ext cx="2555118" cy="0"/>
                   </a:xfrm>
                   <a:prstGeom prst="line">
                     <a:avLst/>
@@ -11433,14 +11211,354 @@
                   </a:fontRef>
                 </p:style>
               </p:cxnSp>
+              <p:grpSp>
+                <p:nvGrpSpPr>
+                  <p:cNvPr id="37" name="组合 36">
+                    <a:extLst>
+                      <a:ext uri="{FF2B5EF4-FFF2-40B4-BE49-F238E27FC236}">
+                        <a16:creationId xmlns:a16="http://schemas.microsoft.com/office/drawing/2014/main" id="{65997647-BEE7-4D77-A6AF-34DDD216743D}"/>
+                      </a:ext>
+                    </a:extLst>
+                  </p:cNvPr>
+                  <p:cNvGrpSpPr/>
+                  <p:nvPr/>
+                </p:nvGrpSpPr>
+                <p:grpSpPr>
+                  <a:xfrm>
+                    <a:off x="3041643" y="523621"/>
+                    <a:ext cx="2590394" cy="1335006"/>
+                    <a:chOff x="3041643" y="523621"/>
+                    <a:chExt cx="2590394" cy="1335006"/>
+                  </a:xfrm>
+                </p:grpSpPr>
+                <p:sp>
+                  <p:nvSpPr>
+                    <p:cNvPr id="38" name="矩形 37">
+                      <a:extLst>
+                        <a:ext uri="{FF2B5EF4-FFF2-40B4-BE49-F238E27FC236}">
+                          <a16:creationId xmlns:a16="http://schemas.microsoft.com/office/drawing/2014/main" id="{49787E65-B3CD-4E9A-97AA-0FE02C043D50}"/>
+                        </a:ext>
+                      </a:extLst>
+                    </p:cNvPr>
+                    <p:cNvSpPr/>
+                    <p:nvPr/>
+                  </p:nvSpPr>
+                  <p:spPr>
+                    <a:xfrm>
+                      <a:off x="3041643" y="523621"/>
+                      <a:ext cx="2555118" cy="1335006"/>
+                    </a:xfrm>
+                    <a:prstGeom prst="rect">
+                      <a:avLst/>
+                    </a:prstGeom>
+                    <a:noFill/>
+                    <a:ln w="28575">
+                      <a:solidFill>
+                        <a:schemeClr val="tx1"/>
+                      </a:solidFill>
+                    </a:ln>
+                  </p:spPr>
+                  <p:style>
+                    <a:lnRef idx="2">
+                      <a:schemeClr val="accent1">
+                        <a:shade val="50000"/>
+                      </a:schemeClr>
+                    </a:lnRef>
+                    <a:fillRef idx="1">
+                      <a:schemeClr val="accent1"/>
+                    </a:fillRef>
+                    <a:effectRef idx="0">
+                      <a:schemeClr val="accent1"/>
+                    </a:effectRef>
+                    <a:fontRef idx="minor">
+                      <a:schemeClr val="lt1"/>
+                    </a:fontRef>
+                  </p:style>
+                  <p:txBody>
+                    <a:bodyPr rtlCol="0" anchor="ctr"/>
+                    <a:lstStyle/>
+                    <a:p>
+                      <a:pPr algn="ctr"/>
+                      <a:endParaRPr lang="zh-CN" altLang="en-US" dirty="0"/>
+                    </a:p>
+                  </p:txBody>
+                </p:sp>
+                <p:sp>
+                  <p:nvSpPr>
+                    <p:cNvPr id="39" name="文本框 38">
+                      <a:extLst>
+                        <a:ext uri="{FF2B5EF4-FFF2-40B4-BE49-F238E27FC236}">
+                          <a16:creationId xmlns:a16="http://schemas.microsoft.com/office/drawing/2014/main" id="{791303A7-A9AD-41F6-8B53-F9248487DE28}"/>
+                        </a:ext>
+                      </a:extLst>
+                    </p:cNvPr>
+                    <p:cNvSpPr txBox="1"/>
+                    <p:nvPr/>
+                  </p:nvSpPr>
+                  <p:spPr>
+                    <a:xfrm>
+                      <a:off x="3100575" y="593470"/>
+                      <a:ext cx="2531462" cy="369332"/>
+                    </a:xfrm>
+                    <a:prstGeom prst="rect">
+                      <a:avLst/>
+                    </a:prstGeom>
+                    <a:noFill/>
+                  </p:spPr>
+                  <p:txBody>
+                    <a:bodyPr wrap="none" rtlCol="0">
+                      <a:spAutoFit/>
+                    </a:bodyPr>
+                    <a:lstStyle/>
+                    <a:p>
+                      <a:r>
+                        <a:rPr lang="en-US" altLang="zh-CN" b="1" dirty="0">
+                          <a:latin typeface="Times New Roman" panose="02020603050405020304" pitchFamily="18" charset="0"/>
+                          <a:cs typeface="Times New Roman" panose="02020603050405020304" pitchFamily="18" charset="0"/>
+                        </a:rPr>
+                        <a:t>Function </a:t>
+                      </a:r>
+                      <a:r>
+                        <a:rPr lang="en-US" altLang="zh-CN" b="1" dirty="0">
+                          <a:latin typeface="Times New Roman" panose="02020603050405020304" pitchFamily="18" charset="0"/>
+                          <a:ea typeface="宋体" panose="02010600030101010101" pitchFamily="2" charset="-122"/>
+                          <a:cs typeface="Times New Roman" panose="02020603050405020304" pitchFamily="18" charset="0"/>
+                        </a:rPr>
+                        <a:t>Object inner()</a:t>
+                      </a:r>
+                      <a:endParaRPr lang="zh-CN" altLang="en-US" b="1" dirty="0">
+                        <a:latin typeface="Times New Roman" panose="02020603050405020304" pitchFamily="18" charset="0"/>
+                        <a:ea typeface="宋体" panose="02010600030101010101" pitchFamily="2" charset="-122"/>
+                        <a:cs typeface="Times New Roman" panose="02020603050405020304" pitchFamily="18" charset="0"/>
+                      </a:endParaRPr>
+                    </a:p>
+                  </p:txBody>
+                </p:sp>
+                <p:sp>
+                  <p:nvSpPr>
+                    <p:cNvPr id="40" name="文本框 39">
+                      <a:extLst>
+                        <a:ext uri="{FF2B5EF4-FFF2-40B4-BE49-F238E27FC236}">
+                          <a16:creationId xmlns:a16="http://schemas.microsoft.com/office/drawing/2014/main" id="{2B813025-9BC4-4550-AB28-75C1D1C331DD}"/>
+                        </a:ext>
+                      </a:extLst>
+                    </p:cNvPr>
+                    <p:cNvSpPr txBox="1"/>
+                    <p:nvPr/>
+                  </p:nvSpPr>
+                  <p:spPr>
+                    <a:xfrm>
+                      <a:off x="3100575" y="1032652"/>
+                      <a:ext cx="869952" cy="338554"/>
+                    </a:xfrm>
+                    <a:prstGeom prst="rect">
+                      <a:avLst/>
+                    </a:prstGeom>
+                    <a:noFill/>
+                  </p:spPr>
+                  <p:txBody>
+                    <a:bodyPr wrap="square" rtlCol="0">
+                      <a:spAutoFit/>
+                    </a:bodyPr>
+                    <a:lstStyle/>
+                    <a:p>
+                      <a:r>
+                        <a:rPr lang="en-US" altLang="zh-CN" sz="1600" dirty="0">
+                          <a:latin typeface="Times New Roman" panose="02020603050405020304" pitchFamily="18" charset="0"/>
+                          <a:ea typeface="宋体" panose="02010600030101010101" pitchFamily="2" charset="-122"/>
+                          <a:cs typeface="Times New Roman" panose="02020603050405020304" pitchFamily="18" charset="0"/>
+                        </a:rPr>
+                        <a:t>closures</a:t>
+                      </a:r>
+                      <a:endParaRPr lang="zh-CN" altLang="en-US" sz="1600" dirty="0">
+                        <a:latin typeface="Times New Roman" panose="02020603050405020304" pitchFamily="18" charset="0"/>
+                        <a:ea typeface="宋体" panose="02010600030101010101" pitchFamily="2" charset="-122"/>
+                        <a:cs typeface="Times New Roman" panose="02020603050405020304" pitchFamily="18" charset="0"/>
+                      </a:endParaRPr>
+                    </a:p>
+                  </p:txBody>
+                </p:sp>
+                <p:sp>
+                  <p:nvSpPr>
+                    <p:cNvPr id="41" name="文本框 40">
+                      <a:extLst>
+                        <a:ext uri="{FF2B5EF4-FFF2-40B4-BE49-F238E27FC236}">
+                          <a16:creationId xmlns:a16="http://schemas.microsoft.com/office/drawing/2014/main" id="{3D205C62-5E1F-4ED4-8534-F6D0503C68B6}"/>
+                        </a:ext>
+                      </a:extLst>
+                    </p:cNvPr>
+                    <p:cNvSpPr txBox="1"/>
+                    <p:nvPr/>
+                  </p:nvSpPr>
+                  <p:spPr>
+                    <a:xfrm>
+                      <a:off x="3100575" y="1441056"/>
+                      <a:ext cx="404664" cy="338554"/>
+                    </a:xfrm>
+                    <a:prstGeom prst="rect">
+                      <a:avLst/>
+                    </a:prstGeom>
+                    <a:noFill/>
+                  </p:spPr>
+                  <p:txBody>
+                    <a:bodyPr wrap="square" rtlCol="0">
+                      <a:spAutoFit/>
+                    </a:bodyPr>
+                    <a:lstStyle/>
+                    <a:p>
+                      <a:r>
+                        <a:rPr lang="en-US" altLang="zh-CN" sz="1600" dirty="0">
+                          <a:latin typeface="Times New Roman" panose="02020603050405020304" pitchFamily="18" charset="0"/>
+                          <a:ea typeface="宋体" panose="02010600030101010101" pitchFamily="2" charset="-122"/>
+                          <a:cs typeface="Times New Roman" panose="02020603050405020304" pitchFamily="18" charset="0"/>
+                        </a:rPr>
+                        <a:t>…</a:t>
+                      </a:r>
+                      <a:endParaRPr lang="zh-CN" altLang="en-US" sz="1600" dirty="0">
+                        <a:latin typeface="Times New Roman" panose="02020603050405020304" pitchFamily="18" charset="0"/>
+                        <a:ea typeface="宋体" panose="02010600030101010101" pitchFamily="2" charset="-122"/>
+                        <a:cs typeface="Times New Roman" panose="02020603050405020304" pitchFamily="18" charset="0"/>
+                      </a:endParaRPr>
+                    </a:p>
+                  </p:txBody>
+                </p:sp>
+                <p:cxnSp>
+                  <p:nvCxnSpPr>
+                    <p:cNvPr id="42" name="直接连接符 41">
+                      <a:extLst>
+                        <a:ext uri="{FF2B5EF4-FFF2-40B4-BE49-F238E27FC236}">
+                          <a16:creationId xmlns:a16="http://schemas.microsoft.com/office/drawing/2014/main" id="{17C57E02-B30B-456B-B183-27FF5525664B}"/>
+                        </a:ext>
+                      </a:extLst>
+                    </p:cNvPr>
+                    <p:cNvCxnSpPr/>
+                    <p:nvPr/>
+                  </p:nvCxnSpPr>
+                  <p:spPr>
+                    <a:xfrm>
+                      <a:off x="3041643" y="962802"/>
+                      <a:ext cx="2555118" cy="0"/>
+                    </a:xfrm>
+                    <a:prstGeom prst="line">
+                      <a:avLst/>
+                    </a:prstGeom>
+                    <a:ln w="28575">
+                      <a:solidFill>
+                        <a:schemeClr val="tx1"/>
+                      </a:solidFill>
+                    </a:ln>
+                  </p:spPr>
+                  <p:style>
+                    <a:lnRef idx="1">
+                      <a:schemeClr val="accent1"/>
+                    </a:lnRef>
+                    <a:fillRef idx="0">
+                      <a:schemeClr val="accent1"/>
+                    </a:fillRef>
+                    <a:effectRef idx="0">
+                      <a:schemeClr val="accent1"/>
+                    </a:effectRef>
+                    <a:fontRef idx="minor">
+                      <a:schemeClr val="tx1"/>
+                    </a:fontRef>
+                  </p:style>
+                </p:cxnSp>
+                <p:cxnSp>
+                  <p:nvCxnSpPr>
+                    <p:cNvPr id="43" name="直接连接符 42">
+                      <a:extLst>
+                        <a:ext uri="{FF2B5EF4-FFF2-40B4-BE49-F238E27FC236}">
+                          <a16:creationId xmlns:a16="http://schemas.microsoft.com/office/drawing/2014/main" id="{7540B650-BA9B-4DBB-AD26-E787A838B4F8}"/>
+                        </a:ext>
+                      </a:extLst>
+                    </p:cNvPr>
+                    <p:cNvCxnSpPr>
+                      <a:cxnSpLocks/>
+                    </p:cNvCxnSpPr>
+                    <p:nvPr/>
+                  </p:nvCxnSpPr>
+                  <p:spPr>
+                    <a:xfrm>
+                      <a:off x="4122351" y="962802"/>
+                      <a:ext cx="0" cy="895825"/>
+                    </a:xfrm>
+                    <a:prstGeom prst="line">
+                      <a:avLst/>
+                    </a:prstGeom>
+                    <a:ln w="28575">
+                      <a:solidFill>
+                        <a:schemeClr val="tx1"/>
+                      </a:solidFill>
+                    </a:ln>
+                  </p:spPr>
+                  <p:style>
+                    <a:lnRef idx="1">
+                      <a:schemeClr val="accent1"/>
+                    </a:lnRef>
+                    <a:fillRef idx="0">
+                      <a:schemeClr val="accent1"/>
+                    </a:fillRef>
+                    <a:effectRef idx="0">
+                      <a:schemeClr val="accent1"/>
+                    </a:effectRef>
+                    <a:fontRef idx="minor">
+                      <a:schemeClr val="tx1"/>
+                    </a:fontRef>
+                  </p:style>
+                </p:cxnSp>
+              </p:grpSp>
             </p:grpSp>
+            <p:sp>
+              <p:nvSpPr>
+                <p:cNvPr id="35" name="文本框 34">
+                  <a:extLst>
+                    <a:ext uri="{FF2B5EF4-FFF2-40B4-BE49-F238E27FC236}">
+                      <a16:creationId xmlns:a16="http://schemas.microsoft.com/office/drawing/2014/main" id="{929DD6A5-341F-41FE-B65D-BEF75BD175EE}"/>
+                    </a:ext>
+                  </a:extLst>
+                </p:cNvPr>
+                <p:cNvSpPr txBox="1"/>
+                <p:nvPr/>
+              </p:nvSpPr>
+              <p:spPr>
+                <a:xfrm>
+                  <a:off x="3384085" y="1849380"/>
+                  <a:ext cx="404664" cy="338554"/>
+                </a:xfrm>
+                <a:prstGeom prst="rect">
+                  <a:avLst/>
+                </a:prstGeom>
+                <a:noFill/>
+              </p:spPr>
+              <p:txBody>
+                <a:bodyPr wrap="square" rtlCol="0">
+                  <a:spAutoFit/>
+                </a:bodyPr>
+                <a:lstStyle/>
+                <a:p>
+                  <a:r>
+                    <a:rPr lang="en-US" altLang="zh-CN" sz="1600" dirty="0">
+                      <a:latin typeface="Times New Roman" panose="02020603050405020304" pitchFamily="18" charset="0"/>
+                      <a:ea typeface="宋体" panose="02010600030101010101" pitchFamily="2" charset="-122"/>
+                      <a:cs typeface="Times New Roman" panose="02020603050405020304" pitchFamily="18" charset="0"/>
+                    </a:rPr>
+                    <a:t>…</a:t>
+                  </a:r>
+                  <a:endParaRPr lang="zh-CN" altLang="en-US" sz="1600" dirty="0">
+                    <a:latin typeface="Times New Roman" panose="02020603050405020304" pitchFamily="18" charset="0"/>
+                    <a:ea typeface="宋体" panose="02010600030101010101" pitchFamily="2" charset="-122"/>
+                    <a:cs typeface="Times New Roman" panose="02020603050405020304" pitchFamily="18" charset="0"/>
+                  </a:endParaRPr>
+                </a:p>
+              </p:txBody>
+            </p:sp>
           </p:grpSp>
           <p:sp>
             <p:nvSpPr>
-              <p:cNvPr id="119" name="文本框 118">
+              <p:cNvPr id="44" name="文本框 43">
                 <a:extLst>
                   <a:ext uri="{FF2B5EF4-FFF2-40B4-BE49-F238E27FC236}">
-                    <a16:creationId xmlns:a16="http://schemas.microsoft.com/office/drawing/2014/main" id="{1A2947AD-7136-443E-846F-5DFEC9C11360}"/>
+                    <a16:creationId xmlns:a16="http://schemas.microsoft.com/office/drawing/2014/main" id="{8026012F-AEA4-41C1-BA44-8049312235FF}"/>
                   </a:ext>
                 </a:extLst>
               </p:cNvPr>
@@ -11449,8 +11567,8 @@
             </p:nvSpPr>
             <p:spPr>
               <a:xfrm>
-                <a:off x="3384085" y="1849380"/>
-                <a:ext cx="404664" cy="338554"/>
+                <a:off x="6824867" y="3178615"/>
+                <a:ext cx="1392935" cy="338554"/>
               </a:xfrm>
               <a:prstGeom prst="rect">
                 <a:avLst/>
@@ -11469,7 +11587,7 @@
                     <a:ea typeface="宋体" panose="02010600030101010101" pitchFamily="2" charset="-122"/>
                     <a:cs typeface="Times New Roman" panose="02020603050405020304" pitchFamily="18" charset="0"/>
                   </a:rPr>
-                  <a:t>…</a:t>
+                  <a:t>Tuple(      )</a:t>
                 </a:r>
                 <a:endParaRPr lang="zh-CN" altLang="en-US" sz="1600" dirty="0">
                   <a:latin typeface="Times New Roman" panose="02020603050405020304" pitchFamily="18" charset="0"/>
@@ -11480,77 +11598,57 @@
             </p:txBody>
           </p:sp>
         </p:grpSp>
-        <p:sp>
-          <p:nvSpPr>
-            <p:cNvPr id="117" name="文本框 116">
+        <p:cxnSp>
+          <p:nvCxnSpPr>
+            <p:cNvPr id="111" name="连接符: 肘形 110">
               <a:extLst>
                 <a:ext uri="{FF2B5EF4-FFF2-40B4-BE49-F238E27FC236}">
-                  <a16:creationId xmlns:a16="http://schemas.microsoft.com/office/drawing/2014/main" id="{E0AE4B63-147D-4C2B-9564-5E841BBC3A8F}"/>
+                  <a16:creationId xmlns:a16="http://schemas.microsoft.com/office/drawing/2014/main" id="{192E5FCE-E107-4C0B-96E1-2FEDB8F0F53B}"/>
                 </a:ext>
               </a:extLst>
             </p:cNvPr>
-            <p:cNvSpPr txBox="1"/>
+            <p:cNvCxnSpPr>
+              <a:cxnSpLocks/>
+              <a:endCxn id="60" idx="0"/>
+            </p:cNvCxnSpPr>
             <p:nvPr/>
-          </p:nvSpPr>
+          </p:nvCxnSpPr>
           <p:spPr>
             <a:xfrm>
-              <a:off x="6824867" y="3178615"/>
-              <a:ext cx="1392935" cy="338554"/>
+              <a:off x="2482850" y="1016000"/>
+              <a:ext cx="1802404" cy="581386"/>
             </a:xfrm>
-            <a:prstGeom prst="rect">
+            <a:prstGeom prst="bentConnector2">
               <a:avLst/>
             </a:prstGeom>
-            <a:noFill/>
+            <a:ln w="28575">
+              <a:solidFill>
+                <a:schemeClr val="tx1"/>
+              </a:solidFill>
+              <a:tailEnd type="triangle"/>
+            </a:ln>
           </p:spPr>
-          <p:txBody>
-            <a:bodyPr wrap="square" rtlCol="0">
-              <a:spAutoFit/>
-            </a:bodyPr>
-            <a:lstStyle/>
-            <a:p>
-              <a:r>
-                <a:rPr lang="en-US" altLang="zh-CN" sz="1600" dirty="0">
-                  <a:latin typeface="Times New Roman" panose="02020603050405020304" pitchFamily="18" charset="0"/>
-                  <a:ea typeface="宋体" panose="02010600030101010101" pitchFamily="2" charset="-122"/>
-                  <a:cs typeface="Times New Roman" panose="02020603050405020304" pitchFamily="18" charset="0"/>
-                </a:rPr>
-                <a:t>Tuple(      )</a:t>
-              </a:r>
-              <a:endParaRPr lang="zh-CN" altLang="en-US" sz="1600" dirty="0">
-                <a:latin typeface="Times New Roman" panose="02020603050405020304" pitchFamily="18" charset="0"/>
-                <a:ea typeface="宋体" panose="02010600030101010101" pitchFamily="2" charset="-122"/>
-                <a:cs typeface="Times New Roman" panose="02020603050405020304" pitchFamily="18" charset="0"/>
-              </a:endParaRPr>
-            </a:p>
-          </p:txBody>
-        </p:sp>
-      </p:grpSp>
-      <p:grpSp>
-        <p:nvGrpSpPr>
-          <p:cNvPr id="128" name="组合 127">
-            <a:extLst>
-              <a:ext uri="{FF2B5EF4-FFF2-40B4-BE49-F238E27FC236}">
-                <a16:creationId xmlns:a16="http://schemas.microsoft.com/office/drawing/2014/main" id="{8A8FD3DD-F9AF-47F6-959D-734F42B8DC96}"/>
-              </a:ext>
-            </a:extLst>
-          </p:cNvPr>
-          <p:cNvGrpSpPr/>
-          <p:nvPr/>
-        </p:nvGrpSpPr>
-        <p:grpSpPr>
-          <a:xfrm>
-            <a:off x="8901481" y="1604000"/>
-            <a:ext cx="1358920" cy="725432"/>
-            <a:chOff x="6534909" y="436632"/>
-            <a:chExt cx="1358920" cy="725432"/>
-          </a:xfrm>
-        </p:grpSpPr>
+          <p:style>
+            <a:lnRef idx="1">
+              <a:schemeClr val="accent1"/>
+            </a:lnRef>
+            <a:fillRef idx="0">
+              <a:schemeClr val="accent1"/>
+            </a:fillRef>
+            <a:effectRef idx="0">
+              <a:schemeClr val="accent1"/>
+            </a:effectRef>
+            <a:fontRef idx="minor">
+              <a:schemeClr val="tx1"/>
+            </a:fontRef>
+          </p:style>
+        </p:cxnSp>
         <p:sp>
           <p:nvSpPr>
-            <p:cNvPr id="129" name="矩形 128">
+            <p:cNvPr id="54" name="椭圆 53">
               <a:extLst>
                 <a:ext uri="{FF2B5EF4-FFF2-40B4-BE49-F238E27FC236}">
-                  <a16:creationId xmlns:a16="http://schemas.microsoft.com/office/drawing/2014/main" id="{8D63A0FD-8708-4D04-A22C-E3B9D472312A}"/>
+                  <a16:creationId xmlns:a16="http://schemas.microsoft.com/office/drawing/2014/main" id="{03BC8FC2-C05D-4DB6-8848-E517C5D5A8A2}"/>
                 </a:ext>
               </a:extLst>
             </p:cNvPr>
@@ -11559,17 +11657,17 @@
           </p:nvSpPr>
           <p:spPr>
             <a:xfrm>
-              <a:off x="6534909" y="436634"/>
-              <a:ext cx="1358920" cy="725430"/>
+              <a:off x="2420504" y="951420"/>
+              <a:ext cx="136566" cy="136566"/>
             </a:xfrm>
-            <a:prstGeom prst="rect">
+            <a:prstGeom prst="ellipse">
               <a:avLst/>
             </a:prstGeom>
-            <a:noFill/>
-            <a:ln w="28575">
-              <a:solidFill>
-                <a:schemeClr val="tx1"/>
-              </a:solidFill>
+            <a:solidFill>
+              <a:schemeClr val="tx1"/>
+            </a:solidFill>
+            <a:ln>
+              <a:noFill/>
             </a:ln>
           </p:spPr>
           <p:style>
@@ -11597,213 +11695,1513 @@
             </a:p>
           </p:txBody>
         </p:sp>
-        <p:sp>
-          <p:nvSpPr>
-            <p:cNvPr id="130" name="文本框 129">
+        <p:cxnSp>
+          <p:nvCxnSpPr>
+            <p:cNvPr id="113" name="连接符: 肘形 112">
               <a:extLst>
                 <a:ext uri="{FF2B5EF4-FFF2-40B4-BE49-F238E27FC236}">
-                  <a16:creationId xmlns:a16="http://schemas.microsoft.com/office/drawing/2014/main" id="{60937817-882F-49C1-9862-53368A06F66B}"/>
+                  <a16:creationId xmlns:a16="http://schemas.microsoft.com/office/drawing/2014/main" id="{0AD260BF-1192-4B69-8A76-C1958737F4D2}"/>
                 </a:ext>
               </a:extLst>
             </p:cNvPr>
-            <p:cNvSpPr txBox="1"/>
+            <p:cNvCxnSpPr>
+              <a:endCxn id="60" idx="2"/>
+            </p:cNvCxnSpPr>
+            <p:nvPr/>
+          </p:nvCxnSpPr>
+          <p:spPr>
+            <a:xfrm flipV="1">
+              <a:off x="2171700" y="2322816"/>
+              <a:ext cx="2113554" cy="474827"/>
+            </a:xfrm>
+            <a:prstGeom prst="bentConnector2">
+              <a:avLst/>
+            </a:prstGeom>
+            <a:ln w="28575">
+              <a:solidFill>
+                <a:schemeClr val="tx1"/>
+              </a:solidFill>
+              <a:tailEnd type="triangle"/>
+            </a:ln>
+          </p:spPr>
+          <p:style>
+            <a:lnRef idx="1">
+              <a:schemeClr val="accent1"/>
+            </a:lnRef>
+            <a:fillRef idx="0">
+              <a:schemeClr val="accent1"/>
+            </a:fillRef>
+            <a:effectRef idx="0">
+              <a:schemeClr val="accent1"/>
+            </a:effectRef>
+            <a:fontRef idx="minor">
+              <a:schemeClr val="tx1"/>
+            </a:fontRef>
+          </p:style>
+        </p:cxnSp>
+        <p:sp>
+          <p:nvSpPr>
+            <p:cNvPr id="55" name="椭圆 54">
+              <a:extLst>
+                <a:ext uri="{FF2B5EF4-FFF2-40B4-BE49-F238E27FC236}">
+                  <a16:creationId xmlns:a16="http://schemas.microsoft.com/office/drawing/2014/main" id="{A3AED03E-41D1-4A1A-AEB8-33DD34B7774C}"/>
+                </a:ext>
+              </a:extLst>
+            </p:cNvPr>
+            <p:cNvSpPr/>
             <p:nvPr/>
           </p:nvSpPr>
           <p:spPr>
             <a:xfrm>
-              <a:off x="6560985" y="436632"/>
-              <a:ext cx="1306768" cy="369332"/>
+              <a:off x="2109355" y="2729702"/>
+              <a:ext cx="136566" cy="136566"/>
             </a:xfrm>
-            <a:prstGeom prst="rect">
+            <a:prstGeom prst="ellipse">
               <a:avLst/>
             </a:prstGeom>
-            <a:noFill/>
+            <a:solidFill>
+              <a:schemeClr val="tx1"/>
+            </a:solidFill>
+            <a:ln>
+              <a:noFill/>
+            </a:ln>
           </p:spPr>
+          <p:style>
+            <a:lnRef idx="2">
+              <a:schemeClr val="accent1">
+                <a:shade val="50000"/>
+              </a:schemeClr>
+            </a:lnRef>
+            <a:fillRef idx="1">
+              <a:schemeClr val="accent1"/>
+            </a:fillRef>
+            <a:effectRef idx="0">
+              <a:schemeClr val="accent1"/>
+            </a:effectRef>
+            <a:fontRef idx="minor">
+              <a:schemeClr val="lt1"/>
+            </a:fontRef>
+          </p:style>
           <p:txBody>
-            <a:bodyPr wrap="none" rtlCol="0">
-              <a:spAutoFit/>
-            </a:bodyPr>
+            <a:bodyPr rtlCol="0" anchor="ctr"/>
             <a:lstStyle/>
             <a:p>
-              <a:r>
-                <a:rPr lang="en-US" altLang="zh-CN" b="1" dirty="0">
-                  <a:latin typeface="Times New Roman" panose="02020603050405020304" pitchFamily="18" charset="0"/>
-                  <a:cs typeface="Times New Roman" panose="02020603050405020304" pitchFamily="18" charset="0"/>
-                </a:rPr>
-                <a:t>Cell Object</a:t>
-              </a:r>
-              <a:endParaRPr lang="zh-CN" altLang="en-US" b="1" dirty="0">
-                <a:latin typeface="Times New Roman" panose="02020603050405020304" pitchFamily="18" charset="0"/>
-                <a:ea typeface="宋体" panose="02010600030101010101" pitchFamily="2" charset="-122"/>
-                <a:cs typeface="Times New Roman" panose="02020603050405020304" pitchFamily="18" charset="0"/>
-              </a:endParaRPr>
+              <a:pPr algn="ctr"/>
+              <a:endParaRPr lang="zh-CN" altLang="en-US"/>
             </a:p>
           </p:txBody>
         </p:sp>
-        <p:sp>
-          <p:nvSpPr>
-            <p:cNvPr id="131" name="文本框 130">
+      </p:grpSp>
+      <p:grpSp>
+        <p:nvGrpSpPr>
+          <p:cNvPr id="228" name="组合 227">
+            <a:extLst>
+              <a:ext uri="{FF2B5EF4-FFF2-40B4-BE49-F238E27FC236}">
+                <a16:creationId xmlns:a16="http://schemas.microsoft.com/office/drawing/2014/main" id="{59419326-9DE4-4AF1-92E9-48DDF851F278}"/>
+              </a:ext>
+            </a:extLst>
+          </p:cNvPr>
+          <p:cNvGrpSpPr/>
+          <p:nvPr/>
+        </p:nvGrpSpPr>
+        <p:grpSpPr>
+          <a:xfrm>
+            <a:off x="5536371" y="341395"/>
+            <a:ext cx="4645568" cy="3112946"/>
+            <a:chOff x="319146" y="341395"/>
+            <a:chExt cx="4645568" cy="3112946"/>
+          </a:xfrm>
+        </p:grpSpPr>
+        <p:grpSp>
+          <p:nvGrpSpPr>
+            <p:cNvPr id="229" name="组合 228">
               <a:extLst>
                 <a:ext uri="{FF2B5EF4-FFF2-40B4-BE49-F238E27FC236}">
-                  <a16:creationId xmlns:a16="http://schemas.microsoft.com/office/drawing/2014/main" id="{846E62AC-A9E6-41DB-976C-98138F25436C}"/>
+                  <a16:creationId xmlns:a16="http://schemas.microsoft.com/office/drawing/2014/main" id="{0222EBB6-C2D6-4F1A-9FA1-7D0E9842B182}"/>
                 </a:ext>
               </a:extLst>
             </p:cNvPr>
-            <p:cNvSpPr txBox="1"/>
+            <p:cNvGrpSpPr/>
+            <p:nvPr/>
+          </p:nvGrpSpPr>
+          <p:grpSpPr>
+            <a:xfrm>
+              <a:off x="3605794" y="1597384"/>
+              <a:ext cx="1358920" cy="725432"/>
+              <a:chOff x="6534909" y="436632"/>
+              <a:chExt cx="1358920" cy="725432"/>
+            </a:xfrm>
+          </p:grpSpPr>
+          <p:sp>
+            <p:nvSpPr>
+              <p:cNvPr id="260" name="矩形 259">
+                <a:extLst>
+                  <a:ext uri="{FF2B5EF4-FFF2-40B4-BE49-F238E27FC236}">
+                    <a16:creationId xmlns:a16="http://schemas.microsoft.com/office/drawing/2014/main" id="{55C33C65-1BFA-4FAB-A10C-B6726DAE1141}"/>
+                  </a:ext>
+                </a:extLst>
+              </p:cNvPr>
+              <p:cNvSpPr/>
+              <p:nvPr/>
+            </p:nvSpPr>
+            <p:spPr>
+              <a:xfrm>
+                <a:off x="6534909" y="436634"/>
+                <a:ext cx="1358920" cy="725430"/>
+              </a:xfrm>
+              <a:prstGeom prst="rect">
+                <a:avLst/>
+              </a:prstGeom>
+              <a:noFill/>
+              <a:ln w="28575">
+                <a:solidFill>
+                  <a:schemeClr val="tx1"/>
+                </a:solidFill>
+              </a:ln>
+            </p:spPr>
+            <p:style>
+              <a:lnRef idx="2">
+                <a:schemeClr val="accent1">
+                  <a:shade val="50000"/>
+                </a:schemeClr>
+              </a:lnRef>
+              <a:fillRef idx="1">
+                <a:schemeClr val="accent1"/>
+              </a:fillRef>
+              <a:effectRef idx="0">
+                <a:schemeClr val="accent1"/>
+              </a:effectRef>
+              <a:fontRef idx="minor">
+                <a:schemeClr val="lt1"/>
+              </a:fontRef>
+            </p:style>
+            <p:txBody>
+              <a:bodyPr rtlCol="0" anchor="ctr"/>
+              <a:lstStyle/>
+              <a:p>
+                <a:pPr algn="ctr"/>
+                <a:endParaRPr lang="zh-CN" altLang="en-US"/>
+              </a:p>
+            </p:txBody>
+          </p:sp>
+          <p:sp>
+            <p:nvSpPr>
+              <p:cNvPr id="261" name="文本框 260">
+                <a:extLst>
+                  <a:ext uri="{FF2B5EF4-FFF2-40B4-BE49-F238E27FC236}">
+                    <a16:creationId xmlns:a16="http://schemas.microsoft.com/office/drawing/2014/main" id="{AFA24797-514D-4EE2-8CFC-7A3885B6B15F}"/>
+                  </a:ext>
+                </a:extLst>
+              </p:cNvPr>
+              <p:cNvSpPr txBox="1"/>
+              <p:nvPr/>
+            </p:nvSpPr>
+            <p:spPr>
+              <a:xfrm>
+                <a:off x="6560985" y="436632"/>
+                <a:ext cx="1306768" cy="369332"/>
+              </a:xfrm>
+              <a:prstGeom prst="rect">
+                <a:avLst/>
+              </a:prstGeom>
+              <a:noFill/>
+            </p:spPr>
+            <p:txBody>
+              <a:bodyPr wrap="none" rtlCol="0">
+                <a:spAutoFit/>
+              </a:bodyPr>
+              <a:lstStyle/>
+              <a:p>
+                <a:r>
+                  <a:rPr lang="en-US" altLang="zh-CN" b="1" dirty="0">
+                    <a:latin typeface="Times New Roman" panose="02020603050405020304" pitchFamily="18" charset="0"/>
+                    <a:cs typeface="Times New Roman" panose="02020603050405020304" pitchFamily="18" charset="0"/>
+                  </a:rPr>
+                  <a:t>Cell Object</a:t>
+                </a:r>
+                <a:endParaRPr lang="zh-CN" altLang="en-US" b="1" dirty="0">
+                  <a:latin typeface="Times New Roman" panose="02020603050405020304" pitchFamily="18" charset="0"/>
+                  <a:ea typeface="宋体" panose="02010600030101010101" pitchFamily="2" charset="-122"/>
+                  <a:cs typeface="Times New Roman" panose="02020603050405020304" pitchFamily="18" charset="0"/>
+                </a:endParaRPr>
+              </a:p>
+            </p:txBody>
+          </p:sp>
+          <p:sp>
+            <p:nvSpPr>
+              <p:cNvPr id="262" name="文本框 261">
+                <a:extLst>
+                  <a:ext uri="{FF2B5EF4-FFF2-40B4-BE49-F238E27FC236}">
+                    <a16:creationId xmlns:a16="http://schemas.microsoft.com/office/drawing/2014/main" id="{49C072DE-AA51-43BC-A24F-38385DF89135}"/>
+                  </a:ext>
+                </a:extLst>
+              </p:cNvPr>
+              <p:cNvSpPr txBox="1"/>
+              <p:nvPr/>
+            </p:nvSpPr>
+            <p:spPr>
+              <a:xfrm>
+                <a:off x="6691629" y="753659"/>
+                <a:ext cx="1045479" cy="369332"/>
+              </a:xfrm>
+              <a:prstGeom prst="rect">
+                <a:avLst/>
+              </a:prstGeom>
+              <a:noFill/>
+            </p:spPr>
+            <p:txBody>
+              <a:bodyPr wrap="none" rtlCol="0">
+                <a:spAutoFit/>
+              </a:bodyPr>
+              <a:lstStyle/>
+              <a:p>
+                <a:r>
+                  <a:rPr lang="en-US" altLang="zh-CN" dirty="0">
+                    <a:latin typeface="Times New Roman" panose="02020603050405020304" pitchFamily="18" charset="0"/>
+                    <a:cs typeface="Times New Roman" panose="02020603050405020304" pitchFamily="18" charset="0"/>
+                  </a:rPr>
+                  <a:t>value=10</a:t>
+                </a:r>
+                <a:endParaRPr lang="zh-CN" altLang="en-US" dirty="0">
+                  <a:latin typeface="Times New Roman" panose="02020603050405020304" pitchFamily="18" charset="0"/>
+                  <a:cs typeface="Times New Roman" panose="02020603050405020304" pitchFamily="18" charset="0"/>
+                </a:endParaRPr>
+              </a:p>
+            </p:txBody>
+          </p:sp>
+        </p:grpSp>
+        <p:grpSp>
+          <p:nvGrpSpPr>
+            <p:cNvPr id="230" name="组合 229">
+              <a:extLst>
+                <a:ext uri="{FF2B5EF4-FFF2-40B4-BE49-F238E27FC236}">
+                  <a16:creationId xmlns:a16="http://schemas.microsoft.com/office/drawing/2014/main" id="{D731CB6F-F70E-48F0-818B-9E5EF7224A62}"/>
+                </a:ext>
+              </a:extLst>
+            </p:cNvPr>
+            <p:cNvGrpSpPr/>
+            <p:nvPr/>
+          </p:nvGrpSpPr>
+          <p:grpSpPr>
+            <a:xfrm>
+              <a:off x="319146" y="341395"/>
+              <a:ext cx="2555118" cy="1335006"/>
+              <a:chOff x="1720805" y="417595"/>
+              <a:chExt cx="2555118" cy="1335006"/>
+            </a:xfrm>
+          </p:grpSpPr>
+          <p:grpSp>
+            <p:nvGrpSpPr>
+              <p:cNvPr id="248" name="组合 247">
+                <a:extLst>
+                  <a:ext uri="{FF2B5EF4-FFF2-40B4-BE49-F238E27FC236}">
+                    <a16:creationId xmlns:a16="http://schemas.microsoft.com/office/drawing/2014/main" id="{B745BBF6-A4A6-4FDB-A5CB-766E35BA7488}"/>
+                  </a:ext>
+                </a:extLst>
+              </p:cNvPr>
+              <p:cNvGrpSpPr/>
+              <p:nvPr/>
+            </p:nvGrpSpPr>
+            <p:grpSpPr>
+              <a:xfrm>
+                <a:off x="1720805" y="417595"/>
+                <a:ext cx="2555118" cy="1335006"/>
+                <a:chOff x="2025605" y="931945"/>
+                <a:chExt cx="2555118" cy="1335006"/>
+              </a:xfrm>
+            </p:grpSpPr>
+            <p:grpSp>
+              <p:nvGrpSpPr>
+                <p:cNvPr id="250" name="组合 249">
+                  <a:extLst>
+                    <a:ext uri="{FF2B5EF4-FFF2-40B4-BE49-F238E27FC236}">
+                      <a16:creationId xmlns:a16="http://schemas.microsoft.com/office/drawing/2014/main" id="{3BC25DDE-2AA1-4125-AD97-8EE553BFC90D}"/>
+                    </a:ext>
+                  </a:extLst>
+                </p:cNvPr>
+                <p:cNvGrpSpPr/>
+                <p:nvPr/>
+              </p:nvGrpSpPr>
+              <p:grpSpPr>
+                <a:xfrm>
+                  <a:off x="2025605" y="931945"/>
+                  <a:ext cx="2555118" cy="1335006"/>
+                  <a:chOff x="3041643" y="523621"/>
+                  <a:chExt cx="2555118" cy="1335006"/>
+                </a:xfrm>
+              </p:grpSpPr>
+              <p:cxnSp>
+                <p:nvCxnSpPr>
+                  <p:cNvPr id="252" name="直接连接符 251">
+                    <a:extLst>
+                      <a:ext uri="{FF2B5EF4-FFF2-40B4-BE49-F238E27FC236}">
+                        <a16:creationId xmlns:a16="http://schemas.microsoft.com/office/drawing/2014/main" id="{1B204D9E-C3A1-44C0-8498-92160FF12064}"/>
+                      </a:ext>
+                    </a:extLst>
+                  </p:cNvPr>
+                  <p:cNvCxnSpPr/>
+                  <p:nvPr/>
+                </p:nvCxnSpPr>
+                <p:spPr>
+                  <a:xfrm>
+                    <a:off x="3041643" y="1375158"/>
+                    <a:ext cx="2555118" cy="0"/>
+                  </a:xfrm>
+                  <a:prstGeom prst="line">
+                    <a:avLst/>
+                  </a:prstGeom>
+                  <a:ln w="28575">
+                    <a:solidFill>
+                      <a:schemeClr val="tx1"/>
+                    </a:solidFill>
+                    <a:prstDash val="sysDot"/>
+                  </a:ln>
+                </p:spPr>
+                <p:style>
+                  <a:lnRef idx="1">
+                    <a:schemeClr val="accent1"/>
+                  </a:lnRef>
+                  <a:fillRef idx="0">
+                    <a:schemeClr val="accent1"/>
+                  </a:fillRef>
+                  <a:effectRef idx="0">
+                    <a:schemeClr val="accent1"/>
+                  </a:effectRef>
+                  <a:fontRef idx="minor">
+                    <a:schemeClr val="tx1"/>
+                  </a:fontRef>
+                </p:style>
+              </p:cxnSp>
+              <p:grpSp>
+                <p:nvGrpSpPr>
+                  <p:cNvPr id="253" name="组合 252">
+                    <a:extLst>
+                      <a:ext uri="{FF2B5EF4-FFF2-40B4-BE49-F238E27FC236}">
+                        <a16:creationId xmlns:a16="http://schemas.microsoft.com/office/drawing/2014/main" id="{A037CA39-FCD7-487C-817F-DA3FE67F7EAA}"/>
+                      </a:ext>
+                    </a:extLst>
+                  </p:cNvPr>
+                  <p:cNvGrpSpPr/>
+                  <p:nvPr/>
+                </p:nvGrpSpPr>
+                <p:grpSpPr>
+                  <a:xfrm>
+                    <a:off x="3041643" y="523621"/>
+                    <a:ext cx="2555118" cy="1335006"/>
+                    <a:chOff x="3041643" y="523621"/>
+                    <a:chExt cx="2555118" cy="1335006"/>
+                  </a:xfrm>
+                </p:grpSpPr>
+                <p:sp>
+                  <p:nvSpPr>
+                    <p:cNvPr id="254" name="矩形 253">
+                      <a:extLst>
+                        <a:ext uri="{FF2B5EF4-FFF2-40B4-BE49-F238E27FC236}">
+                          <a16:creationId xmlns:a16="http://schemas.microsoft.com/office/drawing/2014/main" id="{F3EA9BC8-1770-4D1D-9FF6-98C672244D13}"/>
+                        </a:ext>
+                      </a:extLst>
+                    </p:cNvPr>
+                    <p:cNvSpPr/>
+                    <p:nvPr/>
+                  </p:nvSpPr>
+                  <p:spPr>
+                    <a:xfrm>
+                      <a:off x="3041643" y="523621"/>
+                      <a:ext cx="2555118" cy="1335006"/>
+                    </a:xfrm>
+                    <a:prstGeom prst="rect">
+                      <a:avLst/>
+                    </a:prstGeom>
+                    <a:noFill/>
+                    <a:ln w="28575">
+                      <a:solidFill>
+                        <a:schemeClr val="tx1"/>
+                      </a:solidFill>
+                      <a:prstDash val="sysDot"/>
+                    </a:ln>
+                  </p:spPr>
+                  <p:style>
+                    <a:lnRef idx="2">
+                      <a:schemeClr val="accent1">
+                        <a:shade val="50000"/>
+                      </a:schemeClr>
+                    </a:lnRef>
+                    <a:fillRef idx="1">
+                      <a:schemeClr val="accent1"/>
+                    </a:fillRef>
+                    <a:effectRef idx="0">
+                      <a:schemeClr val="accent1"/>
+                    </a:effectRef>
+                    <a:fontRef idx="minor">
+                      <a:schemeClr val="lt1"/>
+                    </a:fontRef>
+                  </p:style>
+                  <p:txBody>
+                    <a:bodyPr rtlCol="0" anchor="ctr"/>
+                    <a:lstStyle/>
+                    <a:p>
+                      <a:pPr algn="ctr"/>
+                      <a:endParaRPr lang="zh-CN" altLang="en-US" dirty="0"/>
+                    </a:p>
+                  </p:txBody>
+                </p:sp>
+                <p:sp>
+                  <p:nvSpPr>
+                    <p:cNvPr id="255" name="文本框 254">
+                      <a:extLst>
+                        <a:ext uri="{FF2B5EF4-FFF2-40B4-BE49-F238E27FC236}">
+                          <a16:creationId xmlns:a16="http://schemas.microsoft.com/office/drawing/2014/main" id="{2A7540D0-956D-4FAD-8E2D-B6EF8E297B1F}"/>
+                        </a:ext>
+                      </a:extLst>
+                    </p:cNvPr>
+                    <p:cNvSpPr txBox="1"/>
+                    <p:nvPr/>
+                  </p:nvSpPr>
+                  <p:spPr>
+                    <a:xfrm>
+                      <a:off x="3100575" y="593470"/>
+                      <a:ext cx="1576072" cy="369332"/>
+                    </a:xfrm>
+                    <a:prstGeom prst="rect">
+                      <a:avLst/>
+                    </a:prstGeom>
+                    <a:noFill/>
+                  </p:spPr>
+                  <p:txBody>
+                    <a:bodyPr wrap="none" rtlCol="0">
+                      <a:spAutoFit/>
+                    </a:bodyPr>
+                    <a:lstStyle/>
+                    <a:p>
+                      <a:r>
+                        <a:rPr lang="en-US" altLang="zh-CN" b="1" dirty="0">
+                          <a:latin typeface="Times New Roman" panose="02020603050405020304" pitchFamily="18" charset="0"/>
+                          <a:cs typeface="Times New Roman" panose="02020603050405020304" pitchFamily="18" charset="0"/>
+                        </a:rPr>
+                        <a:t>Frame </a:t>
+                      </a:r>
+                      <a:r>
+                        <a:rPr lang="en-US" altLang="zh-CN" b="1" dirty="0">
+                          <a:latin typeface="Times New Roman" panose="02020603050405020304" pitchFamily="18" charset="0"/>
+                          <a:ea typeface="宋体" panose="02010600030101010101" pitchFamily="2" charset="-122"/>
+                          <a:cs typeface="Times New Roman" panose="02020603050405020304" pitchFamily="18" charset="0"/>
+                        </a:rPr>
+                        <a:t>outer()</a:t>
+                      </a:r>
+                      <a:endParaRPr lang="zh-CN" altLang="en-US" b="1" dirty="0">
+                        <a:latin typeface="Times New Roman" panose="02020603050405020304" pitchFamily="18" charset="0"/>
+                        <a:ea typeface="宋体" panose="02010600030101010101" pitchFamily="2" charset="-122"/>
+                        <a:cs typeface="Times New Roman" panose="02020603050405020304" pitchFamily="18" charset="0"/>
+                      </a:endParaRPr>
+                    </a:p>
+                  </p:txBody>
+                </p:sp>
+                <p:sp>
+                  <p:nvSpPr>
+                    <p:cNvPr id="256" name="文本框 255">
+                      <a:extLst>
+                        <a:ext uri="{FF2B5EF4-FFF2-40B4-BE49-F238E27FC236}">
+                          <a16:creationId xmlns:a16="http://schemas.microsoft.com/office/drawing/2014/main" id="{2C2470D8-11F7-495F-BA27-ADA9929DC802}"/>
+                        </a:ext>
+                      </a:extLst>
+                    </p:cNvPr>
+                    <p:cNvSpPr txBox="1"/>
+                    <p:nvPr/>
+                  </p:nvSpPr>
+                  <p:spPr>
+                    <a:xfrm>
+                      <a:off x="3100575" y="1032652"/>
+                      <a:ext cx="1007912" cy="338554"/>
+                    </a:xfrm>
+                    <a:prstGeom prst="rect">
+                      <a:avLst/>
+                    </a:prstGeom>
+                    <a:noFill/>
+                  </p:spPr>
+                  <p:txBody>
+                    <a:bodyPr wrap="square" rtlCol="0">
+                      <a:spAutoFit/>
+                    </a:bodyPr>
+                    <a:lstStyle/>
+                    <a:p>
+                      <a:r>
+                        <a:rPr lang="en-US" altLang="zh-CN" sz="1600" dirty="0">
+                          <a:latin typeface="Times New Roman" panose="02020603050405020304" pitchFamily="18" charset="0"/>
+                          <a:ea typeface="宋体" panose="02010600030101010101" pitchFamily="2" charset="-122"/>
+                          <a:cs typeface="Times New Roman" panose="02020603050405020304" pitchFamily="18" charset="0"/>
+                        </a:rPr>
+                        <a:t>localsplus</a:t>
+                      </a:r>
+                      <a:endParaRPr lang="zh-CN" altLang="en-US" sz="1600" dirty="0">
+                        <a:latin typeface="Times New Roman" panose="02020603050405020304" pitchFamily="18" charset="0"/>
+                        <a:ea typeface="宋体" panose="02010600030101010101" pitchFamily="2" charset="-122"/>
+                        <a:cs typeface="Times New Roman" panose="02020603050405020304" pitchFamily="18" charset="0"/>
+                      </a:endParaRPr>
+                    </a:p>
+                  </p:txBody>
+                </p:sp>
+                <p:sp>
+                  <p:nvSpPr>
+                    <p:cNvPr id="257" name="文本框 256">
+                      <a:extLst>
+                        <a:ext uri="{FF2B5EF4-FFF2-40B4-BE49-F238E27FC236}">
+                          <a16:creationId xmlns:a16="http://schemas.microsoft.com/office/drawing/2014/main" id="{1804ADA4-5B78-4097-8394-77643F19131E}"/>
+                        </a:ext>
+                      </a:extLst>
+                    </p:cNvPr>
+                    <p:cNvSpPr txBox="1"/>
+                    <p:nvPr/>
+                  </p:nvSpPr>
+                  <p:spPr>
+                    <a:xfrm>
+                      <a:off x="3100575" y="1441056"/>
+                      <a:ext cx="404664" cy="338554"/>
+                    </a:xfrm>
+                    <a:prstGeom prst="rect">
+                      <a:avLst/>
+                    </a:prstGeom>
+                    <a:noFill/>
+                  </p:spPr>
+                  <p:txBody>
+                    <a:bodyPr wrap="square" rtlCol="0">
+                      <a:spAutoFit/>
+                    </a:bodyPr>
+                    <a:lstStyle/>
+                    <a:p>
+                      <a:r>
+                        <a:rPr lang="en-US" altLang="zh-CN" sz="1600" dirty="0">
+                          <a:latin typeface="Times New Roman" panose="02020603050405020304" pitchFamily="18" charset="0"/>
+                          <a:ea typeface="宋体" panose="02010600030101010101" pitchFamily="2" charset="-122"/>
+                          <a:cs typeface="Times New Roman" panose="02020603050405020304" pitchFamily="18" charset="0"/>
+                        </a:rPr>
+                        <a:t>…</a:t>
+                      </a:r>
+                      <a:endParaRPr lang="zh-CN" altLang="en-US" sz="1600" dirty="0">
+                        <a:latin typeface="Times New Roman" panose="02020603050405020304" pitchFamily="18" charset="0"/>
+                        <a:ea typeface="宋体" panose="02010600030101010101" pitchFamily="2" charset="-122"/>
+                        <a:cs typeface="Times New Roman" panose="02020603050405020304" pitchFamily="18" charset="0"/>
+                      </a:endParaRPr>
+                    </a:p>
+                  </p:txBody>
+                </p:sp>
+                <p:cxnSp>
+                  <p:nvCxnSpPr>
+                    <p:cNvPr id="258" name="直接连接符 257">
+                      <a:extLst>
+                        <a:ext uri="{FF2B5EF4-FFF2-40B4-BE49-F238E27FC236}">
+                          <a16:creationId xmlns:a16="http://schemas.microsoft.com/office/drawing/2014/main" id="{E5355410-CAE9-4972-B483-979457E65E01}"/>
+                        </a:ext>
+                      </a:extLst>
+                    </p:cNvPr>
+                    <p:cNvCxnSpPr/>
+                    <p:nvPr/>
+                  </p:nvCxnSpPr>
+                  <p:spPr>
+                    <a:xfrm>
+                      <a:off x="3041643" y="962802"/>
+                      <a:ext cx="2555118" cy="0"/>
+                    </a:xfrm>
+                    <a:prstGeom prst="line">
+                      <a:avLst/>
+                    </a:prstGeom>
+                    <a:ln w="28575">
+                      <a:solidFill>
+                        <a:schemeClr val="tx1"/>
+                      </a:solidFill>
+                      <a:prstDash val="sysDot"/>
+                    </a:ln>
+                  </p:spPr>
+                  <p:style>
+                    <a:lnRef idx="1">
+                      <a:schemeClr val="accent1"/>
+                    </a:lnRef>
+                    <a:fillRef idx="0">
+                      <a:schemeClr val="accent1"/>
+                    </a:fillRef>
+                    <a:effectRef idx="0">
+                      <a:schemeClr val="accent1"/>
+                    </a:effectRef>
+                    <a:fontRef idx="minor">
+                      <a:schemeClr val="tx1"/>
+                    </a:fontRef>
+                  </p:style>
+                </p:cxnSp>
+                <p:cxnSp>
+                  <p:nvCxnSpPr>
+                    <p:cNvPr id="259" name="直接连接符 258">
+                      <a:extLst>
+                        <a:ext uri="{FF2B5EF4-FFF2-40B4-BE49-F238E27FC236}">
+                          <a16:creationId xmlns:a16="http://schemas.microsoft.com/office/drawing/2014/main" id="{99D361BE-3436-4EA9-88C3-85977D59FEFE}"/>
+                        </a:ext>
+                      </a:extLst>
+                    </p:cNvPr>
+                    <p:cNvCxnSpPr>
+                      <a:cxnSpLocks/>
+                    </p:cNvCxnSpPr>
+                    <p:nvPr/>
+                  </p:nvCxnSpPr>
+                  <p:spPr>
+                    <a:xfrm>
+                      <a:off x="4108487" y="962802"/>
+                      <a:ext cx="0" cy="895825"/>
+                    </a:xfrm>
+                    <a:prstGeom prst="line">
+                      <a:avLst/>
+                    </a:prstGeom>
+                    <a:ln w="28575">
+                      <a:solidFill>
+                        <a:schemeClr val="tx1"/>
+                      </a:solidFill>
+                      <a:prstDash val="sysDot"/>
+                    </a:ln>
+                  </p:spPr>
+                  <p:style>
+                    <a:lnRef idx="1">
+                      <a:schemeClr val="accent1"/>
+                    </a:lnRef>
+                    <a:fillRef idx="0">
+                      <a:schemeClr val="accent1"/>
+                    </a:fillRef>
+                    <a:effectRef idx="0">
+                      <a:schemeClr val="accent1"/>
+                    </a:effectRef>
+                    <a:fontRef idx="minor">
+                      <a:schemeClr val="tx1"/>
+                    </a:fontRef>
+                  </p:style>
+                </p:cxnSp>
+              </p:grpSp>
+            </p:grpSp>
+            <p:sp>
+              <p:nvSpPr>
+                <p:cNvPr id="251" name="文本框 250">
+                  <a:extLst>
+                    <a:ext uri="{FF2B5EF4-FFF2-40B4-BE49-F238E27FC236}">
+                      <a16:creationId xmlns:a16="http://schemas.microsoft.com/office/drawing/2014/main" id="{AD675FDC-FA32-484B-9C7C-03A5F6FBF67E}"/>
+                    </a:ext>
+                  </a:extLst>
+                </p:cNvPr>
+                <p:cNvSpPr txBox="1"/>
+                <p:nvPr/>
+              </p:nvSpPr>
+              <p:spPr>
+                <a:xfrm>
+                  <a:off x="3384085" y="1849380"/>
+                  <a:ext cx="404664" cy="338554"/>
+                </a:xfrm>
+                <a:prstGeom prst="rect">
+                  <a:avLst/>
+                </a:prstGeom>
+                <a:noFill/>
+              </p:spPr>
+              <p:txBody>
+                <a:bodyPr wrap="square" rtlCol="0">
+                  <a:spAutoFit/>
+                </a:bodyPr>
+                <a:lstStyle/>
+                <a:p>
+                  <a:r>
+                    <a:rPr lang="en-US" altLang="zh-CN" sz="1600" dirty="0">
+                      <a:latin typeface="Times New Roman" panose="02020603050405020304" pitchFamily="18" charset="0"/>
+                      <a:ea typeface="宋体" panose="02010600030101010101" pitchFamily="2" charset="-122"/>
+                      <a:cs typeface="Times New Roman" panose="02020603050405020304" pitchFamily="18" charset="0"/>
+                    </a:rPr>
+                    <a:t>…</a:t>
+                  </a:r>
+                  <a:endParaRPr lang="zh-CN" altLang="en-US" sz="1600" dirty="0">
+                    <a:latin typeface="Times New Roman" panose="02020603050405020304" pitchFamily="18" charset="0"/>
+                    <a:ea typeface="宋体" panose="02010600030101010101" pitchFamily="2" charset="-122"/>
+                    <a:cs typeface="Times New Roman" panose="02020603050405020304" pitchFamily="18" charset="0"/>
+                  </a:endParaRPr>
+                </a:p>
+              </p:txBody>
+            </p:sp>
+          </p:grpSp>
+          <p:sp>
+            <p:nvSpPr>
+              <p:cNvPr id="249" name="文本框 248">
+                <a:extLst>
+                  <a:ext uri="{FF2B5EF4-FFF2-40B4-BE49-F238E27FC236}">
+                    <a16:creationId xmlns:a16="http://schemas.microsoft.com/office/drawing/2014/main" id="{10AF41CB-98D9-4D00-BCAF-58EDA71AECB1}"/>
+                  </a:ext>
+                </a:extLst>
+              </p:cNvPr>
+              <p:cNvSpPr txBox="1"/>
+              <p:nvPr/>
+            </p:nvSpPr>
+            <p:spPr>
+              <a:xfrm>
+                <a:off x="2798064" y="917459"/>
+                <a:ext cx="1460217" cy="338554"/>
+              </a:xfrm>
+              <a:prstGeom prst="rect">
+                <a:avLst/>
+              </a:prstGeom>
+              <a:noFill/>
+            </p:spPr>
+            <p:txBody>
+              <a:bodyPr wrap="square" rtlCol="0">
+                <a:spAutoFit/>
+              </a:bodyPr>
+              <a:lstStyle/>
+              <a:p>
+                <a:r>
+                  <a:rPr lang="zh-CN" altLang="en-US" sz="1600" dirty="0">
+                    <a:latin typeface="Times New Roman" panose="02020603050405020304" pitchFamily="18" charset="0"/>
+                    <a:ea typeface="宋体" panose="02010600030101010101" pitchFamily="2" charset="-122"/>
+                    <a:cs typeface="Times New Roman" panose="02020603050405020304" pitchFamily="18" charset="0"/>
+                  </a:rPr>
+                  <a:t>槽位数组</a:t>
+                </a:r>
+                <a:r>
+                  <a:rPr lang="en-US" altLang="zh-CN" sz="1600" dirty="0">
+                    <a:latin typeface="Times New Roman" panose="02020603050405020304" pitchFamily="18" charset="0"/>
+                    <a:ea typeface="宋体" panose="02010600030101010101" pitchFamily="2" charset="-122"/>
+                    <a:cs typeface="Times New Roman" panose="02020603050405020304" pitchFamily="18" charset="0"/>
+                  </a:rPr>
+                  <a:t>(     )</a:t>
+                </a:r>
+                <a:endParaRPr lang="zh-CN" altLang="en-US" sz="1600" dirty="0">
+                  <a:latin typeface="Times New Roman" panose="02020603050405020304" pitchFamily="18" charset="0"/>
+                  <a:ea typeface="宋体" panose="02010600030101010101" pitchFamily="2" charset="-122"/>
+                  <a:cs typeface="Times New Roman" panose="02020603050405020304" pitchFamily="18" charset="0"/>
+                </a:endParaRPr>
+              </a:p>
+            </p:txBody>
+          </p:sp>
+        </p:grpSp>
+        <p:grpSp>
+          <p:nvGrpSpPr>
+            <p:cNvPr id="231" name="组合 230">
+              <a:extLst>
+                <a:ext uri="{FF2B5EF4-FFF2-40B4-BE49-F238E27FC236}">
+                  <a16:creationId xmlns:a16="http://schemas.microsoft.com/office/drawing/2014/main" id="{AB37D8EC-23D9-44EE-B895-54A597F2F38A}"/>
+                </a:ext>
+              </a:extLst>
+            </p:cNvPr>
+            <p:cNvGrpSpPr/>
+            <p:nvPr/>
+          </p:nvGrpSpPr>
+          <p:grpSpPr>
+            <a:xfrm>
+              <a:off x="319146" y="2119335"/>
+              <a:ext cx="2590394" cy="1335006"/>
+              <a:chOff x="5729970" y="2678194"/>
+              <a:chExt cx="2590394" cy="1335006"/>
+            </a:xfrm>
+          </p:grpSpPr>
+          <p:grpSp>
+            <p:nvGrpSpPr>
+              <p:cNvPr id="236" name="组合 235">
+                <a:extLst>
+                  <a:ext uri="{FF2B5EF4-FFF2-40B4-BE49-F238E27FC236}">
+                    <a16:creationId xmlns:a16="http://schemas.microsoft.com/office/drawing/2014/main" id="{4C4F7F3F-4C49-4763-B19C-A3D738A46ECE}"/>
+                  </a:ext>
+                </a:extLst>
+              </p:cNvPr>
+              <p:cNvGrpSpPr/>
+              <p:nvPr/>
+            </p:nvGrpSpPr>
+            <p:grpSpPr>
+              <a:xfrm>
+                <a:off x="5729970" y="2678194"/>
+                <a:ext cx="2590394" cy="1335006"/>
+                <a:chOff x="2025605" y="931945"/>
+                <a:chExt cx="2590394" cy="1335006"/>
+              </a:xfrm>
+            </p:grpSpPr>
+            <p:grpSp>
+              <p:nvGrpSpPr>
+                <p:cNvPr id="238" name="组合 237">
+                  <a:extLst>
+                    <a:ext uri="{FF2B5EF4-FFF2-40B4-BE49-F238E27FC236}">
+                      <a16:creationId xmlns:a16="http://schemas.microsoft.com/office/drawing/2014/main" id="{C51D330F-49A9-4E5D-B841-CD19ECD5D054}"/>
+                    </a:ext>
+                  </a:extLst>
+                </p:cNvPr>
+                <p:cNvGrpSpPr/>
+                <p:nvPr/>
+              </p:nvGrpSpPr>
+              <p:grpSpPr>
+                <a:xfrm>
+                  <a:off x="2025605" y="931945"/>
+                  <a:ext cx="2590394" cy="1335006"/>
+                  <a:chOff x="3041643" y="523621"/>
+                  <a:chExt cx="2590394" cy="1335006"/>
+                </a:xfrm>
+              </p:grpSpPr>
+              <p:cxnSp>
+                <p:nvCxnSpPr>
+                  <p:cNvPr id="240" name="直接连接符 239">
+                    <a:extLst>
+                      <a:ext uri="{FF2B5EF4-FFF2-40B4-BE49-F238E27FC236}">
+                        <a16:creationId xmlns:a16="http://schemas.microsoft.com/office/drawing/2014/main" id="{86B60CF2-9FA0-4621-BBBA-DD2CB6DF3630}"/>
+                      </a:ext>
+                    </a:extLst>
+                  </p:cNvPr>
+                  <p:cNvCxnSpPr/>
+                  <p:nvPr/>
+                </p:nvCxnSpPr>
+                <p:spPr>
+                  <a:xfrm>
+                    <a:off x="3041643" y="1375158"/>
+                    <a:ext cx="2555118" cy="0"/>
+                  </a:xfrm>
+                  <a:prstGeom prst="line">
+                    <a:avLst/>
+                  </a:prstGeom>
+                  <a:ln w="28575">
+                    <a:solidFill>
+                      <a:schemeClr val="tx1"/>
+                    </a:solidFill>
+                  </a:ln>
+                </p:spPr>
+                <p:style>
+                  <a:lnRef idx="1">
+                    <a:schemeClr val="accent1"/>
+                  </a:lnRef>
+                  <a:fillRef idx="0">
+                    <a:schemeClr val="accent1"/>
+                  </a:fillRef>
+                  <a:effectRef idx="0">
+                    <a:schemeClr val="accent1"/>
+                  </a:effectRef>
+                  <a:fontRef idx="minor">
+                    <a:schemeClr val="tx1"/>
+                  </a:fontRef>
+                </p:style>
+              </p:cxnSp>
+              <p:grpSp>
+                <p:nvGrpSpPr>
+                  <p:cNvPr id="241" name="组合 240">
+                    <a:extLst>
+                      <a:ext uri="{FF2B5EF4-FFF2-40B4-BE49-F238E27FC236}">
+                        <a16:creationId xmlns:a16="http://schemas.microsoft.com/office/drawing/2014/main" id="{ACB8C81E-E125-4562-B66E-CC9EB8EAAC59}"/>
+                      </a:ext>
+                    </a:extLst>
+                  </p:cNvPr>
+                  <p:cNvGrpSpPr/>
+                  <p:nvPr/>
+                </p:nvGrpSpPr>
+                <p:grpSpPr>
+                  <a:xfrm>
+                    <a:off x="3041643" y="523621"/>
+                    <a:ext cx="2590394" cy="1335006"/>
+                    <a:chOff x="3041643" y="523621"/>
+                    <a:chExt cx="2590394" cy="1335006"/>
+                  </a:xfrm>
+                </p:grpSpPr>
+                <p:sp>
+                  <p:nvSpPr>
+                    <p:cNvPr id="242" name="矩形 241">
+                      <a:extLst>
+                        <a:ext uri="{FF2B5EF4-FFF2-40B4-BE49-F238E27FC236}">
+                          <a16:creationId xmlns:a16="http://schemas.microsoft.com/office/drawing/2014/main" id="{9211062A-EECD-481E-A2F7-24D32F8AFB16}"/>
+                        </a:ext>
+                      </a:extLst>
+                    </p:cNvPr>
+                    <p:cNvSpPr/>
+                    <p:nvPr/>
+                  </p:nvSpPr>
+                  <p:spPr>
+                    <a:xfrm>
+                      <a:off x="3041643" y="523621"/>
+                      <a:ext cx="2555118" cy="1335006"/>
+                    </a:xfrm>
+                    <a:prstGeom prst="rect">
+                      <a:avLst/>
+                    </a:prstGeom>
+                    <a:noFill/>
+                    <a:ln w="28575">
+                      <a:solidFill>
+                        <a:schemeClr val="tx1"/>
+                      </a:solidFill>
+                    </a:ln>
+                  </p:spPr>
+                  <p:style>
+                    <a:lnRef idx="2">
+                      <a:schemeClr val="accent1">
+                        <a:shade val="50000"/>
+                      </a:schemeClr>
+                    </a:lnRef>
+                    <a:fillRef idx="1">
+                      <a:schemeClr val="accent1"/>
+                    </a:fillRef>
+                    <a:effectRef idx="0">
+                      <a:schemeClr val="accent1"/>
+                    </a:effectRef>
+                    <a:fontRef idx="minor">
+                      <a:schemeClr val="lt1"/>
+                    </a:fontRef>
+                  </p:style>
+                  <p:txBody>
+                    <a:bodyPr rtlCol="0" anchor="ctr"/>
+                    <a:lstStyle/>
+                    <a:p>
+                      <a:pPr algn="ctr"/>
+                      <a:endParaRPr lang="zh-CN" altLang="en-US" dirty="0"/>
+                    </a:p>
+                  </p:txBody>
+                </p:sp>
+                <p:sp>
+                  <p:nvSpPr>
+                    <p:cNvPr id="243" name="文本框 242">
+                      <a:extLst>
+                        <a:ext uri="{FF2B5EF4-FFF2-40B4-BE49-F238E27FC236}">
+                          <a16:creationId xmlns:a16="http://schemas.microsoft.com/office/drawing/2014/main" id="{435BB736-3C17-45B8-AF93-4B9EE91705DE}"/>
+                        </a:ext>
+                      </a:extLst>
+                    </p:cNvPr>
+                    <p:cNvSpPr txBox="1"/>
+                    <p:nvPr/>
+                  </p:nvSpPr>
+                  <p:spPr>
+                    <a:xfrm>
+                      <a:off x="3100575" y="593470"/>
+                      <a:ext cx="2531462" cy="369332"/>
+                    </a:xfrm>
+                    <a:prstGeom prst="rect">
+                      <a:avLst/>
+                    </a:prstGeom>
+                    <a:noFill/>
+                  </p:spPr>
+                  <p:txBody>
+                    <a:bodyPr wrap="none" rtlCol="0">
+                      <a:spAutoFit/>
+                    </a:bodyPr>
+                    <a:lstStyle/>
+                    <a:p>
+                      <a:r>
+                        <a:rPr lang="en-US" altLang="zh-CN" b="1" dirty="0">
+                          <a:latin typeface="Times New Roman" panose="02020603050405020304" pitchFamily="18" charset="0"/>
+                          <a:cs typeface="Times New Roman" panose="02020603050405020304" pitchFamily="18" charset="0"/>
+                        </a:rPr>
+                        <a:t>Function </a:t>
+                      </a:r>
+                      <a:r>
+                        <a:rPr lang="en-US" altLang="zh-CN" b="1" dirty="0">
+                          <a:latin typeface="Times New Roman" panose="02020603050405020304" pitchFamily="18" charset="0"/>
+                          <a:ea typeface="宋体" panose="02010600030101010101" pitchFamily="2" charset="-122"/>
+                          <a:cs typeface="Times New Roman" panose="02020603050405020304" pitchFamily="18" charset="0"/>
+                        </a:rPr>
+                        <a:t>Object inner()</a:t>
+                      </a:r>
+                      <a:endParaRPr lang="zh-CN" altLang="en-US" b="1" dirty="0">
+                        <a:latin typeface="Times New Roman" panose="02020603050405020304" pitchFamily="18" charset="0"/>
+                        <a:ea typeface="宋体" panose="02010600030101010101" pitchFamily="2" charset="-122"/>
+                        <a:cs typeface="Times New Roman" panose="02020603050405020304" pitchFamily="18" charset="0"/>
+                      </a:endParaRPr>
+                    </a:p>
+                  </p:txBody>
+                </p:sp>
+                <p:sp>
+                  <p:nvSpPr>
+                    <p:cNvPr id="244" name="文本框 243">
+                      <a:extLst>
+                        <a:ext uri="{FF2B5EF4-FFF2-40B4-BE49-F238E27FC236}">
+                          <a16:creationId xmlns:a16="http://schemas.microsoft.com/office/drawing/2014/main" id="{F21B173D-26DD-4C89-9CD5-9D910819D3D4}"/>
+                        </a:ext>
+                      </a:extLst>
+                    </p:cNvPr>
+                    <p:cNvSpPr txBox="1"/>
+                    <p:nvPr/>
+                  </p:nvSpPr>
+                  <p:spPr>
+                    <a:xfrm>
+                      <a:off x="3100575" y="1032652"/>
+                      <a:ext cx="869952" cy="338554"/>
+                    </a:xfrm>
+                    <a:prstGeom prst="rect">
+                      <a:avLst/>
+                    </a:prstGeom>
+                    <a:noFill/>
+                  </p:spPr>
+                  <p:txBody>
+                    <a:bodyPr wrap="square" rtlCol="0">
+                      <a:spAutoFit/>
+                    </a:bodyPr>
+                    <a:lstStyle/>
+                    <a:p>
+                      <a:r>
+                        <a:rPr lang="en-US" altLang="zh-CN" sz="1600" dirty="0">
+                          <a:latin typeface="Times New Roman" panose="02020603050405020304" pitchFamily="18" charset="0"/>
+                          <a:ea typeface="宋体" panose="02010600030101010101" pitchFamily="2" charset="-122"/>
+                          <a:cs typeface="Times New Roman" panose="02020603050405020304" pitchFamily="18" charset="0"/>
+                        </a:rPr>
+                        <a:t>closures</a:t>
+                      </a:r>
+                      <a:endParaRPr lang="zh-CN" altLang="en-US" sz="1600" dirty="0">
+                        <a:latin typeface="Times New Roman" panose="02020603050405020304" pitchFamily="18" charset="0"/>
+                        <a:ea typeface="宋体" panose="02010600030101010101" pitchFamily="2" charset="-122"/>
+                        <a:cs typeface="Times New Roman" panose="02020603050405020304" pitchFamily="18" charset="0"/>
+                      </a:endParaRPr>
+                    </a:p>
+                  </p:txBody>
+                </p:sp>
+                <p:sp>
+                  <p:nvSpPr>
+                    <p:cNvPr id="245" name="文本框 244">
+                      <a:extLst>
+                        <a:ext uri="{FF2B5EF4-FFF2-40B4-BE49-F238E27FC236}">
+                          <a16:creationId xmlns:a16="http://schemas.microsoft.com/office/drawing/2014/main" id="{6635E6FA-5D41-4519-AFB5-33933BC3E674}"/>
+                        </a:ext>
+                      </a:extLst>
+                    </p:cNvPr>
+                    <p:cNvSpPr txBox="1"/>
+                    <p:nvPr/>
+                  </p:nvSpPr>
+                  <p:spPr>
+                    <a:xfrm>
+                      <a:off x="3100575" y="1441056"/>
+                      <a:ext cx="404664" cy="338554"/>
+                    </a:xfrm>
+                    <a:prstGeom prst="rect">
+                      <a:avLst/>
+                    </a:prstGeom>
+                    <a:noFill/>
+                  </p:spPr>
+                  <p:txBody>
+                    <a:bodyPr wrap="square" rtlCol="0">
+                      <a:spAutoFit/>
+                    </a:bodyPr>
+                    <a:lstStyle/>
+                    <a:p>
+                      <a:r>
+                        <a:rPr lang="en-US" altLang="zh-CN" sz="1600" dirty="0">
+                          <a:latin typeface="Times New Roman" panose="02020603050405020304" pitchFamily="18" charset="0"/>
+                          <a:ea typeface="宋体" panose="02010600030101010101" pitchFamily="2" charset="-122"/>
+                          <a:cs typeface="Times New Roman" panose="02020603050405020304" pitchFamily="18" charset="0"/>
+                        </a:rPr>
+                        <a:t>…</a:t>
+                      </a:r>
+                      <a:endParaRPr lang="zh-CN" altLang="en-US" sz="1600" dirty="0">
+                        <a:latin typeface="Times New Roman" panose="02020603050405020304" pitchFamily="18" charset="0"/>
+                        <a:ea typeface="宋体" panose="02010600030101010101" pitchFamily="2" charset="-122"/>
+                        <a:cs typeface="Times New Roman" panose="02020603050405020304" pitchFamily="18" charset="0"/>
+                      </a:endParaRPr>
+                    </a:p>
+                  </p:txBody>
+                </p:sp>
+                <p:cxnSp>
+                  <p:nvCxnSpPr>
+                    <p:cNvPr id="246" name="直接连接符 245">
+                      <a:extLst>
+                        <a:ext uri="{FF2B5EF4-FFF2-40B4-BE49-F238E27FC236}">
+                          <a16:creationId xmlns:a16="http://schemas.microsoft.com/office/drawing/2014/main" id="{D303E209-8E01-4141-BE2D-BFCBB5CBDC7E}"/>
+                        </a:ext>
+                      </a:extLst>
+                    </p:cNvPr>
+                    <p:cNvCxnSpPr/>
+                    <p:nvPr/>
+                  </p:nvCxnSpPr>
+                  <p:spPr>
+                    <a:xfrm>
+                      <a:off x="3041643" y="962802"/>
+                      <a:ext cx="2555118" cy="0"/>
+                    </a:xfrm>
+                    <a:prstGeom prst="line">
+                      <a:avLst/>
+                    </a:prstGeom>
+                    <a:ln w="28575">
+                      <a:solidFill>
+                        <a:schemeClr val="tx1"/>
+                      </a:solidFill>
+                    </a:ln>
+                  </p:spPr>
+                  <p:style>
+                    <a:lnRef idx="1">
+                      <a:schemeClr val="accent1"/>
+                    </a:lnRef>
+                    <a:fillRef idx="0">
+                      <a:schemeClr val="accent1"/>
+                    </a:fillRef>
+                    <a:effectRef idx="0">
+                      <a:schemeClr val="accent1"/>
+                    </a:effectRef>
+                    <a:fontRef idx="minor">
+                      <a:schemeClr val="tx1"/>
+                    </a:fontRef>
+                  </p:style>
+                </p:cxnSp>
+                <p:cxnSp>
+                  <p:nvCxnSpPr>
+                    <p:cNvPr id="247" name="直接连接符 246">
+                      <a:extLst>
+                        <a:ext uri="{FF2B5EF4-FFF2-40B4-BE49-F238E27FC236}">
+                          <a16:creationId xmlns:a16="http://schemas.microsoft.com/office/drawing/2014/main" id="{561DF811-F49B-4ED1-9C24-FF851F860170}"/>
+                        </a:ext>
+                      </a:extLst>
+                    </p:cNvPr>
+                    <p:cNvCxnSpPr>
+                      <a:cxnSpLocks/>
+                    </p:cNvCxnSpPr>
+                    <p:nvPr/>
+                  </p:nvCxnSpPr>
+                  <p:spPr>
+                    <a:xfrm>
+                      <a:off x="4122351" y="962802"/>
+                      <a:ext cx="0" cy="895825"/>
+                    </a:xfrm>
+                    <a:prstGeom prst="line">
+                      <a:avLst/>
+                    </a:prstGeom>
+                    <a:ln w="28575">
+                      <a:solidFill>
+                        <a:schemeClr val="tx1"/>
+                      </a:solidFill>
+                    </a:ln>
+                  </p:spPr>
+                  <p:style>
+                    <a:lnRef idx="1">
+                      <a:schemeClr val="accent1"/>
+                    </a:lnRef>
+                    <a:fillRef idx="0">
+                      <a:schemeClr val="accent1"/>
+                    </a:fillRef>
+                    <a:effectRef idx="0">
+                      <a:schemeClr val="accent1"/>
+                    </a:effectRef>
+                    <a:fontRef idx="minor">
+                      <a:schemeClr val="tx1"/>
+                    </a:fontRef>
+                  </p:style>
+                </p:cxnSp>
+              </p:grpSp>
+            </p:grpSp>
+            <p:sp>
+              <p:nvSpPr>
+                <p:cNvPr id="239" name="文本框 238">
+                  <a:extLst>
+                    <a:ext uri="{FF2B5EF4-FFF2-40B4-BE49-F238E27FC236}">
+                      <a16:creationId xmlns:a16="http://schemas.microsoft.com/office/drawing/2014/main" id="{22E17199-6AC3-4DFD-A2DE-1F9C2519434D}"/>
+                    </a:ext>
+                  </a:extLst>
+                </p:cNvPr>
+                <p:cNvSpPr txBox="1"/>
+                <p:nvPr/>
+              </p:nvSpPr>
+              <p:spPr>
+                <a:xfrm>
+                  <a:off x="3384085" y="1849380"/>
+                  <a:ext cx="404664" cy="338554"/>
+                </a:xfrm>
+                <a:prstGeom prst="rect">
+                  <a:avLst/>
+                </a:prstGeom>
+                <a:noFill/>
+              </p:spPr>
+              <p:txBody>
+                <a:bodyPr wrap="square" rtlCol="0">
+                  <a:spAutoFit/>
+                </a:bodyPr>
+                <a:lstStyle/>
+                <a:p>
+                  <a:r>
+                    <a:rPr lang="en-US" altLang="zh-CN" sz="1600" dirty="0">
+                      <a:latin typeface="Times New Roman" panose="02020603050405020304" pitchFamily="18" charset="0"/>
+                      <a:ea typeface="宋体" panose="02010600030101010101" pitchFamily="2" charset="-122"/>
+                      <a:cs typeface="Times New Roman" panose="02020603050405020304" pitchFamily="18" charset="0"/>
+                    </a:rPr>
+                    <a:t>…</a:t>
+                  </a:r>
+                  <a:endParaRPr lang="zh-CN" altLang="en-US" sz="1600" dirty="0">
+                    <a:latin typeface="Times New Roman" panose="02020603050405020304" pitchFamily="18" charset="0"/>
+                    <a:ea typeface="宋体" panose="02010600030101010101" pitchFamily="2" charset="-122"/>
+                    <a:cs typeface="Times New Roman" panose="02020603050405020304" pitchFamily="18" charset="0"/>
+                  </a:endParaRPr>
+                </a:p>
+              </p:txBody>
+            </p:sp>
+          </p:grpSp>
+          <p:sp>
+            <p:nvSpPr>
+              <p:cNvPr id="237" name="文本框 236">
+                <a:extLst>
+                  <a:ext uri="{FF2B5EF4-FFF2-40B4-BE49-F238E27FC236}">
+                    <a16:creationId xmlns:a16="http://schemas.microsoft.com/office/drawing/2014/main" id="{B97D3EC1-18E6-43B9-8683-175E297FEC1B}"/>
+                  </a:ext>
+                </a:extLst>
+              </p:cNvPr>
+              <p:cNvSpPr txBox="1"/>
+              <p:nvPr/>
+            </p:nvSpPr>
+            <p:spPr>
+              <a:xfrm>
+                <a:off x="6824867" y="3178615"/>
+                <a:ext cx="1392935" cy="338554"/>
+              </a:xfrm>
+              <a:prstGeom prst="rect">
+                <a:avLst/>
+              </a:prstGeom>
+              <a:noFill/>
+            </p:spPr>
+            <p:txBody>
+              <a:bodyPr wrap="square" rtlCol="0">
+                <a:spAutoFit/>
+              </a:bodyPr>
+              <a:lstStyle/>
+              <a:p>
+                <a:r>
+                  <a:rPr lang="en-US" altLang="zh-CN" sz="1600" dirty="0">
+                    <a:latin typeface="Times New Roman" panose="02020603050405020304" pitchFamily="18" charset="0"/>
+                    <a:ea typeface="宋体" panose="02010600030101010101" pitchFamily="2" charset="-122"/>
+                    <a:cs typeface="Times New Roman" panose="02020603050405020304" pitchFamily="18" charset="0"/>
+                  </a:rPr>
+                  <a:t>Tuple(      )</a:t>
+                </a:r>
+                <a:endParaRPr lang="zh-CN" altLang="en-US" sz="1600" dirty="0">
+                  <a:latin typeface="Times New Roman" panose="02020603050405020304" pitchFamily="18" charset="0"/>
+                  <a:ea typeface="宋体" panose="02010600030101010101" pitchFamily="2" charset="-122"/>
+                  <a:cs typeface="Times New Roman" panose="02020603050405020304" pitchFamily="18" charset="0"/>
+                </a:endParaRPr>
+              </a:p>
+            </p:txBody>
+          </p:sp>
+        </p:grpSp>
+        <p:cxnSp>
+          <p:nvCxnSpPr>
+            <p:cNvPr id="232" name="连接符: 肘形 231">
+              <a:extLst>
+                <a:ext uri="{FF2B5EF4-FFF2-40B4-BE49-F238E27FC236}">
+                  <a16:creationId xmlns:a16="http://schemas.microsoft.com/office/drawing/2014/main" id="{8D2CEFED-6AC8-4689-9A22-265B163DCB80}"/>
+                </a:ext>
+              </a:extLst>
+            </p:cNvPr>
+            <p:cNvCxnSpPr>
+              <a:cxnSpLocks/>
+              <a:endCxn id="260" idx="0"/>
+            </p:cNvCxnSpPr>
+            <p:nvPr/>
+          </p:nvCxnSpPr>
+          <p:spPr>
+            <a:xfrm>
+              <a:off x="2482850" y="1016000"/>
+              <a:ext cx="1802404" cy="581386"/>
+            </a:xfrm>
+            <a:prstGeom prst="bentConnector2">
+              <a:avLst/>
+            </a:prstGeom>
+            <a:ln w="28575">
+              <a:solidFill>
+                <a:schemeClr val="tx1"/>
+              </a:solidFill>
+              <a:prstDash val="sysDot"/>
+              <a:tailEnd type="triangle"/>
+            </a:ln>
+          </p:spPr>
+          <p:style>
+            <a:lnRef idx="1">
+              <a:schemeClr val="accent1"/>
+            </a:lnRef>
+            <a:fillRef idx="0">
+              <a:schemeClr val="accent1"/>
+            </a:fillRef>
+            <a:effectRef idx="0">
+              <a:schemeClr val="accent1"/>
+            </a:effectRef>
+            <a:fontRef idx="minor">
+              <a:schemeClr val="tx1"/>
+            </a:fontRef>
+          </p:style>
+        </p:cxnSp>
+        <p:sp>
+          <p:nvSpPr>
+            <p:cNvPr id="233" name="椭圆 232">
+              <a:extLst>
+                <a:ext uri="{FF2B5EF4-FFF2-40B4-BE49-F238E27FC236}">
+                  <a16:creationId xmlns:a16="http://schemas.microsoft.com/office/drawing/2014/main" id="{9A5D7344-B4C0-4918-B1A8-6647A6246947}"/>
+                </a:ext>
+              </a:extLst>
+            </p:cNvPr>
+            <p:cNvSpPr/>
             <p:nvPr/>
           </p:nvSpPr>
           <p:spPr>
             <a:xfrm>
-              <a:off x="6691629" y="753659"/>
-              <a:ext cx="1045479" cy="369332"/>
+              <a:off x="2420504" y="951420"/>
+              <a:ext cx="136566" cy="136566"/>
             </a:xfrm>
-            <a:prstGeom prst="rect">
+            <a:prstGeom prst="ellipse">
               <a:avLst/>
             </a:prstGeom>
-            <a:noFill/>
+            <a:solidFill>
+              <a:schemeClr val="tx1"/>
+            </a:solidFill>
+            <a:ln>
+              <a:noFill/>
+            </a:ln>
           </p:spPr>
+          <p:style>
+            <a:lnRef idx="2">
+              <a:schemeClr val="accent1">
+                <a:shade val="50000"/>
+              </a:schemeClr>
+            </a:lnRef>
+            <a:fillRef idx="1">
+              <a:schemeClr val="accent1"/>
+            </a:fillRef>
+            <a:effectRef idx="0">
+              <a:schemeClr val="accent1"/>
+            </a:effectRef>
+            <a:fontRef idx="minor">
+              <a:schemeClr val="lt1"/>
+            </a:fontRef>
+          </p:style>
           <p:txBody>
-            <a:bodyPr wrap="none" rtlCol="0">
-              <a:spAutoFit/>
-            </a:bodyPr>
+            <a:bodyPr rtlCol="0" anchor="ctr"/>
             <a:lstStyle/>
             <a:p>
-              <a:r>
-                <a:rPr lang="en-US" altLang="zh-CN" dirty="0">
-                  <a:latin typeface="Times New Roman" panose="02020603050405020304" pitchFamily="18" charset="0"/>
-                  <a:cs typeface="Times New Roman" panose="02020603050405020304" pitchFamily="18" charset="0"/>
-                </a:rPr>
-                <a:t>value=10</a:t>
-              </a:r>
-              <a:endParaRPr lang="zh-CN" altLang="en-US" dirty="0">
-                <a:latin typeface="Times New Roman" panose="02020603050405020304" pitchFamily="18" charset="0"/>
-                <a:cs typeface="Times New Roman" panose="02020603050405020304" pitchFamily="18" charset="0"/>
-              </a:endParaRPr>
+              <a:pPr algn="ctr"/>
+              <a:endParaRPr lang="zh-CN" altLang="en-US"/>
+            </a:p>
+          </p:txBody>
+        </p:sp>
+        <p:cxnSp>
+          <p:nvCxnSpPr>
+            <p:cNvPr id="234" name="连接符: 肘形 233">
+              <a:extLst>
+                <a:ext uri="{FF2B5EF4-FFF2-40B4-BE49-F238E27FC236}">
+                  <a16:creationId xmlns:a16="http://schemas.microsoft.com/office/drawing/2014/main" id="{9B40A2AF-66D7-468C-9549-120E51213931}"/>
+                </a:ext>
+              </a:extLst>
+            </p:cNvPr>
+            <p:cNvCxnSpPr>
+              <a:endCxn id="260" idx="2"/>
+            </p:cNvCxnSpPr>
+            <p:nvPr/>
+          </p:nvCxnSpPr>
+          <p:spPr>
+            <a:xfrm flipV="1">
+              <a:off x="2171700" y="2322816"/>
+              <a:ext cx="2113554" cy="474827"/>
+            </a:xfrm>
+            <a:prstGeom prst="bentConnector2">
+              <a:avLst/>
+            </a:prstGeom>
+            <a:ln w="28575">
+              <a:solidFill>
+                <a:schemeClr val="tx1"/>
+              </a:solidFill>
+              <a:tailEnd type="triangle"/>
+            </a:ln>
+          </p:spPr>
+          <p:style>
+            <a:lnRef idx="1">
+              <a:schemeClr val="accent1"/>
+            </a:lnRef>
+            <a:fillRef idx="0">
+              <a:schemeClr val="accent1"/>
+            </a:fillRef>
+            <a:effectRef idx="0">
+              <a:schemeClr val="accent1"/>
+            </a:effectRef>
+            <a:fontRef idx="minor">
+              <a:schemeClr val="tx1"/>
+            </a:fontRef>
+          </p:style>
+        </p:cxnSp>
+        <p:sp>
+          <p:nvSpPr>
+            <p:cNvPr id="235" name="椭圆 234">
+              <a:extLst>
+                <a:ext uri="{FF2B5EF4-FFF2-40B4-BE49-F238E27FC236}">
+                  <a16:creationId xmlns:a16="http://schemas.microsoft.com/office/drawing/2014/main" id="{30B782E0-6688-43A0-9D65-D717EF12332D}"/>
+                </a:ext>
+              </a:extLst>
+            </p:cNvPr>
+            <p:cNvSpPr/>
+            <p:nvPr/>
+          </p:nvSpPr>
+          <p:spPr>
+            <a:xfrm>
+              <a:off x="2109355" y="2729702"/>
+              <a:ext cx="136566" cy="136566"/>
+            </a:xfrm>
+            <a:prstGeom prst="ellipse">
+              <a:avLst/>
+            </a:prstGeom>
+            <a:solidFill>
+              <a:schemeClr val="tx1"/>
+            </a:solidFill>
+            <a:ln>
+              <a:noFill/>
+            </a:ln>
+          </p:spPr>
+          <p:style>
+            <a:lnRef idx="2">
+              <a:schemeClr val="accent1">
+                <a:shade val="50000"/>
+              </a:schemeClr>
+            </a:lnRef>
+            <a:fillRef idx="1">
+              <a:schemeClr val="accent1"/>
+            </a:fillRef>
+            <a:effectRef idx="0">
+              <a:schemeClr val="accent1"/>
+            </a:effectRef>
+            <a:fontRef idx="minor">
+              <a:schemeClr val="lt1"/>
+            </a:fontRef>
+          </p:style>
+          <p:txBody>
+            <a:bodyPr rtlCol="0" anchor="ctr"/>
+            <a:lstStyle/>
+            <a:p>
+              <a:pPr algn="ctr"/>
+              <a:endParaRPr lang="zh-CN" altLang="en-US"/>
             </a:p>
           </p:txBody>
         </p:sp>
       </p:grpSp>
-      <p:cxnSp>
-        <p:nvCxnSpPr>
-          <p:cNvPr id="133" name="直接箭头连接符 132">
+      <p:sp>
+        <p:nvSpPr>
+          <p:cNvPr id="7" name="乘号 6">
             <a:extLst>
               <a:ext uri="{FF2B5EF4-FFF2-40B4-BE49-F238E27FC236}">
-                <a16:creationId xmlns:a16="http://schemas.microsoft.com/office/drawing/2014/main" id="{41E84F04-680A-4B14-BA9E-8E77FF4BDBA3}"/>
+                <a16:creationId xmlns:a16="http://schemas.microsoft.com/office/drawing/2014/main" id="{54086509-D86F-43F4-8510-421E0D4A4C8A}"/>
               </a:ext>
             </a:extLst>
           </p:cNvPr>
-          <p:cNvCxnSpPr>
-            <a:endCxn id="129" idx="1"/>
-          </p:cNvCxnSpPr>
+          <p:cNvSpPr/>
           <p:nvPr/>
-        </p:nvCxnSpPr>
+        </p:nvSpPr>
         <p:spPr>
-          <a:xfrm flipV="1">
-            <a:off x="7581900" y="1966717"/>
-            <a:ext cx="1319581" cy="6615"/>
+          <a:xfrm>
+            <a:off x="9250127" y="997163"/>
+            <a:ext cx="504701" cy="475013"/>
           </a:xfrm>
-          <a:prstGeom prst="straightConnector1">
+          <a:prstGeom prst="mathMultiply">
             <a:avLst/>
           </a:prstGeom>
-          <a:ln w="28575">
-            <a:solidFill>
-              <a:schemeClr val="tx1"/>
-            </a:solidFill>
-            <a:tailEnd type="triangle"/>
+          <a:solidFill>
+            <a:srgbClr val="FF0000"/>
+          </a:solidFill>
+          <a:ln>
+            <a:noFill/>
           </a:ln>
         </p:spPr>
         <p:style>
-          <a:lnRef idx="1">
-            <a:schemeClr val="accent1"/>
+          <a:lnRef idx="2">
+            <a:schemeClr val="accent1">
+              <a:shade val="50000"/>
+            </a:schemeClr>
           </a:lnRef>
-          <a:fillRef idx="0">
+          <a:fillRef idx="1">
             <a:schemeClr val="accent1"/>
           </a:fillRef>
           <a:effectRef idx="0">
             <a:schemeClr val="accent1"/>
           </a:effectRef>
           <a:fontRef idx="minor">
-            <a:schemeClr val="tx1"/>
+            <a:schemeClr val="lt1"/>
           </a:fontRef>
         </p:style>
-      </p:cxnSp>
-      <p:sp>
-        <p:nvSpPr>
-          <p:cNvPr id="134" name="文本框 133">
-            <a:extLst>
-              <a:ext uri="{FF2B5EF4-FFF2-40B4-BE49-F238E27FC236}">
-                <a16:creationId xmlns:a16="http://schemas.microsoft.com/office/drawing/2014/main" id="{00B9F294-3F63-4480-AECA-AE2C1675AB88}"/>
-              </a:ext>
-            </a:extLst>
-          </p:cNvPr>
-          <p:cNvSpPr txBox="1"/>
-          <p:nvPr/>
-        </p:nvSpPr>
-        <p:spPr>
-          <a:xfrm>
-            <a:off x="5569465" y="3690041"/>
-            <a:ext cx="4024869" cy="646331"/>
-          </a:xfrm>
-          <a:prstGeom prst="rect">
-            <a:avLst/>
-          </a:prstGeom>
-          <a:noFill/>
-        </p:spPr>
         <p:txBody>
-          <a:bodyPr wrap="square" rtlCol="0">
-            <a:spAutoFit/>
-          </a:bodyPr>
+          <a:bodyPr rtlCol="0" anchor="ctr"/>
           <a:lstStyle/>
           <a:p>
             <a:pPr algn="ctr"/>
-            <a:r>
-              <a:rPr lang="zh-CN" altLang="en-US" dirty="0">
-                <a:latin typeface="Times New Roman" panose="02020603050405020304" pitchFamily="18" charset="0"/>
-                <a:ea typeface="宋体" panose="02010600030101010101" pitchFamily="2" charset="-122"/>
-                <a:cs typeface="Times New Roman" panose="02020603050405020304" pitchFamily="18" charset="0"/>
-              </a:rPr>
-              <a:t>② </a:t>
-            </a:r>
-            <a:r>
-              <a:rPr lang="en-US" altLang="zh-CN" dirty="0">
-                <a:latin typeface="Times New Roman" panose="02020603050405020304" pitchFamily="18" charset="0"/>
-                <a:ea typeface="宋体" panose="02010600030101010101" pitchFamily="2" charset="-122"/>
-                <a:cs typeface="Times New Roman" panose="02020603050405020304" pitchFamily="18" charset="0"/>
-              </a:rPr>
-              <a:t>outer </a:t>
-            </a:r>
-            <a:r>
-              <a:rPr lang="zh-CN" altLang="en-US" dirty="0">
-                <a:latin typeface="Times New Roman" panose="02020603050405020304" pitchFamily="18" charset="0"/>
-                <a:ea typeface="宋体" panose="02010600030101010101" pitchFamily="2" charset="-122"/>
-                <a:cs typeface="Times New Roman" panose="02020603050405020304" pitchFamily="18" charset="0"/>
-              </a:rPr>
-              <a:t>退出后，单元对象仍然被    </a:t>
-            </a:r>
-            <a:endParaRPr lang="en-US" altLang="zh-CN" dirty="0">
-              <a:latin typeface="Times New Roman" panose="02020603050405020304" pitchFamily="18" charset="0"/>
-              <a:ea typeface="宋体" panose="02010600030101010101" pitchFamily="2" charset="-122"/>
-              <a:cs typeface="Times New Roman" panose="02020603050405020304" pitchFamily="18" charset="0"/>
-            </a:endParaRPr>
-          </a:p>
-          <a:p>
-            <a:pPr algn="ctr"/>
-            <a:r>
-              <a:rPr lang="en-US" altLang="zh-CN" dirty="0">
-                <a:latin typeface="Times New Roman" panose="02020603050405020304" pitchFamily="18" charset="0"/>
-                <a:ea typeface="宋体" panose="02010600030101010101" pitchFamily="2" charset="-122"/>
-                <a:cs typeface="Times New Roman" panose="02020603050405020304" pitchFamily="18" charset="0"/>
-              </a:rPr>
-              <a:t>         inner </a:t>
-            </a:r>
-            <a:r>
-              <a:rPr lang="zh-CN" altLang="en-US" dirty="0">
-                <a:latin typeface="Times New Roman" panose="02020603050405020304" pitchFamily="18" charset="0"/>
-                <a:ea typeface="宋体" panose="02010600030101010101" pitchFamily="2" charset="-122"/>
-                <a:cs typeface="Times New Roman" panose="02020603050405020304" pitchFamily="18" charset="0"/>
-              </a:rPr>
-              <a:t>对象持有，因此保持存活。</a:t>
-            </a:r>
+            <a:endParaRPr lang="zh-CN" altLang="en-US"/>
           </a:p>
         </p:txBody>
       </p:sp>
@@ -13186,20 +14584,17 @@
           </p:cNvPr>
           <p:cNvCxnSpPr>
             <a:cxnSpLocks/>
-            <a:stCxn id="24" idx="1"/>
             <a:endCxn id="11" idx="1"/>
           </p:cNvCxnSpPr>
           <p:nvPr/>
         </p:nvCxnSpPr>
         <p:spPr>
-          <a:xfrm rot="10800000">
-            <a:off x="1092267" y="3746769"/>
-            <a:ext cx="519781" cy="1469071"/>
+          <a:xfrm rot="5400000" flipH="1" flipV="1">
+            <a:off x="362658" y="4093125"/>
+            <a:ext cx="1075965" cy="383252"/>
           </a:xfrm>
-          <a:prstGeom prst="curvedConnector3">
-            <a:avLst>
-              <a:gd name="adj1" fmla="val 143980"/>
-            </a:avLst>
+          <a:prstGeom prst="curvedConnector2">
+            <a:avLst/>
           </a:prstGeom>
           <a:ln w="28575">
             <a:solidFill>
@@ -13238,7 +14633,7 @@
         </p:nvSpPr>
         <p:spPr>
           <a:xfrm>
-            <a:off x="1612047" y="4892673"/>
+            <a:off x="479280" y="4822733"/>
             <a:ext cx="3772751" cy="646331"/>
           </a:xfrm>
           <a:prstGeom prst="rect">
@@ -13378,8 +14773,112 @@
                 <a:ea typeface="宋体" panose="02010600030101010101" pitchFamily="2" charset="-122"/>
                 <a:cs typeface="Times New Roman" panose="02020603050405020304" pitchFamily="18" charset="0"/>
               </a:rPr>
-              <a:t>指令建立引用。</a:t>
+              <a:t>指令持有。</a:t>
             </a:r>
+          </a:p>
+        </p:txBody>
+      </p:sp>
+      <p:sp>
+        <p:nvSpPr>
+          <p:cNvPr id="45" name="椭圆 44">
+            <a:extLst>
+              <a:ext uri="{FF2B5EF4-FFF2-40B4-BE49-F238E27FC236}">
+                <a16:creationId xmlns:a16="http://schemas.microsoft.com/office/drawing/2014/main" id="{7CEEBB49-490E-4E64-B3B7-0903C2C4C24E}"/>
+              </a:ext>
+            </a:extLst>
+          </p:cNvPr>
+          <p:cNvSpPr/>
+          <p:nvPr/>
+        </p:nvSpPr>
+        <p:spPr>
+          <a:xfrm>
+            <a:off x="2901617" y="964688"/>
+            <a:ext cx="136566" cy="136566"/>
+          </a:xfrm>
+          <a:prstGeom prst="ellipse">
+            <a:avLst/>
+          </a:prstGeom>
+          <a:solidFill>
+            <a:schemeClr val="tx1"/>
+          </a:solidFill>
+          <a:ln>
+            <a:noFill/>
+          </a:ln>
+        </p:spPr>
+        <p:style>
+          <a:lnRef idx="2">
+            <a:schemeClr val="accent1">
+              <a:shade val="50000"/>
+            </a:schemeClr>
+          </a:lnRef>
+          <a:fillRef idx="1">
+            <a:schemeClr val="accent1"/>
+          </a:fillRef>
+          <a:effectRef idx="0">
+            <a:schemeClr val="accent1"/>
+          </a:effectRef>
+          <a:fontRef idx="minor">
+            <a:schemeClr val="lt1"/>
+          </a:fontRef>
+        </p:style>
+        <p:txBody>
+          <a:bodyPr rtlCol="0" anchor="ctr"/>
+          <a:lstStyle/>
+          <a:p>
+            <a:pPr algn="ctr"/>
+            <a:endParaRPr lang="zh-CN" altLang="en-US"/>
+          </a:p>
+        </p:txBody>
+      </p:sp>
+      <p:sp>
+        <p:nvSpPr>
+          <p:cNvPr id="47" name="椭圆 46">
+            <a:extLst>
+              <a:ext uri="{FF2B5EF4-FFF2-40B4-BE49-F238E27FC236}">
+                <a16:creationId xmlns:a16="http://schemas.microsoft.com/office/drawing/2014/main" id="{4B0B1884-C611-44E2-88E9-EEE429895742}"/>
+              </a:ext>
+            </a:extLst>
+          </p:cNvPr>
+          <p:cNvSpPr/>
+          <p:nvPr/>
+        </p:nvSpPr>
+        <p:spPr>
+          <a:xfrm>
+            <a:off x="3175484" y="3705727"/>
+            <a:ext cx="136566" cy="136566"/>
+          </a:xfrm>
+          <a:prstGeom prst="ellipse">
+            <a:avLst/>
+          </a:prstGeom>
+          <a:solidFill>
+            <a:schemeClr val="tx1"/>
+          </a:solidFill>
+          <a:ln>
+            <a:noFill/>
+          </a:ln>
+        </p:spPr>
+        <p:style>
+          <a:lnRef idx="2">
+            <a:schemeClr val="accent1">
+              <a:shade val="50000"/>
+            </a:schemeClr>
+          </a:lnRef>
+          <a:fillRef idx="1">
+            <a:schemeClr val="accent1"/>
+          </a:fillRef>
+          <a:effectRef idx="0">
+            <a:schemeClr val="accent1"/>
+          </a:effectRef>
+          <a:fontRef idx="minor">
+            <a:schemeClr val="lt1"/>
+          </a:fontRef>
+        </p:style>
+        <p:txBody>
+          <a:bodyPr rtlCol="0" anchor="ctr"/>
+          <a:lstStyle/>
+          <a:p>
+            <a:pPr algn="ctr"/>
+            <a:endParaRPr lang="zh-CN" altLang="en-US"/>
           </a:p>
         </p:txBody>
       </p:sp>

--- a/docs/thesis/pictures.pptx
+++ b/docs/thesis/pictures.pptx
@@ -5,7 +5,7 @@
     <p:sldMasterId id="2147483648" r:id="rId1"/>
   </p:sldMasterIdLst>
   <p:notesMasterIdLst>
-    <p:notesMasterId r:id="rId7"/>
+    <p:notesMasterId r:id="rId8"/>
   </p:notesMasterIdLst>
   <p:sldIdLst>
     <p:sldId id="259" r:id="rId2"/>
@@ -13,6 +13,7 @@
     <p:sldId id="260" r:id="rId4"/>
     <p:sldId id="263" r:id="rId5"/>
     <p:sldId id="261" r:id="rId6"/>
+    <p:sldId id="264" r:id="rId7"/>
   </p:sldIdLst>
   <p:sldSz cx="12192000" cy="6858000"/>
   <p:notesSz cx="6858000" cy="9144000"/>
@@ -731,6 +732,97 @@
     <p:extLst>
       <p:ext uri="{BB962C8B-B14F-4D97-AF65-F5344CB8AC3E}">
         <p14:creationId xmlns:p14="http://schemas.microsoft.com/office/powerpoint/2010/main" val="3546732640"/>
+      </p:ext>
+    </p:extLst>
+  </p:cSld>
+  <p:clrMapOvr>
+    <a:masterClrMapping/>
+  </p:clrMapOvr>
+</p:notes>
+</file>
+
+<file path=ppt/notesSlides/notesSlide3.xml><?xml version="1.0" encoding="utf-8"?>
+<p:notes xmlns:a="http://schemas.openxmlformats.org/drawingml/2006/main" xmlns:r="http://schemas.openxmlformats.org/officeDocument/2006/relationships" xmlns:p="http://schemas.openxmlformats.org/presentationml/2006/main">
+  <p:cSld>
+    <p:spTree>
+      <p:nvGrpSpPr>
+        <p:cNvPr id="1" name=""/>
+        <p:cNvGrpSpPr/>
+        <p:nvPr/>
+      </p:nvGrpSpPr>
+      <p:grpSpPr>
+        <a:xfrm>
+          <a:off x="0" y="0"/>
+          <a:ext cx="0" cy="0"/>
+          <a:chOff x="0" y="0"/>
+          <a:chExt cx="0" cy="0"/>
+        </a:xfrm>
+      </p:grpSpPr>
+      <p:sp>
+        <p:nvSpPr>
+          <p:cNvPr id="2" name="幻灯片图像占位符 1"/>
+          <p:cNvSpPr>
+            <a:spLocks noGrp="1" noRot="1" noChangeAspect="1"/>
+          </p:cNvSpPr>
+          <p:nvPr>
+            <p:ph type="sldImg"/>
+          </p:nvPr>
+        </p:nvSpPr>
+        <p:spPr/>
+      </p:sp>
+      <p:sp>
+        <p:nvSpPr>
+          <p:cNvPr id="3" name="备注占位符 2"/>
+          <p:cNvSpPr>
+            <a:spLocks noGrp="1"/>
+          </p:cNvSpPr>
+          <p:nvPr>
+            <p:ph type="body" idx="1"/>
+          </p:nvPr>
+        </p:nvSpPr>
+        <p:spPr/>
+        <p:txBody>
+          <a:bodyPr/>
+          <a:lstStyle/>
+          <a:p>
+            <a:r>
+              <a:rPr lang="zh-CN" altLang="en-US" dirty="0"/>
+              <a:t>系统总体架构图</a:t>
+            </a:r>
+            <a:endParaRPr lang="en-US" altLang="zh-CN" dirty="0"/>
+          </a:p>
+          <a:p>
+            <a:endParaRPr lang="zh-CN" altLang="en-US" dirty="0"/>
+          </a:p>
+        </p:txBody>
+      </p:sp>
+      <p:sp>
+        <p:nvSpPr>
+          <p:cNvPr id="4" name="灯片编号占位符 3"/>
+          <p:cNvSpPr>
+            <a:spLocks noGrp="1"/>
+          </p:cNvSpPr>
+          <p:nvPr>
+            <p:ph type="sldNum" sz="quarter" idx="5"/>
+          </p:nvPr>
+        </p:nvSpPr>
+        <p:spPr/>
+        <p:txBody>
+          <a:bodyPr/>
+          <a:lstStyle/>
+          <a:p>
+            <a:fld id="{E393EDF1-1F90-4424-893B-0173418AA877}" type="slidenum">
+              <a:rPr lang="zh-CN" altLang="en-US" smtClean="0"/>
+              <a:t>5</a:t>
+            </a:fld>
+            <a:endParaRPr lang="zh-CN" altLang="en-US"/>
+          </a:p>
+        </p:txBody>
+      </p:sp>
+    </p:spTree>
+    <p:extLst>
+      <p:ext uri="{BB962C8B-B14F-4D97-AF65-F5344CB8AC3E}">
+        <p14:creationId xmlns:p14="http://schemas.microsoft.com/office/powerpoint/2010/main" val="1195047455"/>
       </p:ext>
     </p:extLst>
   </p:cSld>
@@ -14912,53 +15004,2060 @@
           <a:chExt cx="0" cy="0"/>
         </a:xfrm>
       </p:grpSpPr>
-      <p:sp>
-        <p:nvSpPr>
-          <p:cNvPr id="2" name="标题 1">
+      <p:grpSp>
+        <p:nvGrpSpPr>
+          <p:cNvPr id="57" name="组合 56">
             <a:extLst>
               <a:ext uri="{FF2B5EF4-FFF2-40B4-BE49-F238E27FC236}">
-                <a16:creationId xmlns:a16="http://schemas.microsoft.com/office/drawing/2014/main" id="{E3CBAAA5-9D5F-49F0-85E3-AE021CB515A5}"/>
+                <a16:creationId xmlns:a16="http://schemas.microsoft.com/office/drawing/2014/main" id="{0F3A08F0-8EDF-4939-834E-87D674B6FBCC}"/>
               </a:ext>
             </a:extLst>
           </p:cNvPr>
-          <p:cNvSpPr>
-            <a:spLocks noGrp="1"/>
-          </p:cNvSpPr>
-          <p:nvPr>
-            <p:ph type="title"/>
-          </p:nvPr>
+          <p:cNvGrpSpPr/>
+          <p:nvPr/>
+        </p:nvGrpSpPr>
+        <p:grpSpPr>
+          <a:xfrm>
+            <a:off x="2624436" y="703738"/>
+            <a:ext cx="7684732" cy="5648675"/>
+            <a:chOff x="1805039" y="1089686"/>
+            <a:chExt cx="7684732" cy="5648675"/>
+          </a:xfrm>
+        </p:grpSpPr>
+        <p:grpSp>
+          <p:nvGrpSpPr>
+            <p:cNvPr id="52" name="组合 51">
+              <a:extLst>
+                <a:ext uri="{FF2B5EF4-FFF2-40B4-BE49-F238E27FC236}">
+                  <a16:creationId xmlns:a16="http://schemas.microsoft.com/office/drawing/2014/main" id="{F03AD0CD-7537-4AC3-A68B-4CAE18F4A97B}"/>
+                </a:ext>
+              </a:extLst>
+            </p:cNvPr>
+            <p:cNvGrpSpPr/>
+            <p:nvPr/>
+          </p:nvGrpSpPr>
+          <p:grpSpPr>
+            <a:xfrm>
+              <a:off x="1805039" y="1089686"/>
+              <a:ext cx="5907984" cy="5648675"/>
+              <a:chOff x="1805039" y="1089686"/>
+              <a:chExt cx="5907984" cy="5648675"/>
+            </a:xfrm>
+          </p:grpSpPr>
+          <p:grpSp>
+            <p:nvGrpSpPr>
+              <p:cNvPr id="7" name="组合 6">
+                <a:extLst>
+                  <a:ext uri="{FF2B5EF4-FFF2-40B4-BE49-F238E27FC236}">
+                    <a16:creationId xmlns:a16="http://schemas.microsoft.com/office/drawing/2014/main" id="{A107751B-7AB6-4C7B-87E1-66480F98E260}"/>
+                  </a:ext>
+                </a:extLst>
+              </p:cNvPr>
+              <p:cNvGrpSpPr/>
+              <p:nvPr/>
+            </p:nvGrpSpPr>
+            <p:grpSpPr>
+              <a:xfrm>
+                <a:off x="1805048" y="6097980"/>
+                <a:ext cx="5907975" cy="640381"/>
+                <a:chOff x="1828798" y="5848598"/>
+                <a:chExt cx="5907975" cy="640381"/>
+              </a:xfrm>
+            </p:grpSpPr>
+            <p:sp>
+              <p:nvSpPr>
+                <p:cNvPr id="4" name="矩形 3">
+                  <a:extLst>
+                    <a:ext uri="{FF2B5EF4-FFF2-40B4-BE49-F238E27FC236}">
+                      <a16:creationId xmlns:a16="http://schemas.microsoft.com/office/drawing/2014/main" id="{FD6CF64F-6E49-4714-B853-5217DB27FF22}"/>
+                    </a:ext>
+                  </a:extLst>
+                </p:cNvPr>
+                <p:cNvSpPr/>
+                <p:nvPr/>
+              </p:nvSpPr>
+              <p:spPr>
+                <a:xfrm>
+                  <a:off x="1828798" y="5848598"/>
+                  <a:ext cx="5907975" cy="640381"/>
+                </a:xfrm>
+                <a:prstGeom prst="rect">
+                  <a:avLst/>
+                </a:prstGeom>
+                <a:noFill/>
+                <a:ln w="28575">
+                  <a:solidFill>
+                    <a:schemeClr val="tx1"/>
+                  </a:solidFill>
+                </a:ln>
+              </p:spPr>
+              <p:style>
+                <a:lnRef idx="2">
+                  <a:schemeClr val="accent1">
+                    <a:shade val="50000"/>
+                  </a:schemeClr>
+                </a:lnRef>
+                <a:fillRef idx="1">
+                  <a:schemeClr val="accent1"/>
+                </a:fillRef>
+                <a:effectRef idx="0">
+                  <a:schemeClr val="accent1"/>
+                </a:effectRef>
+                <a:fontRef idx="minor">
+                  <a:schemeClr val="lt1"/>
+                </a:fontRef>
+              </p:style>
+              <p:txBody>
+                <a:bodyPr rtlCol="0" anchor="ctr"/>
+                <a:lstStyle/>
+                <a:p>
+                  <a:pPr algn="ctr"/>
+                  <a:endParaRPr lang="zh-CN" altLang="en-US"/>
+                </a:p>
+              </p:txBody>
+            </p:sp>
+            <p:sp>
+              <p:nvSpPr>
+                <p:cNvPr id="5" name="文本框 4">
+                  <a:extLst>
+                    <a:ext uri="{FF2B5EF4-FFF2-40B4-BE49-F238E27FC236}">
+                      <a16:creationId xmlns:a16="http://schemas.microsoft.com/office/drawing/2014/main" id="{4823CEC3-BF6B-4843-909C-AFECE2D3FB89}"/>
+                    </a:ext>
+                  </a:extLst>
+                </p:cNvPr>
+                <p:cNvSpPr txBox="1"/>
+                <p:nvPr/>
+              </p:nvSpPr>
+              <p:spPr>
+                <a:xfrm>
+                  <a:off x="3646095" y="5851567"/>
+                  <a:ext cx="2273379" cy="369332"/>
+                </a:xfrm>
+                <a:prstGeom prst="rect">
+                  <a:avLst/>
+                </a:prstGeom>
+                <a:noFill/>
+              </p:spPr>
+              <p:txBody>
+                <a:bodyPr wrap="none" rtlCol="0">
+                  <a:spAutoFit/>
+                </a:bodyPr>
+                <a:lstStyle/>
+                <a:p>
+                  <a:r>
+                    <a:rPr lang="zh-CN" altLang="en-US" b="1" dirty="0">
+                      <a:latin typeface="Times New Roman" panose="02020603050405020304" pitchFamily="18" charset="0"/>
+                      <a:ea typeface="宋体" panose="02010600030101010101" pitchFamily="2" charset="-122"/>
+                      <a:cs typeface="Times New Roman" panose="02020603050405020304" pitchFamily="18" charset="0"/>
+                    </a:rPr>
+                    <a:t>工具基础层（</a:t>
+                  </a:r>
+                  <a:r>
+                    <a:rPr lang="en-US" altLang="zh-CN" b="1" dirty="0">
+                      <a:latin typeface="Times New Roman" panose="02020603050405020304" pitchFamily="18" charset="0"/>
+                      <a:ea typeface="宋体" panose="02010600030101010101" pitchFamily="2" charset="-122"/>
+                      <a:cs typeface="Times New Roman" panose="02020603050405020304" pitchFamily="18" charset="0"/>
+                    </a:rPr>
+                    <a:t>Utils</a:t>
+                  </a:r>
+                  <a:r>
+                    <a:rPr lang="zh-CN" altLang="en-US" b="1" dirty="0">
+                      <a:latin typeface="Times New Roman" panose="02020603050405020304" pitchFamily="18" charset="0"/>
+                      <a:ea typeface="宋体" panose="02010600030101010101" pitchFamily="2" charset="-122"/>
+                      <a:cs typeface="Times New Roman" panose="02020603050405020304" pitchFamily="18" charset="0"/>
+                    </a:rPr>
+                    <a:t>）</a:t>
+                  </a:r>
+                </a:p>
+              </p:txBody>
+            </p:sp>
+            <p:sp>
+              <p:nvSpPr>
+                <p:cNvPr id="6" name="文本框 5">
+                  <a:extLst>
+                    <a:ext uri="{FF2B5EF4-FFF2-40B4-BE49-F238E27FC236}">
+                      <a16:creationId xmlns:a16="http://schemas.microsoft.com/office/drawing/2014/main" id="{CD04657F-8646-43AC-9EBD-92A483E7332C}"/>
+                    </a:ext>
+                  </a:extLst>
+                </p:cNvPr>
+                <p:cNvSpPr txBox="1"/>
+                <p:nvPr/>
+              </p:nvSpPr>
+              <p:spPr>
+                <a:xfrm>
+                  <a:off x="3048976" y="6150425"/>
+                  <a:ext cx="3467616" cy="338554"/>
+                </a:xfrm>
+                <a:prstGeom prst="rect">
+                  <a:avLst/>
+                </a:prstGeom>
+                <a:noFill/>
+              </p:spPr>
+              <p:txBody>
+                <a:bodyPr wrap="none" rtlCol="0">
+                  <a:spAutoFit/>
+                </a:bodyPr>
+                <a:lstStyle/>
+                <a:p>
+                  <a:r>
+                    <a:rPr lang="zh-CN" altLang="en-US" sz="1600" dirty="0">
+                      <a:latin typeface="宋体" panose="02010600030101010101" pitchFamily="2" charset="-122"/>
+                      <a:ea typeface="宋体" panose="02010600030101010101" pitchFamily="2" charset="-122"/>
+                    </a:rPr>
+                    <a:t>内存、容器、位操作等通用基础设施</a:t>
+                  </a:r>
+                </a:p>
+              </p:txBody>
+            </p:sp>
+          </p:grpSp>
+          <p:grpSp>
+            <p:nvGrpSpPr>
+              <p:cNvPr id="8" name="组合 7">
+                <a:extLst>
+                  <a:ext uri="{FF2B5EF4-FFF2-40B4-BE49-F238E27FC236}">
+                    <a16:creationId xmlns:a16="http://schemas.microsoft.com/office/drawing/2014/main" id="{17743BF0-6C89-46ED-9A2A-95B2CE34D40F}"/>
+                  </a:ext>
+                </a:extLst>
+              </p:cNvPr>
+              <p:cNvGrpSpPr/>
+              <p:nvPr/>
+            </p:nvGrpSpPr>
+            <p:grpSpPr>
+              <a:xfrm>
+                <a:off x="1805048" y="5274806"/>
+                <a:ext cx="5907975" cy="649392"/>
+                <a:chOff x="1828798" y="5848598"/>
+                <a:chExt cx="5907975" cy="649392"/>
+              </a:xfrm>
+            </p:grpSpPr>
+            <p:sp>
+              <p:nvSpPr>
+                <p:cNvPr id="9" name="矩形 8">
+                  <a:extLst>
+                    <a:ext uri="{FF2B5EF4-FFF2-40B4-BE49-F238E27FC236}">
+                      <a16:creationId xmlns:a16="http://schemas.microsoft.com/office/drawing/2014/main" id="{76D3E8DB-BE94-41EC-9A90-70737011C509}"/>
+                    </a:ext>
+                  </a:extLst>
+                </p:cNvPr>
+                <p:cNvSpPr/>
+                <p:nvPr/>
+              </p:nvSpPr>
+              <p:spPr>
+                <a:xfrm>
+                  <a:off x="1828798" y="5848598"/>
+                  <a:ext cx="5907975" cy="640381"/>
+                </a:xfrm>
+                <a:prstGeom prst="rect">
+                  <a:avLst/>
+                </a:prstGeom>
+                <a:noFill/>
+                <a:ln w="28575">
+                  <a:solidFill>
+                    <a:schemeClr val="tx1"/>
+                  </a:solidFill>
+                </a:ln>
+              </p:spPr>
+              <p:style>
+                <a:lnRef idx="2">
+                  <a:schemeClr val="accent1">
+                    <a:shade val="50000"/>
+                  </a:schemeClr>
+                </a:lnRef>
+                <a:fillRef idx="1">
+                  <a:schemeClr val="accent1"/>
+                </a:fillRef>
+                <a:effectRef idx="0">
+                  <a:schemeClr val="accent1"/>
+                </a:effectRef>
+                <a:fontRef idx="minor">
+                  <a:schemeClr val="lt1"/>
+                </a:fontRef>
+              </p:style>
+              <p:txBody>
+                <a:bodyPr rtlCol="0" anchor="ctr"/>
+                <a:lstStyle/>
+                <a:p>
+                  <a:pPr algn="ctr"/>
+                  <a:endParaRPr lang="zh-CN" altLang="en-US"/>
+                </a:p>
+              </p:txBody>
+            </p:sp>
+            <p:sp>
+              <p:nvSpPr>
+                <p:cNvPr id="10" name="文本框 9">
+                  <a:extLst>
+                    <a:ext uri="{FF2B5EF4-FFF2-40B4-BE49-F238E27FC236}">
+                      <a16:creationId xmlns:a16="http://schemas.microsoft.com/office/drawing/2014/main" id="{C8E1A3B9-2538-4FB4-A0BD-ACA78FB74222}"/>
+                    </a:ext>
+                  </a:extLst>
+                </p:cNvPr>
+                <p:cNvSpPr txBox="1"/>
+                <p:nvPr/>
+              </p:nvSpPr>
+              <p:spPr>
+                <a:xfrm>
+                  <a:off x="3646095" y="5851567"/>
+                  <a:ext cx="2105063" cy="369332"/>
+                </a:xfrm>
+                <a:prstGeom prst="rect">
+                  <a:avLst/>
+                </a:prstGeom>
+                <a:noFill/>
+              </p:spPr>
+              <p:txBody>
+                <a:bodyPr wrap="none" rtlCol="0">
+                  <a:spAutoFit/>
+                </a:bodyPr>
+                <a:lstStyle/>
+                <a:p>
+                  <a:r>
+                    <a:rPr lang="zh-CN" altLang="en-US" b="1" dirty="0">
+                      <a:latin typeface="Times New Roman" panose="02020603050405020304" pitchFamily="18" charset="0"/>
+                      <a:ea typeface="宋体" panose="02010600030101010101" pitchFamily="2" charset="-122"/>
+                      <a:cs typeface="Times New Roman" panose="02020603050405020304" pitchFamily="18" charset="0"/>
+                    </a:rPr>
+                    <a:t>虚拟机堆（</a:t>
+                  </a:r>
+                  <a:r>
+                    <a:rPr lang="en-US" altLang="zh-CN" b="1" dirty="0">
+                      <a:latin typeface="Times New Roman" panose="02020603050405020304" pitchFamily="18" charset="0"/>
+                      <a:ea typeface="宋体" panose="02010600030101010101" pitchFamily="2" charset="-122"/>
+                      <a:cs typeface="Times New Roman" panose="02020603050405020304" pitchFamily="18" charset="0"/>
+                    </a:rPr>
+                    <a:t>Heap</a:t>
+                  </a:r>
+                  <a:r>
+                    <a:rPr lang="zh-CN" altLang="en-US" b="1" dirty="0">
+                      <a:latin typeface="Times New Roman" panose="02020603050405020304" pitchFamily="18" charset="0"/>
+                      <a:ea typeface="宋体" panose="02010600030101010101" pitchFamily="2" charset="-122"/>
+                      <a:cs typeface="Times New Roman" panose="02020603050405020304" pitchFamily="18" charset="0"/>
+                    </a:rPr>
+                    <a:t>）</a:t>
+                  </a:r>
+                </a:p>
+              </p:txBody>
+            </p:sp>
+            <p:sp>
+              <p:nvSpPr>
+                <p:cNvPr id="11" name="文本框 10">
+                  <a:extLst>
+                    <a:ext uri="{FF2B5EF4-FFF2-40B4-BE49-F238E27FC236}">
+                      <a16:creationId xmlns:a16="http://schemas.microsoft.com/office/drawing/2014/main" id="{858B5998-AA1E-44EB-8286-2E15B0EE75D8}"/>
+                    </a:ext>
+                  </a:extLst>
+                </p:cNvPr>
+                <p:cNvSpPr txBox="1"/>
+                <p:nvPr/>
+              </p:nvSpPr>
+              <p:spPr>
+                <a:xfrm>
+                  <a:off x="2538419" y="6159436"/>
+                  <a:ext cx="4488729" cy="338554"/>
+                </a:xfrm>
+                <a:prstGeom prst="rect">
+                  <a:avLst/>
+                </a:prstGeom>
+                <a:noFill/>
+              </p:spPr>
+              <p:txBody>
+                <a:bodyPr wrap="none" rtlCol="0">
+                  <a:spAutoFit/>
+                </a:bodyPr>
+                <a:lstStyle/>
+                <a:p>
+                  <a:r>
+                    <a:rPr lang="zh-CN" altLang="en-US" sz="1600" dirty="0">
+                      <a:latin typeface="Times New Roman" panose="02020603050405020304" pitchFamily="18" charset="0"/>
+                      <a:ea typeface="宋体" panose="02010600030101010101" pitchFamily="2" charset="-122"/>
+                      <a:cs typeface="Times New Roman" panose="02020603050405020304" pitchFamily="18" charset="0"/>
+                    </a:rPr>
+                    <a:t>堆内存空间 </a:t>
+                  </a:r>
+                  <a:r>
+                    <a:rPr lang="en-US" altLang="zh-CN" sz="1600" dirty="0">
+                      <a:latin typeface="Times New Roman" panose="02020603050405020304" pitchFamily="18" charset="0"/>
+                      <a:ea typeface="宋体" panose="02010600030101010101" pitchFamily="2" charset="-122"/>
+                      <a:cs typeface="Times New Roman" panose="02020603050405020304" pitchFamily="18" charset="0"/>
+                    </a:rPr>
+                    <a:t>/ </a:t>
+                  </a:r>
+                  <a:r>
+                    <a:rPr lang="zh-CN" altLang="en-US" sz="1600" dirty="0">
+                      <a:latin typeface="Times New Roman" panose="02020603050405020304" pitchFamily="18" charset="0"/>
+                      <a:ea typeface="宋体" panose="02010600030101010101" pitchFamily="2" charset="-122"/>
+                      <a:cs typeface="Times New Roman" panose="02020603050405020304" pitchFamily="18" charset="0"/>
+                    </a:rPr>
+                    <a:t>堆内存分配</a:t>
+                  </a:r>
+                  <a:r>
+                    <a:rPr lang="en-US" altLang="zh-CN" sz="1600" dirty="0">
+                      <a:latin typeface="Times New Roman" panose="02020603050405020304" pitchFamily="18" charset="0"/>
+                      <a:ea typeface="宋体" panose="02010600030101010101" pitchFamily="2" charset="-122"/>
+                      <a:cs typeface="Times New Roman" panose="02020603050405020304" pitchFamily="18" charset="0"/>
+                    </a:rPr>
+                    <a:t> / </a:t>
+                  </a:r>
+                  <a:r>
+                    <a:rPr lang="zh-CN" altLang="en-US" sz="1600" dirty="0">
+                      <a:latin typeface="Times New Roman" panose="02020603050405020304" pitchFamily="18" charset="0"/>
+                      <a:ea typeface="宋体" panose="02010600030101010101" pitchFamily="2" charset="-122"/>
+                      <a:cs typeface="Times New Roman" panose="02020603050405020304" pitchFamily="18" charset="0"/>
+                    </a:rPr>
+                    <a:t>根集合扫描</a:t>
+                  </a:r>
+                  <a:r>
+                    <a:rPr lang="en-US" altLang="zh-CN" sz="1600" dirty="0">
+                      <a:latin typeface="Times New Roman" panose="02020603050405020304" pitchFamily="18" charset="0"/>
+                      <a:ea typeface="宋体" panose="02010600030101010101" pitchFamily="2" charset="-122"/>
+                      <a:cs typeface="Times New Roman" panose="02020603050405020304" pitchFamily="18" charset="0"/>
+                    </a:rPr>
+                    <a:t> / GC </a:t>
+                  </a:r>
+                  <a:r>
+                    <a:rPr lang="zh-CN" altLang="en-US" sz="1600" dirty="0">
+                      <a:latin typeface="Times New Roman" panose="02020603050405020304" pitchFamily="18" charset="0"/>
+                      <a:ea typeface="宋体" panose="02010600030101010101" pitchFamily="2" charset="-122"/>
+                      <a:cs typeface="Times New Roman" panose="02020603050405020304" pitchFamily="18" charset="0"/>
+                    </a:rPr>
+                    <a:t>机制</a:t>
+                  </a:r>
+                </a:p>
+              </p:txBody>
+            </p:sp>
+          </p:grpSp>
+          <p:grpSp>
+            <p:nvGrpSpPr>
+              <p:cNvPr id="12" name="组合 11">
+                <a:extLst>
+                  <a:ext uri="{FF2B5EF4-FFF2-40B4-BE49-F238E27FC236}">
+                    <a16:creationId xmlns:a16="http://schemas.microsoft.com/office/drawing/2014/main" id="{467D0545-0E55-439B-AC25-B28BBB86B1F0}"/>
+                  </a:ext>
+                </a:extLst>
+              </p:cNvPr>
+              <p:cNvGrpSpPr/>
+              <p:nvPr/>
+            </p:nvGrpSpPr>
+            <p:grpSpPr>
+              <a:xfrm>
+                <a:off x="1805045" y="4442621"/>
+                <a:ext cx="5907975" cy="649392"/>
+                <a:chOff x="1828798" y="5848598"/>
+                <a:chExt cx="5907975" cy="649392"/>
+              </a:xfrm>
+            </p:grpSpPr>
+            <p:sp>
+              <p:nvSpPr>
+                <p:cNvPr id="13" name="矩形 12">
+                  <a:extLst>
+                    <a:ext uri="{FF2B5EF4-FFF2-40B4-BE49-F238E27FC236}">
+                      <a16:creationId xmlns:a16="http://schemas.microsoft.com/office/drawing/2014/main" id="{BC84C3F5-EEA8-4942-AB9D-122E1B9EEC1D}"/>
+                    </a:ext>
+                  </a:extLst>
+                </p:cNvPr>
+                <p:cNvSpPr/>
+                <p:nvPr/>
+              </p:nvSpPr>
+              <p:spPr>
+                <a:xfrm>
+                  <a:off x="1828798" y="5848598"/>
+                  <a:ext cx="5907975" cy="640381"/>
+                </a:xfrm>
+                <a:prstGeom prst="rect">
+                  <a:avLst/>
+                </a:prstGeom>
+                <a:noFill/>
+                <a:ln w="28575">
+                  <a:solidFill>
+                    <a:schemeClr val="tx1"/>
+                  </a:solidFill>
+                </a:ln>
+              </p:spPr>
+              <p:style>
+                <a:lnRef idx="2">
+                  <a:schemeClr val="accent1">
+                    <a:shade val="50000"/>
+                  </a:schemeClr>
+                </a:lnRef>
+                <a:fillRef idx="1">
+                  <a:schemeClr val="accent1"/>
+                </a:fillRef>
+                <a:effectRef idx="0">
+                  <a:schemeClr val="accent1"/>
+                </a:effectRef>
+                <a:fontRef idx="minor">
+                  <a:schemeClr val="lt1"/>
+                </a:fontRef>
+              </p:style>
+              <p:txBody>
+                <a:bodyPr rtlCol="0" anchor="ctr"/>
+                <a:lstStyle/>
+                <a:p>
+                  <a:pPr algn="ctr"/>
+                  <a:endParaRPr lang="zh-CN" altLang="en-US"/>
+                </a:p>
+              </p:txBody>
+            </p:sp>
+            <p:sp>
+              <p:nvSpPr>
+                <p:cNvPr id="14" name="文本框 13">
+                  <a:extLst>
+                    <a:ext uri="{FF2B5EF4-FFF2-40B4-BE49-F238E27FC236}">
+                      <a16:creationId xmlns:a16="http://schemas.microsoft.com/office/drawing/2014/main" id="{557A7A9B-2414-4E87-BBA8-2184ED98D4D5}"/>
+                    </a:ext>
+                  </a:extLst>
+                </p:cNvPr>
+                <p:cNvSpPr txBox="1"/>
+                <p:nvPr/>
+              </p:nvSpPr>
+              <p:spPr>
+                <a:xfrm>
+                  <a:off x="3472969" y="5863095"/>
+                  <a:ext cx="2619628" cy="369332"/>
+                </a:xfrm>
+                <a:prstGeom prst="rect">
+                  <a:avLst/>
+                </a:prstGeom>
+                <a:noFill/>
+              </p:spPr>
+              <p:txBody>
+                <a:bodyPr wrap="none" rtlCol="0">
+                  <a:spAutoFit/>
+                </a:bodyPr>
+                <a:lstStyle/>
+                <a:p>
+                  <a:r>
+                    <a:rPr lang="zh-CN" altLang="en-US" b="1" dirty="0">
+                      <a:latin typeface="Times New Roman" panose="02020603050405020304" pitchFamily="18" charset="0"/>
+                      <a:ea typeface="宋体" panose="02010600030101010101" pitchFamily="2" charset="-122"/>
+                      <a:cs typeface="Times New Roman" panose="02020603050405020304" pitchFamily="18" charset="0"/>
+                    </a:rPr>
+                    <a:t>句柄机制层（</a:t>
+                  </a:r>
+                  <a:r>
+                    <a:rPr lang="en-US" altLang="zh-CN" b="1" dirty="0">
+                      <a:latin typeface="Times New Roman" panose="02020603050405020304" pitchFamily="18" charset="0"/>
+                      <a:ea typeface="宋体" panose="02010600030101010101" pitchFamily="2" charset="-122"/>
+                      <a:cs typeface="Times New Roman" panose="02020603050405020304" pitchFamily="18" charset="0"/>
+                    </a:rPr>
+                    <a:t>Handles</a:t>
+                  </a:r>
+                  <a:r>
+                    <a:rPr lang="zh-CN" altLang="en-US" b="1" dirty="0">
+                      <a:latin typeface="Times New Roman" panose="02020603050405020304" pitchFamily="18" charset="0"/>
+                      <a:ea typeface="宋体" panose="02010600030101010101" pitchFamily="2" charset="-122"/>
+                      <a:cs typeface="Times New Roman" panose="02020603050405020304" pitchFamily="18" charset="0"/>
+                    </a:rPr>
+                    <a:t>）</a:t>
+                  </a:r>
+                </a:p>
+              </p:txBody>
+            </p:sp>
+            <p:sp>
+              <p:nvSpPr>
+                <p:cNvPr id="15" name="文本框 14">
+                  <a:extLst>
+                    <a:ext uri="{FF2B5EF4-FFF2-40B4-BE49-F238E27FC236}">
+                      <a16:creationId xmlns:a16="http://schemas.microsoft.com/office/drawing/2014/main" id="{FF1537E3-B8C2-496B-9DAC-1A018D8A758A}"/>
+                    </a:ext>
+                  </a:extLst>
+                </p:cNvPr>
+                <p:cNvSpPr txBox="1"/>
+                <p:nvPr/>
+              </p:nvSpPr>
+              <p:spPr>
+                <a:xfrm>
+                  <a:off x="2313196" y="6159436"/>
+                  <a:ext cx="4939173" cy="338554"/>
+                </a:xfrm>
+                <a:prstGeom prst="rect">
+                  <a:avLst/>
+                </a:prstGeom>
+                <a:noFill/>
+              </p:spPr>
+              <p:txBody>
+                <a:bodyPr wrap="none" rtlCol="0">
+                  <a:spAutoFit/>
+                </a:bodyPr>
+                <a:lstStyle/>
+                <a:p>
+                  <a:r>
+                    <a:rPr lang="zh-CN" altLang="en-US" sz="1600" dirty="0">
+                      <a:latin typeface="Times New Roman" panose="02020603050405020304" pitchFamily="18" charset="0"/>
+                      <a:ea typeface="宋体" panose="02010600030101010101" pitchFamily="2" charset="-122"/>
+                      <a:cs typeface="Times New Roman" panose="02020603050405020304" pitchFamily="18" charset="0"/>
+                    </a:rPr>
+                    <a:t>为本地 </a:t>
+                  </a:r>
+                  <a:r>
+                    <a:rPr lang="en-US" altLang="zh-CN" sz="1600" dirty="0">
+                      <a:latin typeface="Times New Roman" panose="02020603050405020304" pitchFamily="18" charset="0"/>
+                      <a:ea typeface="宋体" panose="02010600030101010101" pitchFamily="2" charset="-122"/>
+                      <a:cs typeface="Times New Roman" panose="02020603050405020304" pitchFamily="18" charset="0"/>
+                    </a:rPr>
+                    <a:t>C++ </a:t>
+                  </a:r>
+                  <a:r>
+                    <a:rPr lang="zh-CN" altLang="en-US" sz="1600" dirty="0">
+                      <a:latin typeface="Times New Roman" panose="02020603050405020304" pitchFamily="18" charset="0"/>
+                      <a:ea typeface="宋体" panose="02010600030101010101" pitchFamily="2" charset="-122"/>
+                      <a:cs typeface="Times New Roman" panose="02020603050405020304" pitchFamily="18" charset="0"/>
+                    </a:rPr>
+                    <a:t>代码持有对象引用提供 </a:t>
+                  </a:r>
+                  <a:r>
+                    <a:rPr lang="en-US" altLang="zh-CN" sz="1600" dirty="0">
+                      <a:latin typeface="Times New Roman" panose="02020603050405020304" pitchFamily="18" charset="0"/>
+                      <a:ea typeface="宋体" panose="02010600030101010101" pitchFamily="2" charset="-122"/>
+                      <a:cs typeface="Times New Roman" panose="02020603050405020304" pitchFamily="18" charset="0"/>
+                    </a:rPr>
+                    <a:t>GC </a:t>
+                  </a:r>
+                  <a:r>
+                    <a:rPr lang="zh-CN" altLang="en-US" sz="1600" dirty="0">
+                      <a:latin typeface="Times New Roman" panose="02020603050405020304" pitchFamily="18" charset="0"/>
+                      <a:ea typeface="宋体" panose="02010600030101010101" pitchFamily="2" charset="-122"/>
+                      <a:cs typeface="Times New Roman" panose="02020603050405020304" pitchFamily="18" charset="0"/>
+                    </a:rPr>
+                    <a:t>安全的中间层</a:t>
+                  </a:r>
+                </a:p>
+              </p:txBody>
+            </p:sp>
+          </p:grpSp>
+          <p:grpSp>
+            <p:nvGrpSpPr>
+              <p:cNvPr id="16" name="组合 15">
+                <a:extLst>
+                  <a:ext uri="{FF2B5EF4-FFF2-40B4-BE49-F238E27FC236}">
+                    <a16:creationId xmlns:a16="http://schemas.microsoft.com/office/drawing/2014/main" id="{99E3DA58-1EA5-45EF-AFEA-7965431DBA21}"/>
+                  </a:ext>
+                </a:extLst>
+              </p:cNvPr>
+              <p:cNvGrpSpPr/>
+              <p:nvPr/>
+            </p:nvGrpSpPr>
+            <p:grpSpPr>
+              <a:xfrm>
+                <a:off x="1805041" y="3600466"/>
+                <a:ext cx="5907975" cy="644887"/>
+                <a:chOff x="1828798" y="5848598"/>
+                <a:chExt cx="5907975" cy="644887"/>
+              </a:xfrm>
+            </p:grpSpPr>
+            <p:sp>
+              <p:nvSpPr>
+                <p:cNvPr id="17" name="矩形 16">
+                  <a:extLst>
+                    <a:ext uri="{FF2B5EF4-FFF2-40B4-BE49-F238E27FC236}">
+                      <a16:creationId xmlns:a16="http://schemas.microsoft.com/office/drawing/2014/main" id="{2D2EC834-6DE8-445A-94F4-6ACE67CF73F6}"/>
+                    </a:ext>
+                  </a:extLst>
+                </p:cNvPr>
+                <p:cNvSpPr/>
+                <p:nvPr/>
+              </p:nvSpPr>
+              <p:spPr>
+                <a:xfrm>
+                  <a:off x="1828798" y="5848598"/>
+                  <a:ext cx="5907975" cy="640381"/>
+                </a:xfrm>
+                <a:prstGeom prst="rect">
+                  <a:avLst/>
+                </a:prstGeom>
+                <a:noFill/>
+                <a:ln w="28575">
+                  <a:solidFill>
+                    <a:schemeClr val="tx1"/>
+                  </a:solidFill>
+                </a:ln>
+              </p:spPr>
+              <p:style>
+                <a:lnRef idx="2">
+                  <a:schemeClr val="accent1">
+                    <a:shade val="50000"/>
+                  </a:schemeClr>
+                </a:lnRef>
+                <a:fillRef idx="1">
+                  <a:schemeClr val="accent1"/>
+                </a:fillRef>
+                <a:effectRef idx="0">
+                  <a:schemeClr val="accent1"/>
+                </a:effectRef>
+                <a:fontRef idx="minor">
+                  <a:schemeClr val="lt1"/>
+                </a:fontRef>
+              </p:style>
+              <p:txBody>
+                <a:bodyPr rtlCol="0" anchor="ctr"/>
+                <a:lstStyle/>
+                <a:p>
+                  <a:pPr algn="ctr"/>
+                  <a:endParaRPr lang="zh-CN" altLang="en-US"/>
+                </a:p>
+              </p:txBody>
+            </p:sp>
+            <p:sp>
+              <p:nvSpPr>
+                <p:cNvPr id="18" name="文本框 17">
+                  <a:extLst>
+                    <a:ext uri="{FF2B5EF4-FFF2-40B4-BE49-F238E27FC236}">
+                      <a16:creationId xmlns:a16="http://schemas.microsoft.com/office/drawing/2014/main" id="{1E41F107-F545-4FFE-BF1A-DEB054FFF2DF}"/>
+                    </a:ext>
+                  </a:extLst>
+                </p:cNvPr>
+                <p:cNvSpPr txBox="1"/>
+                <p:nvPr/>
+              </p:nvSpPr>
+              <p:spPr>
+                <a:xfrm>
+                  <a:off x="3530685" y="5861722"/>
+                  <a:ext cx="2335896" cy="369332"/>
+                </a:xfrm>
+                <a:prstGeom prst="rect">
+                  <a:avLst/>
+                </a:prstGeom>
+                <a:noFill/>
+              </p:spPr>
+              <p:txBody>
+                <a:bodyPr wrap="none" rtlCol="0">
+                  <a:spAutoFit/>
+                </a:bodyPr>
+                <a:lstStyle/>
+                <a:p>
+                  <a:r>
+                    <a:rPr lang="zh-CN" altLang="en-US" b="1" dirty="0">
+                      <a:latin typeface="Times New Roman" panose="02020603050405020304" pitchFamily="18" charset="0"/>
+                      <a:ea typeface="宋体" panose="02010600030101010101" pitchFamily="2" charset="-122"/>
+                      <a:cs typeface="Times New Roman" panose="02020603050405020304" pitchFamily="18" charset="0"/>
+                    </a:rPr>
+                    <a:t>对象系统（</a:t>
+                  </a:r>
+                  <a:r>
+                    <a:rPr lang="en-US" altLang="zh-CN" b="1" dirty="0">
+                      <a:latin typeface="Times New Roman" panose="02020603050405020304" pitchFamily="18" charset="0"/>
+                      <a:ea typeface="宋体" panose="02010600030101010101" pitchFamily="2" charset="-122"/>
+                      <a:cs typeface="Times New Roman" panose="02020603050405020304" pitchFamily="18" charset="0"/>
+                    </a:rPr>
+                    <a:t>Objects</a:t>
+                  </a:r>
+                  <a:r>
+                    <a:rPr lang="zh-CN" altLang="en-US" b="1" dirty="0">
+                      <a:latin typeface="Times New Roman" panose="02020603050405020304" pitchFamily="18" charset="0"/>
+                      <a:ea typeface="宋体" panose="02010600030101010101" pitchFamily="2" charset="-122"/>
+                      <a:cs typeface="Times New Roman" panose="02020603050405020304" pitchFamily="18" charset="0"/>
+                    </a:rPr>
+                    <a:t>）</a:t>
+                  </a:r>
+                </a:p>
+              </p:txBody>
+            </p:sp>
+            <p:sp>
+              <p:nvSpPr>
+                <p:cNvPr id="19" name="文本框 18">
+                  <a:extLst>
+                    <a:ext uri="{FF2B5EF4-FFF2-40B4-BE49-F238E27FC236}">
+                      <a16:creationId xmlns:a16="http://schemas.microsoft.com/office/drawing/2014/main" id="{72AAFE40-177C-4941-9507-E8FC9B5DBFB2}"/>
+                    </a:ext>
+                  </a:extLst>
+                </p:cNvPr>
+                <p:cNvSpPr txBox="1"/>
+                <p:nvPr/>
+              </p:nvSpPr>
+              <p:spPr>
+                <a:xfrm>
+                  <a:off x="2131263" y="6154931"/>
+                  <a:ext cx="5134739" cy="338554"/>
+                </a:xfrm>
+                <a:prstGeom prst="rect">
+                  <a:avLst/>
+                </a:prstGeom>
+                <a:noFill/>
+              </p:spPr>
+              <p:txBody>
+                <a:bodyPr wrap="none" rtlCol="0">
+                  <a:spAutoFit/>
+                </a:bodyPr>
+                <a:lstStyle/>
+                <a:p>
+                  <a:r>
+                    <a:rPr lang="zh-CN" altLang="en-US" sz="1600" dirty="0">
+                      <a:latin typeface="Times New Roman" panose="02020603050405020304" pitchFamily="18" charset="0"/>
+                      <a:ea typeface="宋体" panose="02010600030101010101" pitchFamily="2" charset="-122"/>
+                      <a:cs typeface="Times New Roman" panose="02020603050405020304" pitchFamily="18" charset="0"/>
+                    </a:rPr>
+                    <a:t>对象表示 </a:t>
+                  </a:r>
+                  <a:r>
+                    <a:rPr lang="en-US" altLang="zh-CN" sz="1600" dirty="0">
+                      <a:latin typeface="Times New Roman" panose="02020603050405020304" pitchFamily="18" charset="0"/>
+                      <a:ea typeface="宋体" panose="02010600030101010101" pitchFamily="2" charset="-122"/>
+                      <a:cs typeface="Times New Roman" panose="02020603050405020304" pitchFamily="18" charset="0"/>
+                    </a:rPr>
+                    <a:t>/ </a:t>
+                  </a:r>
+                  <a:r>
+                    <a:rPr lang="zh-CN" altLang="en-US" sz="1600" dirty="0">
+                      <a:latin typeface="Times New Roman" panose="02020603050405020304" pitchFamily="18" charset="0"/>
+                      <a:ea typeface="宋体" panose="02010600030101010101" pitchFamily="2" charset="-122"/>
+                      <a:cs typeface="Times New Roman" panose="02020603050405020304" pitchFamily="18" charset="0"/>
+                    </a:rPr>
+                    <a:t>类型元信息 </a:t>
+                  </a:r>
+                  <a:r>
+                    <a:rPr lang="en-US" altLang="zh-CN" sz="1600" dirty="0">
+                      <a:latin typeface="Times New Roman" panose="02020603050405020304" pitchFamily="18" charset="0"/>
+                      <a:ea typeface="宋体" panose="02010600030101010101" pitchFamily="2" charset="-122"/>
+                      <a:cs typeface="Times New Roman" panose="02020603050405020304" pitchFamily="18" charset="0"/>
+                    </a:rPr>
+                    <a:t>/ </a:t>
+                  </a:r>
+                  <a:r>
+                    <a:rPr lang="zh-CN" altLang="en-US" sz="1600" dirty="0">
+                      <a:latin typeface="Times New Roman" panose="02020603050405020304" pitchFamily="18" charset="0"/>
+                      <a:ea typeface="宋体" panose="02010600030101010101" pitchFamily="2" charset="-122"/>
+                      <a:cs typeface="Times New Roman" panose="02020603050405020304" pitchFamily="18" charset="0"/>
+                    </a:rPr>
+                    <a:t>属性查找 </a:t>
+                  </a:r>
+                  <a:r>
+                    <a:rPr lang="en-US" altLang="zh-CN" sz="1600" dirty="0">
+                      <a:latin typeface="Times New Roman" panose="02020603050405020304" pitchFamily="18" charset="0"/>
+                      <a:ea typeface="宋体" panose="02010600030101010101" pitchFamily="2" charset="-122"/>
+                      <a:cs typeface="Times New Roman" panose="02020603050405020304" pitchFamily="18" charset="0"/>
+                    </a:rPr>
+                    <a:t>/ </a:t>
+                  </a:r>
+                  <a:r>
+                    <a:rPr lang="zh-CN" altLang="en-US" sz="1600" dirty="0">
+                      <a:latin typeface="Times New Roman" panose="02020603050405020304" pitchFamily="18" charset="0"/>
+                      <a:ea typeface="宋体" panose="02010600030101010101" pitchFamily="2" charset="-122"/>
+                      <a:cs typeface="Times New Roman" panose="02020603050405020304" pitchFamily="18" charset="0"/>
+                    </a:rPr>
+                    <a:t>方法绑定 </a:t>
+                  </a:r>
+                  <a:r>
+                    <a:rPr lang="en-US" altLang="zh-CN" sz="1600" dirty="0">
+                      <a:latin typeface="Times New Roman" panose="02020603050405020304" pitchFamily="18" charset="0"/>
+                      <a:ea typeface="宋体" panose="02010600030101010101" pitchFamily="2" charset="-122"/>
+                      <a:cs typeface="Times New Roman" panose="02020603050405020304" pitchFamily="18" charset="0"/>
+                    </a:rPr>
+                    <a:t>/ </a:t>
+                  </a:r>
+                  <a:r>
+                    <a:rPr lang="zh-CN" altLang="en-US" sz="1600" dirty="0">
+                      <a:latin typeface="Times New Roman" panose="02020603050405020304" pitchFamily="18" charset="0"/>
+                      <a:ea typeface="宋体" panose="02010600030101010101" pitchFamily="2" charset="-122"/>
+                      <a:cs typeface="Times New Roman" panose="02020603050405020304" pitchFamily="18" charset="0"/>
+                    </a:rPr>
+                    <a:t>多态分派</a:t>
+                  </a:r>
+                </a:p>
+              </p:txBody>
+            </p:sp>
+          </p:grpSp>
+          <p:grpSp>
+            <p:nvGrpSpPr>
+              <p:cNvPr id="43" name="组合 42">
+                <a:extLst>
+                  <a:ext uri="{FF2B5EF4-FFF2-40B4-BE49-F238E27FC236}">
+                    <a16:creationId xmlns:a16="http://schemas.microsoft.com/office/drawing/2014/main" id="{A7F742D4-89C3-41BC-B36B-4BD6C9A6DA60}"/>
+                  </a:ext>
+                </a:extLst>
+              </p:cNvPr>
+              <p:cNvGrpSpPr/>
+              <p:nvPr/>
+            </p:nvGrpSpPr>
+            <p:grpSpPr>
+              <a:xfrm>
+                <a:off x="1805041" y="2750567"/>
+                <a:ext cx="5907975" cy="659194"/>
+                <a:chOff x="1805040" y="2678841"/>
+                <a:chExt cx="5907975" cy="659194"/>
+              </a:xfrm>
+            </p:grpSpPr>
+            <p:sp>
+              <p:nvSpPr>
+                <p:cNvPr id="21" name="矩形 20">
+                  <a:extLst>
+                    <a:ext uri="{FF2B5EF4-FFF2-40B4-BE49-F238E27FC236}">
+                      <a16:creationId xmlns:a16="http://schemas.microsoft.com/office/drawing/2014/main" id="{9D0FE972-ACB5-47E4-9CF7-4473755617B5}"/>
+                    </a:ext>
+                  </a:extLst>
+                </p:cNvPr>
+                <p:cNvSpPr/>
+                <p:nvPr/>
+              </p:nvSpPr>
+              <p:spPr>
+                <a:xfrm>
+                  <a:off x="1805040" y="2697654"/>
+                  <a:ext cx="5907975" cy="640381"/>
+                </a:xfrm>
+                <a:prstGeom prst="rect">
+                  <a:avLst/>
+                </a:prstGeom>
+                <a:noFill/>
+                <a:ln w="28575">
+                  <a:solidFill>
+                    <a:schemeClr val="tx1"/>
+                  </a:solidFill>
+                </a:ln>
+              </p:spPr>
+              <p:style>
+                <a:lnRef idx="2">
+                  <a:schemeClr val="accent1">
+                    <a:shade val="50000"/>
+                  </a:schemeClr>
+                </a:lnRef>
+                <a:fillRef idx="1">
+                  <a:schemeClr val="accent1"/>
+                </a:fillRef>
+                <a:effectRef idx="0">
+                  <a:schemeClr val="accent1"/>
+                </a:effectRef>
+                <a:fontRef idx="minor">
+                  <a:schemeClr val="lt1"/>
+                </a:fontRef>
+              </p:style>
+              <p:txBody>
+                <a:bodyPr rtlCol="0" anchor="ctr"/>
+                <a:lstStyle/>
+                <a:p>
+                  <a:pPr algn="ctr"/>
+                  <a:endParaRPr lang="zh-CN" altLang="en-US"/>
+                </a:p>
+              </p:txBody>
+            </p:sp>
+            <p:cxnSp>
+              <p:nvCxnSpPr>
+                <p:cNvPr id="25" name="直接连接符 24">
+                  <a:extLst>
+                    <a:ext uri="{FF2B5EF4-FFF2-40B4-BE49-F238E27FC236}">
+                      <a16:creationId xmlns:a16="http://schemas.microsoft.com/office/drawing/2014/main" id="{12BB2464-A78B-4103-AB0B-2569F9F11AF6}"/>
+                    </a:ext>
+                  </a:extLst>
+                </p:cNvPr>
+                <p:cNvCxnSpPr>
+                  <a:stCxn id="21" idx="0"/>
+                  <a:endCxn id="21" idx="2"/>
+                </p:cNvCxnSpPr>
+                <p:nvPr/>
+              </p:nvCxnSpPr>
+              <p:spPr>
+                <a:xfrm>
+                  <a:off x="4759028" y="2697654"/>
+                  <a:ext cx="0" cy="640381"/>
+                </a:xfrm>
+                <a:prstGeom prst="line">
+                  <a:avLst/>
+                </a:prstGeom>
+                <a:ln w="28575">
+                  <a:solidFill>
+                    <a:schemeClr val="tx1"/>
+                  </a:solidFill>
+                </a:ln>
+              </p:spPr>
+              <p:style>
+                <a:lnRef idx="1">
+                  <a:schemeClr val="accent1"/>
+                </a:lnRef>
+                <a:fillRef idx="0">
+                  <a:schemeClr val="accent1"/>
+                </a:fillRef>
+                <a:effectRef idx="0">
+                  <a:schemeClr val="accent1"/>
+                </a:effectRef>
+                <a:fontRef idx="minor">
+                  <a:schemeClr val="tx1"/>
+                </a:fontRef>
+              </p:style>
+            </p:cxnSp>
+            <p:cxnSp>
+              <p:nvCxnSpPr>
+                <p:cNvPr id="30" name="直接连接符 29">
+                  <a:extLst>
+                    <a:ext uri="{FF2B5EF4-FFF2-40B4-BE49-F238E27FC236}">
+                      <a16:creationId xmlns:a16="http://schemas.microsoft.com/office/drawing/2014/main" id="{9BEDB8E8-44F1-41C8-9290-10AAAD9AECE4}"/>
+                    </a:ext>
+                  </a:extLst>
+                </p:cNvPr>
+                <p:cNvCxnSpPr/>
+                <p:nvPr/>
+              </p:nvCxnSpPr>
+              <p:spPr>
+                <a:xfrm>
+                  <a:off x="3282035" y="2697654"/>
+                  <a:ext cx="0" cy="640381"/>
+                </a:xfrm>
+                <a:prstGeom prst="line">
+                  <a:avLst/>
+                </a:prstGeom>
+                <a:ln w="28575">
+                  <a:solidFill>
+                    <a:schemeClr val="tx1"/>
+                  </a:solidFill>
+                </a:ln>
+              </p:spPr>
+              <p:style>
+                <a:lnRef idx="1">
+                  <a:schemeClr val="accent1"/>
+                </a:lnRef>
+                <a:fillRef idx="0">
+                  <a:schemeClr val="accent1"/>
+                </a:fillRef>
+                <a:effectRef idx="0">
+                  <a:schemeClr val="accent1"/>
+                </a:effectRef>
+                <a:fontRef idx="minor">
+                  <a:schemeClr val="tx1"/>
+                </a:fontRef>
+              </p:style>
+            </p:cxnSp>
+            <p:sp>
+              <p:nvSpPr>
+                <p:cNvPr id="31" name="文本框 30">
+                  <a:extLst>
+                    <a:ext uri="{FF2B5EF4-FFF2-40B4-BE49-F238E27FC236}">
+                      <a16:creationId xmlns:a16="http://schemas.microsoft.com/office/drawing/2014/main" id="{25615C3B-8858-45CA-9303-0444335E5846}"/>
+                    </a:ext>
+                  </a:extLst>
+                </p:cNvPr>
+                <p:cNvSpPr txBox="1"/>
+                <p:nvPr/>
+              </p:nvSpPr>
+              <p:spPr>
+                <a:xfrm>
+                  <a:off x="1998557" y="2703145"/>
+                  <a:ext cx="1043876" cy="369332"/>
+                </a:xfrm>
+                <a:prstGeom prst="rect">
+                  <a:avLst/>
+                </a:prstGeom>
+                <a:noFill/>
+              </p:spPr>
+              <p:txBody>
+                <a:bodyPr wrap="none" rtlCol="0">
+                  <a:spAutoFit/>
+                </a:bodyPr>
+                <a:lstStyle/>
+                <a:p>
+                  <a:r>
+                    <a:rPr lang="en-US" altLang="zh-CN" b="1" dirty="0">
+                      <a:latin typeface="Times New Roman" panose="02020603050405020304" pitchFamily="18" charset="0"/>
+                      <a:ea typeface="宋体" panose="02010600030101010101" pitchFamily="2" charset="-122"/>
+                      <a:cs typeface="Times New Roman" panose="02020603050405020304" pitchFamily="18" charset="0"/>
+                    </a:rPr>
+                    <a:t>Runtime</a:t>
+                  </a:r>
+                  <a:endParaRPr lang="zh-CN" altLang="en-US" b="1" dirty="0">
+                    <a:latin typeface="Times New Roman" panose="02020603050405020304" pitchFamily="18" charset="0"/>
+                    <a:ea typeface="宋体" panose="02010600030101010101" pitchFamily="2" charset="-122"/>
+                    <a:cs typeface="Times New Roman" panose="02020603050405020304" pitchFamily="18" charset="0"/>
+                  </a:endParaRPr>
+                </a:p>
+              </p:txBody>
+            </p:sp>
+            <p:sp>
+              <p:nvSpPr>
+                <p:cNvPr id="32" name="文本框 31">
+                  <a:extLst>
+                    <a:ext uri="{FF2B5EF4-FFF2-40B4-BE49-F238E27FC236}">
+                      <a16:creationId xmlns:a16="http://schemas.microsoft.com/office/drawing/2014/main" id="{005B4467-AA2E-4CE5-9A5A-CC3B4DF350A1}"/>
+                    </a:ext>
+                  </a:extLst>
+                </p:cNvPr>
+                <p:cNvSpPr txBox="1"/>
+                <p:nvPr/>
+              </p:nvSpPr>
+              <p:spPr>
+                <a:xfrm>
+                  <a:off x="1942251" y="2980556"/>
+                  <a:ext cx="1202573" cy="338554"/>
+                </a:xfrm>
+                <a:prstGeom prst="rect">
+                  <a:avLst/>
+                </a:prstGeom>
+                <a:noFill/>
+              </p:spPr>
+              <p:txBody>
+                <a:bodyPr wrap="none" rtlCol="0">
+                  <a:spAutoFit/>
+                </a:bodyPr>
+                <a:lstStyle/>
+                <a:p>
+                  <a:r>
+                    <a:rPr lang="zh-CN" altLang="en-US" sz="1600" dirty="0">
+                      <a:latin typeface="Times New Roman" panose="02020603050405020304" pitchFamily="18" charset="0"/>
+                      <a:ea typeface="宋体" panose="02010600030101010101" pitchFamily="2" charset="-122"/>
+                      <a:cs typeface="Times New Roman" panose="02020603050405020304" pitchFamily="18" charset="0"/>
+                    </a:rPr>
+                    <a:t>运行时语义</a:t>
+                  </a:r>
+                </a:p>
+              </p:txBody>
+            </p:sp>
+            <p:sp>
+              <p:nvSpPr>
+                <p:cNvPr id="33" name="文本框 32">
+                  <a:extLst>
+                    <a:ext uri="{FF2B5EF4-FFF2-40B4-BE49-F238E27FC236}">
+                      <a16:creationId xmlns:a16="http://schemas.microsoft.com/office/drawing/2014/main" id="{3A35A509-39B2-4DD6-888A-A2948CC0DDFB}"/>
+                    </a:ext>
+                  </a:extLst>
+                </p:cNvPr>
+                <p:cNvSpPr txBox="1"/>
+                <p:nvPr/>
+              </p:nvSpPr>
+              <p:spPr>
+                <a:xfrm>
+                  <a:off x="3543478" y="2697654"/>
+                  <a:ext cx="954107" cy="369332"/>
+                </a:xfrm>
+                <a:prstGeom prst="rect">
+                  <a:avLst/>
+                </a:prstGeom>
+                <a:noFill/>
+              </p:spPr>
+              <p:txBody>
+                <a:bodyPr wrap="none" rtlCol="0">
+                  <a:spAutoFit/>
+                </a:bodyPr>
+                <a:lstStyle/>
+                <a:p>
+                  <a:r>
+                    <a:rPr lang="en-US" altLang="zh-CN" b="1" dirty="0">
+                      <a:latin typeface="Times New Roman" panose="02020603050405020304" pitchFamily="18" charset="0"/>
+                      <a:ea typeface="宋体" panose="02010600030101010101" pitchFamily="2" charset="-122"/>
+                      <a:cs typeface="Times New Roman" panose="02020603050405020304" pitchFamily="18" charset="0"/>
+                    </a:rPr>
+                    <a:t>Builtins</a:t>
+                  </a:r>
+                  <a:endParaRPr lang="zh-CN" altLang="en-US" b="1" dirty="0">
+                    <a:latin typeface="Times New Roman" panose="02020603050405020304" pitchFamily="18" charset="0"/>
+                    <a:ea typeface="宋体" panose="02010600030101010101" pitchFamily="2" charset="-122"/>
+                    <a:cs typeface="Times New Roman" panose="02020603050405020304" pitchFamily="18" charset="0"/>
+                  </a:endParaRPr>
+                </a:p>
+              </p:txBody>
+            </p:sp>
+            <p:sp>
+              <p:nvSpPr>
+                <p:cNvPr id="34" name="文本框 33">
+                  <a:extLst>
+                    <a:ext uri="{FF2B5EF4-FFF2-40B4-BE49-F238E27FC236}">
+                      <a16:creationId xmlns:a16="http://schemas.microsoft.com/office/drawing/2014/main" id="{A7F499B5-12A3-4956-8122-3B8F89748721}"/>
+                    </a:ext>
+                  </a:extLst>
+                </p:cNvPr>
+                <p:cNvSpPr txBox="1"/>
+                <p:nvPr/>
+              </p:nvSpPr>
+              <p:spPr>
+                <a:xfrm>
+                  <a:off x="3517829" y="2980556"/>
+                  <a:ext cx="1005403" cy="338554"/>
+                </a:xfrm>
+                <a:prstGeom prst="rect">
+                  <a:avLst/>
+                </a:prstGeom>
+                <a:noFill/>
+              </p:spPr>
+              <p:txBody>
+                <a:bodyPr wrap="none" rtlCol="0">
+                  <a:spAutoFit/>
+                </a:bodyPr>
+                <a:lstStyle/>
+                <a:p>
+                  <a:r>
+                    <a:rPr lang="zh-CN" altLang="en-US" sz="1600" dirty="0">
+                      <a:latin typeface="Times New Roman" panose="02020603050405020304" pitchFamily="18" charset="0"/>
+                      <a:ea typeface="宋体" panose="02010600030101010101" pitchFamily="2" charset="-122"/>
+                      <a:cs typeface="Times New Roman" panose="02020603050405020304" pitchFamily="18" charset="0"/>
+                    </a:rPr>
+                    <a:t>内建能力</a:t>
+                  </a:r>
+                </a:p>
+              </p:txBody>
+            </p:sp>
+            <p:cxnSp>
+              <p:nvCxnSpPr>
+                <p:cNvPr id="36" name="直接连接符 35">
+                  <a:extLst>
+                    <a:ext uri="{FF2B5EF4-FFF2-40B4-BE49-F238E27FC236}">
+                      <a16:creationId xmlns:a16="http://schemas.microsoft.com/office/drawing/2014/main" id="{0B5C0000-34B3-4D50-84CD-94F503B5A107}"/>
+                    </a:ext>
+                  </a:extLst>
+                </p:cNvPr>
+                <p:cNvCxnSpPr>
+                  <a:cxnSpLocks/>
+                </p:cNvCxnSpPr>
+                <p:nvPr/>
+              </p:nvCxnSpPr>
+              <p:spPr>
+                <a:xfrm>
+                  <a:off x="6236021" y="2678841"/>
+                  <a:ext cx="0" cy="659194"/>
+                </a:xfrm>
+                <a:prstGeom prst="line">
+                  <a:avLst/>
+                </a:prstGeom>
+                <a:ln w="28575">
+                  <a:solidFill>
+                    <a:schemeClr val="tx1"/>
+                  </a:solidFill>
+                </a:ln>
+              </p:spPr>
+              <p:style>
+                <a:lnRef idx="1">
+                  <a:schemeClr val="accent1"/>
+                </a:lnRef>
+                <a:fillRef idx="0">
+                  <a:schemeClr val="accent1"/>
+                </a:fillRef>
+                <a:effectRef idx="0">
+                  <a:schemeClr val="accent1"/>
+                </a:effectRef>
+                <a:fontRef idx="minor">
+                  <a:schemeClr val="tx1"/>
+                </a:fontRef>
+              </p:style>
+            </p:cxnSp>
+            <p:sp>
+              <p:nvSpPr>
+                <p:cNvPr id="38" name="文本框 37">
+                  <a:extLst>
+                    <a:ext uri="{FF2B5EF4-FFF2-40B4-BE49-F238E27FC236}">
+                      <a16:creationId xmlns:a16="http://schemas.microsoft.com/office/drawing/2014/main" id="{63DAF521-DA27-4C2D-A9B1-5FA6102E6603}"/>
+                    </a:ext>
+                  </a:extLst>
+                </p:cNvPr>
+                <p:cNvSpPr txBox="1"/>
+                <p:nvPr/>
+              </p:nvSpPr>
+              <p:spPr>
+                <a:xfrm>
+                  <a:off x="4981999" y="2688643"/>
+                  <a:ext cx="1031051" cy="369332"/>
+                </a:xfrm>
+                <a:prstGeom prst="rect">
+                  <a:avLst/>
+                </a:prstGeom>
+                <a:noFill/>
+              </p:spPr>
+              <p:txBody>
+                <a:bodyPr wrap="none" rtlCol="0">
+                  <a:spAutoFit/>
+                </a:bodyPr>
+                <a:lstStyle/>
+                <a:p>
+                  <a:r>
+                    <a:rPr lang="en-US" altLang="zh-CN" b="1" dirty="0">
+                      <a:latin typeface="Times New Roman" panose="02020603050405020304" pitchFamily="18" charset="0"/>
+                      <a:ea typeface="宋体" panose="02010600030101010101" pitchFamily="2" charset="-122"/>
+                      <a:cs typeface="Times New Roman" panose="02020603050405020304" pitchFamily="18" charset="0"/>
+                    </a:rPr>
+                    <a:t>Modules</a:t>
+                  </a:r>
+                  <a:endParaRPr lang="zh-CN" altLang="en-US" b="1" dirty="0">
+                    <a:latin typeface="Times New Roman" panose="02020603050405020304" pitchFamily="18" charset="0"/>
+                    <a:ea typeface="宋体" panose="02010600030101010101" pitchFamily="2" charset="-122"/>
+                    <a:cs typeface="Times New Roman" panose="02020603050405020304" pitchFamily="18" charset="0"/>
+                  </a:endParaRPr>
+                </a:p>
+              </p:txBody>
+            </p:sp>
+            <p:sp>
+              <p:nvSpPr>
+                <p:cNvPr id="39" name="文本框 38">
+                  <a:extLst>
+                    <a:ext uri="{FF2B5EF4-FFF2-40B4-BE49-F238E27FC236}">
+                      <a16:creationId xmlns:a16="http://schemas.microsoft.com/office/drawing/2014/main" id="{D9604607-243D-4593-8101-332CA9663CE8}"/>
+                    </a:ext>
+                  </a:extLst>
+                </p:cNvPr>
+                <p:cNvSpPr txBox="1"/>
+                <p:nvPr/>
+              </p:nvSpPr>
+              <p:spPr>
+                <a:xfrm>
+                  <a:off x="4892231" y="2984600"/>
+                  <a:ext cx="1210588" cy="338554"/>
+                </a:xfrm>
+                <a:prstGeom prst="rect">
+                  <a:avLst/>
+                </a:prstGeom>
+                <a:noFill/>
+              </p:spPr>
+              <p:txBody>
+                <a:bodyPr wrap="none" rtlCol="0">
+                  <a:spAutoFit/>
+                </a:bodyPr>
+                <a:lstStyle/>
+                <a:p>
+                  <a:r>
+                    <a:rPr lang="zh-CN" altLang="en-US" sz="1600" dirty="0">
+                      <a:latin typeface="Times New Roman" panose="02020603050405020304" pitchFamily="18" charset="0"/>
+                      <a:ea typeface="宋体" panose="02010600030101010101" pitchFamily="2" charset="-122"/>
+                      <a:cs typeface="Times New Roman" panose="02020603050405020304" pitchFamily="18" charset="0"/>
+                    </a:rPr>
+                    <a:t>模块子系统</a:t>
+                  </a:r>
+                </a:p>
+              </p:txBody>
+            </p:sp>
+            <p:sp>
+              <p:nvSpPr>
+                <p:cNvPr id="40" name="文本框 39">
+                  <a:extLst>
+                    <a:ext uri="{FF2B5EF4-FFF2-40B4-BE49-F238E27FC236}">
+                      <a16:creationId xmlns:a16="http://schemas.microsoft.com/office/drawing/2014/main" id="{04D4355F-F497-478F-8A1A-2A53510086D3}"/>
+                    </a:ext>
+                  </a:extLst>
+                </p:cNvPr>
+                <p:cNvSpPr txBox="1"/>
+                <p:nvPr/>
+              </p:nvSpPr>
+              <p:spPr>
+                <a:xfrm>
+                  <a:off x="6625704" y="2685935"/>
+                  <a:ext cx="697627" cy="369332"/>
+                </a:xfrm>
+                <a:prstGeom prst="rect">
+                  <a:avLst/>
+                </a:prstGeom>
+                <a:noFill/>
+              </p:spPr>
+              <p:txBody>
+                <a:bodyPr wrap="none" rtlCol="0">
+                  <a:spAutoFit/>
+                </a:bodyPr>
+                <a:lstStyle/>
+                <a:p>
+                  <a:r>
+                    <a:rPr lang="en-US" altLang="zh-CN" b="1" dirty="0">
+                      <a:latin typeface="Times New Roman" panose="02020603050405020304" pitchFamily="18" charset="0"/>
+                      <a:ea typeface="宋体" panose="02010600030101010101" pitchFamily="2" charset="-122"/>
+                      <a:cs typeface="Times New Roman" panose="02020603050405020304" pitchFamily="18" charset="0"/>
+                    </a:rPr>
+                    <a:t>Code</a:t>
+                  </a:r>
+                  <a:endParaRPr lang="zh-CN" altLang="en-US" b="1" dirty="0">
+                    <a:latin typeface="Times New Roman" panose="02020603050405020304" pitchFamily="18" charset="0"/>
+                    <a:ea typeface="宋体" panose="02010600030101010101" pitchFamily="2" charset="-122"/>
+                    <a:cs typeface="Times New Roman" panose="02020603050405020304" pitchFamily="18" charset="0"/>
+                  </a:endParaRPr>
+                </a:p>
+              </p:txBody>
+            </p:sp>
+            <p:sp>
+              <p:nvSpPr>
+                <p:cNvPr id="41" name="文本框 40">
+                  <a:extLst>
+                    <a:ext uri="{FF2B5EF4-FFF2-40B4-BE49-F238E27FC236}">
+                      <a16:creationId xmlns:a16="http://schemas.microsoft.com/office/drawing/2014/main" id="{2971FE4E-11B1-4DE7-8793-3D85D246F2F4}"/>
+                    </a:ext>
+                  </a:extLst>
+                </p:cNvPr>
+                <p:cNvSpPr txBox="1"/>
+                <p:nvPr/>
+              </p:nvSpPr>
+              <p:spPr>
+                <a:xfrm>
+                  <a:off x="6266632" y="2984717"/>
+                  <a:ext cx="1415772" cy="338554"/>
+                </a:xfrm>
+                <a:prstGeom prst="rect">
+                  <a:avLst/>
+                </a:prstGeom>
+                <a:noFill/>
+              </p:spPr>
+              <p:txBody>
+                <a:bodyPr wrap="none" rtlCol="0">
+                  <a:spAutoFit/>
+                </a:bodyPr>
+                <a:lstStyle/>
+                <a:p>
+                  <a:r>
+                    <a:rPr lang="zh-CN" altLang="en-US" sz="1600" dirty="0">
+                      <a:latin typeface="Times New Roman" panose="02020603050405020304" pitchFamily="18" charset="0"/>
+                      <a:ea typeface="宋体" panose="02010600030101010101" pitchFamily="2" charset="-122"/>
+                      <a:cs typeface="Times New Roman" panose="02020603050405020304" pitchFamily="18" charset="0"/>
+                    </a:rPr>
+                    <a:t>代码装载前端</a:t>
+                  </a:r>
+                </a:p>
+              </p:txBody>
+            </p:sp>
+          </p:grpSp>
+          <p:grpSp>
+            <p:nvGrpSpPr>
+              <p:cNvPr id="44" name="组合 43">
+                <a:extLst>
+                  <a:ext uri="{FF2B5EF4-FFF2-40B4-BE49-F238E27FC236}">
+                    <a16:creationId xmlns:a16="http://schemas.microsoft.com/office/drawing/2014/main" id="{505BA67D-F27B-49A8-B5FC-DE409298DAFE}"/>
+                  </a:ext>
+                </a:extLst>
+              </p:cNvPr>
+              <p:cNvGrpSpPr/>
+              <p:nvPr/>
+            </p:nvGrpSpPr>
+            <p:grpSpPr>
+              <a:xfrm>
+                <a:off x="1805041" y="1929533"/>
+                <a:ext cx="5907975" cy="645335"/>
+                <a:chOff x="1828798" y="5848598"/>
+                <a:chExt cx="5907975" cy="645335"/>
+              </a:xfrm>
+            </p:grpSpPr>
+            <p:sp>
+              <p:nvSpPr>
+                <p:cNvPr id="45" name="矩形 44">
+                  <a:extLst>
+                    <a:ext uri="{FF2B5EF4-FFF2-40B4-BE49-F238E27FC236}">
+                      <a16:creationId xmlns:a16="http://schemas.microsoft.com/office/drawing/2014/main" id="{EEE11833-D992-4BAA-ACFE-38C52B5A4FAD}"/>
+                    </a:ext>
+                  </a:extLst>
+                </p:cNvPr>
+                <p:cNvSpPr/>
+                <p:nvPr/>
+              </p:nvSpPr>
+              <p:spPr>
+                <a:xfrm>
+                  <a:off x="1828798" y="5848598"/>
+                  <a:ext cx="5907975" cy="640381"/>
+                </a:xfrm>
+                <a:prstGeom prst="rect">
+                  <a:avLst/>
+                </a:prstGeom>
+                <a:noFill/>
+                <a:ln w="28575">
+                  <a:solidFill>
+                    <a:schemeClr val="tx1"/>
+                  </a:solidFill>
+                </a:ln>
+              </p:spPr>
+              <p:style>
+                <a:lnRef idx="2">
+                  <a:schemeClr val="accent1">
+                    <a:shade val="50000"/>
+                  </a:schemeClr>
+                </a:lnRef>
+                <a:fillRef idx="1">
+                  <a:schemeClr val="accent1"/>
+                </a:fillRef>
+                <a:effectRef idx="0">
+                  <a:schemeClr val="accent1"/>
+                </a:effectRef>
+                <a:fontRef idx="minor">
+                  <a:schemeClr val="lt1"/>
+                </a:fontRef>
+              </p:style>
+              <p:txBody>
+                <a:bodyPr rtlCol="0" anchor="ctr"/>
+                <a:lstStyle/>
+                <a:p>
+                  <a:pPr algn="ctr"/>
+                  <a:endParaRPr lang="zh-CN" altLang="en-US"/>
+                </a:p>
+              </p:txBody>
+            </p:sp>
+            <p:sp>
+              <p:nvSpPr>
+                <p:cNvPr id="46" name="文本框 45">
+                  <a:extLst>
+                    <a:ext uri="{FF2B5EF4-FFF2-40B4-BE49-F238E27FC236}">
+                      <a16:creationId xmlns:a16="http://schemas.microsoft.com/office/drawing/2014/main" id="{D97CC7B9-C80E-4926-8B8D-118561C288A3}"/>
+                    </a:ext>
+                  </a:extLst>
+                </p:cNvPr>
+                <p:cNvSpPr txBox="1"/>
+                <p:nvPr/>
+              </p:nvSpPr>
+              <p:spPr>
+                <a:xfrm>
+                  <a:off x="3427921" y="5858203"/>
+                  <a:ext cx="3155672" cy="369332"/>
+                </a:xfrm>
+                <a:prstGeom prst="rect">
+                  <a:avLst/>
+                </a:prstGeom>
+                <a:noFill/>
+              </p:spPr>
+              <p:txBody>
+                <a:bodyPr wrap="none" rtlCol="0">
+                  <a:spAutoFit/>
+                </a:bodyPr>
+                <a:lstStyle/>
+                <a:p>
+                  <a:r>
+                    <a:rPr lang="zh-CN" altLang="en-US" b="1" dirty="0">
+                      <a:latin typeface="Times New Roman" panose="02020603050405020304" pitchFamily="18" charset="0"/>
+                      <a:ea typeface="宋体" panose="02010600030101010101" pitchFamily="2" charset="-122"/>
+                      <a:cs typeface="Times New Roman" panose="02020603050405020304" pitchFamily="18" charset="0"/>
+                    </a:rPr>
+                    <a:t>字节码解释器（</a:t>
+                  </a:r>
+                  <a:r>
+                    <a:rPr lang="en-US" altLang="zh-CN" b="1" dirty="0">
+                      <a:latin typeface="Times New Roman" panose="02020603050405020304" pitchFamily="18" charset="0"/>
+                      <a:ea typeface="宋体" panose="02010600030101010101" pitchFamily="2" charset="-122"/>
+                      <a:cs typeface="Times New Roman" panose="02020603050405020304" pitchFamily="18" charset="0"/>
+                    </a:rPr>
+                    <a:t>Interpreter</a:t>
+                  </a:r>
+                  <a:r>
+                    <a:rPr lang="zh-CN" altLang="en-US" b="1" dirty="0">
+                      <a:latin typeface="Times New Roman" panose="02020603050405020304" pitchFamily="18" charset="0"/>
+                      <a:ea typeface="宋体" panose="02010600030101010101" pitchFamily="2" charset="-122"/>
+                      <a:cs typeface="Times New Roman" panose="02020603050405020304" pitchFamily="18" charset="0"/>
+                    </a:rPr>
+                    <a:t>）</a:t>
+                  </a:r>
+                </a:p>
+              </p:txBody>
+            </p:sp>
+            <p:sp>
+              <p:nvSpPr>
+                <p:cNvPr id="47" name="文本框 46">
+                  <a:extLst>
+                    <a:ext uri="{FF2B5EF4-FFF2-40B4-BE49-F238E27FC236}">
+                      <a16:creationId xmlns:a16="http://schemas.microsoft.com/office/drawing/2014/main" id="{003E4A99-75E6-401A-873E-579985A485D4}"/>
+                    </a:ext>
+                  </a:extLst>
+                </p:cNvPr>
+                <p:cNvSpPr txBox="1"/>
+                <p:nvPr/>
+              </p:nvSpPr>
+              <p:spPr>
+                <a:xfrm>
+                  <a:off x="2215415" y="6155379"/>
+                  <a:ext cx="5134739" cy="338554"/>
+                </a:xfrm>
+                <a:prstGeom prst="rect">
+                  <a:avLst/>
+                </a:prstGeom>
+                <a:noFill/>
+              </p:spPr>
+              <p:txBody>
+                <a:bodyPr wrap="none" rtlCol="0">
+                  <a:spAutoFit/>
+                </a:bodyPr>
+                <a:lstStyle/>
+                <a:p>
+                  <a:r>
+                    <a:rPr lang="zh-CN" altLang="en-US" sz="1600" dirty="0">
+                      <a:latin typeface="Times New Roman" panose="02020603050405020304" pitchFamily="18" charset="0"/>
+                      <a:ea typeface="宋体" panose="02010600030101010101" pitchFamily="2" charset="-122"/>
+                      <a:cs typeface="Times New Roman" panose="02020603050405020304" pitchFamily="18" charset="0"/>
+                    </a:rPr>
+                    <a:t>字节码指令分派 </a:t>
+                  </a:r>
+                  <a:r>
+                    <a:rPr lang="en-US" altLang="zh-CN" sz="1600" dirty="0">
+                      <a:latin typeface="Times New Roman" panose="02020603050405020304" pitchFamily="18" charset="0"/>
+                      <a:ea typeface="宋体" panose="02010600030101010101" pitchFamily="2" charset="-122"/>
+                      <a:cs typeface="Times New Roman" panose="02020603050405020304" pitchFamily="18" charset="0"/>
+                    </a:rPr>
+                    <a:t>/ </a:t>
+                  </a:r>
+                  <a:r>
+                    <a:rPr lang="zh-CN" altLang="en-US" sz="1600" dirty="0">
+                      <a:latin typeface="Times New Roman" panose="02020603050405020304" pitchFamily="18" charset="0"/>
+                      <a:ea typeface="宋体" panose="02010600030101010101" pitchFamily="2" charset="-122"/>
+                      <a:cs typeface="Times New Roman" panose="02020603050405020304" pitchFamily="18" charset="0"/>
+                    </a:rPr>
+                    <a:t>栈帧管理 </a:t>
+                  </a:r>
+                  <a:r>
+                    <a:rPr lang="en-US" altLang="zh-CN" sz="1600" dirty="0">
+                      <a:latin typeface="Times New Roman" panose="02020603050405020304" pitchFamily="18" charset="0"/>
+                      <a:ea typeface="宋体" panose="02010600030101010101" pitchFamily="2" charset="-122"/>
+                      <a:cs typeface="Times New Roman" panose="02020603050405020304" pitchFamily="18" charset="0"/>
+                    </a:rPr>
+                    <a:t>/ </a:t>
+                  </a:r>
+                  <a:r>
+                    <a:rPr lang="zh-CN" altLang="en-US" sz="1600" dirty="0">
+                      <a:latin typeface="Times New Roman" panose="02020603050405020304" pitchFamily="18" charset="0"/>
+                      <a:ea typeface="宋体" panose="02010600030101010101" pitchFamily="2" charset="-122"/>
+                      <a:cs typeface="Times New Roman" panose="02020603050405020304" pitchFamily="18" charset="0"/>
+                    </a:rPr>
+                    <a:t>函数调用 </a:t>
+                  </a:r>
+                  <a:r>
+                    <a:rPr lang="en-US" altLang="zh-CN" sz="1600" dirty="0">
+                      <a:latin typeface="Times New Roman" panose="02020603050405020304" pitchFamily="18" charset="0"/>
+                      <a:ea typeface="宋体" panose="02010600030101010101" pitchFamily="2" charset="-122"/>
+                      <a:cs typeface="Times New Roman" panose="02020603050405020304" pitchFamily="18" charset="0"/>
+                    </a:rPr>
+                    <a:t>/ </a:t>
+                  </a:r>
+                  <a:r>
+                    <a:rPr lang="zh-CN" altLang="en-US" sz="1600" dirty="0">
+                      <a:latin typeface="Times New Roman" panose="02020603050405020304" pitchFamily="18" charset="0"/>
+                      <a:ea typeface="宋体" panose="02010600030101010101" pitchFamily="2" charset="-122"/>
+                      <a:cs typeface="Times New Roman" panose="02020603050405020304" pitchFamily="18" charset="0"/>
+                    </a:rPr>
+                    <a:t>闭包 </a:t>
+                  </a:r>
+                  <a:r>
+                    <a:rPr lang="en-US" altLang="zh-CN" sz="1600" dirty="0">
+                      <a:latin typeface="Times New Roman" panose="02020603050405020304" pitchFamily="18" charset="0"/>
+                      <a:ea typeface="宋体" panose="02010600030101010101" pitchFamily="2" charset="-122"/>
+                      <a:cs typeface="Times New Roman" panose="02020603050405020304" pitchFamily="18" charset="0"/>
+                    </a:rPr>
+                    <a:t>/ </a:t>
+                  </a:r>
+                  <a:r>
+                    <a:rPr lang="zh-CN" altLang="en-US" sz="1600" dirty="0">
+                      <a:latin typeface="Times New Roman" panose="02020603050405020304" pitchFamily="18" charset="0"/>
+                      <a:ea typeface="宋体" panose="02010600030101010101" pitchFamily="2" charset="-122"/>
+                      <a:cs typeface="Times New Roman" panose="02020603050405020304" pitchFamily="18" charset="0"/>
+                    </a:rPr>
+                    <a:t>异常处理</a:t>
+                  </a:r>
+                </a:p>
+              </p:txBody>
+            </p:sp>
+          </p:grpSp>
+          <p:grpSp>
+            <p:nvGrpSpPr>
+              <p:cNvPr id="48" name="组合 47">
+                <a:extLst>
+                  <a:ext uri="{FF2B5EF4-FFF2-40B4-BE49-F238E27FC236}">
+                    <a16:creationId xmlns:a16="http://schemas.microsoft.com/office/drawing/2014/main" id="{BC3F984C-1732-463E-A075-8FF865D65165}"/>
+                  </a:ext>
+                </a:extLst>
+              </p:cNvPr>
+              <p:cNvGrpSpPr/>
+              <p:nvPr/>
+            </p:nvGrpSpPr>
+            <p:grpSpPr>
+              <a:xfrm>
+                <a:off x="1805039" y="1089686"/>
+                <a:ext cx="5907975" cy="640381"/>
+                <a:chOff x="1828798" y="5848598"/>
+                <a:chExt cx="5907975" cy="640381"/>
+              </a:xfrm>
+            </p:grpSpPr>
+            <p:sp>
+              <p:nvSpPr>
+                <p:cNvPr id="49" name="矩形 48">
+                  <a:extLst>
+                    <a:ext uri="{FF2B5EF4-FFF2-40B4-BE49-F238E27FC236}">
+                      <a16:creationId xmlns:a16="http://schemas.microsoft.com/office/drawing/2014/main" id="{0672FDB1-EA50-4EFC-AD25-1CF5A3BABDB6}"/>
+                    </a:ext>
+                  </a:extLst>
+                </p:cNvPr>
+                <p:cNvSpPr/>
+                <p:nvPr/>
+              </p:nvSpPr>
+              <p:spPr>
+                <a:xfrm>
+                  <a:off x="1828798" y="5848598"/>
+                  <a:ext cx="5907975" cy="640381"/>
+                </a:xfrm>
+                <a:prstGeom prst="rect">
+                  <a:avLst/>
+                </a:prstGeom>
+                <a:noFill/>
+                <a:ln w="28575">
+                  <a:solidFill>
+                    <a:schemeClr val="tx1"/>
+                  </a:solidFill>
+                </a:ln>
+              </p:spPr>
+              <p:style>
+                <a:lnRef idx="2">
+                  <a:schemeClr val="accent1">
+                    <a:shade val="50000"/>
+                  </a:schemeClr>
+                </a:lnRef>
+                <a:fillRef idx="1">
+                  <a:schemeClr val="accent1"/>
+                </a:fillRef>
+                <a:effectRef idx="0">
+                  <a:schemeClr val="accent1"/>
+                </a:effectRef>
+                <a:fontRef idx="minor">
+                  <a:schemeClr val="lt1"/>
+                </a:fontRef>
+              </p:style>
+              <p:txBody>
+                <a:bodyPr rtlCol="0" anchor="ctr"/>
+                <a:lstStyle/>
+                <a:p>
+                  <a:pPr algn="ctr"/>
+                  <a:endParaRPr lang="zh-CN" altLang="en-US"/>
+                </a:p>
+              </p:txBody>
+            </p:sp>
+            <p:sp>
+              <p:nvSpPr>
+                <p:cNvPr id="50" name="文本框 49">
+                  <a:extLst>
+                    <a:ext uri="{FF2B5EF4-FFF2-40B4-BE49-F238E27FC236}">
+                      <a16:creationId xmlns:a16="http://schemas.microsoft.com/office/drawing/2014/main" id="{A621F50F-33E4-45BD-AA0E-EF5A3712B869}"/>
+                    </a:ext>
+                  </a:extLst>
+                </p:cNvPr>
+                <p:cNvSpPr txBox="1"/>
+                <p:nvPr/>
+              </p:nvSpPr>
+              <p:spPr>
+                <a:xfrm>
+                  <a:off x="3361366" y="5855044"/>
+                  <a:ext cx="3288785" cy="369332"/>
+                </a:xfrm>
+                <a:prstGeom prst="rect">
+                  <a:avLst/>
+                </a:prstGeom>
+                <a:noFill/>
+              </p:spPr>
+              <p:txBody>
+                <a:bodyPr wrap="none" rtlCol="0">
+                  <a:spAutoFit/>
+                </a:bodyPr>
+                <a:lstStyle/>
+                <a:p>
+                  <a:r>
+                    <a:rPr lang="zh-CN" altLang="en-US" b="1" dirty="0">
+                      <a:latin typeface="Times New Roman" panose="02020603050405020304" pitchFamily="18" charset="0"/>
+                      <a:ea typeface="宋体" panose="02010600030101010101" pitchFamily="2" charset="-122"/>
+                      <a:cs typeface="Times New Roman" panose="02020603050405020304" pitchFamily="18" charset="0"/>
+                    </a:rPr>
+                    <a:t>嵌入接口层（</a:t>
+                  </a:r>
+                  <a:r>
+                    <a:rPr lang="en-US" altLang="zh-CN" b="1" dirty="0">
+                      <a:latin typeface="Times New Roman" panose="02020603050405020304" pitchFamily="18" charset="0"/>
+                      <a:ea typeface="宋体" panose="02010600030101010101" pitchFamily="2" charset="-122"/>
+                      <a:cs typeface="Times New Roman" panose="02020603050405020304" pitchFamily="18" charset="0"/>
+                    </a:rPr>
+                    <a:t>Embedder API</a:t>
+                  </a:r>
+                  <a:r>
+                    <a:rPr lang="zh-CN" altLang="en-US" b="1" dirty="0">
+                      <a:latin typeface="Times New Roman" panose="02020603050405020304" pitchFamily="18" charset="0"/>
+                      <a:ea typeface="宋体" panose="02010600030101010101" pitchFamily="2" charset="-122"/>
+                      <a:cs typeface="Times New Roman" panose="02020603050405020304" pitchFamily="18" charset="0"/>
+                    </a:rPr>
+                    <a:t>）</a:t>
+                  </a:r>
+                </a:p>
+              </p:txBody>
+            </p:sp>
+            <p:sp>
+              <p:nvSpPr>
+                <p:cNvPr id="51" name="文本框 50">
+                  <a:extLst>
+                    <a:ext uri="{FF2B5EF4-FFF2-40B4-BE49-F238E27FC236}">
+                      <a16:creationId xmlns:a16="http://schemas.microsoft.com/office/drawing/2014/main" id="{658077C4-FE9F-4F58-8AA9-A2B2A16ABCEE}"/>
+                    </a:ext>
+                  </a:extLst>
+                </p:cNvPr>
+                <p:cNvSpPr txBox="1"/>
+                <p:nvPr/>
+              </p:nvSpPr>
+              <p:spPr>
+                <a:xfrm>
+                  <a:off x="2464037" y="6136966"/>
+                  <a:ext cx="4903907" cy="338554"/>
+                </a:xfrm>
+                <a:prstGeom prst="rect">
+                  <a:avLst/>
+                </a:prstGeom>
+                <a:noFill/>
+              </p:spPr>
+              <p:txBody>
+                <a:bodyPr wrap="none" rtlCol="0">
+                  <a:spAutoFit/>
+                </a:bodyPr>
+                <a:lstStyle/>
+                <a:p>
+                  <a:r>
+                    <a:rPr lang="zh-CN" altLang="en-US" sz="1600" dirty="0">
+                      <a:latin typeface="Times New Roman" panose="02020603050405020304" pitchFamily="18" charset="0"/>
+                      <a:ea typeface="宋体" panose="02010600030101010101" pitchFamily="2" charset="-122"/>
+                      <a:cs typeface="Times New Roman" panose="02020603050405020304" pitchFamily="18" charset="0"/>
+                    </a:rPr>
+                    <a:t>为宿主程序提供清晰且便于接入的脚本引擎抽象接口</a:t>
+                  </a:r>
+                </a:p>
+              </p:txBody>
+            </p:sp>
+          </p:grpSp>
+        </p:grpSp>
+        <p:grpSp>
+          <p:nvGrpSpPr>
+            <p:cNvPr id="56" name="组合 55">
+              <a:extLst>
+                <a:ext uri="{FF2B5EF4-FFF2-40B4-BE49-F238E27FC236}">
+                  <a16:creationId xmlns:a16="http://schemas.microsoft.com/office/drawing/2014/main" id="{A2BC2419-E877-4602-9AA0-EC9C78C36F48}"/>
+                </a:ext>
+              </a:extLst>
+            </p:cNvPr>
+            <p:cNvGrpSpPr/>
+            <p:nvPr/>
+          </p:nvGrpSpPr>
+          <p:grpSpPr>
+            <a:xfrm>
+              <a:off x="7852784" y="1929533"/>
+              <a:ext cx="1636987" cy="1499467"/>
+              <a:chOff x="7852784" y="1929533"/>
+              <a:chExt cx="1636987" cy="1499467"/>
+            </a:xfrm>
+          </p:grpSpPr>
+          <p:sp>
+            <p:nvSpPr>
+              <p:cNvPr id="54" name="右中括号 53">
+                <a:extLst>
+                  <a:ext uri="{FF2B5EF4-FFF2-40B4-BE49-F238E27FC236}">
+                    <a16:creationId xmlns:a16="http://schemas.microsoft.com/office/drawing/2014/main" id="{ADDBD5AD-637A-4CF2-B3AF-FA84AF95ED8C}"/>
+                  </a:ext>
+                </a:extLst>
+              </p:cNvPr>
+              <p:cNvSpPr/>
+              <p:nvPr/>
+            </p:nvSpPr>
+            <p:spPr>
+              <a:xfrm>
+                <a:off x="7891152" y="1929533"/>
+                <a:ext cx="79347" cy="1499467"/>
+              </a:xfrm>
+              <a:prstGeom prst="rightBracket">
+                <a:avLst/>
+              </a:prstGeom>
+              <a:noFill/>
+              <a:ln w="28575">
+                <a:solidFill>
+                  <a:schemeClr val="tx1"/>
+                </a:solidFill>
+              </a:ln>
+            </p:spPr>
+            <p:style>
+              <a:lnRef idx="1">
+                <a:schemeClr val="accent1"/>
+              </a:lnRef>
+              <a:fillRef idx="0">
+                <a:schemeClr val="accent1"/>
+              </a:fillRef>
+              <a:effectRef idx="0">
+                <a:schemeClr val="accent1"/>
+              </a:effectRef>
+              <a:fontRef idx="minor">
+                <a:schemeClr val="tx1"/>
+              </a:fontRef>
+            </p:style>
+            <p:txBody>
+              <a:bodyPr rtlCol="0" anchor="ctr"/>
+              <a:lstStyle/>
+              <a:p>
+                <a:pPr algn="ctr"/>
+                <a:endParaRPr lang="zh-CN" altLang="en-US"/>
+              </a:p>
+            </p:txBody>
+          </p:sp>
+          <p:sp>
+            <p:nvSpPr>
+              <p:cNvPr id="55" name="文本框 54">
+                <a:extLst>
+                  <a:ext uri="{FF2B5EF4-FFF2-40B4-BE49-F238E27FC236}">
+                    <a16:creationId xmlns:a16="http://schemas.microsoft.com/office/drawing/2014/main" id="{5DD1CB37-D19E-42F7-A30B-528C89B9913C}"/>
+                  </a:ext>
+                </a:extLst>
+              </p:cNvPr>
+              <p:cNvSpPr txBox="1"/>
+              <p:nvPr/>
+            </p:nvSpPr>
+            <p:spPr>
+              <a:xfrm>
+                <a:off x="7852784" y="2405591"/>
+                <a:ext cx="1636987" cy="646331"/>
+              </a:xfrm>
+              <a:prstGeom prst="rect">
+                <a:avLst/>
+              </a:prstGeom>
+              <a:noFill/>
+            </p:spPr>
+            <p:txBody>
+              <a:bodyPr wrap="none" rtlCol="0">
+                <a:spAutoFit/>
+              </a:bodyPr>
+              <a:lstStyle/>
+              <a:p>
+                <a:pPr algn="ctr"/>
+                <a:r>
+                  <a:rPr lang="zh-CN" altLang="en-US" b="1" dirty="0">
+                    <a:latin typeface="Times New Roman" panose="02020603050405020304" pitchFamily="18" charset="0"/>
+                    <a:ea typeface="宋体" panose="02010600030101010101" pitchFamily="2" charset="-122"/>
+                    <a:cs typeface="Times New Roman" panose="02020603050405020304" pitchFamily="18" charset="0"/>
+                  </a:rPr>
+                  <a:t>执行层</a:t>
+                </a:r>
+                <a:endParaRPr lang="en-US" altLang="zh-CN" b="1" dirty="0">
+                  <a:latin typeface="Times New Roman" panose="02020603050405020304" pitchFamily="18" charset="0"/>
+                  <a:ea typeface="宋体" panose="02010600030101010101" pitchFamily="2" charset="-122"/>
+                  <a:cs typeface="Times New Roman" panose="02020603050405020304" pitchFamily="18" charset="0"/>
+                </a:endParaRPr>
+              </a:p>
+              <a:p>
+                <a:pPr algn="ctr"/>
+                <a:r>
+                  <a:rPr lang="zh-CN" altLang="en-US" b="1" dirty="0">
+                    <a:latin typeface="Times New Roman" panose="02020603050405020304" pitchFamily="18" charset="0"/>
+                    <a:ea typeface="宋体" panose="02010600030101010101" pitchFamily="2" charset="-122"/>
+                    <a:cs typeface="Times New Roman" panose="02020603050405020304" pitchFamily="18" charset="0"/>
+                  </a:rPr>
+                  <a:t>（</a:t>
+                </a:r>
+                <a:r>
+                  <a:rPr lang="en-US" altLang="zh-CN" b="1" dirty="0">
+                    <a:latin typeface="Times New Roman" panose="02020603050405020304" pitchFamily="18" charset="0"/>
+                    <a:ea typeface="宋体" panose="02010600030101010101" pitchFamily="2" charset="-122"/>
+                    <a:cs typeface="Times New Roman" panose="02020603050405020304" pitchFamily="18" charset="0"/>
+                  </a:rPr>
+                  <a:t>Execution</a:t>
+                </a:r>
+                <a:r>
+                  <a:rPr lang="zh-CN" altLang="en-US" b="1" dirty="0">
+                    <a:latin typeface="Times New Roman" panose="02020603050405020304" pitchFamily="18" charset="0"/>
+                    <a:ea typeface="宋体" panose="02010600030101010101" pitchFamily="2" charset="-122"/>
+                    <a:cs typeface="Times New Roman" panose="02020603050405020304" pitchFamily="18" charset="0"/>
+                  </a:rPr>
+                  <a:t>）</a:t>
+                </a:r>
+              </a:p>
+            </p:txBody>
+          </p:sp>
+        </p:grpSp>
+      </p:grpSp>
+      <p:sp>
+        <p:nvSpPr>
+          <p:cNvPr id="58" name="右中括号 57">
+            <a:extLst>
+              <a:ext uri="{FF2B5EF4-FFF2-40B4-BE49-F238E27FC236}">
+                <a16:creationId xmlns:a16="http://schemas.microsoft.com/office/drawing/2014/main" id="{D2066D2A-04D8-46C2-9E7C-BBD4CC255A01}"/>
+              </a:ext>
+            </a:extLst>
+          </p:cNvPr>
+          <p:cNvSpPr/>
+          <p:nvPr/>
         </p:nvSpPr>
-        <p:spPr/>
+        <p:spPr>
+          <a:xfrm rot="10800000">
+            <a:off x="2366954" y="1553189"/>
+            <a:ext cx="84359" cy="4799223"/>
+          </a:xfrm>
+          <a:prstGeom prst="rightBracket">
+            <a:avLst/>
+          </a:prstGeom>
+          <a:noFill/>
+          <a:ln w="28575">
+            <a:solidFill>
+              <a:schemeClr val="tx1"/>
+            </a:solidFill>
+          </a:ln>
+        </p:spPr>
+        <p:style>
+          <a:lnRef idx="1">
+            <a:schemeClr val="accent1"/>
+          </a:lnRef>
+          <a:fillRef idx="0">
+            <a:schemeClr val="accent1"/>
+          </a:fillRef>
+          <a:effectRef idx="0">
+            <a:schemeClr val="accent1"/>
+          </a:effectRef>
+          <a:fontRef idx="minor">
+            <a:schemeClr val="tx1"/>
+          </a:fontRef>
+        </p:style>
         <p:txBody>
-          <a:bodyPr/>
+          <a:bodyPr rtlCol="0" anchor="ctr"/>
           <a:lstStyle/>
           <a:p>
+            <a:pPr algn="ctr"/>
             <a:endParaRPr lang="zh-CN" altLang="en-US"/>
           </a:p>
         </p:txBody>
       </p:sp>
       <p:sp>
         <p:nvSpPr>
-          <p:cNvPr id="3" name="内容占位符 2">
+          <p:cNvPr id="59" name="文本框 58">
             <a:extLst>
               <a:ext uri="{FF2B5EF4-FFF2-40B4-BE49-F238E27FC236}">
-                <a16:creationId xmlns:a16="http://schemas.microsoft.com/office/drawing/2014/main" id="{B9387A3C-9082-4837-9962-D8519EA7CD4E}"/>
+                <a16:creationId xmlns:a16="http://schemas.microsoft.com/office/drawing/2014/main" id="{00C01BBE-632B-4217-9A68-E4E92301ED5F}"/>
               </a:ext>
             </a:extLst>
           </p:cNvPr>
-          <p:cNvSpPr>
-            <a:spLocks noGrp="1"/>
-          </p:cNvSpPr>
-          <p:nvPr>
-            <p:ph idx="1"/>
-          </p:nvPr>
+          <p:cNvSpPr txBox="1"/>
+          <p:nvPr/>
         </p:nvSpPr>
-        <p:spPr/>
+        <p:spPr>
+          <a:xfrm>
+            <a:off x="867157" y="3366962"/>
+            <a:ext cx="1575111" cy="646331"/>
+          </a:xfrm>
+          <a:prstGeom prst="rect">
+            <a:avLst/>
+          </a:prstGeom>
+          <a:noFill/>
+        </p:spPr>
         <p:txBody>
-          <a:bodyPr/>
+          <a:bodyPr wrap="none" rtlCol="0">
+            <a:spAutoFit/>
+          </a:bodyPr>
           <a:lstStyle/>
           <a:p>
-            <a:endParaRPr lang="zh-CN" altLang="en-US"/>
+            <a:pPr algn="ctr"/>
+            <a:r>
+              <a:rPr lang="en-US" altLang="zh-CN" b="1" dirty="0">
+                <a:latin typeface="Times New Roman" panose="02020603050405020304" pitchFamily="18" charset="0"/>
+                <a:ea typeface="宋体" panose="02010600030101010101" pitchFamily="2" charset="-122"/>
+                <a:cs typeface="Times New Roman" panose="02020603050405020304" pitchFamily="18" charset="0"/>
+              </a:rPr>
+              <a:t>VM </a:t>
+            </a:r>
+            <a:r>
+              <a:rPr lang="zh-CN" altLang="en-US" b="1" dirty="0">
+                <a:latin typeface="Times New Roman" panose="02020603050405020304" pitchFamily="18" charset="0"/>
+                <a:ea typeface="宋体" panose="02010600030101010101" pitchFamily="2" charset="-122"/>
+                <a:cs typeface="Times New Roman" panose="02020603050405020304" pitchFamily="18" charset="0"/>
+              </a:rPr>
+              <a:t>内核</a:t>
+            </a:r>
+            <a:endParaRPr lang="en-US" altLang="zh-CN" b="1" dirty="0">
+              <a:latin typeface="Times New Roman" panose="02020603050405020304" pitchFamily="18" charset="0"/>
+              <a:ea typeface="宋体" panose="02010600030101010101" pitchFamily="2" charset="-122"/>
+              <a:cs typeface="Times New Roman" panose="02020603050405020304" pitchFamily="18" charset="0"/>
+            </a:endParaRPr>
+          </a:p>
+          <a:p>
+            <a:pPr algn="ctr"/>
+            <a:r>
+              <a:rPr lang="zh-CN" altLang="en-US" b="1" dirty="0">
+                <a:latin typeface="Times New Roman" panose="02020603050405020304" pitchFamily="18" charset="0"/>
+                <a:ea typeface="宋体" panose="02010600030101010101" pitchFamily="2" charset="-122"/>
+                <a:cs typeface="Times New Roman" panose="02020603050405020304" pitchFamily="18" charset="0"/>
+              </a:rPr>
+              <a:t>（</a:t>
+            </a:r>
+            <a:r>
+              <a:rPr lang="en-US" altLang="zh-CN" b="1" dirty="0">
+                <a:latin typeface="Times New Roman" panose="02020603050405020304" pitchFamily="18" charset="0"/>
+                <a:ea typeface="宋体" panose="02010600030101010101" pitchFamily="2" charset="-122"/>
+                <a:cs typeface="Times New Roman" panose="02020603050405020304" pitchFamily="18" charset="0"/>
+              </a:rPr>
+              <a:t>VM Core</a:t>
+            </a:r>
+            <a:r>
+              <a:rPr lang="zh-CN" altLang="en-US" b="1" dirty="0">
+                <a:latin typeface="Times New Roman" panose="02020603050405020304" pitchFamily="18" charset="0"/>
+                <a:ea typeface="宋体" panose="02010600030101010101" pitchFamily="2" charset="-122"/>
+                <a:cs typeface="Times New Roman" panose="02020603050405020304" pitchFamily="18" charset="0"/>
+              </a:rPr>
+              <a:t>）</a:t>
+            </a:r>
           </a:p>
         </p:txBody>
       </p:sp>
@@ -14966,6 +17065,1594 @@
     <p:extLst>
       <p:ext uri="{BB962C8B-B14F-4D97-AF65-F5344CB8AC3E}">
         <p14:creationId xmlns:p14="http://schemas.microsoft.com/office/powerpoint/2010/main" val="3809184108"/>
+      </p:ext>
+    </p:extLst>
+  </p:cSld>
+  <p:clrMapOvr>
+    <a:masterClrMapping/>
+  </p:clrMapOvr>
+</p:sld>
+</file>
+
+<file path=ppt/slides/slide6.xml><?xml version="1.0" encoding="utf-8"?>
+<p:sld xmlns:a="http://schemas.openxmlformats.org/drawingml/2006/main" xmlns:r="http://schemas.openxmlformats.org/officeDocument/2006/relationships" xmlns:p="http://schemas.openxmlformats.org/presentationml/2006/main">
+  <p:cSld>
+    <p:spTree>
+      <p:nvGrpSpPr>
+        <p:cNvPr id="1" name=""/>
+        <p:cNvGrpSpPr/>
+        <p:nvPr/>
+      </p:nvGrpSpPr>
+      <p:grpSpPr>
+        <a:xfrm>
+          <a:off x="0" y="0"/>
+          <a:ext cx="0" cy="0"/>
+          <a:chOff x="0" y="0"/>
+          <a:chExt cx="0" cy="0"/>
+        </a:xfrm>
+      </p:grpSpPr>
+      <p:grpSp>
+        <p:nvGrpSpPr>
+          <p:cNvPr id="7" name="组合 6">
+            <a:extLst>
+              <a:ext uri="{FF2B5EF4-FFF2-40B4-BE49-F238E27FC236}">
+                <a16:creationId xmlns:a16="http://schemas.microsoft.com/office/drawing/2014/main" id="{8A3F086D-34F5-49A7-95B0-F906D30549B8}"/>
+              </a:ext>
+            </a:extLst>
+          </p:cNvPr>
+          <p:cNvGrpSpPr/>
+          <p:nvPr/>
+        </p:nvGrpSpPr>
+        <p:grpSpPr>
+          <a:xfrm>
+            <a:off x="4580457" y="166254"/>
+            <a:ext cx="3031086" cy="667519"/>
+            <a:chOff x="4580456" y="112816"/>
+            <a:chExt cx="3031086" cy="667519"/>
+          </a:xfrm>
+        </p:grpSpPr>
+        <p:sp>
+          <p:nvSpPr>
+            <p:cNvPr id="4" name="矩形 3">
+              <a:extLst>
+                <a:ext uri="{FF2B5EF4-FFF2-40B4-BE49-F238E27FC236}">
+                  <a16:creationId xmlns:a16="http://schemas.microsoft.com/office/drawing/2014/main" id="{95DA7EF6-A193-41D9-AFF1-E3CB063A00B1}"/>
+                </a:ext>
+              </a:extLst>
+            </p:cNvPr>
+            <p:cNvSpPr/>
+            <p:nvPr/>
+          </p:nvSpPr>
+          <p:spPr>
+            <a:xfrm>
+              <a:off x="4580456" y="112816"/>
+              <a:ext cx="3031086" cy="667519"/>
+            </a:xfrm>
+            <a:prstGeom prst="rect">
+              <a:avLst/>
+            </a:prstGeom>
+            <a:noFill/>
+            <a:ln w="28575">
+              <a:solidFill>
+                <a:schemeClr val="tx1"/>
+              </a:solidFill>
+            </a:ln>
+          </p:spPr>
+          <p:style>
+            <a:lnRef idx="2">
+              <a:schemeClr val="accent1">
+                <a:shade val="50000"/>
+              </a:schemeClr>
+            </a:lnRef>
+            <a:fillRef idx="1">
+              <a:schemeClr val="accent1"/>
+            </a:fillRef>
+            <a:effectRef idx="0">
+              <a:schemeClr val="accent1"/>
+            </a:effectRef>
+            <a:fontRef idx="minor">
+              <a:schemeClr val="lt1"/>
+            </a:fontRef>
+          </p:style>
+          <p:txBody>
+            <a:bodyPr rtlCol="0" anchor="ctr"/>
+            <a:lstStyle/>
+            <a:p>
+              <a:pPr algn="ctr"/>
+              <a:endParaRPr lang="zh-CN" altLang="en-US"/>
+            </a:p>
+          </p:txBody>
+        </p:sp>
+        <p:sp>
+          <p:nvSpPr>
+            <p:cNvPr id="5" name="文本框 4">
+              <a:extLst>
+                <a:ext uri="{FF2B5EF4-FFF2-40B4-BE49-F238E27FC236}">
+                  <a16:creationId xmlns:a16="http://schemas.microsoft.com/office/drawing/2014/main" id="{06BE1F87-E6ED-42CE-ACB7-2623BDE2E8F0}"/>
+                </a:ext>
+              </a:extLst>
+            </p:cNvPr>
+            <p:cNvSpPr txBox="1"/>
+            <p:nvPr/>
+          </p:nvSpPr>
+          <p:spPr>
+            <a:xfrm>
+              <a:off x="5676653" y="134222"/>
+              <a:ext cx="838691" cy="369332"/>
+            </a:xfrm>
+            <a:prstGeom prst="rect">
+              <a:avLst/>
+            </a:prstGeom>
+            <a:noFill/>
+          </p:spPr>
+          <p:txBody>
+            <a:bodyPr wrap="none" rtlCol="0">
+              <a:spAutoFit/>
+            </a:bodyPr>
+            <a:lstStyle/>
+            <a:p>
+              <a:r>
+                <a:rPr lang="en-US" altLang="zh-CN" b="1" dirty="0">
+                  <a:latin typeface="Times New Roman" panose="02020603050405020304" pitchFamily="18" charset="0"/>
+                  <a:cs typeface="Times New Roman" panose="02020603050405020304" pitchFamily="18" charset="0"/>
+                </a:rPr>
+                <a:t>Isolate</a:t>
+              </a:r>
+              <a:endParaRPr lang="zh-CN" altLang="en-US" b="1" dirty="0">
+                <a:latin typeface="Times New Roman" panose="02020603050405020304" pitchFamily="18" charset="0"/>
+                <a:cs typeface="Times New Roman" panose="02020603050405020304" pitchFamily="18" charset="0"/>
+              </a:endParaRPr>
+            </a:p>
+          </p:txBody>
+        </p:sp>
+        <p:sp>
+          <p:nvSpPr>
+            <p:cNvPr id="6" name="文本框 5">
+              <a:extLst>
+                <a:ext uri="{FF2B5EF4-FFF2-40B4-BE49-F238E27FC236}">
+                  <a16:creationId xmlns:a16="http://schemas.microsoft.com/office/drawing/2014/main" id="{3562EA8C-D70D-4D67-B4C9-CBBBA4CC1B39}"/>
+                </a:ext>
+              </a:extLst>
+            </p:cNvPr>
+            <p:cNvSpPr txBox="1"/>
+            <p:nvPr/>
+          </p:nvSpPr>
+          <p:spPr>
+            <a:xfrm>
+              <a:off x="4580456" y="441781"/>
+              <a:ext cx="3031086" cy="338554"/>
+            </a:xfrm>
+            <a:prstGeom prst="rect">
+              <a:avLst/>
+            </a:prstGeom>
+            <a:noFill/>
+          </p:spPr>
+          <p:txBody>
+            <a:bodyPr wrap="none" rtlCol="0">
+              <a:spAutoFit/>
+            </a:bodyPr>
+            <a:lstStyle/>
+            <a:p>
+              <a:r>
+                <a:rPr lang="zh-CN" altLang="en-US" sz="1600" dirty="0">
+                  <a:latin typeface="Times New Roman" panose="02020603050405020304" pitchFamily="18" charset="0"/>
+                  <a:ea typeface="宋体" panose="02010600030101010101" pitchFamily="2" charset="-122"/>
+                  <a:cs typeface="Times New Roman" panose="02020603050405020304" pitchFamily="18" charset="0"/>
+                </a:rPr>
+                <a:t>一个独立 </a:t>
+              </a:r>
+              <a:r>
+                <a:rPr lang="en-US" altLang="zh-CN" sz="1600" dirty="0">
+                  <a:latin typeface="Times New Roman" panose="02020603050405020304" pitchFamily="18" charset="0"/>
+                  <a:ea typeface="宋体" panose="02010600030101010101" pitchFamily="2" charset="-122"/>
+                  <a:cs typeface="Times New Roman" panose="02020603050405020304" pitchFamily="18" charset="0"/>
+                </a:rPr>
+                <a:t>VM </a:t>
+              </a:r>
+              <a:r>
+                <a:rPr lang="zh-CN" altLang="en-US" sz="1600" dirty="0">
+                  <a:latin typeface="Times New Roman" panose="02020603050405020304" pitchFamily="18" charset="0"/>
+                  <a:ea typeface="宋体" panose="02010600030101010101" pitchFamily="2" charset="-122"/>
+                  <a:cs typeface="Times New Roman" panose="02020603050405020304" pitchFamily="18" charset="0"/>
+                </a:rPr>
+                <a:t>实例 </a:t>
+              </a:r>
+              <a:r>
+                <a:rPr lang="en-US" altLang="zh-CN" sz="1600" dirty="0">
+                  <a:latin typeface="Times New Roman" panose="02020603050405020304" pitchFamily="18" charset="0"/>
+                  <a:ea typeface="宋体" panose="02010600030101010101" pitchFamily="2" charset="-122"/>
+                  <a:cs typeface="Times New Roman" panose="02020603050405020304" pitchFamily="18" charset="0"/>
+                </a:rPr>
+                <a:t>/ </a:t>
+              </a:r>
+              <a:r>
+                <a:rPr lang="zh-CN" altLang="en-US" sz="1600" dirty="0">
+                  <a:latin typeface="Times New Roman" panose="02020603050405020304" pitchFamily="18" charset="0"/>
+                  <a:ea typeface="宋体" panose="02010600030101010101" pitchFamily="2" charset="-122"/>
+                  <a:cs typeface="Times New Roman" panose="02020603050405020304" pitchFamily="18" charset="0"/>
+                </a:rPr>
+                <a:t>运行时容器</a:t>
+              </a:r>
+            </a:p>
+          </p:txBody>
+        </p:sp>
+      </p:grpSp>
+      <p:grpSp>
+        <p:nvGrpSpPr>
+          <p:cNvPr id="16" name="组合 15">
+            <a:extLst>
+              <a:ext uri="{FF2B5EF4-FFF2-40B4-BE49-F238E27FC236}">
+                <a16:creationId xmlns:a16="http://schemas.microsoft.com/office/drawing/2014/main" id="{7921AD62-5191-4AA4-A11F-347DBBFD4334}"/>
+              </a:ext>
+            </a:extLst>
+          </p:cNvPr>
+          <p:cNvGrpSpPr/>
+          <p:nvPr/>
+        </p:nvGrpSpPr>
+        <p:grpSpPr>
+          <a:xfrm>
+            <a:off x="5067983" y="1820882"/>
+            <a:ext cx="2050090" cy="1474521"/>
+            <a:chOff x="4574514" y="1904009"/>
+            <a:chExt cx="2050090" cy="1997035"/>
+          </a:xfrm>
+        </p:grpSpPr>
+        <p:sp>
+          <p:nvSpPr>
+            <p:cNvPr id="13" name="矩形 12">
+              <a:extLst>
+                <a:ext uri="{FF2B5EF4-FFF2-40B4-BE49-F238E27FC236}">
+                  <a16:creationId xmlns:a16="http://schemas.microsoft.com/office/drawing/2014/main" id="{D4A47773-B8F4-4067-B02D-56355E28222A}"/>
+                </a:ext>
+              </a:extLst>
+            </p:cNvPr>
+            <p:cNvSpPr/>
+            <p:nvPr/>
+          </p:nvSpPr>
+          <p:spPr>
+            <a:xfrm>
+              <a:off x="4580456" y="1904009"/>
+              <a:ext cx="2044148" cy="1997035"/>
+            </a:xfrm>
+            <a:prstGeom prst="rect">
+              <a:avLst/>
+            </a:prstGeom>
+            <a:noFill/>
+            <a:ln w="28575">
+              <a:solidFill>
+                <a:schemeClr val="tx1"/>
+              </a:solidFill>
+            </a:ln>
+          </p:spPr>
+          <p:style>
+            <a:lnRef idx="2">
+              <a:schemeClr val="accent1">
+                <a:shade val="50000"/>
+              </a:schemeClr>
+            </a:lnRef>
+            <a:fillRef idx="1">
+              <a:schemeClr val="accent1"/>
+            </a:fillRef>
+            <a:effectRef idx="0">
+              <a:schemeClr val="accent1"/>
+            </a:effectRef>
+            <a:fontRef idx="minor">
+              <a:schemeClr val="lt1"/>
+            </a:fontRef>
+          </p:style>
+          <p:txBody>
+            <a:bodyPr rtlCol="0" anchor="ctr"/>
+            <a:lstStyle/>
+            <a:p>
+              <a:pPr algn="ctr"/>
+              <a:endParaRPr lang="zh-CN" altLang="en-US"/>
+            </a:p>
+          </p:txBody>
+        </p:sp>
+        <p:sp>
+          <p:nvSpPr>
+            <p:cNvPr id="14" name="文本框 13">
+              <a:extLst>
+                <a:ext uri="{FF2B5EF4-FFF2-40B4-BE49-F238E27FC236}">
+                  <a16:creationId xmlns:a16="http://schemas.microsoft.com/office/drawing/2014/main" id="{D6263276-6C5F-4702-BA47-9A427CD21EC2}"/>
+                </a:ext>
+              </a:extLst>
+            </p:cNvPr>
+            <p:cNvSpPr txBox="1"/>
+            <p:nvPr/>
+          </p:nvSpPr>
+          <p:spPr>
+            <a:xfrm>
+              <a:off x="4580455" y="1959549"/>
+              <a:ext cx="2044149" cy="369332"/>
+            </a:xfrm>
+            <a:prstGeom prst="rect">
+              <a:avLst/>
+            </a:prstGeom>
+            <a:noFill/>
+          </p:spPr>
+          <p:txBody>
+            <a:bodyPr wrap="none" rtlCol="0">
+              <a:spAutoFit/>
+            </a:bodyPr>
+            <a:lstStyle/>
+            <a:p>
+              <a:r>
+                <a:rPr lang="zh-CN" altLang="en-US" b="1" dirty="0">
+                  <a:latin typeface="宋体" panose="02010600030101010101" pitchFamily="2" charset="-122"/>
+                  <a:ea typeface="宋体" panose="02010600030101010101" pitchFamily="2" charset="-122"/>
+                  <a:cs typeface="Times New Roman" panose="02020603050405020304" pitchFamily="18" charset="0"/>
+                </a:rPr>
+                <a:t>模块系统相关状态</a:t>
+              </a:r>
+            </a:p>
+          </p:txBody>
+        </p:sp>
+        <p:sp>
+          <p:nvSpPr>
+            <p:cNvPr id="15" name="文本框 14">
+              <a:extLst>
+                <a:ext uri="{FF2B5EF4-FFF2-40B4-BE49-F238E27FC236}">
+                  <a16:creationId xmlns:a16="http://schemas.microsoft.com/office/drawing/2014/main" id="{CE472213-96C2-4558-914D-6756FD01C8B7}"/>
+                </a:ext>
+              </a:extLst>
+            </p:cNvPr>
+            <p:cNvSpPr txBox="1"/>
+            <p:nvPr/>
+          </p:nvSpPr>
+          <p:spPr>
+            <a:xfrm>
+              <a:off x="4574514" y="2366230"/>
+              <a:ext cx="1704313" cy="784254"/>
+            </a:xfrm>
+            <a:prstGeom prst="rect">
+              <a:avLst/>
+            </a:prstGeom>
+            <a:noFill/>
+          </p:spPr>
+          <p:txBody>
+            <a:bodyPr wrap="none" rtlCol="0">
+              <a:spAutoFit/>
+            </a:bodyPr>
+            <a:lstStyle/>
+            <a:p>
+              <a:pPr marL="285750" indent="-285750">
+                <a:lnSpc>
+                  <a:spcPct val="150000"/>
+                </a:lnSpc>
+                <a:buFont typeface="Wingdings" panose="05000000000000000000" pitchFamily="2" charset="2"/>
+                <a:buChar char="l"/>
+              </a:pPr>
+              <a:r>
+                <a:rPr lang="zh-CN" altLang="en-US" sz="1600" dirty="0">
+                  <a:latin typeface="Times New Roman" panose="02020603050405020304" pitchFamily="18" charset="0"/>
+                  <a:ea typeface="宋体" panose="02010600030101010101" pitchFamily="2" charset="-122"/>
+                  <a:cs typeface="Times New Roman" panose="02020603050405020304" pitchFamily="18" charset="0"/>
+                </a:rPr>
+                <a:t>模块导入状态</a:t>
+              </a:r>
+              <a:endParaRPr lang="en-US" altLang="zh-CN" sz="1600" dirty="0">
+                <a:latin typeface="Times New Roman" panose="02020603050405020304" pitchFamily="18" charset="0"/>
+                <a:ea typeface="宋体" panose="02010600030101010101" pitchFamily="2" charset="-122"/>
+                <a:cs typeface="Times New Roman" panose="02020603050405020304" pitchFamily="18" charset="0"/>
+              </a:endParaRPr>
+            </a:p>
+            <a:p>
+              <a:pPr marL="285750" indent="-285750">
+                <a:lnSpc>
+                  <a:spcPct val="150000"/>
+                </a:lnSpc>
+                <a:buFont typeface="Wingdings" panose="05000000000000000000" pitchFamily="2" charset="2"/>
+                <a:buChar char="l"/>
+              </a:pPr>
+              <a:r>
+                <a:rPr lang="zh-CN" altLang="en-US" sz="1600" dirty="0">
+                  <a:latin typeface="Times New Roman" panose="02020603050405020304" pitchFamily="18" charset="0"/>
+                  <a:ea typeface="宋体" panose="02010600030101010101" pitchFamily="2" charset="-122"/>
+                  <a:cs typeface="Times New Roman" panose="02020603050405020304" pitchFamily="18" charset="0"/>
+                </a:rPr>
+                <a:t>模块缓存</a:t>
+              </a:r>
+            </a:p>
+          </p:txBody>
+        </p:sp>
+      </p:grpSp>
+      <p:grpSp>
+        <p:nvGrpSpPr>
+          <p:cNvPr id="17" name="组合 16">
+            <a:extLst>
+              <a:ext uri="{FF2B5EF4-FFF2-40B4-BE49-F238E27FC236}">
+                <a16:creationId xmlns:a16="http://schemas.microsoft.com/office/drawing/2014/main" id="{A5CC690A-E40A-4EF8-BB8C-4EEC01770E04}"/>
+              </a:ext>
+            </a:extLst>
+          </p:cNvPr>
+          <p:cNvGrpSpPr/>
+          <p:nvPr/>
+        </p:nvGrpSpPr>
+        <p:grpSpPr>
+          <a:xfrm>
+            <a:off x="2705738" y="1820882"/>
+            <a:ext cx="2069913" cy="1474521"/>
+            <a:chOff x="4554691" y="1904009"/>
+            <a:chExt cx="2069913" cy="1997035"/>
+          </a:xfrm>
+        </p:grpSpPr>
+        <p:sp>
+          <p:nvSpPr>
+            <p:cNvPr id="18" name="矩形 17">
+              <a:extLst>
+                <a:ext uri="{FF2B5EF4-FFF2-40B4-BE49-F238E27FC236}">
+                  <a16:creationId xmlns:a16="http://schemas.microsoft.com/office/drawing/2014/main" id="{B3E79D41-0486-4F8C-AEF3-CC86BB2DDA1C}"/>
+                </a:ext>
+              </a:extLst>
+            </p:cNvPr>
+            <p:cNvSpPr/>
+            <p:nvPr/>
+          </p:nvSpPr>
+          <p:spPr>
+            <a:xfrm>
+              <a:off x="4580456" y="1904009"/>
+              <a:ext cx="2044148" cy="1997035"/>
+            </a:xfrm>
+            <a:prstGeom prst="rect">
+              <a:avLst/>
+            </a:prstGeom>
+            <a:noFill/>
+            <a:ln w="28575">
+              <a:solidFill>
+                <a:schemeClr val="tx1"/>
+              </a:solidFill>
+            </a:ln>
+          </p:spPr>
+          <p:style>
+            <a:lnRef idx="2">
+              <a:schemeClr val="accent1">
+                <a:shade val="50000"/>
+              </a:schemeClr>
+            </a:lnRef>
+            <a:fillRef idx="1">
+              <a:schemeClr val="accent1"/>
+            </a:fillRef>
+            <a:effectRef idx="0">
+              <a:schemeClr val="accent1"/>
+            </a:effectRef>
+            <a:fontRef idx="minor">
+              <a:schemeClr val="lt1"/>
+            </a:fontRef>
+          </p:style>
+          <p:txBody>
+            <a:bodyPr rtlCol="0" anchor="ctr"/>
+            <a:lstStyle/>
+            <a:p>
+              <a:pPr algn="ctr"/>
+              <a:endParaRPr lang="zh-CN" altLang="en-US"/>
+            </a:p>
+          </p:txBody>
+        </p:sp>
+        <p:sp>
+          <p:nvSpPr>
+            <p:cNvPr id="19" name="文本框 18">
+              <a:extLst>
+                <a:ext uri="{FF2B5EF4-FFF2-40B4-BE49-F238E27FC236}">
+                  <a16:creationId xmlns:a16="http://schemas.microsoft.com/office/drawing/2014/main" id="{15B48B81-FA9D-4788-B86F-DF67BA7B9F85}"/>
+                </a:ext>
+              </a:extLst>
+            </p:cNvPr>
+            <p:cNvSpPr txBox="1"/>
+            <p:nvPr/>
+          </p:nvSpPr>
+          <p:spPr>
+            <a:xfrm>
+              <a:off x="4554691" y="1959549"/>
+              <a:ext cx="2044149" cy="369332"/>
+            </a:xfrm>
+            <a:prstGeom prst="rect">
+              <a:avLst/>
+            </a:prstGeom>
+            <a:noFill/>
+          </p:spPr>
+          <p:txBody>
+            <a:bodyPr wrap="none" rtlCol="0">
+              <a:spAutoFit/>
+            </a:bodyPr>
+            <a:lstStyle/>
+            <a:p>
+              <a:r>
+                <a:rPr lang="zh-CN" altLang="en-US" b="1" dirty="0">
+                  <a:latin typeface="宋体" panose="02010600030101010101" pitchFamily="2" charset="-122"/>
+                  <a:ea typeface="宋体" panose="02010600030101010101" pitchFamily="2" charset="-122"/>
+                  <a:cs typeface="Times New Roman" panose="02020603050405020304" pitchFamily="18" charset="0"/>
+                </a:rPr>
+                <a:t>脚本执行相关状态</a:t>
+              </a:r>
+            </a:p>
+          </p:txBody>
+        </p:sp>
+        <p:sp>
+          <p:nvSpPr>
+            <p:cNvPr id="20" name="文本框 19">
+              <a:extLst>
+                <a:ext uri="{FF2B5EF4-FFF2-40B4-BE49-F238E27FC236}">
+                  <a16:creationId xmlns:a16="http://schemas.microsoft.com/office/drawing/2014/main" id="{293F1E25-CE68-4933-A05A-F2B0DDAF6B95}"/>
+                </a:ext>
+              </a:extLst>
+            </p:cNvPr>
+            <p:cNvSpPr txBox="1"/>
+            <p:nvPr/>
+          </p:nvSpPr>
+          <p:spPr>
+            <a:xfrm>
+              <a:off x="4574514" y="2370822"/>
+              <a:ext cx="1909497" cy="1156086"/>
+            </a:xfrm>
+            <a:prstGeom prst="rect">
+              <a:avLst/>
+            </a:prstGeom>
+            <a:noFill/>
+          </p:spPr>
+          <p:txBody>
+            <a:bodyPr wrap="none" rtlCol="0">
+              <a:spAutoFit/>
+            </a:bodyPr>
+            <a:lstStyle/>
+            <a:p>
+              <a:pPr marL="285750" indent="-285750">
+                <a:lnSpc>
+                  <a:spcPct val="150000"/>
+                </a:lnSpc>
+                <a:buFont typeface="Wingdings" panose="05000000000000000000" pitchFamily="2" charset="2"/>
+                <a:buChar char="l"/>
+              </a:pPr>
+              <a:r>
+                <a:rPr lang="zh-CN" altLang="en-US" sz="1600" dirty="0">
+                  <a:latin typeface="Times New Roman" panose="02020603050405020304" pitchFamily="18" charset="0"/>
+                  <a:ea typeface="宋体" panose="02010600030101010101" pitchFamily="2" charset="-122"/>
+                  <a:cs typeface="Times New Roman" panose="02020603050405020304" pitchFamily="18" charset="0"/>
+                </a:rPr>
+                <a:t>字节码执行状态</a:t>
+              </a:r>
+              <a:endParaRPr lang="en-US" altLang="zh-CN" sz="1600" dirty="0">
+                <a:latin typeface="Times New Roman" panose="02020603050405020304" pitchFamily="18" charset="0"/>
+                <a:ea typeface="宋体" panose="02010600030101010101" pitchFamily="2" charset="-122"/>
+                <a:cs typeface="Times New Roman" panose="02020603050405020304" pitchFamily="18" charset="0"/>
+              </a:endParaRPr>
+            </a:p>
+            <a:p>
+              <a:pPr marL="285750" indent="-285750">
+                <a:lnSpc>
+                  <a:spcPct val="150000"/>
+                </a:lnSpc>
+                <a:buFont typeface="Wingdings" panose="05000000000000000000" pitchFamily="2" charset="2"/>
+                <a:buChar char="l"/>
+              </a:pPr>
+              <a:r>
+                <a:rPr lang="zh-CN" altLang="en-US" sz="1600" dirty="0">
+                  <a:latin typeface="Times New Roman" panose="02020603050405020304" pitchFamily="18" charset="0"/>
+                  <a:ea typeface="宋体" panose="02010600030101010101" pitchFamily="2" charset="-122"/>
+                  <a:cs typeface="Times New Roman" panose="02020603050405020304" pitchFamily="18" charset="0"/>
+                </a:rPr>
+                <a:t>函数调用堆栈</a:t>
+              </a:r>
+              <a:endParaRPr lang="en-US" altLang="zh-CN" sz="1600" dirty="0">
+                <a:latin typeface="Times New Roman" panose="02020603050405020304" pitchFamily="18" charset="0"/>
+                <a:ea typeface="宋体" panose="02010600030101010101" pitchFamily="2" charset="-122"/>
+                <a:cs typeface="Times New Roman" panose="02020603050405020304" pitchFamily="18" charset="0"/>
+              </a:endParaRPr>
+            </a:p>
+            <a:p>
+              <a:pPr marL="285750" indent="-285750">
+                <a:lnSpc>
+                  <a:spcPct val="150000"/>
+                </a:lnSpc>
+                <a:buFont typeface="Wingdings" panose="05000000000000000000" pitchFamily="2" charset="2"/>
+                <a:buChar char="l"/>
+              </a:pPr>
+              <a:r>
+                <a:rPr lang="zh-CN" altLang="en-US" sz="1600" dirty="0">
+                  <a:latin typeface="Times New Roman" panose="02020603050405020304" pitchFamily="18" charset="0"/>
+                  <a:ea typeface="宋体" panose="02010600030101010101" pitchFamily="2" charset="-122"/>
+                  <a:cs typeface="Times New Roman" panose="02020603050405020304" pitchFamily="18" charset="0"/>
+                </a:rPr>
+                <a:t>其他执行上下文</a:t>
+              </a:r>
+            </a:p>
+          </p:txBody>
+        </p:sp>
+      </p:grpSp>
+      <p:grpSp>
+        <p:nvGrpSpPr>
+          <p:cNvPr id="21" name="组合 20">
+            <a:extLst>
+              <a:ext uri="{FF2B5EF4-FFF2-40B4-BE49-F238E27FC236}">
+                <a16:creationId xmlns:a16="http://schemas.microsoft.com/office/drawing/2014/main" id="{7DF886E5-433A-46C4-B71A-6E26CA6D1262}"/>
+              </a:ext>
+            </a:extLst>
+          </p:cNvPr>
+          <p:cNvGrpSpPr/>
+          <p:nvPr/>
+        </p:nvGrpSpPr>
+        <p:grpSpPr>
+          <a:xfrm>
+            <a:off x="7404472" y="1820881"/>
+            <a:ext cx="2056025" cy="1474522"/>
+            <a:chOff x="4568579" y="1904009"/>
+            <a:chExt cx="2056025" cy="1997035"/>
+          </a:xfrm>
+        </p:grpSpPr>
+        <p:sp>
+          <p:nvSpPr>
+            <p:cNvPr id="22" name="矩形 21">
+              <a:extLst>
+                <a:ext uri="{FF2B5EF4-FFF2-40B4-BE49-F238E27FC236}">
+                  <a16:creationId xmlns:a16="http://schemas.microsoft.com/office/drawing/2014/main" id="{8E0B7292-5923-4CD6-9BB8-DB331207BB34}"/>
+                </a:ext>
+              </a:extLst>
+            </p:cNvPr>
+            <p:cNvSpPr/>
+            <p:nvPr/>
+          </p:nvSpPr>
+          <p:spPr>
+            <a:xfrm>
+              <a:off x="4580456" y="1904009"/>
+              <a:ext cx="2044148" cy="1997035"/>
+            </a:xfrm>
+            <a:prstGeom prst="rect">
+              <a:avLst/>
+            </a:prstGeom>
+            <a:noFill/>
+            <a:ln w="28575">
+              <a:solidFill>
+                <a:schemeClr val="tx1"/>
+              </a:solidFill>
+            </a:ln>
+          </p:spPr>
+          <p:style>
+            <a:lnRef idx="2">
+              <a:schemeClr val="accent1">
+                <a:shade val="50000"/>
+              </a:schemeClr>
+            </a:lnRef>
+            <a:fillRef idx="1">
+              <a:schemeClr val="accent1"/>
+            </a:fillRef>
+            <a:effectRef idx="0">
+              <a:schemeClr val="accent1"/>
+            </a:effectRef>
+            <a:fontRef idx="minor">
+              <a:schemeClr val="lt1"/>
+            </a:fontRef>
+          </p:style>
+          <p:txBody>
+            <a:bodyPr rtlCol="0" anchor="ctr"/>
+            <a:lstStyle/>
+            <a:p>
+              <a:pPr algn="ctr"/>
+              <a:endParaRPr lang="zh-CN" altLang="en-US"/>
+            </a:p>
+          </p:txBody>
+        </p:sp>
+        <p:sp>
+          <p:nvSpPr>
+            <p:cNvPr id="23" name="文本框 22">
+              <a:extLst>
+                <a:ext uri="{FF2B5EF4-FFF2-40B4-BE49-F238E27FC236}">
+                  <a16:creationId xmlns:a16="http://schemas.microsoft.com/office/drawing/2014/main" id="{F19999C6-59D9-4618-AC3E-E3173C81A370}"/>
+                </a:ext>
+              </a:extLst>
+            </p:cNvPr>
+            <p:cNvSpPr txBox="1"/>
+            <p:nvPr/>
+          </p:nvSpPr>
+          <p:spPr>
+            <a:xfrm>
+              <a:off x="4929108" y="1959550"/>
+              <a:ext cx="1346844" cy="500209"/>
+            </a:xfrm>
+            <a:prstGeom prst="rect">
+              <a:avLst/>
+            </a:prstGeom>
+            <a:noFill/>
+          </p:spPr>
+          <p:txBody>
+            <a:bodyPr wrap="none" rtlCol="0">
+              <a:spAutoFit/>
+            </a:bodyPr>
+            <a:lstStyle/>
+            <a:p>
+              <a:r>
+                <a:rPr lang="zh-CN" altLang="en-US" b="1" dirty="0">
+                  <a:latin typeface="宋体" panose="02010600030101010101" pitchFamily="2" charset="-122"/>
+                  <a:ea typeface="宋体" panose="02010600030101010101" pitchFamily="2" charset="-122"/>
+                  <a:cs typeface="Times New Roman" panose="02020603050405020304" pitchFamily="18" charset="0"/>
+                </a:rPr>
+                <a:t>运行时环境</a:t>
+              </a:r>
+            </a:p>
+          </p:txBody>
+        </p:sp>
+        <p:sp>
+          <p:nvSpPr>
+            <p:cNvPr id="24" name="文本框 23">
+              <a:extLst>
+                <a:ext uri="{FF2B5EF4-FFF2-40B4-BE49-F238E27FC236}">
+                  <a16:creationId xmlns:a16="http://schemas.microsoft.com/office/drawing/2014/main" id="{D8AE67E4-46EE-48C0-AEA0-8ECBD4A5BA1D}"/>
+                </a:ext>
+              </a:extLst>
+            </p:cNvPr>
+            <p:cNvSpPr txBox="1"/>
+            <p:nvPr/>
+          </p:nvSpPr>
+          <p:spPr>
+            <a:xfrm>
+              <a:off x="4568579" y="2366231"/>
+              <a:ext cx="1909497" cy="1062163"/>
+            </a:xfrm>
+            <a:prstGeom prst="rect">
+              <a:avLst/>
+            </a:prstGeom>
+            <a:noFill/>
+          </p:spPr>
+          <p:txBody>
+            <a:bodyPr wrap="none" rtlCol="0">
+              <a:spAutoFit/>
+            </a:bodyPr>
+            <a:lstStyle/>
+            <a:p>
+              <a:pPr marL="285750" indent="-285750">
+                <a:lnSpc>
+                  <a:spcPct val="150000"/>
+                </a:lnSpc>
+                <a:buFont typeface="Wingdings" panose="05000000000000000000" pitchFamily="2" charset="2"/>
+                <a:buChar char="l"/>
+              </a:pPr>
+              <a:r>
+                <a:rPr lang="zh-CN" altLang="en-US" sz="1600" dirty="0">
+                  <a:latin typeface="Times New Roman" panose="02020603050405020304" pitchFamily="18" charset="0"/>
+                  <a:ea typeface="宋体" panose="02010600030101010101" pitchFamily="2" charset="-122"/>
+                  <a:cs typeface="Times New Roman" panose="02020603050405020304" pitchFamily="18" charset="0"/>
+                </a:rPr>
+                <a:t>内建环境</a:t>
+              </a:r>
+              <a:endParaRPr lang="en-US" altLang="zh-CN" sz="1600" dirty="0">
+                <a:latin typeface="Times New Roman" panose="02020603050405020304" pitchFamily="18" charset="0"/>
+                <a:ea typeface="宋体" panose="02010600030101010101" pitchFamily="2" charset="-122"/>
+                <a:cs typeface="Times New Roman" panose="02020603050405020304" pitchFamily="18" charset="0"/>
+              </a:endParaRPr>
+            </a:p>
+            <a:p>
+              <a:pPr marL="285750" indent="-285750">
+                <a:lnSpc>
+                  <a:spcPct val="150000"/>
+                </a:lnSpc>
+                <a:buFont typeface="Wingdings" panose="05000000000000000000" pitchFamily="2" charset="2"/>
+                <a:buChar char="l"/>
+              </a:pPr>
+              <a:r>
+                <a:rPr lang="zh-CN" altLang="en-US" sz="1600" dirty="0">
+                  <a:latin typeface="Times New Roman" panose="02020603050405020304" pitchFamily="18" charset="0"/>
+                  <a:ea typeface="宋体" panose="02010600030101010101" pitchFamily="2" charset="-122"/>
+                  <a:cs typeface="Times New Roman" panose="02020603050405020304" pitchFamily="18" charset="0"/>
+                </a:rPr>
+                <a:t>运行时共享资源</a:t>
+              </a:r>
+            </a:p>
+          </p:txBody>
+        </p:sp>
+      </p:grpSp>
+      <p:grpSp>
+        <p:nvGrpSpPr>
+          <p:cNvPr id="25" name="组合 24">
+            <a:extLst>
+              <a:ext uri="{FF2B5EF4-FFF2-40B4-BE49-F238E27FC236}">
+                <a16:creationId xmlns:a16="http://schemas.microsoft.com/office/drawing/2014/main" id="{3F84F941-9053-4450-8D19-E680CC8B08F4}"/>
+              </a:ext>
+            </a:extLst>
+          </p:cNvPr>
+          <p:cNvGrpSpPr/>
+          <p:nvPr/>
+        </p:nvGrpSpPr>
+        <p:grpSpPr>
+          <a:xfrm>
+            <a:off x="363313" y="1820882"/>
+            <a:ext cx="2069915" cy="1498260"/>
+            <a:chOff x="4554689" y="1904009"/>
+            <a:chExt cx="2069915" cy="2029186"/>
+          </a:xfrm>
+        </p:grpSpPr>
+        <p:sp>
+          <p:nvSpPr>
+            <p:cNvPr id="26" name="矩形 25">
+              <a:extLst>
+                <a:ext uri="{FF2B5EF4-FFF2-40B4-BE49-F238E27FC236}">
+                  <a16:creationId xmlns:a16="http://schemas.microsoft.com/office/drawing/2014/main" id="{04FCC2CB-B5B4-4860-B775-1C8E43E6CE5E}"/>
+                </a:ext>
+              </a:extLst>
+            </p:cNvPr>
+            <p:cNvSpPr/>
+            <p:nvPr/>
+          </p:nvSpPr>
+          <p:spPr>
+            <a:xfrm>
+              <a:off x="4580456" y="1904009"/>
+              <a:ext cx="2044148" cy="1997035"/>
+            </a:xfrm>
+            <a:prstGeom prst="rect">
+              <a:avLst/>
+            </a:prstGeom>
+            <a:noFill/>
+            <a:ln w="28575">
+              <a:solidFill>
+                <a:schemeClr val="tx1"/>
+              </a:solidFill>
+            </a:ln>
+          </p:spPr>
+          <p:style>
+            <a:lnRef idx="2">
+              <a:schemeClr val="accent1">
+                <a:shade val="50000"/>
+              </a:schemeClr>
+            </a:lnRef>
+            <a:fillRef idx="1">
+              <a:schemeClr val="accent1"/>
+            </a:fillRef>
+            <a:effectRef idx="0">
+              <a:schemeClr val="accent1"/>
+            </a:effectRef>
+            <a:fontRef idx="minor">
+              <a:schemeClr val="lt1"/>
+            </a:fontRef>
+          </p:style>
+          <p:txBody>
+            <a:bodyPr rtlCol="0" anchor="ctr"/>
+            <a:lstStyle/>
+            <a:p>
+              <a:pPr algn="ctr"/>
+              <a:endParaRPr lang="zh-CN" altLang="en-US"/>
+            </a:p>
+          </p:txBody>
+        </p:sp>
+        <p:sp>
+          <p:nvSpPr>
+            <p:cNvPr id="27" name="文本框 26">
+              <a:extLst>
+                <a:ext uri="{FF2B5EF4-FFF2-40B4-BE49-F238E27FC236}">
+                  <a16:creationId xmlns:a16="http://schemas.microsoft.com/office/drawing/2014/main" id="{EA3C9880-EB67-4D4D-A079-54F53379E755}"/>
+                </a:ext>
+              </a:extLst>
+            </p:cNvPr>
+            <p:cNvSpPr txBox="1"/>
+            <p:nvPr/>
+          </p:nvSpPr>
+          <p:spPr>
+            <a:xfrm>
+              <a:off x="4554689" y="1959549"/>
+              <a:ext cx="2044149" cy="500209"/>
+            </a:xfrm>
+            <a:prstGeom prst="rect">
+              <a:avLst/>
+            </a:prstGeom>
+            <a:noFill/>
+          </p:spPr>
+          <p:txBody>
+            <a:bodyPr wrap="none" rtlCol="0">
+              <a:spAutoFit/>
+            </a:bodyPr>
+            <a:lstStyle/>
+            <a:p>
+              <a:r>
+                <a:rPr lang="zh-CN" altLang="en-US" b="1" dirty="0">
+                  <a:latin typeface="宋体" panose="02010600030101010101" pitchFamily="2" charset="-122"/>
+                  <a:ea typeface="宋体" panose="02010600030101010101" pitchFamily="2" charset="-122"/>
+                  <a:cs typeface="Times New Roman" panose="02020603050405020304" pitchFamily="18" charset="0"/>
+                </a:rPr>
+                <a:t>虚拟机堆相关状态</a:t>
+              </a:r>
+            </a:p>
+          </p:txBody>
+        </p:sp>
+        <p:sp>
+          <p:nvSpPr>
+            <p:cNvPr id="28" name="文本框 27">
+              <a:extLst>
+                <a:ext uri="{FF2B5EF4-FFF2-40B4-BE49-F238E27FC236}">
+                  <a16:creationId xmlns:a16="http://schemas.microsoft.com/office/drawing/2014/main" id="{3A7FEC38-6726-4371-A261-B9B210DD9DCE}"/>
+                </a:ext>
+              </a:extLst>
+            </p:cNvPr>
+            <p:cNvSpPr txBox="1"/>
+            <p:nvPr/>
+          </p:nvSpPr>
+          <p:spPr>
+            <a:xfrm>
+              <a:off x="4574514" y="2370822"/>
+              <a:ext cx="1909497" cy="1562373"/>
+            </a:xfrm>
+            <a:prstGeom prst="rect">
+              <a:avLst/>
+            </a:prstGeom>
+            <a:noFill/>
+          </p:spPr>
+          <p:txBody>
+            <a:bodyPr wrap="none" rtlCol="0">
+              <a:spAutoFit/>
+            </a:bodyPr>
+            <a:lstStyle/>
+            <a:p>
+              <a:pPr marL="285750" indent="-285750">
+                <a:lnSpc>
+                  <a:spcPct val="150000"/>
+                </a:lnSpc>
+                <a:buFont typeface="Wingdings" panose="05000000000000000000" pitchFamily="2" charset="2"/>
+                <a:buChar char="l"/>
+              </a:pPr>
+              <a:r>
+                <a:rPr lang="zh-CN" altLang="en-US" sz="1600" dirty="0">
+                  <a:latin typeface="Times New Roman" panose="02020603050405020304" pitchFamily="18" charset="0"/>
+                  <a:ea typeface="宋体" panose="02010600030101010101" pitchFamily="2" charset="-122"/>
+                  <a:cs typeface="Times New Roman" panose="02020603050405020304" pitchFamily="18" charset="0"/>
+                </a:rPr>
+                <a:t>堆空间内存资源</a:t>
+              </a:r>
+              <a:endParaRPr lang="en-US" altLang="zh-CN" sz="1600" dirty="0">
+                <a:latin typeface="Times New Roman" panose="02020603050405020304" pitchFamily="18" charset="0"/>
+                <a:ea typeface="宋体" panose="02010600030101010101" pitchFamily="2" charset="-122"/>
+                <a:cs typeface="Times New Roman" panose="02020603050405020304" pitchFamily="18" charset="0"/>
+              </a:endParaRPr>
+            </a:p>
+            <a:p>
+              <a:pPr marL="285750" indent="-285750">
+                <a:lnSpc>
+                  <a:spcPct val="150000"/>
+                </a:lnSpc>
+                <a:buFont typeface="Wingdings" panose="05000000000000000000" pitchFamily="2" charset="2"/>
+                <a:buChar char="l"/>
+              </a:pPr>
+              <a:r>
+                <a:rPr lang="zh-CN" altLang="en-US" sz="1600" dirty="0">
+                  <a:latin typeface="Times New Roman" panose="02020603050405020304" pitchFamily="18" charset="0"/>
+                  <a:ea typeface="宋体" panose="02010600030101010101" pitchFamily="2" charset="-122"/>
+                  <a:cs typeface="Times New Roman" panose="02020603050405020304" pitchFamily="18" charset="0"/>
+                </a:rPr>
+                <a:t>堆内存分配情况</a:t>
+              </a:r>
+              <a:endParaRPr lang="en-US" altLang="zh-CN" sz="1600" dirty="0">
+                <a:latin typeface="Times New Roman" panose="02020603050405020304" pitchFamily="18" charset="0"/>
+                <a:ea typeface="宋体" panose="02010600030101010101" pitchFamily="2" charset="-122"/>
+                <a:cs typeface="Times New Roman" panose="02020603050405020304" pitchFamily="18" charset="0"/>
+              </a:endParaRPr>
+            </a:p>
+            <a:p>
+              <a:pPr marL="285750" indent="-285750">
+                <a:lnSpc>
+                  <a:spcPct val="150000"/>
+                </a:lnSpc>
+                <a:buFont typeface="Wingdings" panose="05000000000000000000" pitchFamily="2" charset="2"/>
+                <a:buChar char="l"/>
+              </a:pPr>
+              <a:r>
+                <a:rPr lang="zh-CN" altLang="en-US" sz="1600" dirty="0">
+                  <a:latin typeface="Times New Roman" panose="02020603050405020304" pitchFamily="18" charset="0"/>
+                  <a:ea typeface="宋体" panose="02010600030101010101" pitchFamily="2" charset="-122"/>
+                  <a:cs typeface="Times New Roman" panose="02020603050405020304" pitchFamily="18" charset="0"/>
+                </a:rPr>
+                <a:t>垃圾回收状态</a:t>
+              </a:r>
+            </a:p>
+          </p:txBody>
+        </p:sp>
+      </p:grpSp>
+      <p:grpSp>
+        <p:nvGrpSpPr>
+          <p:cNvPr id="29" name="组合 28">
+            <a:extLst>
+              <a:ext uri="{FF2B5EF4-FFF2-40B4-BE49-F238E27FC236}">
+                <a16:creationId xmlns:a16="http://schemas.microsoft.com/office/drawing/2014/main" id="{47CF0A27-90DC-46FA-8343-A278CBF93558}"/>
+              </a:ext>
+            </a:extLst>
+          </p:cNvPr>
+          <p:cNvGrpSpPr/>
+          <p:nvPr/>
+        </p:nvGrpSpPr>
+        <p:grpSpPr>
+          <a:xfrm>
+            <a:off x="9752828" y="1817901"/>
+            <a:ext cx="2114681" cy="1474522"/>
+            <a:chOff x="4574512" y="1904009"/>
+            <a:chExt cx="2114681" cy="1997035"/>
+          </a:xfrm>
+        </p:grpSpPr>
+        <p:sp>
+          <p:nvSpPr>
+            <p:cNvPr id="30" name="矩形 29">
+              <a:extLst>
+                <a:ext uri="{FF2B5EF4-FFF2-40B4-BE49-F238E27FC236}">
+                  <a16:creationId xmlns:a16="http://schemas.microsoft.com/office/drawing/2014/main" id="{FA37E2C5-3632-4A44-A16B-6592B38DFDFF}"/>
+                </a:ext>
+              </a:extLst>
+            </p:cNvPr>
+            <p:cNvSpPr/>
+            <p:nvPr/>
+          </p:nvSpPr>
+          <p:spPr>
+            <a:xfrm>
+              <a:off x="4580456" y="1904009"/>
+              <a:ext cx="2044148" cy="1997035"/>
+            </a:xfrm>
+            <a:prstGeom prst="rect">
+              <a:avLst/>
+            </a:prstGeom>
+            <a:noFill/>
+            <a:ln w="28575">
+              <a:solidFill>
+                <a:schemeClr val="tx1"/>
+              </a:solidFill>
+            </a:ln>
+          </p:spPr>
+          <p:style>
+            <a:lnRef idx="2">
+              <a:schemeClr val="accent1">
+                <a:shade val="50000"/>
+              </a:schemeClr>
+            </a:lnRef>
+            <a:fillRef idx="1">
+              <a:schemeClr val="accent1"/>
+            </a:fillRef>
+            <a:effectRef idx="0">
+              <a:schemeClr val="accent1"/>
+            </a:effectRef>
+            <a:fontRef idx="minor">
+              <a:schemeClr val="lt1"/>
+            </a:fontRef>
+          </p:style>
+          <p:txBody>
+            <a:bodyPr rtlCol="0" anchor="ctr"/>
+            <a:lstStyle/>
+            <a:p>
+              <a:pPr algn="ctr"/>
+              <a:endParaRPr lang="zh-CN" altLang="en-US"/>
+            </a:p>
+          </p:txBody>
+        </p:sp>
+        <p:sp>
+          <p:nvSpPr>
+            <p:cNvPr id="31" name="文本框 30">
+              <a:extLst>
+                <a:ext uri="{FF2B5EF4-FFF2-40B4-BE49-F238E27FC236}">
+                  <a16:creationId xmlns:a16="http://schemas.microsoft.com/office/drawing/2014/main" id="{392659A9-CBE7-4338-A119-79BDA6A7CB84}"/>
+                </a:ext>
+              </a:extLst>
+            </p:cNvPr>
+            <p:cNvSpPr txBox="1"/>
+            <p:nvPr/>
+          </p:nvSpPr>
+          <p:spPr>
+            <a:xfrm>
+              <a:off x="4812891" y="1971628"/>
+              <a:ext cx="1579278" cy="500209"/>
+            </a:xfrm>
+            <a:prstGeom prst="rect">
+              <a:avLst/>
+            </a:prstGeom>
+            <a:noFill/>
+          </p:spPr>
+          <p:txBody>
+            <a:bodyPr wrap="none" rtlCol="0">
+              <a:spAutoFit/>
+            </a:bodyPr>
+            <a:lstStyle/>
+            <a:p>
+              <a:r>
+                <a:rPr lang="zh-CN" altLang="en-US" b="1" dirty="0">
+                  <a:latin typeface="宋体" panose="02010600030101010101" pitchFamily="2" charset="-122"/>
+                  <a:ea typeface="宋体" panose="02010600030101010101" pitchFamily="2" charset="-122"/>
+                  <a:cs typeface="Times New Roman" panose="02020603050405020304" pitchFamily="18" charset="0"/>
+                </a:rPr>
+                <a:t>异常相关状态</a:t>
+              </a:r>
+            </a:p>
+          </p:txBody>
+        </p:sp>
+        <p:sp>
+          <p:nvSpPr>
+            <p:cNvPr id="32" name="文本框 31">
+              <a:extLst>
+                <a:ext uri="{FF2B5EF4-FFF2-40B4-BE49-F238E27FC236}">
+                  <a16:creationId xmlns:a16="http://schemas.microsoft.com/office/drawing/2014/main" id="{C5E8CA4D-EE1A-43DA-99DD-F41E2EF8EB9D}"/>
+                </a:ext>
+              </a:extLst>
+            </p:cNvPr>
+            <p:cNvSpPr txBox="1"/>
+            <p:nvPr/>
+          </p:nvSpPr>
+          <p:spPr>
+            <a:xfrm>
+              <a:off x="4574512" y="2366231"/>
+              <a:ext cx="2114681" cy="1062163"/>
+            </a:xfrm>
+            <a:prstGeom prst="rect">
+              <a:avLst/>
+            </a:prstGeom>
+            <a:noFill/>
+          </p:spPr>
+          <p:txBody>
+            <a:bodyPr wrap="none" rtlCol="0">
+              <a:spAutoFit/>
+            </a:bodyPr>
+            <a:lstStyle/>
+            <a:p>
+              <a:pPr marL="285750" indent="-285750">
+                <a:lnSpc>
+                  <a:spcPct val="150000"/>
+                </a:lnSpc>
+                <a:buFont typeface="Wingdings" panose="05000000000000000000" pitchFamily="2" charset="2"/>
+                <a:buChar char="l"/>
+              </a:pPr>
+              <a:r>
+                <a:rPr lang="zh-CN" altLang="en-US" sz="1600" dirty="0">
+                  <a:latin typeface="Times New Roman" panose="02020603050405020304" pitchFamily="18" charset="0"/>
+                  <a:ea typeface="宋体" panose="02010600030101010101" pitchFamily="2" charset="-122"/>
+                  <a:cs typeface="Times New Roman" panose="02020603050405020304" pitchFamily="18" charset="0"/>
+                </a:rPr>
+                <a:t>待处理异常对象</a:t>
+              </a:r>
+              <a:endParaRPr lang="en-US" altLang="zh-CN" sz="1600" dirty="0">
+                <a:latin typeface="Times New Roman" panose="02020603050405020304" pitchFamily="18" charset="0"/>
+                <a:ea typeface="宋体" panose="02010600030101010101" pitchFamily="2" charset="-122"/>
+                <a:cs typeface="Times New Roman" panose="02020603050405020304" pitchFamily="18" charset="0"/>
+              </a:endParaRPr>
+            </a:p>
+            <a:p>
+              <a:pPr marL="285750" indent="-285750">
+                <a:lnSpc>
+                  <a:spcPct val="150000"/>
+                </a:lnSpc>
+                <a:buFont typeface="Wingdings" panose="05000000000000000000" pitchFamily="2" charset="2"/>
+                <a:buChar char="l"/>
+              </a:pPr>
+              <a:r>
+                <a:rPr lang="zh-CN" altLang="en-US" sz="1600" dirty="0">
+                  <a:latin typeface="Times New Roman" panose="02020603050405020304" pitchFamily="18" charset="0"/>
+                  <a:ea typeface="宋体" panose="02010600030101010101" pitchFamily="2" charset="-122"/>
+                  <a:cs typeface="Times New Roman" panose="02020603050405020304" pitchFamily="18" charset="0"/>
+                </a:rPr>
+                <a:t>待处理异常上下文</a:t>
+              </a:r>
+            </a:p>
+          </p:txBody>
+        </p:sp>
+      </p:grpSp>
+      <p:cxnSp>
+        <p:nvCxnSpPr>
+          <p:cNvPr id="34" name="直接连接符 33">
+            <a:extLst>
+              <a:ext uri="{FF2B5EF4-FFF2-40B4-BE49-F238E27FC236}">
+                <a16:creationId xmlns:a16="http://schemas.microsoft.com/office/drawing/2014/main" id="{9DAF8ADC-4053-4EF6-8DB1-1E4D057E13A8}"/>
+              </a:ext>
+            </a:extLst>
+          </p:cNvPr>
+          <p:cNvCxnSpPr>
+            <a:cxnSpLocks/>
+          </p:cNvCxnSpPr>
+          <p:nvPr/>
+        </p:nvCxnSpPr>
+        <p:spPr>
+          <a:xfrm>
+            <a:off x="1385387" y="1191882"/>
+            <a:ext cx="9395459" cy="0"/>
+          </a:xfrm>
+          <a:prstGeom prst="line">
+            <a:avLst/>
+          </a:prstGeom>
+          <a:ln w="28575">
+            <a:solidFill>
+              <a:schemeClr val="tx1"/>
+            </a:solidFill>
+          </a:ln>
+        </p:spPr>
+        <p:style>
+          <a:lnRef idx="1">
+            <a:schemeClr val="accent1"/>
+          </a:lnRef>
+          <a:fillRef idx="0">
+            <a:schemeClr val="accent1"/>
+          </a:fillRef>
+          <a:effectRef idx="0">
+            <a:schemeClr val="accent1"/>
+          </a:effectRef>
+          <a:fontRef idx="minor">
+            <a:schemeClr val="tx1"/>
+          </a:fontRef>
+        </p:style>
+      </p:cxnSp>
+      <p:cxnSp>
+        <p:nvCxnSpPr>
+          <p:cNvPr id="37" name="直接箭头连接符 36">
+            <a:extLst>
+              <a:ext uri="{FF2B5EF4-FFF2-40B4-BE49-F238E27FC236}">
+                <a16:creationId xmlns:a16="http://schemas.microsoft.com/office/drawing/2014/main" id="{211D6D35-1619-4612-A48B-3DD896801074}"/>
+              </a:ext>
+            </a:extLst>
+          </p:cNvPr>
+          <p:cNvCxnSpPr>
+            <a:cxnSpLocks/>
+          </p:cNvCxnSpPr>
+          <p:nvPr/>
+        </p:nvCxnSpPr>
+        <p:spPr>
+          <a:xfrm flipH="1">
+            <a:off x="6095999" y="829540"/>
+            <a:ext cx="1" cy="987109"/>
+          </a:xfrm>
+          <a:prstGeom prst="straightConnector1">
+            <a:avLst/>
+          </a:prstGeom>
+          <a:ln w="28575">
+            <a:solidFill>
+              <a:schemeClr val="tx1"/>
+            </a:solidFill>
+            <a:tailEnd type="triangle"/>
+          </a:ln>
+        </p:spPr>
+        <p:style>
+          <a:lnRef idx="1">
+            <a:schemeClr val="accent1"/>
+          </a:lnRef>
+          <a:fillRef idx="0">
+            <a:schemeClr val="accent1"/>
+          </a:fillRef>
+          <a:effectRef idx="0">
+            <a:schemeClr val="accent1"/>
+          </a:effectRef>
+          <a:fontRef idx="minor">
+            <a:schemeClr val="tx1"/>
+          </a:fontRef>
+        </p:style>
+      </p:cxnSp>
+      <p:cxnSp>
+        <p:nvCxnSpPr>
+          <p:cNvPr id="39" name="直接箭头连接符 38">
+            <a:extLst>
+              <a:ext uri="{FF2B5EF4-FFF2-40B4-BE49-F238E27FC236}">
+                <a16:creationId xmlns:a16="http://schemas.microsoft.com/office/drawing/2014/main" id="{53265B45-7F25-4112-A50B-0A76F4473BFF}"/>
+              </a:ext>
+            </a:extLst>
+          </p:cNvPr>
+          <p:cNvCxnSpPr>
+            <a:cxnSpLocks/>
+          </p:cNvCxnSpPr>
+          <p:nvPr/>
+        </p:nvCxnSpPr>
+        <p:spPr>
+          <a:xfrm>
+            <a:off x="1385388" y="1177853"/>
+            <a:ext cx="0" cy="639062"/>
+          </a:xfrm>
+          <a:prstGeom prst="straightConnector1">
+            <a:avLst/>
+          </a:prstGeom>
+          <a:ln w="28575">
+            <a:solidFill>
+              <a:schemeClr val="tx1"/>
+            </a:solidFill>
+            <a:tailEnd type="triangle"/>
+          </a:ln>
+        </p:spPr>
+        <p:style>
+          <a:lnRef idx="1">
+            <a:schemeClr val="accent1"/>
+          </a:lnRef>
+          <a:fillRef idx="0">
+            <a:schemeClr val="accent1"/>
+          </a:fillRef>
+          <a:effectRef idx="0">
+            <a:schemeClr val="accent1"/>
+          </a:effectRef>
+          <a:fontRef idx="minor">
+            <a:schemeClr val="tx1"/>
+          </a:fontRef>
+        </p:style>
+      </p:cxnSp>
+      <p:cxnSp>
+        <p:nvCxnSpPr>
+          <p:cNvPr id="48" name="直接箭头连接符 47">
+            <a:extLst>
+              <a:ext uri="{FF2B5EF4-FFF2-40B4-BE49-F238E27FC236}">
+                <a16:creationId xmlns:a16="http://schemas.microsoft.com/office/drawing/2014/main" id="{F49CEABC-2FAA-43ED-AD29-E7FA280D1BEC}"/>
+              </a:ext>
+            </a:extLst>
+          </p:cNvPr>
+          <p:cNvCxnSpPr>
+            <a:cxnSpLocks/>
+          </p:cNvCxnSpPr>
+          <p:nvPr/>
+        </p:nvCxnSpPr>
+        <p:spPr>
+          <a:xfrm>
+            <a:off x="10780846" y="1177853"/>
+            <a:ext cx="0" cy="629877"/>
+          </a:xfrm>
+          <a:prstGeom prst="straightConnector1">
+            <a:avLst/>
+          </a:prstGeom>
+          <a:ln w="28575">
+            <a:solidFill>
+              <a:schemeClr val="tx1"/>
+            </a:solidFill>
+            <a:tailEnd type="triangle"/>
+          </a:ln>
+        </p:spPr>
+        <p:style>
+          <a:lnRef idx="1">
+            <a:schemeClr val="accent1"/>
+          </a:lnRef>
+          <a:fillRef idx="0">
+            <a:schemeClr val="accent1"/>
+          </a:fillRef>
+          <a:effectRef idx="0">
+            <a:schemeClr val="accent1"/>
+          </a:effectRef>
+          <a:fontRef idx="minor">
+            <a:schemeClr val="tx1"/>
+          </a:fontRef>
+        </p:style>
+      </p:cxnSp>
+      <p:cxnSp>
+        <p:nvCxnSpPr>
+          <p:cNvPr id="54" name="直接箭头连接符 53">
+            <a:extLst>
+              <a:ext uri="{FF2B5EF4-FFF2-40B4-BE49-F238E27FC236}">
+                <a16:creationId xmlns:a16="http://schemas.microsoft.com/office/drawing/2014/main" id="{2BAF1BCF-8208-49F3-9BF6-06574ABE2CDB}"/>
+              </a:ext>
+            </a:extLst>
+          </p:cNvPr>
+          <p:cNvCxnSpPr>
+            <a:cxnSpLocks/>
+          </p:cNvCxnSpPr>
+          <p:nvPr/>
+        </p:nvCxnSpPr>
+        <p:spPr>
+          <a:xfrm>
+            <a:off x="3752603" y="1176795"/>
+            <a:ext cx="0" cy="639062"/>
+          </a:xfrm>
+          <a:prstGeom prst="straightConnector1">
+            <a:avLst/>
+          </a:prstGeom>
+          <a:ln w="28575">
+            <a:solidFill>
+              <a:schemeClr val="tx1"/>
+            </a:solidFill>
+            <a:tailEnd type="triangle"/>
+          </a:ln>
+        </p:spPr>
+        <p:style>
+          <a:lnRef idx="1">
+            <a:schemeClr val="accent1"/>
+          </a:lnRef>
+          <a:fillRef idx="0">
+            <a:schemeClr val="accent1"/>
+          </a:fillRef>
+          <a:effectRef idx="0">
+            <a:schemeClr val="accent1"/>
+          </a:effectRef>
+          <a:fontRef idx="minor">
+            <a:schemeClr val="tx1"/>
+          </a:fontRef>
+        </p:style>
+      </p:cxnSp>
+      <p:cxnSp>
+        <p:nvCxnSpPr>
+          <p:cNvPr id="60" name="直接箭头连接符 59">
+            <a:extLst>
+              <a:ext uri="{FF2B5EF4-FFF2-40B4-BE49-F238E27FC236}">
+                <a16:creationId xmlns:a16="http://schemas.microsoft.com/office/drawing/2014/main" id="{7524B7F8-DB89-4AC2-863D-3BBA2A41D5E1}"/>
+              </a:ext>
+            </a:extLst>
+          </p:cNvPr>
+          <p:cNvCxnSpPr>
+            <a:cxnSpLocks/>
+          </p:cNvCxnSpPr>
+          <p:nvPr/>
+        </p:nvCxnSpPr>
+        <p:spPr>
+          <a:xfrm>
+            <a:off x="8439244" y="1174678"/>
+            <a:ext cx="0" cy="639062"/>
+          </a:xfrm>
+          <a:prstGeom prst="straightConnector1">
+            <a:avLst/>
+          </a:prstGeom>
+          <a:ln w="28575">
+            <a:solidFill>
+              <a:schemeClr val="tx1"/>
+            </a:solidFill>
+            <a:tailEnd type="triangle"/>
+          </a:ln>
+        </p:spPr>
+        <p:style>
+          <a:lnRef idx="1">
+            <a:schemeClr val="accent1"/>
+          </a:lnRef>
+          <a:fillRef idx="0">
+            <a:schemeClr val="accent1"/>
+          </a:fillRef>
+          <a:effectRef idx="0">
+            <a:schemeClr val="accent1"/>
+          </a:effectRef>
+          <a:fontRef idx="minor">
+            <a:schemeClr val="tx1"/>
+          </a:fontRef>
+        </p:style>
+      </p:cxnSp>
+      <p:sp>
+        <p:nvSpPr>
+          <p:cNvPr id="61" name="左中括号 60">
+            <a:extLst>
+              <a:ext uri="{FF2B5EF4-FFF2-40B4-BE49-F238E27FC236}">
+                <a16:creationId xmlns:a16="http://schemas.microsoft.com/office/drawing/2014/main" id="{669755A7-89DE-475A-9214-0BF00E61F7C6}"/>
+              </a:ext>
+            </a:extLst>
+          </p:cNvPr>
+          <p:cNvSpPr/>
+          <p:nvPr/>
+        </p:nvSpPr>
+        <p:spPr>
+          <a:xfrm rot="16200000">
+            <a:off x="6005214" y="-1260525"/>
+            <a:ext cx="108303" cy="9442960"/>
+          </a:xfrm>
+          <a:prstGeom prst="leftBracket">
+            <a:avLst/>
+          </a:prstGeom>
+          <a:ln w="28575">
+            <a:solidFill>
+              <a:schemeClr val="tx1"/>
+            </a:solidFill>
+          </a:ln>
+        </p:spPr>
+        <p:style>
+          <a:lnRef idx="1">
+            <a:schemeClr val="accent1"/>
+          </a:lnRef>
+          <a:fillRef idx="0">
+            <a:schemeClr val="accent1"/>
+          </a:fillRef>
+          <a:effectRef idx="0">
+            <a:schemeClr val="accent1"/>
+          </a:effectRef>
+          <a:fontRef idx="minor">
+            <a:schemeClr val="tx1"/>
+          </a:fontRef>
+        </p:style>
+        <p:txBody>
+          <a:bodyPr rtlCol="0" anchor="ctr"/>
+          <a:lstStyle/>
+          <a:p>
+            <a:pPr algn="ctr"/>
+            <a:endParaRPr lang="zh-CN" altLang="en-US"/>
+          </a:p>
+        </p:txBody>
+      </p:sp>
+      <p:cxnSp>
+        <p:nvCxnSpPr>
+          <p:cNvPr id="62" name="直接箭头连接符 61">
+            <a:extLst>
+              <a:ext uri="{FF2B5EF4-FFF2-40B4-BE49-F238E27FC236}">
+                <a16:creationId xmlns:a16="http://schemas.microsoft.com/office/drawing/2014/main" id="{A149FECD-0F9E-4DD7-A969-598AF93CE7D3}"/>
+              </a:ext>
+            </a:extLst>
+          </p:cNvPr>
+          <p:cNvCxnSpPr>
+            <a:cxnSpLocks/>
+          </p:cNvCxnSpPr>
+          <p:nvPr/>
+        </p:nvCxnSpPr>
+        <p:spPr>
+          <a:xfrm>
+            <a:off x="6111833" y="3515107"/>
+            <a:ext cx="0" cy="368124"/>
+          </a:xfrm>
+          <a:prstGeom prst="straightConnector1">
+            <a:avLst/>
+          </a:prstGeom>
+          <a:ln w="28575">
+            <a:solidFill>
+              <a:schemeClr val="tx1"/>
+            </a:solidFill>
+            <a:tailEnd type="triangle"/>
+          </a:ln>
+        </p:spPr>
+        <p:style>
+          <a:lnRef idx="1">
+            <a:schemeClr val="accent1"/>
+          </a:lnRef>
+          <a:fillRef idx="0">
+            <a:schemeClr val="accent1"/>
+          </a:fillRef>
+          <a:effectRef idx="0">
+            <a:schemeClr val="accent1"/>
+          </a:effectRef>
+          <a:fontRef idx="minor">
+            <a:schemeClr val="tx1"/>
+          </a:fontRef>
+        </p:style>
+      </p:cxnSp>
+      <p:sp>
+        <p:nvSpPr>
+          <p:cNvPr id="64" name="文本框 63">
+            <a:extLst>
+              <a:ext uri="{FF2B5EF4-FFF2-40B4-BE49-F238E27FC236}">
+                <a16:creationId xmlns:a16="http://schemas.microsoft.com/office/drawing/2014/main" id="{E6604CEA-ACDF-463B-8F55-AC6FC3CB20FB}"/>
+              </a:ext>
+            </a:extLst>
+          </p:cNvPr>
+          <p:cNvSpPr txBox="1"/>
+          <p:nvPr/>
+        </p:nvSpPr>
+        <p:spPr>
+          <a:xfrm>
+            <a:off x="3352103" y="3872910"/>
+            <a:ext cx="5519460" cy="615553"/>
+          </a:xfrm>
+          <a:prstGeom prst="rect">
+            <a:avLst/>
+          </a:prstGeom>
+          <a:noFill/>
+        </p:spPr>
+        <p:txBody>
+          <a:bodyPr wrap="none" rtlCol="0">
+            <a:spAutoFit/>
+          </a:bodyPr>
+          <a:lstStyle/>
+          <a:p>
+            <a:pPr algn="ctr"/>
+            <a:r>
+              <a:rPr lang="zh-CN" altLang="en-US" b="1" dirty="0">
+                <a:latin typeface="Times New Roman" panose="02020603050405020304" pitchFamily="18" charset="0"/>
+                <a:ea typeface="宋体" panose="02010600030101010101" pitchFamily="2" charset="-122"/>
+                <a:cs typeface="Times New Roman" panose="02020603050405020304" pitchFamily="18" charset="0"/>
+              </a:rPr>
+              <a:t>系统中的关键操作都围绕 </a:t>
+            </a:r>
+            <a:r>
+              <a:rPr lang="en-US" altLang="zh-CN" b="1" dirty="0">
+                <a:latin typeface="Times New Roman" panose="02020603050405020304" pitchFamily="18" charset="0"/>
+                <a:ea typeface="宋体" panose="02010600030101010101" pitchFamily="2" charset="-122"/>
+                <a:cs typeface="Times New Roman" panose="02020603050405020304" pitchFamily="18" charset="0"/>
+              </a:rPr>
+              <a:t>Isolate </a:t>
+            </a:r>
+            <a:r>
+              <a:rPr lang="zh-CN" altLang="en-US" b="1" dirty="0">
+                <a:latin typeface="Times New Roman" panose="02020603050405020304" pitchFamily="18" charset="0"/>
+                <a:ea typeface="宋体" panose="02010600030101010101" pitchFamily="2" charset="-122"/>
+                <a:cs typeface="Times New Roman" panose="02020603050405020304" pitchFamily="18" charset="0"/>
+              </a:rPr>
+              <a:t>展开</a:t>
+            </a:r>
+            <a:endParaRPr lang="en-US" altLang="zh-CN" b="1" dirty="0">
+              <a:latin typeface="Times New Roman" panose="02020603050405020304" pitchFamily="18" charset="0"/>
+              <a:ea typeface="宋体" panose="02010600030101010101" pitchFamily="2" charset="-122"/>
+              <a:cs typeface="Times New Roman" panose="02020603050405020304" pitchFamily="18" charset="0"/>
+            </a:endParaRPr>
+          </a:p>
+          <a:p>
+            <a:pPr algn="ctr"/>
+            <a:r>
+              <a:rPr lang="zh-CN" altLang="en-US" sz="1600" dirty="0">
+                <a:latin typeface="Times New Roman" panose="02020603050405020304" pitchFamily="18" charset="0"/>
+                <a:ea typeface="宋体" panose="02010600030101010101" pitchFamily="2" charset="-122"/>
+                <a:cs typeface="Times New Roman" panose="02020603050405020304" pitchFamily="18" charset="0"/>
+              </a:rPr>
+              <a:t>（对象分配、脚本执行、模块导入、异常传播、宿主嵌入）</a:t>
+            </a:r>
+          </a:p>
+        </p:txBody>
+      </p:sp>
+    </p:spTree>
+    <p:extLst>
+      <p:ext uri="{BB962C8B-B14F-4D97-AF65-F5344CB8AC3E}">
+        <p14:creationId xmlns:p14="http://schemas.microsoft.com/office/powerpoint/2010/main" val="652572543"/>
       </p:ext>
     </p:extLst>
   </p:cSld>

--- a/docs/thesis/pictures.pptx
+++ b/docs/thesis/pictures.pptx
@@ -5,7 +5,7 @@
     <p:sldMasterId id="2147483648" r:id="rId1"/>
   </p:sldMasterIdLst>
   <p:notesMasterIdLst>
-    <p:notesMasterId r:id="rId8"/>
+    <p:notesMasterId r:id="rId10"/>
   </p:notesMasterIdLst>
   <p:sldIdLst>
     <p:sldId id="259" r:id="rId2"/>
@@ -14,6 +14,8 @@
     <p:sldId id="263" r:id="rId5"/>
     <p:sldId id="261" r:id="rId6"/>
     <p:sldId id="264" r:id="rId7"/>
+    <p:sldId id="265" r:id="rId8"/>
+    <p:sldId id="266" r:id="rId9"/>
   </p:sldIdLst>
   <p:sldSz cx="12192000" cy="6858000"/>
   <p:notesSz cx="6858000" cy="9144000"/>
@@ -823,6 +825,90 @@
     <p:extLst>
       <p:ext uri="{BB962C8B-B14F-4D97-AF65-F5344CB8AC3E}">
         <p14:creationId xmlns:p14="http://schemas.microsoft.com/office/powerpoint/2010/main" val="1195047455"/>
+      </p:ext>
+    </p:extLst>
+  </p:cSld>
+  <p:clrMapOvr>
+    <a:masterClrMapping/>
+  </p:clrMapOvr>
+</p:notes>
+</file>
+
+<file path=ppt/notesSlides/notesSlide4.xml><?xml version="1.0" encoding="utf-8"?>
+<p:notes xmlns:a="http://schemas.openxmlformats.org/drawingml/2006/main" xmlns:r="http://schemas.openxmlformats.org/officeDocument/2006/relationships" xmlns:p="http://schemas.openxmlformats.org/presentationml/2006/main">
+  <p:cSld>
+    <p:spTree>
+      <p:nvGrpSpPr>
+        <p:cNvPr id="1" name=""/>
+        <p:cNvGrpSpPr/>
+        <p:nvPr/>
+      </p:nvGrpSpPr>
+      <p:grpSpPr>
+        <a:xfrm>
+          <a:off x="0" y="0"/>
+          <a:ext cx="0" cy="0"/>
+          <a:chOff x="0" y="0"/>
+          <a:chExt cx="0" cy="0"/>
+        </a:xfrm>
+      </p:grpSpPr>
+      <p:sp>
+        <p:nvSpPr>
+          <p:cNvPr id="2" name="幻灯片图像占位符 1"/>
+          <p:cNvSpPr>
+            <a:spLocks noGrp="1" noRot="1" noChangeAspect="1"/>
+          </p:cNvSpPr>
+          <p:nvPr>
+            <p:ph type="sldImg"/>
+          </p:nvPr>
+        </p:nvSpPr>
+        <p:spPr/>
+      </p:sp>
+      <p:sp>
+        <p:nvSpPr>
+          <p:cNvPr id="3" name="备注占位符 2"/>
+          <p:cNvSpPr>
+            <a:spLocks noGrp="1"/>
+          </p:cNvSpPr>
+          <p:nvPr>
+            <p:ph type="body" idx="1"/>
+          </p:nvPr>
+        </p:nvSpPr>
+        <p:spPr/>
+        <p:txBody>
+          <a:bodyPr/>
+          <a:lstStyle/>
+          <a:p>
+            <a:endParaRPr lang="zh-CN" altLang="en-US" dirty="0"/>
+          </a:p>
+        </p:txBody>
+      </p:sp>
+      <p:sp>
+        <p:nvSpPr>
+          <p:cNvPr id="4" name="灯片编号占位符 3"/>
+          <p:cNvSpPr>
+            <a:spLocks noGrp="1"/>
+          </p:cNvSpPr>
+          <p:nvPr>
+            <p:ph type="sldNum" sz="quarter" idx="5"/>
+          </p:nvPr>
+        </p:nvSpPr>
+        <p:spPr/>
+        <p:txBody>
+          <a:bodyPr/>
+          <a:lstStyle/>
+          <a:p>
+            <a:fld id="{E393EDF1-1F90-4424-893B-0173418AA877}" type="slidenum">
+              <a:rPr lang="zh-CN" altLang="en-US" smtClean="0"/>
+              <a:t>8</a:t>
+            </a:fld>
+            <a:endParaRPr lang="zh-CN" altLang="en-US"/>
+          </a:p>
+        </p:txBody>
+      </p:sp>
+    </p:spTree>
+    <p:extLst>
+      <p:ext uri="{BB962C8B-B14F-4D97-AF65-F5344CB8AC3E}">
+        <p14:creationId xmlns:p14="http://schemas.microsoft.com/office/powerpoint/2010/main" val="1465961252"/>
       </p:ext>
     </p:extLst>
   </p:cSld>
@@ -18591,8 +18677,8 @@
         </p:nvSpPr>
         <p:spPr>
           <a:xfrm>
-            <a:off x="3352103" y="3872910"/>
-            <a:ext cx="5519460" cy="615553"/>
+            <a:off x="3685528" y="3872910"/>
+            <a:ext cx="4852610" cy="584775"/>
           </a:xfrm>
           <a:prstGeom prst="rect">
             <a:avLst/>
@@ -18639,7 +18725,7 @@
           <a:p>
             <a:pPr algn="ctr"/>
             <a:r>
-              <a:rPr lang="zh-CN" altLang="en-US" sz="1600" dirty="0">
+              <a:rPr lang="zh-CN" altLang="en-US" sz="1400" dirty="0">
                 <a:latin typeface="Times New Roman" panose="02020603050405020304" pitchFamily="18" charset="0"/>
                 <a:ea typeface="宋体" panose="02010600030101010101" pitchFamily="2" charset="-122"/>
                 <a:cs typeface="Times New Roman" panose="02020603050405020304" pitchFamily="18" charset="0"/>
@@ -18653,6 +18739,4179 @@
     <p:extLst>
       <p:ext uri="{BB962C8B-B14F-4D97-AF65-F5344CB8AC3E}">
         <p14:creationId xmlns:p14="http://schemas.microsoft.com/office/powerpoint/2010/main" val="652572543"/>
+      </p:ext>
+    </p:extLst>
+  </p:cSld>
+  <p:clrMapOvr>
+    <a:masterClrMapping/>
+  </p:clrMapOvr>
+</p:sld>
+</file>
+
+<file path=ppt/slides/slide7.xml><?xml version="1.0" encoding="utf-8"?>
+<p:sld xmlns:a="http://schemas.openxmlformats.org/drawingml/2006/main" xmlns:r="http://schemas.openxmlformats.org/officeDocument/2006/relationships" xmlns:p="http://schemas.openxmlformats.org/presentationml/2006/main">
+  <p:cSld>
+    <p:spTree>
+      <p:nvGrpSpPr>
+        <p:cNvPr id="1" name=""/>
+        <p:cNvGrpSpPr/>
+        <p:nvPr/>
+      </p:nvGrpSpPr>
+      <p:grpSpPr>
+        <a:xfrm>
+          <a:off x="0" y="0"/>
+          <a:ext cx="0" cy="0"/>
+          <a:chOff x="0" y="0"/>
+          <a:chExt cx="0" cy="0"/>
+        </a:xfrm>
+      </p:grpSpPr>
+      <p:sp>
+        <p:nvSpPr>
+          <p:cNvPr id="10" name="文本框 9">
+            <a:extLst>
+              <a:ext uri="{FF2B5EF4-FFF2-40B4-BE49-F238E27FC236}">
+                <a16:creationId xmlns:a16="http://schemas.microsoft.com/office/drawing/2014/main" id="{7642DB36-EB4D-4D1D-BC4A-2AC5CBAFF3AE}"/>
+              </a:ext>
+            </a:extLst>
+          </p:cNvPr>
+          <p:cNvSpPr txBox="1"/>
+          <p:nvPr/>
+        </p:nvSpPr>
+        <p:spPr>
+          <a:xfrm>
+            <a:off x="984994" y="1661287"/>
+            <a:ext cx="1081963" cy="338554"/>
+          </a:xfrm>
+          <a:prstGeom prst="rect">
+            <a:avLst/>
+          </a:prstGeom>
+          <a:noFill/>
+        </p:spPr>
+        <p:txBody>
+          <a:bodyPr wrap="none" rtlCol="0">
+            <a:spAutoFit/>
+          </a:bodyPr>
+          <a:lstStyle/>
+          <a:p>
+            <a:r>
+              <a:rPr lang="en-US" altLang="zh-CN" sz="1600" dirty="0">
+                <a:latin typeface="Times New Roman" panose="02020603050405020304" pitchFamily="18" charset="0"/>
+                <a:ea typeface="宋体" panose="02010600030101010101" pitchFamily="2" charset="-122"/>
+                <a:cs typeface="Times New Roman" panose="02020603050405020304" pitchFamily="18" charset="0"/>
+              </a:rPr>
+              <a:t>MarkWord</a:t>
+            </a:r>
+            <a:endParaRPr lang="zh-CN" altLang="en-US" sz="1600" dirty="0">
+              <a:latin typeface="Times New Roman" panose="02020603050405020304" pitchFamily="18" charset="0"/>
+              <a:ea typeface="宋体" panose="02010600030101010101" pitchFamily="2" charset="-122"/>
+              <a:cs typeface="Times New Roman" panose="02020603050405020304" pitchFamily="18" charset="0"/>
+            </a:endParaRPr>
+          </a:p>
+        </p:txBody>
+      </p:sp>
+      <p:grpSp>
+        <p:nvGrpSpPr>
+          <p:cNvPr id="22" name="组合 21">
+            <a:extLst>
+              <a:ext uri="{FF2B5EF4-FFF2-40B4-BE49-F238E27FC236}">
+                <a16:creationId xmlns:a16="http://schemas.microsoft.com/office/drawing/2014/main" id="{E80CFF09-9F2D-45ED-BEF4-1AE61FEFAE6C}"/>
+              </a:ext>
+            </a:extLst>
+          </p:cNvPr>
+          <p:cNvGrpSpPr/>
+          <p:nvPr/>
+        </p:nvGrpSpPr>
+        <p:grpSpPr>
+          <a:xfrm>
+            <a:off x="333243" y="896498"/>
+            <a:ext cx="2385461" cy="1834823"/>
+            <a:chOff x="333243" y="896498"/>
+            <a:chExt cx="2385461" cy="1834823"/>
+          </a:xfrm>
+        </p:grpSpPr>
+        <p:grpSp>
+          <p:nvGrpSpPr>
+            <p:cNvPr id="20" name="组合 19">
+              <a:extLst>
+                <a:ext uri="{FF2B5EF4-FFF2-40B4-BE49-F238E27FC236}">
+                  <a16:creationId xmlns:a16="http://schemas.microsoft.com/office/drawing/2014/main" id="{D55C9007-A18E-41A0-A7B1-D82DB88353AE}"/>
+                </a:ext>
+              </a:extLst>
+            </p:cNvPr>
+            <p:cNvGrpSpPr/>
+            <p:nvPr/>
+          </p:nvGrpSpPr>
+          <p:grpSpPr>
+            <a:xfrm>
+              <a:off x="665016" y="1248105"/>
+              <a:ext cx="1721924" cy="1483216"/>
+              <a:chOff x="665016" y="1248105"/>
+              <a:chExt cx="1721924" cy="1483216"/>
+            </a:xfrm>
+          </p:grpSpPr>
+          <p:sp>
+            <p:nvSpPr>
+              <p:cNvPr id="4" name="矩形 3">
+                <a:extLst>
+                  <a:ext uri="{FF2B5EF4-FFF2-40B4-BE49-F238E27FC236}">
+                    <a16:creationId xmlns:a16="http://schemas.microsoft.com/office/drawing/2014/main" id="{18155401-0C96-454C-9AEA-A088FC5CB8C0}"/>
+                  </a:ext>
+                </a:extLst>
+              </p:cNvPr>
+              <p:cNvSpPr/>
+              <p:nvPr/>
+            </p:nvSpPr>
+            <p:spPr>
+              <a:xfrm>
+                <a:off x="665017" y="1252846"/>
+                <a:ext cx="1721923" cy="1478475"/>
+              </a:xfrm>
+              <a:prstGeom prst="rect">
+                <a:avLst/>
+              </a:prstGeom>
+              <a:noFill/>
+              <a:ln w="28575">
+                <a:solidFill>
+                  <a:schemeClr val="tx1"/>
+                </a:solidFill>
+              </a:ln>
+            </p:spPr>
+            <p:style>
+              <a:lnRef idx="2">
+                <a:schemeClr val="accent1">
+                  <a:shade val="50000"/>
+                </a:schemeClr>
+              </a:lnRef>
+              <a:fillRef idx="1">
+                <a:schemeClr val="accent1"/>
+              </a:fillRef>
+              <a:effectRef idx="0">
+                <a:schemeClr val="accent1"/>
+              </a:effectRef>
+              <a:fontRef idx="minor">
+                <a:schemeClr val="lt1"/>
+              </a:fontRef>
+            </p:style>
+            <p:txBody>
+              <a:bodyPr rtlCol="0" anchor="ctr"/>
+              <a:lstStyle/>
+              <a:p>
+                <a:pPr algn="ctr"/>
+                <a:endParaRPr lang="zh-CN" altLang="en-US"/>
+              </a:p>
+            </p:txBody>
+          </p:sp>
+          <p:cxnSp>
+            <p:nvCxnSpPr>
+              <p:cNvPr id="6" name="直接连接符 5">
+                <a:extLst>
+                  <a:ext uri="{FF2B5EF4-FFF2-40B4-BE49-F238E27FC236}">
+                    <a16:creationId xmlns:a16="http://schemas.microsoft.com/office/drawing/2014/main" id="{41764BC2-243A-40DA-AA69-B1952A1D15FB}"/>
+                  </a:ext>
+                </a:extLst>
+              </p:cNvPr>
+              <p:cNvCxnSpPr/>
+              <p:nvPr/>
+            </p:nvCxnSpPr>
+            <p:spPr>
+              <a:xfrm>
+                <a:off x="665017" y="1632856"/>
+                <a:ext cx="1721923" cy="0"/>
+              </a:xfrm>
+              <a:prstGeom prst="line">
+                <a:avLst/>
+              </a:prstGeom>
+              <a:ln w="28575"/>
+            </p:spPr>
+            <p:style>
+              <a:lnRef idx="1">
+                <a:schemeClr val="dk1"/>
+              </a:lnRef>
+              <a:fillRef idx="0">
+                <a:schemeClr val="dk1"/>
+              </a:fillRef>
+              <a:effectRef idx="0">
+                <a:schemeClr val="dk1"/>
+              </a:effectRef>
+              <a:fontRef idx="minor">
+                <a:schemeClr val="tx1"/>
+              </a:fontRef>
+            </p:style>
+          </p:cxnSp>
+          <p:sp>
+            <p:nvSpPr>
+              <p:cNvPr id="7" name="文本框 6">
+                <a:extLst>
+                  <a:ext uri="{FF2B5EF4-FFF2-40B4-BE49-F238E27FC236}">
+                    <a16:creationId xmlns:a16="http://schemas.microsoft.com/office/drawing/2014/main" id="{8BE98485-E981-48A7-A966-66BC5E5A3B14}"/>
+                  </a:ext>
+                </a:extLst>
+              </p:cNvPr>
+              <p:cNvSpPr txBox="1"/>
+              <p:nvPr/>
+            </p:nvSpPr>
+            <p:spPr>
+              <a:xfrm>
+                <a:off x="971980" y="1248105"/>
+                <a:ext cx="1107996" cy="369332"/>
+              </a:xfrm>
+              <a:prstGeom prst="rect">
+                <a:avLst/>
+              </a:prstGeom>
+              <a:noFill/>
+            </p:spPr>
+            <p:txBody>
+              <a:bodyPr wrap="none" rtlCol="0">
+                <a:spAutoFit/>
+              </a:bodyPr>
+              <a:lstStyle/>
+              <a:p>
+                <a:r>
+                  <a:rPr lang="en-US" altLang="zh-CN" b="1" dirty="0">
+                    <a:latin typeface="Times New Roman" panose="02020603050405020304" pitchFamily="18" charset="0"/>
+                    <a:cs typeface="Times New Roman" panose="02020603050405020304" pitchFamily="18" charset="0"/>
+                  </a:rPr>
+                  <a:t>PyObject</a:t>
+                </a:r>
+                <a:endParaRPr lang="zh-CN" altLang="en-US" b="1" dirty="0">
+                  <a:latin typeface="Times New Roman" panose="02020603050405020304" pitchFamily="18" charset="0"/>
+                  <a:cs typeface="Times New Roman" panose="02020603050405020304" pitchFamily="18" charset="0"/>
+                </a:endParaRPr>
+              </a:p>
+            </p:txBody>
+          </p:sp>
+          <p:cxnSp>
+            <p:nvCxnSpPr>
+              <p:cNvPr id="8" name="直接连接符 7">
+                <a:extLst>
+                  <a:ext uri="{FF2B5EF4-FFF2-40B4-BE49-F238E27FC236}">
+                    <a16:creationId xmlns:a16="http://schemas.microsoft.com/office/drawing/2014/main" id="{E9F9E636-7336-4602-86E4-92D84E3CD2BA}"/>
+                  </a:ext>
+                </a:extLst>
+              </p:cNvPr>
+              <p:cNvCxnSpPr/>
+              <p:nvPr/>
+            </p:nvCxnSpPr>
+            <p:spPr>
+              <a:xfrm>
+                <a:off x="665016" y="2016825"/>
+                <a:ext cx="1721923" cy="0"/>
+              </a:xfrm>
+              <a:prstGeom prst="line">
+                <a:avLst/>
+              </a:prstGeom>
+              <a:ln w="28575"/>
+            </p:spPr>
+            <p:style>
+              <a:lnRef idx="1">
+                <a:schemeClr val="dk1"/>
+              </a:lnRef>
+              <a:fillRef idx="0">
+                <a:schemeClr val="dk1"/>
+              </a:fillRef>
+              <a:effectRef idx="0">
+                <a:schemeClr val="dk1"/>
+              </a:effectRef>
+              <a:fontRef idx="minor">
+                <a:schemeClr val="tx1"/>
+              </a:fontRef>
+            </p:style>
+          </p:cxnSp>
+          <p:sp>
+            <p:nvSpPr>
+              <p:cNvPr id="9" name="文本框 8">
+                <a:extLst>
+                  <a:ext uri="{FF2B5EF4-FFF2-40B4-BE49-F238E27FC236}">
+                    <a16:creationId xmlns:a16="http://schemas.microsoft.com/office/drawing/2014/main" id="{079EB471-30B9-4BC5-B8A6-D860B8938EB5}"/>
+                  </a:ext>
+                </a:extLst>
+              </p:cNvPr>
+              <p:cNvSpPr txBox="1"/>
+              <p:nvPr/>
+            </p:nvSpPr>
+            <p:spPr>
+              <a:xfrm>
+                <a:off x="1023275" y="2212139"/>
+                <a:ext cx="1005403" cy="338554"/>
+              </a:xfrm>
+              <a:prstGeom prst="rect">
+                <a:avLst/>
+              </a:prstGeom>
+              <a:noFill/>
+            </p:spPr>
+            <p:txBody>
+              <a:bodyPr wrap="none" rtlCol="0">
+                <a:spAutoFit/>
+              </a:bodyPr>
+              <a:lstStyle/>
+              <a:p>
+                <a:r>
+                  <a:rPr lang="zh-CN" altLang="en-US" sz="1600" dirty="0">
+                    <a:latin typeface="宋体" panose="02010600030101010101" pitchFamily="2" charset="-122"/>
+                    <a:ea typeface="宋体" panose="02010600030101010101" pitchFamily="2" charset="-122"/>
+                  </a:rPr>
+                  <a:t>实例字段</a:t>
+                </a:r>
+              </a:p>
+            </p:txBody>
+          </p:sp>
+        </p:grpSp>
+        <p:sp>
+          <p:nvSpPr>
+            <p:cNvPr id="17" name="文本框 16">
+              <a:extLst>
+                <a:ext uri="{FF2B5EF4-FFF2-40B4-BE49-F238E27FC236}">
+                  <a16:creationId xmlns:a16="http://schemas.microsoft.com/office/drawing/2014/main" id="{4DE32F67-734D-4578-AA21-F4FE468CC57E}"/>
+                </a:ext>
+              </a:extLst>
+            </p:cNvPr>
+            <p:cNvSpPr txBox="1"/>
+            <p:nvPr/>
+          </p:nvSpPr>
+          <p:spPr>
+            <a:xfrm>
+              <a:off x="333243" y="896498"/>
+              <a:ext cx="2385461" cy="338554"/>
+            </a:xfrm>
+            <a:prstGeom prst="rect">
+              <a:avLst/>
+            </a:prstGeom>
+            <a:noFill/>
+          </p:spPr>
+          <p:txBody>
+            <a:bodyPr wrap="none" rtlCol="0">
+              <a:spAutoFit/>
+            </a:bodyPr>
+            <a:lstStyle/>
+            <a:p>
+              <a:r>
+                <a:rPr lang="en-US" altLang="zh-CN" sz="1600" dirty="0">
+                  <a:latin typeface="Times New Roman" panose="02020603050405020304" pitchFamily="18" charset="0"/>
+                  <a:ea typeface="宋体" panose="02010600030101010101" pitchFamily="2" charset="-122"/>
+                  <a:cs typeface="Times New Roman" panose="02020603050405020304" pitchFamily="18" charset="0"/>
+                </a:rPr>
+                <a:t>Example </a:t>
+              </a:r>
+              <a:r>
+                <a:rPr lang="zh-CN" altLang="en-US" sz="1600" dirty="0">
+                  <a:latin typeface="Times New Roman" panose="02020603050405020304" pitchFamily="18" charset="0"/>
+                  <a:ea typeface="宋体" panose="02010600030101010101" pitchFamily="2" charset="-122"/>
+                  <a:cs typeface="Times New Roman" panose="02020603050405020304" pitchFamily="18" charset="0"/>
+                </a:rPr>
+                <a:t>类型实例对象</a:t>
+              </a:r>
+              <a:r>
+                <a:rPr lang="en-US" altLang="zh-CN" sz="1600" dirty="0">
+                  <a:latin typeface="Times New Roman" panose="02020603050405020304" pitchFamily="18" charset="0"/>
+                  <a:ea typeface="宋体" panose="02010600030101010101" pitchFamily="2" charset="-122"/>
+                  <a:cs typeface="Times New Roman" panose="02020603050405020304" pitchFamily="18" charset="0"/>
+                </a:rPr>
+                <a:t> A</a:t>
+              </a:r>
+              <a:endParaRPr lang="zh-CN" altLang="en-US" sz="1600" dirty="0">
+                <a:latin typeface="Times New Roman" panose="02020603050405020304" pitchFamily="18" charset="0"/>
+                <a:ea typeface="宋体" panose="02010600030101010101" pitchFamily="2" charset="-122"/>
+                <a:cs typeface="Times New Roman" panose="02020603050405020304" pitchFamily="18" charset="0"/>
+              </a:endParaRPr>
+            </a:p>
+          </p:txBody>
+        </p:sp>
+      </p:grpSp>
+      <p:grpSp>
+        <p:nvGrpSpPr>
+          <p:cNvPr id="23" name="组合 22">
+            <a:extLst>
+              <a:ext uri="{FF2B5EF4-FFF2-40B4-BE49-F238E27FC236}">
+                <a16:creationId xmlns:a16="http://schemas.microsoft.com/office/drawing/2014/main" id="{5EF956D7-9C3F-49B2-95B1-F567B7E7A38D}"/>
+              </a:ext>
+            </a:extLst>
+          </p:cNvPr>
+          <p:cNvGrpSpPr/>
+          <p:nvPr/>
+        </p:nvGrpSpPr>
+        <p:grpSpPr>
+          <a:xfrm>
+            <a:off x="331168" y="3063045"/>
+            <a:ext cx="2385461" cy="1815731"/>
+            <a:chOff x="331168" y="3063045"/>
+            <a:chExt cx="2385461" cy="1815731"/>
+          </a:xfrm>
+        </p:grpSpPr>
+        <p:grpSp>
+          <p:nvGrpSpPr>
+            <p:cNvPr id="21" name="组合 20">
+              <a:extLst>
+                <a:ext uri="{FF2B5EF4-FFF2-40B4-BE49-F238E27FC236}">
+                  <a16:creationId xmlns:a16="http://schemas.microsoft.com/office/drawing/2014/main" id="{679FC618-D7D5-4306-B308-AAF27F7D129E}"/>
+                </a:ext>
+              </a:extLst>
+            </p:cNvPr>
+            <p:cNvGrpSpPr/>
+            <p:nvPr/>
+          </p:nvGrpSpPr>
+          <p:grpSpPr>
+            <a:xfrm>
+              <a:off x="665015" y="3395560"/>
+              <a:ext cx="1721924" cy="1483216"/>
+              <a:chOff x="665015" y="3395560"/>
+              <a:chExt cx="1721924" cy="1483216"/>
+            </a:xfrm>
+          </p:grpSpPr>
+          <p:sp>
+            <p:nvSpPr>
+              <p:cNvPr id="11" name="矩形 10">
+                <a:extLst>
+                  <a:ext uri="{FF2B5EF4-FFF2-40B4-BE49-F238E27FC236}">
+                    <a16:creationId xmlns:a16="http://schemas.microsoft.com/office/drawing/2014/main" id="{B96BFF5F-8BDD-418E-BF55-65005FAE3135}"/>
+                  </a:ext>
+                </a:extLst>
+              </p:cNvPr>
+              <p:cNvSpPr/>
+              <p:nvPr/>
+            </p:nvSpPr>
+            <p:spPr>
+              <a:xfrm>
+                <a:off x="665016" y="3400301"/>
+                <a:ext cx="1721923" cy="1478475"/>
+              </a:xfrm>
+              <a:prstGeom prst="rect">
+                <a:avLst/>
+              </a:prstGeom>
+              <a:noFill/>
+              <a:ln w="28575">
+                <a:solidFill>
+                  <a:schemeClr val="tx1"/>
+                </a:solidFill>
+              </a:ln>
+            </p:spPr>
+            <p:style>
+              <a:lnRef idx="2">
+                <a:schemeClr val="accent1">
+                  <a:shade val="50000"/>
+                </a:schemeClr>
+              </a:lnRef>
+              <a:fillRef idx="1">
+                <a:schemeClr val="accent1"/>
+              </a:fillRef>
+              <a:effectRef idx="0">
+                <a:schemeClr val="accent1"/>
+              </a:effectRef>
+              <a:fontRef idx="minor">
+                <a:schemeClr val="lt1"/>
+              </a:fontRef>
+            </p:style>
+            <p:txBody>
+              <a:bodyPr rtlCol="0" anchor="ctr"/>
+              <a:lstStyle/>
+              <a:p>
+                <a:pPr algn="ctr"/>
+                <a:endParaRPr lang="zh-CN" altLang="en-US"/>
+              </a:p>
+            </p:txBody>
+          </p:sp>
+          <p:cxnSp>
+            <p:nvCxnSpPr>
+              <p:cNvPr id="12" name="直接连接符 11">
+                <a:extLst>
+                  <a:ext uri="{FF2B5EF4-FFF2-40B4-BE49-F238E27FC236}">
+                    <a16:creationId xmlns:a16="http://schemas.microsoft.com/office/drawing/2014/main" id="{1AACCD5A-1046-46A3-A6E4-F0D8A985FD4A}"/>
+                  </a:ext>
+                </a:extLst>
+              </p:cNvPr>
+              <p:cNvCxnSpPr/>
+              <p:nvPr/>
+            </p:nvCxnSpPr>
+            <p:spPr>
+              <a:xfrm>
+                <a:off x="665016" y="3780311"/>
+                <a:ext cx="1721923" cy="0"/>
+              </a:xfrm>
+              <a:prstGeom prst="line">
+                <a:avLst/>
+              </a:prstGeom>
+              <a:ln w="28575"/>
+            </p:spPr>
+            <p:style>
+              <a:lnRef idx="1">
+                <a:schemeClr val="dk1"/>
+              </a:lnRef>
+              <a:fillRef idx="0">
+                <a:schemeClr val="dk1"/>
+              </a:fillRef>
+              <a:effectRef idx="0">
+                <a:schemeClr val="dk1"/>
+              </a:effectRef>
+              <a:fontRef idx="minor">
+                <a:schemeClr val="tx1"/>
+              </a:fontRef>
+            </p:style>
+          </p:cxnSp>
+          <p:sp>
+            <p:nvSpPr>
+              <p:cNvPr id="13" name="文本框 12">
+                <a:extLst>
+                  <a:ext uri="{FF2B5EF4-FFF2-40B4-BE49-F238E27FC236}">
+                    <a16:creationId xmlns:a16="http://schemas.microsoft.com/office/drawing/2014/main" id="{A386E7A3-E86F-4112-9594-172009AC92AA}"/>
+                  </a:ext>
+                </a:extLst>
+              </p:cNvPr>
+              <p:cNvSpPr txBox="1"/>
+              <p:nvPr/>
+            </p:nvSpPr>
+            <p:spPr>
+              <a:xfrm>
+                <a:off x="971979" y="3395560"/>
+                <a:ext cx="1107996" cy="369332"/>
+              </a:xfrm>
+              <a:prstGeom prst="rect">
+                <a:avLst/>
+              </a:prstGeom>
+              <a:noFill/>
+            </p:spPr>
+            <p:txBody>
+              <a:bodyPr wrap="none" rtlCol="0">
+                <a:spAutoFit/>
+              </a:bodyPr>
+              <a:lstStyle/>
+              <a:p>
+                <a:r>
+                  <a:rPr lang="en-US" altLang="zh-CN" b="1" dirty="0">
+                    <a:latin typeface="Times New Roman" panose="02020603050405020304" pitchFamily="18" charset="0"/>
+                    <a:cs typeface="Times New Roman" panose="02020603050405020304" pitchFamily="18" charset="0"/>
+                  </a:rPr>
+                  <a:t>PyObject</a:t>
+                </a:r>
+                <a:endParaRPr lang="zh-CN" altLang="en-US" b="1" dirty="0">
+                  <a:latin typeface="Times New Roman" panose="02020603050405020304" pitchFamily="18" charset="0"/>
+                  <a:cs typeface="Times New Roman" panose="02020603050405020304" pitchFamily="18" charset="0"/>
+                </a:endParaRPr>
+              </a:p>
+            </p:txBody>
+          </p:sp>
+          <p:cxnSp>
+            <p:nvCxnSpPr>
+              <p:cNvPr id="14" name="直接连接符 13">
+                <a:extLst>
+                  <a:ext uri="{FF2B5EF4-FFF2-40B4-BE49-F238E27FC236}">
+                    <a16:creationId xmlns:a16="http://schemas.microsoft.com/office/drawing/2014/main" id="{BC20699C-2EC0-4338-9142-5464EABCC1F5}"/>
+                  </a:ext>
+                </a:extLst>
+              </p:cNvPr>
+              <p:cNvCxnSpPr/>
+              <p:nvPr/>
+            </p:nvCxnSpPr>
+            <p:spPr>
+              <a:xfrm>
+                <a:off x="665015" y="4164280"/>
+                <a:ext cx="1721923" cy="0"/>
+              </a:xfrm>
+              <a:prstGeom prst="line">
+                <a:avLst/>
+              </a:prstGeom>
+              <a:ln w="28575"/>
+            </p:spPr>
+            <p:style>
+              <a:lnRef idx="1">
+                <a:schemeClr val="dk1"/>
+              </a:lnRef>
+              <a:fillRef idx="0">
+                <a:schemeClr val="dk1"/>
+              </a:fillRef>
+              <a:effectRef idx="0">
+                <a:schemeClr val="dk1"/>
+              </a:effectRef>
+              <a:fontRef idx="minor">
+                <a:schemeClr val="tx1"/>
+              </a:fontRef>
+            </p:style>
+          </p:cxnSp>
+          <p:sp>
+            <p:nvSpPr>
+              <p:cNvPr id="15" name="文本框 14">
+                <a:extLst>
+                  <a:ext uri="{FF2B5EF4-FFF2-40B4-BE49-F238E27FC236}">
+                    <a16:creationId xmlns:a16="http://schemas.microsoft.com/office/drawing/2014/main" id="{020B849B-10FB-4E0C-B170-C63437470024}"/>
+                  </a:ext>
+                </a:extLst>
+              </p:cNvPr>
+              <p:cNvSpPr txBox="1"/>
+              <p:nvPr/>
+            </p:nvSpPr>
+            <p:spPr>
+              <a:xfrm>
+                <a:off x="1023274" y="4359594"/>
+                <a:ext cx="1005403" cy="338554"/>
+              </a:xfrm>
+              <a:prstGeom prst="rect">
+                <a:avLst/>
+              </a:prstGeom>
+              <a:noFill/>
+            </p:spPr>
+            <p:txBody>
+              <a:bodyPr wrap="none" rtlCol="0">
+                <a:spAutoFit/>
+              </a:bodyPr>
+              <a:lstStyle/>
+              <a:p>
+                <a:r>
+                  <a:rPr lang="zh-CN" altLang="en-US" sz="1600" dirty="0">
+                    <a:latin typeface="宋体" panose="02010600030101010101" pitchFamily="2" charset="-122"/>
+                    <a:ea typeface="宋体" panose="02010600030101010101" pitchFamily="2" charset="-122"/>
+                  </a:rPr>
+                  <a:t>实例字段</a:t>
+                </a:r>
+              </a:p>
+            </p:txBody>
+          </p:sp>
+          <p:sp>
+            <p:nvSpPr>
+              <p:cNvPr id="16" name="文本框 15">
+                <a:extLst>
+                  <a:ext uri="{FF2B5EF4-FFF2-40B4-BE49-F238E27FC236}">
+                    <a16:creationId xmlns:a16="http://schemas.microsoft.com/office/drawing/2014/main" id="{3E91DB49-6CAC-4D10-A3EC-44954C708ED5}"/>
+                  </a:ext>
+                </a:extLst>
+              </p:cNvPr>
+              <p:cNvSpPr txBox="1"/>
+              <p:nvPr/>
+            </p:nvSpPr>
+            <p:spPr>
+              <a:xfrm>
+                <a:off x="984993" y="3808742"/>
+                <a:ext cx="1081963" cy="338554"/>
+              </a:xfrm>
+              <a:prstGeom prst="rect">
+                <a:avLst/>
+              </a:prstGeom>
+              <a:noFill/>
+            </p:spPr>
+            <p:txBody>
+              <a:bodyPr wrap="none" rtlCol="0">
+                <a:spAutoFit/>
+              </a:bodyPr>
+              <a:lstStyle/>
+              <a:p>
+                <a:r>
+                  <a:rPr lang="en-US" altLang="zh-CN" sz="1600" dirty="0">
+                    <a:latin typeface="Times New Roman" panose="02020603050405020304" pitchFamily="18" charset="0"/>
+                    <a:ea typeface="宋体" panose="02010600030101010101" pitchFamily="2" charset="-122"/>
+                    <a:cs typeface="Times New Roman" panose="02020603050405020304" pitchFamily="18" charset="0"/>
+                  </a:rPr>
+                  <a:t>MarkWord</a:t>
+                </a:r>
+                <a:endParaRPr lang="zh-CN" altLang="en-US" sz="1600" dirty="0">
+                  <a:latin typeface="Times New Roman" panose="02020603050405020304" pitchFamily="18" charset="0"/>
+                  <a:ea typeface="宋体" panose="02010600030101010101" pitchFamily="2" charset="-122"/>
+                  <a:cs typeface="Times New Roman" panose="02020603050405020304" pitchFamily="18" charset="0"/>
+                </a:endParaRPr>
+              </a:p>
+            </p:txBody>
+          </p:sp>
+        </p:grpSp>
+        <p:sp>
+          <p:nvSpPr>
+            <p:cNvPr id="19" name="文本框 18">
+              <a:extLst>
+                <a:ext uri="{FF2B5EF4-FFF2-40B4-BE49-F238E27FC236}">
+                  <a16:creationId xmlns:a16="http://schemas.microsoft.com/office/drawing/2014/main" id="{16F98883-49D7-4963-A5E6-A5677C710272}"/>
+                </a:ext>
+              </a:extLst>
+            </p:cNvPr>
+            <p:cNvSpPr txBox="1"/>
+            <p:nvPr/>
+          </p:nvSpPr>
+          <p:spPr>
+            <a:xfrm>
+              <a:off x="331168" y="3063045"/>
+              <a:ext cx="2385461" cy="338554"/>
+            </a:xfrm>
+            <a:prstGeom prst="rect">
+              <a:avLst/>
+            </a:prstGeom>
+            <a:noFill/>
+          </p:spPr>
+          <p:txBody>
+            <a:bodyPr wrap="none" rtlCol="0">
+              <a:spAutoFit/>
+            </a:bodyPr>
+            <a:lstStyle/>
+            <a:p>
+              <a:r>
+                <a:rPr lang="en-US" altLang="zh-CN" sz="1600" dirty="0">
+                  <a:latin typeface="Times New Roman" panose="02020603050405020304" pitchFamily="18" charset="0"/>
+                  <a:ea typeface="宋体" panose="02010600030101010101" pitchFamily="2" charset="-122"/>
+                  <a:cs typeface="Times New Roman" panose="02020603050405020304" pitchFamily="18" charset="0"/>
+                </a:rPr>
+                <a:t>Example </a:t>
+              </a:r>
+              <a:r>
+                <a:rPr lang="zh-CN" altLang="en-US" sz="1600" dirty="0">
+                  <a:latin typeface="Times New Roman" panose="02020603050405020304" pitchFamily="18" charset="0"/>
+                  <a:ea typeface="宋体" panose="02010600030101010101" pitchFamily="2" charset="-122"/>
+                  <a:cs typeface="Times New Roman" panose="02020603050405020304" pitchFamily="18" charset="0"/>
+                </a:rPr>
+                <a:t>类型实例对象</a:t>
+              </a:r>
+              <a:r>
+                <a:rPr lang="en-US" altLang="zh-CN" sz="1600" dirty="0">
+                  <a:latin typeface="Times New Roman" panose="02020603050405020304" pitchFamily="18" charset="0"/>
+                  <a:ea typeface="宋体" panose="02010600030101010101" pitchFamily="2" charset="-122"/>
+                  <a:cs typeface="Times New Roman" panose="02020603050405020304" pitchFamily="18" charset="0"/>
+                </a:rPr>
+                <a:t> B</a:t>
+              </a:r>
+              <a:endParaRPr lang="zh-CN" altLang="en-US" sz="1600" dirty="0">
+                <a:latin typeface="Times New Roman" panose="02020603050405020304" pitchFamily="18" charset="0"/>
+                <a:ea typeface="宋体" panose="02010600030101010101" pitchFamily="2" charset="-122"/>
+                <a:cs typeface="Times New Roman" panose="02020603050405020304" pitchFamily="18" charset="0"/>
+              </a:endParaRPr>
+            </a:p>
+          </p:txBody>
+        </p:sp>
+      </p:grpSp>
+      <p:grpSp>
+        <p:nvGrpSpPr>
+          <p:cNvPr id="53" name="组合 52">
+            <a:extLst>
+              <a:ext uri="{FF2B5EF4-FFF2-40B4-BE49-F238E27FC236}">
+                <a16:creationId xmlns:a16="http://schemas.microsoft.com/office/drawing/2014/main" id="{1866AA9A-B0FE-4A81-AADB-105A7B057B1C}"/>
+              </a:ext>
+            </a:extLst>
+          </p:cNvPr>
+          <p:cNvGrpSpPr/>
+          <p:nvPr/>
+        </p:nvGrpSpPr>
+        <p:grpSpPr>
+          <a:xfrm>
+            <a:off x="3873548" y="2361541"/>
+            <a:ext cx="1907895" cy="1838399"/>
+            <a:chOff x="4388955" y="2170107"/>
+            <a:chExt cx="1907895" cy="1838399"/>
+          </a:xfrm>
+        </p:grpSpPr>
+        <p:sp>
+          <p:nvSpPr>
+            <p:cNvPr id="42" name="文本框 41">
+              <a:extLst>
+                <a:ext uri="{FF2B5EF4-FFF2-40B4-BE49-F238E27FC236}">
+                  <a16:creationId xmlns:a16="http://schemas.microsoft.com/office/drawing/2014/main" id="{9FD5F8C3-4CC1-4579-9A8F-87037B7A7004}"/>
+                </a:ext>
+              </a:extLst>
+            </p:cNvPr>
+            <p:cNvSpPr txBox="1"/>
+            <p:nvPr/>
+          </p:nvSpPr>
+          <p:spPr>
+            <a:xfrm>
+              <a:off x="4698227" y="2573759"/>
+              <a:ext cx="1144865" cy="338554"/>
+            </a:xfrm>
+            <a:prstGeom prst="rect">
+              <a:avLst/>
+            </a:prstGeom>
+            <a:noFill/>
+          </p:spPr>
+          <p:txBody>
+            <a:bodyPr wrap="none" rtlCol="0">
+              <a:spAutoFit/>
+            </a:bodyPr>
+            <a:lstStyle/>
+            <a:p>
+              <a:r>
+                <a:rPr lang="en-US" altLang="zh-CN" sz="1600" dirty="0">
+                  <a:latin typeface="Times New Roman" panose="02020603050405020304" pitchFamily="18" charset="0"/>
+                  <a:ea typeface="宋体" panose="02010600030101010101" pitchFamily="2" charset="-122"/>
+                  <a:cs typeface="Times New Roman" panose="02020603050405020304" pitchFamily="18" charset="0"/>
+                </a:rPr>
+                <a:t>type_object</a:t>
+              </a:r>
+              <a:endParaRPr lang="zh-CN" altLang="en-US" sz="1600" dirty="0">
+                <a:latin typeface="Times New Roman" panose="02020603050405020304" pitchFamily="18" charset="0"/>
+                <a:ea typeface="宋体" panose="02010600030101010101" pitchFamily="2" charset="-122"/>
+                <a:cs typeface="Times New Roman" panose="02020603050405020304" pitchFamily="18" charset="0"/>
+              </a:endParaRPr>
+            </a:p>
+          </p:txBody>
+        </p:sp>
+        <p:grpSp>
+          <p:nvGrpSpPr>
+            <p:cNvPr id="44" name="组合 43">
+              <a:extLst>
+                <a:ext uri="{FF2B5EF4-FFF2-40B4-BE49-F238E27FC236}">
+                  <a16:creationId xmlns:a16="http://schemas.microsoft.com/office/drawing/2014/main" id="{6ED47EC5-F638-4DF3-8447-4A78598990E0}"/>
+                </a:ext>
+              </a:extLst>
+            </p:cNvPr>
+            <p:cNvGrpSpPr/>
+            <p:nvPr/>
+          </p:nvGrpSpPr>
+          <p:grpSpPr>
+            <a:xfrm>
+              <a:off x="4388955" y="2170107"/>
+              <a:ext cx="1907895" cy="1838399"/>
+              <a:chOff x="644269" y="1252846"/>
+              <a:chExt cx="1907895" cy="1136578"/>
+            </a:xfrm>
+          </p:grpSpPr>
+          <p:sp>
+            <p:nvSpPr>
+              <p:cNvPr id="46" name="矩形 45">
+                <a:extLst>
+                  <a:ext uri="{FF2B5EF4-FFF2-40B4-BE49-F238E27FC236}">
+                    <a16:creationId xmlns:a16="http://schemas.microsoft.com/office/drawing/2014/main" id="{88B0AD57-3F49-43EC-93FF-5BBF2740FF08}"/>
+                  </a:ext>
+                </a:extLst>
+              </p:cNvPr>
+              <p:cNvSpPr/>
+              <p:nvPr/>
+            </p:nvSpPr>
+            <p:spPr>
+              <a:xfrm>
+                <a:off x="665017" y="1252846"/>
+                <a:ext cx="1866406" cy="1136577"/>
+              </a:xfrm>
+              <a:prstGeom prst="rect">
+                <a:avLst/>
+              </a:prstGeom>
+              <a:noFill/>
+              <a:ln w="28575">
+                <a:solidFill>
+                  <a:schemeClr val="tx1"/>
+                </a:solidFill>
+              </a:ln>
+            </p:spPr>
+            <p:style>
+              <a:lnRef idx="2">
+                <a:schemeClr val="accent1">
+                  <a:shade val="50000"/>
+                </a:schemeClr>
+              </a:lnRef>
+              <a:fillRef idx="1">
+                <a:schemeClr val="accent1"/>
+              </a:fillRef>
+              <a:effectRef idx="0">
+                <a:schemeClr val="accent1"/>
+              </a:effectRef>
+              <a:fontRef idx="minor">
+                <a:schemeClr val="lt1"/>
+              </a:fontRef>
+            </p:style>
+            <p:txBody>
+              <a:bodyPr rtlCol="0" anchor="ctr"/>
+              <a:lstStyle/>
+              <a:p>
+                <a:pPr algn="ctr"/>
+                <a:endParaRPr lang="zh-CN" altLang="en-US" dirty="0"/>
+              </a:p>
+            </p:txBody>
+          </p:sp>
+          <p:cxnSp>
+            <p:nvCxnSpPr>
+              <p:cNvPr id="47" name="直接连接符 46">
+                <a:extLst>
+                  <a:ext uri="{FF2B5EF4-FFF2-40B4-BE49-F238E27FC236}">
+                    <a16:creationId xmlns:a16="http://schemas.microsoft.com/office/drawing/2014/main" id="{689AF57C-5E6B-49C2-89FD-E672EA96EB0B}"/>
+                  </a:ext>
+                </a:extLst>
+              </p:cNvPr>
+              <p:cNvCxnSpPr>
+                <a:cxnSpLocks/>
+              </p:cNvCxnSpPr>
+              <p:nvPr/>
+            </p:nvCxnSpPr>
+            <p:spPr>
+              <a:xfrm>
+                <a:off x="665011" y="1488143"/>
+                <a:ext cx="1866412" cy="0"/>
+              </a:xfrm>
+              <a:prstGeom prst="line">
+                <a:avLst/>
+              </a:prstGeom>
+              <a:ln w="28575"/>
+            </p:spPr>
+            <p:style>
+              <a:lnRef idx="1">
+                <a:schemeClr val="dk1"/>
+              </a:lnRef>
+              <a:fillRef idx="0">
+                <a:schemeClr val="dk1"/>
+              </a:fillRef>
+              <a:effectRef idx="0">
+                <a:schemeClr val="dk1"/>
+              </a:effectRef>
+              <a:fontRef idx="minor">
+                <a:schemeClr val="tx1"/>
+              </a:fontRef>
+            </p:style>
+          </p:cxnSp>
+          <p:sp>
+            <p:nvSpPr>
+              <p:cNvPr id="48" name="文本框 47">
+                <a:extLst>
+                  <a:ext uri="{FF2B5EF4-FFF2-40B4-BE49-F238E27FC236}">
+                    <a16:creationId xmlns:a16="http://schemas.microsoft.com/office/drawing/2014/main" id="{2429EAAD-D07F-405C-A9D0-B7CCB236E76C}"/>
+                  </a:ext>
+                </a:extLst>
+              </p:cNvPr>
+              <p:cNvSpPr txBox="1"/>
+              <p:nvPr/>
+            </p:nvSpPr>
+            <p:spPr>
+              <a:xfrm>
+                <a:off x="1164337" y="1260171"/>
+                <a:ext cx="723275" cy="369332"/>
+              </a:xfrm>
+              <a:prstGeom prst="rect">
+                <a:avLst/>
+              </a:prstGeom>
+              <a:noFill/>
+            </p:spPr>
+            <p:txBody>
+              <a:bodyPr wrap="none" rtlCol="0">
+                <a:spAutoFit/>
+              </a:bodyPr>
+              <a:lstStyle/>
+              <a:p>
+                <a:r>
+                  <a:rPr lang="en-US" altLang="zh-CN" b="1" dirty="0">
+                    <a:latin typeface="Times New Roman" panose="02020603050405020304" pitchFamily="18" charset="0"/>
+                    <a:cs typeface="Times New Roman" panose="02020603050405020304" pitchFamily="18" charset="0"/>
+                  </a:rPr>
+                  <a:t>Klass</a:t>
+                </a:r>
+                <a:endParaRPr lang="zh-CN" altLang="en-US" b="1" dirty="0">
+                  <a:latin typeface="Times New Roman" panose="02020603050405020304" pitchFamily="18" charset="0"/>
+                  <a:cs typeface="Times New Roman" panose="02020603050405020304" pitchFamily="18" charset="0"/>
+                </a:endParaRPr>
+              </a:p>
+            </p:txBody>
+          </p:sp>
+          <p:cxnSp>
+            <p:nvCxnSpPr>
+              <p:cNvPr id="49" name="直接连接符 48">
+                <a:extLst>
+                  <a:ext uri="{FF2B5EF4-FFF2-40B4-BE49-F238E27FC236}">
+                    <a16:creationId xmlns:a16="http://schemas.microsoft.com/office/drawing/2014/main" id="{67D9BA3D-5F7A-4367-8EC0-D84F3DDF2EA4}"/>
+                  </a:ext>
+                </a:extLst>
+              </p:cNvPr>
+              <p:cNvCxnSpPr>
+                <a:cxnSpLocks/>
+              </p:cNvCxnSpPr>
+              <p:nvPr/>
+            </p:nvCxnSpPr>
+            <p:spPr>
+              <a:xfrm>
+                <a:off x="665011" y="1706466"/>
+                <a:ext cx="1866412" cy="0"/>
+              </a:xfrm>
+              <a:prstGeom prst="line">
+                <a:avLst/>
+              </a:prstGeom>
+              <a:ln w="28575"/>
+            </p:spPr>
+            <p:style>
+              <a:lnRef idx="1">
+                <a:schemeClr val="dk1"/>
+              </a:lnRef>
+              <a:fillRef idx="0">
+                <a:schemeClr val="dk1"/>
+              </a:fillRef>
+              <a:effectRef idx="0">
+                <a:schemeClr val="dk1"/>
+              </a:effectRef>
+              <a:fontRef idx="minor">
+                <a:schemeClr val="tx1"/>
+              </a:fontRef>
+            </p:style>
+          </p:cxnSp>
+          <p:sp>
+            <p:nvSpPr>
+              <p:cNvPr id="50" name="文本框 49">
+                <a:extLst>
+                  <a:ext uri="{FF2B5EF4-FFF2-40B4-BE49-F238E27FC236}">
+                    <a16:creationId xmlns:a16="http://schemas.microsoft.com/office/drawing/2014/main" id="{2D20532A-72DF-4A32-A872-749B3F25FD4B}"/>
+                  </a:ext>
+                </a:extLst>
+              </p:cNvPr>
+              <p:cNvSpPr txBox="1"/>
+              <p:nvPr/>
+            </p:nvSpPr>
+            <p:spPr>
+              <a:xfrm>
+                <a:off x="644269" y="1723441"/>
+                <a:ext cx="1907895" cy="665983"/>
+              </a:xfrm>
+              <a:prstGeom prst="rect">
+                <a:avLst/>
+              </a:prstGeom>
+              <a:noFill/>
+            </p:spPr>
+            <p:txBody>
+              <a:bodyPr wrap="none" rtlCol="0">
+                <a:spAutoFit/>
+              </a:bodyPr>
+              <a:lstStyle/>
+              <a:p>
+                <a:r>
+                  <a:rPr lang="zh-CN" altLang="en-US" sz="1600" dirty="0">
+                    <a:latin typeface="Times New Roman" panose="02020603050405020304" pitchFamily="18" charset="0"/>
+                    <a:ea typeface="宋体" panose="02010600030101010101" pitchFamily="2" charset="-122"/>
+                    <a:cs typeface="Times New Roman" panose="02020603050405020304" pitchFamily="18" charset="0"/>
+                  </a:rPr>
+                  <a:t>类型名称：</a:t>
+                </a:r>
+                <a:r>
+                  <a:rPr lang="en-US" altLang="zh-CN" sz="1600" dirty="0">
+                    <a:latin typeface="Times New Roman" panose="02020603050405020304" pitchFamily="18" charset="0"/>
+                    <a:ea typeface="宋体" panose="02010600030101010101" pitchFamily="2" charset="-122"/>
+                    <a:cs typeface="Times New Roman" panose="02020603050405020304" pitchFamily="18" charset="0"/>
+                  </a:rPr>
+                  <a:t>example</a:t>
+                </a:r>
+              </a:p>
+              <a:p>
+                <a:r>
+                  <a:rPr lang="zh-CN" altLang="en-US" sz="1600" dirty="0">
+                    <a:latin typeface="Times New Roman" panose="02020603050405020304" pitchFamily="18" charset="0"/>
+                    <a:ea typeface="宋体" panose="02010600030101010101" pitchFamily="2" charset="-122"/>
+                    <a:cs typeface="Times New Roman" panose="02020603050405020304" pitchFamily="18" charset="0"/>
+                  </a:rPr>
+                  <a:t>行为分派：</a:t>
+                </a:r>
+                <a:r>
+                  <a:rPr lang="en-US" altLang="zh-CN" sz="1600" dirty="0">
+                    <a:latin typeface="Times New Roman" panose="02020603050405020304" pitchFamily="18" charset="0"/>
+                    <a:ea typeface="宋体" panose="02010600030101010101" pitchFamily="2" charset="-122"/>
+                    <a:cs typeface="Times New Roman" panose="02020603050405020304" pitchFamily="18" charset="0"/>
+                  </a:rPr>
+                  <a:t>…</a:t>
+                </a:r>
+              </a:p>
+              <a:p>
+                <a:r>
+                  <a:rPr lang="zh-CN" altLang="en-US" sz="1600" dirty="0">
+                    <a:latin typeface="Times New Roman" panose="02020603050405020304" pitchFamily="18" charset="0"/>
+                    <a:ea typeface="宋体" panose="02010600030101010101" pitchFamily="2" charset="-122"/>
+                    <a:cs typeface="Times New Roman" panose="02020603050405020304" pitchFamily="18" charset="0"/>
+                  </a:rPr>
+                  <a:t>父类关系：</a:t>
+                </a:r>
+                <a:r>
+                  <a:rPr lang="en-US" altLang="zh-CN" sz="1600" dirty="0">
+                    <a:latin typeface="Times New Roman" panose="02020603050405020304" pitchFamily="18" charset="0"/>
+                    <a:ea typeface="宋体" panose="02010600030101010101" pitchFamily="2" charset="-122"/>
+                    <a:cs typeface="Times New Roman" panose="02020603050405020304" pitchFamily="18" charset="0"/>
+                  </a:rPr>
+                  <a:t>…</a:t>
+                </a:r>
+              </a:p>
+              <a:p>
+                <a:r>
+                  <a:rPr lang="zh-CN" altLang="en-US" sz="1600" dirty="0">
+                    <a:latin typeface="Times New Roman" panose="02020603050405020304" pitchFamily="18" charset="0"/>
+                    <a:ea typeface="宋体" panose="02010600030101010101" pitchFamily="2" charset="-122"/>
+                    <a:cs typeface="Times New Roman" panose="02020603050405020304" pitchFamily="18" charset="0"/>
+                  </a:rPr>
+                  <a:t>类型特征：</a:t>
+                </a:r>
+                <a:r>
+                  <a:rPr lang="en-US" altLang="zh-CN" sz="1600" dirty="0">
+                    <a:latin typeface="Times New Roman" panose="02020603050405020304" pitchFamily="18" charset="0"/>
+                    <a:ea typeface="宋体" panose="02010600030101010101" pitchFamily="2" charset="-122"/>
+                    <a:cs typeface="Times New Roman" panose="02020603050405020304" pitchFamily="18" charset="0"/>
+                  </a:rPr>
+                  <a:t>…</a:t>
+                </a:r>
+              </a:p>
+            </p:txBody>
+          </p:sp>
+        </p:grpSp>
+      </p:grpSp>
+      <p:sp>
+        <p:nvSpPr>
+          <p:cNvPr id="45" name="文本框 44">
+            <a:extLst>
+              <a:ext uri="{FF2B5EF4-FFF2-40B4-BE49-F238E27FC236}">
+                <a16:creationId xmlns:a16="http://schemas.microsoft.com/office/drawing/2014/main" id="{7441FFBA-6700-49C8-90F2-E2873D703B0C}"/>
+              </a:ext>
+            </a:extLst>
+          </p:cNvPr>
+          <p:cNvSpPr txBox="1"/>
+          <p:nvPr/>
+        </p:nvSpPr>
+        <p:spPr>
+          <a:xfrm>
+            <a:off x="3662753" y="2011097"/>
+            <a:ext cx="2329484" cy="338554"/>
+          </a:xfrm>
+          <a:prstGeom prst="rect">
+            <a:avLst/>
+          </a:prstGeom>
+          <a:noFill/>
+        </p:spPr>
+        <p:txBody>
+          <a:bodyPr wrap="none" rtlCol="0">
+            <a:spAutoFit/>
+          </a:bodyPr>
+          <a:lstStyle/>
+          <a:p>
+            <a:r>
+              <a:rPr lang="en-US" altLang="zh-CN" sz="1600" dirty="0">
+                <a:latin typeface="Times New Roman" panose="02020603050405020304" pitchFamily="18" charset="0"/>
+                <a:ea typeface="宋体" panose="02010600030101010101" pitchFamily="2" charset="-122"/>
+                <a:cs typeface="Times New Roman" panose="02020603050405020304" pitchFamily="18" charset="0"/>
+              </a:rPr>
+              <a:t>Example </a:t>
+            </a:r>
+            <a:r>
+              <a:rPr lang="zh-CN" altLang="en-US" sz="1600" dirty="0">
+                <a:latin typeface="Times New Roman" panose="02020603050405020304" pitchFamily="18" charset="0"/>
+                <a:ea typeface="宋体" panose="02010600030101010101" pitchFamily="2" charset="-122"/>
+                <a:cs typeface="Times New Roman" panose="02020603050405020304" pitchFamily="18" charset="0"/>
+              </a:rPr>
+              <a:t>类型</a:t>
+            </a:r>
+            <a:r>
+              <a:rPr lang="en-US" altLang="zh-CN" sz="1600" dirty="0">
+                <a:latin typeface="Times New Roman" panose="02020603050405020304" pitchFamily="18" charset="0"/>
+                <a:ea typeface="宋体" panose="02010600030101010101" pitchFamily="2" charset="-122"/>
+                <a:cs typeface="Times New Roman" panose="02020603050405020304" pitchFamily="18" charset="0"/>
+              </a:rPr>
+              <a:t> Klass </a:t>
+            </a:r>
+            <a:r>
+              <a:rPr lang="zh-CN" altLang="en-US" sz="1600" dirty="0">
+                <a:latin typeface="Times New Roman" panose="02020603050405020304" pitchFamily="18" charset="0"/>
+                <a:ea typeface="宋体" panose="02010600030101010101" pitchFamily="2" charset="-122"/>
+                <a:cs typeface="Times New Roman" panose="02020603050405020304" pitchFamily="18" charset="0"/>
+              </a:rPr>
+              <a:t>实体</a:t>
+            </a:r>
+          </a:p>
+        </p:txBody>
+      </p:sp>
+      <p:cxnSp>
+        <p:nvCxnSpPr>
+          <p:cNvPr id="57" name="连接符: 曲线 56">
+            <a:extLst>
+              <a:ext uri="{FF2B5EF4-FFF2-40B4-BE49-F238E27FC236}">
+                <a16:creationId xmlns:a16="http://schemas.microsoft.com/office/drawing/2014/main" id="{407D7055-9EF9-4580-8AA9-A11F9B825731}"/>
+              </a:ext>
+            </a:extLst>
+          </p:cNvPr>
+          <p:cNvCxnSpPr>
+            <a:cxnSpLocks/>
+          </p:cNvCxnSpPr>
+          <p:nvPr/>
+        </p:nvCxnSpPr>
+        <p:spPr>
+          <a:xfrm>
+            <a:off x="2397316" y="1830564"/>
+            <a:ext cx="1501748" cy="1347844"/>
+          </a:xfrm>
+          <a:prstGeom prst="curvedConnector3">
+            <a:avLst>
+              <a:gd name="adj1" fmla="val 50000"/>
+            </a:avLst>
+          </a:prstGeom>
+          <a:ln w="28575">
+            <a:solidFill>
+              <a:schemeClr val="tx1"/>
+            </a:solidFill>
+            <a:tailEnd type="triangle"/>
+          </a:ln>
+        </p:spPr>
+        <p:style>
+          <a:lnRef idx="1">
+            <a:schemeClr val="accent1"/>
+          </a:lnRef>
+          <a:fillRef idx="0">
+            <a:schemeClr val="accent1"/>
+          </a:fillRef>
+          <a:effectRef idx="0">
+            <a:schemeClr val="accent1"/>
+          </a:effectRef>
+          <a:fontRef idx="minor">
+            <a:schemeClr val="tx1"/>
+          </a:fontRef>
+        </p:style>
+      </p:cxnSp>
+      <p:cxnSp>
+        <p:nvCxnSpPr>
+          <p:cNvPr id="62" name="连接符: 曲线 61">
+            <a:extLst>
+              <a:ext uri="{FF2B5EF4-FFF2-40B4-BE49-F238E27FC236}">
+                <a16:creationId xmlns:a16="http://schemas.microsoft.com/office/drawing/2014/main" id="{AAC1EC3B-1867-411A-9BE3-880EE5D043DA}"/>
+              </a:ext>
+            </a:extLst>
+          </p:cNvPr>
+          <p:cNvCxnSpPr>
+            <a:cxnSpLocks/>
+          </p:cNvCxnSpPr>
+          <p:nvPr/>
+        </p:nvCxnSpPr>
+        <p:spPr>
+          <a:xfrm flipV="1">
+            <a:off x="2397098" y="3420203"/>
+            <a:ext cx="1491384" cy="557817"/>
+          </a:xfrm>
+          <a:prstGeom prst="curvedConnector3">
+            <a:avLst>
+              <a:gd name="adj1" fmla="val 50000"/>
+            </a:avLst>
+          </a:prstGeom>
+          <a:ln w="28575">
+            <a:solidFill>
+              <a:schemeClr val="tx1"/>
+            </a:solidFill>
+            <a:tailEnd type="triangle"/>
+          </a:ln>
+        </p:spPr>
+        <p:style>
+          <a:lnRef idx="1">
+            <a:schemeClr val="accent1"/>
+          </a:lnRef>
+          <a:fillRef idx="0">
+            <a:schemeClr val="accent1"/>
+          </a:fillRef>
+          <a:effectRef idx="0">
+            <a:schemeClr val="accent1"/>
+          </a:effectRef>
+          <a:fontRef idx="minor">
+            <a:schemeClr val="tx1"/>
+          </a:fontRef>
+        </p:style>
+      </p:cxnSp>
+      <p:sp>
+        <p:nvSpPr>
+          <p:cNvPr id="67" name="椭圆 66">
+            <a:extLst>
+              <a:ext uri="{FF2B5EF4-FFF2-40B4-BE49-F238E27FC236}">
+                <a16:creationId xmlns:a16="http://schemas.microsoft.com/office/drawing/2014/main" id="{375CDB7E-5B84-44E5-A534-E42BDBA9D8F0}"/>
+              </a:ext>
+            </a:extLst>
+          </p:cNvPr>
+          <p:cNvSpPr/>
+          <p:nvPr/>
+        </p:nvSpPr>
+        <p:spPr>
+          <a:xfrm>
+            <a:off x="2318651" y="1768488"/>
+            <a:ext cx="136566" cy="136566"/>
+          </a:xfrm>
+          <a:prstGeom prst="ellipse">
+            <a:avLst/>
+          </a:prstGeom>
+          <a:solidFill>
+            <a:schemeClr val="tx1"/>
+          </a:solidFill>
+          <a:ln>
+            <a:noFill/>
+          </a:ln>
+        </p:spPr>
+        <p:style>
+          <a:lnRef idx="2">
+            <a:schemeClr val="accent1">
+              <a:shade val="50000"/>
+            </a:schemeClr>
+          </a:lnRef>
+          <a:fillRef idx="1">
+            <a:schemeClr val="accent1"/>
+          </a:fillRef>
+          <a:effectRef idx="0">
+            <a:schemeClr val="accent1"/>
+          </a:effectRef>
+          <a:fontRef idx="minor">
+            <a:schemeClr val="lt1"/>
+          </a:fontRef>
+        </p:style>
+        <p:txBody>
+          <a:bodyPr rtlCol="0" anchor="ctr"/>
+          <a:lstStyle/>
+          <a:p>
+            <a:pPr algn="ctr"/>
+            <a:endParaRPr lang="zh-CN" altLang="en-US"/>
+          </a:p>
+        </p:txBody>
+      </p:sp>
+      <p:sp>
+        <p:nvSpPr>
+          <p:cNvPr id="68" name="椭圆 67">
+            <a:extLst>
+              <a:ext uri="{FF2B5EF4-FFF2-40B4-BE49-F238E27FC236}">
+                <a16:creationId xmlns:a16="http://schemas.microsoft.com/office/drawing/2014/main" id="{FF4DF6AA-9DED-48E3-9451-156B158EBD08}"/>
+              </a:ext>
+            </a:extLst>
+          </p:cNvPr>
+          <p:cNvSpPr/>
+          <p:nvPr/>
+        </p:nvSpPr>
+        <p:spPr>
+          <a:xfrm>
+            <a:off x="2318227" y="3901302"/>
+            <a:ext cx="136566" cy="136566"/>
+          </a:xfrm>
+          <a:prstGeom prst="ellipse">
+            <a:avLst/>
+          </a:prstGeom>
+          <a:solidFill>
+            <a:schemeClr val="tx1"/>
+          </a:solidFill>
+          <a:ln>
+            <a:noFill/>
+          </a:ln>
+        </p:spPr>
+        <p:style>
+          <a:lnRef idx="2">
+            <a:schemeClr val="accent1">
+              <a:shade val="50000"/>
+            </a:schemeClr>
+          </a:lnRef>
+          <a:fillRef idx="1">
+            <a:schemeClr val="accent1"/>
+          </a:fillRef>
+          <a:effectRef idx="0">
+            <a:schemeClr val="accent1"/>
+          </a:effectRef>
+          <a:fontRef idx="minor">
+            <a:schemeClr val="lt1"/>
+          </a:fontRef>
+        </p:style>
+        <p:txBody>
+          <a:bodyPr rtlCol="0" anchor="ctr"/>
+          <a:lstStyle/>
+          <a:p>
+            <a:pPr algn="ctr"/>
+            <a:endParaRPr lang="zh-CN" altLang="en-US"/>
+          </a:p>
+        </p:txBody>
+      </p:sp>
+      <p:sp>
+        <p:nvSpPr>
+          <p:cNvPr id="71" name="文本框 70">
+            <a:extLst>
+              <a:ext uri="{FF2B5EF4-FFF2-40B4-BE49-F238E27FC236}">
+                <a16:creationId xmlns:a16="http://schemas.microsoft.com/office/drawing/2014/main" id="{2F880B74-7B97-4E14-A17D-A2331D29CC14}"/>
+              </a:ext>
+            </a:extLst>
+          </p:cNvPr>
+          <p:cNvSpPr txBox="1"/>
+          <p:nvPr/>
+        </p:nvSpPr>
+        <p:spPr>
+          <a:xfrm>
+            <a:off x="6293522" y="2080939"/>
+            <a:ext cx="1838965" cy="338554"/>
+          </a:xfrm>
+          <a:prstGeom prst="rect">
+            <a:avLst/>
+          </a:prstGeom>
+          <a:noFill/>
+        </p:spPr>
+        <p:txBody>
+          <a:bodyPr wrap="none" rtlCol="0">
+            <a:spAutoFit/>
+          </a:bodyPr>
+          <a:lstStyle/>
+          <a:p>
+            <a:r>
+              <a:rPr lang="en-US" altLang="zh-CN" sz="1600" dirty="0">
+                <a:latin typeface="Times New Roman" panose="02020603050405020304" pitchFamily="18" charset="0"/>
+                <a:ea typeface="宋体" panose="02010600030101010101" pitchFamily="2" charset="-122"/>
+                <a:cs typeface="Times New Roman" panose="02020603050405020304" pitchFamily="18" charset="0"/>
+              </a:rPr>
+              <a:t>Example </a:t>
+            </a:r>
+            <a:r>
+              <a:rPr lang="zh-CN" altLang="en-US" sz="1600" dirty="0">
+                <a:latin typeface="Times New Roman" panose="02020603050405020304" pitchFamily="18" charset="0"/>
+                <a:ea typeface="宋体" panose="02010600030101010101" pitchFamily="2" charset="-122"/>
+                <a:cs typeface="Times New Roman" panose="02020603050405020304" pitchFamily="18" charset="0"/>
+              </a:rPr>
+              <a:t>类型对象</a:t>
+            </a:r>
+          </a:p>
+        </p:txBody>
+      </p:sp>
+      <p:grpSp>
+        <p:nvGrpSpPr>
+          <p:cNvPr id="80" name="组合 79">
+            <a:extLst>
+              <a:ext uri="{FF2B5EF4-FFF2-40B4-BE49-F238E27FC236}">
+                <a16:creationId xmlns:a16="http://schemas.microsoft.com/office/drawing/2014/main" id="{A521F215-E110-4BAE-9DDD-8B84AA3D6B0E}"/>
+              </a:ext>
+            </a:extLst>
+          </p:cNvPr>
+          <p:cNvGrpSpPr/>
+          <p:nvPr/>
+        </p:nvGrpSpPr>
+        <p:grpSpPr>
+          <a:xfrm>
+            <a:off x="6340028" y="2437191"/>
+            <a:ext cx="1733945" cy="1482433"/>
+            <a:chOff x="6760691" y="751185"/>
+            <a:chExt cx="1733945" cy="1482433"/>
+          </a:xfrm>
+        </p:grpSpPr>
+        <p:grpSp>
+          <p:nvGrpSpPr>
+            <p:cNvPr id="70" name="组合 69">
+              <a:extLst>
+                <a:ext uri="{FF2B5EF4-FFF2-40B4-BE49-F238E27FC236}">
+                  <a16:creationId xmlns:a16="http://schemas.microsoft.com/office/drawing/2014/main" id="{198D16BC-FB79-4B26-904D-3EB28BAEFF0A}"/>
+                </a:ext>
+              </a:extLst>
+            </p:cNvPr>
+            <p:cNvGrpSpPr/>
+            <p:nvPr/>
+          </p:nvGrpSpPr>
+          <p:grpSpPr>
+            <a:xfrm>
+              <a:off x="6772712" y="751185"/>
+              <a:ext cx="1721924" cy="1482433"/>
+              <a:chOff x="665015" y="3396343"/>
+              <a:chExt cx="1721924" cy="1482433"/>
+            </a:xfrm>
+          </p:grpSpPr>
+          <p:sp>
+            <p:nvSpPr>
+              <p:cNvPr id="72" name="矩形 71">
+                <a:extLst>
+                  <a:ext uri="{FF2B5EF4-FFF2-40B4-BE49-F238E27FC236}">
+                    <a16:creationId xmlns:a16="http://schemas.microsoft.com/office/drawing/2014/main" id="{FEE1DCA2-1D42-4BD4-B917-58709B92DAC7}"/>
+                  </a:ext>
+                </a:extLst>
+              </p:cNvPr>
+              <p:cNvSpPr/>
+              <p:nvPr/>
+            </p:nvSpPr>
+            <p:spPr>
+              <a:xfrm>
+                <a:off x="665016" y="3400301"/>
+                <a:ext cx="1721923" cy="1478475"/>
+              </a:xfrm>
+              <a:prstGeom prst="rect">
+                <a:avLst/>
+              </a:prstGeom>
+              <a:noFill/>
+              <a:ln w="28575">
+                <a:solidFill>
+                  <a:schemeClr val="tx1"/>
+                </a:solidFill>
+              </a:ln>
+            </p:spPr>
+            <p:style>
+              <a:lnRef idx="2">
+                <a:schemeClr val="accent1">
+                  <a:shade val="50000"/>
+                </a:schemeClr>
+              </a:lnRef>
+              <a:fillRef idx="1">
+                <a:schemeClr val="accent1"/>
+              </a:fillRef>
+              <a:effectRef idx="0">
+                <a:schemeClr val="accent1"/>
+              </a:effectRef>
+              <a:fontRef idx="minor">
+                <a:schemeClr val="lt1"/>
+              </a:fontRef>
+            </p:style>
+            <p:txBody>
+              <a:bodyPr rtlCol="0" anchor="ctr"/>
+              <a:lstStyle/>
+              <a:p>
+                <a:pPr algn="ctr"/>
+                <a:endParaRPr lang="zh-CN" altLang="en-US"/>
+              </a:p>
+            </p:txBody>
+          </p:sp>
+          <p:cxnSp>
+            <p:nvCxnSpPr>
+              <p:cNvPr id="73" name="直接连接符 72">
+                <a:extLst>
+                  <a:ext uri="{FF2B5EF4-FFF2-40B4-BE49-F238E27FC236}">
+                    <a16:creationId xmlns:a16="http://schemas.microsoft.com/office/drawing/2014/main" id="{F931DCDD-E607-441A-B2AD-E477AA13356F}"/>
+                  </a:ext>
+                </a:extLst>
+              </p:cNvPr>
+              <p:cNvCxnSpPr/>
+              <p:nvPr/>
+            </p:nvCxnSpPr>
+            <p:spPr>
+              <a:xfrm>
+                <a:off x="665016" y="3780311"/>
+                <a:ext cx="1721923" cy="0"/>
+              </a:xfrm>
+              <a:prstGeom prst="line">
+                <a:avLst/>
+              </a:prstGeom>
+              <a:ln w="28575"/>
+            </p:spPr>
+            <p:style>
+              <a:lnRef idx="1">
+                <a:schemeClr val="dk1"/>
+              </a:lnRef>
+              <a:fillRef idx="0">
+                <a:schemeClr val="dk1"/>
+              </a:fillRef>
+              <a:effectRef idx="0">
+                <a:schemeClr val="dk1"/>
+              </a:effectRef>
+              <a:fontRef idx="minor">
+                <a:schemeClr val="tx1"/>
+              </a:fontRef>
+            </p:style>
+          </p:cxnSp>
+          <p:sp>
+            <p:nvSpPr>
+              <p:cNvPr id="74" name="文本框 73">
+                <a:extLst>
+                  <a:ext uri="{FF2B5EF4-FFF2-40B4-BE49-F238E27FC236}">
+                    <a16:creationId xmlns:a16="http://schemas.microsoft.com/office/drawing/2014/main" id="{71ECDDBD-0BCE-4B8F-86FF-4B27547910AD}"/>
+                  </a:ext>
+                </a:extLst>
+              </p:cNvPr>
+              <p:cNvSpPr txBox="1"/>
+              <p:nvPr/>
+            </p:nvSpPr>
+            <p:spPr>
+              <a:xfrm>
+                <a:off x="730466" y="3396343"/>
+                <a:ext cx="1591013" cy="369332"/>
+              </a:xfrm>
+              <a:prstGeom prst="rect">
+                <a:avLst/>
+              </a:prstGeom>
+              <a:noFill/>
+            </p:spPr>
+            <p:txBody>
+              <a:bodyPr wrap="none" rtlCol="0">
+                <a:spAutoFit/>
+              </a:bodyPr>
+              <a:lstStyle/>
+              <a:p>
+                <a:r>
+                  <a:rPr lang="en-US" altLang="zh-CN" b="1" dirty="0">
+                    <a:latin typeface="Times New Roman" panose="02020603050405020304" pitchFamily="18" charset="0"/>
+                    <a:cs typeface="Times New Roman" panose="02020603050405020304" pitchFamily="18" charset="0"/>
+                  </a:rPr>
+                  <a:t>PyTypeObject</a:t>
+                </a:r>
+                <a:endParaRPr lang="zh-CN" altLang="en-US" b="1" dirty="0">
+                  <a:latin typeface="Times New Roman" panose="02020603050405020304" pitchFamily="18" charset="0"/>
+                  <a:cs typeface="Times New Roman" panose="02020603050405020304" pitchFamily="18" charset="0"/>
+                </a:endParaRPr>
+              </a:p>
+            </p:txBody>
+          </p:sp>
+          <p:cxnSp>
+            <p:nvCxnSpPr>
+              <p:cNvPr id="75" name="直接连接符 74">
+                <a:extLst>
+                  <a:ext uri="{FF2B5EF4-FFF2-40B4-BE49-F238E27FC236}">
+                    <a16:creationId xmlns:a16="http://schemas.microsoft.com/office/drawing/2014/main" id="{328F4662-6D88-4A32-A2B1-F4B042D40B90}"/>
+                  </a:ext>
+                </a:extLst>
+              </p:cNvPr>
+              <p:cNvCxnSpPr/>
+              <p:nvPr/>
+            </p:nvCxnSpPr>
+            <p:spPr>
+              <a:xfrm>
+                <a:off x="665015" y="4164280"/>
+                <a:ext cx="1721923" cy="0"/>
+              </a:xfrm>
+              <a:prstGeom prst="line">
+                <a:avLst/>
+              </a:prstGeom>
+              <a:ln w="28575"/>
+            </p:spPr>
+            <p:style>
+              <a:lnRef idx="1">
+                <a:schemeClr val="dk1"/>
+              </a:lnRef>
+              <a:fillRef idx="0">
+                <a:schemeClr val="dk1"/>
+              </a:fillRef>
+              <a:effectRef idx="0">
+                <a:schemeClr val="dk1"/>
+              </a:effectRef>
+              <a:fontRef idx="minor">
+                <a:schemeClr val="tx1"/>
+              </a:fontRef>
+            </p:style>
+          </p:cxnSp>
+          <p:sp>
+            <p:nvSpPr>
+              <p:cNvPr id="76" name="文本框 75">
+                <a:extLst>
+                  <a:ext uri="{FF2B5EF4-FFF2-40B4-BE49-F238E27FC236}">
+                    <a16:creationId xmlns:a16="http://schemas.microsoft.com/office/drawing/2014/main" id="{60EF75A5-FE9E-4AE6-A4D8-A0BD37EB69F8}"/>
+                  </a:ext>
+                </a:extLst>
+              </p:cNvPr>
+              <p:cNvSpPr txBox="1"/>
+              <p:nvPr/>
+            </p:nvSpPr>
+            <p:spPr>
+              <a:xfrm>
+                <a:off x="1000026" y="4159265"/>
+                <a:ext cx="1051891" cy="338554"/>
+              </a:xfrm>
+              <a:prstGeom prst="rect">
+                <a:avLst/>
+              </a:prstGeom>
+              <a:noFill/>
+            </p:spPr>
+            <p:txBody>
+              <a:bodyPr wrap="none" rtlCol="0">
+                <a:spAutoFit/>
+              </a:bodyPr>
+              <a:lstStyle/>
+              <a:p>
+                <a:r>
+                  <a:rPr lang="en-US" altLang="zh-CN" sz="1600" dirty="0">
+                    <a:latin typeface="Times New Roman" panose="02020603050405020304" pitchFamily="18" charset="0"/>
+                    <a:ea typeface="宋体" panose="02010600030101010101" pitchFamily="2" charset="-122"/>
+                    <a:cs typeface="Times New Roman" panose="02020603050405020304" pitchFamily="18" charset="0"/>
+                  </a:rPr>
+                  <a:t>own_klass</a:t>
+                </a:r>
+                <a:endParaRPr lang="zh-CN" altLang="en-US" sz="1600" dirty="0">
+                  <a:latin typeface="Times New Roman" panose="02020603050405020304" pitchFamily="18" charset="0"/>
+                  <a:ea typeface="宋体" panose="02010600030101010101" pitchFamily="2" charset="-122"/>
+                  <a:cs typeface="Times New Roman" panose="02020603050405020304" pitchFamily="18" charset="0"/>
+                </a:endParaRPr>
+              </a:p>
+            </p:txBody>
+          </p:sp>
+          <p:sp>
+            <p:nvSpPr>
+              <p:cNvPr id="77" name="文本框 76">
+                <a:extLst>
+                  <a:ext uri="{FF2B5EF4-FFF2-40B4-BE49-F238E27FC236}">
+                    <a16:creationId xmlns:a16="http://schemas.microsoft.com/office/drawing/2014/main" id="{7474F95E-C8AC-40FA-A4D5-2FB511CA00A7}"/>
+                  </a:ext>
+                </a:extLst>
+              </p:cNvPr>
+              <p:cNvSpPr txBox="1"/>
+              <p:nvPr/>
+            </p:nvSpPr>
+            <p:spPr>
+              <a:xfrm>
+                <a:off x="984993" y="3808742"/>
+                <a:ext cx="1081963" cy="338554"/>
+              </a:xfrm>
+              <a:prstGeom prst="rect">
+                <a:avLst/>
+              </a:prstGeom>
+              <a:noFill/>
+            </p:spPr>
+            <p:txBody>
+              <a:bodyPr wrap="none" rtlCol="0">
+                <a:spAutoFit/>
+              </a:bodyPr>
+              <a:lstStyle/>
+              <a:p>
+                <a:r>
+                  <a:rPr lang="en-US" altLang="zh-CN" sz="1600" dirty="0">
+                    <a:latin typeface="Times New Roman" panose="02020603050405020304" pitchFamily="18" charset="0"/>
+                    <a:ea typeface="宋体" panose="02010600030101010101" pitchFamily="2" charset="-122"/>
+                    <a:cs typeface="Times New Roman" panose="02020603050405020304" pitchFamily="18" charset="0"/>
+                  </a:rPr>
+                  <a:t>MarkWord</a:t>
+                </a:r>
+                <a:endParaRPr lang="zh-CN" altLang="en-US" sz="1600" dirty="0">
+                  <a:latin typeface="Times New Roman" panose="02020603050405020304" pitchFamily="18" charset="0"/>
+                  <a:ea typeface="宋体" panose="02010600030101010101" pitchFamily="2" charset="-122"/>
+                  <a:cs typeface="Times New Roman" panose="02020603050405020304" pitchFamily="18" charset="0"/>
+                </a:endParaRPr>
+              </a:p>
+            </p:txBody>
+          </p:sp>
+        </p:grpSp>
+        <p:cxnSp>
+          <p:nvCxnSpPr>
+            <p:cNvPr id="78" name="直接连接符 77">
+              <a:extLst>
+                <a:ext uri="{FF2B5EF4-FFF2-40B4-BE49-F238E27FC236}">
+                  <a16:creationId xmlns:a16="http://schemas.microsoft.com/office/drawing/2014/main" id="{245A7461-E8A3-46D4-9D45-8C2DC35D1063}"/>
+                </a:ext>
+              </a:extLst>
+            </p:cNvPr>
+            <p:cNvCxnSpPr/>
+            <p:nvPr/>
+          </p:nvCxnSpPr>
+          <p:spPr>
+            <a:xfrm>
+              <a:off x="6760691" y="1852661"/>
+              <a:ext cx="1721923" cy="0"/>
+            </a:xfrm>
+            <a:prstGeom prst="line">
+              <a:avLst/>
+            </a:prstGeom>
+            <a:ln w="28575"/>
+          </p:spPr>
+          <p:style>
+            <a:lnRef idx="1">
+              <a:schemeClr val="dk1"/>
+            </a:lnRef>
+            <a:fillRef idx="0">
+              <a:schemeClr val="dk1"/>
+            </a:fillRef>
+            <a:effectRef idx="0">
+              <a:schemeClr val="dk1"/>
+            </a:effectRef>
+            <a:fontRef idx="minor">
+              <a:schemeClr val="tx1"/>
+            </a:fontRef>
+          </p:style>
+        </p:cxnSp>
+        <p:sp>
+          <p:nvSpPr>
+            <p:cNvPr id="79" name="文本框 78">
+              <a:extLst>
+                <a:ext uri="{FF2B5EF4-FFF2-40B4-BE49-F238E27FC236}">
+                  <a16:creationId xmlns:a16="http://schemas.microsoft.com/office/drawing/2014/main" id="{2825FBA2-9367-47C0-B56A-F658706A97A0}"/>
+                </a:ext>
+              </a:extLst>
+            </p:cNvPr>
+            <p:cNvSpPr txBox="1"/>
+            <p:nvPr/>
+          </p:nvSpPr>
+          <p:spPr>
+            <a:xfrm>
+              <a:off x="7426727" y="1850153"/>
+              <a:ext cx="389850" cy="338554"/>
+            </a:xfrm>
+            <a:prstGeom prst="rect">
+              <a:avLst/>
+            </a:prstGeom>
+            <a:noFill/>
+          </p:spPr>
+          <p:txBody>
+            <a:bodyPr wrap="none" rtlCol="0">
+              <a:spAutoFit/>
+            </a:bodyPr>
+            <a:lstStyle/>
+            <a:p>
+              <a:r>
+                <a:rPr lang="en-US" altLang="zh-CN" sz="1600" dirty="0">
+                  <a:latin typeface="Times New Roman" panose="02020603050405020304" pitchFamily="18" charset="0"/>
+                  <a:ea typeface="宋体" panose="02010600030101010101" pitchFamily="2" charset="-122"/>
+                  <a:cs typeface="Times New Roman" panose="02020603050405020304" pitchFamily="18" charset="0"/>
+                </a:rPr>
+                <a:t>…</a:t>
+              </a:r>
+              <a:endParaRPr lang="zh-CN" altLang="en-US" sz="1600" dirty="0">
+                <a:latin typeface="Times New Roman" panose="02020603050405020304" pitchFamily="18" charset="0"/>
+                <a:ea typeface="宋体" panose="02010600030101010101" pitchFamily="2" charset="-122"/>
+                <a:cs typeface="Times New Roman" panose="02020603050405020304" pitchFamily="18" charset="0"/>
+              </a:endParaRPr>
+            </a:p>
+          </p:txBody>
+        </p:sp>
+      </p:grpSp>
+      <p:grpSp>
+        <p:nvGrpSpPr>
+          <p:cNvPr id="81" name="组合 80">
+            <a:extLst>
+              <a:ext uri="{FF2B5EF4-FFF2-40B4-BE49-F238E27FC236}">
+                <a16:creationId xmlns:a16="http://schemas.microsoft.com/office/drawing/2014/main" id="{05F18BB9-1674-4749-B625-8B3DDD4658D7}"/>
+              </a:ext>
+            </a:extLst>
+          </p:cNvPr>
+          <p:cNvGrpSpPr/>
+          <p:nvPr/>
+        </p:nvGrpSpPr>
+        <p:grpSpPr>
+          <a:xfrm>
+            <a:off x="8644579" y="2563367"/>
+            <a:ext cx="2129625" cy="742206"/>
+            <a:chOff x="4409697" y="2170109"/>
+            <a:chExt cx="2129625" cy="742206"/>
+          </a:xfrm>
+        </p:grpSpPr>
+        <p:sp>
+          <p:nvSpPr>
+            <p:cNvPr id="82" name="文本框 81">
+              <a:extLst>
+                <a:ext uri="{FF2B5EF4-FFF2-40B4-BE49-F238E27FC236}">
+                  <a16:creationId xmlns:a16="http://schemas.microsoft.com/office/drawing/2014/main" id="{93C1E67C-B9CB-4CF8-AFFE-C5EA8300B205}"/>
+                </a:ext>
+              </a:extLst>
+            </p:cNvPr>
+            <p:cNvSpPr txBox="1"/>
+            <p:nvPr/>
+          </p:nvSpPr>
+          <p:spPr>
+            <a:xfrm>
+              <a:off x="5279583" y="2550697"/>
+              <a:ext cx="389850" cy="338554"/>
+            </a:xfrm>
+            <a:prstGeom prst="rect">
+              <a:avLst/>
+            </a:prstGeom>
+            <a:noFill/>
+          </p:spPr>
+          <p:txBody>
+            <a:bodyPr wrap="none" rtlCol="0">
+              <a:spAutoFit/>
+            </a:bodyPr>
+            <a:lstStyle/>
+            <a:p>
+              <a:r>
+                <a:rPr lang="en-US" altLang="zh-CN" sz="1600" dirty="0">
+                  <a:latin typeface="Times New Roman" panose="02020603050405020304" pitchFamily="18" charset="0"/>
+                  <a:ea typeface="宋体" panose="02010600030101010101" pitchFamily="2" charset="-122"/>
+                  <a:cs typeface="Times New Roman" panose="02020603050405020304" pitchFamily="18" charset="0"/>
+                </a:rPr>
+                <a:t>…</a:t>
+              </a:r>
+              <a:endParaRPr lang="zh-CN" altLang="en-US" sz="1600" dirty="0">
+                <a:latin typeface="Times New Roman" panose="02020603050405020304" pitchFamily="18" charset="0"/>
+                <a:ea typeface="宋体" panose="02010600030101010101" pitchFamily="2" charset="-122"/>
+                <a:cs typeface="Times New Roman" panose="02020603050405020304" pitchFamily="18" charset="0"/>
+              </a:endParaRPr>
+            </a:p>
+          </p:txBody>
+        </p:sp>
+        <p:grpSp>
+          <p:nvGrpSpPr>
+            <p:cNvPr id="83" name="组合 82">
+              <a:extLst>
+                <a:ext uri="{FF2B5EF4-FFF2-40B4-BE49-F238E27FC236}">
+                  <a16:creationId xmlns:a16="http://schemas.microsoft.com/office/drawing/2014/main" id="{01482BD0-5609-42E2-B5D2-E637D45D9DA4}"/>
+                </a:ext>
+              </a:extLst>
+            </p:cNvPr>
+            <p:cNvGrpSpPr/>
+            <p:nvPr/>
+          </p:nvGrpSpPr>
+          <p:grpSpPr>
+            <a:xfrm>
+              <a:off x="4409697" y="2170109"/>
+              <a:ext cx="2129625" cy="742206"/>
+              <a:chOff x="665011" y="1252847"/>
+              <a:chExt cx="2129625" cy="458864"/>
+            </a:xfrm>
+          </p:grpSpPr>
+          <p:sp>
+            <p:nvSpPr>
+              <p:cNvPr id="84" name="矩形 83">
+                <a:extLst>
+                  <a:ext uri="{FF2B5EF4-FFF2-40B4-BE49-F238E27FC236}">
+                    <a16:creationId xmlns:a16="http://schemas.microsoft.com/office/drawing/2014/main" id="{2CCFED46-266E-41BF-9DF6-156E1A4981EE}"/>
+                  </a:ext>
+                </a:extLst>
+              </p:cNvPr>
+              <p:cNvSpPr/>
+              <p:nvPr/>
+            </p:nvSpPr>
+            <p:spPr>
+              <a:xfrm>
+                <a:off x="665017" y="1252847"/>
+                <a:ext cx="2129616" cy="458864"/>
+              </a:xfrm>
+              <a:prstGeom prst="rect">
+                <a:avLst/>
+              </a:prstGeom>
+              <a:noFill/>
+              <a:ln w="28575">
+                <a:solidFill>
+                  <a:schemeClr val="tx1"/>
+                </a:solidFill>
+              </a:ln>
+            </p:spPr>
+            <p:style>
+              <a:lnRef idx="2">
+                <a:schemeClr val="accent1">
+                  <a:shade val="50000"/>
+                </a:schemeClr>
+              </a:lnRef>
+              <a:fillRef idx="1">
+                <a:schemeClr val="accent1"/>
+              </a:fillRef>
+              <a:effectRef idx="0">
+                <a:schemeClr val="accent1"/>
+              </a:effectRef>
+              <a:fontRef idx="minor">
+                <a:schemeClr val="lt1"/>
+              </a:fontRef>
+            </p:style>
+            <p:txBody>
+              <a:bodyPr rtlCol="0" anchor="ctr"/>
+              <a:lstStyle/>
+              <a:p>
+                <a:pPr algn="ctr"/>
+                <a:endParaRPr lang="zh-CN" altLang="en-US" dirty="0"/>
+              </a:p>
+            </p:txBody>
+          </p:sp>
+          <p:cxnSp>
+            <p:nvCxnSpPr>
+              <p:cNvPr id="85" name="直接连接符 84">
+                <a:extLst>
+                  <a:ext uri="{FF2B5EF4-FFF2-40B4-BE49-F238E27FC236}">
+                    <a16:creationId xmlns:a16="http://schemas.microsoft.com/office/drawing/2014/main" id="{0088D041-D7CE-4C24-A396-AE4171EC1F1A}"/>
+                  </a:ext>
+                </a:extLst>
+              </p:cNvPr>
+              <p:cNvCxnSpPr>
+                <a:cxnSpLocks/>
+              </p:cNvCxnSpPr>
+              <p:nvPr/>
+            </p:nvCxnSpPr>
+            <p:spPr>
+              <a:xfrm>
+                <a:off x="665011" y="1488143"/>
+                <a:ext cx="2129622" cy="0"/>
+              </a:xfrm>
+              <a:prstGeom prst="line">
+                <a:avLst/>
+              </a:prstGeom>
+              <a:ln w="28575"/>
+            </p:spPr>
+            <p:style>
+              <a:lnRef idx="1">
+                <a:schemeClr val="dk1"/>
+              </a:lnRef>
+              <a:fillRef idx="0">
+                <a:schemeClr val="dk1"/>
+              </a:fillRef>
+              <a:effectRef idx="0">
+                <a:schemeClr val="dk1"/>
+              </a:effectRef>
+              <a:fontRef idx="minor">
+                <a:schemeClr val="tx1"/>
+              </a:fontRef>
+            </p:style>
+          </p:cxnSp>
+          <p:sp>
+            <p:nvSpPr>
+              <p:cNvPr id="86" name="文本框 85">
+                <a:extLst>
+                  <a:ext uri="{FF2B5EF4-FFF2-40B4-BE49-F238E27FC236}">
+                    <a16:creationId xmlns:a16="http://schemas.microsoft.com/office/drawing/2014/main" id="{E5E678FC-28C9-4233-A385-35F89AE8136C}"/>
+                  </a:ext>
+                </a:extLst>
+              </p:cNvPr>
+              <p:cNvSpPr txBox="1"/>
+              <p:nvPr/>
+            </p:nvSpPr>
+            <p:spPr>
+              <a:xfrm>
+                <a:off x="665014" y="1255319"/>
+                <a:ext cx="2129622" cy="228337"/>
+              </a:xfrm>
+              <a:prstGeom prst="rect">
+                <a:avLst/>
+              </a:prstGeom>
+              <a:noFill/>
+            </p:spPr>
+            <p:txBody>
+              <a:bodyPr wrap="none" rtlCol="0">
+                <a:spAutoFit/>
+              </a:bodyPr>
+              <a:lstStyle/>
+              <a:p>
+                <a:r>
+                  <a:rPr lang="en-US" altLang="zh-CN" b="1" dirty="0">
+                    <a:latin typeface="Times New Roman" panose="02020603050405020304" pitchFamily="18" charset="0"/>
+                    <a:cs typeface="Times New Roman" panose="02020603050405020304" pitchFamily="18" charset="0"/>
+                  </a:rPr>
+                  <a:t>PyTypeObjectKlass</a:t>
+                </a:r>
+                <a:endParaRPr lang="zh-CN" altLang="en-US" b="1" dirty="0">
+                  <a:latin typeface="Times New Roman" panose="02020603050405020304" pitchFamily="18" charset="0"/>
+                  <a:cs typeface="Times New Roman" panose="02020603050405020304" pitchFamily="18" charset="0"/>
+                </a:endParaRPr>
+              </a:p>
+            </p:txBody>
+          </p:sp>
+        </p:grpSp>
+      </p:grpSp>
+      <p:cxnSp>
+        <p:nvCxnSpPr>
+          <p:cNvPr id="98" name="连接符: 肘形 97">
+            <a:extLst>
+              <a:ext uri="{FF2B5EF4-FFF2-40B4-BE49-F238E27FC236}">
+                <a16:creationId xmlns:a16="http://schemas.microsoft.com/office/drawing/2014/main" id="{C281DD88-CD8E-4DDA-9B95-BE1DA65D5EBB}"/>
+              </a:ext>
+            </a:extLst>
+          </p:cNvPr>
+          <p:cNvCxnSpPr/>
+          <p:nvPr/>
+        </p:nvCxnSpPr>
+        <p:spPr>
+          <a:xfrm rot="10800000" flipV="1">
+            <a:off x="6537366" y="3401497"/>
+            <a:ext cx="1536606" cy="1223941"/>
+          </a:xfrm>
+          <a:prstGeom prst="bentConnector3">
+            <a:avLst>
+              <a:gd name="adj1" fmla="val -14532"/>
+            </a:avLst>
+          </a:prstGeom>
+          <a:ln w="28575">
+            <a:solidFill>
+              <a:schemeClr val="tx1"/>
+            </a:solidFill>
+          </a:ln>
+        </p:spPr>
+        <p:style>
+          <a:lnRef idx="1">
+            <a:schemeClr val="accent1"/>
+          </a:lnRef>
+          <a:fillRef idx="0">
+            <a:schemeClr val="accent1"/>
+          </a:fillRef>
+          <a:effectRef idx="0">
+            <a:schemeClr val="accent1"/>
+          </a:effectRef>
+          <a:fontRef idx="minor">
+            <a:schemeClr val="tx1"/>
+          </a:fontRef>
+        </p:style>
+      </p:cxnSp>
+      <p:cxnSp>
+        <p:nvCxnSpPr>
+          <p:cNvPr id="101" name="连接符: 肘形 100">
+            <a:extLst>
+              <a:ext uri="{FF2B5EF4-FFF2-40B4-BE49-F238E27FC236}">
+                <a16:creationId xmlns:a16="http://schemas.microsoft.com/office/drawing/2014/main" id="{F8466D39-0EE4-451E-8133-136CD697B7A9}"/>
+              </a:ext>
+            </a:extLst>
+          </p:cNvPr>
+          <p:cNvCxnSpPr>
+            <a:cxnSpLocks/>
+          </p:cNvCxnSpPr>
+          <p:nvPr/>
+        </p:nvCxnSpPr>
+        <p:spPr>
+          <a:xfrm rot="10800000">
+            <a:off x="4827496" y="4205878"/>
+            <a:ext cx="1781122" cy="419560"/>
+          </a:xfrm>
+          <a:prstGeom prst="bentConnector2">
+            <a:avLst/>
+          </a:prstGeom>
+          <a:ln w="28575">
+            <a:solidFill>
+              <a:schemeClr val="tx1"/>
+            </a:solidFill>
+            <a:tailEnd type="triangle"/>
+          </a:ln>
+        </p:spPr>
+        <p:style>
+          <a:lnRef idx="1">
+            <a:schemeClr val="accent1"/>
+          </a:lnRef>
+          <a:fillRef idx="0">
+            <a:schemeClr val="accent1"/>
+          </a:fillRef>
+          <a:effectRef idx="0">
+            <a:schemeClr val="accent1"/>
+          </a:effectRef>
+          <a:fontRef idx="minor">
+            <a:schemeClr val="tx1"/>
+          </a:fontRef>
+        </p:style>
+      </p:cxnSp>
+      <p:sp>
+        <p:nvSpPr>
+          <p:cNvPr id="102" name="椭圆 101">
+            <a:extLst>
+              <a:ext uri="{FF2B5EF4-FFF2-40B4-BE49-F238E27FC236}">
+                <a16:creationId xmlns:a16="http://schemas.microsoft.com/office/drawing/2014/main" id="{4E064788-E588-487C-886A-A6365B20BFE6}"/>
+              </a:ext>
+            </a:extLst>
+          </p:cNvPr>
+          <p:cNvSpPr/>
+          <p:nvPr/>
+        </p:nvSpPr>
+        <p:spPr>
+          <a:xfrm>
+            <a:off x="8011774" y="3345319"/>
+            <a:ext cx="136566" cy="136566"/>
+          </a:xfrm>
+          <a:prstGeom prst="ellipse">
+            <a:avLst/>
+          </a:prstGeom>
+          <a:solidFill>
+            <a:schemeClr val="tx1"/>
+          </a:solidFill>
+          <a:ln>
+            <a:noFill/>
+          </a:ln>
+        </p:spPr>
+        <p:style>
+          <a:lnRef idx="2">
+            <a:schemeClr val="accent1">
+              <a:shade val="50000"/>
+            </a:schemeClr>
+          </a:lnRef>
+          <a:fillRef idx="1">
+            <a:schemeClr val="accent1"/>
+          </a:fillRef>
+          <a:effectRef idx="0">
+            <a:schemeClr val="accent1"/>
+          </a:effectRef>
+          <a:fontRef idx="minor">
+            <a:schemeClr val="lt1"/>
+          </a:fontRef>
+        </p:style>
+        <p:txBody>
+          <a:bodyPr rtlCol="0" anchor="ctr"/>
+          <a:lstStyle/>
+          <a:p>
+            <a:pPr algn="ctr"/>
+            <a:endParaRPr lang="zh-CN" altLang="en-US"/>
+          </a:p>
+        </p:txBody>
+      </p:sp>
+      <p:sp>
+        <p:nvSpPr>
+          <p:cNvPr id="104" name="文本框 103">
+            <a:extLst>
+              <a:ext uri="{FF2B5EF4-FFF2-40B4-BE49-F238E27FC236}">
+                <a16:creationId xmlns:a16="http://schemas.microsoft.com/office/drawing/2014/main" id="{2A273123-A6E2-41FF-AA27-FF238FD86604}"/>
+              </a:ext>
+            </a:extLst>
+          </p:cNvPr>
+          <p:cNvSpPr txBox="1"/>
+          <p:nvPr/>
+        </p:nvSpPr>
+        <p:spPr>
+          <a:xfrm>
+            <a:off x="8486173" y="2221553"/>
+            <a:ext cx="2505814" cy="338554"/>
+          </a:xfrm>
+          <a:prstGeom prst="rect">
+            <a:avLst/>
+          </a:prstGeom>
+          <a:noFill/>
+        </p:spPr>
+        <p:txBody>
+          <a:bodyPr wrap="none" rtlCol="0">
+            <a:spAutoFit/>
+          </a:bodyPr>
+          <a:lstStyle/>
+          <a:p>
+            <a:r>
+              <a:rPr lang="zh-CN" altLang="en-US" sz="1600" dirty="0">
+                <a:latin typeface="Times New Roman" panose="02020603050405020304" pitchFamily="18" charset="0"/>
+                <a:ea typeface="宋体" panose="02010600030101010101" pitchFamily="2" charset="-122"/>
+                <a:cs typeface="Times New Roman" panose="02020603050405020304" pitchFamily="18" charset="0"/>
+              </a:rPr>
+              <a:t>内建 </a:t>
+            </a:r>
+            <a:r>
+              <a:rPr lang="en-US" altLang="zh-CN" sz="1600" dirty="0">
+                <a:latin typeface="Times New Roman" panose="02020603050405020304" pitchFamily="18" charset="0"/>
+                <a:ea typeface="宋体" panose="02010600030101010101" pitchFamily="2" charset="-122"/>
+                <a:cs typeface="Times New Roman" panose="02020603050405020304" pitchFamily="18" charset="0"/>
+              </a:rPr>
+              <a:t>type </a:t>
+            </a:r>
+            <a:r>
+              <a:rPr lang="zh-CN" altLang="en-US" sz="1600" dirty="0">
+                <a:latin typeface="Times New Roman" panose="02020603050405020304" pitchFamily="18" charset="0"/>
+                <a:ea typeface="宋体" panose="02010600030101010101" pitchFamily="2" charset="-122"/>
+                <a:cs typeface="Times New Roman" panose="02020603050405020304" pitchFamily="18" charset="0"/>
+              </a:rPr>
+              <a:t>类型</a:t>
+            </a:r>
+            <a:r>
+              <a:rPr lang="en-US" altLang="zh-CN" sz="1600" dirty="0">
+                <a:latin typeface="Times New Roman" panose="02020603050405020304" pitchFamily="18" charset="0"/>
+                <a:ea typeface="宋体" panose="02010600030101010101" pitchFamily="2" charset="-122"/>
+                <a:cs typeface="Times New Roman" panose="02020603050405020304" pitchFamily="18" charset="0"/>
+              </a:rPr>
+              <a:t> Klass </a:t>
+            </a:r>
+            <a:r>
+              <a:rPr lang="zh-CN" altLang="en-US" sz="1600" dirty="0">
+                <a:latin typeface="Times New Roman" panose="02020603050405020304" pitchFamily="18" charset="0"/>
+                <a:ea typeface="宋体" panose="02010600030101010101" pitchFamily="2" charset="-122"/>
+                <a:cs typeface="Times New Roman" panose="02020603050405020304" pitchFamily="18" charset="0"/>
+              </a:rPr>
+              <a:t>实体</a:t>
+            </a:r>
+          </a:p>
+        </p:txBody>
+      </p:sp>
+      <p:grpSp>
+        <p:nvGrpSpPr>
+          <p:cNvPr id="106" name="组合 105">
+            <a:extLst>
+              <a:ext uri="{FF2B5EF4-FFF2-40B4-BE49-F238E27FC236}">
+                <a16:creationId xmlns:a16="http://schemas.microsoft.com/office/drawing/2014/main" id="{E35C879A-C899-438B-AD73-F7E9CC7522FA}"/>
+              </a:ext>
+            </a:extLst>
+          </p:cNvPr>
+          <p:cNvGrpSpPr/>
+          <p:nvPr/>
+        </p:nvGrpSpPr>
+        <p:grpSpPr>
+          <a:xfrm>
+            <a:off x="5694345" y="2867884"/>
+            <a:ext cx="645683" cy="136566"/>
+            <a:chOff x="5694345" y="2867884"/>
+            <a:chExt cx="645683" cy="136566"/>
+          </a:xfrm>
+        </p:grpSpPr>
+        <p:cxnSp>
+          <p:nvCxnSpPr>
+            <p:cNvPr id="91" name="直接箭头连接符 90">
+              <a:extLst>
+                <a:ext uri="{FF2B5EF4-FFF2-40B4-BE49-F238E27FC236}">
+                  <a16:creationId xmlns:a16="http://schemas.microsoft.com/office/drawing/2014/main" id="{93980F45-8CC6-47B1-8949-A73E07546102}"/>
+                </a:ext>
+              </a:extLst>
+            </p:cNvPr>
+            <p:cNvCxnSpPr/>
+            <p:nvPr/>
+          </p:nvCxnSpPr>
+          <p:spPr>
+            <a:xfrm>
+              <a:off x="5760702" y="2934470"/>
+              <a:ext cx="579326" cy="0"/>
+            </a:xfrm>
+            <a:prstGeom prst="straightConnector1">
+              <a:avLst/>
+            </a:prstGeom>
+            <a:ln w="28575">
+              <a:solidFill>
+                <a:schemeClr val="tx1"/>
+              </a:solidFill>
+              <a:tailEnd type="triangle"/>
+            </a:ln>
+          </p:spPr>
+          <p:style>
+            <a:lnRef idx="1">
+              <a:schemeClr val="accent1"/>
+            </a:lnRef>
+            <a:fillRef idx="0">
+              <a:schemeClr val="accent1"/>
+            </a:fillRef>
+            <a:effectRef idx="0">
+              <a:schemeClr val="accent1"/>
+            </a:effectRef>
+            <a:fontRef idx="minor">
+              <a:schemeClr val="tx1"/>
+            </a:fontRef>
+          </p:style>
+        </p:cxnSp>
+        <p:sp>
+          <p:nvSpPr>
+            <p:cNvPr id="105" name="椭圆 104">
+              <a:extLst>
+                <a:ext uri="{FF2B5EF4-FFF2-40B4-BE49-F238E27FC236}">
+                  <a16:creationId xmlns:a16="http://schemas.microsoft.com/office/drawing/2014/main" id="{8A02E1F9-D03B-4996-A90C-20836E06460E}"/>
+                </a:ext>
+              </a:extLst>
+            </p:cNvPr>
+            <p:cNvSpPr/>
+            <p:nvPr/>
+          </p:nvSpPr>
+          <p:spPr>
+            <a:xfrm>
+              <a:off x="5694345" y="2867884"/>
+              <a:ext cx="136566" cy="136566"/>
+            </a:xfrm>
+            <a:prstGeom prst="ellipse">
+              <a:avLst/>
+            </a:prstGeom>
+            <a:solidFill>
+              <a:schemeClr val="tx1"/>
+            </a:solidFill>
+            <a:ln>
+              <a:noFill/>
+            </a:ln>
+          </p:spPr>
+          <p:style>
+            <a:lnRef idx="2">
+              <a:schemeClr val="accent1">
+                <a:shade val="50000"/>
+              </a:schemeClr>
+            </a:lnRef>
+            <a:fillRef idx="1">
+              <a:schemeClr val="accent1"/>
+            </a:fillRef>
+            <a:effectRef idx="0">
+              <a:schemeClr val="accent1"/>
+            </a:effectRef>
+            <a:fontRef idx="minor">
+              <a:schemeClr val="lt1"/>
+            </a:fontRef>
+          </p:style>
+          <p:txBody>
+            <a:bodyPr rtlCol="0" anchor="ctr"/>
+            <a:lstStyle/>
+            <a:p>
+              <a:pPr algn="ctr"/>
+              <a:endParaRPr lang="zh-CN" altLang="en-US"/>
+            </a:p>
+          </p:txBody>
+        </p:sp>
+      </p:grpSp>
+      <p:grpSp>
+        <p:nvGrpSpPr>
+          <p:cNvPr id="107" name="组合 106">
+            <a:extLst>
+              <a:ext uri="{FF2B5EF4-FFF2-40B4-BE49-F238E27FC236}">
+                <a16:creationId xmlns:a16="http://schemas.microsoft.com/office/drawing/2014/main" id="{68984EA2-814A-421F-883C-4FEB772CDB61}"/>
+              </a:ext>
+            </a:extLst>
+          </p:cNvPr>
+          <p:cNvGrpSpPr/>
+          <p:nvPr/>
+        </p:nvGrpSpPr>
+        <p:grpSpPr>
+          <a:xfrm>
+            <a:off x="8008513" y="2937301"/>
+            <a:ext cx="645683" cy="136566"/>
+            <a:chOff x="5694345" y="2867884"/>
+            <a:chExt cx="645683" cy="136566"/>
+          </a:xfrm>
+        </p:grpSpPr>
+        <p:cxnSp>
+          <p:nvCxnSpPr>
+            <p:cNvPr id="108" name="直接箭头连接符 107">
+              <a:extLst>
+                <a:ext uri="{FF2B5EF4-FFF2-40B4-BE49-F238E27FC236}">
+                  <a16:creationId xmlns:a16="http://schemas.microsoft.com/office/drawing/2014/main" id="{CA013DDF-D630-49D7-867F-479263F7E84D}"/>
+                </a:ext>
+              </a:extLst>
+            </p:cNvPr>
+            <p:cNvCxnSpPr/>
+            <p:nvPr/>
+          </p:nvCxnSpPr>
+          <p:spPr>
+            <a:xfrm>
+              <a:off x="5760702" y="2934470"/>
+              <a:ext cx="579326" cy="0"/>
+            </a:xfrm>
+            <a:prstGeom prst="straightConnector1">
+              <a:avLst/>
+            </a:prstGeom>
+            <a:ln w="28575">
+              <a:solidFill>
+                <a:schemeClr val="tx1"/>
+              </a:solidFill>
+              <a:tailEnd type="triangle"/>
+            </a:ln>
+          </p:spPr>
+          <p:style>
+            <a:lnRef idx="1">
+              <a:schemeClr val="accent1"/>
+            </a:lnRef>
+            <a:fillRef idx="0">
+              <a:schemeClr val="accent1"/>
+            </a:fillRef>
+            <a:effectRef idx="0">
+              <a:schemeClr val="accent1"/>
+            </a:effectRef>
+            <a:fontRef idx="minor">
+              <a:schemeClr val="tx1"/>
+            </a:fontRef>
+          </p:style>
+        </p:cxnSp>
+        <p:sp>
+          <p:nvSpPr>
+            <p:cNvPr id="109" name="椭圆 108">
+              <a:extLst>
+                <a:ext uri="{FF2B5EF4-FFF2-40B4-BE49-F238E27FC236}">
+                  <a16:creationId xmlns:a16="http://schemas.microsoft.com/office/drawing/2014/main" id="{86B3510B-1B09-40E0-8CE5-6982DEEA9D3F}"/>
+                </a:ext>
+              </a:extLst>
+            </p:cNvPr>
+            <p:cNvSpPr/>
+            <p:nvPr/>
+          </p:nvSpPr>
+          <p:spPr>
+            <a:xfrm>
+              <a:off x="5694345" y="2867884"/>
+              <a:ext cx="136566" cy="136566"/>
+            </a:xfrm>
+            <a:prstGeom prst="ellipse">
+              <a:avLst/>
+            </a:prstGeom>
+            <a:solidFill>
+              <a:schemeClr val="tx1"/>
+            </a:solidFill>
+            <a:ln>
+              <a:noFill/>
+            </a:ln>
+          </p:spPr>
+          <p:style>
+            <a:lnRef idx="2">
+              <a:schemeClr val="accent1">
+                <a:shade val="50000"/>
+              </a:schemeClr>
+            </a:lnRef>
+            <a:fillRef idx="1">
+              <a:schemeClr val="accent1"/>
+            </a:fillRef>
+            <a:effectRef idx="0">
+              <a:schemeClr val="accent1"/>
+            </a:effectRef>
+            <a:fontRef idx="minor">
+              <a:schemeClr val="lt1"/>
+            </a:fontRef>
+          </p:style>
+          <p:txBody>
+            <a:bodyPr rtlCol="0" anchor="ctr"/>
+            <a:lstStyle/>
+            <a:p>
+              <a:pPr algn="ctr"/>
+              <a:endParaRPr lang="zh-CN" altLang="en-US"/>
+            </a:p>
+          </p:txBody>
+        </p:sp>
+      </p:grpSp>
+    </p:spTree>
+    <p:extLst>
+      <p:ext uri="{BB962C8B-B14F-4D97-AF65-F5344CB8AC3E}">
+        <p14:creationId xmlns:p14="http://schemas.microsoft.com/office/powerpoint/2010/main" val="3616747152"/>
+      </p:ext>
+    </p:extLst>
+  </p:cSld>
+  <p:clrMapOvr>
+    <a:masterClrMapping/>
+  </p:clrMapOvr>
+</p:sld>
+</file>
+
+<file path=ppt/slides/slide8.xml><?xml version="1.0" encoding="utf-8"?>
+<p:sld xmlns:a="http://schemas.openxmlformats.org/drawingml/2006/main" xmlns:r="http://schemas.openxmlformats.org/officeDocument/2006/relationships" xmlns:p="http://schemas.openxmlformats.org/presentationml/2006/main">
+  <p:cSld>
+    <p:spTree>
+      <p:nvGrpSpPr>
+        <p:cNvPr id="1" name=""/>
+        <p:cNvGrpSpPr/>
+        <p:nvPr/>
+      </p:nvGrpSpPr>
+      <p:grpSpPr>
+        <a:xfrm>
+          <a:off x="0" y="0"/>
+          <a:ext cx="0" cy="0"/>
+          <a:chOff x="0" y="0"/>
+          <a:chExt cx="0" cy="0"/>
+        </a:xfrm>
+      </p:grpSpPr>
+      <p:sp>
+        <p:nvSpPr>
+          <p:cNvPr id="4" name="矩形 3">
+            <a:extLst>
+              <a:ext uri="{FF2B5EF4-FFF2-40B4-BE49-F238E27FC236}">
+                <a16:creationId xmlns:a16="http://schemas.microsoft.com/office/drawing/2014/main" id="{B06B96C9-4F50-49C5-B182-2D9E93DF9F61}"/>
+              </a:ext>
+            </a:extLst>
+          </p:cNvPr>
+          <p:cNvSpPr/>
+          <p:nvPr/>
+        </p:nvSpPr>
+        <p:spPr>
+          <a:xfrm>
+            <a:off x="237506" y="3071256"/>
+            <a:ext cx="1335975" cy="721426"/>
+          </a:xfrm>
+          <a:prstGeom prst="rect">
+            <a:avLst/>
+          </a:prstGeom>
+          <a:noFill/>
+          <a:ln w="28575">
+            <a:solidFill>
+              <a:schemeClr val="tx1"/>
+            </a:solidFill>
+          </a:ln>
+        </p:spPr>
+        <p:style>
+          <a:lnRef idx="2">
+            <a:schemeClr val="accent1">
+              <a:shade val="50000"/>
+            </a:schemeClr>
+          </a:lnRef>
+          <a:fillRef idx="1">
+            <a:schemeClr val="accent1"/>
+          </a:fillRef>
+          <a:effectRef idx="0">
+            <a:schemeClr val="accent1"/>
+          </a:effectRef>
+          <a:fontRef idx="minor">
+            <a:schemeClr val="lt1"/>
+          </a:fontRef>
+        </p:style>
+        <p:txBody>
+          <a:bodyPr rtlCol="0" anchor="ctr"/>
+          <a:lstStyle/>
+          <a:p>
+            <a:pPr algn="ctr"/>
+            <a:r>
+              <a:rPr lang="zh-CN" altLang="en-US" sz="1600" dirty="0">
+                <a:solidFill>
+                  <a:schemeClr val="tx1"/>
+                </a:solidFill>
+                <a:latin typeface="Times New Roman" panose="02020603050405020304" pitchFamily="18" charset="0"/>
+                <a:ea typeface="宋体" panose="02010600030101010101" pitchFamily="2" charset="-122"/>
+                <a:cs typeface="Times New Roman" panose="02020603050405020304" pitchFamily="18" charset="0"/>
+              </a:rPr>
+              <a:t>字节码指令 </a:t>
+            </a:r>
+            <a:r>
+              <a:rPr lang="en-US" altLang="zh-CN" sz="1600" dirty="0">
+                <a:solidFill>
+                  <a:schemeClr val="tx1"/>
+                </a:solidFill>
+                <a:latin typeface="Times New Roman" panose="02020603050405020304" pitchFamily="18" charset="0"/>
+                <a:ea typeface="宋体" panose="02010600030101010101" pitchFamily="2" charset="-122"/>
+                <a:cs typeface="Times New Roman" panose="02020603050405020304" pitchFamily="18" charset="0"/>
+              </a:rPr>
+              <a:t>handler </a:t>
+            </a:r>
+            <a:r>
+              <a:rPr lang="zh-CN" altLang="en-US" sz="1600" dirty="0">
+                <a:solidFill>
+                  <a:schemeClr val="tx1"/>
+                </a:solidFill>
+                <a:latin typeface="Times New Roman" panose="02020603050405020304" pitchFamily="18" charset="0"/>
+                <a:ea typeface="宋体" panose="02010600030101010101" pitchFamily="2" charset="-122"/>
+                <a:cs typeface="Times New Roman" panose="02020603050405020304" pitchFamily="18" charset="0"/>
+              </a:rPr>
+              <a:t>执行</a:t>
+            </a:r>
+          </a:p>
+        </p:txBody>
+      </p:sp>
+      <p:sp>
+        <p:nvSpPr>
+          <p:cNvPr id="5" name="矩形 4">
+            <a:extLst>
+              <a:ext uri="{FF2B5EF4-FFF2-40B4-BE49-F238E27FC236}">
+                <a16:creationId xmlns:a16="http://schemas.microsoft.com/office/drawing/2014/main" id="{E5088EBE-9A9B-403D-85B0-C1D69A10786A}"/>
+              </a:ext>
+            </a:extLst>
+          </p:cNvPr>
+          <p:cNvSpPr/>
+          <p:nvPr/>
+        </p:nvSpPr>
+        <p:spPr>
+          <a:xfrm>
+            <a:off x="1945574" y="3071256"/>
+            <a:ext cx="1290453" cy="721426"/>
+          </a:xfrm>
+          <a:prstGeom prst="rect">
+            <a:avLst/>
+          </a:prstGeom>
+          <a:noFill/>
+          <a:ln w="28575">
+            <a:solidFill>
+              <a:schemeClr val="tx1"/>
+            </a:solidFill>
+          </a:ln>
+        </p:spPr>
+        <p:style>
+          <a:lnRef idx="2">
+            <a:schemeClr val="accent1">
+              <a:shade val="50000"/>
+            </a:schemeClr>
+          </a:lnRef>
+          <a:fillRef idx="1">
+            <a:schemeClr val="accent1"/>
+          </a:fillRef>
+          <a:effectRef idx="0">
+            <a:schemeClr val="accent1"/>
+          </a:effectRef>
+          <a:fontRef idx="minor">
+            <a:schemeClr val="lt1"/>
+          </a:fontRef>
+        </p:style>
+        <p:txBody>
+          <a:bodyPr rtlCol="0" anchor="ctr"/>
+          <a:lstStyle/>
+          <a:p>
+            <a:pPr algn="ctr"/>
+            <a:r>
+              <a:rPr lang="en-US" altLang="zh-CN" sz="1600" dirty="0">
+                <a:solidFill>
+                  <a:schemeClr val="tx1"/>
+                </a:solidFill>
+                <a:latin typeface="Times New Roman" panose="02020603050405020304" pitchFamily="18" charset="0"/>
+                <a:ea typeface="宋体" panose="02010600030101010101" pitchFamily="2" charset="-122"/>
+                <a:cs typeface="Times New Roman" panose="02020603050405020304" pitchFamily="18" charset="0"/>
+              </a:rPr>
+              <a:t>DISPATCH()</a:t>
+            </a:r>
+            <a:endParaRPr lang="zh-CN" altLang="en-US" sz="1600" dirty="0">
+              <a:solidFill>
+                <a:schemeClr val="tx1"/>
+              </a:solidFill>
+              <a:latin typeface="Times New Roman" panose="02020603050405020304" pitchFamily="18" charset="0"/>
+              <a:ea typeface="宋体" panose="02010600030101010101" pitchFamily="2" charset="-122"/>
+              <a:cs typeface="Times New Roman" panose="02020603050405020304" pitchFamily="18" charset="0"/>
+            </a:endParaRPr>
+          </a:p>
+        </p:txBody>
+      </p:sp>
+      <p:sp>
+        <p:nvSpPr>
+          <p:cNvPr id="6" name="流程图: 决策 5">
+            <a:extLst>
+              <a:ext uri="{FF2B5EF4-FFF2-40B4-BE49-F238E27FC236}">
+                <a16:creationId xmlns:a16="http://schemas.microsoft.com/office/drawing/2014/main" id="{9C0CB8EF-4745-49AD-B0D4-36AAECF580F5}"/>
+              </a:ext>
+            </a:extLst>
+          </p:cNvPr>
+          <p:cNvSpPr/>
+          <p:nvPr/>
+        </p:nvSpPr>
+        <p:spPr>
+          <a:xfrm>
+            <a:off x="3608120" y="2774001"/>
+            <a:ext cx="2847109" cy="1309998"/>
+          </a:xfrm>
+          <a:prstGeom prst="flowChartDecision">
+            <a:avLst/>
+          </a:prstGeom>
+          <a:noFill/>
+          <a:ln w="28575">
+            <a:solidFill>
+              <a:schemeClr val="tx1"/>
+            </a:solidFill>
+          </a:ln>
+        </p:spPr>
+        <p:style>
+          <a:lnRef idx="2">
+            <a:schemeClr val="accent1">
+              <a:shade val="50000"/>
+            </a:schemeClr>
+          </a:lnRef>
+          <a:fillRef idx="1">
+            <a:schemeClr val="accent1"/>
+          </a:fillRef>
+          <a:effectRef idx="0">
+            <a:schemeClr val="accent1"/>
+          </a:effectRef>
+          <a:fontRef idx="minor">
+            <a:schemeClr val="lt1"/>
+          </a:fontRef>
+        </p:style>
+        <p:txBody>
+          <a:bodyPr rtlCol="0" anchor="ctr"/>
+          <a:lstStyle/>
+          <a:p>
+            <a:pPr algn="ctr"/>
+            <a:r>
+              <a:rPr lang="en-US" altLang="zh-CN" sz="1600" dirty="0">
+                <a:solidFill>
+                  <a:schemeClr val="tx1"/>
+                </a:solidFill>
+                <a:latin typeface="Times New Roman" panose="02020603050405020304" pitchFamily="18" charset="0"/>
+                <a:cs typeface="Times New Roman" panose="02020603050405020304" pitchFamily="18" charset="0"/>
+              </a:rPr>
+              <a:t>ExceptionState</a:t>
+            </a:r>
+            <a:r>
+              <a:rPr lang="zh-CN" altLang="en-US" sz="1600" dirty="0">
+                <a:solidFill>
+                  <a:schemeClr val="tx1"/>
+                </a:solidFill>
+                <a:latin typeface="Times New Roman" panose="02020603050405020304" pitchFamily="18" charset="0"/>
+                <a:cs typeface="Times New Roman" panose="02020603050405020304" pitchFamily="18" charset="0"/>
+              </a:rPr>
+              <a:t>有待处理异常</a:t>
+            </a:r>
+          </a:p>
+        </p:txBody>
+      </p:sp>
+      <p:sp>
+        <p:nvSpPr>
+          <p:cNvPr id="7" name="矩形 6">
+            <a:extLst>
+              <a:ext uri="{FF2B5EF4-FFF2-40B4-BE49-F238E27FC236}">
+                <a16:creationId xmlns:a16="http://schemas.microsoft.com/office/drawing/2014/main" id="{D954F097-C31C-450E-A2AC-56B8960D0C9D}"/>
+              </a:ext>
+            </a:extLst>
+          </p:cNvPr>
+          <p:cNvSpPr/>
+          <p:nvPr/>
+        </p:nvSpPr>
+        <p:spPr>
+          <a:xfrm>
+            <a:off x="4247160" y="4755573"/>
+            <a:ext cx="1569028" cy="721426"/>
+          </a:xfrm>
+          <a:prstGeom prst="rect">
+            <a:avLst/>
+          </a:prstGeom>
+          <a:noFill/>
+          <a:ln w="28575">
+            <a:solidFill>
+              <a:schemeClr val="tx1"/>
+            </a:solidFill>
+          </a:ln>
+        </p:spPr>
+        <p:style>
+          <a:lnRef idx="2">
+            <a:schemeClr val="accent1">
+              <a:shade val="50000"/>
+            </a:schemeClr>
+          </a:lnRef>
+          <a:fillRef idx="1">
+            <a:schemeClr val="accent1"/>
+          </a:fillRef>
+          <a:effectRef idx="0">
+            <a:schemeClr val="accent1"/>
+          </a:effectRef>
+          <a:fontRef idx="minor">
+            <a:schemeClr val="lt1"/>
+          </a:fontRef>
+        </p:style>
+        <p:txBody>
+          <a:bodyPr rtlCol="0" anchor="ctr"/>
+          <a:lstStyle/>
+          <a:p>
+            <a:pPr algn="ctr"/>
+            <a:r>
+              <a:rPr lang="zh-CN" altLang="en-US" sz="1600" dirty="0">
+                <a:solidFill>
+                  <a:schemeClr val="tx1"/>
+                </a:solidFill>
+                <a:latin typeface="Times New Roman" panose="02020603050405020304" pitchFamily="18" charset="0"/>
+                <a:ea typeface="宋体" panose="02010600030101010101" pitchFamily="2" charset="-122"/>
+                <a:cs typeface="Times New Roman" panose="02020603050405020304" pitchFamily="18" charset="0"/>
+              </a:rPr>
+              <a:t>跳转到下一条指令 </a:t>
+            </a:r>
+            <a:r>
+              <a:rPr lang="en-US" altLang="zh-CN" sz="1600" dirty="0">
+                <a:solidFill>
+                  <a:schemeClr val="tx1"/>
+                </a:solidFill>
+                <a:latin typeface="Times New Roman" panose="02020603050405020304" pitchFamily="18" charset="0"/>
+                <a:ea typeface="宋体" panose="02010600030101010101" pitchFamily="2" charset="-122"/>
+                <a:cs typeface="Times New Roman" panose="02020603050405020304" pitchFamily="18" charset="0"/>
+              </a:rPr>
+              <a:t>handler</a:t>
+            </a:r>
+            <a:endParaRPr lang="zh-CN" altLang="en-US" sz="1600" dirty="0">
+              <a:solidFill>
+                <a:schemeClr val="tx1"/>
+              </a:solidFill>
+              <a:latin typeface="Times New Roman" panose="02020603050405020304" pitchFamily="18" charset="0"/>
+              <a:ea typeface="宋体" panose="02010600030101010101" pitchFamily="2" charset="-122"/>
+              <a:cs typeface="Times New Roman" panose="02020603050405020304" pitchFamily="18" charset="0"/>
+            </a:endParaRPr>
+          </a:p>
+        </p:txBody>
+      </p:sp>
+      <p:cxnSp>
+        <p:nvCxnSpPr>
+          <p:cNvPr id="9" name="直接箭头连接符 8">
+            <a:extLst>
+              <a:ext uri="{FF2B5EF4-FFF2-40B4-BE49-F238E27FC236}">
+                <a16:creationId xmlns:a16="http://schemas.microsoft.com/office/drawing/2014/main" id="{CDE0169F-7335-41B1-8A4E-CA92CA0C3125}"/>
+              </a:ext>
+            </a:extLst>
+          </p:cNvPr>
+          <p:cNvCxnSpPr>
+            <a:stCxn id="4" idx="3"/>
+            <a:endCxn id="5" idx="1"/>
+          </p:cNvCxnSpPr>
+          <p:nvPr/>
+        </p:nvCxnSpPr>
+        <p:spPr>
+          <a:xfrm>
+            <a:off x="1573481" y="3431969"/>
+            <a:ext cx="372093" cy="0"/>
+          </a:xfrm>
+          <a:prstGeom prst="straightConnector1">
+            <a:avLst/>
+          </a:prstGeom>
+          <a:ln w="28575">
+            <a:solidFill>
+              <a:schemeClr val="tx1"/>
+            </a:solidFill>
+            <a:tailEnd type="triangle"/>
+          </a:ln>
+        </p:spPr>
+        <p:style>
+          <a:lnRef idx="1">
+            <a:schemeClr val="accent1"/>
+          </a:lnRef>
+          <a:fillRef idx="0">
+            <a:schemeClr val="accent1"/>
+          </a:fillRef>
+          <a:effectRef idx="0">
+            <a:schemeClr val="accent1"/>
+          </a:effectRef>
+          <a:fontRef idx="minor">
+            <a:schemeClr val="tx1"/>
+          </a:fontRef>
+        </p:style>
+      </p:cxnSp>
+      <p:cxnSp>
+        <p:nvCxnSpPr>
+          <p:cNvPr id="11" name="直接箭头连接符 10">
+            <a:extLst>
+              <a:ext uri="{FF2B5EF4-FFF2-40B4-BE49-F238E27FC236}">
+                <a16:creationId xmlns:a16="http://schemas.microsoft.com/office/drawing/2014/main" id="{9C936D72-54A3-4A47-9F94-81DA01F02515}"/>
+              </a:ext>
+            </a:extLst>
+          </p:cNvPr>
+          <p:cNvCxnSpPr>
+            <a:cxnSpLocks/>
+            <a:stCxn id="5" idx="3"/>
+            <a:endCxn id="6" idx="1"/>
+          </p:cNvCxnSpPr>
+          <p:nvPr/>
+        </p:nvCxnSpPr>
+        <p:spPr>
+          <a:xfrm flipV="1">
+            <a:off x="3236027" y="3429000"/>
+            <a:ext cx="372093" cy="2969"/>
+          </a:xfrm>
+          <a:prstGeom prst="straightConnector1">
+            <a:avLst/>
+          </a:prstGeom>
+          <a:ln w="28575">
+            <a:solidFill>
+              <a:schemeClr val="tx1"/>
+            </a:solidFill>
+            <a:tailEnd type="triangle"/>
+          </a:ln>
+        </p:spPr>
+        <p:style>
+          <a:lnRef idx="1">
+            <a:schemeClr val="accent1"/>
+          </a:lnRef>
+          <a:fillRef idx="0">
+            <a:schemeClr val="accent1"/>
+          </a:fillRef>
+          <a:effectRef idx="0">
+            <a:schemeClr val="accent1"/>
+          </a:effectRef>
+          <a:fontRef idx="minor">
+            <a:schemeClr val="tx1"/>
+          </a:fontRef>
+        </p:style>
+      </p:cxnSp>
+      <p:cxnSp>
+        <p:nvCxnSpPr>
+          <p:cNvPr id="13" name="直接箭头连接符 12">
+            <a:extLst>
+              <a:ext uri="{FF2B5EF4-FFF2-40B4-BE49-F238E27FC236}">
+                <a16:creationId xmlns:a16="http://schemas.microsoft.com/office/drawing/2014/main" id="{6D332E1F-D0E1-454D-9F79-0E219B4C84E9}"/>
+              </a:ext>
+            </a:extLst>
+          </p:cNvPr>
+          <p:cNvCxnSpPr>
+            <a:cxnSpLocks/>
+            <a:stCxn id="6" idx="2"/>
+            <a:endCxn id="7" idx="0"/>
+          </p:cNvCxnSpPr>
+          <p:nvPr/>
+        </p:nvCxnSpPr>
+        <p:spPr>
+          <a:xfrm flipH="1">
+            <a:off x="5031674" y="4083999"/>
+            <a:ext cx="1" cy="671574"/>
+          </a:xfrm>
+          <a:prstGeom prst="straightConnector1">
+            <a:avLst/>
+          </a:prstGeom>
+          <a:ln w="28575">
+            <a:solidFill>
+              <a:schemeClr val="tx1"/>
+            </a:solidFill>
+            <a:tailEnd type="triangle"/>
+          </a:ln>
+        </p:spPr>
+        <p:style>
+          <a:lnRef idx="1">
+            <a:schemeClr val="accent1"/>
+          </a:lnRef>
+          <a:fillRef idx="0">
+            <a:schemeClr val="accent1"/>
+          </a:fillRef>
+          <a:effectRef idx="0">
+            <a:schemeClr val="accent1"/>
+          </a:effectRef>
+          <a:fontRef idx="minor">
+            <a:schemeClr val="tx1"/>
+          </a:fontRef>
+        </p:style>
+      </p:cxnSp>
+      <p:cxnSp>
+        <p:nvCxnSpPr>
+          <p:cNvPr id="16" name="连接符: 肘形 15">
+            <a:extLst>
+              <a:ext uri="{FF2B5EF4-FFF2-40B4-BE49-F238E27FC236}">
+                <a16:creationId xmlns:a16="http://schemas.microsoft.com/office/drawing/2014/main" id="{79FA2FBE-EA0A-4C1A-903E-64612347A903}"/>
+              </a:ext>
+            </a:extLst>
+          </p:cNvPr>
+          <p:cNvCxnSpPr>
+            <a:stCxn id="7" idx="1"/>
+            <a:endCxn id="4" idx="2"/>
+          </p:cNvCxnSpPr>
+          <p:nvPr/>
+        </p:nvCxnSpPr>
+        <p:spPr>
+          <a:xfrm rot="10800000">
+            <a:off x="905494" y="3792682"/>
+            <a:ext cx="3341666" cy="1323604"/>
+          </a:xfrm>
+          <a:prstGeom prst="bentConnector2">
+            <a:avLst/>
+          </a:prstGeom>
+          <a:ln w="28575">
+            <a:solidFill>
+              <a:schemeClr val="tx1"/>
+            </a:solidFill>
+            <a:tailEnd type="triangle"/>
+          </a:ln>
+        </p:spPr>
+        <p:style>
+          <a:lnRef idx="1">
+            <a:schemeClr val="accent1"/>
+          </a:lnRef>
+          <a:fillRef idx="0">
+            <a:schemeClr val="accent1"/>
+          </a:fillRef>
+          <a:effectRef idx="0">
+            <a:schemeClr val="accent1"/>
+          </a:effectRef>
+          <a:fontRef idx="minor">
+            <a:schemeClr val="tx1"/>
+          </a:fontRef>
+        </p:style>
+      </p:cxnSp>
+      <p:sp>
+        <p:nvSpPr>
+          <p:cNvPr id="17" name="箭头: 上弧形 16">
+            <a:extLst>
+              <a:ext uri="{FF2B5EF4-FFF2-40B4-BE49-F238E27FC236}">
+                <a16:creationId xmlns:a16="http://schemas.microsoft.com/office/drawing/2014/main" id="{5FCBA98E-0F47-43D3-93C6-2E60C57C647B}"/>
+              </a:ext>
+            </a:extLst>
+          </p:cNvPr>
+          <p:cNvSpPr/>
+          <p:nvPr/>
+        </p:nvSpPr>
+        <p:spPr>
+          <a:xfrm>
+            <a:off x="2369127" y="4062104"/>
+            <a:ext cx="789710" cy="504702"/>
+          </a:xfrm>
+          <a:prstGeom prst="curvedDownArrow">
+            <a:avLst/>
+          </a:prstGeom>
+          <a:noFill/>
+          <a:ln w="28575">
+            <a:solidFill>
+              <a:schemeClr val="tx1"/>
+            </a:solidFill>
+          </a:ln>
+        </p:spPr>
+        <p:style>
+          <a:lnRef idx="2">
+            <a:schemeClr val="accent1">
+              <a:shade val="50000"/>
+            </a:schemeClr>
+          </a:lnRef>
+          <a:fillRef idx="1">
+            <a:schemeClr val="accent1"/>
+          </a:fillRef>
+          <a:effectRef idx="0">
+            <a:schemeClr val="accent1"/>
+          </a:effectRef>
+          <a:fontRef idx="minor">
+            <a:schemeClr val="lt1"/>
+          </a:fontRef>
+        </p:style>
+        <p:txBody>
+          <a:bodyPr rtlCol="0" anchor="ctr"/>
+          <a:lstStyle/>
+          <a:p>
+            <a:pPr algn="ctr"/>
+            <a:endParaRPr lang="zh-CN" altLang="en-US">
+              <a:solidFill>
+                <a:schemeClr val="tx1"/>
+              </a:solidFill>
+            </a:endParaRPr>
+          </a:p>
+        </p:txBody>
+      </p:sp>
+      <p:sp>
+        <p:nvSpPr>
+          <p:cNvPr id="20" name="文本框 19">
+            <a:extLst>
+              <a:ext uri="{FF2B5EF4-FFF2-40B4-BE49-F238E27FC236}">
+                <a16:creationId xmlns:a16="http://schemas.microsoft.com/office/drawing/2014/main" id="{6C02E4F0-01C7-45C5-A0A0-A89093063A8E}"/>
+              </a:ext>
+            </a:extLst>
+          </p:cNvPr>
+          <p:cNvSpPr txBox="1"/>
+          <p:nvPr/>
+        </p:nvSpPr>
+        <p:spPr>
+          <a:xfrm>
+            <a:off x="2056096" y="4672269"/>
+            <a:ext cx="1415772" cy="338554"/>
+          </a:xfrm>
+          <a:prstGeom prst="rect">
+            <a:avLst/>
+          </a:prstGeom>
+          <a:noFill/>
+        </p:spPr>
+        <p:txBody>
+          <a:bodyPr wrap="none" rtlCol="0">
+            <a:spAutoFit/>
+          </a:bodyPr>
+          <a:lstStyle/>
+          <a:p>
+            <a:r>
+              <a:rPr lang="zh-CN" altLang="en-US" sz="1600" dirty="0">
+                <a:latin typeface="宋体" panose="02010600030101010101" pitchFamily="2" charset="-122"/>
+                <a:ea typeface="宋体" panose="02010600030101010101" pitchFamily="2" charset="-122"/>
+              </a:rPr>
+              <a:t>解释器主循环</a:t>
+            </a:r>
+          </a:p>
+        </p:txBody>
+      </p:sp>
+      <p:sp>
+        <p:nvSpPr>
+          <p:cNvPr id="23" name="文本框 22">
+            <a:extLst>
+              <a:ext uri="{FF2B5EF4-FFF2-40B4-BE49-F238E27FC236}">
+                <a16:creationId xmlns:a16="http://schemas.microsoft.com/office/drawing/2014/main" id="{1D9B05A9-0493-4293-B5DA-3C829751A07F}"/>
+              </a:ext>
+            </a:extLst>
+          </p:cNvPr>
+          <p:cNvSpPr txBox="1"/>
+          <p:nvPr/>
+        </p:nvSpPr>
+        <p:spPr>
+          <a:xfrm>
+            <a:off x="5041654" y="4228252"/>
+            <a:ext cx="619080" cy="338554"/>
+          </a:xfrm>
+          <a:prstGeom prst="rect">
+            <a:avLst/>
+          </a:prstGeom>
+          <a:noFill/>
+        </p:spPr>
+        <p:txBody>
+          <a:bodyPr wrap="none" rtlCol="0">
+            <a:spAutoFit/>
+          </a:bodyPr>
+          <a:lstStyle/>
+          <a:p>
+            <a:r>
+              <a:rPr lang="en-US" altLang="zh-CN" sz="1600" dirty="0">
+                <a:latin typeface="Times New Roman" panose="02020603050405020304" pitchFamily="18" charset="0"/>
+                <a:cs typeface="Times New Roman" panose="02020603050405020304" pitchFamily="18" charset="0"/>
+              </a:rPr>
+              <a:t>False</a:t>
+            </a:r>
+            <a:endParaRPr lang="zh-CN" altLang="en-US" sz="1600" dirty="0">
+              <a:latin typeface="Times New Roman" panose="02020603050405020304" pitchFamily="18" charset="0"/>
+              <a:cs typeface="Times New Roman" panose="02020603050405020304" pitchFamily="18" charset="0"/>
+            </a:endParaRPr>
+          </a:p>
+        </p:txBody>
+      </p:sp>
+      <p:sp>
+        <p:nvSpPr>
+          <p:cNvPr id="24" name="矩形 23">
+            <a:extLst>
+              <a:ext uri="{FF2B5EF4-FFF2-40B4-BE49-F238E27FC236}">
+                <a16:creationId xmlns:a16="http://schemas.microsoft.com/office/drawing/2014/main" id="{E450E87F-1524-419F-AB4E-E76577A3FAD6}"/>
+              </a:ext>
+            </a:extLst>
+          </p:cNvPr>
+          <p:cNvSpPr/>
+          <p:nvPr/>
+        </p:nvSpPr>
+        <p:spPr>
+          <a:xfrm>
+            <a:off x="3809505" y="1381001"/>
+            <a:ext cx="2444337" cy="721426"/>
+          </a:xfrm>
+          <a:prstGeom prst="rect">
+            <a:avLst/>
+          </a:prstGeom>
+          <a:noFill/>
+          <a:ln w="28575">
+            <a:solidFill>
+              <a:schemeClr val="tx1"/>
+            </a:solidFill>
+          </a:ln>
+        </p:spPr>
+        <p:style>
+          <a:lnRef idx="2">
+            <a:schemeClr val="accent1">
+              <a:shade val="50000"/>
+            </a:schemeClr>
+          </a:lnRef>
+          <a:fillRef idx="1">
+            <a:schemeClr val="accent1"/>
+          </a:fillRef>
+          <a:effectRef idx="0">
+            <a:schemeClr val="accent1"/>
+          </a:effectRef>
+          <a:fontRef idx="minor">
+            <a:schemeClr val="lt1"/>
+          </a:fontRef>
+        </p:style>
+        <p:txBody>
+          <a:bodyPr rtlCol="0" anchor="ctr"/>
+          <a:lstStyle/>
+          <a:p>
+            <a:pPr algn="ctr"/>
+            <a:r>
+              <a:rPr lang="en-US" altLang="zh-CN" sz="1600" dirty="0">
+                <a:solidFill>
+                  <a:schemeClr val="tx1"/>
+                </a:solidFill>
+                <a:latin typeface="Times New Roman" panose="02020603050405020304" pitchFamily="18" charset="0"/>
+                <a:ea typeface="宋体" panose="02010600030101010101" pitchFamily="2" charset="-122"/>
+                <a:cs typeface="Times New Roman" panose="02020603050405020304" pitchFamily="18" charset="0"/>
+              </a:rPr>
+              <a:t>pending_exception_unwind</a:t>
+            </a:r>
+            <a:endParaRPr lang="zh-CN" altLang="en-US" sz="1600" dirty="0">
+              <a:solidFill>
+                <a:schemeClr val="tx1"/>
+              </a:solidFill>
+              <a:latin typeface="Times New Roman" panose="02020603050405020304" pitchFamily="18" charset="0"/>
+              <a:ea typeface="宋体" panose="02010600030101010101" pitchFamily="2" charset="-122"/>
+              <a:cs typeface="Times New Roman" panose="02020603050405020304" pitchFamily="18" charset="0"/>
+            </a:endParaRPr>
+          </a:p>
+        </p:txBody>
+      </p:sp>
+      <p:cxnSp>
+        <p:nvCxnSpPr>
+          <p:cNvPr id="28" name="直接箭头连接符 27">
+            <a:extLst>
+              <a:ext uri="{FF2B5EF4-FFF2-40B4-BE49-F238E27FC236}">
+                <a16:creationId xmlns:a16="http://schemas.microsoft.com/office/drawing/2014/main" id="{29568522-AC4D-46D2-8638-701E0519EA6A}"/>
+              </a:ext>
+            </a:extLst>
+          </p:cNvPr>
+          <p:cNvCxnSpPr>
+            <a:stCxn id="6" idx="0"/>
+            <a:endCxn id="24" idx="2"/>
+          </p:cNvCxnSpPr>
+          <p:nvPr/>
+        </p:nvCxnSpPr>
+        <p:spPr>
+          <a:xfrm flipH="1" flipV="1">
+            <a:off x="5031674" y="2102427"/>
+            <a:ext cx="1" cy="671574"/>
+          </a:xfrm>
+          <a:prstGeom prst="straightConnector1">
+            <a:avLst/>
+          </a:prstGeom>
+          <a:ln w="28575">
+            <a:solidFill>
+              <a:schemeClr val="tx1"/>
+            </a:solidFill>
+            <a:tailEnd type="triangle"/>
+          </a:ln>
+        </p:spPr>
+        <p:style>
+          <a:lnRef idx="1">
+            <a:schemeClr val="accent1"/>
+          </a:lnRef>
+          <a:fillRef idx="0">
+            <a:schemeClr val="accent1"/>
+          </a:fillRef>
+          <a:effectRef idx="0">
+            <a:schemeClr val="accent1"/>
+          </a:effectRef>
+          <a:fontRef idx="minor">
+            <a:schemeClr val="tx1"/>
+          </a:fontRef>
+        </p:style>
+      </p:cxnSp>
+      <p:sp>
+        <p:nvSpPr>
+          <p:cNvPr id="29" name="文本框 28">
+            <a:extLst>
+              <a:ext uri="{FF2B5EF4-FFF2-40B4-BE49-F238E27FC236}">
+                <a16:creationId xmlns:a16="http://schemas.microsoft.com/office/drawing/2014/main" id="{0F1D5E8B-883E-45E2-A5F4-A8E59C7E48A8}"/>
+              </a:ext>
+            </a:extLst>
+          </p:cNvPr>
+          <p:cNvSpPr txBox="1"/>
+          <p:nvPr/>
+        </p:nvSpPr>
+        <p:spPr>
+          <a:xfrm>
+            <a:off x="5073484" y="2291194"/>
+            <a:ext cx="565348" cy="338554"/>
+          </a:xfrm>
+          <a:prstGeom prst="rect">
+            <a:avLst/>
+          </a:prstGeom>
+          <a:noFill/>
+        </p:spPr>
+        <p:txBody>
+          <a:bodyPr wrap="none" rtlCol="0">
+            <a:spAutoFit/>
+          </a:bodyPr>
+          <a:lstStyle/>
+          <a:p>
+            <a:r>
+              <a:rPr lang="en-US" altLang="zh-CN" sz="1600" dirty="0">
+                <a:latin typeface="Times New Roman" panose="02020603050405020304" pitchFamily="18" charset="0"/>
+                <a:cs typeface="Times New Roman" panose="02020603050405020304" pitchFamily="18" charset="0"/>
+              </a:rPr>
+              <a:t>True</a:t>
+            </a:r>
+            <a:endParaRPr lang="zh-CN" altLang="en-US" sz="1600" dirty="0">
+              <a:latin typeface="Times New Roman" panose="02020603050405020304" pitchFamily="18" charset="0"/>
+              <a:cs typeface="Times New Roman" panose="02020603050405020304" pitchFamily="18" charset="0"/>
+            </a:endParaRPr>
+          </a:p>
+        </p:txBody>
+      </p:sp>
+      <p:sp>
+        <p:nvSpPr>
+          <p:cNvPr id="30" name="矩形 29">
+            <a:extLst>
+              <a:ext uri="{FF2B5EF4-FFF2-40B4-BE49-F238E27FC236}">
+                <a16:creationId xmlns:a16="http://schemas.microsoft.com/office/drawing/2014/main" id="{C178BD1B-3E88-40E6-9BF4-6D89F141DA39}"/>
+              </a:ext>
+            </a:extLst>
+          </p:cNvPr>
+          <p:cNvSpPr/>
+          <p:nvPr/>
+        </p:nvSpPr>
+        <p:spPr>
+          <a:xfrm>
+            <a:off x="7180487" y="1399926"/>
+            <a:ext cx="2729840" cy="721426"/>
+          </a:xfrm>
+          <a:prstGeom prst="rect">
+            <a:avLst/>
+          </a:prstGeom>
+          <a:noFill/>
+          <a:ln w="28575">
+            <a:solidFill>
+              <a:schemeClr val="tx1"/>
+            </a:solidFill>
+          </a:ln>
+        </p:spPr>
+        <p:style>
+          <a:lnRef idx="2">
+            <a:schemeClr val="accent1">
+              <a:shade val="50000"/>
+            </a:schemeClr>
+          </a:lnRef>
+          <a:fillRef idx="1">
+            <a:schemeClr val="accent1"/>
+          </a:fillRef>
+          <a:effectRef idx="0">
+            <a:schemeClr val="accent1"/>
+          </a:effectRef>
+          <a:fontRef idx="minor">
+            <a:schemeClr val="lt1"/>
+          </a:fontRef>
+        </p:style>
+        <p:txBody>
+          <a:bodyPr rtlCol="0" anchor="ctr"/>
+          <a:lstStyle/>
+          <a:p>
+            <a:pPr algn="ctr"/>
+            <a:r>
+              <a:rPr lang="zh-CN" altLang="en-US" sz="1600" dirty="0">
+                <a:solidFill>
+                  <a:schemeClr val="tx1"/>
+                </a:solidFill>
+                <a:latin typeface="Times New Roman" panose="02020603050405020304" pitchFamily="18" charset="0"/>
+                <a:ea typeface="宋体" panose="02010600030101010101" pitchFamily="2" charset="-122"/>
+                <a:cs typeface="Times New Roman" panose="02020603050405020304" pitchFamily="18" charset="0"/>
+              </a:rPr>
+              <a:t>根据当前 </a:t>
+            </a:r>
+            <a:r>
+              <a:rPr lang="en-US" altLang="zh-CN" sz="1600" dirty="0">
+                <a:solidFill>
+                  <a:schemeClr val="tx1"/>
+                </a:solidFill>
+                <a:latin typeface="Times New Roman" panose="02020603050405020304" pitchFamily="18" charset="0"/>
+                <a:ea typeface="宋体" panose="02010600030101010101" pitchFamily="2" charset="-122"/>
+                <a:cs typeface="Times New Roman" panose="02020603050405020304" pitchFamily="18" charset="0"/>
+              </a:rPr>
+              <a:t>pc </a:t>
+            </a:r>
+            <a:r>
+              <a:rPr lang="zh-CN" altLang="en-US" sz="1600" dirty="0">
+                <a:solidFill>
+                  <a:schemeClr val="tx1"/>
+                </a:solidFill>
+                <a:latin typeface="Times New Roman" panose="02020603050405020304" pitchFamily="18" charset="0"/>
+                <a:ea typeface="宋体" panose="02010600030101010101" pitchFamily="2" charset="-122"/>
+                <a:cs typeface="Times New Roman" panose="02020603050405020304" pitchFamily="18" charset="0"/>
+              </a:rPr>
+              <a:t>查询栈帧异常表 </a:t>
+            </a:r>
+            <a:r>
+              <a:rPr lang="en-US" altLang="zh-CN" sz="1600" dirty="0">
+                <a:solidFill>
+                  <a:schemeClr val="tx1"/>
+                </a:solidFill>
+                <a:latin typeface="Times New Roman" panose="02020603050405020304" pitchFamily="18" charset="0"/>
+                <a:ea typeface="宋体" panose="02010600030101010101" pitchFamily="2" charset="-122"/>
+                <a:cs typeface="Times New Roman" panose="02020603050405020304" pitchFamily="18" charset="0"/>
+              </a:rPr>
+              <a:t>LookupHandler()</a:t>
+            </a:r>
+            <a:endParaRPr lang="zh-CN" altLang="en-US" sz="1600" dirty="0">
+              <a:solidFill>
+                <a:schemeClr val="tx1"/>
+              </a:solidFill>
+              <a:latin typeface="Times New Roman" panose="02020603050405020304" pitchFamily="18" charset="0"/>
+              <a:ea typeface="宋体" panose="02010600030101010101" pitchFamily="2" charset="-122"/>
+              <a:cs typeface="Times New Roman" panose="02020603050405020304" pitchFamily="18" charset="0"/>
+            </a:endParaRPr>
+          </a:p>
+        </p:txBody>
+      </p:sp>
+      <p:cxnSp>
+        <p:nvCxnSpPr>
+          <p:cNvPr id="32" name="直接箭头连接符 31">
+            <a:extLst>
+              <a:ext uri="{FF2B5EF4-FFF2-40B4-BE49-F238E27FC236}">
+                <a16:creationId xmlns:a16="http://schemas.microsoft.com/office/drawing/2014/main" id="{E02CF3A4-5B9E-4C6B-B654-D483A556E4EB}"/>
+              </a:ext>
+            </a:extLst>
+          </p:cNvPr>
+          <p:cNvCxnSpPr>
+            <a:stCxn id="24" idx="3"/>
+            <a:endCxn id="30" idx="1"/>
+          </p:cNvCxnSpPr>
+          <p:nvPr/>
+        </p:nvCxnSpPr>
+        <p:spPr>
+          <a:xfrm>
+            <a:off x="6253842" y="1741714"/>
+            <a:ext cx="926645" cy="18925"/>
+          </a:xfrm>
+          <a:prstGeom prst="straightConnector1">
+            <a:avLst/>
+          </a:prstGeom>
+          <a:ln w="28575">
+            <a:solidFill>
+              <a:schemeClr val="tx1"/>
+            </a:solidFill>
+            <a:tailEnd type="triangle"/>
+          </a:ln>
+        </p:spPr>
+        <p:style>
+          <a:lnRef idx="1">
+            <a:schemeClr val="accent1"/>
+          </a:lnRef>
+          <a:fillRef idx="0">
+            <a:schemeClr val="accent1"/>
+          </a:fillRef>
+          <a:effectRef idx="0">
+            <a:schemeClr val="accent1"/>
+          </a:effectRef>
+          <a:fontRef idx="minor">
+            <a:schemeClr val="tx1"/>
+          </a:fontRef>
+        </p:style>
+      </p:cxnSp>
+      <p:sp>
+        <p:nvSpPr>
+          <p:cNvPr id="33" name="流程图: 决策 32">
+            <a:extLst>
+              <a:ext uri="{FF2B5EF4-FFF2-40B4-BE49-F238E27FC236}">
+                <a16:creationId xmlns:a16="http://schemas.microsoft.com/office/drawing/2014/main" id="{2C2CBFC9-8C83-4F2C-A163-81FBA669583C}"/>
+              </a:ext>
+            </a:extLst>
+          </p:cNvPr>
+          <p:cNvSpPr/>
+          <p:nvPr/>
+        </p:nvSpPr>
+        <p:spPr>
+          <a:xfrm>
+            <a:off x="7543055" y="2651973"/>
+            <a:ext cx="2004704" cy="893619"/>
+          </a:xfrm>
+          <a:prstGeom prst="flowChartDecision">
+            <a:avLst/>
+          </a:prstGeom>
+          <a:noFill/>
+          <a:ln w="28575">
+            <a:solidFill>
+              <a:schemeClr val="tx1"/>
+            </a:solidFill>
+          </a:ln>
+        </p:spPr>
+        <p:style>
+          <a:lnRef idx="2">
+            <a:schemeClr val="accent1">
+              <a:shade val="50000"/>
+            </a:schemeClr>
+          </a:lnRef>
+          <a:fillRef idx="1">
+            <a:schemeClr val="accent1"/>
+          </a:fillRef>
+          <a:effectRef idx="0">
+            <a:schemeClr val="accent1"/>
+          </a:effectRef>
+          <a:fontRef idx="minor">
+            <a:schemeClr val="lt1"/>
+          </a:fontRef>
+        </p:style>
+        <p:txBody>
+          <a:bodyPr rtlCol="0" anchor="ctr"/>
+          <a:lstStyle/>
+          <a:p>
+            <a:pPr algn="ctr"/>
+            <a:r>
+              <a:rPr lang="zh-CN" altLang="en-US" sz="1600" dirty="0">
+                <a:solidFill>
+                  <a:schemeClr val="tx1"/>
+                </a:solidFill>
+                <a:latin typeface="Times New Roman" panose="02020603050405020304" pitchFamily="18" charset="0"/>
+                <a:cs typeface="Times New Roman" panose="02020603050405020304" pitchFamily="18" charset="0"/>
+              </a:rPr>
+              <a:t>命中异常</a:t>
+            </a:r>
+            <a:r>
+              <a:rPr lang="en-US" altLang="zh-CN" sz="1600" dirty="0">
+                <a:solidFill>
+                  <a:schemeClr val="tx1"/>
+                </a:solidFill>
+                <a:latin typeface="Times New Roman" panose="02020603050405020304" pitchFamily="18" charset="0"/>
+                <a:cs typeface="Times New Roman" panose="02020603050405020304" pitchFamily="18" charset="0"/>
+              </a:rPr>
+              <a:t> handler</a:t>
+            </a:r>
+            <a:endParaRPr lang="zh-CN" altLang="en-US" sz="1600" dirty="0">
+              <a:solidFill>
+                <a:schemeClr val="tx1"/>
+              </a:solidFill>
+              <a:latin typeface="Times New Roman" panose="02020603050405020304" pitchFamily="18" charset="0"/>
+              <a:cs typeface="Times New Roman" panose="02020603050405020304" pitchFamily="18" charset="0"/>
+            </a:endParaRPr>
+          </a:p>
+        </p:txBody>
+      </p:sp>
+      <p:sp>
+        <p:nvSpPr>
+          <p:cNvPr id="39" name="矩形 38">
+            <a:extLst>
+              <a:ext uri="{FF2B5EF4-FFF2-40B4-BE49-F238E27FC236}">
+                <a16:creationId xmlns:a16="http://schemas.microsoft.com/office/drawing/2014/main" id="{B6537823-5F38-411D-AD64-49DB0FDD9C21}"/>
+              </a:ext>
+            </a:extLst>
+          </p:cNvPr>
+          <p:cNvSpPr/>
+          <p:nvPr/>
+        </p:nvSpPr>
+        <p:spPr>
+          <a:xfrm>
+            <a:off x="6142794" y="4009408"/>
+            <a:ext cx="2247124" cy="873633"/>
+          </a:xfrm>
+          <a:prstGeom prst="rect">
+            <a:avLst/>
+          </a:prstGeom>
+          <a:noFill/>
+          <a:ln w="28575">
+            <a:solidFill>
+              <a:schemeClr val="tx1"/>
+            </a:solidFill>
+          </a:ln>
+        </p:spPr>
+        <p:style>
+          <a:lnRef idx="2">
+            <a:schemeClr val="accent1">
+              <a:shade val="50000"/>
+            </a:schemeClr>
+          </a:lnRef>
+          <a:fillRef idx="1">
+            <a:schemeClr val="accent1"/>
+          </a:fillRef>
+          <a:effectRef idx="0">
+            <a:schemeClr val="accent1"/>
+          </a:effectRef>
+          <a:fontRef idx="minor">
+            <a:schemeClr val="lt1"/>
+          </a:fontRef>
+        </p:style>
+        <p:txBody>
+          <a:bodyPr rtlCol="0" anchor="ctr"/>
+          <a:lstStyle/>
+          <a:p>
+            <a:pPr algn="ctr"/>
+            <a:r>
+              <a:rPr lang="zh-CN" altLang="en-US" sz="1600" dirty="0">
+                <a:solidFill>
+                  <a:schemeClr val="tx1"/>
+                </a:solidFill>
+                <a:latin typeface="Times New Roman" panose="02020603050405020304" pitchFamily="18" charset="0"/>
+                <a:ea typeface="宋体" panose="02010600030101010101" pitchFamily="2" charset="-122"/>
+                <a:cs typeface="Times New Roman" panose="02020603050405020304" pitchFamily="18" charset="0"/>
+              </a:rPr>
+              <a:t>恢复操作数栈深度</a:t>
+            </a:r>
+            <a:endParaRPr lang="en-US" altLang="zh-CN" sz="1600" dirty="0">
+              <a:solidFill>
+                <a:schemeClr val="tx1"/>
+              </a:solidFill>
+              <a:latin typeface="Times New Roman" panose="02020603050405020304" pitchFamily="18" charset="0"/>
+              <a:ea typeface="宋体" panose="02010600030101010101" pitchFamily="2" charset="-122"/>
+              <a:cs typeface="Times New Roman" panose="02020603050405020304" pitchFamily="18" charset="0"/>
+            </a:endParaRPr>
+          </a:p>
+          <a:p>
+            <a:pPr algn="ctr"/>
+            <a:r>
+              <a:rPr lang="zh-CN" altLang="en-US" sz="1600" dirty="0">
+                <a:solidFill>
+                  <a:schemeClr val="tx1"/>
+                </a:solidFill>
+                <a:latin typeface="Times New Roman" panose="02020603050405020304" pitchFamily="18" charset="0"/>
+                <a:ea typeface="宋体" panose="02010600030101010101" pitchFamily="2" charset="-122"/>
+                <a:cs typeface="Times New Roman" panose="02020603050405020304" pitchFamily="18" charset="0"/>
+              </a:rPr>
+              <a:t>异常对象压入操作数栈</a:t>
+            </a:r>
+            <a:endParaRPr lang="en-US" altLang="zh-CN" sz="1600" dirty="0">
+              <a:solidFill>
+                <a:schemeClr val="tx1"/>
+              </a:solidFill>
+              <a:latin typeface="Times New Roman" panose="02020603050405020304" pitchFamily="18" charset="0"/>
+              <a:ea typeface="宋体" panose="02010600030101010101" pitchFamily="2" charset="-122"/>
+              <a:cs typeface="Times New Roman" panose="02020603050405020304" pitchFamily="18" charset="0"/>
+            </a:endParaRPr>
+          </a:p>
+          <a:p>
+            <a:pPr algn="ctr"/>
+            <a:r>
+              <a:rPr lang="en-US" altLang="zh-CN" sz="1600" dirty="0">
+                <a:solidFill>
+                  <a:schemeClr val="tx1"/>
+                </a:solidFill>
+                <a:latin typeface="Times New Roman" panose="02020603050405020304" pitchFamily="18" charset="0"/>
+                <a:ea typeface="宋体" panose="02010600030101010101" pitchFamily="2" charset="-122"/>
+                <a:cs typeface="Times New Roman" panose="02020603050405020304" pitchFamily="18" charset="0"/>
+              </a:rPr>
+              <a:t>pc </a:t>
+            </a:r>
+            <a:r>
+              <a:rPr lang="zh-CN" altLang="en-US" sz="1600" dirty="0">
+                <a:solidFill>
+                  <a:schemeClr val="tx1"/>
+                </a:solidFill>
+                <a:latin typeface="Times New Roman" panose="02020603050405020304" pitchFamily="18" charset="0"/>
+                <a:ea typeface="宋体" panose="02010600030101010101" pitchFamily="2" charset="-122"/>
+                <a:cs typeface="Times New Roman" panose="02020603050405020304" pitchFamily="18" charset="0"/>
+              </a:rPr>
+              <a:t>跳到异常 </a:t>
+            </a:r>
+            <a:r>
+              <a:rPr lang="en-US" altLang="zh-CN" sz="1600" dirty="0">
+                <a:solidFill>
+                  <a:schemeClr val="tx1"/>
+                </a:solidFill>
+                <a:latin typeface="Times New Roman" panose="02020603050405020304" pitchFamily="18" charset="0"/>
+                <a:ea typeface="宋体" panose="02010600030101010101" pitchFamily="2" charset="-122"/>
+                <a:cs typeface="Times New Roman" panose="02020603050405020304" pitchFamily="18" charset="0"/>
+              </a:rPr>
+              <a:t>handler</a:t>
+            </a:r>
+          </a:p>
+        </p:txBody>
+      </p:sp>
+      <p:sp>
+        <p:nvSpPr>
+          <p:cNvPr id="40" name="矩形 39">
+            <a:extLst>
+              <a:ext uri="{FF2B5EF4-FFF2-40B4-BE49-F238E27FC236}">
+                <a16:creationId xmlns:a16="http://schemas.microsoft.com/office/drawing/2014/main" id="{09B07E46-E766-43C8-8E14-A1CC1423B99C}"/>
+              </a:ext>
+            </a:extLst>
+          </p:cNvPr>
+          <p:cNvSpPr/>
+          <p:nvPr/>
+        </p:nvSpPr>
+        <p:spPr>
+          <a:xfrm>
+            <a:off x="8716524" y="4009407"/>
+            <a:ext cx="2247124" cy="873633"/>
+          </a:xfrm>
+          <a:prstGeom prst="rect">
+            <a:avLst/>
+          </a:prstGeom>
+          <a:noFill/>
+          <a:ln w="28575">
+            <a:solidFill>
+              <a:schemeClr val="tx1"/>
+            </a:solidFill>
+          </a:ln>
+        </p:spPr>
+        <p:style>
+          <a:lnRef idx="2">
+            <a:schemeClr val="accent1">
+              <a:shade val="50000"/>
+            </a:schemeClr>
+          </a:lnRef>
+          <a:fillRef idx="1">
+            <a:schemeClr val="accent1"/>
+          </a:fillRef>
+          <a:effectRef idx="0">
+            <a:schemeClr val="accent1"/>
+          </a:effectRef>
+          <a:fontRef idx="minor">
+            <a:schemeClr val="lt1"/>
+          </a:fontRef>
+        </p:style>
+        <p:txBody>
+          <a:bodyPr rtlCol="0" anchor="ctr"/>
+          <a:lstStyle/>
+          <a:p>
+            <a:pPr algn="ctr"/>
+            <a:r>
+              <a:rPr lang="en-US" altLang="zh-CN" sz="1600" dirty="0">
+                <a:solidFill>
+                  <a:schemeClr val="tx1"/>
+                </a:solidFill>
+                <a:latin typeface="Times New Roman" panose="02020603050405020304" pitchFamily="18" charset="0"/>
+                <a:ea typeface="宋体" panose="02010600030101010101" pitchFamily="2" charset="-122"/>
+                <a:cs typeface="Times New Roman" panose="02020603050405020304" pitchFamily="18" charset="0"/>
+              </a:rPr>
+              <a:t>UnwindCurrentFrame()</a:t>
+            </a:r>
+          </a:p>
+          <a:p>
+            <a:pPr algn="ctr"/>
+            <a:r>
+              <a:rPr lang="zh-CN" altLang="en-US" sz="1600" dirty="0">
+                <a:solidFill>
+                  <a:schemeClr val="tx1"/>
+                </a:solidFill>
+                <a:latin typeface="Times New Roman" panose="02020603050405020304" pitchFamily="18" charset="0"/>
+                <a:ea typeface="宋体" panose="02010600030101010101" pitchFamily="2" charset="-122"/>
+                <a:cs typeface="Times New Roman" panose="02020603050405020304" pitchFamily="18" charset="0"/>
+              </a:rPr>
+              <a:t>弹出当前栈帧</a:t>
+            </a:r>
+          </a:p>
+          <a:p>
+            <a:pPr algn="ctr"/>
+            <a:r>
+              <a:rPr lang="zh-CN" altLang="en-US" sz="1600" dirty="0">
+                <a:solidFill>
+                  <a:schemeClr val="tx1"/>
+                </a:solidFill>
+                <a:latin typeface="Times New Roman" panose="02020603050405020304" pitchFamily="18" charset="0"/>
+                <a:ea typeface="宋体" panose="02010600030101010101" pitchFamily="2" charset="-122"/>
+                <a:cs typeface="Times New Roman" panose="02020603050405020304" pitchFamily="18" charset="0"/>
+              </a:rPr>
+              <a:t>回溯到 </a:t>
+            </a:r>
+            <a:r>
+              <a:rPr lang="en-US" altLang="zh-CN" sz="1600" dirty="0">
+                <a:solidFill>
+                  <a:schemeClr val="tx1"/>
+                </a:solidFill>
+                <a:latin typeface="Times New Roman" panose="02020603050405020304" pitchFamily="18" charset="0"/>
+                <a:ea typeface="宋体" panose="02010600030101010101" pitchFamily="2" charset="-122"/>
+                <a:cs typeface="Times New Roman" panose="02020603050405020304" pitchFamily="18" charset="0"/>
+              </a:rPr>
+              <a:t>caller </a:t>
+            </a:r>
+            <a:r>
+              <a:rPr lang="zh-CN" altLang="en-US" sz="1600" dirty="0">
+                <a:solidFill>
+                  <a:schemeClr val="tx1"/>
+                </a:solidFill>
+                <a:latin typeface="Times New Roman" panose="02020603050405020304" pitchFamily="18" charset="0"/>
+                <a:ea typeface="宋体" panose="02010600030101010101" pitchFamily="2" charset="-122"/>
+                <a:cs typeface="Times New Roman" panose="02020603050405020304" pitchFamily="18" charset="0"/>
+              </a:rPr>
+              <a:t>调用点</a:t>
+            </a:r>
+            <a:endParaRPr lang="en-US" altLang="zh-CN" sz="1600" dirty="0">
+              <a:solidFill>
+                <a:schemeClr val="tx1"/>
+              </a:solidFill>
+              <a:latin typeface="Times New Roman" panose="02020603050405020304" pitchFamily="18" charset="0"/>
+              <a:ea typeface="宋体" panose="02010600030101010101" pitchFamily="2" charset="-122"/>
+              <a:cs typeface="Times New Roman" panose="02020603050405020304" pitchFamily="18" charset="0"/>
+            </a:endParaRPr>
+          </a:p>
+        </p:txBody>
+      </p:sp>
+      <p:cxnSp>
+        <p:nvCxnSpPr>
+          <p:cNvPr id="43" name="连接符: 肘形 42">
+            <a:extLst>
+              <a:ext uri="{FF2B5EF4-FFF2-40B4-BE49-F238E27FC236}">
+                <a16:creationId xmlns:a16="http://schemas.microsoft.com/office/drawing/2014/main" id="{E933DFBC-8F76-49EB-A43B-E043E2A53F4C}"/>
+              </a:ext>
+            </a:extLst>
+          </p:cNvPr>
+          <p:cNvCxnSpPr>
+            <a:stCxn id="33" idx="3"/>
+            <a:endCxn id="40" idx="0"/>
+          </p:cNvCxnSpPr>
+          <p:nvPr/>
+        </p:nvCxnSpPr>
+        <p:spPr>
+          <a:xfrm>
+            <a:off x="9547759" y="3098783"/>
+            <a:ext cx="292327" cy="910624"/>
+          </a:xfrm>
+          <a:prstGeom prst="bentConnector2">
+            <a:avLst/>
+          </a:prstGeom>
+          <a:ln w="28575">
+            <a:solidFill>
+              <a:schemeClr val="tx1"/>
+            </a:solidFill>
+            <a:tailEnd type="triangle"/>
+          </a:ln>
+        </p:spPr>
+        <p:style>
+          <a:lnRef idx="1">
+            <a:schemeClr val="accent1"/>
+          </a:lnRef>
+          <a:fillRef idx="0">
+            <a:schemeClr val="accent1"/>
+          </a:fillRef>
+          <a:effectRef idx="0">
+            <a:schemeClr val="accent1"/>
+          </a:effectRef>
+          <a:fontRef idx="minor">
+            <a:schemeClr val="tx1"/>
+          </a:fontRef>
+        </p:style>
+      </p:cxnSp>
+      <p:cxnSp>
+        <p:nvCxnSpPr>
+          <p:cNvPr id="45" name="连接符: 肘形 44">
+            <a:extLst>
+              <a:ext uri="{FF2B5EF4-FFF2-40B4-BE49-F238E27FC236}">
+                <a16:creationId xmlns:a16="http://schemas.microsoft.com/office/drawing/2014/main" id="{BB474B1E-2B8E-477D-8486-561138BAACB9}"/>
+              </a:ext>
+            </a:extLst>
+          </p:cNvPr>
+          <p:cNvCxnSpPr>
+            <a:stCxn id="33" idx="1"/>
+            <a:endCxn id="39" idx="0"/>
+          </p:cNvCxnSpPr>
+          <p:nvPr/>
+        </p:nvCxnSpPr>
+        <p:spPr>
+          <a:xfrm rot="10800000" flipV="1">
+            <a:off x="7266357" y="3098782"/>
+            <a:ext cx="276699" cy="910625"/>
+          </a:xfrm>
+          <a:prstGeom prst="bentConnector2">
+            <a:avLst/>
+          </a:prstGeom>
+          <a:ln w="28575">
+            <a:solidFill>
+              <a:schemeClr val="tx1"/>
+            </a:solidFill>
+            <a:tailEnd type="triangle"/>
+          </a:ln>
+        </p:spPr>
+        <p:style>
+          <a:lnRef idx="1">
+            <a:schemeClr val="accent1"/>
+          </a:lnRef>
+          <a:fillRef idx="0">
+            <a:schemeClr val="accent1"/>
+          </a:fillRef>
+          <a:effectRef idx="0">
+            <a:schemeClr val="accent1"/>
+          </a:effectRef>
+          <a:fontRef idx="minor">
+            <a:schemeClr val="tx1"/>
+          </a:fontRef>
+        </p:style>
+      </p:cxnSp>
+      <p:cxnSp>
+        <p:nvCxnSpPr>
+          <p:cNvPr id="50" name="直接箭头连接符 49">
+            <a:extLst>
+              <a:ext uri="{FF2B5EF4-FFF2-40B4-BE49-F238E27FC236}">
+                <a16:creationId xmlns:a16="http://schemas.microsoft.com/office/drawing/2014/main" id="{9B954EAC-70C6-4B02-BA4A-EB92B77EB3C5}"/>
+              </a:ext>
+            </a:extLst>
+          </p:cNvPr>
+          <p:cNvCxnSpPr>
+            <a:cxnSpLocks/>
+            <a:stCxn id="30" idx="2"/>
+            <a:endCxn id="33" idx="0"/>
+          </p:cNvCxnSpPr>
+          <p:nvPr/>
+        </p:nvCxnSpPr>
+        <p:spPr>
+          <a:xfrm>
+            <a:off x="8545407" y="2121352"/>
+            <a:ext cx="0" cy="530621"/>
+          </a:xfrm>
+          <a:prstGeom prst="straightConnector1">
+            <a:avLst/>
+          </a:prstGeom>
+          <a:ln w="28575">
+            <a:solidFill>
+              <a:schemeClr val="tx1"/>
+            </a:solidFill>
+            <a:tailEnd type="triangle"/>
+          </a:ln>
+        </p:spPr>
+        <p:style>
+          <a:lnRef idx="1">
+            <a:schemeClr val="accent1"/>
+          </a:lnRef>
+          <a:fillRef idx="0">
+            <a:schemeClr val="accent1"/>
+          </a:fillRef>
+          <a:effectRef idx="0">
+            <a:schemeClr val="accent1"/>
+          </a:effectRef>
+          <a:fontRef idx="minor">
+            <a:schemeClr val="tx1"/>
+          </a:fontRef>
+        </p:style>
+      </p:cxnSp>
+      <p:sp>
+        <p:nvSpPr>
+          <p:cNvPr id="52" name="椭圆 51">
+            <a:extLst>
+              <a:ext uri="{FF2B5EF4-FFF2-40B4-BE49-F238E27FC236}">
+                <a16:creationId xmlns:a16="http://schemas.microsoft.com/office/drawing/2014/main" id="{8CABC55E-AD97-47BD-B0E3-654019C18A6D}"/>
+              </a:ext>
+            </a:extLst>
+          </p:cNvPr>
+          <p:cNvSpPr/>
+          <p:nvPr/>
+        </p:nvSpPr>
+        <p:spPr>
+          <a:xfrm>
+            <a:off x="8378042" y="5039095"/>
+            <a:ext cx="344384" cy="344384"/>
+          </a:xfrm>
+          <a:prstGeom prst="ellipse">
+            <a:avLst/>
+          </a:prstGeom>
+          <a:noFill/>
+          <a:ln w="28575">
+            <a:solidFill>
+              <a:schemeClr val="tx1"/>
+            </a:solidFill>
+          </a:ln>
+        </p:spPr>
+        <p:style>
+          <a:lnRef idx="2">
+            <a:schemeClr val="accent1">
+              <a:shade val="50000"/>
+            </a:schemeClr>
+          </a:lnRef>
+          <a:fillRef idx="1">
+            <a:schemeClr val="accent1"/>
+          </a:fillRef>
+          <a:effectRef idx="0">
+            <a:schemeClr val="accent1"/>
+          </a:effectRef>
+          <a:fontRef idx="minor">
+            <a:schemeClr val="lt1"/>
+          </a:fontRef>
+        </p:style>
+        <p:txBody>
+          <a:bodyPr rtlCol="0" anchor="ctr"/>
+          <a:lstStyle/>
+          <a:p>
+            <a:pPr algn="ctr"/>
+            <a:endParaRPr lang="zh-CN" altLang="en-US"/>
+          </a:p>
+        </p:txBody>
+      </p:sp>
+      <p:cxnSp>
+        <p:nvCxnSpPr>
+          <p:cNvPr id="56" name="连接符: 肘形 55">
+            <a:extLst>
+              <a:ext uri="{FF2B5EF4-FFF2-40B4-BE49-F238E27FC236}">
+                <a16:creationId xmlns:a16="http://schemas.microsoft.com/office/drawing/2014/main" id="{9AF4F870-7C1E-4F1C-8923-7F840E41973B}"/>
+              </a:ext>
+            </a:extLst>
+          </p:cNvPr>
+          <p:cNvCxnSpPr>
+            <a:stCxn id="39" idx="2"/>
+            <a:endCxn id="52" idx="2"/>
+          </p:cNvCxnSpPr>
+          <p:nvPr/>
+        </p:nvCxnSpPr>
+        <p:spPr>
+          <a:xfrm rot="16200000" flipH="1">
+            <a:off x="7658076" y="4491321"/>
+            <a:ext cx="328246" cy="1111686"/>
+          </a:xfrm>
+          <a:prstGeom prst="bentConnector2">
+            <a:avLst/>
+          </a:prstGeom>
+          <a:ln w="28575">
+            <a:solidFill>
+              <a:schemeClr val="tx1"/>
+            </a:solidFill>
+            <a:tailEnd type="triangle"/>
+          </a:ln>
+        </p:spPr>
+        <p:style>
+          <a:lnRef idx="1">
+            <a:schemeClr val="accent1"/>
+          </a:lnRef>
+          <a:fillRef idx="0">
+            <a:schemeClr val="accent1"/>
+          </a:fillRef>
+          <a:effectRef idx="0">
+            <a:schemeClr val="accent1"/>
+          </a:effectRef>
+          <a:fontRef idx="minor">
+            <a:schemeClr val="tx1"/>
+          </a:fontRef>
+        </p:style>
+      </p:cxnSp>
+      <p:cxnSp>
+        <p:nvCxnSpPr>
+          <p:cNvPr id="58" name="连接符: 肘形 57">
+            <a:extLst>
+              <a:ext uri="{FF2B5EF4-FFF2-40B4-BE49-F238E27FC236}">
+                <a16:creationId xmlns:a16="http://schemas.microsoft.com/office/drawing/2014/main" id="{C6F817C2-DCC3-4D62-BBF4-BDB2B5ABBDBF}"/>
+              </a:ext>
+            </a:extLst>
+          </p:cNvPr>
+          <p:cNvCxnSpPr>
+            <a:stCxn id="40" idx="2"/>
+            <a:endCxn id="52" idx="6"/>
+          </p:cNvCxnSpPr>
+          <p:nvPr/>
+        </p:nvCxnSpPr>
+        <p:spPr>
+          <a:xfrm rot="5400000">
+            <a:off x="9117133" y="4488333"/>
+            <a:ext cx="328247" cy="1117660"/>
+          </a:xfrm>
+          <a:prstGeom prst="bentConnector2">
+            <a:avLst/>
+          </a:prstGeom>
+          <a:ln w="28575">
+            <a:solidFill>
+              <a:schemeClr val="tx1"/>
+            </a:solidFill>
+            <a:tailEnd type="triangle"/>
+          </a:ln>
+        </p:spPr>
+        <p:style>
+          <a:lnRef idx="1">
+            <a:schemeClr val="accent1"/>
+          </a:lnRef>
+          <a:fillRef idx="0">
+            <a:schemeClr val="accent1"/>
+          </a:fillRef>
+          <a:effectRef idx="0">
+            <a:schemeClr val="accent1"/>
+          </a:effectRef>
+          <a:fontRef idx="minor">
+            <a:schemeClr val="tx1"/>
+          </a:fontRef>
+        </p:style>
+      </p:cxnSp>
+      <p:cxnSp>
+        <p:nvCxnSpPr>
+          <p:cNvPr id="60" name="连接符: 肘形 59">
+            <a:extLst>
+              <a:ext uri="{FF2B5EF4-FFF2-40B4-BE49-F238E27FC236}">
+                <a16:creationId xmlns:a16="http://schemas.microsoft.com/office/drawing/2014/main" id="{FD65D9A3-92C8-4478-832E-D3285C8E3D61}"/>
+              </a:ext>
+            </a:extLst>
+          </p:cNvPr>
+          <p:cNvCxnSpPr>
+            <a:stCxn id="52" idx="4"/>
+          </p:cNvCxnSpPr>
+          <p:nvPr/>
+        </p:nvCxnSpPr>
+        <p:spPr>
+          <a:xfrm rot="5400000" flipH="1" flipV="1">
+            <a:off x="7636824" y="1869374"/>
+            <a:ext cx="4427515" cy="2600696"/>
+          </a:xfrm>
+          <a:prstGeom prst="bentConnector3">
+            <a:avLst>
+              <a:gd name="adj1" fmla="val -3151"/>
+            </a:avLst>
+          </a:prstGeom>
+          <a:ln w="28575">
+            <a:solidFill>
+              <a:schemeClr val="tx1"/>
+            </a:solidFill>
+          </a:ln>
+        </p:spPr>
+        <p:style>
+          <a:lnRef idx="1">
+            <a:schemeClr val="accent1"/>
+          </a:lnRef>
+          <a:fillRef idx="0">
+            <a:schemeClr val="accent1"/>
+          </a:fillRef>
+          <a:effectRef idx="0">
+            <a:schemeClr val="accent1"/>
+          </a:effectRef>
+          <a:fontRef idx="minor">
+            <a:schemeClr val="tx1"/>
+          </a:fontRef>
+        </p:style>
+      </p:cxnSp>
+      <p:cxnSp>
+        <p:nvCxnSpPr>
+          <p:cNvPr id="63" name="连接符: 肘形 62">
+            <a:extLst>
+              <a:ext uri="{FF2B5EF4-FFF2-40B4-BE49-F238E27FC236}">
+                <a16:creationId xmlns:a16="http://schemas.microsoft.com/office/drawing/2014/main" id="{197453C0-A1DD-4CB8-81E9-E5AC0FF7135C}"/>
+              </a:ext>
+            </a:extLst>
+          </p:cNvPr>
+          <p:cNvCxnSpPr>
+            <a:cxnSpLocks/>
+          </p:cNvCxnSpPr>
+          <p:nvPr/>
+        </p:nvCxnSpPr>
+        <p:spPr>
+          <a:xfrm rot="10800000" flipV="1">
+            <a:off x="2602678" y="955964"/>
+            <a:ext cx="8560129" cy="2115292"/>
+          </a:xfrm>
+          <a:prstGeom prst="bentConnector2">
+            <a:avLst/>
+          </a:prstGeom>
+          <a:ln w="28575">
+            <a:solidFill>
+              <a:schemeClr val="tx1"/>
+            </a:solidFill>
+            <a:tailEnd type="triangle"/>
+          </a:ln>
+        </p:spPr>
+        <p:style>
+          <a:lnRef idx="1">
+            <a:schemeClr val="accent1"/>
+          </a:lnRef>
+          <a:fillRef idx="0">
+            <a:schemeClr val="accent1"/>
+          </a:fillRef>
+          <a:effectRef idx="0">
+            <a:schemeClr val="accent1"/>
+          </a:effectRef>
+          <a:fontRef idx="minor">
+            <a:schemeClr val="tx1"/>
+          </a:fontRef>
+        </p:style>
+      </p:cxnSp>
+      <p:sp>
+        <p:nvSpPr>
+          <p:cNvPr id="64" name="文本框 63">
+            <a:extLst>
+              <a:ext uri="{FF2B5EF4-FFF2-40B4-BE49-F238E27FC236}">
+                <a16:creationId xmlns:a16="http://schemas.microsoft.com/office/drawing/2014/main" id="{05CC132C-8F93-45B5-9D45-B3E64B3A55E0}"/>
+              </a:ext>
+            </a:extLst>
+          </p:cNvPr>
+          <p:cNvSpPr txBox="1"/>
+          <p:nvPr/>
+        </p:nvSpPr>
+        <p:spPr>
+          <a:xfrm>
+            <a:off x="6698596" y="3365796"/>
+            <a:ext cx="565348" cy="338554"/>
+          </a:xfrm>
+          <a:prstGeom prst="rect">
+            <a:avLst/>
+          </a:prstGeom>
+          <a:noFill/>
+        </p:spPr>
+        <p:txBody>
+          <a:bodyPr wrap="none" rtlCol="0">
+            <a:spAutoFit/>
+          </a:bodyPr>
+          <a:lstStyle/>
+          <a:p>
+            <a:r>
+              <a:rPr lang="en-US" altLang="zh-CN" sz="1600" dirty="0">
+                <a:latin typeface="Times New Roman" panose="02020603050405020304" pitchFamily="18" charset="0"/>
+                <a:cs typeface="Times New Roman" panose="02020603050405020304" pitchFamily="18" charset="0"/>
+              </a:rPr>
+              <a:t>True</a:t>
+            </a:r>
+            <a:endParaRPr lang="zh-CN" altLang="en-US" sz="1600" dirty="0">
+              <a:latin typeface="Times New Roman" panose="02020603050405020304" pitchFamily="18" charset="0"/>
+              <a:cs typeface="Times New Roman" panose="02020603050405020304" pitchFamily="18" charset="0"/>
+            </a:endParaRPr>
+          </a:p>
+        </p:txBody>
+      </p:sp>
+      <p:sp>
+        <p:nvSpPr>
+          <p:cNvPr id="65" name="文本框 64">
+            <a:extLst>
+              <a:ext uri="{FF2B5EF4-FFF2-40B4-BE49-F238E27FC236}">
+                <a16:creationId xmlns:a16="http://schemas.microsoft.com/office/drawing/2014/main" id="{660A54A8-1A03-47F2-B13B-5005C6F5B248}"/>
+              </a:ext>
+            </a:extLst>
+          </p:cNvPr>
+          <p:cNvSpPr txBox="1"/>
+          <p:nvPr/>
+        </p:nvSpPr>
+        <p:spPr>
+          <a:xfrm>
+            <a:off x="9839447" y="3365795"/>
+            <a:ext cx="619080" cy="338554"/>
+          </a:xfrm>
+          <a:prstGeom prst="rect">
+            <a:avLst/>
+          </a:prstGeom>
+          <a:noFill/>
+        </p:spPr>
+        <p:txBody>
+          <a:bodyPr wrap="none" rtlCol="0">
+            <a:spAutoFit/>
+          </a:bodyPr>
+          <a:lstStyle/>
+          <a:p>
+            <a:r>
+              <a:rPr lang="en-US" altLang="zh-CN" sz="1600" dirty="0">
+                <a:latin typeface="Times New Roman" panose="02020603050405020304" pitchFamily="18" charset="0"/>
+                <a:cs typeface="Times New Roman" panose="02020603050405020304" pitchFamily="18" charset="0"/>
+              </a:rPr>
+              <a:t>False</a:t>
+            </a:r>
+            <a:endParaRPr lang="zh-CN" altLang="en-US" sz="1600" dirty="0">
+              <a:latin typeface="Times New Roman" panose="02020603050405020304" pitchFamily="18" charset="0"/>
+              <a:cs typeface="Times New Roman" panose="02020603050405020304" pitchFamily="18" charset="0"/>
+            </a:endParaRPr>
+          </a:p>
+        </p:txBody>
+      </p:sp>
+    </p:spTree>
+    <p:extLst>
+      <p:ext uri="{BB962C8B-B14F-4D97-AF65-F5344CB8AC3E}">
+        <p14:creationId xmlns:p14="http://schemas.microsoft.com/office/powerpoint/2010/main" val="3466348852"/>
       </p:ext>
     </p:extLst>
   </p:cSld>

--- a/docs/thesis/pictures.pptx
+++ b/docs/thesis/pictures.pptx
@@ -5,7 +5,7 @@
     <p:sldMasterId id="2147483648" r:id="rId1"/>
   </p:sldMasterIdLst>
   <p:notesMasterIdLst>
-    <p:notesMasterId r:id="rId10"/>
+    <p:notesMasterId r:id="rId11"/>
   </p:notesMasterIdLst>
   <p:sldIdLst>
     <p:sldId id="259" r:id="rId2"/>
@@ -16,6 +16,7 @@
     <p:sldId id="264" r:id="rId7"/>
     <p:sldId id="265" r:id="rId8"/>
     <p:sldId id="266" r:id="rId9"/>
+    <p:sldId id="267" r:id="rId10"/>
   </p:sldIdLst>
   <p:sldSz cx="12192000" cy="6858000"/>
   <p:notesSz cx="6858000" cy="9144000"/>
@@ -216,7 +217,7 @@
           <a:p>
             <a:fld id="{C66A8157-93E0-41B4-A777-149D15F966ED}" type="datetimeFigureOut">
               <a:rPr lang="zh-CN" altLang="en-US" smtClean="0"/>
-              <a:t>2026/4/26</a:t>
+              <a:t>2026/4/27</a:t>
             </a:fld>
             <a:endParaRPr lang="zh-CN" altLang="en-US"/>
           </a:p>
@@ -1065,7 +1066,7 @@
           <a:p>
             <a:fld id="{E7097275-6DBD-4E45-A854-72B05E8D007C}" type="datetimeFigureOut">
               <a:rPr lang="zh-CN" altLang="en-US" smtClean="0"/>
-              <a:t>2026/4/26</a:t>
+              <a:t>2026/4/27</a:t>
             </a:fld>
             <a:endParaRPr lang="zh-CN" altLang="en-US"/>
           </a:p>
@@ -1263,7 +1264,7 @@
           <a:p>
             <a:fld id="{E7097275-6DBD-4E45-A854-72B05E8D007C}" type="datetimeFigureOut">
               <a:rPr lang="zh-CN" altLang="en-US" smtClean="0"/>
-              <a:t>2026/4/26</a:t>
+              <a:t>2026/4/27</a:t>
             </a:fld>
             <a:endParaRPr lang="zh-CN" altLang="en-US"/>
           </a:p>
@@ -1471,7 +1472,7 @@
           <a:p>
             <a:fld id="{E7097275-6DBD-4E45-A854-72B05E8D007C}" type="datetimeFigureOut">
               <a:rPr lang="zh-CN" altLang="en-US" smtClean="0"/>
-              <a:t>2026/4/26</a:t>
+              <a:t>2026/4/27</a:t>
             </a:fld>
             <a:endParaRPr lang="zh-CN" altLang="en-US"/>
           </a:p>
@@ -1669,7 +1670,7 @@
           <a:p>
             <a:fld id="{E7097275-6DBD-4E45-A854-72B05E8D007C}" type="datetimeFigureOut">
               <a:rPr lang="zh-CN" altLang="en-US" smtClean="0"/>
-              <a:t>2026/4/26</a:t>
+              <a:t>2026/4/27</a:t>
             </a:fld>
             <a:endParaRPr lang="zh-CN" altLang="en-US"/>
           </a:p>
@@ -1944,7 +1945,7 @@
           <a:p>
             <a:fld id="{E7097275-6DBD-4E45-A854-72B05E8D007C}" type="datetimeFigureOut">
               <a:rPr lang="zh-CN" altLang="en-US" smtClean="0"/>
-              <a:t>2026/4/26</a:t>
+              <a:t>2026/4/27</a:t>
             </a:fld>
             <a:endParaRPr lang="zh-CN" altLang="en-US"/>
           </a:p>
@@ -2209,7 +2210,7 @@
           <a:p>
             <a:fld id="{E7097275-6DBD-4E45-A854-72B05E8D007C}" type="datetimeFigureOut">
               <a:rPr lang="zh-CN" altLang="en-US" smtClean="0"/>
-              <a:t>2026/4/26</a:t>
+              <a:t>2026/4/27</a:t>
             </a:fld>
             <a:endParaRPr lang="zh-CN" altLang="en-US"/>
           </a:p>
@@ -2621,7 +2622,7 @@
           <a:p>
             <a:fld id="{E7097275-6DBD-4E45-A854-72B05E8D007C}" type="datetimeFigureOut">
               <a:rPr lang="zh-CN" altLang="en-US" smtClean="0"/>
-              <a:t>2026/4/26</a:t>
+              <a:t>2026/4/27</a:t>
             </a:fld>
             <a:endParaRPr lang="zh-CN" altLang="en-US"/>
           </a:p>
@@ -2762,7 +2763,7 @@
           <a:p>
             <a:fld id="{E7097275-6DBD-4E45-A854-72B05E8D007C}" type="datetimeFigureOut">
               <a:rPr lang="zh-CN" altLang="en-US" smtClean="0"/>
-              <a:t>2026/4/26</a:t>
+              <a:t>2026/4/27</a:t>
             </a:fld>
             <a:endParaRPr lang="zh-CN" altLang="en-US"/>
           </a:p>
@@ -2875,7 +2876,7 @@
           <a:p>
             <a:fld id="{E7097275-6DBD-4E45-A854-72B05E8D007C}" type="datetimeFigureOut">
               <a:rPr lang="zh-CN" altLang="en-US" smtClean="0"/>
-              <a:t>2026/4/26</a:t>
+              <a:t>2026/4/27</a:t>
             </a:fld>
             <a:endParaRPr lang="zh-CN" altLang="en-US"/>
           </a:p>
@@ -3186,7 +3187,7 @@
           <a:p>
             <a:fld id="{E7097275-6DBD-4E45-A854-72B05E8D007C}" type="datetimeFigureOut">
               <a:rPr lang="zh-CN" altLang="en-US" smtClean="0"/>
-              <a:t>2026/4/26</a:t>
+              <a:t>2026/4/27</a:t>
             </a:fld>
             <a:endParaRPr lang="zh-CN" altLang="en-US"/>
           </a:p>
@@ -3474,7 +3475,7 @@
           <a:p>
             <a:fld id="{E7097275-6DBD-4E45-A854-72B05E8D007C}" type="datetimeFigureOut">
               <a:rPr lang="zh-CN" altLang="en-US" smtClean="0"/>
-              <a:t>2026/4/26</a:t>
+              <a:t>2026/4/27</a:t>
             </a:fld>
             <a:endParaRPr lang="zh-CN" altLang="en-US"/>
           </a:p>
@@ -3715,7 +3716,7 @@
           <a:p>
             <a:fld id="{E7097275-6DBD-4E45-A854-72B05E8D007C}" type="datetimeFigureOut">
               <a:rPr lang="zh-CN" altLang="en-US" smtClean="0"/>
-              <a:t>2026/4/26</a:t>
+              <a:t>2026/4/27</a:t>
             </a:fld>
             <a:endParaRPr lang="zh-CN" altLang="en-US"/>
           </a:p>
@@ -22921,6 +22922,1924 @@
 </p:sld>
 </file>
 
+<file path=ppt/slides/slide9.xml><?xml version="1.0" encoding="utf-8"?>
+<p:sld xmlns:a="http://schemas.openxmlformats.org/drawingml/2006/main" xmlns:r="http://schemas.openxmlformats.org/officeDocument/2006/relationships" xmlns:p="http://schemas.openxmlformats.org/presentationml/2006/main">
+  <p:cSld>
+    <p:spTree>
+      <p:nvGrpSpPr>
+        <p:cNvPr id="1" name=""/>
+        <p:cNvGrpSpPr/>
+        <p:nvPr/>
+      </p:nvGrpSpPr>
+      <p:grpSpPr>
+        <a:xfrm>
+          <a:off x="0" y="0"/>
+          <a:ext cx="0" cy="0"/>
+          <a:chOff x="0" y="0"/>
+          <a:chExt cx="0" cy="0"/>
+        </a:xfrm>
+      </p:grpSpPr>
+      <p:grpSp>
+        <p:nvGrpSpPr>
+          <p:cNvPr id="81" name="组合 80">
+            <a:extLst>
+              <a:ext uri="{FF2B5EF4-FFF2-40B4-BE49-F238E27FC236}">
+                <a16:creationId xmlns:a16="http://schemas.microsoft.com/office/drawing/2014/main" id="{66B41604-5A0F-491A-8A0B-289C589C4D9D}"/>
+              </a:ext>
+            </a:extLst>
+          </p:cNvPr>
+          <p:cNvGrpSpPr/>
+          <p:nvPr/>
+        </p:nvGrpSpPr>
+        <p:grpSpPr>
+          <a:xfrm>
+            <a:off x="190005" y="465578"/>
+            <a:ext cx="11473050" cy="5968708"/>
+            <a:chOff x="190005" y="465578"/>
+            <a:chExt cx="11473050" cy="5968708"/>
+          </a:xfrm>
+        </p:grpSpPr>
+        <p:sp>
+          <p:nvSpPr>
+            <p:cNvPr id="6" name="矩形: 圆角 5">
+              <a:extLst>
+                <a:ext uri="{FF2B5EF4-FFF2-40B4-BE49-F238E27FC236}">
+                  <a16:creationId xmlns:a16="http://schemas.microsoft.com/office/drawing/2014/main" id="{302CA85E-8ED9-47F1-9FB3-E6B9833634AD}"/>
+                </a:ext>
+              </a:extLst>
+            </p:cNvPr>
+            <p:cNvSpPr/>
+            <p:nvPr/>
+          </p:nvSpPr>
+          <p:spPr>
+            <a:xfrm>
+              <a:off x="190005" y="3927770"/>
+              <a:ext cx="2303813" cy="1092530"/>
+            </a:xfrm>
+            <a:prstGeom prst="roundRect">
+              <a:avLst/>
+            </a:prstGeom>
+            <a:noFill/>
+            <a:ln w="28575">
+              <a:solidFill>
+                <a:schemeClr val="tx1"/>
+              </a:solidFill>
+            </a:ln>
+          </p:spPr>
+          <p:style>
+            <a:lnRef idx="2">
+              <a:schemeClr val="accent1">
+                <a:shade val="50000"/>
+              </a:schemeClr>
+            </a:lnRef>
+            <a:fillRef idx="1">
+              <a:schemeClr val="accent1"/>
+            </a:fillRef>
+            <a:effectRef idx="0">
+              <a:schemeClr val="accent1"/>
+            </a:effectRef>
+            <a:fontRef idx="minor">
+              <a:schemeClr val="lt1"/>
+            </a:fontRef>
+          </p:style>
+          <p:txBody>
+            <a:bodyPr rtlCol="0" anchor="ctr"/>
+            <a:lstStyle/>
+            <a:p>
+              <a:pPr algn="ctr"/>
+              <a:r>
+                <a:rPr lang="en-US" altLang="zh-CN" sz="1600" dirty="0">
+                  <a:solidFill>
+                    <a:schemeClr val="tx1"/>
+                  </a:solidFill>
+                  <a:latin typeface="Times New Roman" panose="02020603050405020304" pitchFamily="18" charset="0"/>
+                  <a:ea typeface="宋体" panose="02010600030101010101" pitchFamily="2" charset="-122"/>
+                  <a:cs typeface="Times New Roman" panose="02020603050405020304" pitchFamily="18" charset="0"/>
+                </a:rPr>
+                <a:t>VM </a:t>
+              </a:r>
+              <a:r>
+                <a:rPr lang="zh-CN" altLang="en-US" sz="1600" dirty="0">
+                  <a:solidFill>
+                    <a:schemeClr val="tx1"/>
+                  </a:solidFill>
+                  <a:latin typeface="Times New Roman" panose="02020603050405020304" pitchFamily="18" charset="0"/>
+                  <a:ea typeface="宋体" panose="02010600030101010101" pitchFamily="2" charset="-122"/>
+                  <a:cs typeface="Times New Roman" panose="02020603050405020304" pitchFamily="18" charset="0"/>
+                </a:rPr>
+                <a:t>发起属性访问</a:t>
+              </a:r>
+              <a:r>
+                <a:rPr lang="en-US" altLang="zh-CN" sz="1600" dirty="0">
+                  <a:solidFill>
+                    <a:schemeClr val="tx1"/>
+                  </a:solidFill>
+                  <a:latin typeface="Times New Roman" panose="02020603050405020304" pitchFamily="18" charset="0"/>
+                  <a:ea typeface="宋体" panose="02010600030101010101" pitchFamily="2" charset="-122"/>
+                  <a:cs typeface="Times New Roman" panose="02020603050405020304" pitchFamily="18" charset="0"/>
+                </a:rPr>
+                <a:t>GetAttr(self, prop_name)</a:t>
+              </a:r>
+              <a:endParaRPr lang="zh-CN" altLang="en-US" sz="1600" dirty="0">
+                <a:solidFill>
+                  <a:schemeClr val="tx1"/>
+                </a:solidFill>
+                <a:latin typeface="Times New Roman" panose="02020603050405020304" pitchFamily="18" charset="0"/>
+                <a:ea typeface="宋体" panose="02010600030101010101" pitchFamily="2" charset="-122"/>
+                <a:cs typeface="Times New Roman" panose="02020603050405020304" pitchFamily="18" charset="0"/>
+              </a:endParaRPr>
+            </a:p>
+          </p:txBody>
+        </p:sp>
+        <p:sp>
+          <p:nvSpPr>
+            <p:cNvPr id="7" name="流程图: 决策 6">
+              <a:extLst>
+                <a:ext uri="{FF2B5EF4-FFF2-40B4-BE49-F238E27FC236}">
+                  <a16:creationId xmlns:a16="http://schemas.microsoft.com/office/drawing/2014/main" id="{7B3219A0-D93F-4B48-8F4F-E5315DD5F498}"/>
+                </a:ext>
+              </a:extLst>
+            </p:cNvPr>
+            <p:cNvSpPr/>
+            <p:nvPr/>
+          </p:nvSpPr>
+          <p:spPr>
+            <a:xfrm>
+              <a:off x="3010395" y="3706592"/>
+              <a:ext cx="2012867" cy="1534886"/>
+            </a:xfrm>
+            <a:prstGeom prst="flowChartDecision">
+              <a:avLst/>
+            </a:prstGeom>
+            <a:noFill/>
+            <a:ln w="28575">
+              <a:solidFill>
+                <a:schemeClr val="tx1"/>
+              </a:solidFill>
+            </a:ln>
+          </p:spPr>
+          <p:style>
+            <a:lnRef idx="2">
+              <a:schemeClr val="accent1">
+                <a:shade val="50000"/>
+              </a:schemeClr>
+            </a:lnRef>
+            <a:fillRef idx="1">
+              <a:schemeClr val="accent1"/>
+            </a:fillRef>
+            <a:effectRef idx="0">
+              <a:schemeClr val="accent1"/>
+            </a:effectRef>
+            <a:fontRef idx="minor">
+              <a:schemeClr val="lt1"/>
+            </a:fontRef>
+          </p:style>
+          <p:txBody>
+            <a:bodyPr rtlCol="0" anchor="ctr"/>
+            <a:lstStyle/>
+            <a:p>
+              <a:pPr algn="ctr"/>
+              <a:endParaRPr lang="en-US" altLang="zh-CN" sz="1600" dirty="0">
+                <a:solidFill>
+                  <a:srgbClr val="D4D4D4"/>
+                </a:solidFill>
+                <a:effectLst/>
+                <a:latin typeface="Times New Roman" panose="02020603050405020304" pitchFamily="18" charset="0"/>
+                <a:ea typeface="宋体" panose="02010600030101010101" pitchFamily="2" charset="-122"/>
+                <a:cs typeface="Times New Roman" panose="02020603050405020304" pitchFamily="18" charset="0"/>
+              </a:endParaRPr>
+            </a:p>
+            <a:p>
+              <a:pPr algn="ctr"/>
+              <a:r>
+                <a:rPr lang="zh-CN" altLang="en-US" sz="1600" dirty="0">
+                  <a:solidFill>
+                    <a:schemeClr val="tx1"/>
+                  </a:solidFill>
+                  <a:effectLst/>
+                  <a:latin typeface="Times New Roman" panose="02020603050405020304" pitchFamily="18" charset="0"/>
+                  <a:ea typeface="宋体" panose="02010600030101010101" pitchFamily="2" charset="-122"/>
+                  <a:cs typeface="Times New Roman" panose="02020603050405020304" pitchFamily="18" charset="0"/>
+                </a:rPr>
+                <a:t>在 </a:t>
+              </a:r>
+              <a:r>
+                <a:rPr lang="en-US" altLang="zh-CN" sz="1600" dirty="0">
+                  <a:solidFill>
+                    <a:schemeClr val="tx1"/>
+                  </a:solidFill>
+                  <a:effectLst/>
+                  <a:latin typeface="Times New Roman" panose="02020603050405020304" pitchFamily="18" charset="0"/>
+                  <a:ea typeface="宋体" panose="02010600030101010101" pitchFamily="2" charset="-122"/>
+                  <a:cs typeface="Times New Roman" panose="02020603050405020304" pitchFamily="18" charset="0"/>
+                </a:rPr>
+                <a:t>self</a:t>
+              </a:r>
+              <a:r>
+                <a:rPr lang="zh-CN" altLang="en-US" sz="1600" dirty="0">
+                  <a:solidFill>
+                    <a:schemeClr val="tx1"/>
+                  </a:solidFill>
+                  <a:effectLst/>
+                  <a:latin typeface="Times New Roman" panose="02020603050405020304" pitchFamily="18" charset="0"/>
+                  <a:ea typeface="宋体" panose="02010600030101010101" pitchFamily="2" charset="-122"/>
+                  <a:cs typeface="Times New Roman" panose="02020603050405020304" pitchFamily="18" charset="0"/>
+                </a:rPr>
+                <a:t> 的</a:t>
+              </a:r>
+              <a:r>
+                <a:rPr lang="zh-CN" altLang="en-US" sz="1600" b="1" dirty="0">
+                  <a:solidFill>
+                    <a:schemeClr val="tx1"/>
+                  </a:solidFill>
+                  <a:effectLst/>
+                  <a:latin typeface="Times New Roman" panose="02020603050405020304" pitchFamily="18" charset="0"/>
+                  <a:ea typeface="宋体" panose="02010600030101010101" pitchFamily="2" charset="-122"/>
+                  <a:cs typeface="Times New Roman" panose="02020603050405020304" pitchFamily="18" charset="0"/>
+                </a:rPr>
+                <a:t>实例字典</a:t>
+              </a:r>
+              <a:r>
+                <a:rPr lang="zh-CN" altLang="en-US" sz="1600" dirty="0">
+                  <a:solidFill>
+                    <a:schemeClr val="tx1"/>
+                  </a:solidFill>
+                  <a:effectLst/>
+                  <a:latin typeface="Times New Roman" panose="02020603050405020304" pitchFamily="18" charset="0"/>
+                  <a:ea typeface="宋体" panose="02010600030101010101" pitchFamily="2" charset="-122"/>
+                  <a:cs typeface="Times New Roman" panose="02020603050405020304" pitchFamily="18" charset="0"/>
+                </a:rPr>
+                <a:t>中找到</a:t>
+              </a:r>
+            </a:p>
+            <a:p>
+              <a:pPr algn="ctr"/>
+              <a:endParaRPr lang="zh-CN" altLang="en-US" dirty="0"/>
+            </a:p>
+          </p:txBody>
+        </p:sp>
+        <p:cxnSp>
+          <p:nvCxnSpPr>
+            <p:cNvPr id="9" name="直接箭头连接符 8">
+              <a:extLst>
+                <a:ext uri="{FF2B5EF4-FFF2-40B4-BE49-F238E27FC236}">
+                  <a16:creationId xmlns:a16="http://schemas.microsoft.com/office/drawing/2014/main" id="{90BE1378-100B-4D1D-8C9B-E01FA7292868}"/>
+                </a:ext>
+              </a:extLst>
+            </p:cNvPr>
+            <p:cNvCxnSpPr>
+              <a:stCxn id="6" idx="3"/>
+              <a:endCxn id="7" idx="1"/>
+            </p:cNvCxnSpPr>
+            <p:nvPr/>
+          </p:nvCxnSpPr>
+          <p:spPr>
+            <a:xfrm>
+              <a:off x="2493818" y="4474035"/>
+              <a:ext cx="516577" cy="0"/>
+            </a:xfrm>
+            <a:prstGeom prst="straightConnector1">
+              <a:avLst/>
+            </a:prstGeom>
+            <a:ln w="28575">
+              <a:solidFill>
+                <a:schemeClr val="tx1"/>
+              </a:solidFill>
+              <a:tailEnd type="triangle"/>
+            </a:ln>
+          </p:spPr>
+          <p:style>
+            <a:lnRef idx="1">
+              <a:schemeClr val="accent1"/>
+            </a:lnRef>
+            <a:fillRef idx="0">
+              <a:schemeClr val="accent1"/>
+            </a:fillRef>
+            <a:effectRef idx="0">
+              <a:schemeClr val="accent1"/>
+            </a:effectRef>
+            <a:fontRef idx="minor">
+              <a:schemeClr val="tx1"/>
+            </a:fontRef>
+          </p:style>
+        </p:cxnSp>
+        <p:sp>
+          <p:nvSpPr>
+            <p:cNvPr id="10" name="流程图: 决策 9">
+              <a:extLst>
+                <a:ext uri="{FF2B5EF4-FFF2-40B4-BE49-F238E27FC236}">
+                  <a16:creationId xmlns:a16="http://schemas.microsoft.com/office/drawing/2014/main" id="{580E734C-6816-4231-85EC-B1B78C91EF35}"/>
+                </a:ext>
+              </a:extLst>
+            </p:cNvPr>
+            <p:cNvSpPr/>
+            <p:nvPr/>
+          </p:nvSpPr>
+          <p:spPr>
+            <a:xfrm>
+              <a:off x="5836723" y="3568294"/>
+              <a:ext cx="2282042" cy="1811482"/>
+            </a:xfrm>
+            <a:prstGeom prst="flowChartDecision">
+              <a:avLst/>
+            </a:prstGeom>
+            <a:noFill/>
+            <a:ln w="28575">
+              <a:solidFill>
+                <a:schemeClr val="tx1"/>
+              </a:solidFill>
+            </a:ln>
+          </p:spPr>
+          <p:style>
+            <a:lnRef idx="2">
+              <a:schemeClr val="accent1">
+                <a:shade val="50000"/>
+              </a:schemeClr>
+            </a:lnRef>
+            <a:fillRef idx="1">
+              <a:schemeClr val="accent1"/>
+            </a:fillRef>
+            <a:effectRef idx="0">
+              <a:schemeClr val="accent1"/>
+            </a:effectRef>
+            <a:fontRef idx="minor">
+              <a:schemeClr val="lt1"/>
+            </a:fontRef>
+          </p:style>
+          <p:txBody>
+            <a:bodyPr rtlCol="0" anchor="ctr"/>
+            <a:lstStyle/>
+            <a:p>
+              <a:pPr algn="ctr"/>
+              <a:r>
+                <a:rPr lang="zh-CN" altLang="en-US" sz="1600" dirty="0">
+                  <a:solidFill>
+                    <a:schemeClr val="tx1"/>
+                  </a:solidFill>
+                  <a:effectLst/>
+                  <a:latin typeface="Times New Roman" panose="02020603050405020304" pitchFamily="18" charset="0"/>
+                  <a:ea typeface="宋体" panose="02010600030101010101" pitchFamily="2" charset="-122"/>
+                  <a:cs typeface="Times New Roman" panose="02020603050405020304" pitchFamily="18" charset="0"/>
+                </a:rPr>
+                <a:t>沿 </a:t>
+              </a:r>
+              <a:r>
+                <a:rPr lang="en-US" altLang="zh-CN" sz="1600" dirty="0">
+                  <a:solidFill>
+                    <a:schemeClr val="tx1"/>
+                  </a:solidFill>
+                  <a:effectLst/>
+                  <a:latin typeface="Times New Roman" panose="02020603050405020304" pitchFamily="18" charset="0"/>
+                  <a:ea typeface="宋体" panose="02010600030101010101" pitchFamily="2" charset="-122"/>
+                  <a:cs typeface="Times New Roman" panose="02020603050405020304" pitchFamily="18" charset="0"/>
+                </a:rPr>
+                <a:t>MRO </a:t>
+              </a:r>
+              <a:r>
+                <a:rPr lang="zh-CN" altLang="en-US" sz="1600" dirty="0">
+                  <a:solidFill>
+                    <a:schemeClr val="tx1"/>
+                  </a:solidFill>
+                  <a:effectLst/>
+                  <a:latin typeface="Times New Roman" panose="02020603050405020304" pitchFamily="18" charset="0"/>
+                  <a:ea typeface="宋体" panose="02010600030101010101" pitchFamily="2" charset="-122"/>
+                  <a:cs typeface="Times New Roman" panose="02020603050405020304" pitchFamily="18" charset="0"/>
+                </a:rPr>
+                <a:t>遍历基类 </a:t>
+              </a:r>
+              <a:r>
+                <a:rPr lang="en-US" altLang="zh-CN" sz="1600" dirty="0">
+                  <a:solidFill>
+                    <a:schemeClr val="tx1"/>
+                  </a:solidFill>
+                  <a:effectLst/>
+                  <a:latin typeface="Times New Roman" panose="02020603050405020304" pitchFamily="18" charset="0"/>
+                  <a:ea typeface="宋体" panose="02010600030101010101" pitchFamily="2" charset="-122"/>
+                  <a:cs typeface="Times New Roman" panose="02020603050405020304" pitchFamily="18" charset="0"/>
+                </a:rPr>
+                <a:t>Klass,</a:t>
+              </a:r>
+              <a:r>
+                <a:rPr lang="zh-CN" altLang="en-US" sz="1600" dirty="0">
+                  <a:solidFill>
+                    <a:schemeClr val="tx1"/>
+                  </a:solidFill>
+                  <a:effectLst/>
+                  <a:latin typeface="Times New Roman" panose="02020603050405020304" pitchFamily="18" charset="0"/>
+                  <a:ea typeface="宋体" panose="02010600030101010101" pitchFamily="2" charset="-122"/>
+                  <a:cs typeface="Times New Roman" panose="02020603050405020304" pitchFamily="18" charset="0"/>
+                </a:rPr>
+                <a:t>在某</a:t>
+              </a:r>
+              <a:r>
+                <a:rPr lang="zh-CN" altLang="en-US" sz="1600" b="1" dirty="0">
+                  <a:solidFill>
+                    <a:schemeClr val="tx1"/>
+                  </a:solidFill>
+                  <a:effectLst/>
+                  <a:latin typeface="Times New Roman" panose="02020603050405020304" pitchFamily="18" charset="0"/>
+                  <a:ea typeface="宋体" panose="02010600030101010101" pitchFamily="2" charset="-122"/>
+                  <a:cs typeface="Times New Roman" panose="02020603050405020304" pitchFamily="18" charset="0"/>
+                </a:rPr>
+                <a:t>基类字典</a:t>
+              </a:r>
+              <a:r>
+                <a:rPr lang="zh-CN" altLang="en-US" sz="1600" dirty="0">
+                  <a:solidFill>
+                    <a:schemeClr val="tx1"/>
+                  </a:solidFill>
+                  <a:effectLst/>
+                  <a:latin typeface="Times New Roman" panose="02020603050405020304" pitchFamily="18" charset="0"/>
+                  <a:ea typeface="宋体" panose="02010600030101010101" pitchFamily="2" charset="-122"/>
+                  <a:cs typeface="Times New Roman" panose="02020603050405020304" pitchFamily="18" charset="0"/>
+                </a:rPr>
+                <a:t>中找到</a:t>
+              </a:r>
+              <a:endParaRPr lang="zh-CN" altLang="en-US" dirty="0"/>
+            </a:p>
+          </p:txBody>
+        </p:sp>
+        <p:cxnSp>
+          <p:nvCxnSpPr>
+            <p:cNvPr id="12" name="直接箭头连接符 11">
+              <a:extLst>
+                <a:ext uri="{FF2B5EF4-FFF2-40B4-BE49-F238E27FC236}">
+                  <a16:creationId xmlns:a16="http://schemas.microsoft.com/office/drawing/2014/main" id="{088261F5-EDFE-4A72-8425-DD309755DEC6}"/>
+                </a:ext>
+              </a:extLst>
+            </p:cNvPr>
+            <p:cNvCxnSpPr>
+              <a:stCxn id="7" idx="3"/>
+              <a:endCxn id="10" idx="1"/>
+            </p:cNvCxnSpPr>
+            <p:nvPr/>
+          </p:nvCxnSpPr>
+          <p:spPr>
+            <a:xfrm>
+              <a:off x="5023262" y="4474035"/>
+              <a:ext cx="813461" cy="0"/>
+            </a:xfrm>
+            <a:prstGeom prst="straightConnector1">
+              <a:avLst/>
+            </a:prstGeom>
+            <a:ln w="28575">
+              <a:solidFill>
+                <a:schemeClr val="tx1"/>
+              </a:solidFill>
+              <a:tailEnd type="triangle"/>
+            </a:ln>
+          </p:spPr>
+          <p:style>
+            <a:lnRef idx="1">
+              <a:schemeClr val="accent1"/>
+            </a:lnRef>
+            <a:fillRef idx="0">
+              <a:schemeClr val="accent1"/>
+            </a:fillRef>
+            <a:effectRef idx="0">
+              <a:schemeClr val="accent1"/>
+            </a:effectRef>
+            <a:fontRef idx="minor">
+              <a:schemeClr val="tx1"/>
+            </a:fontRef>
+          </p:style>
+        </p:cxnSp>
+        <p:sp>
+          <p:nvSpPr>
+            <p:cNvPr id="13" name="流程图: 决策 12">
+              <a:extLst>
+                <a:ext uri="{FF2B5EF4-FFF2-40B4-BE49-F238E27FC236}">
+                  <a16:creationId xmlns:a16="http://schemas.microsoft.com/office/drawing/2014/main" id="{61236325-45D6-4C7C-A199-B5CE84B80A3D}"/>
+                </a:ext>
+              </a:extLst>
+            </p:cNvPr>
+            <p:cNvSpPr/>
+            <p:nvPr/>
+          </p:nvSpPr>
+          <p:spPr>
+            <a:xfrm>
+              <a:off x="5971306" y="2230875"/>
+              <a:ext cx="2012867" cy="905741"/>
+            </a:xfrm>
+            <a:prstGeom prst="flowChartDecision">
+              <a:avLst/>
+            </a:prstGeom>
+            <a:noFill/>
+            <a:ln w="28575">
+              <a:solidFill>
+                <a:schemeClr val="tx1"/>
+              </a:solidFill>
+            </a:ln>
+          </p:spPr>
+          <p:style>
+            <a:lnRef idx="2">
+              <a:schemeClr val="accent1">
+                <a:shade val="50000"/>
+              </a:schemeClr>
+            </a:lnRef>
+            <a:fillRef idx="1">
+              <a:schemeClr val="accent1"/>
+            </a:fillRef>
+            <a:effectRef idx="0">
+              <a:schemeClr val="accent1"/>
+            </a:effectRef>
+            <a:fontRef idx="minor">
+              <a:schemeClr val="lt1"/>
+            </a:fontRef>
+          </p:style>
+          <p:txBody>
+            <a:bodyPr rtlCol="0" anchor="ctr"/>
+            <a:lstStyle/>
+            <a:p>
+              <a:pPr algn="ctr"/>
+              <a:r>
+                <a:rPr lang="zh-CN" altLang="en-US" sz="1600" dirty="0">
+                  <a:solidFill>
+                    <a:schemeClr val="tx1"/>
+                  </a:solidFill>
+                  <a:effectLst/>
+                  <a:latin typeface="Times New Roman" panose="02020603050405020304" pitchFamily="18" charset="0"/>
+                  <a:ea typeface="宋体" panose="02010600030101010101" pitchFamily="2" charset="-122"/>
+                  <a:cs typeface="Times New Roman" panose="02020603050405020304" pitchFamily="18" charset="0"/>
+                </a:rPr>
+                <a:t>属性值为函数对象</a:t>
+              </a:r>
+              <a:endParaRPr lang="zh-CN" altLang="en-US" dirty="0"/>
+            </a:p>
+          </p:txBody>
+        </p:sp>
+        <p:sp>
+          <p:nvSpPr>
+            <p:cNvPr id="16" name="矩形 15">
+              <a:extLst>
+                <a:ext uri="{FF2B5EF4-FFF2-40B4-BE49-F238E27FC236}">
+                  <a16:creationId xmlns:a16="http://schemas.microsoft.com/office/drawing/2014/main" id="{676F58BD-68DF-4D75-8D74-EB51A35999A7}"/>
+                </a:ext>
+              </a:extLst>
+            </p:cNvPr>
+            <p:cNvSpPr/>
+            <p:nvPr/>
+          </p:nvSpPr>
+          <p:spPr>
+            <a:xfrm>
+              <a:off x="6429990" y="1198824"/>
+              <a:ext cx="1095501" cy="721426"/>
+            </a:xfrm>
+            <a:prstGeom prst="rect">
+              <a:avLst/>
+            </a:prstGeom>
+            <a:noFill/>
+            <a:ln w="28575">
+              <a:solidFill>
+                <a:schemeClr val="tx1"/>
+              </a:solidFill>
+            </a:ln>
+          </p:spPr>
+          <p:style>
+            <a:lnRef idx="2">
+              <a:schemeClr val="accent1">
+                <a:shade val="50000"/>
+              </a:schemeClr>
+            </a:lnRef>
+            <a:fillRef idx="1">
+              <a:schemeClr val="accent1"/>
+            </a:fillRef>
+            <a:effectRef idx="0">
+              <a:schemeClr val="accent1"/>
+            </a:effectRef>
+            <a:fontRef idx="minor">
+              <a:schemeClr val="lt1"/>
+            </a:fontRef>
+          </p:style>
+          <p:txBody>
+            <a:bodyPr rtlCol="0" anchor="ctr"/>
+            <a:lstStyle/>
+            <a:p>
+              <a:pPr algn="ctr"/>
+              <a:r>
+                <a:rPr lang="zh-CN" altLang="en-US" sz="1600" dirty="0">
+                  <a:solidFill>
+                    <a:schemeClr val="tx1"/>
+                  </a:solidFill>
+                  <a:latin typeface="Times New Roman" panose="02020603050405020304" pitchFamily="18" charset="0"/>
+                  <a:ea typeface="宋体" panose="02010600030101010101" pitchFamily="2" charset="-122"/>
+                  <a:cs typeface="Times New Roman" panose="02020603050405020304" pitchFamily="18" charset="0"/>
+                </a:rPr>
+                <a:t>构造绑定方法</a:t>
+              </a:r>
+            </a:p>
+          </p:txBody>
+        </p:sp>
+        <p:sp>
+          <p:nvSpPr>
+            <p:cNvPr id="19" name="流程图: 决策 18">
+              <a:extLst>
+                <a:ext uri="{FF2B5EF4-FFF2-40B4-BE49-F238E27FC236}">
+                  <a16:creationId xmlns:a16="http://schemas.microsoft.com/office/drawing/2014/main" id="{C888B8F4-6D05-489B-8E32-9D95FFC189FF}"/>
+                </a:ext>
+              </a:extLst>
+            </p:cNvPr>
+            <p:cNvSpPr/>
+            <p:nvPr/>
+          </p:nvSpPr>
+          <p:spPr>
+            <a:xfrm>
+              <a:off x="8984675" y="3568294"/>
+              <a:ext cx="2282042" cy="1811482"/>
+            </a:xfrm>
+            <a:prstGeom prst="flowChartDecision">
+              <a:avLst/>
+            </a:prstGeom>
+            <a:noFill/>
+            <a:ln w="28575">
+              <a:solidFill>
+                <a:schemeClr val="tx1"/>
+              </a:solidFill>
+            </a:ln>
+          </p:spPr>
+          <p:style>
+            <a:lnRef idx="2">
+              <a:schemeClr val="accent1">
+                <a:shade val="50000"/>
+              </a:schemeClr>
+            </a:lnRef>
+            <a:fillRef idx="1">
+              <a:schemeClr val="accent1"/>
+            </a:fillRef>
+            <a:effectRef idx="0">
+              <a:schemeClr val="accent1"/>
+            </a:effectRef>
+            <a:fontRef idx="minor">
+              <a:schemeClr val="lt1"/>
+            </a:fontRef>
+          </p:style>
+          <p:txBody>
+            <a:bodyPr rtlCol="0" anchor="ctr"/>
+            <a:lstStyle/>
+            <a:p>
+              <a:pPr algn="ctr"/>
+              <a:r>
+                <a:rPr lang="zh-CN" altLang="en-US" sz="1600" dirty="0">
+                  <a:solidFill>
+                    <a:schemeClr val="tx1"/>
+                  </a:solidFill>
+                  <a:effectLst/>
+                  <a:latin typeface="Times New Roman" panose="02020603050405020304" pitchFamily="18" charset="0"/>
+                  <a:ea typeface="宋体" panose="02010600030101010101" pitchFamily="2" charset="-122"/>
+                  <a:cs typeface="Times New Roman" panose="02020603050405020304" pitchFamily="18" charset="0"/>
+                </a:rPr>
+                <a:t>沿 </a:t>
+              </a:r>
+              <a:r>
+                <a:rPr lang="en-US" altLang="zh-CN" sz="1600" dirty="0">
+                  <a:solidFill>
+                    <a:schemeClr val="tx1"/>
+                  </a:solidFill>
+                  <a:effectLst/>
+                  <a:latin typeface="Times New Roman" panose="02020603050405020304" pitchFamily="18" charset="0"/>
+                  <a:ea typeface="宋体" panose="02010600030101010101" pitchFamily="2" charset="-122"/>
+                  <a:cs typeface="Times New Roman" panose="02020603050405020304" pitchFamily="18" charset="0"/>
+                </a:rPr>
+                <a:t>MRO </a:t>
+              </a:r>
+              <a:r>
+                <a:rPr lang="zh-CN" altLang="en-US" sz="1600" dirty="0">
+                  <a:solidFill>
+                    <a:schemeClr val="tx1"/>
+                  </a:solidFill>
+                  <a:effectLst/>
+                  <a:latin typeface="Times New Roman" panose="02020603050405020304" pitchFamily="18" charset="0"/>
+                  <a:ea typeface="宋体" panose="02010600030101010101" pitchFamily="2" charset="-122"/>
+                  <a:cs typeface="Times New Roman" panose="02020603050405020304" pitchFamily="18" charset="0"/>
+                </a:rPr>
+                <a:t>查找，某基类存在</a:t>
+              </a:r>
+              <a:r>
+                <a:rPr lang="en-US" altLang="zh-CN" sz="1600" b="1" dirty="0">
+                  <a:solidFill>
+                    <a:schemeClr val="tx1"/>
+                  </a:solidFill>
+                  <a:effectLst/>
+                  <a:latin typeface="Times New Roman" panose="02020603050405020304" pitchFamily="18" charset="0"/>
+                  <a:ea typeface="宋体" panose="02010600030101010101" pitchFamily="2" charset="-122"/>
+                  <a:cs typeface="Times New Roman" panose="02020603050405020304" pitchFamily="18" charset="0"/>
+                </a:rPr>
+                <a:t>__getter__</a:t>
+              </a:r>
+              <a:r>
+                <a:rPr lang="zh-CN" altLang="en-US" sz="1600" b="1" dirty="0">
+                  <a:solidFill>
+                    <a:schemeClr val="tx1"/>
+                  </a:solidFill>
+                  <a:effectLst/>
+                  <a:latin typeface="Times New Roman" panose="02020603050405020304" pitchFamily="18" charset="0"/>
+                  <a:ea typeface="宋体" panose="02010600030101010101" pitchFamily="2" charset="-122"/>
+                  <a:cs typeface="Times New Roman" panose="02020603050405020304" pitchFamily="18" charset="0"/>
+                </a:rPr>
+                <a:t>方法</a:t>
+              </a:r>
+              <a:endParaRPr lang="zh-CN" altLang="en-US" b="1" dirty="0"/>
+            </a:p>
+          </p:txBody>
+        </p:sp>
+        <p:cxnSp>
+          <p:nvCxnSpPr>
+            <p:cNvPr id="21" name="直接箭头连接符 20">
+              <a:extLst>
+                <a:ext uri="{FF2B5EF4-FFF2-40B4-BE49-F238E27FC236}">
+                  <a16:creationId xmlns:a16="http://schemas.microsoft.com/office/drawing/2014/main" id="{AF56E395-EBDC-443A-A26A-C785C6F382A3}"/>
+                </a:ext>
+              </a:extLst>
+            </p:cNvPr>
+            <p:cNvCxnSpPr>
+              <a:stCxn id="10" idx="3"/>
+              <a:endCxn id="19" idx="1"/>
+            </p:cNvCxnSpPr>
+            <p:nvPr/>
+          </p:nvCxnSpPr>
+          <p:spPr>
+            <a:xfrm>
+              <a:off x="8118765" y="4474035"/>
+              <a:ext cx="865910" cy="0"/>
+            </a:xfrm>
+            <a:prstGeom prst="straightConnector1">
+              <a:avLst/>
+            </a:prstGeom>
+            <a:ln w="28575">
+              <a:solidFill>
+                <a:schemeClr val="tx1"/>
+              </a:solidFill>
+              <a:tailEnd type="triangle"/>
+            </a:ln>
+          </p:spPr>
+          <p:style>
+            <a:lnRef idx="1">
+              <a:schemeClr val="accent1"/>
+            </a:lnRef>
+            <a:fillRef idx="0">
+              <a:schemeClr val="accent1"/>
+            </a:fillRef>
+            <a:effectRef idx="0">
+              <a:schemeClr val="accent1"/>
+            </a:effectRef>
+            <a:fontRef idx="minor">
+              <a:schemeClr val="tx1"/>
+            </a:fontRef>
+          </p:style>
+        </p:cxnSp>
+        <p:sp>
+          <p:nvSpPr>
+            <p:cNvPr id="22" name="矩形: 圆角 21">
+              <a:extLst>
+                <a:ext uri="{FF2B5EF4-FFF2-40B4-BE49-F238E27FC236}">
+                  <a16:creationId xmlns:a16="http://schemas.microsoft.com/office/drawing/2014/main" id="{D423C0EA-A76D-40DF-9361-18DFE95FA539}"/>
+                </a:ext>
+              </a:extLst>
+            </p:cNvPr>
+            <p:cNvSpPr/>
+            <p:nvPr/>
+          </p:nvSpPr>
+          <p:spPr>
+            <a:xfrm>
+              <a:off x="9388435" y="465578"/>
+              <a:ext cx="1474520" cy="592750"/>
+            </a:xfrm>
+            <a:prstGeom prst="roundRect">
+              <a:avLst/>
+            </a:prstGeom>
+            <a:noFill/>
+            <a:ln w="28575">
+              <a:solidFill>
+                <a:schemeClr val="tx1"/>
+              </a:solidFill>
+            </a:ln>
+          </p:spPr>
+          <p:style>
+            <a:lnRef idx="2">
+              <a:schemeClr val="accent1">
+                <a:shade val="50000"/>
+              </a:schemeClr>
+            </a:lnRef>
+            <a:fillRef idx="1">
+              <a:schemeClr val="accent1"/>
+            </a:fillRef>
+            <a:effectRef idx="0">
+              <a:schemeClr val="accent1"/>
+            </a:effectRef>
+            <a:fontRef idx="minor">
+              <a:schemeClr val="lt1"/>
+            </a:fontRef>
+          </p:style>
+          <p:txBody>
+            <a:bodyPr rtlCol="0" anchor="ctr"/>
+            <a:lstStyle/>
+            <a:p>
+              <a:pPr algn="ctr"/>
+              <a:r>
+                <a:rPr lang="zh-CN" altLang="en-US" sz="1600" dirty="0">
+                  <a:solidFill>
+                    <a:schemeClr val="tx1"/>
+                  </a:solidFill>
+                  <a:latin typeface="Times New Roman" panose="02020603050405020304" pitchFamily="18" charset="0"/>
+                  <a:ea typeface="宋体" panose="02010600030101010101" pitchFamily="2" charset="-122"/>
+                  <a:cs typeface="Times New Roman" panose="02020603050405020304" pitchFamily="18" charset="0"/>
+                </a:rPr>
+                <a:t>返回查找结果</a:t>
+              </a:r>
+            </a:p>
+          </p:txBody>
+        </p:sp>
+        <p:sp>
+          <p:nvSpPr>
+            <p:cNvPr id="23" name="矩形 22">
+              <a:extLst>
+                <a:ext uri="{FF2B5EF4-FFF2-40B4-BE49-F238E27FC236}">
+                  <a16:creationId xmlns:a16="http://schemas.microsoft.com/office/drawing/2014/main" id="{7449FBF9-0D14-47C4-9E9E-6448FA9C1930}"/>
+                </a:ext>
+              </a:extLst>
+            </p:cNvPr>
+            <p:cNvSpPr/>
+            <p:nvPr/>
+          </p:nvSpPr>
+          <p:spPr>
+            <a:xfrm>
+              <a:off x="8588334" y="1946471"/>
+              <a:ext cx="3074721" cy="407100"/>
+            </a:xfrm>
+            <a:prstGeom prst="rect">
+              <a:avLst/>
+            </a:prstGeom>
+            <a:noFill/>
+            <a:ln w="28575">
+              <a:solidFill>
+                <a:schemeClr val="tx1"/>
+              </a:solidFill>
+            </a:ln>
+          </p:spPr>
+          <p:style>
+            <a:lnRef idx="2">
+              <a:schemeClr val="accent1">
+                <a:shade val="50000"/>
+              </a:schemeClr>
+            </a:lnRef>
+            <a:fillRef idx="1">
+              <a:schemeClr val="accent1"/>
+            </a:fillRef>
+            <a:effectRef idx="0">
+              <a:schemeClr val="accent1"/>
+            </a:effectRef>
+            <a:fontRef idx="minor">
+              <a:schemeClr val="lt1"/>
+            </a:fontRef>
+          </p:style>
+          <p:txBody>
+            <a:bodyPr rtlCol="0" anchor="ctr"/>
+            <a:lstStyle/>
+            <a:p>
+              <a:pPr algn="ctr"/>
+              <a:r>
+                <a:rPr lang="zh-CN" altLang="en-US" sz="1600" dirty="0">
+                  <a:solidFill>
+                    <a:schemeClr val="tx1"/>
+                  </a:solidFill>
+                  <a:latin typeface="Times New Roman" panose="02020603050405020304" pitchFamily="18" charset="0"/>
+                  <a:ea typeface="宋体" panose="02010600030101010101" pitchFamily="2" charset="-122"/>
+                  <a:cs typeface="Times New Roman" panose="02020603050405020304" pitchFamily="18" charset="0"/>
+                </a:rPr>
+                <a:t>调用</a:t>
+              </a:r>
+              <a:r>
+                <a:rPr lang="en-US" altLang="zh-CN" sz="1600" dirty="0">
+                  <a:solidFill>
+                    <a:schemeClr val="tx1"/>
+                  </a:solidFill>
+                  <a:latin typeface="Times New Roman" panose="02020603050405020304" pitchFamily="18" charset="0"/>
+                  <a:ea typeface="宋体" panose="02010600030101010101" pitchFamily="2" charset="-122"/>
+                  <a:cs typeface="Times New Roman" panose="02020603050405020304" pitchFamily="18" charset="0"/>
+                </a:rPr>
+                <a:t>__getattr__(self, prop_name)</a:t>
+              </a:r>
+              <a:endParaRPr lang="zh-CN" altLang="en-US" sz="1600" dirty="0">
+                <a:solidFill>
+                  <a:schemeClr val="tx1"/>
+                </a:solidFill>
+                <a:latin typeface="Times New Roman" panose="02020603050405020304" pitchFamily="18" charset="0"/>
+                <a:ea typeface="宋体" panose="02010600030101010101" pitchFamily="2" charset="-122"/>
+                <a:cs typeface="Times New Roman" panose="02020603050405020304" pitchFamily="18" charset="0"/>
+              </a:endParaRPr>
+            </a:p>
+          </p:txBody>
+        </p:sp>
+        <p:cxnSp>
+          <p:nvCxnSpPr>
+            <p:cNvPr id="27" name="直接箭头连接符 26">
+              <a:extLst>
+                <a:ext uri="{FF2B5EF4-FFF2-40B4-BE49-F238E27FC236}">
+                  <a16:creationId xmlns:a16="http://schemas.microsoft.com/office/drawing/2014/main" id="{AA40D37C-DC1C-4B04-9A79-2020CE7415A3}"/>
+                </a:ext>
+              </a:extLst>
+            </p:cNvPr>
+            <p:cNvCxnSpPr>
+              <a:cxnSpLocks/>
+              <a:stCxn id="19" idx="0"/>
+              <a:endCxn id="23" idx="2"/>
+            </p:cNvCxnSpPr>
+            <p:nvPr/>
+          </p:nvCxnSpPr>
+          <p:spPr>
+            <a:xfrm flipH="1" flipV="1">
+              <a:off x="10125695" y="2353571"/>
+              <a:ext cx="1" cy="1214723"/>
+            </a:xfrm>
+            <a:prstGeom prst="straightConnector1">
+              <a:avLst/>
+            </a:prstGeom>
+            <a:ln w="28575">
+              <a:solidFill>
+                <a:schemeClr val="tx1"/>
+              </a:solidFill>
+              <a:tailEnd type="triangle"/>
+            </a:ln>
+          </p:spPr>
+          <p:style>
+            <a:lnRef idx="1">
+              <a:schemeClr val="accent1"/>
+            </a:lnRef>
+            <a:fillRef idx="0">
+              <a:schemeClr val="accent1"/>
+            </a:fillRef>
+            <a:effectRef idx="0">
+              <a:schemeClr val="accent1"/>
+            </a:effectRef>
+            <a:fontRef idx="minor">
+              <a:schemeClr val="tx1"/>
+            </a:fontRef>
+          </p:style>
+        </p:cxnSp>
+        <p:cxnSp>
+          <p:nvCxnSpPr>
+            <p:cNvPr id="29" name="直接箭头连接符 28">
+              <a:extLst>
+                <a:ext uri="{FF2B5EF4-FFF2-40B4-BE49-F238E27FC236}">
+                  <a16:creationId xmlns:a16="http://schemas.microsoft.com/office/drawing/2014/main" id="{72BB373D-0010-4570-BF28-689DD8E6BEB8}"/>
+                </a:ext>
+              </a:extLst>
+            </p:cNvPr>
+            <p:cNvCxnSpPr>
+              <a:stCxn id="23" idx="0"/>
+              <a:endCxn id="22" idx="2"/>
+            </p:cNvCxnSpPr>
+            <p:nvPr/>
+          </p:nvCxnSpPr>
+          <p:spPr>
+            <a:xfrm flipV="1">
+              <a:off x="10125695" y="1058328"/>
+              <a:ext cx="0" cy="888143"/>
+            </a:xfrm>
+            <a:prstGeom prst="straightConnector1">
+              <a:avLst/>
+            </a:prstGeom>
+            <a:ln w="28575">
+              <a:solidFill>
+                <a:schemeClr val="tx1"/>
+              </a:solidFill>
+              <a:tailEnd type="triangle"/>
+            </a:ln>
+          </p:spPr>
+          <p:style>
+            <a:lnRef idx="1">
+              <a:schemeClr val="accent1"/>
+            </a:lnRef>
+            <a:fillRef idx="0">
+              <a:schemeClr val="accent1"/>
+            </a:fillRef>
+            <a:effectRef idx="0">
+              <a:schemeClr val="accent1"/>
+            </a:effectRef>
+            <a:fontRef idx="minor">
+              <a:schemeClr val="tx1"/>
+            </a:fontRef>
+          </p:style>
+        </p:cxnSp>
+        <p:cxnSp>
+          <p:nvCxnSpPr>
+            <p:cNvPr id="48" name="直接箭头连接符 47">
+              <a:extLst>
+                <a:ext uri="{FF2B5EF4-FFF2-40B4-BE49-F238E27FC236}">
+                  <a16:creationId xmlns:a16="http://schemas.microsoft.com/office/drawing/2014/main" id="{88EFFE89-8FEA-406C-A55F-E4FDC9D4E9E1}"/>
+                </a:ext>
+              </a:extLst>
+            </p:cNvPr>
+            <p:cNvCxnSpPr>
+              <a:stCxn id="10" idx="0"/>
+              <a:endCxn id="13" idx="2"/>
+            </p:cNvCxnSpPr>
+            <p:nvPr/>
+          </p:nvCxnSpPr>
+          <p:spPr>
+            <a:xfrm flipH="1" flipV="1">
+              <a:off x="6977740" y="3136616"/>
+              <a:ext cx="4" cy="431678"/>
+            </a:xfrm>
+            <a:prstGeom prst="straightConnector1">
+              <a:avLst/>
+            </a:prstGeom>
+            <a:ln w="28575">
+              <a:solidFill>
+                <a:schemeClr val="tx1"/>
+              </a:solidFill>
+              <a:tailEnd type="triangle"/>
+            </a:ln>
+          </p:spPr>
+          <p:style>
+            <a:lnRef idx="1">
+              <a:schemeClr val="accent1"/>
+            </a:lnRef>
+            <a:fillRef idx="0">
+              <a:schemeClr val="accent1"/>
+            </a:fillRef>
+            <a:effectRef idx="0">
+              <a:schemeClr val="accent1"/>
+            </a:effectRef>
+            <a:fontRef idx="minor">
+              <a:schemeClr val="tx1"/>
+            </a:fontRef>
+          </p:style>
+        </p:cxnSp>
+        <p:cxnSp>
+          <p:nvCxnSpPr>
+            <p:cNvPr id="50" name="直接箭头连接符 49">
+              <a:extLst>
+                <a:ext uri="{FF2B5EF4-FFF2-40B4-BE49-F238E27FC236}">
+                  <a16:creationId xmlns:a16="http://schemas.microsoft.com/office/drawing/2014/main" id="{AC6AD1C9-ECC7-4113-9F40-6B0996084597}"/>
+                </a:ext>
+              </a:extLst>
+            </p:cNvPr>
+            <p:cNvCxnSpPr>
+              <a:stCxn id="13" idx="0"/>
+              <a:endCxn id="16" idx="2"/>
+            </p:cNvCxnSpPr>
+            <p:nvPr/>
+          </p:nvCxnSpPr>
+          <p:spPr>
+            <a:xfrm flipV="1">
+              <a:off x="6977740" y="1920250"/>
+              <a:ext cx="1" cy="310625"/>
+            </a:xfrm>
+            <a:prstGeom prst="straightConnector1">
+              <a:avLst/>
+            </a:prstGeom>
+            <a:ln w="28575">
+              <a:solidFill>
+                <a:schemeClr val="tx1"/>
+              </a:solidFill>
+              <a:tailEnd type="triangle"/>
+            </a:ln>
+          </p:spPr>
+          <p:style>
+            <a:lnRef idx="1">
+              <a:schemeClr val="accent1"/>
+            </a:lnRef>
+            <a:fillRef idx="0">
+              <a:schemeClr val="accent1"/>
+            </a:fillRef>
+            <a:effectRef idx="0">
+              <a:schemeClr val="accent1"/>
+            </a:effectRef>
+            <a:fontRef idx="minor">
+              <a:schemeClr val="tx1"/>
+            </a:fontRef>
+          </p:style>
+        </p:cxnSp>
+        <p:sp>
+          <p:nvSpPr>
+            <p:cNvPr id="52" name="矩形: 圆角 51">
+              <a:extLst>
+                <a:ext uri="{FF2B5EF4-FFF2-40B4-BE49-F238E27FC236}">
+                  <a16:creationId xmlns:a16="http://schemas.microsoft.com/office/drawing/2014/main" id="{675B25A2-5055-4960-BB23-17AE9D2BF799}"/>
+                </a:ext>
+              </a:extLst>
+            </p:cNvPr>
+            <p:cNvSpPr/>
+            <p:nvPr/>
+          </p:nvSpPr>
+          <p:spPr>
+            <a:xfrm>
+              <a:off x="8920348" y="5841536"/>
+              <a:ext cx="2410691" cy="592750"/>
+            </a:xfrm>
+            <a:prstGeom prst="roundRect">
+              <a:avLst/>
+            </a:prstGeom>
+            <a:noFill/>
+            <a:ln w="28575">
+              <a:solidFill>
+                <a:schemeClr val="tx1"/>
+              </a:solidFill>
+            </a:ln>
+          </p:spPr>
+          <p:style>
+            <a:lnRef idx="2">
+              <a:schemeClr val="accent1">
+                <a:shade val="50000"/>
+              </a:schemeClr>
+            </a:lnRef>
+            <a:fillRef idx="1">
+              <a:schemeClr val="accent1"/>
+            </a:fillRef>
+            <a:effectRef idx="0">
+              <a:schemeClr val="accent1"/>
+            </a:effectRef>
+            <a:fontRef idx="minor">
+              <a:schemeClr val="lt1"/>
+            </a:fontRef>
+          </p:style>
+          <p:txBody>
+            <a:bodyPr rtlCol="0" anchor="ctr"/>
+            <a:lstStyle/>
+            <a:p>
+              <a:pPr algn="ctr"/>
+              <a:r>
+                <a:rPr lang="zh-CN" altLang="en-US" sz="1600" dirty="0">
+                  <a:solidFill>
+                    <a:srgbClr val="FF0000"/>
+                  </a:solidFill>
+                  <a:latin typeface="Times New Roman" panose="02020603050405020304" pitchFamily="18" charset="0"/>
+                  <a:ea typeface="宋体" panose="02010600030101010101" pitchFamily="2" charset="-122"/>
+                  <a:cs typeface="Times New Roman" panose="02020603050405020304" pitchFamily="18" charset="0"/>
+                </a:rPr>
+                <a:t>抛出</a:t>
+              </a:r>
+              <a:r>
+                <a:rPr lang="en-US" altLang="zh-CN" sz="1600" dirty="0">
+                  <a:solidFill>
+                    <a:srgbClr val="FF0000"/>
+                  </a:solidFill>
+                  <a:latin typeface="Times New Roman" panose="02020603050405020304" pitchFamily="18" charset="0"/>
+                  <a:ea typeface="宋体" panose="02010600030101010101" pitchFamily="2" charset="-122"/>
+                  <a:cs typeface="Times New Roman" panose="02020603050405020304" pitchFamily="18" charset="0"/>
+                </a:rPr>
+                <a:t>AttributeError </a:t>
+              </a:r>
+              <a:r>
+                <a:rPr lang="zh-CN" altLang="en-US" sz="1600" dirty="0">
+                  <a:solidFill>
+                    <a:srgbClr val="FF0000"/>
+                  </a:solidFill>
+                  <a:latin typeface="Times New Roman" panose="02020603050405020304" pitchFamily="18" charset="0"/>
+                  <a:ea typeface="宋体" panose="02010600030101010101" pitchFamily="2" charset="-122"/>
+                  <a:cs typeface="Times New Roman" panose="02020603050405020304" pitchFamily="18" charset="0"/>
+                </a:rPr>
+                <a:t>异常 </a:t>
+              </a:r>
+            </a:p>
+          </p:txBody>
+        </p:sp>
+        <p:sp>
+          <p:nvSpPr>
+            <p:cNvPr id="59" name="文本框 58">
+              <a:extLst>
+                <a:ext uri="{FF2B5EF4-FFF2-40B4-BE49-F238E27FC236}">
+                  <a16:creationId xmlns:a16="http://schemas.microsoft.com/office/drawing/2014/main" id="{C412E01F-40AC-4385-A92C-757325A1B9AE}"/>
+                </a:ext>
+              </a:extLst>
+            </p:cNvPr>
+            <p:cNvSpPr txBox="1"/>
+            <p:nvPr/>
+          </p:nvSpPr>
+          <p:spPr>
+            <a:xfrm>
+              <a:off x="6977740" y="3257511"/>
+              <a:ext cx="628698" cy="369332"/>
+            </a:xfrm>
+            <a:prstGeom prst="rect">
+              <a:avLst/>
+            </a:prstGeom>
+            <a:noFill/>
+          </p:spPr>
+          <p:txBody>
+            <a:bodyPr wrap="none" rtlCol="0">
+              <a:spAutoFit/>
+            </a:bodyPr>
+            <a:lstStyle/>
+            <a:p>
+              <a:r>
+                <a:rPr lang="en-US" altLang="zh-CN" dirty="0">
+                  <a:latin typeface="Times New Roman" panose="02020603050405020304" pitchFamily="18" charset="0"/>
+                  <a:cs typeface="Times New Roman" panose="02020603050405020304" pitchFamily="18" charset="0"/>
+                </a:rPr>
+                <a:t>True</a:t>
+              </a:r>
+              <a:endParaRPr lang="zh-CN" altLang="en-US" dirty="0">
+                <a:latin typeface="Times New Roman" panose="02020603050405020304" pitchFamily="18" charset="0"/>
+                <a:cs typeface="Times New Roman" panose="02020603050405020304" pitchFamily="18" charset="0"/>
+              </a:endParaRPr>
+            </a:p>
+          </p:txBody>
+        </p:sp>
+        <p:sp>
+          <p:nvSpPr>
+            <p:cNvPr id="60" name="文本框 59">
+              <a:extLst>
+                <a:ext uri="{FF2B5EF4-FFF2-40B4-BE49-F238E27FC236}">
+                  <a16:creationId xmlns:a16="http://schemas.microsoft.com/office/drawing/2014/main" id="{53AC945C-497B-4050-80A2-6277F13E9698}"/>
+                </a:ext>
+              </a:extLst>
+            </p:cNvPr>
+            <p:cNvSpPr txBox="1"/>
+            <p:nvPr/>
+          </p:nvSpPr>
+          <p:spPr>
+            <a:xfrm>
+              <a:off x="6977740" y="1929827"/>
+              <a:ext cx="628698" cy="369332"/>
+            </a:xfrm>
+            <a:prstGeom prst="rect">
+              <a:avLst/>
+            </a:prstGeom>
+            <a:noFill/>
+          </p:spPr>
+          <p:txBody>
+            <a:bodyPr wrap="none" rtlCol="0">
+              <a:spAutoFit/>
+            </a:bodyPr>
+            <a:lstStyle/>
+            <a:p>
+              <a:r>
+                <a:rPr lang="en-US" altLang="zh-CN" dirty="0">
+                  <a:latin typeface="Times New Roman" panose="02020603050405020304" pitchFamily="18" charset="0"/>
+                  <a:cs typeface="Times New Roman" panose="02020603050405020304" pitchFamily="18" charset="0"/>
+                </a:rPr>
+                <a:t>True</a:t>
+              </a:r>
+              <a:endParaRPr lang="zh-CN" altLang="en-US" dirty="0">
+                <a:latin typeface="Times New Roman" panose="02020603050405020304" pitchFamily="18" charset="0"/>
+                <a:cs typeface="Times New Roman" panose="02020603050405020304" pitchFamily="18" charset="0"/>
+              </a:endParaRPr>
+            </a:p>
+          </p:txBody>
+        </p:sp>
+        <p:sp>
+          <p:nvSpPr>
+            <p:cNvPr id="61" name="椭圆 60">
+              <a:extLst>
+                <a:ext uri="{FF2B5EF4-FFF2-40B4-BE49-F238E27FC236}">
+                  <a16:creationId xmlns:a16="http://schemas.microsoft.com/office/drawing/2014/main" id="{37C938E2-6203-479A-8714-590D2889C9A2}"/>
+                </a:ext>
+              </a:extLst>
+            </p:cNvPr>
+            <p:cNvSpPr/>
+            <p:nvPr/>
+          </p:nvSpPr>
+          <p:spPr>
+            <a:xfrm>
+              <a:off x="6805547" y="589761"/>
+              <a:ext cx="344384" cy="344384"/>
+            </a:xfrm>
+            <a:prstGeom prst="ellipse">
+              <a:avLst/>
+            </a:prstGeom>
+            <a:noFill/>
+            <a:ln w="28575">
+              <a:solidFill>
+                <a:schemeClr val="tx1"/>
+              </a:solidFill>
+            </a:ln>
+          </p:spPr>
+          <p:style>
+            <a:lnRef idx="2">
+              <a:schemeClr val="accent1">
+                <a:shade val="50000"/>
+              </a:schemeClr>
+            </a:lnRef>
+            <a:fillRef idx="1">
+              <a:schemeClr val="accent1"/>
+            </a:fillRef>
+            <a:effectRef idx="0">
+              <a:schemeClr val="accent1"/>
+            </a:effectRef>
+            <a:fontRef idx="minor">
+              <a:schemeClr val="lt1"/>
+            </a:fontRef>
+          </p:style>
+          <p:txBody>
+            <a:bodyPr rtlCol="0" anchor="ctr"/>
+            <a:lstStyle/>
+            <a:p>
+              <a:pPr algn="ctr"/>
+              <a:endParaRPr lang="zh-CN" altLang="en-US"/>
+            </a:p>
+          </p:txBody>
+        </p:sp>
+        <p:grpSp>
+          <p:nvGrpSpPr>
+            <p:cNvPr id="80" name="组合 79">
+              <a:extLst>
+                <a:ext uri="{FF2B5EF4-FFF2-40B4-BE49-F238E27FC236}">
+                  <a16:creationId xmlns:a16="http://schemas.microsoft.com/office/drawing/2014/main" id="{3D52E42E-BBF0-4F90-9E1C-5346C3EB0530}"/>
+                </a:ext>
+              </a:extLst>
+            </p:cNvPr>
+            <p:cNvGrpSpPr/>
+            <p:nvPr/>
+          </p:nvGrpSpPr>
+          <p:grpSpPr>
+            <a:xfrm>
+              <a:off x="10125694" y="5339729"/>
+              <a:ext cx="671979" cy="501807"/>
+              <a:chOff x="10066607" y="5707865"/>
+              <a:chExt cx="671979" cy="501807"/>
+            </a:xfrm>
+          </p:grpSpPr>
+          <p:cxnSp>
+            <p:nvCxnSpPr>
+              <p:cNvPr id="56" name="直接箭头连接符 55">
+                <a:extLst>
+                  <a:ext uri="{FF2B5EF4-FFF2-40B4-BE49-F238E27FC236}">
+                    <a16:creationId xmlns:a16="http://schemas.microsoft.com/office/drawing/2014/main" id="{9CC7C6D0-579A-46CA-B17B-C26CD698D9EC}"/>
+                  </a:ext>
+                </a:extLst>
+              </p:cNvPr>
+              <p:cNvCxnSpPr>
+                <a:stCxn id="19" idx="2"/>
+                <a:endCxn id="52" idx="0"/>
+              </p:cNvCxnSpPr>
+              <p:nvPr/>
+            </p:nvCxnSpPr>
+            <p:spPr>
+              <a:xfrm flipH="1">
+                <a:off x="10072545" y="5747912"/>
+                <a:ext cx="2" cy="461760"/>
+              </a:xfrm>
+              <a:prstGeom prst="straightConnector1">
+                <a:avLst/>
+              </a:prstGeom>
+              <a:ln w="28575">
+                <a:solidFill>
+                  <a:schemeClr val="tx1"/>
+                </a:solidFill>
+                <a:tailEnd type="triangle"/>
+              </a:ln>
+            </p:spPr>
+            <p:style>
+              <a:lnRef idx="1">
+                <a:schemeClr val="accent1"/>
+              </a:lnRef>
+              <a:fillRef idx="0">
+                <a:schemeClr val="accent1"/>
+              </a:fillRef>
+              <a:effectRef idx="0">
+                <a:schemeClr val="accent1"/>
+              </a:effectRef>
+              <a:fontRef idx="minor">
+                <a:schemeClr val="tx1"/>
+              </a:fontRef>
+            </p:style>
+          </p:cxnSp>
+          <p:sp>
+            <p:nvSpPr>
+              <p:cNvPr id="62" name="文本框 61">
+                <a:extLst>
+                  <a:ext uri="{FF2B5EF4-FFF2-40B4-BE49-F238E27FC236}">
+                    <a16:creationId xmlns:a16="http://schemas.microsoft.com/office/drawing/2014/main" id="{14384B4F-187D-40BA-8FF4-9612845BE4D3}"/>
+                  </a:ext>
+                </a:extLst>
+              </p:cNvPr>
+              <p:cNvSpPr txBox="1"/>
+              <p:nvPr/>
+            </p:nvSpPr>
+            <p:spPr>
+              <a:xfrm>
+                <a:off x="10066607" y="5707865"/>
+                <a:ext cx="671979" cy="369332"/>
+              </a:xfrm>
+              <a:prstGeom prst="rect">
+                <a:avLst/>
+              </a:prstGeom>
+              <a:noFill/>
+            </p:spPr>
+            <p:txBody>
+              <a:bodyPr wrap="none" rtlCol="0">
+                <a:spAutoFit/>
+              </a:bodyPr>
+              <a:lstStyle/>
+              <a:p>
+                <a:r>
+                  <a:rPr lang="en-US" altLang="zh-CN" dirty="0">
+                    <a:latin typeface="Times New Roman" panose="02020603050405020304" pitchFamily="18" charset="0"/>
+                    <a:cs typeface="Times New Roman" panose="02020603050405020304" pitchFamily="18" charset="0"/>
+                  </a:rPr>
+                  <a:t>False</a:t>
+                </a:r>
+                <a:endParaRPr lang="zh-CN" altLang="en-US" dirty="0">
+                  <a:latin typeface="Times New Roman" panose="02020603050405020304" pitchFamily="18" charset="0"/>
+                  <a:cs typeface="Times New Roman" panose="02020603050405020304" pitchFamily="18" charset="0"/>
+                </a:endParaRPr>
+              </a:p>
+            </p:txBody>
+          </p:sp>
+        </p:grpSp>
+        <p:cxnSp>
+          <p:nvCxnSpPr>
+            <p:cNvPr id="66" name="直接箭头连接符 65">
+              <a:extLst>
+                <a:ext uri="{FF2B5EF4-FFF2-40B4-BE49-F238E27FC236}">
+                  <a16:creationId xmlns:a16="http://schemas.microsoft.com/office/drawing/2014/main" id="{C259A2A9-DADC-4C67-8BCA-1233DC8FDC9B}"/>
+                </a:ext>
+              </a:extLst>
+            </p:cNvPr>
+            <p:cNvCxnSpPr>
+              <a:stCxn id="16" idx="0"/>
+              <a:endCxn id="61" idx="4"/>
+            </p:cNvCxnSpPr>
+            <p:nvPr/>
+          </p:nvCxnSpPr>
+          <p:spPr>
+            <a:xfrm flipH="1" flipV="1">
+              <a:off x="6977739" y="934145"/>
+              <a:ext cx="2" cy="264679"/>
+            </a:xfrm>
+            <a:prstGeom prst="straightConnector1">
+              <a:avLst/>
+            </a:prstGeom>
+            <a:ln w="28575">
+              <a:solidFill>
+                <a:schemeClr val="tx1"/>
+              </a:solidFill>
+              <a:tailEnd type="triangle"/>
+            </a:ln>
+          </p:spPr>
+          <p:style>
+            <a:lnRef idx="1">
+              <a:schemeClr val="accent1"/>
+            </a:lnRef>
+            <a:fillRef idx="0">
+              <a:schemeClr val="accent1"/>
+            </a:fillRef>
+            <a:effectRef idx="0">
+              <a:schemeClr val="accent1"/>
+            </a:effectRef>
+            <a:fontRef idx="minor">
+              <a:schemeClr val="tx1"/>
+            </a:fontRef>
+          </p:style>
+        </p:cxnSp>
+        <p:cxnSp>
+          <p:nvCxnSpPr>
+            <p:cNvPr id="68" name="直接箭头连接符 67">
+              <a:extLst>
+                <a:ext uri="{FF2B5EF4-FFF2-40B4-BE49-F238E27FC236}">
+                  <a16:creationId xmlns:a16="http://schemas.microsoft.com/office/drawing/2014/main" id="{B5D487C0-898F-44DE-9433-FB685AB49B68}"/>
+                </a:ext>
+              </a:extLst>
+            </p:cNvPr>
+            <p:cNvCxnSpPr>
+              <a:stCxn id="61" idx="6"/>
+              <a:endCxn id="22" idx="1"/>
+            </p:cNvCxnSpPr>
+            <p:nvPr/>
+          </p:nvCxnSpPr>
+          <p:spPr>
+            <a:xfrm>
+              <a:off x="7149931" y="761953"/>
+              <a:ext cx="2238504" cy="0"/>
+            </a:xfrm>
+            <a:prstGeom prst="straightConnector1">
+              <a:avLst/>
+            </a:prstGeom>
+            <a:ln w="28575">
+              <a:solidFill>
+                <a:schemeClr val="tx1"/>
+              </a:solidFill>
+              <a:tailEnd type="triangle"/>
+            </a:ln>
+          </p:spPr>
+          <p:style>
+            <a:lnRef idx="1">
+              <a:schemeClr val="accent1"/>
+            </a:lnRef>
+            <a:fillRef idx="0">
+              <a:schemeClr val="accent1"/>
+            </a:fillRef>
+            <a:effectRef idx="0">
+              <a:schemeClr val="accent1"/>
+            </a:effectRef>
+            <a:fontRef idx="minor">
+              <a:schemeClr val="tx1"/>
+            </a:fontRef>
+          </p:style>
+        </p:cxnSp>
+        <p:sp>
+          <p:nvSpPr>
+            <p:cNvPr id="69" name="椭圆 68">
+              <a:extLst>
+                <a:ext uri="{FF2B5EF4-FFF2-40B4-BE49-F238E27FC236}">
+                  <a16:creationId xmlns:a16="http://schemas.microsoft.com/office/drawing/2014/main" id="{167C3B2A-C7A3-44EF-BB51-A6B2465E0F98}"/>
+                </a:ext>
+              </a:extLst>
+            </p:cNvPr>
+            <p:cNvSpPr/>
+            <p:nvPr/>
+          </p:nvSpPr>
+          <p:spPr>
+            <a:xfrm>
+              <a:off x="3844636" y="2511553"/>
+              <a:ext cx="344384" cy="344384"/>
+            </a:xfrm>
+            <a:prstGeom prst="ellipse">
+              <a:avLst/>
+            </a:prstGeom>
+            <a:noFill/>
+            <a:ln w="28575">
+              <a:solidFill>
+                <a:schemeClr val="tx1"/>
+              </a:solidFill>
+            </a:ln>
+          </p:spPr>
+          <p:style>
+            <a:lnRef idx="2">
+              <a:schemeClr val="accent1">
+                <a:shade val="50000"/>
+              </a:schemeClr>
+            </a:lnRef>
+            <a:fillRef idx="1">
+              <a:schemeClr val="accent1"/>
+            </a:fillRef>
+            <a:effectRef idx="0">
+              <a:schemeClr val="accent1"/>
+            </a:effectRef>
+            <a:fontRef idx="minor">
+              <a:schemeClr val="lt1"/>
+            </a:fontRef>
+          </p:style>
+          <p:txBody>
+            <a:bodyPr rtlCol="0" anchor="ctr"/>
+            <a:lstStyle/>
+            <a:p>
+              <a:pPr algn="ctr"/>
+              <a:endParaRPr lang="zh-CN" altLang="en-US"/>
+            </a:p>
+          </p:txBody>
+        </p:sp>
+        <p:cxnSp>
+          <p:nvCxnSpPr>
+            <p:cNvPr id="71" name="直接箭头连接符 70">
+              <a:extLst>
+                <a:ext uri="{FF2B5EF4-FFF2-40B4-BE49-F238E27FC236}">
+                  <a16:creationId xmlns:a16="http://schemas.microsoft.com/office/drawing/2014/main" id="{80E7FB36-4211-439D-A3F7-61F1C0E4A232}"/>
+                </a:ext>
+              </a:extLst>
+            </p:cNvPr>
+            <p:cNvCxnSpPr>
+              <a:stCxn id="7" idx="0"/>
+              <a:endCxn id="69" idx="4"/>
+            </p:cNvCxnSpPr>
+            <p:nvPr/>
+          </p:nvCxnSpPr>
+          <p:spPr>
+            <a:xfrm flipH="1" flipV="1">
+              <a:off x="4016828" y="2855937"/>
+              <a:ext cx="1" cy="850655"/>
+            </a:xfrm>
+            <a:prstGeom prst="straightConnector1">
+              <a:avLst/>
+            </a:prstGeom>
+            <a:ln w="28575">
+              <a:solidFill>
+                <a:schemeClr val="tx1"/>
+              </a:solidFill>
+              <a:tailEnd type="triangle"/>
+            </a:ln>
+          </p:spPr>
+          <p:style>
+            <a:lnRef idx="1">
+              <a:schemeClr val="accent1"/>
+            </a:lnRef>
+            <a:fillRef idx="0">
+              <a:schemeClr val="accent1"/>
+            </a:fillRef>
+            <a:effectRef idx="0">
+              <a:schemeClr val="accent1"/>
+            </a:effectRef>
+            <a:fontRef idx="minor">
+              <a:schemeClr val="tx1"/>
+            </a:fontRef>
+          </p:style>
+        </p:cxnSp>
+        <p:cxnSp>
+          <p:nvCxnSpPr>
+            <p:cNvPr id="73" name="直接箭头连接符 72">
+              <a:extLst>
+                <a:ext uri="{FF2B5EF4-FFF2-40B4-BE49-F238E27FC236}">
+                  <a16:creationId xmlns:a16="http://schemas.microsoft.com/office/drawing/2014/main" id="{C414AABE-3017-40D2-B13F-E090CBBEE463}"/>
+                </a:ext>
+              </a:extLst>
+            </p:cNvPr>
+            <p:cNvCxnSpPr>
+              <a:stCxn id="13" idx="1"/>
+              <a:endCxn id="69" idx="6"/>
+            </p:cNvCxnSpPr>
+            <p:nvPr/>
+          </p:nvCxnSpPr>
+          <p:spPr>
+            <a:xfrm flipH="1" flipV="1">
+              <a:off x="4189020" y="2683745"/>
+              <a:ext cx="1782286" cy="1"/>
+            </a:xfrm>
+            <a:prstGeom prst="straightConnector1">
+              <a:avLst/>
+            </a:prstGeom>
+            <a:ln w="28575">
+              <a:solidFill>
+                <a:schemeClr val="tx1"/>
+              </a:solidFill>
+              <a:tailEnd type="triangle"/>
+            </a:ln>
+          </p:spPr>
+          <p:style>
+            <a:lnRef idx="1">
+              <a:schemeClr val="accent1"/>
+            </a:lnRef>
+            <a:fillRef idx="0">
+              <a:schemeClr val="accent1"/>
+            </a:fillRef>
+            <a:effectRef idx="0">
+              <a:schemeClr val="accent1"/>
+            </a:effectRef>
+            <a:fontRef idx="minor">
+              <a:schemeClr val="tx1"/>
+            </a:fontRef>
+          </p:style>
+        </p:cxnSp>
+        <p:cxnSp>
+          <p:nvCxnSpPr>
+            <p:cNvPr id="75" name="连接符: 肘形 74">
+              <a:extLst>
+                <a:ext uri="{FF2B5EF4-FFF2-40B4-BE49-F238E27FC236}">
+                  <a16:creationId xmlns:a16="http://schemas.microsoft.com/office/drawing/2014/main" id="{9742A328-160A-4DA8-9F65-3462141243C7}"/>
+                </a:ext>
+              </a:extLst>
+            </p:cNvPr>
+            <p:cNvCxnSpPr>
+              <a:stCxn id="69" idx="0"/>
+              <a:endCxn id="61" idx="2"/>
+            </p:cNvCxnSpPr>
+            <p:nvPr/>
+          </p:nvCxnSpPr>
+          <p:spPr>
+            <a:xfrm rot="5400000" flipH="1" flipV="1">
+              <a:off x="4536387" y="242394"/>
+              <a:ext cx="1749600" cy="2788719"/>
+            </a:xfrm>
+            <a:prstGeom prst="bentConnector2">
+              <a:avLst/>
+            </a:prstGeom>
+            <a:ln w="28575">
+              <a:solidFill>
+                <a:schemeClr val="tx1"/>
+              </a:solidFill>
+              <a:tailEnd type="triangle"/>
+            </a:ln>
+          </p:spPr>
+          <p:style>
+            <a:lnRef idx="1">
+              <a:schemeClr val="accent1"/>
+            </a:lnRef>
+            <a:fillRef idx="0">
+              <a:schemeClr val="accent1"/>
+            </a:fillRef>
+            <a:effectRef idx="0">
+              <a:schemeClr val="accent1"/>
+            </a:effectRef>
+            <a:fontRef idx="minor">
+              <a:schemeClr val="tx1"/>
+            </a:fontRef>
+          </p:style>
+        </p:cxnSp>
+        <p:sp>
+          <p:nvSpPr>
+            <p:cNvPr id="76" name="文本框 75">
+              <a:extLst>
+                <a:ext uri="{FF2B5EF4-FFF2-40B4-BE49-F238E27FC236}">
+                  <a16:creationId xmlns:a16="http://schemas.microsoft.com/office/drawing/2014/main" id="{71BD45FB-5972-4AC7-9E3F-B2942BC17C1A}"/>
+                </a:ext>
+              </a:extLst>
+            </p:cNvPr>
+            <p:cNvSpPr txBox="1"/>
+            <p:nvPr/>
+          </p:nvSpPr>
+          <p:spPr>
+            <a:xfrm>
+              <a:off x="4016827" y="3060864"/>
+              <a:ext cx="628698" cy="369332"/>
+            </a:xfrm>
+            <a:prstGeom prst="rect">
+              <a:avLst/>
+            </a:prstGeom>
+            <a:noFill/>
+          </p:spPr>
+          <p:txBody>
+            <a:bodyPr wrap="none" rtlCol="0">
+              <a:spAutoFit/>
+            </a:bodyPr>
+            <a:lstStyle/>
+            <a:p>
+              <a:r>
+                <a:rPr lang="en-US" altLang="zh-CN" dirty="0">
+                  <a:latin typeface="Times New Roman" panose="02020603050405020304" pitchFamily="18" charset="0"/>
+                  <a:cs typeface="Times New Roman" panose="02020603050405020304" pitchFamily="18" charset="0"/>
+                </a:rPr>
+                <a:t>True</a:t>
+              </a:r>
+              <a:endParaRPr lang="zh-CN" altLang="en-US" dirty="0">
+                <a:latin typeface="Times New Roman" panose="02020603050405020304" pitchFamily="18" charset="0"/>
+                <a:cs typeface="Times New Roman" panose="02020603050405020304" pitchFamily="18" charset="0"/>
+              </a:endParaRPr>
+            </a:p>
+          </p:txBody>
+        </p:sp>
+        <p:sp>
+          <p:nvSpPr>
+            <p:cNvPr id="77" name="文本框 76">
+              <a:extLst>
+                <a:ext uri="{FF2B5EF4-FFF2-40B4-BE49-F238E27FC236}">
+                  <a16:creationId xmlns:a16="http://schemas.microsoft.com/office/drawing/2014/main" id="{08A13D07-4323-4C14-9263-4660002B0D76}"/>
+                </a:ext>
+              </a:extLst>
+            </p:cNvPr>
+            <p:cNvSpPr txBox="1"/>
+            <p:nvPr/>
+          </p:nvSpPr>
+          <p:spPr>
+            <a:xfrm>
+              <a:off x="4978218" y="4104703"/>
+              <a:ext cx="671979" cy="369332"/>
+            </a:xfrm>
+            <a:prstGeom prst="rect">
+              <a:avLst/>
+            </a:prstGeom>
+            <a:noFill/>
+          </p:spPr>
+          <p:txBody>
+            <a:bodyPr wrap="none" rtlCol="0">
+              <a:spAutoFit/>
+            </a:bodyPr>
+            <a:lstStyle/>
+            <a:p>
+              <a:r>
+                <a:rPr lang="en-US" altLang="zh-CN" dirty="0">
+                  <a:latin typeface="Times New Roman" panose="02020603050405020304" pitchFamily="18" charset="0"/>
+                  <a:cs typeface="Times New Roman" panose="02020603050405020304" pitchFamily="18" charset="0"/>
+                </a:rPr>
+                <a:t>False</a:t>
+              </a:r>
+              <a:endParaRPr lang="zh-CN" altLang="en-US" dirty="0">
+                <a:latin typeface="Times New Roman" panose="02020603050405020304" pitchFamily="18" charset="0"/>
+                <a:cs typeface="Times New Roman" panose="02020603050405020304" pitchFamily="18" charset="0"/>
+              </a:endParaRPr>
+            </a:p>
+          </p:txBody>
+        </p:sp>
+        <p:sp>
+          <p:nvSpPr>
+            <p:cNvPr id="78" name="文本框 77">
+              <a:extLst>
+                <a:ext uri="{FF2B5EF4-FFF2-40B4-BE49-F238E27FC236}">
+                  <a16:creationId xmlns:a16="http://schemas.microsoft.com/office/drawing/2014/main" id="{507CBB88-F92E-4ED9-A44B-E36807DEFFE3}"/>
+                </a:ext>
+              </a:extLst>
+            </p:cNvPr>
+            <p:cNvSpPr txBox="1"/>
+            <p:nvPr/>
+          </p:nvSpPr>
+          <p:spPr>
+            <a:xfrm>
+              <a:off x="8118765" y="4104703"/>
+              <a:ext cx="671979" cy="369332"/>
+            </a:xfrm>
+            <a:prstGeom prst="rect">
+              <a:avLst/>
+            </a:prstGeom>
+            <a:noFill/>
+          </p:spPr>
+          <p:txBody>
+            <a:bodyPr wrap="none" rtlCol="0">
+              <a:spAutoFit/>
+            </a:bodyPr>
+            <a:lstStyle/>
+            <a:p>
+              <a:r>
+                <a:rPr lang="en-US" altLang="zh-CN" dirty="0">
+                  <a:latin typeface="Times New Roman" panose="02020603050405020304" pitchFamily="18" charset="0"/>
+                  <a:cs typeface="Times New Roman" panose="02020603050405020304" pitchFamily="18" charset="0"/>
+                </a:rPr>
+                <a:t>False</a:t>
+              </a:r>
+              <a:endParaRPr lang="zh-CN" altLang="en-US" dirty="0">
+                <a:latin typeface="Times New Roman" panose="02020603050405020304" pitchFamily="18" charset="0"/>
+                <a:cs typeface="Times New Roman" panose="02020603050405020304" pitchFamily="18" charset="0"/>
+              </a:endParaRPr>
+            </a:p>
+          </p:txBody>
+        </p:sp>
+        <p:sp>
+          <p:nvSpPr>
+            <p:cNvPr id="79" name="文本框 78">
+              <a:extLst>
+                <a:ext uri="{FF2B5EF4-FFF2-40B4-BE49-F238E27FC236}">
+                  <a16:creationId xmlns:a16="http://schemas.microsoft.com/office/drawing/2014/main" id="{BA9DF710-A889-4C6F-A4EA-E8260276646B}"/>
+                </a:ext>
+              </a:extLst>
+            </p:cNvPr>
+            <p:cNvSpPr txBox="1"/>
+            <p:nvPr/>
+          </p:nvSpPr>
+          <p:spPr>
+            <a:xfrm>
+              <a:off x="10125693" y="3031282"/>
+              <a:ext cx="628698" cy="369332"/>
+            </a:xfrm>
+            <a:prstGeom prst="rect">
+              <a:avLst/>
+            </a:prstGeom>
+            <a:noFill/>
+          </p:spPr>
+          <p:txBody>
+            <a:bodyPr wrap="none" rtlCol="0">
+              <a:spAutoFit/>
+            </a:bodyPr>
+            <a:lstStyle/>
+            <a:p>
+              <a:r>
+                <a:rPr lang="en-US" altLang="zh-CN" dirty="0">
+                  <a:latin typeface="Times New Roman" panose="02020603050405020304" pitchFamily="18" charset="0"/>
+                  <a:cs typeface="Times New Roman" panose="02020603050405020304" pitchFamily="18" charset="0"/>
+                </a:rPr>
+                <a:t>True</a:t>
+              </a:r>
+              <a:endParaRPr lang="zh-CN" altLang="en-US" dirty="0">
+                <a:latin typeface="Times New Roman" panose="02020603050405020304" pitchFamily="18" charset="0"/>
+                <a:cs typeface="Times New Roman" panose="02020603050405020304" pitchFamily="18" charset="0"/>
+              </a:endParaRPr>
+            </a:p>
+          </p:txBody>
+        </p:sp>
+      </p:grpSp>
+      <p:sp>
+        <p:nvSpPr>
+          <p:cNvPr id="82" name="文本框 81">
+            <a:extLst>
+              <a:ext uri="{FF2B5EF4-FFF2-40B4-BE49-F238E27FC236}">
+                <a16:creationId xmlns:a16="http://schemas.microsoft.com/office/drawing/2014/main" id="{A8D8E90C-6688-4FC6-97E5-5CBF5C44F9A6}"/>
+              </a:ext>
+            </a:extLst>
+          </p:cNvPr>
+          <p:cNvSpPr txBox="1"/>
+          <p:nvPr/>
+        </p:nvSpPr>
+        <p:spPr>
+          <a:xfrm>
+            <a:off x="5312573" y="2328850"/>
+            <a:ext cx="671979" cy="369332"/>
+          </a:xfrm>
+          <a:prstGeom prst="rect">
+            <a:avLst/>
+          </a:prstGeom>
+          <a:noFill/>
+        </p:spPr>
+        <p:txBody>
+          <a:bodyPr wrap="none" rtlCol="0">
+            <a:spAutoFit/>
+          </a:bodyPr>
+          <a:lstStyle/>
+          <a:p>
+            <a:r>
+              <a:rPr lang="en-US" altLang="zh-CN" dirty="0">
+                <a:latin typeface="Times New Roman" panose="02020603050405020304" pitchFamily="18" charset="0"/>
+                <a:cs typeface="Times New Roman" panose="02020603050405020304" pitchFamily="18" charset="0"/>
+              </a:rPr>
+              <a:t>False</a:t>
+            </a:r>
+            <a:endParaRPr lang="zh-CN" altLang="en-US" dirty="0">
+              <a:latin typeface="Times New Roman" panose="02020603050405020304" pitchFamily="18" charset="0"/>
+              <a:cs typeface="Times New Roman" panose="02020603050405020304" pitchFamily="18" charset="0"/>
+            </a:endParaRPr>
+          </a:p>
+        </p:txBody>
+      </p:sp>
+    </p:spTree>
+    <p:extLst>
+      <p:ext uri="{BB962C8B-B14F-4D97-AF65-F5344CB8AC3E}">
+        <p14:creationId xmlns:p14="http://schemas.microsoft.com/office/powerpoint/2010/main" val="3606217487"/>
+      </p:ext>
+    </p:extLst>
+  </p:cSld>
+  <p:clrMapOvr>
+    <a:masterClrMapping/>
+  </p:clrMapOvr>
+</p:sld>
+</file>
+
 <file path=ppt/theme/theme1.xml><?xml version="1.0" encoding="utf-8"?>
 <a:theme xmlns:a="http://schemas.openxmlformats.org/drawingml/2006/main" name="Office 主题​​">
   <a:themeElements>

--- a/docs/thesis/pictures.pptx
+++ b/docs/thesis/pictures.pptx
@@ -5,7 +5,7 @@
     <p:sldMasterId id="2147483648" r:id="rId1"/>
   </p:sldMasterIdLst>
   <p:notesMasterIdLst>
-    <p:notesMasterId r:id="rId11"/>
+    <p:notesMasterId r:id="rId12"/>
   </p:notesMasterIdLst>
   <p:sldIdLst>
     <p:sldId id="259" r:id="rId2"/>
@@ -17,6 +17,7 @@
     <p:sldId id="265" r:id="rId8"/>
     <p:sldId id="266" r:id="rId9"/>
     <p:sldId id="267" r:id="rId10"/>
+    <p:sldId id="268" r:id="rId11"/>
   </p:sldIdLst>
   <p:sldSz cx="12192000" cy="6858000"/>
   <p:notesSz cx="6858000" cy="9144000"/>
@@ -6660,6 +6661,1749 @@
     <p:extLst>
       <p:ext uri="{BB962C8B-B14F-4D97-AF65-F5344CB8AC3E}">
         <p14:creationId xmlns:p14="http://schemas.microsoft.com/office/powerpoint/2010/main" val="3051873910"/>
+      </p:ext>
+    </p:extLst>
+  </p:cSld>
+  <p:clrMapOvr>
+    <a:masterClrMapping/>
+  </p:clrMapOvr>
+</p:sld>
+</file>
+
+<file path=ppt/slides/slide10.xml><?xml version="1.0" encoding="utf-8"?>
+<p:sld xmlns:a="http://schemas.openxmlformats.org/drawingml/2006/main" xmlns:r="http://schemas.openxmlformats.org/officeDocument/2006/relationships" xmlns:p="http://schemas.openxmlformats.org/presentationml/2006/main">
+  <p:cSld>
+    <p:spTree>
+      <p:nvGrpSpPr>
+        <p:cNvPr id="1" name=""/>
+        <p:cNvGrpSpPr/>
+        <p:nvPr/>
+      </p:nvGrpSpPr>
+      <p:grpSpPr>
+        <a:xfrm>
+          <a:off x="0" y="0"/>
+          <a:ext cx="0" cy="0"/>
+          <a:chOff x="0" y="0"/>
+          <a:chExt cx="0" cy="0"/>
+        </a:xfrm>
+      </p:grpSpPr>
+      <p:sp>
+        <p:nvSpPr>
+          <p:cNvPr id="4" name="矩形: 圆角 3">
+            <a:extLst>
+              <a:ext uri="{FF2B5EF4-FFF2-40B4-BE49-F238E27FC236}">
+                <a16:creationId xmlns:a16="http://schemas.microsoft.com/office/drawing/2014/main" id="{255870C9-4868-43B9-BBE2-A11C36687D37}"/>
+              </a:ext>
+            </a:extLst>
+          </p:cNvPr>
+          <p:cNvSpPr/>
+          <p:nvPr/>
+        </p:nvSpPr>
+        <p:spPr>
+          <a:xfrm>
+            <a:off x="142504" y="2848596"/>
+            <a:ext cx="2339439" cy="1160807"/>
+          </a:xfrm>
+          <a:prstGeom prst="roundRect">
+            <a:avLst/>
+          </a:prstGeom>
+          <a:noFill/>
+          <a:ln w="28575">
+            <a:solidFill>
+              <a:schemeClr val="tx1"/>
+            </a:solidFill>
+          </a:ln>
+        </p:spPr>
+        <p:style>
+          <a:lnRef idx="2">
+            <a:schemeClr val="accent1">
+              <a:shade val="50000"/>
+            </a:schemeClr>
+          </a:lnRef>
+          <a:fillRef idx="1">
+            <a:schemeClr val="accent1"/>
+          </a:fillRef>
+          <a:effectRef idx="0">
+            <a:schemeClr val="accent1"/>
+          </a:effectRef>
+          <a:fontRef idx="minor">
+            <a:schemeClr val="lt1"/>
+          </a:fontRef>
+        </p:style>
+        <p:txBody>
+          <a:bodyPr rtlCol="0" anchor="ctr"/>
+          <a:lstStyle/>
+          <a:p>
+            <a:pPr algn="ctr"/>
+            <a:r>
+              <a:rPr lang="en-US" altLang="zh-CN" sz="1600" dirty="0">
+                <a:solidFill>
+                  <a:schemeClr val="tx1"/>
+                </a:solidFill>
+                <a:latin typeface="Times New Roman" panose="02020603050405020304" pitchFamily="18" charset="0"/>
+                <a:ea typeface="宋体" panose="02010600030101010101" pitchFamily="2" charset="-122"/>
+                <a:cs typeface="Times New Roman" panose="02020603050405020304" pitchFamily="18" charset="0"/>
+              </a:rPr>
+              <a:t>VM </a:t>
+            </a:r>
+            <a:r>
+              <a:rPr lang="zh-CN" altLang="en-US" sz="1600" dirty="0">
+                <a:solidFill>
+                  <a:schemeClr val="tx1"/>
+                </a:solidFill>
+                <a:latin typeface="Times New Roman" panose="02020603050405020304" pitchFamily="18" charset="0"/>
+                <a:ea typeface="宋体" panose="02010600030101010101" pitchFamily="2" charset="-122"/>
+                <a:cs typeface="Times New Roman" panose="02020603050405020304" pitchFamily="18" charset="0"/>
+              </a:rPr>
+              <a:t>调用对象核心行为</a:t>
+            </a:r>
+            <a:endParaRPr lang="en-US" altLang="zh-CN" sz="1600" dirty="0">
+              <a:solidFill>
+                <a:schemeClr val="tx1"/>
+              </a:solidFill>
+              <a:latin typeface="Times New Roman" panose="02020603050405020304" pitchFamily="18" charset="0"/>
+              <a:ea typeface="宋体" panose="02010600030101010101" pitchFamily="2" charset="-122"/>
+              <a:cs typeface="Times New Roman" panose="02020603050405020304" pitchFamily="18" charset="0"/>
+            </a:endParaRPr>
+          </a:p>
+          <a:p>
+            <a:pPr algn="ctr"/>
+            <a:r>
+              <a:rPr lang="zh-CN" altLang="en-US" sz="1600" dirty="0">
+                <a:solidFill>
+                  <a:schemeClr val="tx1"/>
+                </a:solidFill>
+                <a:latin typeface="Times New Roman" panose="02020603050405020304" pitchFamily="18" charset="0"/>
+                <a:ea typeface="宋体" panose="02010600030101010101" pitchFamily="2" charset="-122"/>
+                <a:cs typeface="Times New Roman" panose="02020603050405020304" pitchFamily="18" charset="0"/>
+              </a:rPr>
+              <a:t>例如</a:t>
+            </a:r>
+            <a:endParaRPr lang="en-US" altLang="zh-CN" sz="1600" dirty="0">
+              <a:solidFill>
+                <a:schemeClr val="tx1"/>
+              </a:solidFill>
+              <a:latin typeface="Times New Roman" panose="02020603050405020304" pitchFamily="18" charset="0"/>
+              <a:ea typeface="宋体" panose="02010600030101010101" pitchFamily="2" charset="-122"/>
+              <a:cs typeface="Times New Roman" panose="02020603050405020304" pitchFamily="18" charset="0"/>
+            </a:endParaRPr>
+          </a:p>
+          <a:p>
+            <a:pPr algn="ctr"/>
+            <a:r>
+              <a:rPr lang="en-US" altLang="zh-CN" sz="1600" dirty="0">
+                <a:solidFill>
+                  <a:schemeClr val="tx1"/>
+                </a:solidFill>
+                <a:latin typeface="Times New Roman" panose="02020603050405020304" pitchFamily="18" charset="0"/>
+                <a:ea typeface="宋体" panose="02010600030101010101" pitchFamily="2" charset="-122"/>
+                <a:cs typeface="Times New Roman" panose="02020603050405020304" pitchFamily="18" charset="0"/>
+              </a:rPr>
+              <a:t>Add(self, other)</a:t>
+            </a:r>
+          </a:p>
+          <a:p>
+            <a:pPr algn="ctr"/>
+            <a:r>
+              <a:rPr lang="en-US" altLang="zh-CN" sz="1600" dirty="0">
+                <a:solidFill>
+                  <a:schemeClr val="tx1"/>
+                </a:solidFill>
+                <a:latin typeface="Times New Roman" panose="02020603050405020304" pitchFamily="18" charset="0"/>
+                <a:ea typeface="宋体" panose="02010600030101010101" pitchFamily="2" charset="-122"/>
+                <a:cs typeface="Times New Roman" panose="02020603050405020304" pitchFamily="18" charset="0"/>
+              </a:rPr>
+              <a:t>Equal(self, other)</a:t>
+            </a:r>
+            <a:endParaRPr lang="zh-CN" altLang="en-US" sz="1600" dirty="0">
+              <a:solidFill>
+                <a:schemeClr val="tx1"/>
+              </a:solidFill>
+              <a:latin typeface="Times New Roman" panose="02020603050405020304" pitchFamily="18" charset="0"/>
+              <a:ea typeface="宋体" panose="02010600030101010101" pitchFamily="2" charset="-122"/>
+              <a:cs typeface="Times New Roman" panose="02020603050405020304" pitchFamily="18" charset="0"/>
+            </a:endParaRPr>
+          </a:p>
+        </p:txBody>
+      </p:sp>
+      <p:sp>
+        <p:nvSpPr>
+          <p:cNvPr id="5" name="矩形 4">
+            <a:extLst>
+              <a:ext uri="{FF2B5EF4-FFF2-40B4-BE49-F238E27FC236}">
+                <a16:creationId xmlns:a16="http://schemas.microsoft.com/office/drawing/2014/main" id="{22EB3E49-F3C1-4361-A16D-86EAA08F668A}"/>
+              </a:ext>
+            </a:extLst>
+          </p:cNvPr>
+          <p:cNvSpPr/>
+          <p:nvPr/>
+        </p:nvSpPr>
+        <p:spPr>
+          <a:xfrm>
+            <a:off x="100940" y="4625439"/>
+            <a:ext cx="2422566" cy="844064"/>
+          </a:xfrm>
+          <a:prstGeom prst="rect">
+            <a:avLst/>
+          </a:prstGeom>
+          <a:noFill/>
+          <a:ln w="28575">
+            <a:solidFill>
+              <a:schemeClr val="tx1"/>
+            </a:solidFill>
+          </a:ln>
+        </p:spPr>
+        <p:style>
+          <a:lnRef idx="2">
+            <a:schemeClr val="accent1">
+              <a:shade val="50000"/>
+            </a:schemeClr>
+          </a:lnRef>
+          <a:fillRef idx="1">
+            <a:schemeClr val="accent1"/>
+          </a:fillRef>
+          <a:effectRef idx="0">
+            <a:schemeClr val="accent1"/>
+          </a:effectRef>
+          <a:fontRef idx="minor">
+            <a:schemeClr val="lt1"/>
+          </a:fontRef>
+        </p:style>
+        <p:txBody>
+          <a:bodyPr rtlCol="0" anchor="ctr"/>
+          <a:lstStyle/>
+          <a:p>
+            <a:pPr algn="ctr"/>
+            <a:r>
+              <a:rPr lang="zh-CN" altLang="en-US" sz="1600" dirty="0">
+                <a:solidFill>
+                  <a:schemeClr val="tx1"/>
+                </a:solidFill>
+                <a:latin typeface="Times New Roman" panose="02020603050405020304" pitchFamily="18" charset="0"/>
+                <a:ea typeface="宋体" panose="02010600030101010101" pitchFamily="2" charset="-122"/>
+                <a:cs typeface="Times New Roman" panose="02020603050405020304" pitchFamily="18" charset="0"/>
+              </a:rPr>
+              <a:t>获取 </a:t>
+            </a:r>
+            <a:r>
+              <a:rPr lang="en-US" altLang="zh-CN" sz="1600" dirty="0">
+                <a:solidFill>
+                  <a:schemeClr val="tx1"/>
+                </a:solidFill>
+                <a:latin typeface="Times New Roman" panose="02020603050405020304" pitchFamily="18" charset="0"/>
+                <a:ea typeface="宋体" panose="02010600030101010101" pitchFamily="2" charset="-122"/>
+                <a:cs typeface="Times New Roman" panose="02020603050405020304" pitchFamily="18" charset="0"/>
+              </a:rPr>
+              <a:t>self </a:t>
+            </a:r>
+            <a:r>
+              <a:rPr lang="zh-CN" altLang="en-US" sz="1600" dirty="0">
+                <a:solidFill>
+                  <a:schemeClr val="tx1"/>
+                </a:solidFill>
+                <a:latin typeface="Times New Roman" panose="02020603050405020304" pitchFamily="18" charset="0"/>
+                <a:ea typeface="宋体" panose="02010600030101010101" pitchFamily="2" charset="-122"/>
+                <a:cs typeface="Times New Roman" panose="02020603050405020304" pitchFamily="18" charset="0"/>
+              </a:rPr>
+              <a:t>对象对应 </a:t>
+            </a:r>
+            <a:r>
+              <a:rPr lang="en-US" altLang="zh-CN" sz="1600" dirty="0">
+                <a:solidFill>
+                  <a:schemeClr val="tx1"/>
+                </a:solidFill>
+                <a:latin typeface="Times New Roman" panose="02020603050405020304" pitchFamily="18" charset="0"/>
+                <a:ea typeface="宋体" panose="02010600030101010101" pitchFamily="2" charset="-122"/>
+                <a:cs typeface="Times New Roman" panose="02020603050405020304" pitchFamily="18" charset="0"/>
+              </a:rPr>
+              <a:t>Klass </a:t>
+            </a:r>
+            <a:r>
+              <a:rPr lang="zh-CN" altLang="en-US" sz="1600" dirty="0">
+                <a:solidFill>
+                  <a:schemeClr val="tx1"/>
+                </a:solidFill>
+                <a:latin typeface="Times New Roman" panose="02020603050405020304" pitchFamily="18" charset="0"/>
+                <a:ea typeface="宋体" panose="02010600030101010101" pitchFamily="2" charset="-122"/>
+                <a:cs typeface="Times New Roman" panose="02020603050405020304" pitchFamily="18" charset="0"/>
+              </a:rPr>
+              <a:t>实体，并进一步获取其 </a:t>
+            </a:r>
+            <a:r>
+              <a:rPr lang="en-US" altLang="zh-CN" sz="1600" dirty="0">
+                <a:solidFill>
+                  <a:schemeClr val="tx1"/>
+                </a:solidFill>
+                <a:latin typeface="Times New Roman" panose="02020603050405020304" pitchFamily="18" charset="0"/>
+                <a:ea typeface="宋体" panose="02010600030101010101" pitchFamily="2" charset="-122"/>
+                <a:cs typeface="Times New Roman" panose="02020603050405020304" pitchFamily="18" charset="0"/>
+              </a:rPr>
+              <a:t>KlassVtable</a:t>
+            </a:r>
+            <a:endParaRPr lang="zh-CN" altLang="en-US" sz="1600" dirty="0">
+              <a:solidFill>
+                <a:schemeClr val="tx1"/>
+              </a:solidFill>
+              <a:latin typeface="Times New Roman" panose="02020603050405020304" pitchFamily="18" charset="0"/>
+              <a:ea typeface="宋体" panose="02010600030101010101" pitchFamily="2" charset="-122"/>
+              <a:cs typeface="Times New Roman" panose="02020603050405020304" pitchFamily="18" charset="0"/>
+            </a:endParaRPr>
+          </a:p>
+        </p:txBody>
+      </p:sp>
+      <p:grpSp>
+        <p:nvGrpSpPr>
+          <p:cNvPr id="17" name="组合 16">
+            <a:extLst>
+              <a:ext uri="{FF2B5EF4-FFF2-40B4-BE49-F238E27FC236}">
+                <a16:creationId xmlns:a16="http://schemas.microsoft.com/office/drawing/2014/main" id="{DFF13DB9-3C64-4B83-B372-C44B65BEDFFD}"/>
+              </a:ext>
+            </a:extLst>
+          </p:cNvPr>
+          <p:cNvGrpSpPr/>
+          <p:nvPr/>
+        </p:nvGrpSpPr>
+        <p:grpSpPr>
+          <a:xfrm>
+            <a:off x="2826327" y="2719234"/>
+            <a:ext cx="1377301" cy="1414473"/>
+            <a:chOff x="5955475" y="2416627"/>
+            <a:chExt cx="1377301" cy="1414473"/>
+          </a:xfrm>
+        </p:grpSpPr>
+        <p:sp>
+          <p:nvSpPr>
+            <p:cNvPr id="6" name="矩形 5">
+              <a:extLst>
+                <a:ext uri="{FF2B5EF4-FFF2-40B4-BE49-F238E27FC236}">
+                  <a16:creationId xmlns:a16="http://schemas.microsoft.com/office/drawing/2014/main" id="{FB460ADB-2BBB-45BB-B649-EF700FD0D360}"/>
+                </a:ext>
+              </a:extLst>
+            </p:cNvPr>
+            <p:cNvSpPr/>
+            <p:nvPr/>
+          </p:nvSpPr>
+          <p:spPr>
+            <a:xfrm>
+              <a:off x="5955476" y="2416627"/>
+              <a:ext cx="1377300" cy="1414473"/>
+            </a:xfrm>
+            <a:prstGeom prst="rect">
+              <a:avLst/>
+            </a:prstGeom>
+            <a:noFill/>
+            <a:ln w="28575">
+              <a:solidFill>
+                <a:schemeClr val="tx1"/>
+              </a:solidFill>
+            </a:ln>
+          </p:spPr>
+          <p:style>
+            <a:lnRef idx="2">
+              <a:schemeClr val="accent1">
+                <a:shade val="50000"/>
+              </a:schemeClr>
+            </a:lnRef>
+            <a:fillRef idx="1">
+              <a:schemeClr val="accent1"/>
+            </a:fillRef>
+            <a:effectRef idx="0">
+              <a:schemeClr val="accent1"/>
+            </a:effectRef>
+            <a:fontRef idx="minor">
+              <a:schemeClr val="lt1"/>
+            </a:fontRef>
+          </p:style>
+          <p:txBody>
+            <a:bodyPr rtlCol="0" anchor="ctr"/>
+            <a:lstStyle/>
+            <a:p>
+              <a:pPr algn="ctr"/>
+              <a:endParaRPr lang="zh-CN" altLang="en-US"/>
+            </a:p>
+          </p:txBody>
+        </p:sp>
+        <p:cxnSp>
+          <p:nvCxnSpPr>
+            <p:cNvPr id="8" name="直接连接符 7">
+              <a:extLst>
+                <a:ext uri="{FF2B5EF4-FFF2-40B4-BE49-F238E27FC236}">
+                  <a16:creationId xmlns:a16="http://schemas.microsoft.com/office/drawing/2014/main" id="{8833E980-8096-4613-BEC4-7DE486B54134}"/>
+                </a:ext>
+              </a:extLst>
+            </p:cNvPr>
+            <p:cNvCxnSpPr>
+              <a:cxnSpLocks/>
+            </p:cNvCxnSpPr>
+            <p:nvPr/>
+          </p:nvCxnSpPr>
+          <p:spPr>
+            <a:xfrm>
+              <a:off x="5955476" y="2796639"/>
+              <a:ext cx="1377300" cy="0"/>
+            </a:xfrm>
+            <a:prstGeom prst="line">
+              <a:avLst/>
+            </a:prstGeom>
+            <a:ln w="28575">
+              <a:solidFill>
+                <a:schemeClr val="tx1"/>
+              </a:solidFill>
+            </a:ln>
+          </p:spPr>
+          <p:style>
+            <a:lnRef idx="1">
+              <a:schemeClr val="accent1"/>
+            </a:lnRef>
+            <a:fillRef idx="0">
+              <a:schemeClr val="accent1"/>
+            </a:fillRef>
+            <a:effectRef idx="0">
+              <a:schemeClr val="accent1"/>
+            </a:effectRef>
+            <a:fontRef idx="minor">
+              <a:schemeClr val="tx1"/>
+            </a:fontRef>
+          </p:style>
+        </p:cxnSp>
+        <p:sp>
+          <p:nvSpPr>
+            <p:cNvPr id="9" name="文本框 8">
+              <a:extLst>
+                <a:ext uri="{FF2B5EF4-FFF2-40B4-BE49-F238E27FC236}">
+                  <a16:creationId xmlns:a16="http://schemas.microsoft.com/office/drawing/2014/main" id="{CC4FFCF7-A649-4EB2-89A2-4E10E3359FCC}"/>
+                </a:ext>
+              </a:extLst>
+            </p:cNvPr>
+            <p:cNvSpPr txBox="1"/>
+            <p:nvPr/>
+          </p:nvSpPr>
+          <p:spPr>
+            <a:xfrm>
+              <a:off x="5955476" y="2439181"/>
+              <a:ext cx="1377300" cy="369332"/>
+            </a:xfrm>
+            <a:prstGeom prst="rect">
+              <a:avLst/>
+            </a:prstGeom>
+            <a:noFill/>
+          </p:spPr>
+          <p:txBody>
+            <a:bodyPr wrap="none" rtlCol="0">
+              <a:spAutoFit/>
+            </a:bodyPr>
+            <a:lstStyle/>
+            <a:p>
+              <a:r>
+                <a:rPr lang="en-US" altLang="zh-CN" b="1" dirty="0">
+                  <a:latin typeface="Times New Roman" panose="02020603050405020304" pitchFamily="18" charset="0"/>
+                  <a:cs typeface="Times New Roman" panose="02020603050405020304" pitchFamily="18" charset="0"/>
+                </a:rPr>
+                <a:t>KlassVtable</a:t>
+              </a:r>
+              <a:endParaRPr lang="zh-CN" altLang="en-US" b="1" dirty="0">
+                <a:latin typeface="Times New Roman" panose="02020603050405020304" pitchFamily="18" charset="0"/>
+                <a:cs typeface="Times New Roman" panose="02020603050405020304" pitchFamily="18" charset="0"/>
+              </a:endParaRPr>
+            </a:p>
+          </p:txBody>
+        </p:sp>
+        <p:cxnSp>
+          <p:nvCxnSpPr>
+            <p:cNvPr id="10" name="直接连接符 9">
+              <a:extLst>
+                <a:ext uri="{FF2B5EF4-FFF2-40B4-BE49-F238E27FC236}">
+                  <a16:creationId xmlns:a16="http://schemas.microsoft.com/office/drawing/2014/main" id="{B7D0A64C-CA8A-419F-A1B9-ADDD10A5A2AB}"/>
+                </a:ext>
+              </a:extLst>
+            </p:cNvPr>
+            <p:cNvCxnSpPr>
+              <a:cxnSpLocks/>
+            </p:cNvCxnSpPr>
+            <p:nvPr/>
+          </p:nvCxnSpPr>
+          <p:spPr>
+            <a:xfrm>
+              <a:off x="5955476" y="3146961"/>
+              <a:ext cx="1377300" cy="0"/>
+            </a:xfrm>
+            <a:prstGeom prst="line">
+              <a:avLst/>
+            </a:prstGeom>
+            <a:ln w="28575">
+              <a:solidFill>
+                <a:schemeClr val="tx1"/>
+              </a:solidFill>
+            </a:ln>
+          </p:spPr>
+          <p:style>
+            <a:lnRef idx="1">
+              <a:schemeClr val="accent1"/>
+            </a:lnRef>
+            <a:fillRef idx="0">
+              <a:schemeClr val="accent1"/>
+            </a:fillRef>
+            <a:effectRef idx="0">
+              <a:schemeClr val="accent1"/>
+            </a:effectRef>
+            <a:fontRef idx="minor">
+              <a:schemeClr val="tx1"/>
+            </a:fontRef>
+          </p:style>
+        </p:cxnSp>
+        <p:sp>
+          <p:nvSpPr>
+            <p:cNvPr id="11" name="文本框 10">
+              <a:extLst>
+                <a:ext uri="{FF2B5EF4-FFF2-40B4-BE49-F238E27FC236}">
+                  <a16:creationId xmlns:a16="http://schemas.microsoft.com/office/drawing/2014/main" id="{BD929BEF-92FA-429B-89DB-FC6223D5A084}"/>
+                </a:ext>
+              </a:extLst>
+            </p:cNvPr>
+            <p:cNvSpPr txBox="1"/>
+            <p:nvPr/>
+          </p:nvSpPr>
+          <p:spPr>
+            <a:xfrm>
+              <a:off x="5955476" y="2815544"/>
+              <a:ext cx="583814" cy="338554"/>
+            </a:xfrm>
+            <a:prstGeom prst="rect">
+              <a:avLst/>
+            </a:prstGeom>
+            <a:noFill/>
+          </p:spPr>
+          <p:txBody>
+            <a:bodyPr wrap="none" rtlCol="0">
+              <a:spAutoFit/>
+            </a:bodyPr>
+            <a:lstStyle/>
+            <a:p>
+              <a:r>
+                <a:rPr lang="en-US" altLang="zh-CN" sz="1600" dirty="0">
+                  <a:latin typeface="Times New Roman" panose="02020603050405020304" pitchFamily="18" charset="0"/>
+                  <a:cs typeface="Times New Roman" panose="02020603050405020304" pitchFamily="18" charset="0"/>
+                </a:rPr>
+                <a:t>add_</a:t>
+              </a:r>
+              <a:endParaRPr lang="zh-CN" altLang="en-US" sz="1600" dirty="0">
+                <a:latin typeface="Times New Roman" panose="02020603050405020304" pitchFamily="18" charset="0"/>
+                <a:cs typeface="Times New Roman" panose="02020603050405020304" pitchFamily="18" charset="0"/>
+              </a:endParaRPr>
+            </a:p>
+          </p:txBody>
+        </p:sp>
+        <p:sp>
+          <p:nvSpPr>
+            <p:cNvPr id="12" name="文本框 11">
+              <a:extLst>
+                <a:ext uri="{FF2B5EF4-FFF2-40B4-BE49-F238E27FC236}">
+                  <a16:creationId xmlns:a16="http://schemas.microsoft.com/office/drawing/2014/main" id="{6300EC2D-7C16-48FC-9965-E040493ECCA0}"/>
+                </a:ext>
+              </a:extLst>
+            </p:cNvPr>
+            <p:cNvSpPr txBox="1"/>
+            <p:nvPr/>
+          </p:nvSpPr>
+          <p:spPr>
+            <a:xfrm>
+              <a:off x="5955476" y="3161129"/>
+              <a:ext cx="732893" cy="338554"/>
+            </a:xfrm>
+            <a:prstGeom prst="rect">
+              <a:avLst/>
+            </a:prstGeom>
+            <a:noFill/>
+          </p:spPr>
+          <p:txBody>
+            <a:bodyPr wrap="none" rtlCol="0">
+              <a:spAutoFit/>
+            </a:bodyPr>
+            <a:lstStyle/>
+            <a:p>
+              <a:r>
+                <a:rPr lang="en-US" altLang="zh-CN" sz="1600" dirty="0">
+                  <a:latin typeface="Times New Roman" panose="02020603050405020304" pitchFamily="18" charset="0"/>
+                  <a:cs typeface="Times New Roman" panose="02020603050405020304" pitchFamily="18" charset="0"/>
+                </a:rPr>
+                <a:t>equal_</a:t>
+              </a:r>
+              <a:endParaRPr lang="zh-CN" altLang="en-US" sz="1600" dirty="0">
+                <a:latin typeface="Times New Roman" panose="02020603050405020304" pitchFamily="18" charset="0"/>
+                <a:cs typeface="Times New Roman" panose="02020603050405020304" pitchFamily="18" charset="0"/>
+              </a:endParaRPr>
+            </a:p>
+          </p:txBody>
+        </p:sp>
+        <p:cxnSp>
+          <p:nvCxnSpPr>
+            <p:cNvPr id="15" name="直接连接符 14">
+              <a:extLst>
+                <a:ext uri="{FF2B5EF4-FFF2-40B4-BE49-F238E27FC236}">
+                  <a16:creationId xmlns:a16="http://schemas.microsoft.com/office/drawing/2014/main" id="{DAA4E863-F48E-4D33-945A-71CC8AF1172A}"/>
+                </a:ext>
+              </a:extLst>
+            </p:cNvPr>
+            <p:cNvCxnSpPr>
+              <a:cxnSpLocks/>
+            </p:cNvCxnSpPr>
+            <p:nvPr/>
+          </p:nvCxnSpPr>
+          <p:spPr>
+            <a:xfrm>
+              <a:off x="5955476" y="3499683"/>
+              <a:ext cx="1377300" cy="0"/>
+            </a:xfrm>
+            <a:prstGeom prst="line">
+              <a:avLst/>
+            </a:prstGeom>
+            <a:ln w="28575">
+              <a:solidFill>
+                <a:schemeClr val="tx1"/>
+              </a:solidFill>
+            </a:ln>
+          </p:spPr>
+          <p:style>
+            <a:lnRef idx="1">
+              <a:schemeClr val="accent1"/>
+            </a:lnRef>
+            <a:fillRef idx="0">
+              <a:schemeClr val="accent1"/>
+            </a:fillRef>
+            <a:effectRef idx="0">
+              <a:schemeClr val="accent1"/>
+            </a:effectRef>
+            <a:fontRef idx="minor">
+              <a:schemeClr val="tx1"/>
+            </a:fontRef>
+          </p:style>
+        </p:cxnSp>
+        <p:sp>
+          <p:nvSpPr>
+            <p:cNvPr id="16" name="文本框 15">
+              <a:extLst>
+                <a:ext uri="{FF2B5EF4-FFF2-40B4-BE49-F238E27FC236}">
+                  <a16:creationId xmlns:a16="http://schemas.microsoft.com/office/drawing/2014/main" id="{9C1A2426-0201-493D-9575-28AC99615421}"/>
+                </a:ext>
+              </a:extLst>
+            </p:cNvPr>
+            <p:cNvSpPr txBox="1"/>
+            <p:nvPr/>
+          </p:nvSpPr>
+          <p:spPr>
+            <a:xfrm>
+              <a:off x="5955475" y="3492546"/>
+              <a:ext cx="389850" cy="338554"/>
+            </a:xfrm>
+            <a:prstGeom prst="rect">
+              <a:avLst/>
+            </a:prstGeom>
+            <a:noFill/>
+          </p:spPr>
+          <p:txBody>
+            <a:bodyPr wrap="none" rtlCol="0">
+              <a:spAutoFit/>
+            </a:bodyPr>
+            <a:lstStyle/>
+            <a:p>
+              <a:r>
+                <a:rPr lang="en-US" altLang="zh-CN" sz="1600" dirty="0">
+                  <a:latin typeface="Times New Roman" panose="02020603050405020304" pitchFamily="18" charset="0"/>
+                  <a:cs typeface="Times New Roman" panose="02020603050405020304" pitchFamily="18" charset="0"/>
+                </a:rPr>
+                <a:t>…</a:t>
+              </a:r>
+              <a:endParaRPr lang="zh-CN" altLang="en-US" sz="1600" dirty="0">
+                <a:latin typeface="Times New Roman" panose="02020603050405020304" pitchFamily="18" charset="0"/>
+                <a:cs typeface="Times New Roman" panose="02020603050405020304" pitchFamily="18" charset="0"/>
+              </a:endParaRPr>
+            </a:p>
+          </p:txBody>
+        </p:sp>
+      </p:grpSp>
+      <p:sp>
+        <p:nvSpPr>
+          <p:cNvPr id="18" name="矩形 17">
+            <a:extLst>
+              <a:ext uri="{FF2B5EF4-FFF2-40B4-BE49-F238E27FC236}">
+                <a16:creationId xmlns:a16="http://schemas.microsoft.com/office/drawing/2014/main" id="{ED6189F4-8246-439D-B460-553DCD619B63}"/>
+              </a:ext>
+            </a:extLst>
+          </p:cNvPr>
+          <p:cNvSpPr/>
+          <p:nvPr/>
+        </p:nvSpPr>
+        <p:spPr>
+          <a:xfrm>
+            <a:off x="4596444" y="4008665"/>
+            <a:ext cx="2665318" cy="564077"/>
+          </a:xfrm>
+          <a:prstGeom prst="rect">
+            <a:avLst/>
+          </a:prstGeom>
+          <a:noFill/>
+          <a:ln w="28575">
+            <a:solidFill>
+              <a:schemeClr val="tx1"/>
+            </a:solidFill>
+          </a:ln>
+        </p:spPr>
+        <p:style>
+          <a:lnRef idx="2">
+            <a:schemeClr val="accent1">
+              <a:shade val="50000"/>
+            </a:schemeClr>
+          </a:lnRef>
+          <a:fillRef idx="1">
+            <a:schemeClr val="accent1"/>
+          </a:fillRef>
+          <a:effectRef idx="0">
+            <a:schemeClr val="accent1"/>
+          </a:effectRef>
+          <a:fontRef idx="minor">
+            <a:schemeClr val="lt1"/>
+          </a:fontRef>
+        </p:style>
+        <p:txBody>
+          <a:bodyPr rtlCol="0" anchor="ctr"/>
+          <a:lstStyle/>
+          <a:p>
+            <a:pPr algn="ctr"/>
+            <a:r>
+              <a:rPr lang="en-US" altLang="zh-CN" sz="1600" dirty="0">
+                <a:solidFill>
+                  <a:schemeClr val="tx1"/>
+                </a:solidFill>
+                <a:latin typeface="Times New Roman" panose="02020603050405020304" pitchFamily="18" charset="0"/>
+                <a:ea typeface="宋体" panose="02010600030101010101" pitchFamily="2" charset="-122"/>
+                <a:cs typeface="Times New Roman" panose="02020603050405020304" pitchFamily="18" charset="0"/>
+              </a:rPr>
+              <a:t>C++ </a:t>
+            </a:r>
+            <a:r>
+              <a:rPr lang="zh-CN" altLang="en-US" sz="1600" dirty="0">
+                <a:solidFill>
+                  <a:schemeClr val="tx1"/>
+                </a:solidFill>
+                <a:latin typeface="Times New Roman" panose="02020603050405020304" pitchFamily="18" charset="0"/>
+                <a:ea typeface="宋体" panose="02010600030101010101" pitchFamily="2" charset="-122"/>
+                <a:cs typeface="Times New Roman" panose="02020603050405020304" pitchFamily="18" charset="0"/>
+              </a:rPr>
+              <a:t>本地函数</a:t>
+            </a:r>
+            <a:endParaRPr lang="en-US" altLang="zh-CN" sz="1600" dirty="0">
+              <a:solidFill>
+                <a:schemeClr val="tx1"/>
+              </a:solidFill>
+              <a:latin typeface="Times New Roman" panose="02020603050405020304" pitchFamily="18" charset="0"/>
+              <a:ea typeface="宋体" panose="02010600030101010101" pitchFamily="2" charset="-122"/>
+              <a:cs typeface="Times New Roman" panose="02020603050405020304" pitchFamily="18" charset="0"/>
+            </a:endParaRPr>
+          </a:p>
+          <a:p>
+            <a:pPr algn="ctr"/>
+            <a:r>
+              <a:rPr lang="zh-CN" altLang="en-US" sz="1600" dirty="0">
+                <a:solidFill>
+                  <a:schemeClr val="tx1"/>
+                </a:solidFill>
+                <a:latin typeface="Times New Roman" panose="02020603050405020304" pitchFamily="18" charset="0"/>
+                <a:ea typeface="宋体" panose="02010600030101010101" pitchFamily="2" charset="-122"/>
+                <a:cs typeface="Times New Roman" panose="02020603050405020304" pitchFamily="18" charset="0"/>
+              </a:rPr>
+              <a:t>例如 </a:t>
+            </a:r>
+            <a:r>
+              <a:rPr lang="en-US" altLang="zh-CN" sz="1600" dirty="0">
+                <a:solidFill>
+                  <a:schemeClr val="tx1"/>
+                </a:solidFill>
+                <a:latin typeface="Times New Roman" panose="02020603050405020304" pitchFamily="18" charset="0"/>
+                <a:ea typeface="宋体" panose="02010600030101010101" pitchFamily="2" charset="-122"/>
+                <a:cs typeface="Times New Roman" panose="02020603050405020304" pitchFamily="18" charset="0"/>
+              </a:rPr>
+              <a:t>PyObject::Virtual_Equal</a:t>
+            </a:r>
+            <a:endParaRPr lang="zh-CN" altLang="en-US" sz="1600" dirty="0">
+              <a:solidFill>
+                <a:schemeClr val="tx1"/>
+              </a:solidFill>
+              <a:latin typeface="Times New Roman" panose="02020603050405020304" pitchFamily="18" charset="0"/>
+              <a:ea typeface="宋体" panose="02010600030101010101" pitchFamily="2" charset="-122"/>
+              <a:cs typeface="Times New Roman" panose="02020603050405020304" pitchFamily="18" charset="0"/>
+            </a:endParaRPr>
+          </a:p>
+        </p:txBody>
+      </p:sp>
+      <p:sp>
+        <p:nvSpPr>
+          <p:cNvPr id="20" name="矩形: 圆角 19">
+            <a:extLst>
+              <a:ext uri="{FF2B5EF4-FFF2-40B4-BE49-F238E27FC236}">
+                <a16:creationId xmlns:a16="http://schemas.microsoft.com/office/drawing/2014/main" id="{D0CF5A80-B0AC-4956-8D57-18A6F869C2B6}"/>
+              </a:ext>
+            </a:extLst>
+          </p:cNvPr>
+          <p:cNvSpPr/>
+          <p:nvPr/>
+        </p:nvSpPr>
+        <p:spPr>
+          <a:xfrm>
+            <a:off x="7550487" y="4050474"/>
+            <a:ext cx="2368137" cy="466599"/>
+          </a:xfrm>
+          <a:prstGeom prst="roundRect">
+            <a:avLst/>
+          </a:prstGeom>
+          <a:noFill/>
+          <a:ln w="28575">
+            <a:solidFill>
+              <a:schemeClr val="tx1"/>
+            </a:solidFill>
+          </a:ln>
+        </p:spPr>
+        <p:style>
+          <a:lnRef idx="2">
+            <a:schemeClr val="accent1">
+              <a:shade val="50000"/>
+            </a:schemeClr>
+          </a:lnRef>
+          <a:fillRef idx="1">
+            <a:schemeClr val="accent1"/>
+          </a:fillRef>
+          <a:effectRef idx="0">
+            <a:schemeClr val="accent1"/>
+          </a:effectRef>
+          <a:fontRef idx="minor">
+            <a:schemeClr val="lt1"/>
+          </a:fontRef>
+        </p:style>
+        <p:txBody>
+          <a:bodyPr rtlCol="0" anchor="ctr"/>
+          <a:lstStyle/>
+          <a:p>
+            <a:pPr algn="ctr"/>
+            <a:r>
+              <a:rPr lang="zh-CN" altLang="en-US" sz="1600" dirty="0">
+                <a:solidFill>
+                  <a:schemeClr val="tx1"/>
+                </a:solidFill>
+                <a:latin typeface="Times New Roman" panose="02020603050405020304" pitchFamily="18" charset="0"/>
+                <a:ea typeface="宋体" panose="02010600030101010101" pitchFamily="2" charset="-122"/>
+                <a:cs typeface="Times New Roman" panose="02020603050405020304" pitchFamily="18" charset="0"/>
+              </a:rPr>
+              <a:t>直接执行 </a:t>
+            </a:r>
+            <a:r>
+              <a:rPr lang="en-US" altLang="zh-CN" sz="1600" dirty="0">
+                <a:solidFill>
+                  <a:schemeClr val="tx1"/>
+                </a:solidFill>
+                <a:latin typeface="Times New Roman" panose="02020603050405020304" pitchFamily="18" charset="0"/>
+                <a:ea typeface="宋体" panose="02010600030101010101" pitchFamily="2" charset="-122"/>
+                <a:cs typeface="Times New Roman" panose="02020603050405020304" pitchFamily="18" charset="0"/>
+              </a:rPr>
+              <a:t>C++ </a:t>
+            </a:r>
+            <a:r>
+              <a:rPr lang="zh-CN" altLang="en-US" sz="1600" dirty="0">
+                <a:solidFill>
+                  <a:schemeClr val="tx1"/>
+                </a:solidFill>
+                <a:latin typeface="Times New Roman" panose="02020603050405020304" pitchFamily="18" charset="0"/>
+                <a:ea typeface="宋体" panose="02010600030101010101" pitchFamily="2" charset="-122"/>
+                <a:cs typeface="Times New Roman" panose="02020603050405020304" pitchFamily="18" charset="0"/>
+              </a:rPr>
+              <a:t>本地函数</a:t>
+            </a:r>
+            <a:endParaRPr lang="en-US" altLang="zh-CN" sz="1600" dirty="0">
+              <a:solidFill>
+                <a:schemeClr val="tx1"/>
+              </a:solidFill>
+              <a:latin typeface="Times New Roman" panose="02020603050405020304" pitchFamily="18" charset="0"/>
+              <a:ea typeface="宋体" panose="02010600030101010101" pitchFamily="2" charset="-122"/>
+              <a:cs typeface="Times New Roman" panose="02020603050405020304" pitchFamily="18" charset="0"/>
+            </a:endParaRPr>
+          </a:p>
+        </p:txBody>
+      </p:sp>
+      <p:cxnSp>
+        <p:nvCxnSpPr>
+          <p:cNvPr id="22" name="直接箭头连接符 21">
+            <a:extLst>
+              <a:ext uri="{FF2B5EF4-FFF2-40B4-BE49-F238E27FC236}">
+                <a16:creationId xmlns:a16="http://schemas.microsoft.com/office/drawing/2014/main" id="{46025739-8E1B-48A4-98D9-E68F2E2A57FE}"/>
+              </a:ext>
+            </a:extLst>
+          </p:cNvPr>
+          <p:cNvCxnSpPr>
+            <a:cxnSpLocks/>
+            <a:stCxn id="4" idx="2"/>
+            <a:endCxn id="5" idx="0"/>
+          </p:cNvCxnSpPr>
+          <p:nvPr/>
+        </p:nvCxnSpPr>
+        <p:spPr>
+          <a:xfrm flipH="1">
+            <a:off x="1312223" y="4009403"/>
+            <a:ext cx="1" cy="616036"/>
+          </a:xfrm>
+          <a:prstGeom prst="straightConnector1">
+            <a:avLst/>
+          </a:prstGeom>
+          <a:ln w="28575">
+            <a:solidFill>
+              <a:schemeClr val="tx1"/>
+            </a:solidFill>
+            <a:tailEnd type="triangle"/>
+          </a:ln>
+        </p:spPr>
+        <p:style>
+          <a:lnRef idx="1">
+            <a:schemeClr val="accent1"/>
+          </a:lnRef>
+          <a:fillRef idx="0">
+            <a:schemeClr val="accent1"/>
+          </a:fillRef>
+          <a:effectRef idx="0">
+            <a:schemeClr val="accent1"/>
+          </a:effectRef>
+          <a:fontRef idx="minor">
+            <a:schemeClr val="tx1"/>
+          </a:fontRef>
+        </p:style>
+      </p:cxnSp>
+      <p:cxnSp>
+        <p:nvCxnSpPr>
+          <p:cNvPr id="24" name="连接符: 肘形 23">
+            <a:extLst>
+              <a:ext uri="{FF2B5EF4-FFF2-40B4-BE49-F238E27FC236}">
+                <a16:creationId xmlns:a16="http://schemas.microsoft.com/office/drawing/2014/main" id="{7F472C36-D4F2-474C-90CA-9B3DD49B9B0B}"/>
+              </a:ext>
+            </a:extLst>
+          </p:cNvPr>
+          <p:cNvCxnSpPr>
+            <a:cxnSpLocks/>
+            <a:stCxn id="5" idx="3"/>
+            <a:endCxn id="6" idx="2"/>
+          </p:cNvCxnSpPr>
+          <p:nvPr/>
+        </p:nvCxnSpPr>
+        <p:spPr>
+          <a:xfrm flipV="1">
+            <a:off x="2523506" y="4133707"/>
+            <a:ext cx="991472" cy="913764"/>
+          </a:xfrm>
+          <a:prstGeom prst="bentConnector2">
+            <a:avLst/>
+          </a:prstGeom>
+          <a:ln w="28575">
+            <a:solidFill>
+              <a:schemeClr val="tx1"/>
+            </a:solidFill>
+            <a:tailEnd type="triangle"/>
+          </a:ln>
+        </p:spPr>
+        <p:style>
+          <a:lnRef idx="1">
+            <a:schemeClr val="accent1"/>
+          </a:lnRef>
+          <a:fillRef idx="0">
+            <a:schemeClr val="accent1"/>
+          </a:fillRef>
+          <a:effectRef idx="0">
+            <a:schemeClr val="accent1"/>
+          </a:effectRef>
+          <a:fontRef idx="minor">
+            <a:schemeClr val="tx1"/>
+          </a:fontRef>
+        </p:style>
+      </p:cxnSp>
+      <p:cxnSp>
+        <p:nvCxnSpPr>
+          <p:cNvPr id="31" name="连接符: 曲线 30">
+            <a:extLst>
+              <a:ext uri="{FF2B5EF4-FFF2-40B4-BE49-F238E27FC236}">
+                <a16:creationId xmlns:a16="http://schemas.microsoft.com/office/drawing/2014/main" id="{C24D0B47-D08F-49CC-8663-B2C7D8ACE4E7}"/>
+              </a:ext>
+            </a:extLst>
+          </p:cNvPr>
+          <p:cNvCxnSpPr>
+            <a:cxnSpLocks/>
+            <a:stCxn id="46" idx="6"/>
+            <a:endCxn id="25" idx="1"/>
+          </p:cNvCxnSpPr>
+          <p:nvPr/>
+        </p:nvCxnSpPr>
+        <p:spPr>
+          <a:xfrm flipV="1">
+            <a:off x="3850574" y="2740940"/>
+            <a:ext cx="743544" cy="539351"/>
+          </a:xfrm>
+          <a:prstGeom prst="curvedConnector3">
+            <a:avLst>
+              <a:gd name="adj1" fmla="val 69166"/>
+            </a:avLst>
+          </a:prstGeom>
+          <a:ln w="28575">
+            <a:solidFill>
+              <a:schemeClr val="tx1"/>
+            </a:solidFill>
+            <a:tailEnd type="triangle"/>
+          </a:ln>
+        </p:spPr>
+        <p:style>
+          <a:lnRef idx="1">
+            <a:schemeClr val="accent1"/>
+          </a:lnRef>
+          <a:fillRef idx="0">
+            <a:schemeClr val="accent1"/>
+          </a:fillRef>
+          <a:effectRef idx="0">
+            <a:schemeClr val="accent1"/>
+          </a:effectRef>
+          <a:fontRef idx="minor">
+            <a:schemeClr val="tx1"/>
+          </a:fontRef>
+        </p:style>
+      </p:cxnSp>
+      <p:cxnSp>
+        <p:nvCxnSpPr>
+          <p:cNvPr id="34" name="连接符: 曲线 33">
+            <a:extLst>
+              <a:ext uri="{FF2B5EF4-FFF2-40B4-BE49-F238E27FC236}">
+                <a16:creationId xmlns:a16="http://schemas.microsoft.com/office/drawing/2014/main" id="{CE67B021-6667-4ED7-B44A-D08BED6195F9}"/>
+              </a:ext>
+            </a:extLst>
+          </p:cNvPr>
+          <p:cNvCxnSpPr>
+            <a:cxnSpLocks/>
+            <a:stCxn id="47" idx="6"/>
+            <a:endCxn id="18" idx="1"/>
+          </p:cNvCxnSpPr>
+          <p:nvPr/>
+        </p:nvCxnSpPr>
+        <p:spPr>
+          <a:xfrm>
+            <a:off x="3850574" y="3649361"/>
+            <a:ext cx="745870" cy="641343"/>
+          </a:xfrm>
+          <a:prstGeom prst="curvedConnector3">
+            <a:avLst>
+              <a:gd name="adj1" fmla="val 83435"/>
+            </a:avLst>
+          </a:prstGeom>
+          <a:ln w="28575">
+            <a:solidFill>
+              <a:schemeClr val="tx1"/>
+            </a:solidFill>
+            <a:tailEnd type="triangle"/>
+          </a:ln>
+        </p:spPr>
+        <p:style>
+          <a:lnRef idx="1">
+            <a:schemeClr val="accent1"/>
+          </a:lnRef>
+          <a:fillRef idx="0">
+            <a:schemeClr val="accent1"/>
+          </a:fillRef>
+          <a:effectRef idx="0">
+            <a:schemeClr val="accent1"/>
+          </a:effectRef>
+          <a:fontRef idx="minor">
+            <a:schemeClr val="tx1"/>
+          </a:fontRef>
+        </p:style>
+      </p:cxnSp>
+      <p:cxnSp>
+        <p:nvCxnSpPr>
+          <p:cNvPr id="41" name="直接箭头连接符 40">
+            <a:extLst>
+              <a:ext uri="{FF2B5EF4-FFF2-40B4-BE49-F238E27FC236}">
+                <a16:creationId xmlns:a16="http://schemas.microsoft.com/office/drawing/2014/main" id="{FF118B60-AD00-480E-818B-88E1A8B900ED}"/>
+              </a:ext>
+            </a:extLst>
+          </p:cNvPr>
+          <p:cNvCxnSpPr>
+            <a:stCxn id="18" idx="3"/>
+            <a:endCxn id="20" idx="1"/>
+          </p:cNvCxnSpPr>
+          <p:nvPr/>
+        </p:nvCxnSpPr>
+        <p:spPr>
+          <a:xfrm flipV="1">
+            <a:off x="7261762" y="4283774"/>
+            <a:ext cx="288725" cy="6930"/>
+          </a:xfrm>
+          <a:prstGeom prst="straightConnector1">
+            <a:avLst/>
+          </a:prstGeom>
+          <a:ln w="28575">
+            <a:solidFill>
+              <a:schemeClr val="tx1"/>
+            </a:solidFill>
+            <a:tailEnd type="triangle"/>
+          </a:ln>
+        </p:spPr>
+        <p:style>
+          <a:lnRef idx="1">
+            <a:schemeClr val="accent1"/>
+          </a:lnRef>
+          <a:fillRef idx="0">
+            <a:schemeClr val="accent1"/>
+          </a:fillRef>
+          <a:effectRef idx="0">
+            <a:schemeClr val="accent1"/>
+          </a:effectRef>
+          <a:fontRef idx="minor">
+            <a:schemeClr val="tx1"/>
+          </a:fontRef>
+        </p:style>
+      </p:cxnSp>
+      <p:sp>
+        <p:nvSpPr>
+          <p:cNvPr id="46" name="椭圆 45">
+            <a:extLst>
+              <a:ext uri="{FF2B5EF4-FFF2-40B4-BE49-F238E27FC236}">
+                <a16:creationId xmlns:a16="http://schemas.microsoft.com/office/drawing/2014/main" id="{90AEEB72-1705-4952-8E84-EB9A0B3AA6E1}"/>
+              </a:ext>
+            </a:extLst>
+          </p:cNvPr>
+          <p:cNvSpPr/>
+          <p:nvPr/>
+        </p:nvSpPr>
+        <p:spPr>
+          <a:xfrm>
+            <a:off x="3714008" y="3212008"/>
+            <a:ext cx="136566" cy="136566"/>
+          </a:xfrm>
+          <a:prstGeom prst="ellipse">
+            <a:avLst/>
+          </a:prstGeom>
+          <a:solidFill>
+            <a:schemeClr val="tx1"/>
+          </a:solidFill>
+          <a:ln>
+            <a:noFill/>
+          </a:ln>
+        </p:spPr>
+        <p:style>
+          <a:lnRef idx="2">
+            <a:schemeClr val="accent1">
+              <a:shade val="50000"/>
+            </a:schemeClr>
+          </a:lnRef>
+          <a:fillRef idx="1">
+            <a:schemeClr val="accent1"/>
+          </a:fillRef>
+          <a:effectRef idx="0">
+            <a:schemeClr val="accent1"/>
+          </a:effectRef>
+          <a:fontRef idx="minor">
+            <a:schemeClr val="lt1"/>
+          </a:fontRef>
+        </p:style>
+        <p:txBody>
+          <a:bodyPr rtlCol="0" anchor="ctr"/>
+          <a:lstStyle/>
+          <a:p>
+            <a:pPr algn="ctr"/>
+            <a:endParaRPr lang="zh-CN" altLang="en-US"/>
+          </a:p>
+        </p:txBody>
+      </p:sp>
+      <p:sp>
+        <p:nvSpPr>
+          <p:cNvPr id="47" name="椭圆 46">
+            <a:extLst>
+              <a:ext uri="{FF2B5EF4-FFF2-40B4-BE49-F238E27FC236}">
+                <a16:creationId xmlns:a16="http://schemas.microsoft.com/office/drawing/2014/main" id="{910A7FD0-22E6-4FFA-833B-58F6DA187260}"/>
+              </a:ext>
+            </a:extLst>
+          </p:cNvPr>
+          <p:cNvSpPr/>
+          <p:nvPr/>
+        </p:nvSpPr>
+        <p:spPr>
+          <a:xfrm>
+            <a:off x="3714008" y="3581078"/>
+            <a:ext cx="136566" cy="136566"/>
+          </a:xfrm>
+          <a:prstGeom prst="ellipse">
+            <a:avLst/>
+          </a:prstGeom>
+          <a:solidFill>
+            <a:schemeClr val="tx1"/>
+          </a:solidFill>
+          <a:ln>
+            <a:noFill/>
+          </a:ln>
+        </p:spPr>
+        <p:style>
+          <a:lnRef idx="2">
+            <a:schemeClr val="accent1">
+              <a:shade val="50000"/>
+            </a:schemeClr>
+          </a:lnRef>
+          <a:fillRef idx="1">
+            <a:schemeClr val="accent1"/>
+          </a:fillRef>
+          <a:effectRef idx="0">
+            <a:schemeClr val="accent1"/>
+          </a:effectRef>
+          <a:fontRef idx="minor">
+            <a:schemeClr val="lt1"/>
+          </a:fontRef>
+        </p:style>
+        <p:txBody>
+          <a:bodyPr rtlCol="0" anchor="ctr"/>
+          <a:lstStyle/>
+          <a:p>
+            <a:pPr algn="ctr"/>
+            <a:endParaRPr lang="zh-CN" altLang="en-US"/>
+          </a:p>
+        </p:txBody>
+      </p:sp>
+      <p:sp>
+        <p:nvSpPr>
+          <p:cNvPr id="52" name="文本框 51">
+            <a:extLst>
+              <a:ext uri="{FF2B5EF4-FFF2-40B4-BE49-F238E27FC236}">
+                <a16:creationId xmlns:a16="http://schemas.microsoft.com/office/drawing/2014/main" id="{1DE65A92-DAAF-44DA-B791-241964187AA6}"/>
+              </a:ext>
+            </a:extLst>
+          </p:cNvPr>
+          <p:cNvSpPr txBox="1"/>
+          <p:nvPr/>
+        </p:nvSpPr>
+        <p:spPr>
+          <a:xfrm>
+            <a:off x="5813380" y="4702050"/>
+            <a:ext cx="3185487" cy="369332"/>
+          </a:xfrm>
+          <a:prstGeom prst="rect">
+            <a:avLst/>
+          </a:prstGeom>
+          <a:noFill/>
+        </p:spPr>
+        <p:txBody>
+          <a:bodyPr wrap="none" rtlCol="0">
+            <a:spAutoFit/>
+          </a:bodyPr>
+          <a:lstStyle/>
+          <a:p>
+            <a:r>
+              <a:rPr lang="zh-CN" altLang="en-US" dirty="0">
+                <a:latin typeface="宋体" panose="02010600030101010101" pitchFamily="2" charset="-122"/>
+                <a:ea typeface="宋体" panose="02010600030101010101" pitchFamily="2" charset="-122"/>
+              </a:rPr>
+              <a:t>场景一：用户未覆写魔法方法</a:t>
+            </a:r>
+          </a:p>
+        </p:txBody>
+      </p:sp>
+      <p:grpSp>
+        <p:nvGrpSpPr>
+          <p:cNvPr id="54" name="组合 53">
+            <a:extLst>
+              <a:ext uri="{FF2B5EF4-FFF2-40B4-BE49-F238E27FC236}">
+                <a16:creationId xmlns:a16="http://schemas.microsoft.com/office/drawing/2014/main" id="{105041AC-D134-499A-8464-AC62EE29D041}"/>
+              </a:ext>
+            </a:extLst>
+          </p:cNvPr>
+          <p:cNvGrpSpPr/>
+          <p:nvPr/>
+        </p:nvGrpSpPr>
+        <p:grpSpPr>
+          <a:xfrm>
+            <a:off x="4594118" y="2322662"/>
+            <a:ext cx="7500900" cy="1279648"/>
+            <a:chOff x="4594118" y="2459230"/>
+            <a:chExt cx="7500900" cy="1279648"/>
+          </a:xfrm>
+        </p:grpSpPr>
+        <p:sp>
+          <p:nvSpPr>
+            <p:cNvPr id="25" name="矩形 24">
+              <a:extLst>
+                <a:ext uri="{FF2B5EF4-FFF2-40B4-BE49-F238E27FC236}">
+                  <a16:creationId xmlns:a16="http://schemas.microsoft.com/office/drawing/2014/main" id="{577A926A-1AFA-4604-B608-CB91E44AF7A3}"/>
+                </a:ext>
+              </a:extLst>
+            </p:cNvPr>
+            <p:cNvSpPr/>
+            <p:nvPr/>
+          </p:nvSpPr>
+          <p:spPr>
+            <a:xfrm>
+              <a:off x="4594118" y="2459230"/>
+              <a:ext cx="2667643" cy="836555"/>
+            </a:xfrm>
+            <a:prstGeom prst="rect">
+              <a:avLst/>
+            </a:prstGeom>
+            <a:noFill/>
+            <a:ln w="28575">
+              <a:solidFill>
+                <a:schemeClr val="tx1"/>
+              </a:solidFill>
+            </a:ln>
+          </p:spPr>
+          <p:style>
+            <a:lnRef idx="2">
+              <a:schemeClr val="accent1">
+                <a:shade val="50000"/>
+              </a:schemeClr>
+            </a:lnRef>
+            <a:fillRef idx="1">
+              <a:schemeClr val="accent1"/>
+            </a:fillRef>
+            <a:effectRef idx="0">
+              <a:schemeClr val="accent1"/>
+            </a:effectRef>
+            <a:fontRef idx="minor">
+              <a:schemeClr val="lt1"/>
+            </a:fontRef>
+          </p:style>
+          <p:txBody>
+            <a:bodyPr rtlCol="0" anchor="ctr"/>
+            <a:lstStyle/>
+            <a:p>
+              <a:pPr algn="ctr"/>
+              <a:r>
+                <a:rPr lang="zh-CN" altLang="en-US" sz="1600" dirty="0">
+                  <a:solidFill>
+                    <a:schemeClr val="tx1"/>
+                  </a:solidFill>
+                  <a:latin typeface="Times New Roman" panose="02020603050405020304" pitchFamily="18" charset="0"/>
+                  <a:ea typeface="宋体" panose="02010600030101010101" pitchFamily="2" charset="-122"/>
+                  <a:cs typeface="Times New Roman" panose="02020603050405020304" pitchFamily="18" charset="0"/>
+                </a:rPr>
+                <a:t>桥接函数（</a:t>
+              </a:r>
+              <a:r>
+                <a:rPr lang="en-US" altLang="zh-CN" sz="1600" dirty="0">
+                  <a:solidFill>
+                    <a:schemeClr val="tx1"/>
+                  </a:solidFill>
+                  <a:latin typeface="Times New Roman" panose="02020603050405020304" pitchFamily="18" charset="0"/>
+                  <a:ea typeface="宋体" panose="02010600030101010101" pitchFamily="2" charset="-122"/>
+                  <a:cs typeface="Times New Roman" panose="02020603050405020304" pitchFamily="18" charset="0"/>
+                </a:rPr>
+                <a:t>trampoline</a:t>
+              </a:r>
+              <a:r>
+                <a:rPr lang="zh-CN" altLang="en-US" sz="1600" dirty="0">
+                  <a:solidFill>
+                    <a:schemeClr val="tx1"/>
+                  </a:solidFill>
+                  <a:latin typeface="Times New Roman" panose="02020603050405020304" pitchFamily="18" charset="0"/>
+                  <a:ea typeface="宋体" panose="02010600030101010101" pitchFamily="2" charset="-122"/>
+                  <a:cs typeface="Times New Roman" panose="02020603050405020304" pitchFamily="18" charset="0"/>
+                </a:rPr>
+                <a:t>）</a:t>
+              </a:r>
+              <a:endParaRPr lang="en-US" altLang="zh-CN" sz="1600" dirty="0">
+                <a:solidFill>
+                  <a:schemeClr val="tx1"/>
+                </a:solidFill>
+                <a:latin typeface="Times New Roman" panose="02020603050405020304" pitchFamily="18" charset="0"/>
+                <a:ea typeface="宋体" panose="02010600030101010101" pitchFamily="2" charset="-122"/>
+                <a:cs typeface="Times New Roman" panose="02020603050405020304" pitchFamily="18" charset="0"/>
+              </a:endParaRPr>
+            </a:p>
+            <a:p>
+              <a:pPr algn="ctr"/>
+              <a:r>
+                <a:rPr lang="en-US" altLang="zh-CN" sz="1600" dirty="0">
+                  <a:solidFill>
+                    <a:schemeClr val="tx1"/>
+                  </a:solidFill>
+                  <a:latin typeface="Times New Roman" panose="02020603050405020304" pitchFamily="18" charset="0"/>
+                  <a:ea typeface="宋体" panose="02010600030101010101" pitchFamily="2" charset="-122"/>
+                  <a:cs typeface="Times New Roman" panose="02020603050405020304" pitchFamily="18" charset="0"/>
+                </a:rPr>
+                <a:t>KlassVtableTrampolines::Add</a:t>
+              </a:r>
+              <a:endParaRPr lang="zh-CN" altLang="en-US" sz="1600" dirty="0">
+                <a:solidFill>
+                  <a:schemeClr val="tx1"/>
+                </a:solidFill>
+                <a:latin typeface="Times New Roman" panose="02020603050405020304" pitchFamily="18" charset="0"/>
+                <a:ea typeface="宋体" panose="02010600030101010101" pitchFamily="2" charset="-122"/>
+                <a:cs typeface="Times New Roman" panose="02020603050405020304" pitchFamily="18" charset="0"/>
+              </a:endParaRPr>
+            </a:p>
+          </p:txBody>
+        </p:sp>
+        <p:sp>
+          <p:nvSpPr>
+            <p:cNvPr id="26" name="矩形: 圆角 25">
+              <a:extLst>
+                <a:ext uri="{FF2B5EF4-FFF2-40B4-BE49-F238E27FC236}">
+                  <a16:creationId xmlns:a16="http://schemas.microsoft.com/office/drawing/2014/main" id="{BC1C0701-025A-4527-A37B-D6C347CB711B}"/>
+                </a:ext>
+              </a:extLst>
+            </p:cNvPr>
+            <p:cNvSpPr/>
+            <p:nvPr/>
+          </p:nvSpPr>
+          <p:spPr>
+            <a:xfrm>
+              <a:off x="10007164" y="2570444"/>
+              <a:ext cx="2087854" cy="614125"/>
+            </a:xfrm>
+            <a:prstGeom prst="roundRect">
+              <a:avLst/>
+            </a:prstGeom>
+            <a:noFill/>
+            <a:ln w="28575">
+              <a:solidFill>
+                <a:schemeClr val="tx1"/>
+              </a:solidFill>
+            </a:ln>
+          </p:spPr>
+          <p:style>
+            <a:lnRef idx="2">
+              <a:schemeClr val="accent1">
+                <a:shade val="50000"/>
+              </a:schemeClr>
+            </a:lnRef>
+            <a:fillRef idx="1">
+              <a:schemeClr val="accent1"/>
+            </a:fillRef>
+            <a:effectRef idx="0">
+              <a:schemeClr val="accent1"/>
+            </a:effectRef>
+            <a:fontRef idx="minor">
+              <a:schemeClr val="lt1"/>
+            </a:fontRef>
+          </p:style>
+          <p:txBody>
+            <a:bodyPr rtlCol="0" anchor="ctr"/>
+            <a:lstStyle/>
+            <a:p>
+              <a:pPr algn="ctr"/>
+              <a:r>
+                <a:rPr lang="zh-CN" altLang="en-US" sz="1600" dirty="0">
+                  <a:solidFill>
+                    <a:schemeClr val="tx1"/>
+                  </a:solidFill>
+                  <a:latin typeface="Times New Roman" panose="02020603050405020304" pitchFamily="18" charset="0"/>
+                  <a:ea typeface="宋体" panose="02010600030101010101" pitchFamily="2" charset="-122"/>
+                  <a:cs typeface="Times New Roman" panose="02020603050405020304" pitchFamily="18" charset="0"/>
+                </a:rPr>
+                <a:t>执行用户自定义 </a:t>
+              </a:r>
+              <a:r>
+                <a:rPr lang="en-US" altLang="zh-CN" sz="1600" dirty="0">
+                  <a:solidFill>
+                    <a:schemeClr val="tx1"/>
+                  </a:solidFill>
+                  <a:latin typeface="Times New Roman" panose="02020603050405020304" pitchFamily="18" charset="0"/>
+                  <a:ea typeface="宋体" panose="02010600030101010101" pitchFamily="2" charset="-122"/>
+                  <a:cs typeface="Times New Roman" panose="02020603050405020304" pitchFamily="18" charset="0"/>
+                </a:rPr>
+                <a:t>__add__ Python </a:t>
+              </a:r>
+              <a:r>
+                <a:rPr lang="zh-CN" altLang="en-US" sz="1600" dirty="0">
+                  <a:solidFill>
+                    <a:schemeClr val="tx1"/>
+                  </a:solidFill>
+                  <a:latin typeface="Times New Roman" panose="02020603050405020304" pitchFamily="18" charset="0"/>
+                  <a:ea typeface="宋体" panose="02010600030101010101" pitchFamily="2" charset="-122"/>
+                  <a:cs typeface="Times New Roman" panose="02020603050405020304" pitchFamily="18" charset="0"/>
+                </a:rPr>
+                <a:t>函数</a:t>
+              </a:r>
+              <a:endParaRPr lang="en-US" altLang="zh-CN" sz="1600" dirty="0">
+                <a:solidFill>
+                  <a:schemeClr val="tx1"/>
+                </a:solidFill>
+                <a:latin typeface="Times New Roman" panose="02020603050405020304" pitchFamily="18" charset="0"/>
+                <a:ea typeface="宋体" panose="02010600030101010101" pitchFamily="2" charset="-122"/>
+                <a:cs typeface="Times New Roman" panose="02020603050405020304" pitchFamily="18" charset="0"/>
+              </a:endParaRPr>
+            </a:p>
+          </p:txBody>
+        </p:sp>
+        <p:sp>
+          <p:nvSpPr>
+            <p:cNvPr id="27" name="矩形 26">
+              <a:extLst>
+                <a:ext uri="{FF2B5EF4-FFF2-40B4-BE49-F238E27FC236}">
+                  <a16:creationId xmlns:a16="http://schemas.microsoft.com/office/drawing/2014/main" id="{DA1AF740-C7C2-4057-96AB-06C5FE0048A7}"/>
+                </a:ext>
+              </a:extLst>
+            </p:cNvPr>
+            <p:cNvSpPr/>
+            <p:nvPr/>
+          </p:nvSpPr>
+          <p:spPr>
+            <a:xfrm>
+              <a:off x="7550487" y="2459230"/>
+              <a:ext cx="2167951" cy="836555"/>
+            </a:xfrm>
+            <a:prstGeom prst="rect">
+              <a:avLst/>
+            </a:prstGeom>
+            <a:noFill/>
+            <a:ln w="28575">
+              <a:solidFill>
+                <a:schemeClr val="tx1"/>
+              </a:solidFill>
+            </a:ln>
+          </p:spPr>
+          <p:style>
+            <a:lnRef idx="2">
+              <a:schemeClr val="accent1">
+                <a:shade val="50000"/>
+              </a:schemeClr>
+            </a:lnRef>
+            <a:fillRef idx="1">
+              <a:schemeClr val="accent1"/>
+            </a:fillRef>
+            <a:effectRef idx="0">
+              <a:schemeClr val="accent1"/>
+            </a:effectRef>
+            <a:fontRef idx="minor">
+              <a:schemeClr val="lt1"/>
+            </a:fontRef>
+          </p:style>
+          <p:txBody>
+            <a:bodyPr rtlCol="0" anchor="ctr"/>
+            <a:lstStyle/>
+            <a:p>
+              <a:pPr algn="ctr"/>
+              <a:r>
+                <a:rPr lang="zh-CN" altLang="en-US" sz="1600" dirty="0">
+                  <a:solidFill>
+                    <a:schemeClr val="tx1"/>
+                  </a:solidFill>
+                  <a:latin typeface="Times New Roman" panose="02020603050405020304" pitchFamily="18" charset="0"/>
+                  <a:ea typeface="宋体" panose="02010600030101010101" pitchFamily="2" charset="-122"/>
+                  <a:cs typeface="Times New Roman" panose="02020603050405020304" pitchFamily="18" charset="0"/>
+                </a:rPr>
+                <a:t>沿 </a:t>
+              </a:r>
+              <a:r>
+                <a:rPr lang="en-US" altLang="zh-CN" sz="1600" dirty="0">
+                  <a:solidFill>
+                    <a:schemeClr val="tx1"/>
+                  </a:solidFill>
+                  <a:latin typeface="Times New Roman" panose="02020603050405020304" pitchFamily="18" charset="0"/>
+                  <a:ea typeface="宋体" panose="02010600030101010101" pitchFamily="2" charset="-122"/>
+                  <a:cs typeface="Times New Roman" panose="02020603050405020304" pitchFamily="18" charset="0"/>
+                </a:rPr>
+                <a:t>MRO</a:t>
+              </a:r>
+              <a:r>
+                <a:rPr lang="zh-CN" altLang="en-US" sz="1600" dirty="0">
+                  <a:solidFill>
+                    <a:schemeClr val="tx1"/>
+                  </a:solidFill>
+                  <a:latin typeface="Times New Roman" panose="02020603050405020304" pitchFamily="18" charset="0"/>
+                  <a:ea typeface="宋体" panose="02010600030101010101" pitchFamily="2" charset="-122"/>
+                  <a:cs typeface="Times New Roman" panose="02020603050405020304" pitchFamily="18" charset="0"/>
+                </a:rPr>
+                <a:t>，查找 </a:t>
+              </a:r>
+              <a:r>
+                <a:rPr lang="en-US" altLang="zh-CN" sz="1600" dirty="0">
+                  <a:solidFill>
+                    <a:schemeClr val="tx1"/>
+                  </a:solidFill>
+                  <a:latin typeface="Times New Roman" panose="02020603050405020304" pitchFamily="18" charset="0"/>
+                  <a:ea typeface="宋体" panose="02010600030101010101" pitchFamily="2" charset="-122"/>
+                  <a:cs typeface="Times New Roman" panose="02020603050405020304" pitchFamily="18" charset="0"/>
+                </a:rPr>
+                <a:t>Python </a:t>
+              </a:r>
+              <a:r>
+                <a:rPr lang="zh-CN" altLang="en-US" sz="1600" dirty="0">
+                  <a:solidFill>
+                    <a:schemeClr val="tx1"/>
+                  </a:solidFill>
+                  <a:latin typeface="Times New Roman" panose="02020603050405020304" pitchFamily="18" charset="0"/>
+                  <a:ea typeface="宋体" panose="02010600030101010101" pitchFamily="2" charset="-122"/>
+                  <a:cs typeface="Times New Roman" panose="02020603050405020304" pitchFamily="18" charset="0"/>
+                </a:rPr>
+                <a:t>类属性</a:t>
+              </a:r>
+              <a:r>
+                <a:rPr lang="en-US" altLang="zh-CN" sz="1600">
+                  <a:solidFill>
+                    <a:schemeClr val="tx1"/>
+                  </a:solidFill>
+                  <a:latin typeface="Times New Roman" panose="02020603050405020304" pitchFamily="18" charset="0"/>
+                  <a:ea typeface="宋体" panose="02010600030101010101" pitchFamily="2" charset="-122"/>
+                  <a:cs typeface="Times New Roman" panose="02020603050405020304" pitchFamily="18" charset="0"/>
+                </a:rPr>
+                <a:t> __add__</a:t>
+              </a:r>
+              <a:endParaRPr lang="zh-CN" altLang="en-US" sz="1600" dirty="0">
+                <a:solidFill>
+                  <a:schemeClr val="tx1"/>
+                </a:solidFill>
+                <a:latin typeface="Times New Roman" panose="02020603050405020304" pitchFamily="18" charset="0"/>
+                <a:ea typeface="宋体" panose="02010600030101010101" pitchFamily="2" charset="-122"/>
+                <a:cs typeface="Times New Roman" panose="02020603050405020304" pitchFamily="18" charset="0"/>
+              </a:endParaRPr>
+            </a:p>
+          </p:txBody>
+        </p:sp>
+        <p:cxnSp>
+          <p:nvCxnSpPr>
+            <p:cNvPr id="37" name="直接箭头连接符 36">
+              <a:extLst>
+                <a:ext uri="{FF2B5EF4-FFF2-40B4-BE49-F238E27FC236}">
+                  <a16:creationId xmlns:a16="http://schemas.microsoft.com/office/drawing/2014/main" id="{0CA39188-093A-40DC-A7F3-B33EEFD32BE3}"/>
+                </a:ext>
+              </a:extLst>
+            </p:cNvPr>
+            <p:cNvCxnSpPr>
+              <a:stCxn id="25" idx="3"/>
+              <a:endCxn id="27" idx="1"/>
+            </p:cNvCxnSpPr>
+            <p:nvPr/>
+          </p:nvCxnSpPr>
+          <p:spPr>
+            <a:xfrm>
+              <a:off x="7261761" y="2877508"/>
+              <a:ext cx="288726" cy="0"/>
+            </a:xfrm>
+            <a:prstGeom prst="straightConnector1">
+              <a:avLst/>
+            </a:prstGeom>
+            <a:ln w="28575">
+              <a:solidFill>
+                <a:schemeClr val="tx1"/>
+              </a:solidFill>
+              <a:tailEnd type="triangle"/>
+            </a:ln>
+          </p:spPr>
+          <p:style>
+            <a:lnRef idx="1">
+              <a:schemeClr val="accent1"/>
+            </a:lnRef>
+            <a:fillRef idx="0">
+              <a:schemeClr val="accent1"/>
+            </a:fillRef>
+            <a:effectRef idx="0">
+              <a:schemeClr val="accent1"/>
+            </a:effectRef>
+            <a:fontRef idx="minor">
+              <a:schemeClr val="tx1"/>
+            </a:fontRef>
+          </p:style>
+        </p:cxnSp>
+        <p:cxnSp>
+          <p:nvCxnSpPr>
+            <p:cNvPr id="39" name="直接箭头连接符 38">
+              <a:extLst>
+                <a:ext uri="{FF2B5EF4-FFF2-40B4-BE49-F238E27FC236}">
+                  <a16:creationId xmlns:a16="http://schemas.microsoft.com/office/drawing/2014/main" id="{31A61D57-842E-4E1D-B28B-AF0E93AEADE2}"/>
+                </a:ext>
+              </a:extLst>
+            </p:cNvPr>
+            <p:cNvCxnSpPr>
+              <a:cxnSpLocks/>
+              <a:stCxn id="27" idx="3"/>
+              <a:endCxn id="26" idx="1"/>
+            </p:cNvCxnSpPr>
+            <p:nvPr/>
+          </p:nvCxnSpPr>
+          <p:spPr>
+            <a:xfrm flipV="1">
+              <a:off x="9718438" y="2877507"/>
+              <a:ext cx="288726" cy="1"/>
+            </a:xfrm>
+            <a:prstGeom prst="straightConnector1">
+              <a:avLst/>
+            </a:prstGeom>
+            <a:ln w="28575">
+              <a:solidFill>
+                <a:schemeClr val="tx1"/>
+              </a:solidFill>
+              <a:tailEnd type="triangle"/>
+            </a:ln>
+          </p:spPr>
+          <p:style>
+            <a:lnRef idx="1">
+              <a:schemeClr val="accent1"/>
+            </a:lnRef>
+            <a:fillRef idx="0">
+              <a:schemeClr val="accent1"/>
+            </a:fillRef>
+            <a:effectRef idx="0">
+              <a:schemeClr val="accent1"/>
+            </a:effectRef>
+            <a:fontRef idx="minor">
+              <a:schemeClr val="tx1"/>
+            </a:fontRef>
+          </p:style>
+        </p:cxnSp>
+        <p:sp>
+          <p:nvSpPr>
+            <p:cNvPr id="53" name="文本框 52">
+              <a:extLst>
+                <a:ext uri="{FF2B5EF4-FFF2-40B4-BE49-F238E27FC236}">
+                  <a16:creationId xmlns:a16="http://schemas.microsoft.com/office/drawing/2014/main" id="{991BEB71-3526-410B-9A2A-EA2F7E512CBB}"/>
+                </a:ext>
+              </a:extLst>
+            </p:cNvPr>
+            <p:cNvSpPr txBox="1"/>
+            <p:nvPr/>
+          </p:nvSpPr>
+          <p:spPr>
+            <a:xfrm>
+              <a:off x="6096000" y="3369546"/>
+              <a:ext cx="4416594" cy="369332"/>
+            </a:xfrm>
+            <a:prstGeom prst="rect">
+              <a:avLst/>
+            </a:prstGeom>
+            <a:noFill/>
+          </p:spPr>
+          <p:txBody>
+            <a:bodyPr wrap="none" rtlCol="0">
+              <a:spAutoFit/>
+            </a:bodyPr>
+            <a:lstStyle/>
+            <a:p>
+              <a:r>
+                <a:rPr lang="zh-CN" altLang="en-US" dirty="0">
+                  <a:latin typeface="Times New Roman" panose="02020603050405020304" pitchFamily="18" charset="0"/>
+                  <a:ea typeface="宋体" panose="02010600030101010101" pitchFamily="2" charset="-122"/>
+                  <a:cs typeface="Times New Roman" panose="02020603050405020304" pitchFamily="18" charset="0"/>
+                </a:rPr>
+                <a:t>场景二：用户在 </a:t>
+              </a:r>
+              <a:r>
+                <a:rPr lang="en-US" altLang="zh-CN" dirty="0">
+                  <a:latin typeface="Times New Roman" panose="02020603050405020304" pitchFamily="18" charset="0"/>
+                  <a:ea typeface="宋体" panose="02010600030101010101" pitchFamily="2" charset="-122"/>
+                  <a:cs typeface="Times New Roman" panose="02020603050405020304" pitchFamily="18" charset="0"/>
+                </a:rPr>
+                <a:t>Python </a:t>
+              </a:r>
+              <a:r>
+                <a:rPr lang="zh-CN" altLang="en-US" dirty="0">
+                  <a:latin typeface="Times New Roman" panose="02020603050405020304" pitchFamily="18" charset="0"/>
+                  <a:ea typeface="宋体" panose="02010600030101010101" pitchFamily="2" charset="-122"/>
+                  <a:cs typeface="Times New Roman" panose="02020603050405020304" pitchFamily="18" charset="0"/>
+                </a:rPr>
+                <a:t>层面覆写魔法方法</a:t>
+              </a:r>
+            </a:p>
+          </p:txBody>
+        </p:sp>
+      </p:grpSp>
+    </p:spTree>
+    <p:extLst>
+      <p:ext uri="{BB962C8B-B14F-4D97-AF65-F5344CB8AC3E}">
+        <p14:creationId xmlns:p14="http://schemas.microsoft.com/office/powerpoint/2010/main" val="2213449232"/>
       </p:ext>
     </p:extLst>
   </p:cSld>

--- a/docs/thesis/pictures.pptx
+++ b/docs/thesis/pictures.pptx
@@ -5,7 +5,7 @@
     <p:sldMasterId id="2147483648" r:id="rId1"/>
   </p:sldMasterIdLst>
   <p:notesMasterIdLst>
-    <p:notesMasterId r:id="rId12"/>
+    <p:notesMasterId r:id="rId13"/>
   </p:notesMasterIdLst>
   <p:sldIdLst>
     <p:sldId id="259" r:id="rId2"/>
@@ -18,6 +18,7 @@
     <p:sldId id="266" r:id="rId9"/>
     <p:sldId id="267" r:id="rId10"/>
     <p:sldId id="268" r:id="rId11"/>
+    <p:sldId id="269" r:id="rId12"/>
   </p:sldIdLst>
   <p:sldSz cx="12192000" cy="6858000"/>
   <p:notesSz cx="6858000" cy="9144000"/>
@@ -8404,6 +8405,2240 @@
     <p:extLst>
       <p:ext uri="{BB962C8B-B14F-4D97-AF65-F5344CB8AC3E}">
         <p14:creationId xmlns:p14="http://schemas.microsoft.com/office/powerpoint/2010/main" val="2213449232"/>
+      </p:ext>
+    </p:extLst>
+  </p:cSld>
+  <p:clrMapOvr>
+    <a:masterClrMapping/>
+  </p:clrMapOvr>
+</p:sld>
+</file>
+
+<file path=ppt/slides/slide11.xml><?xml version="1.0" encoding="utf-8"?>
+<p:sld xmlns:a="http://schemas.openxmlformats.org/drawingml/2006/main" xmlns:r="http://schemas.openxmlformats.org/officeDocument/2006/relationships" xmlns:p="http://schemas.openxmlformats.org/presentationml/2006/main">
+  <p:cSld>
+    <p:spTree>
+      <p:nvGrpSpPr>
+        <p:cNvPr id="1" name=""/>
+        <p:cNvGrpSpPr/>
+        <p:nvPr/>
+      </p:nvGrpSpPr>
+      <p:grpSpPr>
+        <a:xfrm>
+          <a:off x="0" y="0"/>
+          <a:ext cx="0" cy="0"/>
+          <a:chOff x="0" y="0"/>
+          <a:chExt cx="0" cy="0"/>
+        </a:xfrm>
+      </p:grpSpPr>
+      <p:grpSp>
+        <p:nvGrpSpPr>
+          <p:cNvPr id="47" name="组合 46">
+            <a:extLst>
+              <a:ext uri="{FF2B5EF4-FFF2-40B4-BE49-F238E27FC236}">
+                <a16:creationId xmlns:a16="http://schemas.microsoft.com/office/drawing/2014/main" id="{6652228C-E1B5-4F84-87B2-52593BCE8154}"/>
+              </a:ext>
+            </a:extLst>
+          </p:cNvPr>
+          <p:cNvGrpSpPr/>
+          <p:nvPr/>
+        </p:nvGrpSpPr>
+        <p:grpSpPr>
+          <a:xfrm>
+            <a:off x="1134094" y="795646"/>
+            <a:ext cx="10842172" cy="1123745"/>
+            <a:chOff x="855023" y="261257"/>
+            <a:chExt cx="10842172" cy="1123745"/>
+          </a:xfrm>
+        </p:grpSpPr>
+        <p:sp>
+          <p:nvSpPr>
+            <p:cNvPr id="45" name="矩形 44">
+              <a:extLst>
+                <a:ext uri="{FF2B5EF4-FFF2-40B4-BE49-F238E27FC236}">
+                  <a16:creationId xmlns:a16="http://schemas.microsoft.com/office/drawing/2014/main" id="{FD60A33D-9B6A-4777-8033-4C6F16EDCE1F}"/>
+                </a:ext>
+              </a:extLst>
+            </p:cNvPr>
+            <p:cNvSpPr/>
+            <p:nvPr/>
+          </p:nvSpPr>
+          <p:spPr>
+            <a:xfrm>
+              <a:off x="855023" y="261257"/>
+              <a:ext cx="10842172" cy="1123745"/>
+            </a:xfrm>
+            <a:prstGeom prst="rect">
+              <a:avLst/>
+            </a:prstGeom>
+            <a:noFill/>
+            <a:ln w="19050">
+              <a:solidFill>
+                <a:schemeClr val="tx1"/>
+              </a:solidFill>
+            </a:ln>
+          </p:spPr>
+          <p:style>
+            <a:lnRef idx="2">
+              <a:schemeClr val="accent1">
+                <a:shade val="50000"/>
+              </a:schemeClr>
+            </a:lnRef>
+            <a:fillRef idx="1">
+              <a:schemeClr val="accent1"/>
+            </a:fillRef>
+            <a:effectRef idx="0">
+              <a:schemeClr val="accent1"/>
+            </a:effectRef>
+            <a:fontRef idx="minor">
+              <a:schemeClr val="lt1"/>
+            </a:fontRef>
+          </p:style>
+          <p:txBody>
+            <a:bodyPr rtlCol="0" anchor="ctr"/>
+            <a:lstStyle/>
+            <a:p>
+              <a:pPr algn="ctr"/>
+              <a:endParaRPr lang="zh-CN" altLang="en-US"/>
+            </a:p>
+          </p:txBody>
+        </p:sp>
+        <p:grpSp>
+          <p:nvGrpSpPr>
+            <p:cNvPr id="39" name="组合 38">
+              <a:extLst>
+                <a:ext uri="{FF2B5EF4-FFF2-40B4-BE49-F238E27FC236}">
+                  <a16:creationId xmlns:a16="http://schemas.microsoft.com/office/drawing/2014/main" id="{826519A9-5760-42D6-AF4C-6123ACC97BA2}"/>
+                </a:ext>
+              </a:extLst>
+            </p:cNvPr>
+            <p:cNvGrpSpPr/>
+            <p:nvPr/>
+          </p:nvGrpSpPr>
+          <p:grpSpPr>
+            <a:xfrm>
+              <a:off x="1000990" y="575953"/>
+              <a:ext cx="7412675" cy="590305"/>
+              <a:chOff x="1000990" y="575953"/>
+              <a:chExt cx="7412675" cy="590305"/>
+            </a:xfrm>
+          </p:grpSpPr>
+          <p:sp>
+            <p:nvSpPr>
+              <p:cNvPr id="5" name="矩形 4">
+                <a:extLst>
+                  <a:ext uri="{FF2B5EF4-FFF2-40B4-BE49-F238E27FC236}">
+                    <a16:creationId xmlns:a16="http://schemas.microsoft.com/office/drawing/2014/main" id="{451F2C6F-E5DF-4235-BC3F-44DCC96DAE2C}"/>
+                  </a:ext>
+                </a:extLst>
+              </p:cNvPr>
+              <p:cNvSpPr/>
+              <p:nvPr/>
+            </p:nvSpPr>
+            <p:spPr>
+              <a:xfrm>
+                <a:off x="1000990" y="575955"/>
+                <a:ext cx="2140033" cy="590303"/>
+              </a:xfrm>
+              <a:prstGeom prst="rect">
+                <a:avLst/>
+              </a:prstGeom>
+              <a:noFill/>
+              <a:ln w="28575">
+                <a:solidFill>
+                  <a:schemeClr val="tx1"/>
+                </a:solidFill>
+              </a:ln>
+            </p:spPr>
+            <p:style>
+              <a:lnRef idx="2">
+                <a:schemeClr val="accent1">
+                  <a:shade val="50000"/>
+                </a:schemeClr>
+              </a:lnRef>
+              <a:fillRef idx="1">
+                <a:schemeClr val="accent1"/>
+              </a:fillRef>
+              <a:effectRef idx="0">
+                <a:schemeClr val="accent1"/>
+              </a:effectRef>
+              <a:fontRef idx="minor">
+                <a:schemeClr val="lt1"/>
+              </a:fontRef>
+            </p:style>
+            <p:txBody>
+              <a:bodyPr rtlCol="0" anchor="ctr"/>
+              <a:lstStyle/>
+              <a:p>
+                <a:pPr algn="ctr"/>
+                <a:r>
+                  <a:rPr lang="zh-CN" altLang="en-US" sz="1600" dirty="0">
+                    <a:solidFill>
+                      <a:schemeClr val="tx1"/>
+                    </a:solidFill>
+                    <a:latin typeface="Times New Roman" panose="02020603050405020304" pitchFamily="18" charset="0"/>
+                    <a:ea typeface="宋体" panose="02010600030101010101" pitchFamily="2" charset="-122"/>
+                    <a:cs typeface="Times New Roman" panose="02020603050405020304" pitchFamily="18" charset="0"/>
+                  </a:rPr>
+                  <a:t>创建 </a:t>
+                </a:r>
+                <a:r>
+                  <a:rPr lang="en-US" altLang="zh-CN" sz="1600" dirty="0">
+                    <a:solidFill>
+                      <a:schemeClr val="tx1"/>
+                    </a:solidFill>
+                    <a:latin typeface="Times New Roman" panose="02020603050405020304" pitchFamily="18" charset="0"/>
+                    <a:ea typeface="宋体" panose="02010600030101010101" pitchFamily="2" charset="-122"/>
+                    <a:cs typeface="Times New Roman" panose="02020603050405020304" pitchFamily="18" charset="0"/>
+                  </a:rPr>
+                  <a:t>Python </a:t>
+                </a:r>
+                <a:r>
+                  <a:rPr lang="zh-CN" altLang="en-US" sz="1600" dirty="0">
+                    <a:solidFill>
+                      <a:schemeClr val="tx1"/>
+                    </a:solidFill>
+                    <a:latin typeface="Times New Roman" panose="02020603050405020304" pitchFamily="18" charset="0"/>
+                    <a:ea typeface="宋体" panose="02010600030101010101" pitchFamily="2" charset="-122"/>
+                    <a:cs typeface="Times New Roman" panose="02020603050405020304" pitchFamily="18" charset="0"/>
+                  </a:rPr>
+                  <a:t>类型对象</a:t>
+                </a:r>
+              </a:p>
+            </p:txBody>
+          </p:sp>
+          <p:sp>
+            <p:nvSpPr>
+              <p:cNvPr id="6" name="矩形 5">
+                <a:extLst>
+                  <a:ext uri="{FF2B5EF4-FFF2-40B4-BE49-F238E27FC236}">
+                    <a16:creationId xmlns:a16="http://schemas.microsoft.com/office/drawing/2014/main" id="{B8A14FFB-340A-4755-A218-1075EDB2CCDA}"/>
+                  </a:ext>
+                </a:extLst>
+              </p:cNvPr>
+              <p:cNvSpPr/>
+              <p:nvPr/>
+            </p:nvSpPr>
+            <p:spPr>
+              <a:xfrm>
+                <a:off x="3637311" y="575954"/>
+                <a:ext cx="2140033" cy="590303"/>
+              </a:xfrm>
+              <a:prstGeom prst="rect">
+                <a:avLst/>
+              </a:prstGeom>
+              <a:noFill/>
+              <a:ln w="28575">
+                <a:solidFill>
+                  <a:schemeClr val="tx1"/>
+                </a:solidFill>
+              </a:ln>
+            </p:spPr>
+            <p:style>
+              <a:lnRef idx="2">
+                <a:schemeClr val="accent1">
+                  <a:shade val="50000"/>
+                </a:schemeClr>
+              </a:lnRef>
+              <a:fillRef idx="1">
+                <a:schemeClr val="accent1"/>
+              </a:fillRef>
+              <a:effectRef idx="0">
+                <a:schemeClr val="accent1"/>
+              </a:effectRef>
+              <a:fontRef idx="minor">
+                <a:schemeClr val="lt1"/>
+              </a:fontRef>
+            </p:style>
+            <p:txBody>
+              <a:bodyPr rtlCol="0" anchor="ctr"/>
+              <a:lstStyle/>
+              <a:p>
+                <a:pPr algn="ctr"/>
+                <a:r>
+                  <a:rPr lang="zh-CN" altLang="en-US" sz="1600" dirty="0">
+                    <a:solidFill>
+                      <a:schemeClr val="tx1"/>
+                    </a:solidFill>
+                    <a:latin typeface="Times New Roman" panose="02020603050405020304" pitchFamily="18" charset="0"/>
+                    <a:ea typeface="宋体" panose="02010600030101010101" pitchFamily="2" charset="-122"/>
+                    <a:cs typeface="Times New Roman" panose="02020603050405020304" pitchFamily="18" charset="0"/>
+                  </a:rPr>
+                  <a:t>创建 </a:t>
+                </a:r>
+                <a:r>
+                  <a:rPr lang="en-US" altLang="zh-CN" sz="1600" dirty="0">
+                    <a:solidFill>
+                      <a:schemeClr val="tx1"/>
+                    </a:solidFill>
+                    <a:latin typeface="Times New Roman" panose="02020603050405020304" pitchFamily="18" charset="0"/>
+                    <a:ea typeface="宋体" panose="02010600030101010101" pitchFamily="2" charset="-122"/>
+                    <a:cs typeface="Times New Roman" panose="02020603050405020304" pitchFamily="18" charset="0"/>
+                  </a:rPr>
+                  <a:t>Klass </a:t>
+                </a:r>
+                <a:r>
+                  <a:rPr lang="zh-CN" altLang="en-US" sz="1600" dirty="0">
+                    <a:solidFill>
+                      <a:schemeClr val="tx1"/>
+                    </a:solidFill>
+                    <a:latin typeface="Times New Roman" panose="02020603050405020304" pitchFamily="18" charset="0"/>
+                    <a:ea typeface="宋体" panose="02010600030101010101" pitchFamily="2" charset="-122"/>
+                    <a:cs typeface="Times New Roman" panose="02020603050405020304" pitchFamily="18" charset="0"/>
+                  </a:rPr>
+                  <a:t>实体</a:t>
+                </a:r>
+              </a:p>
+            </p:txBody>
+          </p:sp>
+          <p:sp>
+            <p:nvSpPr>
+              <p:cNvPr id="7" name="矩形 6">
+                <a:extLst>
+                  <a:ext uri="{FF2B5EF4-FFF2-40B4-BE49-F238E27FC236}">
+                    <a16:creationId xmlns:a16="http://schemas.microsoft.com/office/drawing/2014/main" id="{54195B23-7C26-4A6C-AFDA-993B6F68568C}"/>
+                  </a:ext>
+                </a:extLst>
+              </p:cNvPr>
+              <p:cNvSpPr/>
+              <p:nvPr/>
+            </p:nvSpPr>
+            <p:spPr>
+              <a:xfrm>
+                <a:off x="6273632" y="575953"/>
+                <a:ext cx="2140033" cy="590303"/>
+              </a:xfrm>
+              <a:prstGeom prst="rect">
+                <a:avLst/>
+              </a:prstGeom>
+              <a:noFill/>
+              <a:ln w="28575">
+                <a:solidFill>
+                  <a:schemeClr val="tx1"/>
+                </a:solidFill>
+              </a:ln>
+            </p:spPr>
+            <p:style>
+              <a:lnRef idx="2">
+                <a:schemeClr val="accent1">
+                  <a:shade val="50000"/>
+                </a:schemeClr>
+              </a:lnRef>
+              <a:fillRef idx="1">
+                <a:schemeClr val="accent1"/>
+              </a:fillRef>
+              <a:effectRef idx="0">
+                <a:schemeClr val="accent1"/>
+              </a:effectRef>
+              <a:fontRef idx="minor">
+                <a:schemeClr val="lt1"/>
+              </a:fontRef>
+            </p:style>
+            <p:txBody>
+              <a:bodyPr rtlCol="0" anchor="ctr"/>
+              <a:lstStyle/>
+              <a:p>
+                <a:pPr algn="ctr"/>
+                <a:r>
+                  <a:rPr lang="zh-CN" altLang="en-US" sz="1600" dirty="0">
+                    <a:solidFill>
+                      <a:schemeClr val="tx1"/>
+                    </a:solidFill>
+                    <a:latin typeface="Times New Roman" panose="02020603050405020304" pitchFamily="18" charset="0"/>
+                    <a:ea typeface="宋体" panose="02010600030101010101" pitchFamily="2" charset="-122"/>
+                    <a:cs typeface="Times New Roman" panose="02020603050405020304" pitchFamily="18" charset="0"/>
+                  </a:rPr>
+                  <a:t>建立两者的双向绑定</a:t>
+                </a:r>
+              </a:p>
+            </p:txBody>
+          </p:sp>
+          <p:cxnSp>
+            <p:nvCxnSpPr>
+              <p:cNvPr id="17" name="直接箭头连接符 16">
+                <a:extLst>
+                  <a:ext uri="{FF2B5EF4-FFF2-40B4-BE49-F238E27FC236}">
+                    <a16:creationId xmlns:a16="http://schemas.microsoft.com/office/drawing/2014/main" id="{72A2530D-FC16-4288-B346-4B69FE5B1045}"/>
+                  </a:ext>
+                </a:extLst>
+              </p:cNvPr>
+              <p:cNvCxnSpPr>
+                <a:stCxn id="5" idx="3"/>
+                <a:endCxn id="6" idx="1"/>
+              </p:cNvCxnSpPr>
+              <p:nvPr/>
+            </p:nvCxnSpPr>
+            <p:spPr>
+              <a:xfrm flipV="1">
+                <a:off x="3141023" y="871106"/>
+                <a:ext cx="496288" cy="1"/>
+              </a:xfrm>
+              <a:prstGeom prst="straightConnector1">
+                <a:avLst/>
+              </a:prstGeom>
+              <a:ln w="28575">
+                <a:solidFill>
+                  <a:schemeClr val="tx1"/>
+                </a:solidFill>
+                <a:tailEnd type="triangle"/>
+              </a:ln>
+            </p:spPr>
+            <p:style>
+              <a:lnRef idx="1">
+                <a:schemeClr val="accent1"/>
+              </a:lnRef>
+              <a:fillRef idx="0">
+                <a:schemeClr val="accent1"/>
+              </a:fillRef>
+              <a:effectRef idx="0">
+                <a:schemeClr val="accent1"/>
+              </a:effectRef>
+              <a:fontRef idx="minor">
+                <a:schemeClr val="tx1"/>
+              </a:fontRef>
+            </p:style>
+          </p:cxnSp>
+          <p:cxnSp>
+            <p:nvCxnSpPr>
+              <p:cNvPr id="19" name="直接箭头连接符 18">
+                <a:extLst>
+                  <a:ext uri="{FF2B5EF4-FFF2-40B4-BE49-F238E27FC236}">
+                    <a16:creationId xmlns:a16="http://schemas.microsoft.com/office/drawing/2014/main" id="{341A7015-A0E1-4106-BA45-7055822E3751}"/>
+                  </a:ext>
+                </a:extLst>
+              </p:cNvPr>
+              <p:cNvCxnSpPr>
+                <a:stCxn id="6" idx="3"/>
+                <a:endCxn id="7" idx="1"/>
+              </p:cNvCxnSpPr>
+              <p:nvPr/>
+            </p:nvCxnSpPr>
+            <p:spPr>
+              <a:xfrm flipV="1">
+                <a:off x="5777344" y="871105"/>
+                <a:ext cx="496288" cy="1"/>
+              </a:xfrm>
+              <a:prstGeom prst="straightConnector1">
+                <a:avLst/>
+              </a:prstGeom>
+              <a:ln w="28575">
+                <a:solidFill>
+                  <a:schemeClr val="tx1"/>
+                </a:solidFill>
+                <a:tailEnd type="triangle"/>
+              </a:ln>
+            </p:spPr>
+            <p:style>
+              <a:lnRef idx="1">
+                <a:schemeClr val="accent1"/>
+              </a:lnRef>
+              <a:fillRef idx="0">
+                <a:schemeClr val="accent1"/>
+              </a:fillRef>
+              <a:effectRef idx="0">
+                <a:schemeClr val="accent1"/>
+              </a:effectRef>
+              <a:fontRef idx="minor">
+                <a:schemeClr val="tx1"/>
+              </a:fontRef>
+            </p:style>
+          </p:cxnSp>
+        </p:grpSp>
+      </p:grpSp>
+      <p:grpSp>
+        <p:nvGrpSpPr>
+          <p:cNvPr id="51" name="组合 50">
+            <a:extLst>
+              <a:ext uri="{FF2B5EF4-FFF2-40B4-BE49-F238E27FC236}">
+                <a16:creationId xmlns:a16="http://schemas.microsoft.com/office/drawing/2014/main" id="{06524DF4-A314-468B-B3DC-E9EA959F6CC2}"/>
+              </a:ext>
+            </a:extLst>
+          </p:cNvPr>
+          <p:cNvGrpSpPr/>
+          <p:nvPr/>
+        </p:nvGrpSpPr>
+        <p:grpSpPr>
+          <a:xfrm>
+            <a:off x="1131617" y="2334752"/>
+            <a:ext cx="10842172" cy="1947280"/>
+            <a:chOff x="852546" y="1481718"/>
+            <a:chExt cx="10842172" cy="1947280"/>
+          </a:xfrm>
+        </p:grpSpPr>
+        <p:grpSp>
+          <p:nvGrpSpPr>
+            <p:cNvPr id="38" name="组合 37">
+              <a:extLst>
+                <a:ext uri="{FF2B5EF4-FFF2-40B4-BE49-F238E27FC236}">
+                  <a16:creationId xmlns:a16="http://schemas.microsoft.com/office/drawing/2014/main" id="{939A7BE1-95D3-4DA5-B8C5-B0122A60C0DA}"/>
+                </a:ext>
+              </a:extLst>
+            </p:cNvPr>
+            <p:cNvGrpSpPr/>
+            <p:nvPr/>
+          </p:nvGrpSpPr>
+          <p:grpSpPr>
+            <a:xfrm>
+              <a:off x="1000990" y="1584826"/>
+              <a:ext cx="10506441" cy="1741064"/>
+              <a:chOff x="998019" y="1548093"/>
+              <a:chExt cx="10506441" cy="1741064"/>
+            </a:xfrm>
+          </p:grpSpPr>
+          <p:sp>
+            <p:nvSpPr>
+              <p:cNvPr id="8" name="矩形 7">
+                <a:extLst>
+                  <a:ext uri="{FF2B5EF4-FFF2-40B4-BE49-F238E27FC236}">
+                    <a16:creationId xmlns:a16="http://schemas.microsoft.com/office/drawing/2014/main" id="{D02AD37C-80DA-4978-817D-089908DA2366}"/>
+                  </a:ext>
+                </a:extLst>
+              </p:cNvPr>
+              <p:cNvSpPr/>
+              <p:nvPr/>
+            </p:nvSpPr>
+            <p:spPr>
+              <a:xfrm>
+                <a:off x="998019" y="2078061"/>
+                <a:ext cx="2264725" cy="590303"/>
+              </a:xfrm>
+              <a:prstGeom prst="rect">
+                <a:avLst/>
+              </a:prstGeom>
+              <a:noFill/>
+              <a:ln w="28575">
+                <a:solidFill>
+                  <a:schemeClr val="tx1"/>
+                </a:solidFill>
+              </a:ln>
+            </p:spPr>
+            <p:style>
+              <a:lnRef idx="2">
+                <a:schemeClr val="accent1">
+                  <a:shade val="50000"/>
+                </a:schemeClr>
+              </a:lnRef>
+              <a:fillRef idx="1">
+                <a:schemeClr val="accent1"/>
+              </a:fillRef>
+              <a:effectRef idx="0">
+                <a:schemeClr val="accent1"/>
+              </a:effectRef>
+              <a:fontRef idx="minor">
+                <a:schemeClr val="lt1"/>
+              </a:fontRef>
+            </p:style>
+            <p:txBody>
+              <a:bodyPr rtlCol="0" anchor="ctr"/>
+              <a:lstStyle/>
+              <a:p>
+                <a:pPr algn="ctr"/>
+                <a:r>
+                  <a:rPr lang="zh-CN" altLang="en-US" sz="1600" dirty="0">
+                    <a:solidFill>
+                      <a:schemeClr val="tx1"/>
+                    </a:solidFill>
+                    <a:latin typeface="Times New Roman" panose="02020603050405020304" pitchFamily="18" charset="0"/>
+                    <a:ea typeface="宋体" panose="02010600030101010101" pitchFamily="2" charset="-122"/>
+                    <a:cs typeface="Times New Roman" panose="02020603050405020304" pitchFamily="18" charset="0"/>
+                  </a:rPr>
+                  <a:t>填写类名等 </a:t>
+                </a:r>
+                <a:r>
+                  <a:rPr lang="en-US" altLang="zh-CN" sz="1600" dirty="0">
+                    <a:solidFill>
+                      <a:schemeClr val="tx1"/>
+                    </a:solidFill>
+                    <a:latin typeface="Times New Roman" panose="02020603050405020304" pitchFamily="18" charset="0"/>
+                    <a:ea typeface="宋体" panose="02010600030101010101" pitchFamily="2" charset="-122"/>
+                    <a:cs typeface="Times New Roman" panose="02020603050405020304" pitchFamily="18" charset="0"/>
+                  </a:rPr>
+                  <a:t>Klass </a:t>
+                </a:r>
+                <a:r>
+                  <a:rPr lang="zh-CN" altLang="en-US" sz="1600" dirty="0">
+                    <a:solidFill>
+                      <a:schemeClr val="tx1"/>
+                    </a:solidFill>
+                    <a:latin typeface="Times New Roman" panose="02020603050405020304" pitchFamily="18" charset="0"/>
+                    <a:ea typeface="宋体" panose="02010600030101010101" pitchFamily="2" charset="-122"/>
+                    <a:cs typeface="Times New Roman" panose="02020603050405020304" pitchFamily="18" charset="0"/>
+                  </a:rPr>
+                  <a:t>内部基础元信息</a:t>
+                </a:r>
+              </a:p>
+            </p:txBody>
+          </p:sp>
+          <p:sp>
+            <p:nvSpPr>
+              <p:cNvPr id="9" name="矩形 8">
+                <a:extLst>
+                  <a:ext uri="{FF2B5EF4-FFF2-40B4-BE49-F238E27FC236}">
+                    <a16:creationId xmlns:a16="http://schemas.microsoft.com/office/drawing/2014/main" id="{41B37CC6-5FF7-473D-A6CB-5C18CD8E7B24}"/>
+                  </a:ext>
+                </a:extLst>
+              </p:cNvPr>
+              <p:cNvSpPr/>
+              <p:nvPr/>
+            </p:nvSpPr>
+            <p:spPr>
+              <a:xfrm>
+                <a:off x="3637311" y="2072002"/>
+                <a:ext cx="2312227" cy="590303"/>
+              </a:xfrm>
+              <a:prstGeom prst="rect">
+                <a:avLst/>
+              </a:prstGeom>
+              <a:noFill/>
+              <a:ln w="28575">
+                <a:solidFill>
+                  <a:schemeClr val="tx1"/>
+                </a:solidFill>
+              </a:ln>
+            </p:spPr>
+            <p:style>
+              <a:lnRef idx="2">
+                <a:schemeClr val="accent1">
+                  <a:shade val="50000"/>
+                </a:schemeClr>
+              </a:lnRef>
+              <a:fillRef idx="1">
+                <a:schemeClr val="accent1"/>
+              </a:fillRef>
+              <a:effectRef idx="0">
+                <a:schemeClr val="accent1"/>
+              </a:effectRef>
+              <a:fontRef idx="minor">
+                <a:schemeClr val="lt1"/>
+              </a:fontRef>
+            </p:style>
+            <p:txBody>
+              <a:bodyPr rtlCol="0" anchor="ctr"/>
+              <a:lstStyle/>
+              <a:p>
+                <a:pPr algn="ctr"/>
+                <a:r>
+                  <a:rPr lang="zh-CN" altLang="en-US" sz="1600" dirty="0">
+                    <a:solidFill>
+                      <a:schemeClr val="tx1"/>
+                    </a:solidFill>
+                    <a:latin typeface="Times New Roman" panose="02020603050405020304" pitchFamily="18" charset="0"/>
+                    <a:ea typeface="宋体" panose="02010600030101010101" pitchFamily="2" charset="-122"/>
+                    <a:cs typeface="Times New Roman" panose="02020603050405020304" pitchFamily="18" charset="0"/>
+                  </a:rPr>
+                  <a:t>创建并挂载类属性字典</a:t>
+                </a:r>
+                <a:endParaRPr lang="en-US" altLang="zh-CN" sz="1600" dirty="0">
+                  <a:solidFill>
+                    <a:schemeClr val="tx1"/>
+                  </a:solidFill>
+                  <a:latin typeface="Times New Roman" panose="02020603050405020304" pitchFamily="18" charset="0"/>
+                  <a:ea typeface="宋体" panose="02010600030101010101" pitchFamily="2" charset="-122"/>
+                  <a:cs typeface="Times New Roman" panose="02020603050405020304" pitchFamily="18" charset="0"/>
+                </a:endParaRPr>
+              </a:p>
+              <a:p>
+                <a:pPr algn="ctr"/>
+                <a:r>
+                  <a:rPr lang="zh-CN" altLang="en-US" sz="1600" dirty="0">
+                    <a:solidFill>
+                      <a:schemeClr val="tx1"/>
+                    </a:solidFill>
+                    <a:latin typeface="Times New Roman" panose="02020603050405020304" pitchFamily="18" charset="0"/>
+                    <a:ea typeface="宋体" panose="02010600030101010101" pitchFamily="2" charset="-122"/>
+                    <a:cs typeface="Times New Roman" panose="02020603050405020304" pitchFamily="18" charset="0"/>
+                  </a:rPr>
+                  <a:t>到 </a:t>
+                </a:r>
+                <a:r>
+                  <a:rPr lang="en-US" altLang="zh-CN" sz="1600" dirty="0">
+                    <a:solidFill>
+                      <a:schemeClr val="tx1"/>
+                    </a:solidFill>
+                    <a:latin typeface="Times New Roman" panose="02020603050405020304" pitchFamily="18" charset="0"/>
+                    <a:ea typeface="宋体" panose="02010600030101010101" pitchFamily="2" charset="-122"/>
+                    <a:cs typeface="Times New Roman" panose="02020603050405020304" pitchFamily="18" charset="0"/>
+                  </a:rPr>
+                  <a:t>Klass </a:t>
+                </a:r>
+                <a:r>
+                  <a:rPr lang="zh-CN" altLang="en-US" sz="1600" dirty="0">
+                    <a:solidFill>
+                      <a:schemeClr val="tx1"/>
+                    </a:solidFill>
+                    <a:latin typeface="Times New Roman" panose="02020603050405020304" pitchFamily="18" charset="0"/>
+                    <a:ea typeface="宋体" panose="02010600030101010101" pitchFamily="2" charset="-122"/>
+                    <a:cs typeface="Times New Roman" panose="02020603050405020304" pitchFamily="18" charset="0"/>
+                  </a:rPr>
+                  <a:t>实体</a:t>
+                </a:r>
+              </a:p>
+            </p:txBody>
+          </p:sp>
+          <p:sp>
+            <p:nvSpPr>
+              <p:cNvPr id="10" name="流程图: 决策 9">
+                <a:extLst>
+                  <a:ext uri="{FF2B5EF4-FFF2-40B4-BE49-F238E27FC236}">
+                    <a16:creationId xmlns:a16="http://schemas.microsoft.com/office/drawing/2014/main" id="{EED8D461-948D-4C6C-A144-7566C78653F8}"/>
+                  </a:ext>
+                </a:extLst>
+              </p:cNvPr>
+              <p:cNvSpPr/>
+              <p:nvPr/>
+            </p:nvSpPr>
+            <p:spPr>
+              <a:xfrm>
+                <a:off x="6324105" y="1712154"/>
+                <a:ext cx="2033158" cy="1309998"/>
+              </a:xfrm>
+              <a:prstGeom prst="flowChartDecision">
+                <a:avLst/>
+              </a:prstGeom>
+              <a:noFill/>
+              <a:ln w="28575">
+                <a:solidFill>
+                  <a:schemeClr val="tx1"/>
+                </a:solidFill>
+              </a:ln>
+            </p:spPr>
+            <p:style>
+              <a:lnRef idx="2">
+                <a:schemeClr val="accent1">
+                  <a:shade val="50000"/>
+                </a:schemeClr>
+              </a:lnRef>
+              <a:fillRef idx="1">
+                <a:schemeClr val="accent1"/>
+              </a:fillRef>
+              <a:effectRef idx="0">
+                <a:schemeClr val="accent1"/>
+              </a:effectRef>
+              <a:fontRef idx="minor">
+                <a:schemeClr val="lt1"/>
+              </a:fontRef>
+            </p:style>
+            <p:txBody>
+              <a:bodyPr rtlCol="0" anchor="ctr"/>
+              <a:lstStyle/>
+              <a:p>
+                <a:pPr algn="ctr"/>
+                <a:r>
+                  <a:rPr lang="zh-CN" altLang="en-US" sz="1600" dirty="0">
+                    <a:solidFill>
+                      <a:schemeClr val="tx1"/>
+                    </a:solidFill>
+                    <a:latin typeface="宋体" panose="02010600030101010101" pitchFamily="2" charset="-122"/>
+                    <a:ea typeface="宋体" panose="02010600030101010101" pitchFamily="2" charset="-122"/>
+                    <a:cs typeface="Times New Roman" panose="02020603050405020304" pitchFamily="18" charset="0"/>
+                  </a:rPr>
+                  <a:t>用户显式声明基类列表</a:t>
+                </a:r>
+              </a:p>
+            </p:txBody>
+          </p:sp>
+          <p:sp>
+            <p:nvSpPr>
+              <p:cNvPr id="11" name="矩形 10">
+                <a:extLst>
+                  <a:ext uri="{FF2B5EF4-FFF2-40B4-BE49-F238E27FC236}">
+                    <a16:creationId xmlns:a16="http://schemas.microsoft.com/office/drawing/2014/main" id="{8350CEC5-77B7-415B-A4A3-8E0920325A67}"/>
+                  </a:ext>
+                </a:extLst>
+              </p:cNvPr>
+              <p:cNvSpPr/>
+              <p:nvPr/>
+            </p:nvSpPr>
+            <p:spPr>
+              <a:xfrm>
+                <a:off x="8785257" y="1548093"/>
+                <a:ext cx="2140033" cy="590303"/>
+              </a:xfrm>
+              <a:prstGeom prst="rect">
+                <a:avLst/>
+              </a:prstGeom>
+              <a:noFill/>
+              <a:ln w="28575">
+                <a:solidFill>
+                  <a:schemeClr val="tx1"/>
+                </a:solidFill>
+              </a:ln>
+            </p:spPr>
+            <p:style>
+              <a:lnRef idx="2">
+                <a:schemeClr val="accent1">
+                  <a:shade val="50000"/>
+                </a:schemeClr>
+              </a:lnRef>
+              <a:fillRef idx="1">
+                <a:schemeClr val="accent1"/>
+              </a:fillRef>
+              <a:effectRef idx="0">
+                <a:schemeClr val="accent1"/>
+              </a:effectRef>
+              <a:fontRef idx="minor">
+                <a:schemeClr val="lt1"/>
+              </a:fontRef>
+            </p:style>
+            <p:txBody>
+              <a:bodyPr rtlCol="0" anchor="ctr"/>
+              <a:lstStyle/>
+              <a:p>
+                <a:pPr algn="ctr"/>
+                <a:r>
+                  <a:rPr lang="zh-CN" altLang="en-US" sz="1600" dirty="0">
+                    <a:solidFill>
+                      <a:schemeClr val="tx1"/>
+                    </a:solidFill>
+                    <a:latin typeface="Times New Roman" panose="02020603050405020304" pitchFamily="18" charset="0"/>
+                    <a:ea typeface="宋体" panose="02010600030101010101" pitchFamily="2" charset="-122"/>
+                    <a:cs typeface="Times New Roman" panose="02020603050405020304" pitchFamily="18" charset="0"/>
+                  </a:rPr>
+                  <a:t>记录用户声明的基类列表到 </a:t>
+                </a:r>
+                <a:r>
+                  <a:rPr lang="en-US" altLang="zh-CN" sz="1600" dirty="0">
+                    <a:solidFill>
+                      <a:schemeClr val="tx1"/>
+                    </a:solidFill>
+                    <a:latin typeface="Times New Roman" panose="02020603050405020304" pitchFamily="18" charset="0"/>
+                    <a:ea typeface="宋体" panose="02010600030101010101" pitchFamily="2" charset="-122"/>
+                    <a:cs typeface="Times New Roman" panose="02020603050405020304" pitchFamily="18" charset="0"/>
+                  </a:rPr>
+                  <a:t>Klass </a:t>
+                </a:r>
+                <a:r>
+                  <a:rPr lang="zh-CN" altLang="en-US" sz="1600" dirty="0">
+                    <a:solidFill>
+                      <a:schemeClr val="tx1"/>
+                    </a:solidFill>
+                    <a:latin typeface="Times New Roman" panose="02020603050405020304" pitchFamily="18" charset="0"/>
+                    <a:ea typeface="宋体" panose="02010600030101010101" pitchFamily="2" charset="-122"/>
+                    <a:cs typeface="Times New Roman" panose="02020603050405020304" pitchFamily="18" charset="0"/>
+                  </a:rPr>
+                  <a:t>实体</a:t>
+                </a:r>
+              </a:p>
+            </p:txBody>
+          </p:sp>
+          <p:sp>
+            <p:nvSpPr>
+              <p:cNvPr id="12" name="矩形 11">
+                <a:extLst>
+                  <a:ext uri="{FF2B5EF4-FFF2-40B4-BE49-F238E27FC236}">
+                    <a16:creationId xmlns:a16="http://schemas.microsoft.com/office/drawing/2014/main" id="{8A676A40-25C8-4E5E-8965-278783B10030}"/>
+                  </a:ext>
+                </a:extLst>
+              </p:cNvPr>
+              <p:cNvSpPr/>
+              <p:nvPr/>
+            </p:nvSpPr>
+            <p:spPr>
+              <a:xfrm>
+                <a:off x="8785257" y="2499942"/>
+                <a:ext cx="2719203" cy="789215"/>
+              </a:xfrm>
+              <a:prstGeom prst="rect">
+                <a:avLst/>
+              </a:prstGeom>
+              <a:noFill/>
+              <a:ln w="28575">
+                <a:solidFill>
+                  <a:schemeClr val="tx1"/>
+                </a:solidFill>
+              </a:ln>
+            </p:spPr>
+            <p:style>
+              <a:lnRef idx="2">
+                <a:schemeClr val="accent1">
+                  <a:shade val="50000"/>
+                </a:schemeClr>
+              </a:lnRef>
+              <a:fillRef idx="1">
+                <a:schemeClr val="accent1"/>
+              </a:fillRef>
+              <a:effectRef idx="0">
+                <a:schemeClr val="accent1"/>
+              </a:effectRef>
+              <a:fontRef idx="minor">
+                <a:schemeClr val="lt1"/>
+              </a:fontRef>
+            </p:style>
+            <p:txBody>
+              <a:bodyPr rtlCol="0" anchor="ctr"/>
+              <a:lstStyle/>
+              <a:p>
+                <a:pPr algn="ctr"/>
+                <a:r>
+                  <a:rPr lang="en-US" altLang="zh-CN" sz="1600" dirty="0">
+                    <a:solidFill>
+                      <a:schemeClr val="tx1"/>
+                    </a:solidFill>
+                    <a:latin typeface="Times New Roman" panose="02020603050405020304" pitchFamily="18" charset="0"/>
+                    <a:ea typeface="宋体" panose="02010600030101010101" pitchFamily="2" charset="-122"/>
+                    <a:cs typeface="Times New Roman" panose="02020603050405020304" pitchFamily="18" charset="0"/>
+                  </a:rPr>
+                  <a:t>Klass </a:t>
+                </a:r>
+                <a:r>
+                  <a:rPr lang="zh-CN" altLang="en-US" sz="1600" dirty="0">
+                    <a:solidFill>
+                      <a:schemeClr val="tx1"/>
+                    </a:solidFill>
+                    <a:latin typeface="Times New Roman" panose="02020603050405020304" pitchFamily="18" charset="0"/>
+                    <a:ea typeface="宋体" panose="02010600030101010101" pitchFamily="2" charset="-122"/>
+                    <a:cs typeface="Times New Roman" panose="02020603050405020304" pitchFamily="18" charset="0"/>
+                  </a:rPr>
+                  <a:t>实体中创建一个新基类列表，填入内建 </a:t>
+                </a:r>
+                <a:r>
+                  <a:rPr lang="en-US" altLang="zh-CN" sz="1600" dirty="0">
+                    <a:solidFill>
+                      <a:schemeClr val="tx1"/>
+                    </a:solidFill>
+                    <a:latin typeface="Times New Roman" panose="02020603050405020304" pitchFamily="18" charset="0"/>
+                    <a:ea typeface="宋体" panose="02010600030101010101" pitchFamily="2" charset="-122"/>
+                    <a:cs typeface="Times New Roman" panose="02020603050405020304" pitchFamily="18" charset="0"/>
+                  </a:rPr>
+                  <a:t>object </a:t>
+                </a:r>
+                <a:r>
+                  <a:rPr lang="zh-CN" altLang="en-US" sz="1600" dirty="0">
+                    <a:solidFill>
+                      <a:schemeClr val="tx1"/>
+                    </a:solidFill>
+                    <a:latin typeface="Times New Roman" panose="02020603050405020304" pitchFamily="18" charset="0"/>
+                    <a:ea typeface="宋体" panose="02010600030101010101" pitchFamily="2" charset="-122"/>
+                    <a:cs typeface="Times New Roman" panose="02020603050405020304" pitchFamily="18" charset="0"/>
+                  </a:rPr>
+                  <a:t>类型作为默认基类</a:t>
+                </a:r>
+              </a:p>
+            </p:txBody>
+          </p:sp>
+          <p:cxnSp>
+            <p:nvCxnSpPr>
+              <p:cNvPr id="21" name="直接箭头连接符 20">
+                <a:extLst>
+                  <a:ext uri="{FF2B5EF4-FFF2-40B4-BE49-F238E27FC236}">
+                    <a16:creationId xmlns:a16="http://schemas.microsoft.com/office/drawing/2014/main" id="{D69192C8-2ABE-4875-AC0A-E9786C8A3E07}"/>
+                  </a:ext>
+                </a:extLst>
+              </p:cNvPr>
+              <p:cNvCxnSpPr>
+                <a:stCxn id="8" idx="3"/>
+                <a:endCxn id="9" idx="1"/>
+              </p:cNvCxnSpPr>
+              <p:nvPr/>
+            </p:nvCxnSpPr>
+            <p:spPr>
+              <a:xfrm flipV="1">
+                <a:off x="3262744" y="2367154"/>
+                <a:ext cx="374567" cy="6059"/>
+              </a:xfrm>
+              <a:prstGeom prst="straightConnector1">
+                <a:avLst/>
+              </a:prstGeom>
+              <a:ln w="28575">
+                <a:solidFill>
+                  <a:schemeClr val="tx1"/>
+                </a:solidFill>
+                <a:tailEnd type="triangle"/>
+              </a:ln>
+            </p:spPr>
+            <p:style>
+              <a:lnRef idx="1">
+                <a:schemeClr val="accent1"/>
+              </a:lnRef>
+              <a:fillRef idx="0">
+                <a:schemeClr val="accent1"/>
+              </a:fillRef>
+              <a:effectRef idx="0">
+                <a:schemeClr val="accent1"/>
+              </a:effectRef>
+              <a:fontRef idx="minor">
+                <a:schemeClr val="tx1"/>
+              </a:fontRef>
+            </p:style>
+          </p:cxnSp>
+          <p:cxnSp>
+            <p:nvCxnSpPr>
+              <p:cNvPr id="23" name="直接箭头连接符 22">
+                <a:extLst>
+                  <a:ext uri="{FF2B5EF4-FFF2-40B4-BE49-F238E27FC236}">
+                    <a16:creationId xmlns:a16="http://schemas.microsoft.com/office/drawing/2014/main" id="{C0DEB1D0-3669-4EF3-8074-6FB870D64C31}"/>
+                  </a:ext>
+                </a:extLst>
+              </p:cNvPr>
+              <p:cNvCxnSpPr>
+                <a:stCxn id="9" idx="3"/>
+                <a:endCxn id="10" idx="1"/>
+              </p:cNvCxnSpPr>
+              <p:nvPr/>
+            </p:nvCxnSpPr>
+            <p:spPr>
+              <a:xfrm flipV="1">
+                <a:off x="5949538" y="2367153"/>
+                <a:ext cx="374567" cy="1"/>
+              </a:xfrm>
+              <a:prstGeom prst="straightConnector1">
+                <a:avLst/>
+              </a:prstGeom>
+              <a:ln w="28575">
+                <a:solidFill>
+                  <a:schemeClr val="tx1"/>
+                </a:solidFill>
+                <a:tailEnd type="triangle"/>
+              </a:ln>
+            </p:spPr>
+            <p:style>
+              <a:lnRef idx="1">
+                <a:schemeClr val="accent1"/>
+              </a:lnRef>
+              <a:fillRef idx="0">
+                <a:schemeClr val="accent1"/>
+              </a:fillRef>
+              <a:effectRef idx="0">
+                <a:schemeClr val="accent1"/>
+              </a:effectRef>
+              <a:fontRef idx="minor">
+                <a:schemeClr val="tx1"/>
+              </a:fontRef>
+            </p:style>
+          </p:cxnSp>
+        </p:grpSp>
+        <p:sp>
+          <p:nvSpPr>
+            <p:cNvPr id="46" name="矩形 45">
+              <a:extLst>
+                <a:ext uri="{FF2B5EF4-FFF2-40B4-BE49-F238E27FC236}">
+                  <a16:creationId xmlns:a16="http://schemas.microsoft.com/office/drawing/2014/main" id="{E38BD569-465A-49A2-AFC5-698FF9D1FBA3}"/>
+                </a:ext>
+              </a:extLst>
+            </p:cNvPr>
+            <p:cNvSpPr/>
+            <p:nvPr/>
+          </p:nvSpPr>
+          <p:spPr>
+            <a:xfrm>
+              <a:off x="852546" y="1481718"/>
+              <a:ext cx="10842172" cy="1947280"/>
+            </a:xfrm>
+            <a:prstGeom prst="rect">
+              <a:avLst/>
+            </a:prstGeom>
+            <a:noFill/>
+            <a:ln w="19050">
+              <a:solidFill>
+                <a:schemeClr val="tx1"/>
+              </a:solidFill>
+            </a:ln>
+          </p:spPr>
+          <p:style>
+            <a:lnRef idx="2">
+              <a:schemeClr val="accent1">
+                <a:shade val="50000"/>
+              </a:schemeClr>
+            </a:lnRef>
+            <a:fillRef idx="1">
+              <a:schemeClr val="accent1"/>
+            </a:fillRef>
+            <a:effectRef idx="0">
+              <a:schemeClr val="accent1"/>
+            </a:effectRef>
+            <a:fontRef idx="minor">
+              <a:schemeClr val="lt1"/>
+            </a:fontRef>
+          </p:style>
+          <p:txBody>
+            <a:bodyPr rtlCol="0" anchor="ctr"/>
+            <a:lstStyle/>
+            <a:p>
+              <a:pPr algn="ctr"/>
+              <a:endParaRPr lang="zh-CN" altLang="en-US" dirty="0"/>
+            </a:p>
+          </p:txBody>
+        </p:sp>
+      </p:grpSp>
+      <p:grpSp>
+        <p:nvGrpSpPr>
+          <p:cNvPr id="50" name="组合 49">
+            <a:extLst>
+              <a:ext uri="{FF2B5EF4-FFF2-40B4-BE49-F238E27FC236}">
+                <a16:creationId xmlns:a16="http://schemas.microsoft.com/office/drawing/2014/main" id="{1E51376E-CA7C-48BE-9B2E-5EAEDE044D8F}"/>
+              </a:ext>
+            </a:extLst>
+          </p:cNvPr>
+          <p:cNvGrpSpPr/>
+          <p:nvPr/>
+        </p:nvGrpSpPr>
+        <p:grpSpPr>
+          <a:xfrm>
+            <a:off x="1131617" y="4680292"/>
+            <a:ext cx="10842172" cy="1231342"/>
+            <a:chOff x="852546" y="3504280"/>
+            <a:chExt cx="10842172" cy="1231342"/>
+          </a:xfrm>
+        </p:grpSpPr>
+        <p:grpSp>
+          <p:nvGrpSpPr>
+            <p:cNvPr id="49" name="组合 48">
+              <a:extLst>
+                <a:ext uri="{FF2B5EF4-FFF2-40B4-BE49-F238E27FC236}">
+                  <a16:creationId xmlns:a16="http://schemas.microsoft.com/office/drawing/2014/main" id="{525D0C31-C89E-46A2-88F8-35096F64B8B0}"/>
+                </a:ext>
+              </a:extLst>
+            </p:cNvPr>
+            <p:cNvGrpSpPr/>
+            <p:nvPr/>
+          </p:nvGrpSpPr>
+          <p:grpSpPr>
+            <a:xfrm>
+              <a:off x="1000990" y="3630740"/>
+              <a:ext cx="9532422" cy="953982"/>
+              <a:chOff x="1060366" y="5299394"/>
+              <a:chExt cx="9532422" cy="953982"/>
+            </a:xfrm>
+          </p:grpSpPr>
+          <p:sp>
+            <p:nvSpPr>
+              <p:cNvPr id="13" name="矩形 12">
+                <a:extLst>
+                  <a:ext uri="{FF2B5EF4-FFF2-40B4-BE49-F238E27FC236}">
+                    <a16:creationId xmlns:a16="http://schemas.microsoft.com/office/drawing/2014/main" id="{A03BF30D-06C4-415A-B70E-3E5A41C873F3}"/>
+                  </a:ext>
+                </a:extLst>
+              </p:cNvPr>
+              <p:cNvSpPr/>
+              <p:nvPr/>
+            </p:nvSpPr>
+            <p:spPr>
+              <a:xfrm>
+                <a:off x="1060366" y="5299394"/>
+                <a:ext cx="2573482" cy="953982"/>
+              </a:xfrm>
+              <a:prstGeom prst="rect">
+                <a:avLst/>
+              </a:prstGeom>
+              <a:noFill/>
+              <a:ln w="28575">
+                <a:solidFill>
+                  <a:schemeClr val="tx1"/>
+                </a:solidFill>
+              </a:ln>
+            </p:spPr>
+            <p:style>
+              <a:lnRef idx="2">
+                <a:schemeClr val="accent1">
+                  <a:shade val="50000"/>
+                </a:schemeClr>
+              </a:lnRef>
+              <a:fillRef idx="1">
+                <a:schemeClr val="accent1"/>
+              </a:fillRef>
+              <a:effectRef idx="0">
+                <a:schemeClr val="accent1"/>
+              </a:effectRef>
+              <a:fontRef idx="minor">
+                <a:schemeClr val="lt1"/>
+              </a:fontRef>
+            </p:style>
+            <p:txBody>
+              <a:bodyPr rtlCol="0" anchor="ctr"/>
+              <a:lstStyle/>
+              <a:p>
+                <a:pPr algn="ctr"/>
+                <a:r>
+                  <a:rPr lang="zh-CN" altLang="en-US" sz="1600" dirty="0">
+                    <a:solidFill>
+                      <a:schemeClr val="tx1"/>
+                    </a:solidFill>
+                    <a:latin typeface="Times New Roman" panose="02020603050405020304" pitchFamily="18" charset="0"/>
+                    <a:ea typeface="宋体" panose="02010600030101010101" pitchFamily="2" charset="-122"/>
+                    <a:cs typeface="Times New Roman" panose="02020603050405020304" pitchFamily="18" charset="0"/>
+                  </a:rPr>
+                  <a:t>对基类列表执行 </a:t>
+                </a:r>
+                <a:r>
+                  <a:rPr lang="en-US" altLang="zh-CN" sz="1600" dirty="0">
+                    <a:solidFill>
+                      <a:schemeClr val="tx1"/>
+                    </a:solidFill>
+                    <a:latin typeface="Times New Roman" panose="02020603050405020304" pitchFamily="18" charset="0"/>
+                    <a:ea typeface="宋体" panose="02010600030101010101" pitchFamily="2" charset="-122"/>
+                    <a:cs typeface="Times New Roman" panose="02020603050405020304" pitchFamily="18" charset="0"/>
+                  </a:rPr>
+                  <a:t>C3 </a:t>
+                </a:r>
+                <a:r>
+                  <a:rPr lang="zh-CN" altLang="en-US" sz="1600" dirty="0">
+                    <a:solidFill>
+                      <a:schemeClr val="tx1"/>
+                    </a:solidFill>
+                    <a:latin typeface="Times New Roman" panose="02020603050405020304" pitchFamily="18" charset="0"/>
+                    <a:ea typeface="宋体" panose="02010600030101010101" pitchFamily="2" charset="-122"/>
+                    <a:cs typeface="Times New Roman" panose="02020603050405020304" pitchFamily="18" charset="0"/>
+                  </a:rPr>
+                  <a:t>线性化算法，计算并保存 </a:t>
+                </a:r>
+                <a:r>
+                  <a:rPr lang="en-US" altLang="zh-CN" sz="1600" dirty="0">
+                    <a:solidFill>
+                      <a:schemeClr val="tx1"/>
+                    </a:solidFill>
+                    <a:latin typeface="Times New Roman" panose="02020603050405020304" pitchFamily="18" charset="0"/>
+                    <a:ea typeface="宋体" panose="02010600030101010101" pitchFamily="2" charset="-122"/>
+                    <a:cs typeface="Times New Roman" panose="02020603050405020304" pitchFamily="18" charset="0"/>
+                  </a:rPr>
+                  <a:t>MRO </a:t>
+                </a:r>
+                <a:r>
+                  <a:rPr lang="zh-CN" altLang="en-US" sz="1600" dirty="0">
+                    <a:solidFill>
+                      <a:schemeClr val="tx1"/>
+                    </a:solidFill>
+                    <a:latin typeface="Times New Roman" panose="02020603050405020304" pitchFamily="18" charset="0"/>
+                    <a:ea typeface="宋体" panose="02010600030101010101" pitchFamily="2" charset="-122"/>
+                    <a:cs typeface="Times New Roman" panose="02020603050405020304" pitchFamily="18" charset="0"/>
+                  </a:rPr>
+                  <a:t>序列到 </a:t>
+                </a:r>
+                <a:r>
+                  <a:rPr lang="en-US" altLang="zh-CN" sz="1600" dirty="0">
+                    <a:solidFill>
+                      <a:schemeClr val="tx1"/>
+                    </a:solidFill>
+                    <a:latin typeface="Times New Roman" panose="02020603050405020304" pitchFamily="18" charset="0"/>
+                    <a:ea typeface="宋体" panose="02010600030101010101" pitchFamily="2" charset="-122"/>
+                    <a:cs typeface="Times New Roman" panose="02020603050405020304" pitchFamily="18" charset="0"/>
+                  </a:rPr>
+                  <a:t>Klass </a:t>
+                </a:r>
+                <a:r>
+                  <a:rPr lang="zh-CN" altLang="en-US" sz="1600" dirty="0">
+                    <a:solidFill>
+                      <a:schemeClr val="tx1"/>
+                    </a:solidFill>
+                    <a:latin typeface="Times New Roman" panose="02020603050405020304" pitchFamily="18" charset="0"/>
+                    <a:ea typeface="宋体" panose="02010600030101010101" pitchFamily="2" charset="-122"/>
+                    <a:cs typeface="Times New Roman" panose="02020603050405020304" pitchFamily="18" charset="0"/>
+                  </a:rPr>
+                  <a:t>实体</a:t>
+                </a:r>
+              </a:p>
+            </p:txBody>
+          </p:sp>
+          <p:sp>
+            <p:nvSpPr>
+              <p:cNvPr id="14" name="矩形 13">
+                <a:extLst>
+                  <a:ext uri="{FF2B5EF4-FFF2-40B4-BE49-F238E27FC236}">
+                    <a16:creationId xmlns:a16="http://schemas.microsoft.com/office/drawing/2014/main" id="{ACD13274-4809-488C-BCEC-36E96D3AF365}"/>
+                  </a:ext>
+                </a:extLst>
+              </p:cNvPr>
+              <p:cNvSpPr/>
+              <p:nvPr/>
+            </p:nvSpPr>
+            <p:spPr>
+              <a:xfrm>
+                <a:off x="4287484" y="5299394"/>
+                <a:ext cx="2389416" cy="953982"/>
+              </a:xfrm>
+              <a:prstGeom prst="rect">
+                <a:avLst/>
+              </a:prstGeom>
+              <a:noFill/>
+              <a:ln w="28575">
+                <a:solidFill>
+                  <a:schemeClr val="tx1"/>
+                </a:solidFill>
+              </a:ln>
+            </p:spPr>
+            <p:style>
+              <a:lnRef idx="2">
+                <a:schemeClr val="accent1">
+                  <a:shade val="50000"/>
+                </a:schemeClr>
+              </a:lnRef>
+              <a:fillRef idx="1">
+                <a:schemeClr val="accent1"/>
+              </a:fillRef>
+              <a:effectRef idx="0">
+                <a:schemeClr val="accent1"/>
+              </a:effectRef>
+              <a:fontRef idx="minor">
+                <a:schemeClr val="lt1"/>
+              </a:fontRef>
+            </p:style>
+            <p:txBody>
+              <a:bodyPr rtlCol="0" anchor="ctr"/>
+              <a:lstStyle/>
+              <a:p>
+                <a:pPr algn="ctr"/>
+                <a:r>
+                  <a:rPr lang="zh-CN" altLang="en-US" sz="1600" dirty="0">
+                    <a:solidFill>
+                      <a:schemeClr val="tx1"/>
+                    </a:solidFill>
+                    <a:latin typeface="Times New Roman" panose="02020603050405020304" pitchFamily="18" charset="0"/>
+                    <a:ea typeface="宋体" panose="02010600030101010101" pitchFamily="2" charset="-122"/>
+                    <a:cs typeface="Times New Roman" panose="02020603050405020304" pitchFamily="18" charset="0"/>
+                  </a:rPr>
+                  <a:t>沿 </a:t>
+                </a:r>
+                <a:r>
+                  <a:rPr lang="en-US" altLang="zh-CN" sz="1600" dirty="0">
+                    <a:solidFill>
+                      <a:schemeClr val="tx1"/>
+                    </a:solidFill>
+                    <a:latin typeface="Times New Roman" panose="02020603050405020304" pitchFamily="18" charset="0"/>
+                    <a:ea typeface="宋体" panose="02010600030101010101" pitchFamily="2" charset="-122"/>
+                    <a:cs typeface="Times New Roman" panose="02020603050405020304" pitchFamily="18" charset="0"/>
+                  </a:rPr>
+                  <a:t>MRO </a:t>
+                </a:r>
+                <a:r>
+                  <a:rPr lang="zh-CN" altLang="en-US" sz="1600" dirty="0">
+                    <a:solidFill>
+                      <a:schemeClr val="tx1"/>
+                    </a:solidFill>
+                    <a:latin typeface="Times New Roman" panose="02020603050405020304" pitchFamily="18" charset="0"/>
+                    <a:ea typeface="宋体" panose="02010600030101010101" pitchFamily="2" charset="-122"/>
+                    <a:cs typeface="Times New Roman" panose="02020603050405020304" pitchFamily="18" charset="0"/>
+                  </a:rPr>
+                  <a:t>序列查找并复制祖先类的虚函数表槽位</a:t>
+                </a:r>
+              </a:p>
+            </p:txBody>
+          </p:sp>
+          <p:sp>
+            <p:nvSpPr>
+              <p:cNvPr id="15" name="矩形 14">
+                <a:extLst>
+                  <a:ext uri="{FF2B5EF4-FFF2-40B4-BE49-F238E27FC236}">
+                    <a16:creationId xmlns:a16="http://schemas.microsoft.com/office/drawing/2014/main" id="{E2B4428B-7751-45F1-920D-50F704401EEF}"/>
+                  </a:ext>
+                </a:extLst>
+              </p:cNvPr>
+              <p:cNvSpPr/>
+              <p:nvPr/>
+            </p:nvSpPr>
+            <p:spPr>
+              <a:xfrm>
+                <a:off x="7330537" y="5299394"/>
+                <a:ext cx="3262251" cy="953982"/>
+              </a:xfrm>
+              <a:prstGeom prst="rect">
+                <a:avLst/>
+              </a:prstGeom>
+              <a:noFill/>
+              <a:ln w="28575">
+                <a:solidFill>
+                  <a:schemeClr val="tx1"/>
+                </a:solidFill>
+              </a:ln>
+            </p:spPr>
+            <p:style>
+              <a:lnRef idx="2">
+                <a:schemeClr val="accent1">
+                  <a:shade val="50000"/>
+                </a:schemeClr>
+              </a:lnRef>
+              <a:fillRef idx="1">
+                <a:schemeClr val="accent1"/>
+              </a:fillRef>
+              <a:effectRef idx="0">
+                <a:schemeClr val="accent1"/>
+              </a:effectRef>
+              <a:fontRef idx="minor">
+                <a:schemeClr val="lt1"/>
+              </a:fontRef>
+            </p:style>
+            <p:txBody>
+              <a:bodyPr rtlCol="0" anchor="ctr"/>
+              <a:lstStyle/>
+              <a:p>
+                <a:pPr algn="ctr"/>
+                <a:r>
+                  <a:rPr lang="zh-CN" altLang="en-US" sz="1600" dirty="0">
+                    <a:solidFill>
+                      <a:schemeClr val="tx1"/>
+                    </a:solidFill>
+                    <a:latin typeface="Times New Roman" panose="02020603050405020304" pitchFamily="18" charset="0"/>
+                    <a:ea typeface="宋体" panose="02010600030101010101" pitchFamily="2" charset="-122"/>
+                    <a:cs typeface="Times New Roman" panose="02020603050405020304" pitchFamily="18" charset="0"/>
+                  </a:rPr>
+                  <a:t>遍历当前类的属性字典，将被魔法方法覆写的对应虚函数槽位修改为桥接函数（</a:t>
+                </a:r>
+                <a:r>
+                  <a:rPr lang="en-US" altLang="zh-CN" sz="1600" dirty="0">
+                    <a:solidFill>
+                      <a:schemeClr val="tx1"/>
+                    </a:solidFill>
+                    <a:latin typeface="Times New Roman" panose="02020603050405020304" pitchFamily="18" charset="0"/>
+                    <a:ea typeface="宋体" panose="02010600030101010101" pitchFamily="2" charset="-122"/>
+                    <a:cs typeface="Times New Roman" panose="02020603050405020304" pitchFamily="18" charset="0"/>
+                  </a:rPr>
+                  <a:t>trampoline</a:t>
+                </a:r>
+                <a:r>
+                  <a:rPr lang="zh-CN" altLang="en-US" sz="1600" dirty="0">
+                    <a:solidFill>
+                      <a:schemeClr val="tx1"/>
+                    </a:solidFill>
+                    <a:latin typeface="Times New Roman" panose="02020603050405020304" pitchFamily="18" charset="0"/>
+                    <a:ea typeface="宋体" panose="02010600030101010101" pitchFamily="2" charset="-122"/>
+                    <a:cs typeface="Times New Roman" panose="02020603050405020304" pitchFamily="18" charset="0"/>
+                  </a:rPr>
+                  <a:t>）</a:t>
+                </a:r>
+              </a:p>
+            </p:txBody>
+          </p:sp>
+          <p:cxnSp>
+            <p:nvCxnSpPr>
+              <p:cNvPr id="41" name="直接箭头连接符 40">
+                <a:extLst>
+                  <a:ext uri="{FF2B5EF4-FFF2-40B4-BE49-F238E27FC236}">
+                    <a16:creationId xmlns:a16="http://schemas.microsoft.com/office/drawing/2014/main" id="{9F231097-775C-4ACD-845A-7DB479CAD1F0}"/>
+                  </a:ext>
+                </a:extLst>
+              </p:cNvPr>
+              <p:cNvCxnSpPr>
+                <a:cxnSpLocks/>
+                <a:stCxn id="13" idx="3"/>
+                <a:endCxn id="14" idx="1"/>
+              </p:cNvCxnSpPr>
+              <p:nvPr/>
+            </p:nvCxnSpPr>
+            <p:spPr>
+              <a:xfrm>
+                <a:off x="3633848" y="5776385"/>
+                <a:ext cx="653636" cy="0"/>
+              </a:xfrm>
+              <a:prstGeom prst="straightConnector1">
+                <a:avLst/>
+              </a:prstGeom>
+              <a:ln w="38100">
+                <a:solidFill>
+                  <a:schemeClr val="tx1"/>
+                </a:solidFill>
+                <a:tailEnd type="triangle"/>
+              </a:ln>
+            </p:spPr>
+            <p:style>
+              <a:lnRef idx="1">
+                <a:schemeClr val="accent1"/>
+              </a:lnRef>
+              <a:fillRef idx="0">
+                <a:schemeClr val="accent1"/>
+              </a:fillRef>
+              <a:effectRef idx="0">
+                <a:schemeClr val="accent1"/>
+              </a:effectRef>
+              <a:fontRef idx="minor">
+                <a:schemeClr val="tx1"/>
+              </a:fontRef>
+            </p:style>
+          </p:cxnSp>
+          <p:cxnSp>
+            <p:nvCxnSpPr>
+              <p:cNvPr id="43" name="直接箭头连接符 42">
+                <a:extLst>
+                  <a:ext uri="{FF2B5EF4-FFF2-40B4-BE49-F238E27FC236}">
+                    <a16:creationId xmlns:a16="http://schemas.microsoft.com/office/drawing/2014/main" id="{172BF747-7EDB-4350-A071-08348EC16FCA}"/>
+                  </a:ext>
+                </a:extLst>
+              </p:cNvPr>
+              <p:cNvCxnSpPr>
+                <a:stCxn id="14" idx="3"/>
+                <a:endCxn id="15" idx="1"/>
+              </p:cNvCxnSpPr>
+              <p:nvPr/>
+            </p:nvCxnSpPr>
+            <p:spPr>
+              <a:xfrm>
+                <a:off x="6676900" y="5776385"/>
+                <a:ext cx="653637" cy="0"/>
+              </a:xfrm>
+              <a:prstGeom prst="straightConnector1">
+                <a:avLst/>
+              </a:prstGeom>
+              <a:ln w="38100">
+                <a:solidFill>
+                  <a:schemeClr val="tx1"/>
+                </a:solidFill>
+                <a:tailEnd type="triangle"/>
+              </a:ln>
+            </p:spPr>
+            <p:style>
+              <a:lnRef idx="1">
+                <a:schemeClr val="accent1"/>
+              </a:lnRef>
+              <a:fillRef idx="0">
+                <a:schemeClr val="accent1"/>
+              </a:fillRef>
+              <a:effectRef idx="0">
+                <a:schemeClr val="accent1"/>
+              </a:effectRef>
+              <a:fontRef idx="minor">
+                <a:schemeClr val="tx1"/>
+              </a:fontRef>
+            </p:style>
+          </p:cxnSp>
+        </p:grpSp>
+        <p:sp>
+          <p:nvSpPr>
+            <p:cNvPr id="48" name="矩形 47">
+              <a:extLst>
+                <a:ext uri="{FF2B5EF4-FFF2-40B4-BE49-F238E27FC236}">
+                  <a16:creationId xmlns:a16="http://schemas.microsoft.com/office/drawing/2014/main" id="{954972BD-B34D-4FD2-AB60-E89E869884E8}"/>
+                </a:ext>
+              </a:extLst>
+            </p:cNvPr>
+            <p:cNvSpPr/>
+            <p:nvPr/>
+          </p:nvSpPr>
+          <p:spPr>
+            <a:xfrm>
+              <a:off x="852546" y="3504280"/>
+              <a:ext cx="10842172" cy="1231342"/>
+            </a:xfrm>
+            <a:prstGeom prst="rect">
+              <a:avLst/>
+            </a:prstGeom>
+            <a:noFill/>
+            <a:ln w="19050">
+              <a:solidFill>
+                <a:schemeClr val="tx1"/>
+              </a:solidFill>
+            </a:ln>
+          </p:spPr>
+          <p:style>
+            <a:lnRef idx="2">
+              <a:schemeClr val="accent1">
+                <a:shade val="50000"/>
+              </a:schemeClr>
+            </a:lnRef>
+            <a:fillRef idx="1">
+              <a:schemeClr val="accent1"/>
+            </a:fillRef>
+            <a:effectRef idx="0">
+              <a:schemeClr val="accent1"/>
+            </a:effectRef>
+            <a:fontRef idx="minor">
+              <a:schemeClr val="lt1"/>
+            </a:fontRef>
+          </p:style>
+          <p:txBody>
+            <a:bodyPr rtlCol="0" anchor="ctr"/>
+            <a:lstStyle/>
+            <a:p>
+              <a:pPr algn="ctr"/>
+              <a:endParaRPr lang="zh-CN" altLang="en-US"/>
+            </a:p>
+          </p:txBody>
+        </p:sp>
+      </p:grpSp>
+      <p:cxnSp>
+        <p:nvCxnSpPr>
+          <p:cNvPr id="53" name="连接符: 曲线 52">
+            <a:extLst>
+              <a:ext uri="{FF2B5EF4-FFF2-40B4-BE49-F238E27FC236}">
+                <a16:creationId xmlns:a16="http://schemas.microsoft.com/office/drawing/2014/main" id="{23EAAFFF-B298-425E-9E44-3019DB2DECCA}"/>
+              </a:ext>
+            </a:extLst>
+          </p:cNvPr>
+          <p:cNvCxnSpPr>
+            <a:stCxn id="10" idx="3"/>
+            <a:endCxn id="11" idx="1"/>
+          </p:cNvCxnSpPr>
+          <p:nvPr/>
+        </p:nvCxnSpPr>
+        <p:spPr>
+          <a:xfrm flipV="1">
+            <a:off x="8639305" y="2733012"/>
+            <a:ext cx="427994" cy="523908"/>
+          </a:xfrm>
+          <a:prstGeom prst="curvedConnector3">
+            <a:avLst>
+              <a:gd name="adj1" fmla="val 1444"/>
+            </a:avLst>
+          </a:prstGeom>
+          <a:ln w="28575">
+            <a:solidFill>
+              <a:schemeClr val="tx1"/>
+            </a:solidFill>
+            <a:tailEnd type="triangle"/>
+          </a:ln>
+        </p:spPr>
+        <p:style>
+          <a:lnRef idx="1">
+            <a:schemeClr val="accent1"/>
+          </a:lnRef>
+          <a:fillRef idx="0">
+            <a:schemeClr val="accent1"/>
+          </a:fillRef>
+          <a:effectRef idx="0">
+            <a:schemeClr val="accent1"/>
+          </a:effectRef>
+          <a:fontRef idx="minor">
+            <a:schemeClr val="tx1"/>
+          </a:fontRef>
+        </p:style>
+      </p:cxnSp>
+      <p:cxnSp>
+        <p:nvCxnSpPr>
+          <p:cNvPr id="55" name="连接符: 曲线 54">
+            <a:extLst>
+              <a:ext uri="{FF2B5EF4-FFF2-40B4-BE49-F238E27FC236}">
+                <a16:creationId xmlns:a16="http://schemas.microsoft.com/office/drawing/2014/main" id="{25C3AA24-DC1E-4D37-A86F-0ED92A6A244C}"/>
+              </a:ext>
+            </a:extLst>
+          </p:cNvPr>
+          <p:cNvCxnSpPr>
+            <a:cxnSpLocks/>
+            <a:stCxn id="10" idx="3"/>
+            <a:endCxn id="12" idx="1"/>
+          </p:cNvCxnSpPr>
+          <p:nvPr/>
+        </p:nvCxnSpPr>
+        <p:spPr>
+          <a:xfrm>
+            <a:off x="8639305" y="3256920"/>
+            <a:ext cx="427994" cy="527397"/>
+          </a:xfrm>
+          <a:prstGeom prst="curvedConnector3">
+            <a:avLst>
+              <a:gd name="adj1" fmla="val 57"/>
+            </a:avLst>
+          </a:prstGeom>
+          <a:ln w="28575">
+            <a:solidFill>
+              <a:schemeClr val="tx1"/>
+            </a:solidFill>
+            <a:tailEnd type="triangle"/>
+          </a:ln>
+        </p:spPr>
+        <p:style>
+          <a:lnRef idx="1">
+            <a:schemeClr val="accent1"/>
+          </a:lnRef>
+          <a:fillRef idx="0">
+            <a:schemeClr val="accent1"/>
+          </a:fillRef>
+          <a:effectRef idx="0">
+            <a:schemeClr val="accent1"/>
+          </a:effectRef>
+          <a:fontRef idx="minor">
+            <a:schemeClr val="tx1"/>
+          </a:fontRef>
+        </p:style>
+      </p:cxnSp>
+      <p:cxnSp>
+        <p:nvCxnSpPr>
+          <p:cNvPr id="60" name="直接箭头连接符 59">
+            <a:extLst>
+              <a:ext uri="{FF2B5EF4-FFF2-40B4-BE49-F238E27FC236}">
+                <a16:creationId xmlns:a16="http://schemas.microsoft.com/office/drawing/2014/main" id="{9613CAB7-A966-4F3B-A502-47CD3F879BC6}"/>
+              </a:ext>
+            </a:extLst>
+          </p:cNvPr>
+          <p:cNvCxnSpPr>
+            <a:stCxn id="45" idx="2"/>
+            <a:endCxn id="46" idx="0"/>
+          </p:cNvCxnSpPr>
+          <p:nvPr/>
+        </p:nvCxnSpPr>
+        <p:spPr>
+          <a:xfrm flipH="1">
+            <a:off x="6552703" y="1919391"/>
+            <a:ext cx="2477" cy="415361"/>
+          </a:xfrm>
+          <a:prstGeom prst="straightConnector1">
+            <a:avLst/>
+          </a:prstGeom>
+          <a:ln w="38100">
+            <a:solidFill>
+              <a:schemeClr val="tx1"/>
+            </a:solidFill>
+            <a:tailEnd type="triangle"/>
+          </a:ln>
+        </p:spPr>
+        <p:style>
+          <a:lnRef idx="1">
+            <a:schemeClr val="accent1"/>
+          </a:lnRef>
+          <a:fillRef idx="0">
+            <a:schemeClr val="accent1"/>
+          </a:fillRef>
+          <a:effectRef idx="0">
+            <a:schemeClr val="accent1"/>
+          </a:effectRef>
+          <a:fontRef idx="minor">
+            <a:schemeClr val="tx1"/>
+          </a:fontRef>
+        </p:style>
+      </p:cxnSp>
+      <p:cxnSp>
+        <p:nvCxnSpPr>
+          <p:cNvPr id="62" name="直接箭头连接符 61">
+            <a:extLst>
+              <a:ext uri="{FF2B5EF4-FFF2-40B4-BE49-F238E27FC236}">
+                <a16:creationId xmlns:a16="http://schemas.microsoft.com/office/drawing/2014/main" id="{258035FD-D4B9-4661-B362-5B9E5342ED96}"/>
+              </a:ext>
+            </a:extLst>
+          </p:cNvPr>
+          <p:cNvCxnSpPr>
+            <a:stCxn id="46" idx="2"/>
+            <a:endCxn id="48" idx="0"/>
+          </p:cNvCxnSpPr>
+          <p:nvPr/>
+        </p:nvCxnSpPr>
+        <p:spPr>
+          <a:xfrm>
+            <a:off x="6552703" y="4282032"/>
+            <a:ext cx="0" cy="398260"/>
+          </a:xfrm>
+          <a:prstGeom prst="straightConnector1">
+            <a:avLst/>
+          </a:prstGeom>
+          <a:ln w="38100">
+            <a:solidFill>
+              <a:schemeClr val="tx1"/>
+            </a:solidFill>
+            <a:tailEnd type="triangle"/>
+          </a:ln>
+        </p:spPr>
+        <p:style>
+          <a:lnRef idx="1">
+            <a:schemeClr val="accent1"/>
+          </a:lnRef>
+          <a:fillRef idx="0">
+            <a:schemeClr val="accent1"/>
+          </a:fillRef>
+          <a:effectRef idx="0">
+            <a:schemeClr val="accent1"/>
+          </a:effectRef>
+          <a:fontRef idx="minor">
+            <a:schemeClr val="tx1"/>
+          </a:fontRef>
+        </p:style>
+      </p:cxnSp>
+      <p:sp>
+        <p:nvSpPr>
+          <p:cNvPr id="63" name="矩形: 圆角 62">
+            <a:extLst>
+              <a:ext uri="{FF2B5EF4-FFF2-40B4-BE49-F238E27FC236}">
+                <a16:creationId xmlns:a16="http://schemas.microsoft.com/office/drawing/2014/main" id="{23C18334-E678-473B-B603-A42066AC77C9}"/>
+              </a:ext>
+            </a:extLst>
+          </p:cNvPr>
+          <p:cNvSpPr/>
+          <p:nvPr/>
+        </p:nvSpPr>
+        <p:spPr>
+          <a:xfrm>
+            <a:off x="3783649" y="115110"/>
+            <a:ext cx="5538108" cy="375362"/>
+          </a:xfrm>
+          <a:prstGeom prst="roundRect">
+            <a:avLst/>
+          </a:prstGeom>
+          <a:noFill/>
+          <a:ln w="28575">
+            <a:solidFill>
+              <a:schemeClr val="tx1"/>
+            </a:solidFill>
+          </a:ln>
+        </p:spPr>
+        <p:style>
+          <a:lnRef idx="2">
+            <a:schemeClr val="accent1">
+              <a:shade val="50000"/>
+            </a:schemeClr>
+          </a:lnRef>
+          <a:fillRef idx="1">
+            <a:schemeClr val="accent1"/>
+          </a:fillRef>
+          <a:effectRef idx="0">
+            <a:schemeClr val="accent1"/>
+          </a:effectRef>
+          <a:fontRef idx="minor">
+            <a:schemeClr val="lt1"/>
+          </a:fontRef>
+        </p:style>
+        <p:txBody>
+          <a:bodyPr rtlCol="0" anchor="ctr"/>
+          <a:lstStyle/>
+          <a:p>
+            <a:pPr algn="ctr"/>
+            <a:r>
+              <a:rPr lang="en-US" altLang="zh-CN" sz="1600" dirty="0">
+                <a:solidFill>
+                  <a:schemeClr val="tx1"/>
+                </a:solidFill>
+                <a:latin typeface="Times New Roman" panose="02020603050405020304" pitchFamily="18" charset="0"/>
+                <a:ea typeface="宋体" panose="02010600030101010101" pitchFamily="2" charset="-122"/>
+                <a:cs typeface="Times New Roman" panose="02020603050405020304" pitchFamily="18" charset="0"/>
+              </a:rPr>
+              <a:t>VM </a:t>
+            </a:r>
+            <a:r>
+              <a:rPr lang="zh-CN" altLang="en-US" sz="1600" dirty="0">
+                <a:solidFill>
+                  <a:schemeClr val="tx1"/>
+                </a:solidFill>
+                <a:latin typeface="Times New Roman" panose="02020603050405020304" pitchFamily="18" charset="0"/>
+                <a:ea typeface="宋体" panose="02010600030101010101" pitchFamily="2" charset="-122"/>
+                <a:cs typeface="Times New Roman" panose="02020603050405020304" pitchFamily="18" charset="0"/>
+              </a:rPr>
+              <a:t>调用 </a:t>
+            </a:r>
+            <a:r>
+              <a:rPr lang="en-US" altLang="zh-CN" sz="1600" dirty="0">
+                <a:solidFill>
+                  <a:schemeClr val="tx1"/>
+                </a:solidFill>
+                <a:latin typeface="Times New Roman" panose="02020603050405020304" pitchFamily="18" charset="0"/>
+                <a:ea typeface="宋体" panose="02010600030101010101" pitchFamily="2" charset="-122"/>
+                <a:cs typeface="Times New Roman" panose="02020603050405020304" pitchFamily="18" charset="0"/>
+              </a:rPr>
+              <a:t>Runtime_CreatePythonClass()</a:t>
+            </a:r>
+            <a:r>
+              <a:rPr lang="zh-CN" altLang="en-US" sz="1600" dirty="0">
+                <a:solidFill>
+                  <a:schemeClr val="tx1"/>
+                </a:solidFill>
+                <a:latin typeface="Times New Roman" panose="02020603050405020304" pitchFamily="18" charset="0"/>
+                <a:ea typeface="宋体" panose="02010600030101010101" pitchFamily="2" charset="-122"/>
+                <a:cs typeface="Times New Roman" panose="02020603050405020304" pitchFamily="18" charset="0"/>
+              </a:rPr>
+              <a:t>，发起自定义类创建  </a:t>
+            </a:r>
+          </a:p>
+        </p:txBody>
+      </p:sp>
+      <p:cxnSp>
+        <p:nvCxnSpPr>
+          <p:cNvPr id="67" name="直接箭头连接符 66">
+            <a:extLst>
+              <a:ext uri="{FF2B5EF4-FFF2-40B4-BE49-F238E27FC236}">
+                <a16:creationId xmlns:a16="http://schemas.microsoft.com/office/drawing/2014/main" id="{5B3BDA3C-EC68-44EB-9C91-1C8B56DAE04C}"/>
+              </a:ext>
+            </a:extLst>
+          </p:cNvPr>
+          <p:cNvCxnSpPr>
+            <a:stCxn id="63" idx="2"/>
+            <a:endCxn id="45" idx="0"/>
+          </p:cNvCxnSpPr>
+          <p:nvPr/>
+        </p:nvCxnSpPr>
+        <p:spPr>
+          <a:xfrm>
+            <a:off x="6552703" y="490472"/>
+            <a:ext cx="2477" cy="305174"/>
+          </a:xfrm>
+          <a:prstGeom prst="straightConnector1">
+            <a:avLst/>
+          </a:prstGeom>
+          <a:ln w="38100">
+            <a:solidFill>
+              <a:schemeClr val="tx1"/>
+            </a:solidFill>
+            <a:tailEnd type="triangle"/>
+          </a:ln>
+        </p:spPr>
+        <p:style>
+          <a:lnRef idx="1">
+            <a:schemeClr val="accent1"/>
+          </a:lnRef>
+          <a:fillRef idx="0">
+            <a:schemeClr val="accent1"/>
+          </a:fillRef>
+          <a:effectRef idx="0">
+            <a:schemeClr val="accent1"/>
+          </a:effectRef>
+          <a:fontRef idx="minor">
+            <a:schemeClr val="tx1"/>
+          </a:fontRef>
+        </p:style>
+      </p:cxnSp>
+      <p:sp>
+        <p:nvSpPr>
+          <p:cNvPr id="68" name="矩形: 圆角 67">
+            <a:extLst>
+              <a:ext uri="{FF2B5EF4-FFF2-40B4-BE49-F238E27FC236}">
+                <a16:creationId xmlns:a16="http://schemas.microsoft.com/office/drawing/2014/main" id="{3CCD320D-9C5F-40F3-965B-7FBF0AEA2127}"/>
+              </a:ext>
+            </a:extLst>
+          </p:cNvPr>
+          <p:cNvSpPr/>
+          <p:nvPr/>
+        </p:nvSpPr>
+        <p:spPr>
+          <a:xfrm>
+            <a:off x="4279688" y="6249945"/>
+            <a:ext cx="4546030" cy="375362"/>
+          </a:xfrm>
+          <a:prstGeom prst="roundRect">
+            <a:avLst/>
+          </a:prstGeom>
+          <a:noFill/>
+          <a:ln w="28575">
+            <a:solidFill>
+              <a:schemeClr val="tx1"/>
+            </a:solidFill>
+          </a:ln>
+        </p:spPr>
+        <p:style>
+          <a:lnRef idx="2">
+            <a:schemeClr val="accent1">
+              <a:shade val="50000"/>
+            </a:schemeClr>
+          </a:lnRef>
+          <a:fillRef idx="1">
+            <a:schemeClr val="accent1"/>
+          </a:fillRef>
+          <a:effectRef idx="0">
+            <a:schemeClr val="accent1"/>
+          </a:effectRef>
+          <a:fontRef idx="minor">
+            <a:schemeClr val="lt1"/>
+          </a:fontRef>
+        </p:style>
+        <p:txBody>
+          <a:bodyPr rtlCol="0" anchor="ctr"/>
+          <a:lstStyle/>
+          <a:p>
+            <a:pPr algn="ctr"/>
+            <a:r>
+              <a:rPr lang="zh-CN" altLang="en-US" sz="1600" dirty="0">
+                <a:solidFill>
+                  <a:schemeClr val="tx1"/>
+                </a:solidFill>
+                <a:latin typeface="Times New Roman" panose="02020603050405020304" pitchFamily="18" charset="0"/>
+                <a:ea typeface="宋体" panose="02010600030101010101" pitchFamily="2" charset="-122"/>
+                <a:cs typeface="Times New Roman" panose="02020603050405020304" pitchFamily="18" charset="0"/>
+              </a:rPr>
+              <a:t>流程结束，返回可正常使用的 </a:t>
+            </a:r>
+            <a:r>
+              <a:rPr lang="en-US" altLang="zh-CN" sz="1600" dirty="0">
+                <a:solidFill>
+                  <a:schemeClr val="tx1"/>
+                </a:solidFill>
+                <a:latin typeface="Times New Roman" panose="02020603050405020304" pitchFamily="18" charset="0"/>
+                <a:ea typeface="宋体" panose="02010600030101010101" pitchFamily="2" charset="-122"/>
+                <a:cs typeface="Times New Roman" panose="02020603050405020304" pitchFamily="18" charset="0"/>
+              </a:rPr>
+              <a:t>Python </a:t>
+            </a:r>
+            <a:r>
+              <a:rPr lang="zh-CN" altLang="en-US" sz="1600" dirty="0">
+                <a:solidFill>
+                  <a:schemeClr val="tx1"/>
+                </a:solidFill>
+                <a:latin typeface="Times New Roman" panose="02020603050405020304" pitchFamily="18" charset="0"/>
+                <a:ea typeface="宋体" panose="02010600030101010101" pitchFamily="2" charset="-122"/>
+                <a:cs typeface="Times New Roman" panose="02020603050405020304" pitchFamily="18" charset="0"/>
+              </a:rPr>
+              <a:t>类型对象</a:t>
+            </a:r>
+          </a:p>
+        </p:txBody>
+      </p:sp>
+      <p:cxnSp>
+        <p:nvCxnSpPr>
+          <p:cNvPr id="70" name="直接箭头连接符 69">
+            <a:extLst>
+              <a:ext uri="{FF2B5EF4-FFF2-40B4-BE49-F238E27FC236}">
+                <a16:creationId xmlns:a16="http://schemas.microsoft.com/office/drawing/2014/main" id="{AD45BB29-0EB2-4EB2-A179-1833E80EAF52}"/>
+              </a:ext>
+            </a:extLst>
+          </p:cNvPr>
+          <p:cNvCxnSpPr>
+            <a:stCxn id="48" idx="2"/>
+            <a:endCxn id="68" idx="0"/>
+          </p:cNvCxnSpPr>
+          <p:nvPr/>
+        </p:nvCxnSpPr>
+        <p:spPr>
+          <a:xfrm>
+            <a:off x="6552703" y="5911634"/>
+            <a:ext cx="0" cy="338311"/>
+          </a:xfrm>
+          <a:prstGeom prst="straightConnector1">
+            <a:avLst/>
+          </a:prstGeom>
+          <a:ln w="38100">
+            <a:solidFill>
+              <a:schemeClr val="tx1"/>
+            </a:solidFill>
+            <a:tailEnd type="triangle"/>
+          </a:ln>
+        </p:spPr>
+        <p:style>
+          <a:lnRef idx="1">
+            <a:schemeClr val="accent1"/>
+          </a:lnRef>
+          <a:fillRef idx="0">
+            <a:schemeClr val="accent1"/>
+          </a:fillRef>
+          <a:effectRef idx="0">
+            <a:schemeClr val="accent1"/>
+          </a:effectRef>
+          <a:fontRef idx="minor">
+            <a:schemeClr val="tx1"/>
+          </a:fontRef>
+        </p:style>
+      </p:cxnSp>
+      <p:sp>
+        <p:nvSpPr>
+          <p:cNvPr id="71" name="文本框 70">
+            <a:extLst>
+              <a:ext uri="{FF2B5EF4-FFF2-40B4-BE49-F238E27FC236}">
+                <a16:creationId xmlns:a16="http://schemas.microsoft.com/office/drawing/2014/main" id="{48174964-59D2-4BE3-8FE2-D9FFF1D334B7}"/>
+              </a:ext>
+            </a:extLst>
+          </p:cNvPr>
+          <p:cNvSpPr txBox="1"/>
+          <p:nvPr/>
+        </p:nvSpPr>
+        <p:spPr>
+          <a:xfrm>
+            <a:off x="241655" y="1220827"/>
+            <a:ext cx="819455" cy="369332"/>
+          </a:xfrm>
+          <a:prstGeom prst="rect">
+            <a:avLst/>
+          </a:prstGeom>
+          <a:noFill/>
+        </p:spPr>
+        <p:txBody>
+          <a:bodyPr wrap="none" rtlCol="0">
+            <a:spAutoFit/>
+          </a:bodyPr>
+          <a:lstStyle/>
+          <a:p>
+            <a:r>
+              <a:rPr lang="zh-CN" altLang="en-US" b="1" dirty="0">
+                <a:latin typeface="Times New Roman" panose="02020603050405020304" pitchFamily="18" charset="0"/>
+                <a:ea typeface="宋体" panose="02010600030101010101" pitchFamily="2" charset="-122"/>
+                <a:cs typeface="Times New Roman" panose="02020603050405020304" pitchFamily="18" charset="0"/>
+              </a:rPr>
+              <a:t>阶段 </a:t>
+            </a:r>
+            <a:r>
+              <a:rPr lang="en-US" altLang="zh-CN" b="1" dirty="0">
+                <a:latin typeface="Times New Roman" panose="02020603050405020304" pitchFamily="18" charset="0"/>
+                <a:ea typeface="宋体" panose="02010600030101010101" pitchFamily="2" charset="-122"/>
+                <a:cs typeface="Times New Roman" panose="02020603050405020304" pitchFamily="18" charset="0"/>
+              </a:rPr>
+              <a:t>1</a:t>
+            </a:r>
+            <a:endParaRPr lang="zh-CN" altLang="en-US" b="1" dirty="0">
+              <a:latin typeface="Times New Roman" panose="02020603050405020304" pitchFamily="18" charset="0"/>
+              <a:ea typeface="宋体" panose="02010600030101010101" pitchFamily="2" charset="-122"/>
+              <a:cs typeface="Times New Roman" panose="02020603050405020304" pitchFamily="18" charset="0"/>
+            </a:endParaRPr>
+          </a:p>
+        </p:txBody>
+      </p:sp>
+      <p:sp>
+        <p:nvSpPr>
+          <p:cNvPr id="72" name="文本框 71">
+            <a:extLst>
+              <a:ext uri="{FF2B5EF4-FFF2-40B4-BE49-F238E27FC236}">
+                <a16:creationId xmlns:a16="http://schemas.microsoft.com/office/drawing/2014/main" id="{D1F7643A-5017-4094-A27B-8F0DF8172489}"/>
+              </a:ext>
+            </a:extLst>
+          </p:cNvPr>
+          <p:cNvSpPr txBox="1"/>
+          <p:nvPr/>
+        </p:nvSpPr>
+        <p:spPr>
+          <a:xfrm>
+            <a:off x="246609" y="3123726"/>
+            <a:ext cx="819455" cy="369332"/>
+          </a:xfrm>
+          <a:prstGeom prst="rect">
+            <a:avLst/>
+          </a:prstGeom>
+          <a:noFill/>
+        </p:spPr>
+        <p:txBody>
+          <a:bodyPr wrap="none" rtlCol="0">
+            <a:spAutoFit/>
+          </a:bodyPr>
+          <a:lstStyle/>
+          <a:p>
+            <a:r>
+              <a:rPr lang="zh-CN" altLang="en-US" b="1" dirty="0">
+                <a:latin typeface="Times New Roman" panose="02020603050405020304" pitchFamily="18" charset="0"/>
+                <a:ea typeface="宋体" panose="02010600030101010101" pitchFamily="2" charset="-122"/>
+                <a:cs typeface="Times New Roman" panose="02020603050405020304" pitchFamily="18" charset="0"/>
+              </a:rPr>
+              <a:t>阶段 </a:t>
+            </a:r>
+            <a:r>
+              <a:rPr lang="en-US" altLang="zh-CN" b="1" dirty="0">
+                <a:latin typeface="Times New Roman" panose="02020603050405020304" pitchFamily="18" charset="0"/>
+                <a:ea typeface="宋体" panose="02010600030101010101" pitchFamily="2" charset="-122"/>
+                <a:cs typeface="Times New Roman" panose="02020603050405020304" pitchFamily="18" charset="0"/>
+              </a:rPr>
+              <a:t>2</a:t>
+            </a:r>
+            <a:endParaRPr lang="zh-CN" altLang="en-US" b="1" dirty="0">
+              <a:latin typeface="Times New Roman" panose="02020603050405020304" pitchFamily="18" charset="0"/>
+              <a:ea typeface="宋体" panose="02010600030101010101" pitchFamily="2" charset="-122"/>
+              <a:cs typeface="Times New Roman" panose="02020603050405020304" pitchFamily="18" charset="0"/>
+            </a:endParaRPr>
+          </a:p>
+        </p:txBody>
+      </p:sp>
+      <p:sp>
+        <p:nvSpPr>
+          <p:cNvPr id="73" name="文本框 72">
+            <a:extLst>
+              <a:ext uri="{FF2B5EF4-FFF2-40B4-BE49-F238E27FC236}">
+                <a16:creationId xmlns:a16="http://schemas.microsoft.com/office/drawing/2014/main" id="{ABD1936C-A6C7-4B4D-8616-604DBCEEEEAA}"/>
+              </a:ext>
+            </a:extLst>
+          </p:cNvPr>
+          <p:cNvSpPr txBox="1"/>
+          <p:nvPr/>
+        </p:nvSpPr>
+        <p:spPr>
+          <a:xfrm>
+            <a:off x="244404" y="5099077"/>
+            <a:ext cx="819455" cy="369332"/>
+          </a:xfrm>
+          <a:prstGeom prst="rect">
+            <a:avLst/>
+          </a:prstGeom>
+          <a:noFill/>
+        </p:spPr>
+        <p:txBody>
+          <a:bodyPr wrap="none" rtlCol="0">
+            <a:spAutoFit/>
+          </a:bodyPr>
+          <a:lstStyle/>
+          <a:p>
+            <a:r>
+              <a:rPr lang="zh-CN" altLang="en-US" b="1" dirty="0">
+                <a:latin typeface="Times New Roman" panose="02020603050405020304" pitchFamily="18" charset="0"/>
+                <a:ea typeface="宋体" panose="02010600030101010101" pitchFamily="2" charset="-122"/>
+                <a:cs typeface="Times New Roman" panose="02020603050405020304" pitchFamily="18" charset="0"/>
+              </a:rPr>
+              <a:t>阶段 </a:t>
+            </a:r>
+            <a:r>
+              <a:rPr lang="en-US" altLang="zh-CN" b="1" dirty="0">
+                <a:latin typeface="Times New Roman" panose="02020603050405020304" pitchFamily="18" charset="0"/>
+                <a:ea typeface="宋体" panose="02010600030101010101" pitchFamily="2" charset="-122"/>
+                <a:cs typeface="Times New Roman" panose="02020603050405020304" pitchFamily="18" charset="0"/>
+              </a:rPr>
+              <a:t>3</a:t>
+            </a:r>
+            <a:endParaRPr lang="zh-CN" altLang="en-US" b="1" dirty="0">
+              <a:latin typeface="Times New Roman" panose="02020603050405020304" pitchFamily="18" charset="0"/>
+              <a:ea typeface="宋体" panose="02010600030101010101" pitchFamily="2" charset="-122"/>
+              <a:cs typeface="Times New Roman" panose="02020603050405020304" pitchFamily="18" charset="0"/>
+            </a:endParaRPr>
+          </a:p>
+        </p:txBody>
+      </p:sp>
+      <p:sp>
+        <p:nvSpPr>
+          <p:cNvPr id="74" name="文本框 73">
+            <a:extLst>
+              <a:ext uri="{FF2B5EF4-FFF2-40B4-BE49-F238E27FC236}">
+                <a16:creationId xmlns:a16="http://schemas.microsoft.com/office/drawing/2014/main" id="{9C1C6FFA-C4DF-4675-BBBC-70524E9D2538}"/>
+              </a:ext>
+            </a:extLst>
+          </p:cNvPr>
+          <p:cNvSpPr txBox="1"/>
+          <p:nvPr/>
+        </p:nvSpPr>
+        <p:spPr>
+          <a:xfrm>
+            <a:off x="8484455" y="2449357"/>
+            <a:ext cx="309700" cy="338554"/>
+          </a:xfrm>
+          <a:prstGeom prst="rect">
+            <a:avLst/>
+          </a:prstGeom>
+          <a:noFill/>
+        </p:spPr>
+        <p:txBody>
+          <a:bodyPr wrap="none" rtlCol="0">
+            <a:spAutoFit/>
+          </a:bodyPr>
+          <a:lstStyle/>
+          <a:p>
+            <a:r>
+              <a:rPr lang="en-US" altLang="zh-CN" sz="1600" dirty="0">
+                <a:latin typeface="Times New Roman" panose="02020603050405020304" pitchFamily="18" charset="0"/>
+                <a:cs typeface="Times New Roman" panose="02020603050405020304" pitchFamily="18" charset="0"/>
+              </a:rPr>
+              <a:t>T</a:t>
+            </a:r>
+            <a:endParaRPr lang="zh-CN" altLang="en-US" sz="1600" dirty="0">
+              <a:latin typeface="Times New Roman" panose="02020603050405020304" pitchFamily="18" charset="0"/>
+              <a:cs typeface="Times New Roman" panose="02020603050405020304" pitchFamily="18" charset="0"/>
+            </a:endParaRPr>
+          </a:p>
+        </p:txBody>
+      </p:sp>
+      <p:sp>
+        <p:nvSpPr>
+          <p:cNvPr id="75" name="文本框 74">
+            <a:extLst>
+              <a:ext uri="{FF2B5EF4-FFF2-40B4-BE49-F238E27FC236}">
+                <a16:creationId xmlns:a16="http://schemas.microsoft.com/office/drawing/2014/main" id="{59EB46F6-1515-4F8A-92E9-6D010F74004F}"/>
+              </a:ext>
+            </a:extLst>
+          </p:cNvPr>
+          <p:cNvSpPr txBox="1"/>
+          <p:nvPr/>
+        </p:nvSpPr>
+        <p:spPr>
+          <a:xfrm>
+            <a:off x="8484455" y="3770668"/>
+            <a:ext cx="309700" cy="338554"/>
+          </a:xfrm>
+          <a:prstGeom prst="rect">
+            <a:avLst/>
+          </a:prstGeom>
+          <a:noFill/>
+        </p:spPr>
+        <p:txBody>
+          <a:bodyPr wrap="none" rtlCol="0">
+            <a:spAutoFit/>
+          </a:bodyPr>
+          <a:lstStyle/>
+          <a:p>
+            <a:r>
+              <a:rPr lang="en-US" altLang="zh-CN" sz="1600" dirty="0">
+                <a:latin typeface="Times New Roman" panose="02020603050405020304" pitchFamily="18" charset="0"/>
+                <a:cs typeface="Times New Roman" panose="02020603050405020304" pitchFamily="18" charset="0"/>
+              </a:rPr>
+              <a:t>F</a:t>
+            </a:r>
+            <a:endParaRPr lang="zh-CN" altLang="en-US" sz="1600" dirty="0">
+              <a:latin typeface="Times New Roman" panose="02020603050405020304" pitchFamily="18" charset="0"/>
+              <a:cs typeface="Times New Roman" panose="02020603050405020304" pitchFamily="18" charset="0"/>
+            </a:endParaRPr>
+          </a:p>
+        </p:txBody>
+      </p:sp>
+    </p:spTree>
+    <p:extLst>
+      <p:ext uri="{BB962C8B-B14F-4D97-AF65-F5344CB8AC3E}">
+        <p14:creationId xmlns:p14="http://schemas.microsoft.com/office/powerpoint/2010/main" val="3165787411"/>
       </p:ext>
     </p:extLst>
   </p:cSld>

--- a/docs/thesis/pictures.pptx
+++ b/docs/thesis/pictures.pptx
@@ -5,7 +5,7 @@
     <p:sldMasterId id="2147483648" r:id="rId1"/>
   </p:sldMasterIdLst>
   <p:notesMasterIdLst>
-    <p:notesMasterId r:id="rId13"/>
+    <p:notesMasterId r:id="rId15"/>
   </p:notesMasterIdLst>
   <p:sldIdLst>
     <p:sldId id="259" r:id="rId2"/>
@@ -19,6 +19,8 @@
     <p:sldId id="267" r:id="rId10"/>
     <p:sldId id="268" r:id="rId11"/>
     <p:sldId id="269" r:id="rId12"/>
+    <p:sldId id="271" r:id="rId13"/>
+    <p:sldId id="272" r:id="rId14"/>
   </p:sldIdLst>
   <p:sldSz cx="12192000" cy="6858000"/>
   <p:notesSz cx="6858000" cy="9144000"/>
@@ -10639,6 +10641,4019 @@
     <p:extLst>
       <p:ext uri="{BB962C8B-B14F-4D97-AF65-F5344CB8AC3E}">
         <p14:creationId xmlns:p14="http://schemas.microsoft.com/office/powerpoint/2010/main" val="3165787411"/>
+      </p:ext>
+    </p:extLst>
+  </p:cSld>
+  <p:clrMapOvr>
+    <a:masterClrMapping/>
+  </p:clrMapOvr>
+</p:sld>
+</file>
+
+<file path=ppt/slides/slide12.xml><?xml version="1.0" encoding="utf-8"?>
+<p:sld xmlns:a="http://schemas.openxmlformats.org/drawingml/2006/main" xmlns:r="http://schemas.openxmlformats.org/officeDocument/2006/relationships" xmlns:p="http://schemas.openxmlformats.org/presentationml/2006/main">
+  <p:cSld>
+    <p:spTree>
+      <p:nvGrpSpPr>
+        <p:cNvPr id="1" name=""/>
+        <p:cNvGrpSpPr/>
+        <p:nvPr/>
+      </p:nvGrpSpPr>
+      <p:grpSpPr>
+        <a:xfrm>
+          <a:off x="0" y="0"/>
+          <a:ext cx="0" cy="0"/>
+          <a:chOff x="0" y="0"/>
+          <a:chExt cx="0" cy="0"/>
+        </a:xfrm>
+      </p:grpSpPr>
+      <p:sp>
+        <p:nvSpPr>
+          <p:cNvPr id="40" name="文本框 39">
+            <a:extLst>
+              <a:ext uri="{FF2B5EF4-FFF2-40B4-BE49-F238E27FC236}">
+                <a16:creationId xmlns:a16="http://schemas.microsoft.com/office/drawing/2014/main" id="{EC448833-019C-40E6-A4D3-8422D5E746A7}"/>
+              </a:ext>
+            </a:extLst>
+          </p:cNvPr>
+          <p:cNvSpPr txBox="1"/>
+          <p:nvPr/>
+        </p:nvSpPr>
+        <p:spPr>
+          <a:xfrm>
+            <a:off x="4450666" y="2400586"/>
+            <a:ext cx="3555782" cy="369332"/>
+          </a:xfrm>
+          <a:prstGeom prst="rect">
+            <a:avLst/>
+          </a:prstGeom>
+          <a:noFill/>
+        </p:spPr>
+        <p:txBody>
+          <a:bodyPr wrap="none" rtlCol="0">
+            <a:spAutoFit/>
+          </a:bodyPr>
+          <a:lstStyle/>
+          <a:p>
+            <a:r>
+              <a:rPr lang="zh-CN" altLang="en-US" b="1" dirty="0">
+                <a:latin typeface="Times New Roman" panose="02020603050405020304" pitchFamily="18" charset="0"/>
+                <a:ea typeface="宋体" panose="02010600030101010101" pitchFamily="2" charset="-122"/>
+                <a:cs typeface="Times New Roman" panose="02020603050405020304" pitchFamily="18" charset="0"/>
+              </a:rPr>
+              <a:t>①</a:t>
+            </a:r>
+            <a:r>
+              <a:rPr lang="zh-CN" altLang="en-US" b="1" dirty="0">
+                <a:latin typeface="宋体" panose="02010600030101010101" pitchFamily="2" charset="-122"/>
+                <a:ea typeface="宋体" panose="02010600030101010101" pitchFamily="2" charset="-122"/>
+              </a:rPr>
+              <a:t> 垃圾回收执行前堆空间的状态</a:t>
+            </a:r>
+          </a:p>
+        </p:txBody>
+      </p:sp>
+      <p:grpSp>
+        <p:nvGrpSpPr>
+          <p:cNvPr id="136" name="组合 135">
+            <a:extLst>
+              <a:ext uri="{FF2B5EF4-FFF2-40B4-BE49-F238E27FC236}">
+                <a16:creationId xmlns:a16="http://schemas.microsoft.com/office/drawing/2014/main" id="{3AA17CD7-BD24-465D-84F9-9970B55F1B96}"/>
+              </a:ext>
+            </a:extLst>
+          </p:cNvPr>
+          <p:cNvGrpSpPr/>
+          <p:nvPr/>
+        </p:nvGrpSpPr>
+        <p:grpSpPr>
+          <a:xfrm>
+            <a:off x="296934" y="383086"/>
+            <a:ext cx="10598676" cy="1332843"/>
+            <a:chOff x="296934" y="371210"/>
+            <a:chExt cx="10598676" cy="1332843"/>
+          </a:xfrm>
+        </p:grpSpPr>
+        <p:sp>
+          <p:nvSpPr>
+            <p:cNvPr id="41" name="矩形 40">
+              <a:extLst>
+                <a:ext uri="{FF2B5EF4-FFF2-40B4-BE49-F238E27FC236}">
+                  <a16:creationId xmlns:a16="http://schemas.microsoft.com/office/drawing/2014/main" id="{75DE707B-F47F-4279-BBA0-D6D11ACCC3C9}"/>
+                </a:ext>
+              </a:extLst>
+            </p:cNvPr>
+            <p:cNvSpPr/>
+            <p:nvPr/>
+          </p:nvSpPr>
+          <p:spPr>
+            <a:xfrm>
+              <a:off x="2107819" y="546263"/>
+              <a:ext cx="760021" cy="748146"/>
+            </a:xfrm>
+            <a:prstGeom prst="rect">
+              <a:avLst/>
+            </a:prstGeom>
+            <a:noFill/>
+            <a:ln w="38100">
+              <a:solidFill>
+                <a:schemeClr val="tx1"/>
+              </a:solidFill>
+            </a:ln>
+          </p:spPr>
+          <p:style>
+            <a:lnRef idx="2">
+              <a:schemeClr val="accent1">
+                <a:shade val="50000"/>
+              </a:schemeClr>
+            </a:lnRef>
+            <a:fillRef idx="1">
+              <a:schemeClr val="accent1"/>
+            </a:fillRef>
+            <a:effectRef idx="0">
+              <a:schemeClr val="accent1"/>
+            </a:effectRef>
+            <a:fontRef idx="minor">
+              <a:schemeClr val="lt1"/>
+            </a:fontRef>
+          </p:style>
+          <p:txBody>
+            <a:bodyPr rtlCol="0" anchor="ctr"/>
+            <a:lstStyle/>
+            <a:p>
+              <a:pPr algn="ctr"/>
+              <a:r>
+                <a:rPr lang="en-US" altLang="zh-CN" dirty="0">
+                  <a:solidFill>
+                    <a:schemeClr val="tx1"/>
+                  </a:solidFill>
+                  <a:latin typeface="Times New Roman" panose="02020603050405020304" pitchFamily="18" charset="0"/>
+                  <a:cs typeface="Times New Roman" panose="02020603050405020304" pitchFamily="18" charset="0"/>
+                </a:rPr>
+                <a:t>A</a:t>
+              </a:r>
+              <a:endParaRPr lang="zh-CN" altLang="en-US" dirty="0">
+                <a:solidFill>
+                  <a:schemeClr val="tx1"/>
+                </a:solidFill>
+                <a:latin typeface="Times New Roman" panose="02020603050405020304" pitchFamily="18" charset="0"/>
+                <a:cs typeface="Times New Roman" panose="02020603050405020304" pitchFamily="18" charset="0"/>
+              </a:endParaRPr>
+            </a:p>
+          </p:txBody>
+        </p:sp>
+        <p:sp>
+          <p:nvSpPr>
+            <p:cNvPr id="42" name="矩形 41">
+              <a:extLst>
+                <a:ext uri="{FF2B5EF4-FFF2-40B4-BE49-F238E27FC236}">
+                  <a16:creationId xmlns:a16="http://schemas.microsoft.com/office/drawing/2014/main" id="{2F043756-6C96-4BEB-AD44-7BB274213D51}"/>
+                </a:ext>
+              </a:extLst>
+            </p:cNvPr>
+            <p:cNvSpPr/>
+            <p:nvPr/>
+          </p:nvSpPr>
+          <p:spPr>
+            <a:xfrm>
+              <a:off x="3228058" y="546263"/>
+              <a:ext cx="760021" cy="748146"/>
+            </a:xfrm>
+            <a:prstGeom prst="rect">
+              <a:avLst/>
+            </a:prstGeom>
+            <a:noFill/>
+            <a:ln w="38100">
+              <a:solidFill>
+                <a:schemeClr val="tx1"/>
+              </a:solidFill>
+            </a:ln>
+          </p:spPr>
+          <p:style>
+            <a:lnRef idx="2">
+              <a:schemeClr val="accent1">
+                <a:shade val="50000"/>
+              </a:schemeClr>
+            </a:lnRef>
+            <a:fillRef idx="1">
+              <a:schemeClr val="accent1"/>
+            </a:fillRef>
+            <a:effectRef idx="0">
+              <a:schemeClr val="accent1"/>
+            </a:effectRef>
+            <a:fontRef idx="minor">
+              <a:schemeClr val="lt1"/>
+            </a:fontRef>
+          </p:style>
+          <p:txBody>
+            <a:bodyPr rtlCol="0" anchor="ctr"/>
+            <a:lstStyle/>
+            <a:p>
+              <a:pPr algn="ctr"/>
+              <a:r>
+                <a:rPr lang="en-US" altLang="zh-CN" dirty="0">
+                  <a:solidFill>
+                    <a:schemeClr val="tx1"/>
+                  </a:solidFill>
+                  <a:latin typeface="Times New Roman" panose="02020603050405020304" pitchFamily="18" charset="0"/>
+                  <a:cs typeface="Times New Roman" panose="02020603050405020304" pitchFamily="18" charset="0"/>
+                </a:rPr>
+                <a:t>B</a:t>
+              </a:r>
+              <a:endParaRPr lang="zh-CN" altLang="en-US" dirty="0">
+                <a:solidFill>
+                  <a:schemeClr val="tx1"/>
+                </a:solidFill>
+                <a:latin typeface="Times New Roman" panose="02020603050405020304" pitchFamily="18" charset="0"/>
+                <a:cs typeface="Times New Roman" panose="02020603050405020304" pitchFamily="18" charset="0"/>
+              </a:endParaRPr>
+            </a:p>
+          </p:txBody>
+        </p:sp>
+        <p:sp>
+          <p:nvSpPr>
+            <p:cNvPr id="43" name="矩形 42">
+              <a:extLst>
+                <a:ext uri="{FF2B5EF4-FFF2-40B4-BE49-F238E27FC236}">
+                  <a16:creationId xmlns:a16="http://schemas.microsoft.com/office/drawing/2014/main" id="{1DE08069-AB00-4A95-A035-4987EC21B646}"/>
+                </a:ext>
+              </a:extLst>
+            </p:cNvPr>
+            <p:cNvSpPr/>
+            <p:nvPr/>
+          </p:nvSpPr>
+          <p:spPr>
+            <a:xfrm>
+              <a:off x="4348297" y="546263"/>
+              <a:ext cx="760021" cy="748146"/>
+            </a:xfrm>
+            <a:prstGeom prst="rect">
+              <a:avLst/>
+            </a:prstGeom>
+            <a:noFill/>
+            <a:ln w="38100">
+              <a:solidFill>
+                <a:schemeClr val="tx1"/>
+              </a:solidFill>
+            </a:ln>
+          </p:spPr>
+          <p:style>
+            <a:lnRef idx="2">
+              <a:schemeClr val="accent1">
+                <a:shade val="50000"/>
+              </a:schemeClr>
+            </a:lnRef>
+            <a:fillRef idx="1">
+              <a:schemeClr val="accent1"/>
+            </a:fillRef>
+            <a:effectRef idx="0">
+              <a:schemeClr val="accent1"/>
+            </a:effectRef>
+            <a:fontRef idx="minor">
+              <a:schemeClr val="lt1"/>
+            </a:fontRef>
+          </p:style>
+          <p:txBody>
+            <a:bodyPr rtlCol="0" anchor="ctr"/>
+            <a:lstStyle/>
+            <a:p>
+              <a:pPr algn="ctr"/>
+              <a:r>
+                <a:rPr lang="en-US" altLang="zh-CN" dirty="0">
+                  <a:solidFill>
+                    <a:schemeClr val="tx1"/>
+                  </a:solidFill>
+                  <a:latin typeface="Times New Roman" panose="02020603050405020304" pitchFamily="18" charset="0"/>
+                  <a:cs typeface="Times New Roman" panose="02020603050405020304" pitchFamily="18" charset="0"/>
+                </a:rPr>
+                <a:t>C</a:t>
+              </a:r>
+              <a:endParaRPr lang="zh-CN" altLang="en-US" dirty="0">
+                <a:solidFill>
+                  <a:schemeClr val="tx1"/>
+                </a:solidFill>
+                <a:latin typeface="Times New Roman" panose="02020603050405020304" pitchFamily="18" charset="0"/>
+                <a:cs typeface="Times New Roman" panose="02020603050405020304" pitchFamily="18" charset="0"/>
+              </a:endParaRPr>
+            </a:p>
+          </p:txBody>
+        </p:sp>
+        <p:sp>
+          <p:nvSpPr>
+            <p:cNvPr id="51" name="矩形 50">
+              <a:extLst>
+                <a:ext uri="{FF2B5EF4-FFF2-40B4-BE49-F238E27FC236}">
+                  <a16:creationId xmlns:a16="http://schemas.microsoft.com/office/drawing/2014/main" id="{62583E54-CB6F-4F8D-A9DB-A6FB0CA2DD4F}"/>
+                </a:ext>
+              </a:extLst>
+            </p:cNvPr>
+            <p:cNvSpPr/>
+            <p:nvPr/>
+          </p:nvSpPr>
+          <p:spPr>
+            <a:xfrm>
+              <a:off x="1927710" y="427508"/>
+              <a:ext cx="8967900" cy="1276545"/>
+            </a:xfrm>
+            <a:prstGeom prst="rect">
+              <a:avLst/>
+            </a:prstGeom>
+            <a:noFill/>
+            <a:ln w="19050">
+              <a:solidFill>
+                <a:schemeClr val="tx1"/>
+              </a:solidFill>
+            </a:ln>
+          </p:spPr>
+          <p:style>
+            <a:lnRef idx="2">
+              <a:schemeClr val="accent1">
+                <a:shade val="50000"/>
+              </a:schemeClr>
+            </a:lnRef>
+            <a:fillRef idx="1">
+              <a:schemeClr val="accent1"/>
+            </a:fillRef>
+            <a:effectRef idx="0">
+              <a:schemeClr val="accent1"/>
+            </a:effectRef>
+            <a:fontRef idx="minor">
+              <a:schemeClr val="lt1"/>
+            </a:fontRef>
+          </p:style>
+          <p:txBody>
+            <a:bodyPr rtlCol="0" anchor="ctr"/>
+            <a:lstStyle/>
+            <a:p>
+              <a:pPr algn="ctr"/>
+              <a:endParaRPr lang="zh-CN" altLang="en-US"/>
+            </a:p>
+          </p:txBody>
+        </p:sp>
+        <p:sp>
+          <p:nvSpPr>
+            <p:cNvPr id="53" name="文本框 52">
+              <a:extLst>
+                <a:ext uri="{FF2B5EF4-FFF2-40B4-BE49-F238E27FC236}">
+                  <a16:creationId xmlns:a16="http://schemas.microsoft.com/office/drawing/2014/main" id="{2E4A2911-3C69-455F-8B58-B81B4CA113D3}"/>
+                </a:ext>
+              </a:extLst>
+            </p:cNvPr>
+            <p:cNvSpPr txBox="1"/>
+            <p:nvPr/>
+          </p:nvSpPr>
+          <p:spPr>
+            <a:xfrm>
+              <a:off x="3726656" y="1359534"/>
+              <a:ext cx="862737" cy="338554"/>
+            </a:xfrm>
+            <a:prstGeom prst="rect">
+              <a:avLst/>
+            </a:prstGeom>
+            <a:noFill/>
+          </p:spPr>
+          <p:txBody>
+            <a:bodyPr wrap="none" rtlCol="0">
+              <a:spAutoFit/>
+            </a:bodyPr>
+            <a:lstStyle/>
+            <a:p>
+              <a:r>
+                <a:rPr lang="en-US" altLang="zh-CN" sz="1600" dirty="0">
+                  <a:latin typeface="Times New Roman" panose="02020603050405020304" pitchFamily="18" charset="0"/>
+                  <a:ea typeface="宋体" panose="02010600030101010101" pitchFamily="2" charset="-122"/>
+                  <a:cs typeface="Times New Roman" panose="02020603050405020304" pitchFamily="18" charset="0"/>
+                </a:rPr>
+                <a:t>Eden </a:t>
+              </a:r>
+              <a:r>
+                <a:rPr lang="zh-CN" altLang="en-US" sz="1600" dirty="0">
+                  <a:latin typeface="Times New Roman" panose="02020603050405020304" pitchFamily="18" charset="0"/>
+                  <a:ea typeface="宋体" panose="02010600030101010101" pitchFamily="2" charset="-122"/>
+                  <a:cs typeface="Times New Roman" panose="02020603050405020304" pitchFamily="18" charset="0"/>
+                </a:rPr>
+                <a:t>区</a:t>
+              </a:r>
+            </a:p>
+          </p:txBody>
+        </p:sp>
+        <p:sp>
+          <p:nvSpPr>
+            <p:cNvPr id="54" name="文本框 53">
+              <a:extLst>
+                <a:ext uri="{FF2B5EF4-FFF2-40B4-BE49-F238E27FC236}">
+                  <a16:creationId xmlns:a16="http://schemas.microsoft.com/office/drawing/2014/main" id="{B7530B38-ADCF-47BF-AD57-366B861F2C8D}"/>
+                </a:ext>
+              </a:extLst>
+            </p:cNvPr>
+            <p:cNvSpPr txBox="1"/>
+            <p:nvPr/>
+          </p:nvSpPr>
+          <p:spPr>
+            <a:xfrm>
+              <a:off x="8073188" y="1359534"/>
+              <a:ext cx="1160895" cy="338554"/>
+            </a:xfrm>
+            <a:prstGeom prst="rect">
+              <a:avLst/>
+            </a:prstGeom>
+            <a:noFill/>
+          </p:spPr>
+          <p:txBody>
+            <a:bodyPr wrap="none" rtlCol="0">
+              <a:spAutoFit/>
+            </a:bodyPr>
+            <a:lstStyle/>
+            <a:p>
+              <a:r>
+                <a:rPr lang="en-US" altLang="zh-CN" sz="1600" dirty="0">
+                  <a:latin typeface="Times New Roman" panose="02020603050405020304" pitchFamily="18" charset="0"/>
+                  <a:ea typeface="宋体" panose="02010600030101010101" pitchFamily="2" charset="-122"/>
+                  <a:cs typeface="Times New Roman" panose="02020603050405020304" pitchFamily="18" charset="0"/>
+                </a:rPr>
+                <a:t>Survivor </a:t>
+              </a:r>
+              <a:r>
+                <a:rPr lang="zh-CN" altLang="en-US" sz="1600" dirty="0">
+                  <a:latin typeface="Times New Roman" panose="02020603050405020304" pitchFamily="18" charset="0"/>
+                  <a:ea typeface="宋体" panose="02010600030101010101" pitchFamily="2" charset="-122"/>
+                  <a:cs typeface="Times New Roman" panose="02020603050405020304" pitchFamily="18" charset="0"/>
+                </a:rPr>
+                <a:t>区</a:t>
+              </a:r>
+            </a:p>
+          </p:txBody>
+        </p:sp>
+        <p:sp>
+          <p:nvSpPr>
+            <p:cNvPr id="49" name="椭圆 48">
+              <a:extLst>
+                <a:ext uri="{FF2B5EF4-FFF2-40B4-BE49-F238E27FC236}">
+                  <a16:creationId xmlns:a16="http://schemas.microsoft.com/office/drawing/2014/main" id="{AF9FEBE2-A0A2-49CE-86DB-8C9BA2A69B33}"/>
+                </a:ext>
+              </a:extLst>
+            </p:cNvPr>
+            <p:cNvSpPr/>
+            <p:nvPr/>
+          </p:nvSpPr>
+          <p:spPr>
+            <a:xfrm>
+              <a:off x="296934" y="371210"/>
+              <a:ext cx="1250766" cy="1098252"/>
+            </a:xfrm>
+            <a:prstGeom prst="ellipse">
+              <a:avLst/>
+            </a:prstGeom>
+            <a:noFill/>
+            <a:ln w="28575">
+              <a:solidFill>
+                <a:schemeClr val="tx1"/>
+              </a:solidFill>
+            </a:ln>
+          </p:spPr>
+          <p:style>
+            <a:lnRef idx="2">
+              <a:schemeClr val="accent1">
+                <a:shade val="50000"/>
+              </a:schemeClr>
+            </a:lnRef>
+            <a:fillRef idx="1">
+              <a:schemeClr val="accent1"/>
+            </a:fillRef>
+            <a:effectRef idx="0">
+              <a:schemeClr val="accent1"/>
+            </a:effectRef>
+            <a:fontRef idx="minor">
+              <a:schemeClr val="lt1"/>
+            </a:fontRef>
+          </p:style>
+          <p:txBody>
+            <a:bodyPr rtlCol="0" anchor="ctr"/>
+            <a:lstStyle/>
+            <a:p>
+              <a:pPr algn="ctr"/>
+              <a:r>
+                <a:rPr lang="zh-CN" altLang="en-US" dirty="0">
+                  <a:solidFill>
+                    <a:schemeClr val="tx1"/>
+                  </a:solidFill>
+                  <a:latin typeface="宋体" panose="02010600030101010101" pitchFamily="2" charset="-122"/>
+                  <a:ea typeface="宋体" panose="02010600030101010101" pitchFamily="2" charset="-122"/>
+                </a:rPr>
+                <a:t>根集合</a:t>
+              </a:r>
+            </a:p>
+          </p:txBody>
+        </p:sp>
+        <p:sp>
+          <p:nvSpPr>
+            <p:cNvPr id="56" name="矩形 55">
+              <a:extLst>
+                <a:ext uri="{FF2B5EF4-FFF2-40B4-BE49-F238E27FC236}">
+                  <a16:creationId xmlns:a16="http://schemas.microsoft.com/office/drawing/2014/main" id="{C97CC101-FB41-4002-85BB-A5A6DF2D73EF}"/>
+                </a:ext>
+              </a:extLst>
+            </p:cNvPr>
+            <p:cNvSpPr/>
+            <p:nvPr/>
+          </p:nvSpPr>
+          <p:spPr>
+            <a:xfrm>
+              <a:off x="5468536" y="546263"/>
+              <a:ext cx="760021" cy="748146"/>
+            </a:xfrm>
+            <a:prstGeom prst="rect">
+              <a:avLst/>
+            </a:prstGeom>
+            <a:noFill/>
+            <a:ln w="38100">
+              <a:solidFill>
+                <a:schemeClr val="tx1"/>
+              </a:solidFill>
+            </a:ln>
+          </p:spPr>
+          <p:style>
+            <a:lnRef idx="2">
+              <a:schemeClr val="accent1">
+                <a:shade val="50000"/>
+              </a:schemeClr>
+            </a:lnRef>
+            <a:fillRef idx="1">
+              <a:schemeClr val="accent1"/>
+            </a:fillRef>
+            <a:effectRef idx="0">
+              <a:schemeClr val="accent1"/>
+            </a:effectRef>
+            <a:fontRef idx="minor">
+              <a:schemeClr val="lt1"/>
+            </a:fontRef>
+          </p:style>
+          <p:txBody>
+            <a:bodyPr rtlCol="0" anchor="ctr"/>
+            <a:lstStyle/>
+            <a:p>
+              <a:pPr algn="ctr"/>
+              <a:r>
+                <a:rPr lang="en-US" altLang="zh-CN" dirty="0">
+                  <a:solidFill>
+                    <a:schemeClr val="tx1"/>
+                  </a:solidFill>
+                  <a:latin typeface="Times New Roman" panose="02020603050405020304" pitchFamily="18" charset="0"/>
+                  <a:cs typeface="Times New Roman" panose="02020603050405020304" pitchFamily="18" charset="0"/>
+                </a:rPr>
+                <a:t>D</a:t>
+              </a:r>
+              <a:endParaRPr lang="zh-CN" altLang="en-US" dirty="0">
+                <a:solidFill>
+                  <a:schemeClr val="tx1"/>
+                </a:solidFill>
+                <a:latin typeface="Times New Roman" panose="02020603050405020304" pitchFamily="18" charset="0"/>
+                <a:cs typeface="Times New Roman" panose="02020603050405020304" pitchFamily="18" charset="0"/>
+              </a:endParaRPr>
+            </a:p>
+          </p:txBody>
+        </p:sp>
+        <p:cxnSp>
+          <p:nvCxnSpPr>
+            <p:cNvPr id="3" name="直接连接符 2">
+              <a:extLst>
+                <a:ext uri="{FF2B5EF4-FFF2-40B4-BE49-F238E27FC236}">
+                  <a16:creationId xmlns:a16="http://schemas.microsoft.com/office/drawing/2014/main" id="{4C8F4881-5FB2-456F-A988-A8861E7F1D31}"/>
+                </a:ext>
+              </a:extLst>
+            </p:cNvPr>
+            <p:cNvCxnSpPr>
+              <a:stCxn id="51" idx="0"/>
+              <a:endCxn id="51" idx="2"/>
+            </p:cNvCxnSpPr>
+            <p:nvPr/>
+          </p:nvCxnSpPr>
+          <p:spPr>
+            <a:xfrm>
+              <a:off x="6411660" y="427508"/>
+              <a:ext cx="0" cy="1276545"/>
+            </a:xfrm>
+            <a:prstGeom prst="line">
+              <a:avLst/>
+            </a:prstGeom>
+            <a:ln w="19050">
+              <a:solidFill>
+                <a:schemeClr val="tx1"/>
+              </a:solidFill>
+            </a:ln>
+          </p:spPr>
+          <p:style>
+            <a:lnRef idx="1">
+              <a:schemeClr val="accent1"/>
+            </a:lnRef>
+            <a:fillRef idx="0">
+              <a:schemeClr val="accent1"/>
+            </a:fillRef>
+            <a:effectRef idx="0">
+              <a:schemeClr val="accent1"/>
+            </a:effectRef>
+            <a:fontRef idx="minor">
+              <a:schemeClr val="tx1"/>
+            </a:fontRef>
+          </p:style>
+        </p:cxnSp>
+        <p:cxnSp>
+          <p:nvCxnSpPr>
+            <p:cNvPr id="8" name="直接箭头连接符 7">
+              <a:extLst>
+                <a:ext uri="{FF2B5EF4-FFF2-40B4-BE49-F238E27FC236}">
+                  <a16:creationId xmlns:a16="http://schemas.microsoft.com/office/drawing/2014/main" id="{8476279D-60C2-4E50-9AA8-E2B59916824F}"/>
+                </a:ext>
+              </a:extLst>
+            </p:cNvPr>
+            <p:cNvCxnSpPr>
+              <a:stCxn id="42" idx="1"/>
+              <a:endCxn id="41" idx="3"/>
+            </p:cNvCxnSpPr>
+            <p:nvPr/>
+          </p:nvCxnSpPr>
+          <p:spPr>
+            <a:xfrm flipH="1">
+              <a:off x="2867840" y="920336"/>
+              <a:ext cx="360218" cy="0"/>
+            </a:xfrm>
+            <a:prstGeom prst="straightConnector1">
+              <a:avLst/>
+            </a:prstGeom>
+            <a:ln w="28575">
+              <a:solidFill>
+                <a:schemeClr val="tx1"/>
+              </a:solidFill>
+              <a:tailEnd type="triangle"/>
+            </a:ln>
+          </p:spPr>
+          <p:style>
+            <a:lnRef idx="1">
+              <a:schemeClr val="accent1"/>
+            </a:lnRef>
+            <a:fillRef idx="0">
+              <a:schemeClr val="accent1"/>
+            </a:fillRef>
+            <a:effectRef idx="0">
+              <a:schemeClr val="accent1"/>
+            </a:effectRef>
+            <a:fontRef idx="minor">
+              <a:schemeClr val="tx1"/>
+            </a:fontRef>
+          </p:style>
+        </p:cxnSp>
+        <p:cxnSp>
+          <p:nvCxnSpPr>
+            <p:cNvPr id="13" name="直接箭头连接符 12">
+              <a:extLst>
+                <a:ext uri="{FF2B5EF4-FFF2-40B4-BE49-F238E27FC236}">
+                  <a16:creationId xmlns:a16="http://schemas.microsoft.com/office/drawing/2014/main" id="{D437C2CD-8215-4C09-A347-196B9434180E}"/>
+                </a:ext>
+              </a:extLst>
+            </p:cNvPr>
+            <p:cNvCxnSpPr>
+              <a:stCxn id="43" idx="3"/>
+              <a:endCxn id="56" idx="1"/>
+            </p:cNvCxnSpPr>
+            <p:nvPr/>
+          </p:nvCxnSpPr>
+          <p:spPr>
+            <a:xfrm>
+              <a:off x="5108318" y="920336"/>
+              <a:ext cx="360218" cy="0"/>
+            </a:xfrm>
+            <a:prstGeom prst="straightConnector1">
+              <a:avLst/>
+            </a:prstGeom>
+            <a:ln w="28575">
+              <a:solidFill>
+                <a:schemeClr val="tx1"/>
+              </a:solidFill>
+              <a:tailEnd type="triangle"/>
+            </a:ln>
+          </p:spPr>
+          <p:style>
+            <a:lnRef idx="1">
+              <a:schemeClr val="accent1"/>
+            </a:lnRef>
+            <a:fillRef idx="0">
+              <a:schemeClr val="accent1"/>
+            </a:fillRef>
+            <a:effectRef idx="0">
+              <a:schemeClr val="accent1"/>
+            </a:effectRef>
+            <a:fontRef idx="minor">
+              <a:schemeClr val="tx1"/>
+            </a:fontRef>
+          </p:style>
+        </p:cxnSp>
+        <p:cxnSp>
+          <p:nvCxnSpPr>
+            <p:cNvPr id="16" name="连接符: 肘形 15">
+              <a:extLst>
+                <a:ext uri="{FF2B5EF4-FFF2-40B4-BE49-F238E27FC236}">
+                  <a16:creationId xmlns:a16="http://schemas.microsoft.com/office/drawing/2014/main" id="{A60E119A-CA1F-42DE-ADB5-3967B4F8A3F0}"/>
+                </a:ext>
+              </a:extLst>
+            </p:cNvPr>
+            <p:cNvCxnSpPr>
+              <a:stCxn id="41" idx="0"/>
+              <a:endCxn id="56" idx="0"/>
+            </p:cNvCxnSpPr>
+            <p:nvPr/>
+          </p:nvCxnSpPr>
+          <p:spPr>
+            <a:xfrm rot="5400000" flipH="1" flipV="1">
+              <a:off x="4168188" y="-1134095"/>
+              <a:ext cx="12700" cy="3360717"/>
+            </a:xfrm>
+            <a:prstGeom prst="bentConnector3">
+              <a:avLst>
+                <a:gd name="adj1" fmla="val 3436370"/>
+              </a:avLst>
+            </a:prstGeom>
+            <a:ln w="28575">
+              <a:solidFill>
+                <a:schemeClr val="tx1"/>
+              </a:solidFill>
+              <a:tailEnd type="triangle"/>
+            </a:ln>
+          </p:spPr>
+          <p:style>
+            <a:lnRef idx="1">
+              <a:schemeClr val="accent1"/>
+            </a:lnRef>
+            <a:fillRef idx="0">
+              <a:schemeClr val="accent1"/>
+            </a:fillRef>
+            <a:effectRef idx="0">
+              <a:schemeClr val="accent1"/>
+            </a:effectRef>
+            <a:fontRef idx="minor">
+              <a:schemeClr val="tx1"/>
+            </a:fontRef>
+          </p:style>
+        </p:cxnSp>
+        <p:cxnSp>
+          <p:nvCxnSpPr>
+            <p:cNvPr id="22" name="连接符: 肘形 21">
+              <a:extLst>
+                <a:ext uri="{FF2B5EF4-FFF2-40B4-BE49-F238E27FC236}">
+                  <a16:creationId xmlns:a16="http://schemas.microsoft.com/office/drawing/2014/main" id="{B57A08E2-245F-4A0F-AF8E-BA4D268DBF15}"/>
+                </a:ext>
+              </a:extLst>
+            </p:cNvPr>
+            <p:cNvCxnSpPr>
+              <a:cxnSpLocks/>
+              <a:stCxn id="49" idx="5"/>
+              <a:endCxn id="41" idx="2"/>
+            </p:cNvCxnSpPr>
+            <p:nvPr/>
+          </p:nvCxnSpPr>
+          <p:spPr>
+            <a:xfrm rot="5400000" flipH="1" flipV="1">
+              <a:off x="1919071" y="739868"/>
+              <a:ext cx="14218" cy="1123300"/>
+            </a:xfrm>
+            <a:prstGeom prst="bentConnector3">
+              <a:avLst>
+                <a:gd name="adj1" fmla="val -4325967"/>
+              </a:avLst>
+            </a:prstGeom>
+            <a:ln w="28575">
+              <a:solidFill>
+                <a:schemeClr val="tx1"/>
+              </a:solidFill>
+              <a:tailEnd type="triangle"/>
+            </a:ln>
+          </p:spPr>
+          <p:style>
+            <a:lnRef idx="1">
+              <a:schemeClr val="accent1"/>
+            </a:lnRef>
+            <a:fillRef idx="0">
+              <a:schemeClr val="accent1"/>
+            </a:fillRef>
+            <a:effectRef idx="0">
+              <a:schemeClr val="accent1"/>
+            </a:effectRef>
+            <a:fontRef idx="minor">
+              <a:schemeClr val="tx1"/>
+            </a:fontRef>
+          </p:style>
+        </p:cxnSp>
+        <p:cxnSp>
+          <p:nvCxnSpPr>
+            <p:cNvPr id="70" name="连接符: 肘形 69">
+              <a:extLst>
+                <a:ext uri="{FF2B5EF4-FFF2-40B4-BE49-F238E27FC236}">
+                  <a16:creationId xmlns:a16="http://schemas.microsoft.com/office/drawing/2014/main" id="{F4A8CB6F-0476-4C19-AB50-EF698369F015}"/>
+                </a:ext>
+              </a:extLst>
+            </p:cNvPr>
+            <p:cNvCxnSpPr>
+              <a:cxnSpLocks/>
+              <a:stCxn id="49" idx="4"/>
+              <a:endCxn id="42" idx="2"/>
+            </p:cNvCxnSpPr>
+            <p:nvPr/>
+          </p:nvCxnSpPr>
+          <p:spPr>
+            <a:xfrm rot="5400000" flipH="1" flipV="1">
+              <a:off x="2177666" y="39060"/>
+              <a:ext cx="175053" cy="2685752"/>
+            </a:xfrm>
+            <a:prstGeom prst="bentConnector3">
+              <a:avLst>
+                <a:gd name="adj1" fmla="val -442647"/>
+              </a:avLst>
+            </a:prstGeom>
+            <a:ln w="28575">
+              <a:solidFill>
+                <a:schemeClr val="tx1"/>
+              </a:solidFill>
+              <a:tailEnd type="triangle"/>
+            </a:ln>
+          </p:spPr>
+          <p:style>
+            <a:lnRef idx="1">
+              <a:schemeClr val="accent1"/>
+            </a:lnRef>
+            <a:fillRef idx="0">
+              <a:schemeClr val="accent1"/>
+            </a:fillRef>
+            <a:effectRef idx="0">
+              <a:schemeClr val="accent1"/>
+            </a:effectRef>
+            <a:fontRef idx="minor">
+              <a:schemeClr val="tx1"/>
+            </a:fontRef>
+          </p:style>
+        </p:cxnSp>
+      </p:grpSp>
+      <p:sp>
+        <p:nvSpPr>
+          <p:cNvPr id="85" name="文本框 84">
+            <a:extLst>
+              <a:ext uri="{FF2B5EF4-FFF2-40B4-BE49-F238E27FC236}">
+                <a16:creationId xmlns:a16="http://schemas.microsoft.com/office/drawing/2014/main" id="{023C2200-4BCF-4801-832B-5762EC801BD7}"/>
+              </a:ext>
+            </a:extLst>
+          </p:cNvPr>
+          <p:cNvSpPr txBox="1"/>
+          <p:nvPr/>
+        </p:nvSpPr>
+        <p:spPr>
+          <a:xfrm>
+            <a:off x="4589393" y="6467094"/>
+            <a:ext cx="3232616" cy="369332"/>
+          </a:xfrm>
+          <a:prstGeom prst="rect">
+            <a:avLst/>
+          </a:prstGeom>
+          <a:noFill/>
+        </p:spPr>
+        <p:txBody>
+          <a:bodyPr wrap="none" rtlCol="0">
+            <a:spAutoFit/>
+          </a:bodyPr>
+          <a:lstStyle/>
+          <a:p>
+            <a:r>
+              <a:rPr lang="zh-CN" altLang="en-US" b="1" dirty="0">
+                <a:latin typeface="Times New Roman" panose="02020603050405020304" pitchFamily="18" charset="0"/>
+                <a:ea typeface="宋体" panose="02010600030101010101" pitchFamily="2" charset="-122"/>
+                <a:cs typeface="Times New Roman" panose="02020603050405020304" pitchFamily="18" charset="0"/>
+              </a:rPr>
+              <a:t>② </a:t>
+            </a:r>
+            <a:r>
+              <a:rPr lang="zh-CN" altLang="en-US" b="1" dirty="0">
+                <a:latin typeface="宋体" panose="02010600030101010101" pitchFamily="2" charset="-122"/>
+                <a:ea typeface="宋体" panose="02010600030101010101" pitchFamily="2" charset="-122"/>
+              </a:rPr>
+              <a:t>从根集合出发复制存活对象</a:t>
+            </a:r>
+          </a:p>
+        </p:txBody>
+      </p:sp>
+      <p:grpSp>
+        <p:nvGrpSpPr>
+          <p:cNvPr id="135" name="组合 134">
+            <a:extLst>
+              <a:ext uri="{FF2B5EF4-FFF2-40B4-BE49-F238E27FC236}">
+                <a16:creationId xmlns:a16="http://schemas.microsoft.com/office/drawing/2014/main" id="{7DE5E61B-C6DD-41BD-834D-2BDA8821AF3F}"/>
+              </a:ext>
+            </a:extLst>
+          </p:cNvPr>
+          <p:cNvGrpSpPr/>
+          <p:nvPr/>
+        </p:nvGrpSpPr>
+        <p:grpSpPr>
+          <a:xfrm>
+            <a:off x="296934" y="3413562"/>
+            <a:ext cx="10598676" cy="2942283"/>
+            <a:chOff x="296934" y="3486440"/>
+            <a:chExt cx="10598676" cy="2942283"/>
+          </a:xfrm>
+        </p:grpSpPr>
+        <p:sp>
+          <p:nvSpPr>
+            <p:cNvPr id="78" name="矩形 77">
+              <a:extLst>
+                <a:ext uri="{FF2B5EF4-FFF2-40B4-BE49-F238E27FC236}">
+                  <a16:creationId xmlns:a16="http://schemas.microsoft.com/office/drawing/2014/main" id="{901B4DC3-9D4B-4270-817D-1CCF268B77DD}"/>
+                </a:ext>
+              </a:extLst>
+            </p:cNvPr>
+            <p:cNvSpPr/>
+            <p:nvPr/>
+          </p:nvSpPr>
+          <p:spPr>
+            <a:xfrm>
+              <a:off x="2107819" y="4041568"/>
+              <a:ext cx="760021" cy="748146"/>
+            </a:xfrm>
+            <a:prstGeom prst="rect">
+              <a:avLst/>
+            </a:prstGeom>
+            <a:noFill/>
+            <a:ln w="38100">
+              <a:solidFill>
+                <a:schemeClr val="tx1"/>
+              </a:solidFill>
+              <a:prstDash val="sysDot"/>
+            </a:ln>
+          </p:spPr>
+          <p:style>
+            <a:lnRef idx="2">
+              <a:schemeClr val="accent1">
+                <a:shade val="50000"/>
+              </a:schemeClr>
+            </a:lnRef>
+            <a:fillRef idx="1">
+              <a:schemeClr val="accent1"/>
+            </a:fillRef>
+            <a:effectRef idx="0">
+              <a:schemeClr val="accent1"/>
+            </a:effectRef>
+            <a:fontRef idx="minor">
+              <a:schemeClr val="lt1"/>
+            </a:fontRef>
+          </p:style>
+          <p:txBody>
+            <a:bodyPr rtlCol="0" anchor="ctr"/>
+            <a:lstStyle/>
+            <a:p>
+              <a:pPr algn="ctr"/>
+              <a:r>
+                <a:rPr lang="en-US" altLang="zh-CN" dirty="0">
+                  <a:solidFill>
+                    <a:schemeClr val="tx1"/>
+                  </a:solidFill>
+                  <a:latin typeface="Times New Roman" panose="02020603050405020304" pitchFamily="18" charset="0"/>
+                  <a:cs typeface="Times New Roman" panose="02020603050405020304" pitchFamily="18" charset="0"/>
+                </a:rPr>
+                <a:t>A</a:t>
+              </a:r>
+              <a:endParaRPr lang="zh-CN" altLang="en-US" dirty="0">
+                <a:solidFill>
+                  <a:schemeClr val="tx1"/>
+                </a:solidFill>
+                <a:latin typeface="Times New Roman" panose="02020603050405020304" pitchFamily="18" charset="0"/>
+                <a:cs typeface="Times New Roman" panose="02020603050405020304" pitchFamily="18" charset="0"/>
+              </a:endParaRPr>
+            </a:p>
+          </p:txBody>
+        </p:sp>
+        <p:sp>
+          <p:nvSpPr>
+            <p:cNvPr id="79" name="矩形 78">
+              <a:extLst>
+                <a:ext uri="{FF2B5EF4-FFF2-40B4-BE49-F238E27FC236}">
+                  <a16:creationId xmlns:a16="http://schemas.microsoft.com/office/drawing/2014/main" id="{510077A4-3C37-4477-9A1E-770D00B5B0D9}"/>
+                </a:ext>
+              </a:extLst>
+            </p:cNvPr>
+            <p:cNvSpPr/>
+            <p:nvPr/>
+          </p:nvSpPr>
+          <p:spPr>
+            <a:xfrm>
+              <a:off x="3228058" y="4041568"/>
+              <a:ext cx="760021" cy="748146"/>
+            </a:xfrm>
+            <a:prstGeom prst="rect">
+              <a:avLst/>
+            </a:prstGeom>
+            <a:noFill/>
+            <a:ln w="38100">
+              <a:solidFill>
+                <a:schemeClr val="tx1"/>
+              </a:solidFill>
+              <a:prstDash val="sysDot"/>
+            </a:ln>
+          </p:spPr>
+          <p:style>
+            <a:lnRef idx="2">
+              <a:schemeClr val="accent1">
+                <a:shade val="50000"/>
+              </a:schemeClr>
+            </a:lnRef>
+            <a:fillRef idx="1">
+              <a:schemeClr val="accent1"/>
+            </a:fillRef>
+            <a:effectRef idx="0">
+              <a:schemeClr val="accent1"/>
+            </a:effectRef>
+            <a:fontRef idx="minor">
+              <a:schemeClr val="lt1"/>
+            </a:fontRef>
+          </p:style>
+          <p:txBody>
+            <a:bodyPr rtlCol="0" anchor="ctr"/>
+            <a:lstStyle/>
+            <a:p>
+              <a:pPr algn="ctr"/>
+              <a:r>
+                <a:rPr lang="en-US" altLang="zh-CN" dirty="0">
+                  <a:solidFill>
+                    <a:schemeClr val="tx1"/>
+                  </a:solidFill>
+                  <a:latin typeface="Times New Roman" panose="02020603050405020304" pitchFamily="18" charset="0"/>
+                  <a:cs typeface="Times New Roman" panose="02020603050405020304" pitchFamily="18" charset="0"/>
+                </a:rPr>
+                <a:t>B</a:t>
+              </a:r>
+              <a:endParaRPr lang="zh-CN" altLang="en-US" dirty="0">
+                <a:solidFill>
+                  <a:schemeClr val="tx1"/>
+                </a:solidFill>
+                <a:latin typeface="Times New Roman" panose="02020603050405020304" pitchFamily="18" charset="0"/>
+                <a:cs typeface="Times New Roman" panose="02020603050405020304" pitchFamily="18" charset="0"/>
+              </a:endParaRPr>
+            </a:p>
+          </p:txBody>
+        </p:sp>
+        <p:sp>
+          <p:nvSpPr>
+            <p:cNvPr id="80" name="矩形 79">
+              <a:extLst>
+                <a:ext uri="{FF2B5EF4-FFF2-40B4-BE49-F238E27FC236}">
+                  <a16:creationId xmlns:a16="http://schemas.microsoft.com/office/drawing/2014/main" id="{7D86105B-274B-4155-A273-D047ED239A56}"/>
+                </a:ext>
+              </a:extLst>
+            </p:cNvPr>
+            <p:cNvSpPr/>
+            <p:nvPr/>
+          </p:nvSpPr>
+          <p:spPr>
+            <a:xfrm>
+              <a:off x="4348297" y="4041568"/>
+              <a:ext cx="760021" cy="748146"/>
+            </a:xfrm>
+            <a:prstGeom prst="rect">
+              <a:avLst/>
+            </a:prstGeom>
+            <a:noFill/>
+            <a:ln w="38100">
+              <a:solidFill>
+                <a:schemeClr val="tx1"/>
+              </a:solidFill>
+            </a:ln>
+          </p:spPr>
+          <p:style>
+            <a:lnRef idx="2">
+              <a:schemeClr val="accent1">
+                <a:shade val="50000"/>
+              </a:schemeClr>
+            </a:lnRef>
+            <a:fillRef idx="1">
+              <a:schemeClr val="accent1"/>
+            </a:fillRef>
+            <a:effectRef idx="0">
+              <a:schemeClr val="accent1"/>
+            </a:effectRef>
+            <a:fontRef idx="minor">
+              <a:schemeClr val="lt1"/>
+            </a:fontRef>
+          </p:style>
+          <p:txBody>
+            <a:bodyPr rtlCol="0" anchor="ctr"/>
+            <a:lstStyle/>
+            <a:p>
+              <a:pPr algn="ctr"/>
+              <a:r>
+                <a:rPr lang="en-US" altLang="zh-CN" dirty="0">
+                  <a:solidFill>
+                    <a:schemeClr val="tx1"/>
+                  </a:solidFill>
+                  <a:latin typeface="Times New Roman" panose="02020603050405020304" pitchFamily="18" charset="0"/>
+                  <a:cs typeface="Times New Roman" panose="02020603050405020304" pitchFamily="18" charset="0"/>
+                </a:rPr>
+                <a:t>C</a:t>
+              </a:r>
+              <a:endParaRPr lang="zh-CN" altLang="en-US" dirty="0">
+                <a:solidFill>
+                  <a:schemeClr val="tx1"/>
+                </a:solidFill>
+                <a:latin typeface="Times New Roman" panose="02020603050405020304" pitchFamily="18" charset="0"/>
+                <a:cs typeface="Times New Roman" panose="02020603050405020304" pitchFamily="18" charset="0"/>
+              </a:endParaRPr>
+            </a:p>
+          </p:txBody>
+        </p:sp>
+        <p:sp>
+          <p:nvSpPr>
+            <p:cNvPr id="81" name="矩形 80">
+              <a:extLst>
+                <a:ext uri="{FF2B5EF4-FFF2-40B4-BE49-F238E27FC236}">
+                  <a16:creationId xmlns:a16="http://schemas.microsoft.com/office/drawing/2014/main" id="{D9856EA2-5900-4FED-A157-938A14B84D68}"/>
+                </a:ext>
+              </a:extLst>
+            </p:cNvPr>
+            <p:cNvSpPr/>
+            <p:nvPr/>
+          </p:nvSpPr>
+          <p:spPr>
+            <a:xfrm>
+              <a:off x="1927710" y="3922813"/>
+              <a:ext cx="8967900" cy="1276545"/>
+            </a:xfrm>
+            <a:prstGeom prst="rect">
+              <a:avLst/>
+            </a:prstGeom>
+            <a:noFill/>
+            <a:ln w="19050">
+              <a:solidFill>
+                <a:schemeClr val="tx1"/>
+              </a:solidFill>
+            </a:ln>
+          </p:spPr>
+          <p:style>
+            <a:lnRef idx="2">
+              <a:schemeClr val="accent1">
+                <a:shade val="50000"/>
+              </a:schemeClr>
+            </a:lnRef>
+            <a:fillRef idx="1">
+              <a:schemeClr val="accent1"/>
+            </a:fillRef>
+            <a:effectRef idx="0">
+              <a:schemeClr val="accent1"/>
+            </a:effectRef>
+            <a:fontRef idx="minor">
+              <a:schemeClr val="lt1"/>
+            </a:fontRef>
+          </p:style>
+          <p:txBody>
+            <a:bodyPr rtlCol="0" anchor="ctr"/>
+            <a:lstStyle/>
+            <a:p>
+              <a:pPr algn="ctr"/>
+              <a:endParaRPr lang="zh-CN" altLang="en-US"/>
+            </a:p>
+          </p:txBody>
+        </p:sp>
+        <p:sp>
+          <p:nvSpPr>
+            <p:cNvPr id="82" name="文本框 81">
+              <a:extLst>
+                <a:ext uri="{FF2B5EF4-FFF2-40B4-BE49-F238E27FC236}">
+                  <a16:creationId xmlns:a16="http://schemas.microsoft.com/office/drawing/2014/main" id="{C44E6A69-5A3A-4F16-B5B0-D385DFE085F5}"/>
+                </a:ext>
+              </a:extLst>
+            </p:cNvPr>
+            <p:cNvSpPr txBox="1"/>
+            <p:nvPr/>
+          </p:nvSpPr>
+          <p:spPr>
+            <a:xfrm>
+              <a:off x="3726656" y="4854839"/>
+              <a:ext cx="862737" cy="338554"/>
+            </a:xfrm>
+            <a:prstGeom prst="rect">
+              <a:avLst/>
+            </a:prstGeom>
+            <a:noFill/>
+          </p:spPr>
+          <p:txBody>
+            <a:bodyPr wrap="none" rtlCol="0">
+              <a:spAutoFit/>
+            </a:bodyPr>
+            <a:lstStyle/>
+            <a:p>
+              <a:r>
+                <a:rPr lang="en-US" altLang="zh-CN" sz="1600" dirty="0">
+                  <a:latin typeface="Times New Roman" panose="02020603050405020304" pitchFamily="18" charset="0"/>
+                  <a:ea typeface="宋体" panose="02010600030101010101" pitchFamily="2" charset="-122"/>
+                  <a:cs typeface="Times New Roman" panose="02020603050405020304" pitchFamily="18" charset="0"/>
+                </a:rPr>
+                <a:t>Eden </a:t>
+              </a:r>
+              <a:r>
+                <a:rPr lang="zh-CN" altLang="en-US" sz="1600" dirty="0">
+                  <a:latin typeface="Times New Roman" panose="02020603050405020304" pitchFamily="18" charset="0"/>
+                  <a:ea typeface="宋体" panose="02010600030101010101" pitchFamily="2" charset="-122"/>
+                  <a:cs typeface="Times New Roman" panose="02020603050405020304" pitchFamily="18" charset="0"/>
+                </a:rPr>
+                <a:t>区</a:t>
+              </a:r>
+            </a:p>
+          </p:txBody>
+        </p:sp>
+        <p:sp>
+          <p:nvSpPr>
+            <p:cNvPr id="83" name="文本框 82">
+              <a:extLst>
+                <a:ext uri="{FF2B5EF4-FFF2-40B4-BE49-F238E27FC236}">
+                  <a16:creationId xmlns:a16="http://schemas.microsoft.com/office/drawing/2014/main" id="{96D3F3F1-9D1E-4A72-BAD4-0570C89F7671}"/>
+                </a:ext>
+              </a:extLst>
+            </p:cNvPr>
+            <p:cNvSpPr txBox="1"/>
+            <p:nvPr/>
+          </p:nvSpPr>
+          <p:spPr>
+            <a:xfrm>
+              <a:off x="8073188" y="4854839"/>
+              <a:ext cx="1160895" cy="338554"/>
+            </a:xfrm>
+            <a:prstGeom prst="rect">
+              <a:avLst/>
+            </a:prstGeom>
+            <a:noFill/>
+          </p:spPr>
+          <p:txBody>
+            <a:bodyPr wrap="none" rtlCol="0">
+              <a:spAutoFit/>
+            </a:bodyPr>
+            <a:lstStyle/>
+            <a:p>
+              <a:r>
+                <a:rPr lang="en-US" altLang="zh-CN" sz="1600" dirty="0">
+                  <a:latin typeface="Times New Roman" panose="02020603050405020304" pitchFamily="18" charset="0"/>
+                  <a:ea typeface="宋体" panose="02010600030101010101" pitchFamily="2" charset="-122"/>
+                  <a:cs typeface="Times New Roman" panose="02020603050405020304" pitchFamily="18" charset="0"/>
+                </a:rPr>
+                <a:t>Survivor </a:t>
+              </a:r>
+              <a:r>
+                <a:rPr lang="zh-CN" altLang="en-US" sz="1600" dirty="0">
+                  <a:latin typeface="Times New Roman" panose="02020603050405020304" pitchFamily="18" charset="0"/>
+                  <a:ea typeface="宋体" panose="02010600030101010101" pitchFamily="2" charset="-122"/>
+                  <a:cs typeface="Times New Roman" panose="02020603050405020304" pitchFamily="18" charset="0"/>
+                </a:rPr>
+                <a:t>区</a:t>
+              </a:r>
+            </a:p>
+          </p:txBody>
+        </p:sp>
+        <p:sp>
+          <p:nvSpPr>
+            <p:cNvPr id="84" name="椭圆 83">
+              <a:extLst>
+                <a:ext uri="{FF2B5EF4-FFF2-40B4-BE49-F238E27FC236}">
+                  <a16:creationId xmlns:a16="http://schemas.microsoft.com/office/drawing/2014/main" id="{55F20191-0367-431B-B353-AF7CFC9F5A61}"/>
+                </a:ext>
+              </a:extLst>
+            </p:cNvPr>
+            <p:cNvSpPr/>
+            <p:nvPr/>
+          </p:nvSpPr>
+          <p:spPr>
+            <a:xfrm>
+              <a:off x="296934" y="3866515"/>
+              <a:ext cx="1250766" cy="1098252"/>
+            </a:xfrm>
+            <a:prstGeom prst="ellipse">
+              <a:avLst/>
+            </a:prstGeom>
+            <a:noFill/>
+            <a:ln w="28575">
+              <a:solidFill>
+                <a:schemeClr val="tx1"/>
+              </a:solidFill>
+            </a:ln>
+          </p:spPr>
+          <p:style>
+            <a:lnRef idx="2">
+              <a:schemeClr val="accent1">
+                <a:shade val="50000"/>
+              </a:schemeClr>
+            </a:lnRef>
+            <a:fillRef idx="1">
+              <a:schemeClr val="accent1"/>
+            </a:fillRef>
+            <a:effectRef idx="0">
+              <a:schemeClr val="accent1"/>
+            </a:effectRef>
+            <a:fontRef idx="minor">
+              <a:schemeClr val="lt1"/>
+            </a:fontRef>
+          </p:style>
+          <p:txBody>
+            <a:bodyPr rtlCol="0" anchor="ctr"/>
+            <a:lstStyle/>
+            <a:p>
+              <a:pPr algn="ctr"/>
+              <a:r>
+                <a:rPr lang="zh-CN" altLang="en-US" dirty="0">
+                  <a:solidFill>
+                    <a:schemeClr val="tx1"/>
+                  </a:solidFill>
+                  <a:latin typeface="宋体" panose="02010600030101010101" pitchFamily="2" charset="-122"/>
+                  <a:ea typeface="宋体" panose="02010600030101010101" pitchFamily="2" charset="-122"/>
+                </a:rPr>
+                <a:t>根集合</a:t>
+              </a:r>
+            </a:p>
+          </p:txBody>
+        </p:sp>
+        <p:sp>
+          <p:nvSpPr>
+            <p:cNvPr id="86" name="矩形 85">
+              <a:extLst>
+                <a:ext uri="{FF2B5EF4-FFF2-40B4-BE49-F238E27FC236}">
+                  <a16:creationId xmlns:a16="http://schemas.microsoft.com/office/drawing/2014/main" id="{D0CAAE7B-DC4A-4FDC-8A2E-E574348426E1}"/>
+                </a:ext>
+              </a:extLst>
+            </p:cNvPr>
+            <p:cNvSpPr/>
+            <p:nvPr/>
+          </p:nvSpPr>
+          <p:spPr>
+            <a:xfrm>
+              <a:off x="5468536" y="4041568"/>
+              <a:ext cx="760021" cy="748146"/>
+            </a:xfrm>
+            <a:prstGeom prst="rect">
+              <a:avLst/>
+            </a:prstGeom>
+            <a:noFill/>
+            <a:ln w="38100">
+              <a:solidFill>
+                <a:schemeClr val="tx1"/>
+              </a:solidFill>
+            </a:ln>
+          </p:spPr>
+          <p:style>
+            <a:lnRef idx="2">
+              <a:schemeClr val="accent1">
+                <a:shade val="50000"/>
+              </a:schemeClr>
+            </a:lnRef>
+            <a:fillRef idx="1">
+              <a:schemeClr val="accent1"/>
+            </a:fillRef>
+            <a:effectRef idx="0">
+              <a:schemeClr val="accent1"/>
+            </a:effectRef>
+            <a:fontRef idx="minor">
+              <a:schemeClr val="lt1"/>
+            </a:fontRef>
+          </p:style>
+          <p:txBody>
+            <a:bodyPr rtlCol="0" anchor="ctr"/>
+            <a:lstStyle/>
+            <a:p>
+              <a:pPr algn="ctr"/>
+              <a:r>
+                <a:rPr lang="en-US" altLang="zh-CN" dirty="0">
+                  <a:solidFill>
+                    <a:schemeClr val="tx1"/>
+                  </a:solidFill>
+                  <a:latin typeface="Times New Roman" panose="02020603050405020304" pitchFamily="18" charset="0"/>
+                  <a:cs typeface="Times New Roman" panose="02020603050405020304" pitchFamily="18" charset="0"/>
+                </a:rPr>
+                <a:t>D</a:t>
+              </a:r>
+              <a:endParaRPr lang="zh-CN" altLang="en-US" dirty="0">
+                <a:solidFill>
+                  <a:schemeClr val="tx1"/>
+                </a:solidFill>
+                <a:latin typeface="Times New Roman" panose="02020603050405020304" pitchFamily="18" charset="0"/>
+                <a:cs typeface="Times New Roman" panose="02020603050405020304" pitchFamily="18" charset="0"/>
+              </a:endParaRPr>
+            </a:p>
+          </p:txBody>
+        </p:sp>
+        <p:cxnSp>
+          <p:nvCxnSpPr>
+            <p:cNvPr id="87" name="直接连接符 86">
+              <a:extLst>
+                <a:ext uri="{FF2B5EF4-FFF2-40B4-BE49-F238E27FC236}">
+                  <a16:creationId xmlns:a16="http://schemas.microsoft.com/office/drawing/2014/main" id="{E1B83A5A-787D-4933-B593-C7D70519DFE7}"/>
+                </a:ext>
+              </a:extLst>
+            </p:cNvPr>
+            <p:cNvCxnSpPr>
+              <a:stCxn id="81" idx="0"/>
+              <a:endCxn id="81" idx="2"/>
+            </p:cNvCxnSpPr>
+            <p:nvPr/>
+          </p:nvCxnSpPr>
+          <p:spPr>
+            <a:xfrm>
+              <a:off x="6411660" y="3922813"/>
+              <a:ext cx="0" cy="1276545"/>
+            </a:xfrm>
+            <a:prstGeom prst="line">
+              <a:avLst/>
+            </a:prstGeom>
+            <a:ln w="19050">
+              <a:solidFill>
+                <a:schemeClr val="tx1"/>
+              </a:solidFill>
+            </a:ln>
+          </p:spPr>
+          <p:style>
+            <a:lnRef idx="1">
+              <a:schemeClr val="accent1"/>
+            </a:lnRef>
+            <a:fillRef idx="0">
+              <a:schemeClr val="accent1"/>
+            </a:fillRef>
+            <a:effectRef idx="0">
+              <a:schemeClr val="accent1"/>
+            </a:effectRef>
+            <a:fontRef idx="minor">
+              <a:schemeClr val="tx1"/>
+            </a:fontRef>
+          </p:style>
+        </p:cxnSp>
+        <p:cxnSp>
+          <p:nvCxnSpPr>
+            <p:cNvPr id="89" name="直接箭头连接符 88">
+              <a:extLst>
+                <a:ext uri="{FF2B5EF4-FFF2-40B4-BE49-F238E27FC236}">
+                  <a16:creationId xmlns:a16="http://schemas.microsoft.com/office/drawing/2014/main" id="{BEBD06B6-CEE2-4EBC-A193-11CB37304F65}"/>
+                </a:ext>
+              </a:extLst>
+            </p:cNvPr>
+            <p:cNvCxnSpPr>
+              <a:stCxn id="80" idx="3"/>
+              <a:endCxn id="86" idx="1"/>
+            </p:cNvCxnSpPr>
+            <p:nvPr/>
+          </p:nvCxnSpPr>
+          <p:spPr>
+            <a:xfrm>
+              <a:off x="5108318" y="4415641"/>
+              <a:ext cx="360218" cy="0"/>
+            </a:xfrm>
+            <a:prstGeom prst="straightConnector1">
+              <a:avLst/>
+            </a:prstGeom>
+            <a:ln w="28575">
+              <a:solidFill>
+                <a:schemeClr val="tx1"/>
+              </a:solidFill>
+              <a:tailEnd type="triangle"/>
+            </a:ln>
+          </p:spPr>
+          <p:style>
+            <a:lnRef idx="1">
+              <a:schemeClr val="accent1"/>
+            </a:lnRef>
+            <a:fillRef idx="0">
+              <a:schemeClr val="accent1"/>
+            </a:fillRef>
+            <a:effectRef idx="0">
+              <a:schemeClr val="accent1"/>
+            </a:effectRef>
+            <a:fontRef idx="minor">
+              <a:schemeClr val="tx1"/>
+            </a:fontRef>
+          </p:style>
+        </p:cxnSp>
+        <p:cxnSp>
+          <p:nvCxnSpPr>
+            <p:cNvPr id="91" name="连接符: 肘形 90">
+              <a:extLst>
+                <a:ext uri="{FF2B5EF4-FFF2-40B4-BE49-F238E27FC236}">
+                  <a16:creationId xmlns:a16="http://schemas.microsoft.com/office/drawing/2014/main" id="{38D51557-D009-4B28-A13B-1664DBEDD506}"/>
+                </a:ext>
+              </a:extLst>
+            </p:cNvPr>
+            <p:cNvCxnSpPr>
+              <a:cxnSpLocks/>
+              <a:stCxn id="84" idx="5"/>
+            </p:cNvCxnSpPr>
+            <p:nvPr/>
+          </p:nvCxnSpPr>
+          <p:spPr>
+            <a:xfrm rot="5400000" flipH="1" flipV="1">
+              <a:off x="4295151" y="1849197"/>
+              <a:ext cx="24114" cy="5885356"/>
+            </a:xfrm>
+            <a:prstGeom prst="bentConnector4">
+              <a:avLst>
+                <a:gd name="adj1" fmla="val -4592245"/>
+                <a:gd name="adj2" fmla="val 100083"/>
+              </a:avLst>
+            </a:prstGeom>
+            <a:ln w="28575">
+              <a:solidFill>
+                <a:schemeClr val="tx1"/>
+              </a:solidFill>
+              <a:tailEnd type="triangle"/>
+            </a:ln>
+          </p:spPr>
+          <p:style>
+            <a:lnRef idx="1">
+              <a:schemeClr val="accent1"/>
+            </a:lnRef>
+            <a:fillRef idx="0">
+              <a:schemeClr val="accent1"/>
+            </a:fillRef>
+            <a:effectRef idx="0">
+              <a:schemeClr val="accent1"/>
+            </a:effectRef>
+            <a:fontRef idx="minor">
+              <a:schemeClr val="tx1"/>
+            </a:fontRef>
+          </p:style>
+        </p:cxnSp>
+        <p:cxnSp>
+          <p:nvCxnSpPr>
+            <p:cNvPr id="92" name="连接符: 肘形 91">
+              <a:extLst>
+                <a:ext uri="{FF2B5EF4-FFF2-40B4-BE49-F238E27FC236}">
+                  <a16:creationId xmlns:a16="http://schemas.microsoft.com/office/drawing/2014/main" id="{F8241F47-972A-448A-8DF1-AE45B4328718}"/>
+                </a:ext>
+              </a:extLst>
+            </p:cNvPr>
+            <p:cNvCxnSpPr>
+              <a:cxnSpLocks/>
+              <a:stCxn id="84" idx="4"/>
+              <a:endCxn id="94" idx="2"/>
+            </p:cNvCxnSpPr>
+            <p:nvPr/>
+          </p:nvCxnSpPr>
+          <p:spPr>
+            <a:xfrm rot="5400000" flipH="1" flipV="1">
+              <a:off x="4423841" y="1298087"/>
+              <a:ext cx="165156" cy="7168204"/>
+            </a:xfrm>
+            <a:prstGeom prst="bentConnector3">
+              <a:avLst>
+                <a:gd name="adj1" fmla="val -670502"/>
+              </a:avLst>
+            </a:prstGeom>
+            <a:ln w="28575">
+              <a:solidFill>
+                <a:schemeClr val="tx1"/>
+              </a:solidFill>
+              <a:tailEnd type="triangle"/>
+            </a:ln>
+          </p:spPr>
+          <p:style>
+            <a:lnRef idx="1">
+              <a:schemeClr val="accent1"/>
+            </a:lnRef>
+            <a:fillRef idx="0">
+              <a:schemeClr val="accent1"/>
+            </a:fillRef>
+            <a:effectRef idx="0">
+              <a:schemeClr val="accent1"/>
+            </a:effectRef>
+            <a:fontRef idx="minor">
+              <a:schemeClr val="tx1"/>
+            </a:fontRef>
+          </p:style>
+        </p:cxnSp>
+        <p:sp>
+          <p:nvSpPr>
+            <p:cNvPr id="93" name="矩形 92">
+              <a:extLst>
+                <a:ext uri="{FF2B5EF4-FFF2-40B4-BE49-F238E27FC236}">
+                  <a16:creationId xmlns:a16="http://schemas.microsoft.com/office/drawing/2014/main" id="{F7767BEC-FBD6-4E17-8148-E8BCC9283E25}"/>
+                </a:ext>
+              </a:extLst>
+            </p:cNvPr>
+            <p:cNvSpPr/>
+            <p:nvPr/>
+          </p:nvSpPr>
+          <p:spPr>
+            <a:xfrm>
+              <a:off x="6591769" y="4041568"/>
+              <a:ext cx="760021" cy="748146"/>
+            </a:xfrm>
+            <a:prstGeom prst="rect">
+              <a:avLst/>
+            </a:prstGeom>
+            <a:noFill/>
+            <a:ln w="38100">
+              <a:solidFill>
+                <a:schemeClr val="tx1"/>
+              </a:solidFill>
+            </a:ln>
+          </p:spPr>
+          <p:style>
+            <a:lnRef idx="2">
+              <a:schemeClr val="accent1">
+                <a:shade val="50000"/>
+              </a:schemeClr>
+            </a:lnRef>
+            <a:fillRef idx="1">
+              <a:schemeClr val="accent1"/>
+            </a:fillRef>
+            <a:effectRef idx="0">
+              <a:schemeClr val="accent1"/>
+            </a:effectRef>
+            <a:fontRef idx="minor">
+              <a:schemeClr val="lt1"/>
+            </a:fontRef>
+          </p:style>
+          <p:txBody>
+            <a:bodyPr rtlCol="0" anchor="ctr"/>
+            <a:lstStyle/>
+            <a:p>
+              <a:pPr algn="ctr"/>
+              <a:r>
+                <a:rPr lang="en-US" altLang="zh-CN" dirty="0">
+                  <a:solidFill>
+                    <a:schemeClr val="tx1"/>
+                  </a:solidFill>
+                  <a:latin typeface="Times New Roman" panose="02020603050405020304" pitchFamily="18" charset="0"/>
+                  <a:cs typeface="Times New Roman" panose="02020603050405020304" pitchFamily="18" charset="0"/>
+                </a:rPr>
+                <a:t>A</a:t>
+              </a:r>
+              <a:endParaRPr lang="zh-CN" altLang="en-US" dirty="0">
+                <a:solidFill>
+                  <a:schemeClr val="tx1"/>
+                </a:solidFill>
+                <a:latin typeface="Times New Roman" panose="02020603050405020304" pitchFamily="18" charset="0"/>
+                <a:cs typeface="Times New Roman" panose="02020603050405020304" pitchFamily="18" charset="0"/>
+              </a:endParaRPr>
+            </a:p>
+          </p:txBody>
+        </p:sp>
+        <p:sp>
+          <p:nvSpPr>
+            <p:cNvPr id="94" name="矩形 93">
+              <a:extLst>
+                <a:ext uri="{FF2B5EF4-FFF2-40B4-BE49-F238E27FC236}">
+                  <a16:creationId xmlns:a16="http://schemas.microsoft.com/office/drawing/2014/main" id="{21FBFDFC-02AD-48FE-BD2F-528A12767831}"/>
+                </a:ext>
+              </a:extLst>
+            </p:cNvPr>
+            <p:cNvSpPr/>
+            <p:nvPr/>
+          </p:nvSpPr>
+          <p:spPr>
+            <a:xfrm>
+              <a:off x="7710510" y="4051465"/>
+              <a:ext cx="760021" cy="748146"/>
+            </a:xfrm>
+            <a:prstGeom prst="rect">
+              <a:avLst/>
+            </a:prstGeom>
+            <a:noFill/>
+            <a:ln w="38100">
+              <a:solidFill>
+                <a:schemeClr val="tx1"/>
+              </a:solidFill>
+            </a:ln>
+          </p:spPr>
+          <p:style>
+            <a:lnRef idx="2">
+              <a:schemeClr val="accent1">
+                <a:shade val="50000"/>
+              </a:schemeClr>
+            </a:lnRef>
+            <a:fillRef idx="1">
+              <a:schemeClr val="accent1"/>
+            </a:fillRef>
+            <a:effectRef idx="0">
+              <a:schemeClr val="accent1"/>
+            </a:effectRef>
+            <a:fontRef idx="minor">
+              <a:schemeClr val="lt1"/>
+            </a:fontRef>
+          </p:style>
+          <p:txBody>
+            <a:bodyPr rtlCol="0" anchor="ctr"/>
+            <a:lstStyle/>
+            <a:p>
+              <a:pPr algn="ctr"/>
+              <a:r>
+                <a:rPr lang="en-US" altLang="zh-CN" dirty="0">
+                  <a:solidFill>
+                    <a:schemeClr val="tx1"/>
+                  </a:solidFill>
+                  <a:latin typeface="Times New Roman" panose="02020603050405020304" pitchFamily="18" charset="0"/>
+                  <a:cs typeface="Times New Roman" panose="02020603050405020304" pitchFamily="18" charset="0"/>
+                </a:rPr>
+                <a:t>B</a:t>
+              </a:r>
+              <a:endParaRPr lang="zh-CN" altLang="en-US" dirty="0">
+                <a:solidFill>
+                  <a:schemeClr val="tx1"/>
+                </a:solidFill>
+                <a:latin typeface="Times New Roman" panose="02020603050405020304" pitchFamily="18" charset="0"/>
+                <a:cs typeface="Times New Roman" panose="02020603050405020304" pitchFamily="18" charset="0"/>
+              </a:endParaRPr>
+            </a:p>
+          </p:txBody>
+        </p:sp>
+        <p:cxnSp>
+          <p:nvCxnSpPr>
+            <p:cNvPr id="98" name="连接符: 肘形 97">
+              <a:extLst>
+                <a:ext uri="{FF2B5EF4-FFF2-40B4-BE49-F238E27FC236}">
+                  <a16:creationId xmlns:a16="http://schemas.microsoft.com/office/drawing/2014/main" id="{FDB54E66-2DA4-49BD-844F-C21CF42F086F}"/>
+                </a:ext>
+              </a:extLst>
+            </p:cNvPr>
+            <p:cNvCxnSpPr>
+              <a:stCxn id="93" idx="0"/>
+              <a:endCxn id="86" idx="0"/>
+            </p:cNvCxnSpPr>
+            <p:nvPr/>
+          </p:nvCxnSpPr>
+          <p:spPr>
+            <a:xfrm rot="16200000" flipV="1">
+              <a:off x="6410164" y="3479951"/>
+              <a:ext cx="12700" cy="1123233"/>
+            </a:xfrm>
+            <a:prstGeom prst="bentConnector3">
+              <a:avLst>
+                <a:gd name="adj1" fmla="val 2127244"/>
+              </a:avLst>
+            </a:prstGeom>
+            <a:ln w="28575">
+              <a:solidFill>
+                <a:schemeClr val="tx1"/>
+              </a:solidFill>
+              <a:tailEnd type="triangle"/>
+            </a:ln>
+          </p:spPr>
+          <p:style>
+            <a:lnRef idx="1">
+              <a:schemeClr val="accent1"/>
+            </a:lnRef>
+            <a:fillRef idx="0">
+              <a:schemeClr val="accent1"/>
+            </a:fillRef>
+            <a:effectRef idx="0">
+              <a:schemeClr val="accent1"/>
+            </a:effectRef>
+            <a:fontRef idx="minor">
+              <a:schemeClr val="tx1"/>
+            </a:fontRef>
+          </p:style>
+        </p:cxnSp>
+        <p:cxnSp>
+          <p:nvCxnSpPr>
+            <p:cNvPr id="105" name="连接符: 肘形 104">
+              <a:extLst>
+                <a:ext uri="{FF2B5EF4-FFF2-40B4-BE49-F238E27FC236}">
+                  <a16:creationId xmlns:a16="http://schemas.microsoft.com/office/drawing/2014/main" id="{0940611C-B793-485E-8703-BD8EEE59930C}"/>
+                </a:ext>
+              </a:extLst>
+            </p:cNvPr>
+            <p:cNvCxnSpPr>
+              <a:cxnSpLocks/>
+              <a:endCxn id="78" idx="0"/>
+            </p:cNvCxnSpPr>
+            <p:nvPr/>
+          </p:nvCxnSpPr>
+          <p:spPr>
+            <a:xfrm rot="10800000">
+              <a:off x="2487830" y="4041568"/>
+              <a:ext cx="5890212" cy="12700"/>
+            </a:xfrm>
+            <a:prstGeom prst="bentConnector4">
+              <a:avLst>
+                <a:gd name="adj1" fmla="val 101"/>
+                <a:gd name="adj2" fmla="val 6388307"/>
+              </a:avLst>
+            </a:prstGeom>
+            <a:ln w="28575">
+              <a:solidFill>
+                <a:schemeClr val="tx1"/>
+              </a:solidFill>
+              <a:tailEnd type="triangle"/>
+            </a:ln>
+          </p:spPr>
+          <p:style>
+            <a:lnRef idx="1">
+              <a:schemeClr val="accent1"/>
+            </a:lnRef>
+            <a:fillRef idx="0">
+              <a:schemeClr val="accent1"/>
+            </a:fillRef>
+            <a:effectRef idx="0">
+              <a:schemeClr val="accent1"/>
+            </a:effectRef>
+            <a:fontRef idx="minor">
+              <a:schemeClr val="tx1"/>
+            </a:fontRef>
+          </p:style>
+        </p:cxnSp>
+        <p:sp>
+          <p:nvSpPr>
+            <p:cNvPr id="108" name="文本框 107">
+              <a:extLst>
+                <a:ext uri="{FF2B5EF4-FFF2-40B4-BE49-F238E27FC236}">
+                  <a16:creationId xmlns:a16="http://schemas.microsoft.com/office/drawing/2014/main" id="{C097614E-234B-4C7A-9703-1A7F1281178C}"/>
+                </a:ext>
+              </a:extLst>
+            </p:cNvPr>
+            <p:cNvSpPr txBox="1"/>
+            <p:nvPr/>
+          </p:nvSpPr>
+          <p:spPr>
+            <a:xfrm>
+              <a:off x="2721088" y="6090169"/>
+              <a:ext cx="3254417" cy="338554"/>
+            </a:xfrm>
+            <a:prstGeom prst="rect">
+              <a:avLst/>
+            </a:prstGeom>
+            <a:noFill/>
+          </p:spPr>
+          <p:txBody>
+            <a:bodyPr wrap="none" rtlCol="0">
+              <a:spAutoFit/>
+            </a:bodyPr>
+            <a:lstStyle/>
+            <a:p>
+              <a:r>
+                <a:rPr lang="zh-CN" altLang="en-US" sz="1600" dirty="0">
+                  <a:latin typeface="Times New Roman" panose="02020603050405020304" pitchFamily="18" charset="0"/>
+                  <a:ea typeface="宋体" panose="02010600030101010101" pitchFamily="2" charset="-122"/>
+                  <a:cs typeface="Times New Roman" panose="02020603050405020304" pitchFamily="18" charset="0"/>
+                </a:rPr>
+                <a:t>引用被修正为对象拷贝后的新位置</a:t>
+              </a:r>
+            </a:p>
+          </p:txBody>
+        </p:sp>
+        <p:cxnSp>
+          <p:nvCxnSpPr>
+            <p:cNvPr id="119" name="连接符: 肘形 118">
+              <a:extLst>
+                <a:ext uri="{FF2B5EF4-FFF2-40B4-BE49-F238E27FC236}">
+                  <a16:creationId xmlns:a16="http://schemas.microsoft.com/office/drawing/2014/main" id="{6BA799BC-767C-4952-BF23-B294A223E46B}"/>
+                </a:ext>
+              </a:extLst>
+            </p:cNvPr>
+            <p:cNvCxnSpPr>
+              <a:stCxn id="78" idx="2"/>
+              <a:endCxn id="93" idx="2"/>
+            </p:cNvCxnSpPr>
+            <p:nvPr/>
+          </p:nvCxnSpPr>
+          <p:spPr>
+            <a:xfrm rot="16200000" flipH="1">
+              <a:off x="4729805" y="2547739"/>
+              <a:ext cx="12700" cy="4483950"/>
+            </a:xfrm>
+            <a:prstGeom prst="bentConnector3">
+              <a:avLst>
+                <a:gd name="adj1" fmla="val 4885717"/>
+              </a:avLst>
+            </a:prstGeom>
+            <a:ln w="28575">
+              <a:solidFill>
+                <a:schemeClr val="tx1"/>
+              </a:solidFill>
+              <a:prstDash val="sysDot"/>
+              <a:tailEnd type="triangle"/>
+            </a:ln>
+          </p:spPr>
+          <p:style>
+            <a:lnRef idx="1">
+              <a:schemeClr val="accent1"/>
+            </a:lnRef>
+            <a:fillRef idx="0">
+              <a:schemeClr val="accent1"/>
+            </a:fillRef>
+            <a:effectRef idx="0">
+              <a:schemeClr val="accent1"/>
+            </a:effectRef>
+            <a:fontRef idx="minor">
+              <a:schemeClr val="tx1"/>
+            </a:fontRef>
+          </p:style>
+        </p:cxnSp>
+        <p:sp>
+          <p:nvSpPr>
+            <p:cNvPr id="121" name="文本框 120">
+              <a:extLst>
+                <a:ext uri="{FF2B5EF4-FFF2-40B4-BE49-F238E27FC236}">
+                  <a16:creationId xmlns:a16="http://schemas.microsoft.com/office/drawing/2014/main" id="{939E3F10-BD0B-42CB-8869-5C82A982BF27}"/>
+                </a:ext>
+              </a:extLst>
+            </p:cNvPr>
+            <p:cNvSpPr txBox="1"/>
+            <p:nvPr/>
+          </p:nvSpPr>
+          <p:spPr>
+            <a:xfrm>
+              <a:off x="3809372" y="5406872"/>
+              <a:ext cx="1560042" cy="338554"/>
+            </a:xfrm>
+            <a:prstGeom prst="rect">
+              <a:avLst/>
+            </a:prstGeom>
+            <a:noFill/>
+          </p:spPr>
+          <p:txBody>
+            <a:bodyPr wrap="none" rtlCol="0">
+              <a:spAutoFit/>
+            </a:bodyPr>
+            <a:lstStyle/>
+            <a:p>
+              <a:r>
+                <a:rPr lang="en-US" altLang="zh-CN" sz="1600" dirty="0">
+                  <a:latin typeface="Times New Roman" panose="02020603050405020304" pitchFamily="18" charset="0"/>
+                  <a:ea typeface="宋体" panose="02010600030101010101" pitchFamily="2" charset="-122"/>
+                  <a:cs typeface="Times New Roman" panose="02020603050405020304" pitchFamily="18" charset="0"/>
+                </a:rPr>
+                <a:t>forwarding </a:t>
+              </a:r>
+              <a:r>
+                <a:rPr lang="zh-CN" altLang="en-US" sz="1600" dirty="0">
+                  <a:latin typeface="Times New Roman" panose="02020603050405020304" pitchFamily="18" charset="0"/>
+                  <a:ea typeface="宋体" panose="02010600030101010101" pitchFamily="2" charset="-122"/>
+                  <a:cs typeface="Times New Roman" panose="02020603050405020304" pitchFamily="18" charset="0"/>
+                </a:rPr>
+                <a:t>指针</a:t>
+              </a:r>
+            </a:p>
+          </p:txBody>
+        </p:sp>
+        <p:cxnSp>
+          <p:nvCxnSpPr>
+            <p:cNvPr id="131" name="连接符: 肘形 130">
+              <a:extLst>
+                <a:ext uri="{FF2B5EF4-FFF2-40B4-BE49-F238E27FC236}">
+                  <a16:creationId xmlns:a16="http://schemas.microsoft.com/office/drawing/2014/main" id="{C3FF2C75-8A8A-4EBC-8EB1-843A1EDF50B3}"/>
+                </a:ext>
+              </a:extLst>
+            </p:cNvPr>
+            <p:cNvCxnSpPr>
+              <a:stCxn id="79" idx="0"/>
+              <a:endCxn id="94" idx="0"/>
+            </p:cNvCxnSpPr>
+            <p:nvPr/>
+          </p:nvCxnSpPr>
+          <p:spPr>
+            <a:xfrm rot="16200000" flipH="1">
+              <a:off x="5844346" y="1805290"/>
+              <a:ext cx="9897" cy="4482452"/>
+            </a:xfrm>
+            <a:prstGeom prst="bentConnector3">
+              <a:avLst>
+                <a:gd name="adj1" fmla="val -5609498"/>
+              </a:avLst>
+            </a:prstGeom>
+            <a:ln w="28575">
+              <a:solidFill>
+                <a:schemeClr val="tx1"/>
+              </a:solidFill>
+              <a:prstDash val="sysDot"/>
+              <a:tailEnd type="triangle"/>
+            </a:ln>
+          </p:spPr>
+          <p:style>
+            <a:lnRef idx="1">
+              <a:schemeClr val="accent1"/>
+            </a:lnRef>
+            <a:fillRef idx="0">
+              <a:schemeClr val="accent1"/>
+            </a:fillRef>
+            <a:effectRef idx="0">
+              <a:schemeClr val="accent1"/>
+            </a:effectRef>
+            <a:fontRef idx="minor">
+              <a:schemeClr val="tx1"/>
+            </a:fontRef>
+          </p:style>
+        </p:cxnSp>
+        <p:sp>
+          <p:nvSpPr>
+            <p:cNvPr id="134" name="文本框 133">
+              <a:extLst>
+                <a:ext uri="{FF2B5EF4-FFF2-40B4-BE49-F238E27FC236}">
+                  <a16:creationId xmlns:a16="http://schemas.microsoft.com/office/drawing/2014/main" id="{662A9D93-F67D-4499-A3B1-F63FC0696993}"/>
+                </a:ext>
+              </a:extLst>
+            </p:cNvPr>
+            <p:cNvSpPr txBox="1"/>
+            <p:nvPr/>
+          </p:nvSpPr>
+          <p:spPr>
+            <a:xfrm>
+              <a:off x="3908494" y="3486440"/>
+              <a:ext cx="1560042" cy="338554"/>
+            </a:xfrm>
+            <a:prstGeom prst="rect">
+              <a:avLst/>
+            </a:prstGeom>
+            <a:noFill/>
+          </p:spPr>
+          <p:txBody>
+            <a:bodyPr wrap="none" rtlCol="0">
+              <a:spAutoFit/>
+            </a:bodyPr>
+            <a:lstStyle/>
+            <a:p>
+              <a:r>
+                <a:rPr lang="en-US" altLang="zh-CN" sz="1600" dirty="0">
+                  <a:latin typeface="Times New Roman" panose="02020603050405020304" pitchFamily="18" charset="0"/>
+                  <a:ea typeface="宋体" panose="02010600030101010101" pitchFamily="2" charset="-122"/>
+                  <a:cs typeface="Times New Roman" panose="02020603050405020304" pitchFamily="18" charset="0"/>
+                </a:rPr>
+                <a:t>forwarding </a:t>
+              </a:r>
+              <a:r>
+                <a:rPr lang="zh-CN" altLang="en-US" sz="1600" dirty="0">
+                  <a:latin typeface="Times New Roman" panose="02020603050405020304" pitchFamily="18" charset="0"/>
+                  <a:ea typeface="宋体" panose="02010600030101010101" pitchFamily="2" charset="-122"/>
+                  <a:cs typeface="Times New Roman" panose="02020603050405020304" pitchFamily="18" charset="0"/>
+                </a:rPr>
+                <a:t>指针</a:t>
+              </a:r>
+            </a:p>
+          </p:txBody>
+        </p:sp>
+      </p:grpSp>
+    </p:spTree>
+    <p:extLst>
+      <p:ext uri="{BB962C8B-B14F-4D97-AF65-F5344CB8AC3E}">
+        <p14:creationId xmlns:p14="http://schemas.microsoft.com/office/powerpoint/2010/main" val="2310408031"/>
+      </p:ext>
+    </p:extLst>
+  </p:cSld>
+  <p:clrMapOvr>
+    <a:masterClrMapping/>
+  </p:clrMapOvr>
+</p:sld>
+</file>
+
+<file path=ppt/slides/slide13.xml><?xml version="1.0" encoding="utf-8"?>
+<p:sld xmlns:a="http://schemas.openxmlformats.org/drawingml/2006/main" xmlns:r="http://schemas.openxmlformats.org/officeDocument/2006/relationships" xmlns:p="http://schemas.openxmlformats.org/presentationml/2006/main">
+  <p:cSld>
+    <p:spTree>
+      <p:nvGrpSpPr>
+        <p:cNvPr id="1" name=""/>
+        <p:cNvGrpSpPr/>
+        <p:nvPr/>
+      </p:nvGrpSpPr>
+      <p:grpSpPr>
+        <a:xfrm>
+          <a:off x="0" y="0"/>
+          <a:ext cx="0" cy="0"/>
+          <a:chOff x="0" y="0"/>
+          <a:chExt cx="0" cy="0"/>
+        </a:xfrm>
+      </p:grpSpPr>
+      <p:sp>
+        <p:nvSpPr>
+          <p:cNvPr id="85" name="文本框 84">
+            <a:extLst>
+              <a:ext uri="{FF2B5EF4-FFF2-40B4-BE49-F238E27FC236}">
+                <a16:creationId xmlns:a16="http://schemas.microsoft.com/office/drawing/2014/main" id="{023C2200-4BCF-4801-832B-5762EC801BD7}"/>
+              </a:ext>
+            </a:extLst>
+          </p:cNvPr>
+          <p:cNvSpPr txBox="1"/>
+          <p:nvPr/>
+        </p:nvSpPr>
+        <p:spPr>
+          <a:xfrm>
+            <a:off x="3756245" y="2888142"/>
+            <a:ext cx="4944623" cy="369332"/>
+          </a:xfrm>
+          <a:prstGeom prst="rect">
+            <a:avLst/>
+          </a:prstGeom>
+          <a:noFill/>
+        </p:spPr>
+        <p:txBody>
+          <a:bodyPr wrap="none" rtlCol="0">
+            <a:spAutoFit/>
+          </a:bodyPr>
+          <a:lstStyle/>
+          <a:p>
+            <a:r>
+              <a:rPr lang="zh-CN" altLang="en-US" b="1" dirty="0">
+                <a:latin typeface="Times New Roman" panose="02020603050405020304" pitchFamily="18" charset="0"/>
+                <a:ea typeface="宋体" panose="02010600030101010101" pitchFamily="2" charset="-122"/>
+                <a:cs typeface="Times New Roman" panose="02020603050405020304" pitchFamily="18" charset="0"/>
+              </a:rPr>
+              <a:t>③ 扫描 </a:t>
+            </a:r>
+            <a:r>
+              <a:rPr lang="en-US" altLang="zh-CN" b="1" dirty="0">
+                <a:latin typeface="Times New Roman" panose="02020603050405020304" pitchFamily="18" charset="0"/>
+                <a:ea typeface="宋体" panose="02010600030101010101" pitchFamily="2" charset="-122"/>
+                <a:cs typeface="Times New Roman" panose="02020603050405020304" pitchFamily="18" charset="0"/>
+              </a:rPr>
+              <a:t>Survivor </a:t>
+            </a:r>
+            <a:r>
+              <a:rPr lang="zh-CN" altLang="en-US" b="1" dirty="0">
+                <a:latin typeface="Times New Roman" panose="02020603050405020304" pitchFamily="18" charset="0"/>
+                <a:ea typeface="宋体" panose="02010600030101010101" pitchFamily="2" charset="-122"/>
+                <a:cs typeface="Times New Roman" panose="02020603050405020304" pitchFamily="18" charset="0"/>
+              </a:rPr>
+              <a:t>区，处理新复制对象的子引用</a:t>
+            </a:r>
+            <a:endParaRPr lang="zh-CN" altLang="en-US" b="1" dirty="0">
+              <a:latin typeface="宋体" panose="02010600030101010101" pitchFamily="2" charset="-122"/>
+              <a:ea typeface="宋体" panose="02010600030101010101" pitchFamily="2" charset="-122"/>
+            </a:endParaRPr>
+          </a:p>
+        </p:txBody>
+      </p:sp>
+      <p:sp>
+        <p:nvSpPr>
+          <p:cNvPr id="78" name="矩形 77">
+            <a:extLst>
+              <a:ext uri="{FF2B5EF4-FFF2-40B4-BE49-F238E27FC236}">
+                <a16:creationId xmlns:a16="http://schemas.microsoft.com/office/drawing/2014/main" id="{901B4DC3-9D4B-4270-817D-1CCF268B77DD}"/>
+              </a:ext>
+            </a:extLst>
+          </p:cNvPr>
+          <p:cNvSpPr/>
+          <p:nvPr/>
+        </p:nvSpPr>
+        <p:spPr>
+          <a:xfrm>
+            <a:off x="2107819" y="929396"/>
+            <a:ext cx="760021" cy="748146"/>
+          </a:xfrm>
+          <a:prstGeom prst="rect">
+            <a:avLst/>
+          </a:prstGeom>
+          <a:noFill/>
+          <a:ln w="38100">
+            <a:solidFill>
+              <a:schemeClr val="tx1"/>
+            </a:solidFill>
+            <a:prstDash val="sysDot"/>
+          </a:ln>
+        </p:spPr>
+        <p:style>
+          <a:lnRef idx="2">
+            <a:schemeClr val="accent1">
+              <a:shade val="50000"/>
+            </a:schemeClr>
+          </a:lnRef>
+          <a:fillRef idx="1">
+            <a:schemeClr val="accent1"/>
+          </a:fillRef>
+          <a:effectRef idx="0">
+            <a:schemeClr val="accent1"/>
+          </a:effectRef>
+          <a:fontRef idx="minor">
+            <a:schemeClr val="lt1"/>
+          </a:fontRef>
+        </p:style>
+        <p:txBody>
+          <a:bodyPr rtlCol="0" anchor="ctr"/>
+          <a:lstStyle/>
+          <a:p>
+            <a:pPr algn="ctr"/>
+            <a:r>
+              <a:rPr lang="en-US" altLang="zh-CN" dirty="0">
+                <a:solidFill>
+                  <a:schemeClr val="tx1"/>
+                </a:solidFill>
+                <a:latin typeface="Times New Roman" panose="02020603050405020304" pitchFamily="18" charset="0"/>
+                <a:cs typeface="Times New Roman" panose="02020603050405020304" pitchFamily="18" charset="0"/>
+              </a:rPr>
+              <a:t>A</a:t>
+            </a:r>
+            <a:endParaRPr lang="zh-CN" altLang="en-US" dirty="0">
+              <a:solidFill>
+                <a:schemeClr val="tx1"/>
+              </a:solidFill>
+              <a:latin typeface="Times New Roman" panose="02020603050405020304" pitchFamily="18" charset="0"/>
+              <a:cs typeface="Times New Roman" panose="02020603050405020304" pitchFamily="18" charset="0"/>
+            </a:endParaRPr>
+          </a:p>
+        </p:txBody>
+      </p:sp>
+      <p:sp>
+        <p:nvSpPr>
+          <p:cNvPr id="79" name="矩形 78">
+            <a:extLst>
+              <a:ext uri="{FF2B5EF4-FFF2-40B4-BE49-F238E27FC236}">
+                <a16:creationId xmlns:a16="http://schemas.microsoft.com/office/drawing/2014/main" id="{510077A4-3C37-4477-9A1E-770D00B5B0D9}"/>
+              </a:ext>
+            </a:extLst>
+          </p:cNvPr>
+          <p:cNvSpPr/>
+          <p:nvPr/>
+        </p:nvSpPr>
+        <p:spPr>
+          <a:xfrm>
+            <a:off x="3228058" y="929396"/>
+            <a:ext cx="760021" cy="748146"/>
+          </a:xfrm>
+          <a:prstGeom prst="rect">
+            <a:avLst/>
+          </a:prstGeom>
+          <a:noFill/>
+          <a:ln w="38100">
+            <a:solidFill>
+              <a:schemeClr val="tx1"/>
+            </a:solidFill>
+            <a:prstDash val="sysDot"/>
+          </a:ln>
+        </p:spPr>
+        <p:style>
+          <a:lnRef idx="2">
+            <a:schemeClr val="accent1">
+              <a:shade val="50000"/>
+            </a:schemeClr>
+          </a:lnRef>
+          <a:fillRef idx="1">
+            <a:schemeClr val="accent1"/>
+          </a:fillRef>
+          <a:effectRef idx="0">
+            <a:schemeClr val="accent1"/>
+          </a:effectRef>
+          <a:fontRef idx="minor">
+            <a:schemeClr val="lt1"/>
+          </a:fontRef>
+        </p:style>
+        <p:txBody>
+          <a:bodyPr rtlCol="0" anchor="ctr"/>
+          <a:lstStyle/>
+          <a:p>
+            <a:pPr algn="ctr"/>
+            <a:r>
+              <a:rPr lang="en-US" altLang="zh-CN" dirty="0">
+                <a:solidFill>
+                  <a:schemeClr val="tx1"/>
+                </a:solidFill>
+                <a:latin typeface="Times New Roman" panose="02020603050405020304" pitchFamily="18" charset="0"/>
+                <a:cs typeface="Times New Roman" panose="02020603050405020304" pitchFamily="18" charset="0"/>
+              </a:rPr>
+              <a:t>B</a:t>
+            </a:r>
+            <a:endParaRPr lang="zh-CN" altLang="en-US" dirty="0">
+              <a:solidFill>
+                <a:schemeClr val="tx1"/>
+              </a:solidFill>
+              <a:latin typeface="Times New Roman" panose="02020603050405020304" pitchFamily="18" charset="0"/>
+              <a:cs typeface="Times New Roman" panose="02020603050405020304" pitchFamily="18" charset="0"/>
+            </a:endParaRPr>
+          </a:p>
+        </p:txBody>
+      </p:sp>
+      <p:sp>
+        <p:nvSpPr>
+          <p:cNvPr id="80" name="矩形 79">
+            <a:extLst>
+              <a:ext uri="{FF2B5EF4-FFF2-40B4-BE49-F238E27FC236}">
+                <a16:creationId xmlns:a16="http://schemas.microsoft.com/office/drawing/2014/main" id="{7D86105B-274B-4155-A273-D047ED239A56}"/>
+              </a:ext>
+            </a:extLst>
+          </p:cNvPr>
+          <p:cNvSpPr/>
+          <p:nvPr/>
+        </p:nvSpPr>
+        <p:spPr>
+          <a:xfrm>
+            <a:off x="4348297" y="929396"/>
+            <a:ext cx="760021" cy="748146"/>
+          </a:xfrm>
+          <a:prstGeom prst="rect">
+            <a:avLst/>
+          </a:prstGeom>
+          <a:noFill/>
+          <a:ln w="38100">
+            <a:solidFill>
+              <a:schemeClr val="tx1"/>
+            </a:solidFill>
+          </a:ln>
+        </p:spPr>
+        <p:style>
+          <a:lnRef idx="2">
+            <a:schemeClr val="accent1">
+              <a:shade val="50000"/>
+            </a:schemeClr>
+          </a:lnRef>
+          <a:fillRef idx="1">
+            <a:schemeClr val="accent1"/>
+          </a:fillRef>
+          <a:effectRef idx="0">
+            <a:schemeClr val="accent1"/>
+          </a:effectRef>
+          <a:fontRef idx="minor">
+            <a:schemeClr val="lt1"/>
+          </a:fontRef>
+        </p:style>
+        <p:txBody>
+          <a:bodyPr rtlCol="0" anchor="ctr"/>
+          <a:lstStyle/>
+          <a:p>
+            <a:pPr algn="ctr"/>
+            <a:r>
+              <a:rPr lang="en-US" altLang="zh-CN" dirty="0">
+                <a:solidFill>
+                  <a:schemeClr val="tx1"/>
+                </a:solidFill>
+                <a:latin typeface="Times New Roman" panose="02020603050405020304" pitchFamily="18" charset="0"/>
+                <a:cs typeface="Times New Roman" panose="02020603050405020304" pitchFamily="18" charset="0"/>
+              </a:rPr>
+              <a:t>C</a:t>
+            </a:r>
+            <a:endParaRPr lang="zh-CN" altLang="en-US" dirty="0">
+              <a:solidFill>
+                <a:schemeClr val="tx1"/>
+              </a:solidFill>
+              <a:latin typeface="Times New Roman" panose="02020603050405020304" pitchFamily="18" charset="0"/>
+              <a:cs typeface="Times New Roman" panose="02020603050405020304" pitchFamily="18" charset="0"/>
+            </a:endParaRPr>
+          </a:p>
+        </p:txBody>
+      </p:sp>
+      <p:sp>
+        <p:nvSpPr>
+          <p:cNvPr id="81" name="矩形 80">
+            <a:extLst>
+              <a:ext uri="{FF2B5EF4-FFF2-40B4-BE49-F238E27FC236}">
+                <a16:creationId xmlns:a16="http://schemas.microsoft.com/office/drawing/2014/main" id="{D9856EA2-5900-4FED-A157-938A14B84D68}"/>
+              </a:ext>
+            </a:extLst>
+          </p:cNvPr>
+          <p:cNvSpPr/>
+          <p:nvPr/>
+        </p:nvSpPr>
+        <p:spPr>
+          <a:xfrm>
+            <a:off x="1927710" y="810641"/>
+            <a:ext cx="8967900" cy="1276545"/>
+          </a:xfrm>
+          <a:prstGeom prst="rect">
+            <a:avLst/>
+          </a:prstGeom>
+          <a:noFill/>
+          <a:ln w="19050">
+            <a:solidFill>
+              <a:schemeClr val="tx1"/>
+            </a:solidFill>
+          </a:ln>
+        </p:spPr>
+        <p:style>
+          <a:lnRef idx="2">
+            <a:schemeClr val="accent1">
+              <a:shade val="50000"/>
+            </a:schemeClr>
+          </a:lnRef>
+          <a:fillRef idx="1">
+            <a:schemeClr val="accent1"/>
+          </a:fillRef>
+          <a:effectRef idx="0">
+            <a:schemeClr val="accent1"/>
+          </a:effectRef>
+          <a:fontRef idx="minor">
+            <a:schemeClr val="lt1"/>
+          </a:fontRef>
+        </p:style>
+        <p:txBody>
+          <a:bodyPr rtlCol="0" anchor="ctr"/>
+          <a:lstStyle/>
+          <a:p>
+            <a:pPr algn="ctr"/>
+            <a:endParaRPr lang="zh-CN" altLang="en-US"/>
+          </a:p>
+        </p:txBody>
+      </p:sp>
+      <p:sp>
+        <p:nvSpPr>
+          <p:cNvPr id="82" name="文本框 81">
+            <a:extLst>
+              <a:ext uri="{FF2B5EF4-FFF2-40B4-BE49-F238E27FC236}">
+                <a16:creationId xmlns:a16="http://schemas.microsoft.com/office/drawing/2014/main" id="{C44E6A69-5A3A-4F16-B5B0-D385DFE085F5}"/>
+              </a:ext>
+            </a:extLst>
+          </p:cNvPr>
+          <p:cNvSpPr txBox="1"/>
+          <p:nvPr/>
+        </p:nvSpPr>
+        <p:spPr>
+          <a:xfrm>
+            <a:off x="3726656" y="1742667"/>
+            <a:ext cx="862737" cy="338554"/>
+          </a:xfrm>
+          <a:prstGeom prst="rect">
+            <a:avLst/>
+          </a:prstGeom>
+          <a:noFill/>
+        </p:spPr>
+        <p:txBody>
+          <a:bodyPr wrap="none" rtlCol="0">
+            <a:spAutoFit/>
+          </a:bodyPr>
+          <a:lstStyle/>
+          <a:p>
+            <a:r>
+              <a:rPr lang="en-US" altLang="zh-CN" sz="1600" dirty="0">
+                <a:latin typeface="Times New Roman" panose="02020603050405020304" pitchFamily="18" charset="0"/>
+                <a:ea typeface="宋体" panose="02010600030101010101" pitchFamily="2" charset="-122"/>
+                <a:cs typeface="Times New Roman" panose="02020603050405020304" pitchFamily="18" charset="0"/>
+              </a:rPr>
+              <a:t>Eden </a:t>
+            </a:r>
+            <a:r>
+              <a:rPr lang="zh-CN" altLang="en-US" sz="1600" dirty="0">
+                <a:latin typeface="Times New Roman" panose="02020603050405020304" pitchFamily="18" charset="0"/>
+                <a:ea typeface="宋体" panose="02010600030101010101" pitchFamily="2" charset="-122"/>
+                <a:cs typeface="Times New Roman" panose="02020603050405020304" pitchFamily="18" charset="0"/>
+              </a:rPr>
+              <a:t>区</a:t>
+            </a:r>
+          </a:p>
+        </p:txBody>
+      </p:sp>
+      <p:sp>
+        <p:nvSpPr>
+          <p:cNvPr id="83" name="文本框 82">
+            <a:extLst>
+              <a:ext uri="{FF2B5EF4-FFF2-40B4-BE49-F238E27FC236}">
+                <a16:creationId xmlns:a16="http://schemas.microsoft.com/office/drawing/2014/main" id="{96D3F3F1-9D1E-4A72-BAD4-0570C89F7671}"/>
+              </a:ext>
+            </a:extLst>
+          </p:cNvPr>
+          <p:cNvSpPr txBox="1"/>
+          <p:nvPr/>
+        </p:nvSpPr>
+        <p:spPr>
+          <a:xfrm>
+            <a:off x="8073188" y="1742667"/>
+            <a:ext cx="1160895" cy="338554"/>
+          </a:xfrm>
+          <a:prstGeom prst="rect">
+            <a:avLst/>
+          </a:prstGeom>
+          <a:noFill/>
+        </p:spPr>
+        <p:txBody>
+          <a:bodyPr wrap="none" rtlCol="0">
+            <a:spAutoFit/>
+          </a:bodyPr>
+          <a:lstStyle/>
+          <a:p>
+            <a:r>
+              <a:rPr lang="en-US" altLang="zh-CN" sz="1600" dirty="0">
+                <a:latin typeface="Times New Roman" panose="02020603050405020304" pitchFamily="18" charset="0"/>
+                <a:ea typeface="宋体" panose="02010600030101010101" pitchFamily="2" charset="-122"/>
+                <a:cs typeface="Times New Roman" panose="02020603050405020304" pitchFamily="18" charset="0"/>
+              </a:rPr>
+              <a:t>Survivor </a:t>
+            </a:r>
+            <a:r>
+              <a:rPr lang="zh-CN" altLang="en-US" sz="1600" dirty="0">
+                <a:latin typeface="Times New Roman" panose="02020603050405020304" pitchFamily="18" charset="0"/>
+                <a:ea typeface="宋体" panose="02010600030101010101" pitchFamily="2" charset="-122"/>
+                <a:cs typeface="Times New Roman" panose="02020603050405020304" pitchFamily="18" charset="0"/>
+              </a:rPr>
+              <a:t>区</a:t>
+            </a:r>
+          </a:p>
+        </p:txBody>
+      </p:sp>
+      <p:sp>
+        <p:nvSpPr>
+          <p:cNvPr id="84" name="椭圆 83">
+            <a:extLst>
+              <a:ext uri="{FF2B5EF4-FFF2-40B4-BE49-F238E27FC236}">
+                <a16:creationId xmlns:a16="http://schemas.microsoft.com/office/drawing/2014/main" id="{55F20191-0367-431B-B353-AF7CFC9F5A61}"/>
+              </a:ext>
+            </a:extLst>
+          </p:cNvPr>
+          <p:cNvSpPr/>
+          <p:nvPr/>
+        </p:nvSpPr>
+        <p:spPr>
+          <a:xfrm>
+            <a:off x="296934" y="754343"/>
+            <a:ext cx="1250766" cy="1098252"/>
+          </a:xfrm>
+          <a:prstGeom prst="ellipse">
+            <a:avLst/>
+          </a:prstGeom>
+          <a:noFill/>
+          <a:ln w="28575">
+            <a:solidFill>
+              <a:schemeClr val="tx1"/>
+            </a:solidFill>
+          </a:ln>
+        </p:spPr>
+        <p:style>
+          <a:lnRef idx="2">
+            <a:schemeClr val="accent1">
+              <a:shade val="50000"/>
+            </a:schemeClr>
+          </a:lnRef>
+          <a:fillRef idx="1">
+            <a:schemeClr val="accent1"/>
+          </a:fillRef>
+          <a:effectRef idx="0">
+            <a:schemeClr val="accent1"/>
+          </a:effectRef>
+          <a:fontRef idx="minor">
+            <a:schemeClr val="lt1"/>
+          </a:fontRef>
+        </p:style>
+        <p:txBody>
+          <a:bodyPr rtlCol="0" anchor="ctr"/>
+          <a:lstStyle/>
+          <a:p>
+            <a:pPr algn="ctr"/>
+            <a:r>
+              <a:rPr lang="zh-CN" altLang="en-US" dirty="0">
+                <a:solidFill>
+                  <a:schemeClr val="tx1"/>
+                </a:solidFill>
+                <a:latin typeface="宋体" panose="02010600030101010101" pitchFamily="2" charset="-122"/>
+                <a:ea typeface="宋体" panose="02010600030101010101" pitchFamily="2" charset="-122"/>
+              </a:rPr>
+              <a:t>根集合</a:t>
+            </a:r>
+          </a:p>
+        </p:txBody>
+      </p:sp>
+      <p:sp>
+        <p:nvSpPr>
+          <p:cNvPr id="86" name="矩形 85">
+            <a:extLst>
+              <a:ext uri="{FF2B5EF4-FFF2-40B4-BE49-F238E27FC236}">
+                <a16:creationId xmlns:a16="http://schemas.microsoft.com/office/drawing/2014/main" id="{D0CAAE7B-DC4A-4FDC-8A2E-E574348426E1}"/>
+              </a:ext>
+            </a:extLst>
+          </p:cNvPr>
+          <p:cNvSpPr/>
+          <p:nvPr/>
+        </p:nvSpPr>
+        <p:spPr>
+          <a:xfrm>
+            <a:off x="5468536" y="929396"/>
+            <a:ext cx="760021" cy="748146"/>
+          </a:xfrm>
+          <a:prstGeom prst="rect">
+            <a:avLst/>
+          </a:prstGeom>
+          <a:noFill/>
+          <a:ln w="38100">
+            <a:solidFill>
+              <a:schemeClr val="tx1"/>
+            </a:solidFill>
+            <a:prstDash val="sysDot"/>
+          </a:ln>
+        </p:spPr>
+        <p:style>
+          <a:lnRef idx="2">
+            <a:schemeClr val="accent1">
+              <a:shade val="50000"/>
+            </a:schemeClr>
+          </a:lnRef>
+          <a:fillRef idx="1">
+            <a:schemeClr val="accent1"/>
+          </a:fillRef>
+          <a:effectRef idx="0">
+            <a:schemeClr val="accent1"/>
+          </a:effectRef>
+          <a:fontRef idx="minor">
+            <a:schemeClr val="lt1"/>
+          </a:fontRef>
+        </p:style>
+        <p:txBody>
+          <a:bodyPr rtlCol="0" anchor="ctr"/>
+          <a:lstStyle/>
+          <a:p>
+            <a:pPr algn="ctr"/>
+            <a:r>
+              <a:rPr lang="en-US" altLang="zh-CN" dirty="0">
+                <a:solidFill>
+                  <a:schemeClr val="tx1"/>
+                </a:solidFill>
+                <a:latin typeface="Times New Roman" panose="02020603050405020304" pitchFamily="18" charset="0"/>
+                <a:cs typeface="Times New Roman" panose="02020603050405020304" pitchFamily="18" charset="0"/>
+              </a:rPr>
+              <a:t>D</a:t>
+            </a:r>
+            <a:endParaRPr lang="zh-CN" altLang="en-US" dirty="0">
+              <a:solidFill>
+                <a:schemeClr val="tx1"/>
+              </a:solidFill>
+              <a:latin typeface="Times New Roman" panose="02020603050405020304" pitchFamily="18" charset="0"/>
+              <a:cs typeface="Times New Roman" panose="02020603050405020304" pitchFamily="18" charset="0"/>
+            </a:endParaRPr>
+          </a:p>
+        </p:txBody>
+      </p:sp>
+      <p:cxnSp>
+        <p:nvCxnSpPr>
+          <p:cNvPr id="87" name="直接连接符 86">
+            <a:extLst>
+              <a:ext uri="{FF2B5EF4-FFF2-40B4-BE49-F238E27FC236}">
+                <a16:creationId xmlns:a16="http://schemas.microsoft.com/office/drawing/2014/main" id="{E1B83A5A-787D-4933-B593-C7D70519DFE7}"/>
+              </a:ext>
+            </a:extLst>
+          </p:cNvPr>
+          <p:cNvCxnSpPr>
+            <a:cxnSpLocks/>
+            <a:stCxn id="81" idx="0"/>
+            <a:endCxn id="81" idx="2"/>
+          </p:cNvCxnSpPr>
+          <p:nvPr/>
+        </p:nvCxnSpPr>
+        <p:spPr>
+          <a:xfrm>
+            <a:off x="6411660" y="810641"/>
+            <a:ext cx="0" cy="1276545"/>
+          </a:xfrm>
+          <a:prstGeom prst="line">
+            <a:avLst/>
+          </a:prstGeom>
+          <a:ln w="19050">
+            <a:solidFill>
+              <a:schemeClr val="tx1"/>
+            </a:solidFill>
+          </a:ln>
+        </p:spPr>
+        <p:style>
+          <a:lnRef idx="1">
+            <a:schemeClr val="accent1"/>
+          </a:lnRef>
+          <a:fillRef idx="0">
+            <a:schemeClr val="accent1"/>
+          </a:fillRef>
+          <a:effectRef idx="0">
+            <a:schemeClr val="accent1"/>
+          </a:effectRef>
+          <a:fontRef idx="minor">
+            <a:schemeClr val="tx1"/>
+          </a:fontRef>
+        </p:style>
+      </p:cxnSp>
+      <p:cxnSp>
+        <p:nvCxnSpPr>
+          <p:cNvPr id="89" name="直接箭头连接符 88">
+            <a:extLst>
+              <a:ext uri="{FF2B5EF4-FFF2-40B4-BE49-F238E27FC236}">
+                <a16:creationId xmlns:a16="http://schemas.microsoft.com/office/drawing/2014/main" id="{BEBD06B6-CEE2-4EBC-A193-11CB37304F65}"/>
+              </a:ext>
+            </a:extLst>
+          </p:cNvPr>
+          <p:cNvCxnSpPr>
+            <a:cxnSpLocks/>
+            <a:stCxn id="80" idx="3"/>
+            <a:endCxn id="86" idx="1"/>
+          </p:cNvCxnSpPr>
+          <p:nvPr/>
+        </p:nvCxnSpPr>
+        <p:spPr>
+          <a:xfrm>
+            <a:off x="5108318" y="1303469"/>
+            <a:ext cx="360218" cy="0"/>
+          </a:xfrm>
+          <a:prstGeom prst="straightConnector1">
+            <a:avLst/>
+          </a:prstGeom>
+          <a:ln w="28575">
+            <a:solidFill>
+              <a:schemeClr val="tx1"/>
+            </a:solidFill>
+            <a:tailEnd type="triangle"/>
+          </a:ln>
+        </p:spPr>
+        <p:style>
+          <a:lnRef idx="1">
+            <a:schemeClr val="accent1"/>
+          </a:lnRef>
+          <a:fillRef idx="0">
+            <a:schemeClr val="accent1"/>
+          </a:fillRef>
+          <a:effectRef idx="0">
+            <a:schemeClr val="accent1"/>
+          </a:effectRef>
+          <a:fontRef idx="minor">
+            <a:schemeClr val="tx1"/>
+          </a:fontRef>
+        </p:style>
+      </p:cxnSp>
+      <p:cxnSp>
+        <p:nvCxnSpPr>
+          <p:cNvPr id="91" name="连接符: 肘形 90">
+            <a:extLst>
+              <a:ext uri="{FF2B5EF4-FFF2-40B4-BE49-F238E27FC236}">
+                <a16:creationId xmlns:a16="http://schemas.microsoft.com/office/drawing/2014/main" id="{38D51557-D009-4B28-A13B-1664DBEDD506}"/>
+              </a:ext>
+            </a:extLst>
+          </p:cNvPr>
+          <p:cNvCxnSpPr>
+            <a:cxnSpLocks/>
+            <a:stCxn id="84" idx="5"/>
+          </p:cNvCxnSpPr>
+          <p:nvPr/>
+        </p:nvCxnSpPr>
+        <p:spPr>
+          <a:xfrm rot="5400000" flipH="1" flipV="1">
+            <a:off x="4295151" y="-1262975"/>
+            <a:ext cx="24114" cy="5885356"/>
+          </a:xfrm>
+          <a:prstGeom prst="bentConnector4">
+            <a:avLst>
+              <a:gd name="adj1" fmla="val -3213341"/>
+              <a:gd name="adj2" fmla="val 100083"/>
+            </a:avLst>
+          </a:prstGeom>
+          <a:ln w="28575">
+            <a:solidFill>
+              <a:schemeClr val="tx1"/>
+            </a:solidFill>
+            <a:tailEnd type="triangle"/>
+          </a:ln>
+        </p:spPr>
+        <p:style>
+          <a:lnRef idx="1">
+            <a:schemeClr val="accent1"/>
+          </a:lnRef>
+          <a:fillRef idx="0">
+            <a:schemeClr val="accent1"/>
+          </a:fillRef>
+          <a:effectRef idx="0">
+            <a:schemeClr val="accent1"/>
+          </a:effectRef>
+          <a:fontRef idx="minor">
+            <a:schemeClr val="tx1"/>
+          </a:fontRef>
+        </p:style>
+      </p:cxnSp>
+      <p:cxnSp>
+        <p:nvCxnSpPr>
+          <p:cNvPr id="92" name="连接符: 肘形 91">
+            <a:extLst>
+              <a:ext uri="{FF2B5EF4-FFF2-40B4-BE49-F238E27FC236}">
+                <a16:creationId xmlns:a16="http://schemas.microsoft.com/office/drawing/2014/main" id="{F8241F47-972A-448A-8DF1-AE45B4328718}"/>
+              </a:ext>
+            </a:extLst>
+          </p:cNvPr>
+          <p:cNvCxnSpPr>
+            <a:cxnSpLocks/>
+            <a:stCxn id="84" idx="4"/>
+            <a:endCxn id="94" idx="2"/>
+          </p:cNvCxnSpPr>
+          <p:nvPr/>
+        </p:nvCxnSpPr>
+        <p:spPr>
+          <a:xfrm rot="5400000" flipH="1" flipV="1">
+            <a:off x="4417903" y="-1820023"/>
+            <a:ext cx="177032" cy="7168204"/>
+          </a:xfrm>
+          <a:prstGeom prst="bentConnector3">
+            <a:avLst>
+              <a:gd name="adj1" fmla="val -464530"/>
+            </a:avLst>
+          </a:prstGeom>
+          <a:ln w="28575">
+            <a:solidFill>
+              <a:schemeClr val="tx1"/>
+            </a:solidFill>
+            <a:tailEnd type="triangle"/>
+          </a:ln>
+        </p:spPr>
+        <p:style>
+          <a:lnRef idx="1">
+            <a:schemeClr val="accent1"/>
+          </a:lnRef>
+          <a:fillRef idx="0">
+            <a:schemeClr val="accent1"/>
+          </a:fillRef>
+          <a:effectRef idx="0">
+            <a:schemeClr val="accent1"/>
+          </a:effectRef>
+          <a:fontRef idx="minor">
+            <a:schemeClr val="tx1"/>
+          </a:fontRef>
+        </p:style>
+      </p:cxnSp>
+      <p:sp>
+        <p:nvSpPr>
+          <p:cNvPr id="93" name="矩形 92">
+            <a:extLst>
+              <a:ext uri="{FF2B5EF4-FFF2-40B4-BE49-F238E27FC236}">
+                <a16:creationId xmlns:a16="http://schemas.microsoft.com/office/drawing/2014/main" id="{F7767BEC-FBD6-4E17-8148-E8BCC9283E25}"/>
+              </a:ext>
+            </a:extLst>
+          </p:cNvPr>
+          <p:cNvSpPr/>
+          <p:nvPr/>
+        </p:nvSpPr>
+        <p:spPr>
+          <a:xfrm>
+            <a:off x="6591769" y="929396"/>
+            <a:ext cx="760021" cy="748146"/>
+          </a:xfrm>
+          <a:prstGeom prst="rect">
+            <a:avLst/>
+          </a:prstGeom>
+          <a:noFill/>
+          <a:ln w="38100">
+            <a:solidFill>
+              <a:schemeClr val="tx1"/>
+            </a:solidFill>
+          </a:ln>
+        </p:spPr>
+        <p:style>
+          <a:lnRef idx="2">
+            <a:schemeClr val="accent1">
+              <a:shade val="50000"/>
+            </a:schemeClr>
+          </a:lnRef>
+          <a:fillRef idx="1">
+            <a:schemeClr val="accent1"/>
+          </a:fillRef>
+          <a:effectRef idx="0">
+            <a:schemeClr val="accent1"/>
+          </a:effectRef>
+          <a:fontRef idx="minor">
+            <a:schemeClr val="lt1"/>
+          </a:fontRef>
+        </p:style>
+        <p:txBody>
+          <a:bodyPr rtlCol="0" anchor="ctr"/>
+          <a:lstStyle/>
+          <a:p>
+            <a:pPr algn="ctr"/>
+            <a:r>
+              <a:rPr lang="en-US" altLang="zh-CN" b="1" dirty="0">
+                <a:solidFill>
+                  <a:srgbClr val="FF0000"/>
+                </a:solidFill>
+                <a:latin typeface="Times New Roman" panose="02020603050405020304" pitchFamily="18" charset="0"/>
+                <a:cs typeface="Times New Roman" panose="02020603050405020304" pitchFamily="18" charset="0"/>
+              </a:rPr>
+              <a:t>A</a:t>
+            </a:r>
+            <a:endParaRPr lang="zh-CN" altLang="en-US" b="1" dirty="0">
+              <a:solidFill>
+                <a:srgbClr val="FF0000"/>
+              </a:solidFill>
+              <a:latin typeface="Times New Roman" panose="02020603050405020304" pitchFamily="18" charset="0"/>
+              <a:cs typeface="Times New Roman" panose="02020603050405020304" pitchFamily="18" charset="0"/>
+            </a:endParaRPr>
+          </a:p>
+        </p:txBody>
+      </p:sp>
+      <p:sp>
+        <p:nvSpPr>
+          <p:cNvPr id="94" name="矩形 93">
+            <a:extLst>
+              <a:ext uri="{FF2B5EF4-FFF2-40B4-BE49-F238E27FC236}">
+                <a16:creationId xmlns:a16="http://schemas.microsoft.com/office/drawing/2014/main" id="{21FBFDFC-02AD-48FE-BD2F-528A12767831}"/>
+              </a:ext>
+            </a:extLst>
+          </p:cNvPr>
+          <p:cNvSpPr/>
+          <p:nvPr/>
+        </p:nvSpPr>
+        <p:spPr>
+          <a:xfrm>
+            <a:off x="7710510" y="927417"/>
+            <a:ext cx="760021" cy="748146"/>
+          </a:xfrm>
+          <a:prstGeom prst="rect">
+            <a:avLst/>
+          </a:prstGeom>
+          <a:noFill/>
+          <a:ln w="38100">
+            <a:solidFill>
+              <a:schemeClr val="tx1"/>
+            </a:solidFill>
+          </a:ln>
+        </p:spPr>
+        <p:style>
+          <a:lnRef idx="2">
+            <a:schemeClr val="accent1">
+              <a:shade val="50000"/>
+            </a:schemeClr>
+          </a:lnRef>
+          <a:fillRef idx="1">
+            <a:schemeClr val="accent1"/>
+          </a:fillRef>
+          <a:effectRef idx="0">
+            <a:schemeClr val="accent1"/>
+          </a:effectRef>
+          <a:fontRef idx="minor">
+            <a:schemeClr val="lt1"/>
+          </a:fontRef>
+        </p:style>
+        <p:txBody>
+          <a:bodyPr rtlCol="0" anchor="ctr"/>
+          <a:lstStyle/>
+          <a:p>
+            <a:pPr algn="ctr"/>
+            <a:r>
+              <a:rPr lang="en-US" altLang="zh-CN" b="1" dirty="0">
+                <a:solidFill>
+                  <a:srgbClr val="FF0000"/>
+                </a:solidFill>
+                <a:latin typeface="Times New Roman" panose="02020603050405020304" pitchFamily="18" charset="0"/>
+                <a:cs typeface="Times New Roman" panose="02020603050405020304" pitchFamily="18" charset="0"/>
+              </a:rPr>
+              <a:t>B</a:t>
+            </a:r>
+            <a:endParaRPr lang="zh-CN" altLang="en-US" b="1" dirty="0">
+              <a:solidFill>
+                <a:srgbClr val="FF0000"/>
+              </a:solidFill>
+              <a:latin typeface="Times New Roman" panose="02020603050405020304" pitchFamily="18" charset="0"/>
+              <a:cs typeface="Times New Roman" panose="02020603050405020304" pitchFamily="18" charset="0"/>
+            </a:endParaRPr>
+          </a:p>
+        </p:txBody>
+      </p:sp>
+      <p:cxnSp>
+        <p:nvCxnSpPr>
+          <p:cNvPr id="119" name="连接符: 肘形 118">
+            <a:extLst>
+              <a:ext uri="{FF2B5EF4-FFF2-40B4-BE49-F238E27FC236}">
+                <a16:creationId xmlns:a16="http://schemas.microsoft.com/office/drawing/2014/main" id="{6BA799BC-767C-4952-BF23-B294A223E46B}"/>
+              </a:ext>
+            </a:extLst>
+          </p:cNvPr>
+          <p:cNvCxnSpPr>
+            <a:cxnSpLocks/>
+            <a:stCxn id="78" idx="2"/>
+            <a:endCxn id="93" idx="2"/>
+          </p:cNvCxnSpPr>
+          <p:nvPr/>
+        </p:nvCxnSpPr>
+        <p:spPr>
+          <a:xfrm rot="16200000" flipH="1">
+            <a:off x="4729805" y="-564433"/>
+            <a:ext cx="12700" cy="4483950"/>
+          </a:xfrm>
+          <a:prstGeom prst="bentConnector3">
+            <a:avLst>
+              <a:gd name="adj1" fmla="val 4885717"/>
+            </a:avLst>
+          </a:prstGeom>
+          <a:ln w="28575">
+            <a:solidFill>
+              <a:schemeClr val="tx1"/>
+            </a:solidFill>
+            <a:prstDash val="sysDot"/>
+            <a:tailEnd type="triangle"/>
+          </a:ln>
+        </p:spPr>
+        <p:style>
+          <a:lnRef idx="1">
+            <a:schemeClr val="accent1"/>
+          </a:lnRef>
+          <a:fillRef idx="0">
+            <a:schemeClr val="accent1"/>
+          </a:fillRef>
+          <a:effectRef idx="0">
+            <a:schemeClr val="accent1"/>
+          </a:effectRef>
+          <a:fontRef idx="minor">
+            <a:schemeClr val="tx1"/>
+          </a:fontRef>
+        </p:style>
+      </p:cxnSp>
+      <p:cxnSp>
+        <p:nvCxnSpPr>
+          <p:cNvPr id="131" name="连接符: 肘形 130">
+            <a:extLst>
+              <a:ext uri="{FF2B5EF4-FFF2-40B4-BE49-F238E27FC236}">
+                <a16:creationId xmlns:a16="http://schemas.microsoft.com/office/drawing/2014/main" id="{C3FF2C75-8A8A-4EBC-8EB1-843A1EDF50B3}"/>
+              </a:ext>
+            </a:extLst>
+          </p:cNvPr>
+          <p:cNvCxnSpPr>
+            <a:cxnSpLocks/>
+            <a:stCxn id="79" idx="0"/>
+            <a:endCxn id="94" idx="0"/>
+          </p:cNvCxnSpPr>
+          <p:nvPr/>
+        </p:nvCxnSpPr>
+        <p:spPr>
+          <a:xfrm rot="5400000" flipH="1" flipV="1">
+            <a:off x="5848306" y="-1312819"/>
+            <a:ext cx="1979" cy="4482452"/>
+          </a:xfrm>
+          <a:prstGeom prst="bentConnector3">
+            <a:avLst>
+              <a:gd name="adj1" fmla="val 41354624"/>
+            </a:avLst>
+          </a:prstGeom>
+          <a:ln w="28575">
+            <a:solidFill>
+              <a:schemeClr val="tx1"/>
+            </a:solidFill>
+            <a:prstDash val="sysDot"/>
+            <a:tailEnd type="triangle"/>
+          </a:ln>
+        </p:spPr>
+        <p:style>
+          <a:lnRef idx="1">
+            <a:schemeClr val="accent1"/>
+          </a:lnRef>
+          <a:fillRef idx="0">
+            <a:schemeClr val="accent1"/>
+          </a:fillRef>
+          <a:effectRef idx="0">
+            <a:schemeClr val="accent1"/>
+          </a:effectRef>
+          <a:fontRef idx="minor">
+            <a:schemeClr val="tx1"/>
+          </a:fontRef>
+        </p:style>
+      </p:cxnSp>
+      <p:cxnSp>
+        <p:nvCxnSpPr>
+          <p:cNvPr id="10" name="直接箭头连接符 9">
+            <a:extLst>
+              <a:ext uri="{FF2B5EF4-FFF2-40B4-BE49-F238E27FC236}">
+                <a16:creationId xmlns:a16="http://schemas.microsoft.com/office/drawing/2014/main" id="{3A516239-AA3C-4FF2-8051-8D4EB33EB78A}"/>
+              </a:ext>
+            </a:extLst>
+          </p:cNvPr>
+          <p:cNvCxnSpPr>
+            <a:stCxn id="94" idx="1"/>
+            <a:endCxn id="93" idx="3"/>
+          </p:cNvCxnSpPr>
+          <p:nvPr/>
+        </p:nvCxnSpPr>
+        <p:spPr>
+          <a:xfrm flipH="1">
+            <a:off x="7351790" y="1301490"/>
+            <a:ext cx="358720" cy="1979"/>
+          </a:xfrm>
+          <a:prstGeom prst="straightConnector1">
+            <a:avLst/>
+          </a:prstGeom>
+          <a:ln w="28575">
+            <a:solidFill>
+              <a:schemeClr val="tx1"/>
+            </a:solidFill>
+            <a:tailEnd type="triangle"/>
+          </a:ln>
+        </p:spPr>
+        <p:style>
+          <a:lnRef idx="1">
+            <a:schemeClr val="accent1"/>
+          </a:lnRef>
+          <a:fillRef idx="0">
+            <a:schemeClr val="accent1"/>
+          </a:fillRef>
+          <a:effectRef idx="0">
+            <a:schemeClr val="accent1"/>
+          </a:effectRef>
+          <a:fontRef idx="minor">
+            <a:schemeClr val="tx1"/>
+          </a:fontRef>
+        </p:style>
+      </p:cxnSp>
+      <p:sp>
+        <p:nvSpPr>
+          <p:cNvPr id="52" name="矩形 51">
+            <a:extLst>
+              <a:ext uri="{FF2B5EF4-FFF2-40B4-BE49-F238E27FC236}">
+                <a16:creationId xmlns:a16="http://schemas.microsoft.com/office/drawing/2014/main" id="{E4A515F7-2A86-4E00-A45C-AD80FAA4F6A3}"/>
+              </a:ext>
+            </a:extLst>
+          </p:cNvPr>
+          <p:cNvSpPr/>
+          <p:nvPr/>
+        </p:nvSpPr>
+        <p:spPr>
+          <a:xfrm>
+            <a:off x="8829251" y="935746"/>
+            <a:ext cx="760021" cy="748146"/>
+          </a:xfrm>
+          <a:prstGeom prst="rect">
+            <a:avLst/>
+          </a:prstGeom>
+          <a:noFill/>
+          <a:ln w="38100">
+            <a:solidFill>
+              <a:schemeClr val="tx1"/>
+            </a:solidFill>
+          </a:ln>
+        </p:spPr>
+        <p:style>
+          <a:lnRef idx="2">
+            <a:schemeClr val="accent1">
+              <a:shade val="50000"/>
+            </a:schemeClr>
+          </a:lnRef>
+          <a:fillRef idx="1">
+            <a:schemeClr val="accent1"/>
+          </a:fillRef>
+          <a:effectRef idx="0">
+            <a:schemeClr val="accent1"/>
+          </a:effectRef>
+          <a:fontRef idx="minor">
+            <a:schemeClr val="lt1"/>
+          </a:fontRef>
+        </p:style>
+        <p:txBody>
+          <a:bodyPr rtlCol="0" anchor="ctr"/>
+          <a:lstStyle/>
+          <a:p>
+            <a:pPr algn="ctr"/>
+            <a:r>
+              <a:rPr lang="en-US" altLang="zh-CN" dirty="0">
+                <a:solidFill>
+                  <a:schemeClr val="tx1"/>
+                </a:solidFill>
+                <a:latin typeface="Times New Roman" panose="02020603050405020304" pitchFamily="18" charset="0"/>
+                <a:cs typeface="Times New Roman" panose="02020603050405020304" pitchFamily="18" charset="0"/>
+              </a:rPr>
+              <a:t>D</a:t>
+            </a:r>
+            <a:endParaRPr lang="zh-CN" altLang="en-US" dirty="0">
+              <a:solidFill>
+                <a:schemeClr val="tx1"/>
+              </a:solidFill>
+              <a:latin typeface="Times New Roman" panose="02020603050405020304" pitchFamily="18" charset="0"/>
+              <a:cs typeface="Times New Roman" panose="02020603050405020304" pitchFamily="18" charset="0"/>
+            </a:endParaRPr>
+          </a:p>
+        </p:txBody>
+      </p:sp>
+      <p:cxnSp>
+        <p:nvCxnSpPr>
+          <p:cNvPr id="33" name="连接符: 肘形 32">
+            <a:extLst>
+              <a:ext uri="{FF2B5EF4-FFF2-40B4-BE49-F238E27FC236}">
+                <a16:creationId xmlns:a16="http://schemas.microsoft.com/office/drawing/2014/main" id="{40FD09C5-2D4B-419E-A189-995E0267963D}"/>
+              </a:ext>
+            </a:extLst>
+          </p:cNvPr>
+          <p:cNvCxnSpPr>
+            <a:stCxn id="93" idx="0"/>
+            <a:endCxn id="52" idx="0"/>
+          </p:cNvCxnSpPr>
+          <p:nvPr/>
+        </p:nvCxnSpPr>
+        <p:spPr>
+          <a:xfrm rot="16200000" flipH="1">
+            <a:off x="8087346" y="-186170"/>
+            <a:ext cx="6350" cy="2237482"/>
+          </a:xfrm>
+          <a:prstGeom prst="bentConnector3">
+            <a:avLst>
+              <a:gd name="adj1" fmla="val -4535055"/>
+            </a:avLst>
+          </a:prstGeom>
+          <a:ln w="28575">
+            <a:solidFill>
+              <a:schemeClr val="tx1"/>
+            </a:solidFill>
+            <a:tailEnd type="triangle"/>
+          </a:ln>
+        </p:spPr>
+        <p:style>
+          <a:lnRef idx="1">
+            <a:schemeClr val="accent1"/>
+          </a:lnRef>
+          <a:fillRef idx="0">
+            <a:schemeClr val="accent1"/>
+          </a:fillRef>
+          <a:effectRef idx="0">
+            <a:schemeClr val="accent1"/>
+          </a:effectRef>
+          <a:fontRef idx="minor">
+            <a:schemeClr val="tx1"/>
+          </a:fontRef>
+        </p:style>
+      </p:cxnSp>
+      <p:cxnSp>
+        <p:nvCxnSpPr>
+          <p:cNvPr id="36" name="连接符: 肘形 35">
+            <a:extLst>
+              <a:ext uri="{FF2B5EF4-FFF2-40B4-BE49-F238E27FC236}">
+                <a16:creationId xmlns:a16="http://schemas.microsoft.com/office/drawing/2014/main" id="{413D7785-C0E2-4626-B3F8-A95A66EADA13}"/>
+              </a:ext>
+            </a:extLst>
+          </p:cNvPr>
+          <p:cNvCxnSpPr>
+            <a:cxnSpLocks/>
+            <a:stCxn id="86" idx="0"/>
+          </p:cNvCxnSpPr>
+          <p:nvPr/>
+        </p:nvCxnSpPr>
+        <p:spPr>
+          <a:xfrm rot="16200000" flipH="1">
+            <a:off x="7656384" y="-878441"/>
+            <a:ext cx="6350" cy="3622024"/>
+          </a:xfrm>
+          <a:prstGeom prst="bentConnector4">
+            <a:avLst>
+              <a:gd name="adj1" fmla="val -8649354"/>
+              <a:gd name="adj2" fmla="val 99836"/>
+            </a:avLst>
+          </a:prstGeom>
+          <a:ln w="28575">
+            <a:solidFill>
+              <a:schemeClr val="tx1"/>
+            </a:solidFill>
+            <a:prstDash val="sysDot"/>
+            <a:tailEnd type="triangle"/>
+          </a:ln>
+        </p:spPr>
+        <p:style>
+          <a:lnRef idx="1">
+            <a:schemeClr val="accent1"/>
+          </a:lnRef>
+          <a:fillRef idx="0">
+            <a:schemeClr val="accent1"/>
+          </a:fillRef>
+          <a:effectRef idx="0">
+            <a:schemeClr val="accent1"/>
+          </a:effectRef>
+          <a:fontRef idx="minor">
+            <a:schemeClr val="tx1"/>
+          </a:fontRef>
+        </p:style>
+      </p:cxnSp>
+      <p:sp>
+        <p:nvSpPr>
+          <p:cNvPr id="74" name="文本框 73">
+            <a:extLst>
+              <a:ext uri="{FF2B5EF4-FFF2-40B4-BE49-F238E27FC236}">
+                <a16:creationId xmlns:a16="http://schemas.microsoft.com/office/drawing/2014/main" id="{FF1BEBED-7238-432A-8CF8-5E07C550575D}"/>
+              </a:ext>
+            </a:extLst>
+          </p:cNvPr>
+          <p:cNvSpPr txBox="1"/>
+          <p:nvPr/>
+        </p:nvSpPr>
+        <p:spPr>
+          <a:xfrm>
+            <a:off x="9470571" y="395107"/>
+            <a:ext cx="1560042" cy="338554"/>
+          </a:xfrm>
+          <a:prstGeom prst="rect">
+            <a:avLst/>
+          </a:prstGeom>
+          <a:noFill/>
+        </p:spPr>
+        <p:txBody>
+          <a:bodyPr wrap="none" rtlCol="0">
+            <a:spAutoFit/>
+          </a:bodyPr>
+          <a:lstStyle/>
+          <a:p>
+            <a:r>
+              <a:rPr lang="en-US" altLang="zh-CN" sz="1600" dirty="0">
+                <a:latin typeface="Times New Roman" panose="02020603050405020304" pitchFamily="18" charset="0"/>
+                <a:ea typeface="宋体" panose="02010600030101010101" pitchFamily="2" charset="-122"/>
+                <a:cs typeface="Times New Roman" panose="02020603050405020304" pitchFamily="18" charset="0"/>
+              </a:rPr>
+              <a:t>forwarding </a:t>
+            </a:r>
+            <a:r>
+              <a:rPr lang="zh-CN" altLang="en-US" sz="1600" dirty="0">
+                <a:latin typeface="Times New Roman" panose="02020603050405020304" pitchFamily="18" charset="0"/>
+                <a:ea typeface="宋体" panose="02010600030101010101" pitchFamily="2" charset="-122"/>
+                <a:cs typeface="Times New Roman" panose="02020603050405020304" pitchFamily="18" charset="0"/>
+              </a:rPr>
+              <a:t>指针</a:t>
+            </a:r>
+          </a:p>
+        </p:txBody>
+      </p:sp>
+      <p:sp>
+        <p:nvSpPr>
+          <p:cNvPr id="111" name="文本框 110">
+            <a:extLst>
+              <a:ext uri="{FF2B5EF4-FFF2-40B4-BE49-F238E27FC236}">
+                <a16:creationId xmlns:a16="http://schemas.microsoft.com/office/drawing/2014/main" id="{CAB03332-A267-4F01-A81F-442310F12F82}"/>
+              </a:ext>
+            </a:extLst>
+          </p:cNvPr>
+          <p:cNvSpPr txBox="1"/>
+          <p:nvPr/>
+        </p:nvSpPr>
+        <p:spPr>
+          <a:xfrm>
+            <a:off x="4363434" y="6156505"/>
+            <a:ext cx="4456669" cy="369332"/>
+          </a:xfrm>
+          <a:prstGeom prst="rect">
+            <a:avLst/>
+          </a:prstGeom>
+          <a:noFill/>
+        </p:spPr>
+        <p:txBody>
+          <a:bodyPr wrap="none" rtlCol="0">
+            <a:spAutoFit/>
+          </a:bodyPr>
+          <a:lstStyle/>
+          <a:p>
+            <a:r>
+              <a:rPr lang="zh-CN" altLang="en-US" b="1" dirty="0">
+                <a:latin typeface="Times New Roman" panose="02020603050405020304" pitchFamily="18" charset="0"/>
+                <a:ea typeface="宋体" panose="02010600030101010101" pitchFamily="2" charset="-122"/>
+                <a:cs typeface="Times New Roman" panose="02020603050405020304" pitchFamily="18" charset="0"/>
+              </a:rPr>
+              <a:t>④ 循环结束，清空旧 </a:t>
+            </a:r>
+            <a:r>
+              <a:rPr lang="en-US" altLang="zh-CN" b="1" dirty="0">
+                <a:latin typeface="Times New Roman" panose="02020603050405020304" pitchFamily="18" charset="0"/>
+                <a:ea typeface="宋体" panose="02010600030101010101" pitchFamily="2" charset="-122"/>
+                <a:cs typeface="Times New Roman" panose="02020603050405020304" pitchFamily="18" charset="0"/>
+              </a:rPr>
+              <a:t>Eden </a:t>
+            </a:r>
+            <a:r>
+              <a:rPr lang="zh-CN" altLang="en-US" b="1" dirty="0">
+                <a:latin typeface="Times New Roman" panose="02020603050405020304" pitchFamily="18" charset="0"/>
+                <a:ea typeface="宋体" panose="02010600030101010101" pitchFamily="2" charset="-122"/>
+                <a:cs typeface="Times New Roman" panose="02020603050405020304" pitchFamily="18" charset="0"/>
+              </a:rPr>
+              <a:t>区并交换空间</a:t>
+            </a:r>
+          </a:p>
+        </p:txBody>
+      </p:sp>
+      <p:grpSp>
+        <p:nvGrpSpPr>
+          <p:cNvPr id="112" name="组合 111">
+            <a:extLst>
+              <a:ext uri="{FF2B5EF4-FFF2-40B4-BE49-F238E27FC236}">
+                <a16:creationId xmlns:a16="http://schemas.microsoft.com/office/drawing/2014/main" id="{BA6633AE-5A50-4626-A8A8-101F5E0B21C6}"/>
+              </a:ext>
+            </a:extLst>
+          </p:cNvPr>
+          <p:cNvGrpSpPr/>
+          <p:nvPr/>
+        </p:nvGrpSpPr>
+        <p:grpSpPr>
+          <a:xfrm>
+            <a:off x="296934" y="4201023"/>
+            <a:ext cx="10598676" cy="1332843"/>
+            <a:chOff x="296934" y="371210"/>
+            <a:chExt cx="10598676" cy="1332843"/>
+          </a:xfrm>
+        </p:grpSpPr>
+        <p:sp>
+          <p:nvSpPr>
+            <p:cNvPr id="113" name="矩形 112">
+              <a:extLst>
+                <a:ext uri="{FF2B5EF4-FFF2-40B4-BE49-F238E27FC236}">
+                  <a16:creationId xmlns:a16="http://schemas.microsoft.com/office/drawing/2014/main" id="{F1C553ED-D151-413C-AB67-B34F3A45BDA2}"/>
+                </a:ext>
+              </a:extLst>
+            </p:cNvPr>
+            <p:cNvSpPr/>
+            <p:nvPr/>
+          </p:nvSpPr>
+          <p:spPr>
+            <a:xfrm>
+              <a:off x="2107819" y="546263"/>
+              <a:ext cx="760021" cy="748146"/>
+            </a:xfrm>
+            <a:prstGeom prst="rect">
+              <a:avLst/>
+            </a:prstGeom>
+            <a:noFill/>
+            <a:ln w="38100">
+              <a:solidFill>
+                <a:schemeClr val="tx1"/>
+              </a:solidFill>
+            </a:ln>
+          </p:spPr>
+          <p:style>
+            <a:lnRef idx="2">
+              <a:schemeClr val="accent1">
+                <a:shade val="50000"/>
+              </a:schemeClr>
+            </a:lnRef>
+            <a:fillRef idx="1">
+              <a:schemeClr val="accent1"/>
+            </a:fillRef>
+            <a:effectRef idx="0">
+              <a:schemeClr val="accent1"/>
+            </a:effectRef>
+            <a:fontRef idx="minor">
+              <a:schemeClr val="lt1"/>
+            </a:fontRef>
+          </p:style>
+          <p:txBody>
+            <a:bodyPr rtlCol="0" anchor="ctr"/>
+            <a:lstStyle/>
+            <a:p>
+              <a:pPr algn="ctr"/>
+              <a:r>
+                <a:rPr lang="en-US" altLang="zh-CN" dirty="0">
+                  <a:solidFill>
+                    <a:schemeClr val="tx1"/>
+                  </a:solidFill>
+                  <a:latin typeface="Times New Roman" panose="02020603050405020304" pitchFamily="18" charset="0"/>
+                  <a:cs typeface="Times New Roman" panose="02020603050405020304" pitchFamily="18" charset="0"/>
+                </a:rPr>
+                <a:t>A</a:t>
+              </a:r>
+              <a:endParaRPr lang="zh-CN" altLang="en-US" dirty="0">
+                <a:solidFill>
+                  <a:schemeClr val="tx1"/>
+                </a:solidFill>
+                <a:latin typeface="Times New Roman" panose="02020603050405020304" pitchFamily="18" charset="0"/>
+                <a:cs typeface="Times New Roman" panose="02020603050405020304" pitchFamily="18" charset="0"/>
+              </a:endParaRPr>
+            </a:p>
+          </p:txBody>
+        </p:sp>
+        <p:sp>
+          <p:nvSpPr>
+            <p:cNvPr id="114" name="矩形 113">
+              <a:extLst>
+                <a:ext uri="{FF2B5EF4-FFF2-40B4-BE49-F238E27FC236}">
+                  <a16:creationId xmlns:a16="http://schemas.microsoft.com/office/drawing/2014/main" id="{B8FDC3AE-5886-49EC-9341-79769917A065}"/>
+                </a:ext>
+              </a:extLst>
+            </p:cNvPr>
+            <p:cNvSpPr/>
+            <p:nvPr/>
+          </p:nvSpPr>
+          <p:spPr>
+            <a:xfrm>
+              <a:off x="3228058" y="546263"/>
+              <a:ext cx="760021" cy="748146"/>
+            </a:xfrm>
+            <a:prstGeom prst="rect">
+              <a:avLst/>
+            </a:prstGeom>
+            <a:noFill/>
+            <a:ln w="38100">
+              <a:solidFill>
+                <a:schemeClr val="tx1"/>
+              </a:solidFill>
+            </a:ln>
+          </p:spPr>
+          <p:style>
+            <a:lnRef idx="2">
+              <a:schemeClr val="accent1">
+                <a:shade val="50000"/>
+              </a:schemeClr>
+            </a:lnRef>
+            <a:fillRef idx="1">
+              <a:schemeClr val="accent1"/>
+            </a:fillRef>
+            <a:effectRef idx="0">
+              <a:schemeClr val="accent1"/>
+            </a:effectRef>
+            <a:fontRef idx="minor">
+              <a:schemeClr val="lt1"/>
+            </a:fontRef>
+          </p:style>
+          <p:txBody>
+            <a:bodyPr rtlCol="0" anchor="ctr"/>
+            <a:lstStyle/>
+            <a:p>
+              <a:pPr algn="ctr"/>
+              <a:r>
+                <a:rPr lang="en-US" altLang="zh-CN" dirty="0">
+                  <a:solidFill>
+                    <a:schemeClr val="tx1"/>
+                  </a:solidFill>
+                  <a:latin typeface="Times New Roman" panose="02020603050405020304" pitchFamily="18" charset="0"/>
+                  <a:cs typeface="Times New Roman" panose="02020603050405020304" pitchFamily="18" charset="0"/>
+                </a:rPr>
+                <a:t>B</a:t>
+              </a:r>
+              <a:endParaRPr lang="zh-CN" altLang="en-US" dirty="0">
+                <a:solidFill>
+                  <a:schemeClr val="tx1"/>
+                </a:solidFill>
+                <a:latin typeface="Times New Roman" panose="02020603050405020304" pitchFamily="18" charset="0"/>
+                <a:cs typeface="Times New Roman" panose="02020603050405020304" pitchFamily="18" charset="0"/>
+              </a:endParaRPr>
+            </a:p>
+          </p:txBody>
+        </p:sp>
+        <p:sp>
+          <p:nvSpPr>
+            <p:cNvPr id="116" name="矩形 115">
+              <a:extLst>
+                <a:ext uri="{FF2B5EF4-FFF2-40B4-BE49-F238E27FC236}">
+                  <a16:creationId xmlns:a16="http://schemas.microsoft.com/office/drawing/2014/main" id="{ABCEF77E-D467-4635-ACA8-2299E3B2485D}"/>
+                </a:ext>
+              </a:extLst>
+            </p:cNvPr>
+            <p:cNvSpPr/>
+            <p:nvPr/>
+          </p:nvSpPr>
+          <p:spPr>
+            <a:xfrm>
+              <a:off x="1927710" y="427508"/>
+              <a:ext cx="8967900" cy="1276545"/>
+            </a:xfrm>
+            <a:prstGeom prst="rect">
+              <a:avLst/>
+            </a:prstGeom>
+            <a:noFill/>
+            <a:ln w="19050">
+              <a:solidFill>
+                <a:schemeClr val="tx1"/>
+              </a:solidFill>
+            </a:ln>
+          </p:spPr>
+          <p:style>
+            <a:lnRef idx="2">
+              <a:schemeClr val="accent1">
+                <a:shade val="50000"/>
+              </a:schemeClr>
+            </a:lnRef>
+            <a:fillRef idx="1">
+              <a:schemeClr val="accent1"/>
+            </a:fillRef>
+            <a:effectRef idx="0">
+              <a:schemeClr val="accent1"/>
+            </a:effectRef>
+            <a:fontRef idx="minor">
+              <a:schemeClr val="lt1"/>
+            </a:fontRef>
+          </p:style>
+          <p:txBody>
+            <a:bodyPr rtlCol="0" anchor="ctr"/>
+            <a:lstStyle/>
+            <a:p>
+              <a:pPr algn="ctr"/>
+              <a:endParaRPr lang="zh-CN" altLang="en-US"/>
+            </a:p>
+          </p:txBody>
+        </p:sp>
+        <p:sp>
+          <p:nvSpPr>
+            <p:cNvPr id="117" name="文本框 116">
+              <a:extLst>
+                <a:ext uri="{FF2B5EF4-FFF2-40B4-BE49-F238E27FC236}">
+                  <a16:creationId xmlns:a16="http://schemas.microsoft.com/office/drawing/2014/main" id="{0F1889AC-3CBA-4177-A809-EFEFA2F545BB}"/>
+                </a:ext>
+              </a:extLst>
+            </p:cNvPr>
+            <p:cNvSpPr txBox="1"/>
+            <p:nvPr/>
+          </p:nvSpPr>
+          <p:spPr>
+            <a:xfrm>
+              <a:off x="3726656" y="1359534"/>
+              <a:ext cx="862737" cy="338554"/>
+            </a:xfrm>
+            <a:prstGeom prst="rect">
+              <a:avLst/>
+            </a:prstGeom>
+            <a:noFill/>
+          </p:spPr>
+          <p:txBody>
+            <a:bodyPr wrap="none" rtlCol="0">
+              <a:spAutoFit/>
+            </a:bodyPr>
+            <a:lstStyle/>
+            <a:p>
+              <a:r>
+                <a:rPr lang="en-US" altLang="zh-CN" sz="1600" dirty="0">
+                  <a:latin typeface="Times New Roman" panose="02020603050405020304" pitchFamily="18" charset="0"/>
+                  <a:ea typeface="宋体" panose="02010600030101010101" pitchFamily="2" charset="-122"/>
+                  <a:cs typeface="Times New Roman" panose="02020603050405020304" pitchFamily="18" charset="0"/>
+                </a:rPr>
+                <a:t>Eden </a:t>
+              </a:r>
+              <a:r>
+                <a:rPr lang="zh-CN" altLang="en-US" sz="1600" dirty="0">
+                  <a:latin typeface="Times New Roman" panose="02020603050405020304" pitchFamily="18" charset="0"/>
+                  <a:ea typeface="宋体" panose="02010600030101010101" pitchFamily="2" charset="-122"/>
+                  <a:cs typeface="Times New Roman" panose="02020603050405020304" pitchFamily="18" charset="0"/>
+                </a:rPr>
+                <a:t>区</a:t>
+              </a:r>
+            </a:p>
+          </p:txBody>
+        </p:sp>
+        <p:sp>
+          <p:nvSpPr>
+            <p:cNvPr id="118" name="文本框 117">
+              <a:extLst>
+                <a:ext uri="{FF2B5EF4-FFF2-40B4-BE49-F238E27FC236}">
+                  <a16:creationId xmlns:a16="http://schemas.microsoft.com/office/drawing/2014/main" id="{CEEEDE6B-2DEA-4ED5-B433-F2852D2260D4}"/>
+                </a:ext>
+              </a:extLst>
+            </p:cNvPr>
+            <p:cNvSpPr txBox="1"/>
+            <p:nvPr/>
+          </p:nvSpPr>
+          <p:spPr>
+            <a:xfrm>
+              <a:off x="8073188" y="1359534"/>
+              <a:ext cx="1160895" cy="338554"/>
+            </a:xfrm>
+            <a:prstGeom prst="rect">
+              <a:avLst/>
+            </a:prstGeom>
+            <a:noFill/>
+          </p:spPr>
+          <p:txBody>
+            <a:bodyPr wrap="none" rtlCol="0">
+              <a:spAutoFit/>
+            </a:bodyPr>
+            <a:lstStyle/>
+            <a:p>
+              <a:r>
+                <a:rPr lang="en-US" altLang="zh-CN" sz="1600" dirty="0">
+                  <a:latin typeface="Times New Roman" panose="02020603050405020304" pitchFamily="18" charset="0"/>
+                  <a:ea typeface="宋体" panose="02010600030101010101" pitchFamily="2" charset="-122"/>
+                  <a:cs typeface="Times New Roman" panose="02020603050405020304" pitchFamily="18" charset="0"/>
+                </a:rPr>
+                <a:t>Survivor </a:t>
+              </a:r>
+              <a:r>
+                <a:rPr lang="zh-CN" altLang="en-US" sz="1600" dirty="0">
+                  <a:latin typeface="Times New Roman" panose="02020603050405020304" pitchFamily="18" charset="0"/>
+                  <a:ea typeface="宋体" panose="02010600030101010101" pitchFamily="2" charset="-122"/>
+                  <a:cs typeface="Times New Roman" panose="02020603050405020304" pitchFamily="18" charset="0"/>
+                </a:rPr>
+                <a:t>区</a:t>
+              </a:r>
+            </a:p>
+          </p:txBody>
+        </p:sp>
+        <p:sp>
+          <p:nvSpPr>
+            <p:cNvPr id="120" name="椭圆 119">
+              <a:extLst>
+                <a:ext uri="{FF2B5EF4-FFF2-40B4-BE49-F238E27FC236}">
+                  <a16:creationId xmlns:a16="http://schemas.microsoft.com/office/drawing/2014/main" id="{F81B3FDD-6843-45D3-9E9E-D1B27698607F}"/>
+                </a:ext>
+              </a:extLst>
+            </p:cNvPr>
+            <p:cNvSpPr/>
+            <p:nvPr/>
+          </p:nvSpPr>
+          <p:spPr>
+            <a:xfrm>
+              <a:off x="296934" y="371210"/>
+              <a:ext cx="1250766" cy="1098252"/>
+            </a:xfrm>
+            <a:prstGeom prst="ellipse">
+              <a:avLst/>
+            </a:prstGeom>
+            <a:noFill/>
+            <a:ln w="28575">
+              <a:solidFill>
+                <a:schemeClr val="tx1"/>
+              </a:solidFill>
+            </a:ln>
+          </p:spPr>
+          <p:style>
+            <a:lnRef idx="2">
+              <a:schemeClr val="accent1">
+                <a:shade val="50000"/>
+              </a:schemeClr>
+            </a:lnRef>
+            <a:fillRef idx="1">
+              <a:schemeClr val="accent1"/>
+            </a:fillRef>
+            <a:effectRef idx="0">
+              <a:schemeClr val="accent1"/>
+            </a:effectRef>
+            <a:fontRef idx="minor">
+              <a:schemeClr val="lt1"/>
+            </a:fontRef>
+          </p:style>
+          <p:txBody>
+            <a:bodyPr rtlCol="0" anchor="ctr"/>
+            <a:lstStyle/>
+            <a:p>
+              <a:pPr algn="ctr"/>
+              <a:r>
+                <a:rPr lang="zh-CN" altLang="en-US" dirty="0">
+                  <a:solidFill>
+                    <a:schemeClr val="tx1"/>
+                  </a:solidFill>
+                  <a:latin typeface="宋体" panose="02010600030101010101" pitchFamily="2" charset="-122"/>
+                  <a:ea typeface="宋体" panose="02010600030101010101" pitchFamily="2" charset="-122"/>
+                </a:rPr>
+                <a:t>根集合</a:t>
+              </a:r>
+            </a:p>
+          </p:txBody>
+        </p:sp>
+        <p:sp>
+          <p:nvSpPr>
+            <p:cNvPr id="122" name="矩形 121">
+              <a:extLst>
+                <a:ext uri="{FF2B5EF4-FFF2-40B4-BE49-F238E27FC236}">
+                  <a16:creationId xmlns:a16="http://schemas.microsoft.com/office/drawing/2014/main" id="{6F714A8F-8597-402B-8359-314D235D6E22}"/>
+                </a:ext>
+              </a:extLst>
+            </p:cNvPr>
+            <p:cNvSpPr/>
+            <p:nvPr/>
+          </p:nvSpPr>
+          <p:spPr>
+            <a:xfrm>
+              <a:off x="4348296" y="539914"/>
+              <a:ext cx="760021" cy="748146"/>
+            </a:xfrm>
+            <a:prstGeom prst="rect">
+              <a:avLst/>
+            </a:prstGeom>
+            <a:noFill/>
+            <a:ln w="38100">
+              <a:solidFill>
+                <a:schemeClr val="tx1"/>
+              </a:solidFill>
+            </a:ln>
+          </p:spPr>
+          <p:style>
+            <a:lnRef idx="2">
+              <a:schemeClr val="accent1">
+                <a:shade val="50000"/>
+              </a:schemeClr>
+            </a:lnRef>
+            <a:fillRef idx="1">
+              <a:schemeClr val="accent1"/>
+            </a:fillRef>
+            <a:effectRef idx="0">
+              <a:schemeClr val="accent1"/>
+            </a:effectRef>
+            <a:fontRef idx="minor">
+              <a:schemeClr val="lt1"/>
+            </a:fontRef>
+          </p:style>
+          <p:txBody>
+            <a:bodyPr rtlCol="0" anchor="ctr"/>
+            <a:lstStyle/>
+            <a:p>
+              <a:pPr algn="ctr"/>
+              <a:r>
+                <a:rPr lang="en-US" altLang="zh-CN" dirty="0">
+                  <a:solidFill>
+                    <a:schemeClr val="tx1"/>
+                  </a:solidFill>
+                  <a:latin typeface="Times New Roman" panose="02020603050405020304" pitchFamily="18" charset="0"/>
+                  <a:cs typeface="Times New Roman" panose="02020603050405020304" pitchFamily="18" charset="0"/>
+                </a:rPr>
+                <a:t>D</a:t>
+              </a:r>
+              <a:endParaRPr lang="zh-CN" altLang="en-US" dirty="0">
+                <a:solidFill>
+                  <a:schemeClr val="tx1"/>
+                </a:solidFill>
+                <a:latin typeface="Times New Roman" panose="02020603050405020304" pitchFamily="18" charset="0"/>
+                <a:cs typeface="Times New Roman" panose="02020603050405020304" pitchFamily="18" charset="0"/>
+              </a:endParaRPr>
+            </a:p>
+          </p:txBody>
+        </p:sp>
+        <p:cxnSp>
+          <p:nvCxnSpPr>
+            <p:cNvPr id="123" name="直接连接符 122">
+              <a:extLst>
+                <a:ext uri="{FF2B5EF4-FFF2-40B4-BE49-F238E27FC236}">
+                  <a16:creationId xmlns:a16="http://schemas.microsoft.com/office/drawing/2014/main" id="{7FB7B350-2C64-4B12-808B-28A796586527}"/>
+                </a:ext>
+              </a:extLst>
+            </p:cNvPr>
+            <p:cNvCxnSpPr>
+              <a:stCxn id="116" idx="0"/>
+              <a:endCxn id="116" idx="2"/>
+            </p:cNvCxnSpPr>
+            <p:nvPr/>
+          </p:nvCxnSpPr>
+          <p:spPr>
+            <a:xfrm>
+              <a:off x="6411660" y="427508"/>
+              <a:ext cx="0" cy="1276545"/>
+            </a:xfrm>
+            <a:prstGeom prst="line">
+              <a:avLst/>
+            </a:prstGeom>
+            <a:ln w="19050">
+              <a:solidFill>
+                <a:schemeClr val="tx1"/>
+              </a:solidFill>
+            </a:ln>
+          </p:spPr>
+          <p:style>
+            <a:lnRef idx="1">
+              <a:schemeClr val="accent1"/>
+            </a:lnRef>
+            <a:fillRef idx="0">
+              <a:schemeClr val="accent1"/>
+            </a:fillRef>
+            <a:effectRef idx="0">
+              <a:schemeClr val="accent1"/>
+            </a:effectRef>
+            <a:fontRef idx="minor">
+              <a:schemeClr val="tx1"/>
+            </a:fontRef>
+          </p:style>
+        </p:cxnSp>
+        <p:cxnSp>
+          <p:nvCxnSpPr>
+            <p:cNvPr id="124" name="直接箭头连接符 123">
+              <a:extLst>
+                <a:ext uri="{FF2B5EF4-FFF2-40B4-BE49-F238E27FC236}">
+                  <a16:creationId xmlns:a16="http://schemas.microsoft.com/office/drawing/2014/main" id="{067D98DA-EB7D-4505-BDD7-5D4C72877E8F}"/>
+                </a:ext>
+              </a:extLst>
+            </p:cNvPr>
+            <p:cNvCxnSpPr>
+              <a:stCxn id="114" idx="1"/>
+              <a:endCxn id="113" idx="3"/>
+            </p:cNvCxnSpPr>
+            <p:nvPr/>
+          </p:nvCxnSpPr>
+          <p:spPr>
+            <a:xfrm flipH="1">
+              <a:off x="2867840" y="920336"/>
+              <a:ext cx="360218" cy="0"/>
+            </a:xfrm>
+            <a:prstGeom prst="straightConnector1">
+              <a:avLst/>
+            </a:prstGeom>
+            <a:ln w="28575">
+              <a:solidFill>
+                <a:schemeClr val="tx1"/>
+              </a:solidFill>
+              <a:tailEnd type="triangle"/>
+            </a:ln>
+          </p:spPr>
+          <p:style>
+            <a:lnRef idx="1">
+              <a:schemeClr val="accent1"/>
+            </a:lnRef>
+            <a:fillRef idx="0">
+              <a:schemeClr val="accent1"/>
+            </a:fillRef>
+            <a:effectRef idx="0">
+              <a:schemeClr val="accent1"/>
+            </a:effectRef>
+            <a:fontRef idx="minor">
+              <a:schemeClr val="tx1"/>
+            </a:fontRef>
+          </p:style>
+        </p:cxnSp>
+        <p:cxnSp>
+          <p:nvCxnSpPr>
+            <p:cNvPr id="126" name="连接符: 肘形 125">
+              <a:extLst>
+                <a:ext uri="{FF2B5EF4-FFF2-40B4-BE49-F238E27FC236}">
+                  <a16:creationId xmlns:a16="http://schemas.microsoft.com/office/drawing/2014/main" id="{2372CEDC-E473-46C7-AA97-6078CB3C3B76}"/>
+                </a:ext>
+              </a:extLst>
+            </p:cNvPr>
+            <p:cNvCxnSpPr>
+              <a:stCxn id="113" idx="0"/>
+              <a:endCxn id="122" idx="0"/>
+            </p:cNvCxnSpPr>
+            <p:nvPr/>
+          </p:nvCxnSpPr>
+          <p:spPr>
+            <a:xfrm rot="5400000" flipH="1" flipV="1">
+              <a:off x="3604894" y="-577149"/>
+              <a:ext cx="6349" cy="2240477"/>
+            </a:xfrm>
+            <a:prstGeom prst="bentConnector3">
+              <a:avLst>
+                <a:gd name="adj1" fmla="val 6506206"/>
+              </a:avLst>
+            </a:prstGeom>
+            <a:ln w="28575">
+              <a:solidFill>
+                <a:schemeClr val="tx1"/>
+              </a:solidFill>
+              <a:tailEnd type="triangle"/>
+            </a:ln>
+          </p:spPr>
+          <p:style>
+            <a:lnRef idx="1">
+              <a:schemeClr val="accent1"/>
+            </a:lnRef>
+            <a:fillRef idx="0">
+              <a:schemeClr val="accent1"/>
+            </a:fillRef>
+            <a:effectRef idx="0">
+              <a:schemeClr val="accent1"/>
+            </a:effectRef>
+            <a:fontRef idx="minor">
+              <a:schemeClr val="tx1"/>
+            </a:fontRef>
+          </p:style>
+        </p:cxnSp>
+        <p:cxnSp>
+          <p:nvCxnSpPr>
+            <p:cNvPr id="127" name="连接符: 肘形 126">
+              <a:extLst>
+                <a:ext uri="{FF2B5EF4-FFF2-40B4-BE49-F238E27FC236}">
+                  <a16:creationId xmlns:a16="http://schemas.microsoft.com/office/drawing/2014/main" id="{2CC53810-53E9-461E-8054-0847F85ECA1D}"/>
+                </a:ext>
+              </a:extLst>
+            </p:cNvPr>
+            <p:cNvCxnSpPr>
+              <a:cxnSpLocks/>
+              <a:stCxn id="120" idx="5"/>
+              <a:endCxn id="113" idx="2"/>
+            </p:cNvCxnSpPr>
+            <p:nvPr/>
+          </p:nvCxnSpPr>
+          <p:spPr>
+            <a:xfrm rot="5400000" flipH="1" flipV="1">
+              <a:off x="1919071" y="739868"/>
+              <a:ext cx="14218" cy="1123300"/>
+            </a:xfrm>
+            <a:prstGeom prst="bentConnector3">
+              <a:avLst>
+                <a:gd name="adj1" fmla="val -4325967"/>
+              </a:avLst>
+            </a:prstGeom>
+            <a:ln w="28575">
+              <a:solidFill>
+                <a:schemeClr val="tx1"/>
+              </a:solidFill>
+              <a:tailEnd type="triangle"/>
+            </a:ln>
+          </p:spPr>
+          <p:style>
+            <a:lnRef idx="1">
+              <a:schemeClr val="accent1"/>
+            </a:lnRef>
+            <a:fillRef idx="0">
+              <a:schemeClr val="accent1"/>
+            </a:fillRef>
+            <a:effectRef idx="0">
+              <a:schemeClr val="accent1"/>
+            </a:effectRef>
+            <a:fontRef idx="minor">
+              <a:schemeClr val="tx1"/>
+            </a:fontRef>
+          </p:style>
+        </p:cxnSp>
+        <p:cxnSp>
+          <p:nvCxnSpPr>
+            <p:cNvPr id="128" name="连接符: 肘形 127">
+              <a:extLst>
+                <a:ext uri="{FF2B5EF4-FFF2-40B4-BE49-F238E27FC236}">
+                  <a16:creationId xmlns:a16="http://schemas.microsoft.com/office/drawing/2014/main" id="{51317762-21D1-4933-972E-1C627DC8B324}"/>
+                </a:ext>
+              </a:extLst>
+            </p:cNvPr>
+            <p:cNvCxnSpPr>
+              <a:cxnSpLocks/>
+              <a:stCxn id="120" idx="4"/>
+              <a:endCxn id="114" idx="2"/>
+            </p:cNvCxnSpPr>
+            <p:nvPr/>
+          </p:nvCxnSpPr>
+          <p:spPr>
+            <a:xfrm rot="5400000" flipH="1" flipV="1">
+              <a:off x="2177666" y="39060"/>
+              <a:ext cx="175053" cy="2685752"/>
+            </a:xfrm>
+            <a:prstGeom prst="bentConnector3">
+              <a:avLst>
+                <a:gd name="adj1" fmla="val -442647"/>
+              </a:avLst>
+            </a:prstGeom>
+            <a:ln w="28575">
+              <a:solidFill>
+                <a:schemeClr val="tx1"/>
+              </a:solidFill>
+              <a:tailEnd type="triangle"/>
+            </a:ln>
+          </p:spPr>
+          <p:style>
+            <a:lnRef idx="1">
+              <a:schemeClr val="accent1"/>
+            </a:lnRef>
+            <a:fillRef idx="0">
+              <a:schemeClr val="accent1"/>
+            </a:fillRef>
+            <a:effectRef idx="0">
+              <a:schemeClr val="accent1"/>
+            </a:effectRef>
+            <a:fontRef idx="minor">
+              <a:schemeClr val="tx1"/>
+            </a:fontRef>
+          </p:style>
+        </p:cxnSp>
+      </p:grpSp>
+    </p:spTree>
+    <p:extLst>
+      <p:ext uri="{BB962C8B-B14F-4D97-AF65-F5344CB8AC3E}">
+        <p14:creationId xmlns:p14="http://schemas.microsoft.com/office/powerpoint/2010/main" val="289655280"/>
       </p:ext>
     </p:extLst>
   </p:cSld>

--- a/docs/thesis/pictures.pptx
+++ b/docs/thesis/pictures.pptx
@@ -5,7 +5,7 @@
     <p:sldMasterId id="2147483648" r:id="rId1"/>
   </p:sldMasterIdLst>
   <p:notesMasterIdLst>
-    <p:notesMasterId r:id="rId15"/>
+    <p:notesMasterId r:id="rId16"/>
   </p:notesMasterIdLst>
   <p:sldIdLst>
     <p:sldId id="259" r:id="rId2"/>
@@ -21,6 +21,7 @@
     <p:sldId id="269" r:id="rId12"/>
     <p:sldId id="271" r:id="rId13"/>
     <p:sldId id="272" r:id="rId14"/>
+    <p:sldId id="273" r:id="rId15"/>
   </p:sldIdLst>
   <p:sldSz cx="12192000" cy="6858000"/>
   <p:notesSz cx="6858000" cy="9144000"/>
@@ -13490,7 +13491,7 @@
           <a:p>
             <a:pPr algn="ctr"/>
             <a:r>
-              <a:rPr lang="en-US" altLang="zh-CN" b="1" dirty="0">
+              <a:rPr lang="en-US" altLang="zh-CN" b="1" i="1" dirty="0">
                 <a:solidFill>
                   <a:srgbClr val="FF0000"/>
                 </a:solidFill>
@@ -13499,7 +13500,7 @@
               </a:rPr>
               <a:t>A</a:t>
             </a:r>
-            <a:endParaRPr lang="zh-CN" altLang="en-US" b="1" dirty="0">
+            <a:endParaRPr lang="zh-CN" altLang="en-US" b="1" i="1" dirty="0">
               <a:solidFill>
                 <a:srgbClr val="FF0000"/>
               </a:solidFill>
@@ -13558,7 +13559,7 @@
           <a:p>
             <a:pPr algn="ctr"/>
             <a:r>
-              <a:rPr lang="en-US" altLang="zh-CN" b="1" dirty="0">
+              <a:rPr lang="en-US" altLang="zh-CN" b="1" i="1" dirty="0">
                 <a:solidFill>
                   <a:srgbClr val="FF0000"/>
                 </a:solidFill>
@@ -13567,7 +13568,7 @@
               </a:rPr>
               <a:t>B</a:t>
             </a:r>
-            <a:endParaRPr lang="zh-CN" altLang="en-US" b="1" dirty="0">
+            <a:endParaRPr lang="zh-CN" altLang="en-US" b="1" i="1" dirty="0">
               <a:solidFill>
                 <a:srgbClr val="FF0000"/>
               </a:solidFill>
@@ -14654,6 +14655,1873 @@
     <p:extLst>
       <p:ext uri="{BB962C8B-B14F-4D97-AF65-F5344CB8AC3E}">
         <p14:creationId xmlns:p14="http://schemas.microsoft.com/office/powerpoint/2010/main" val="289655280"/>
+      </p:ext>
+    </p:extLst>
+  </p:cSld>
+  <p:clrMapOvr>
+    <a:masterClrMapping/>
+  </p:clrMapOvr>
+</p:sld>
+</file>
+
+<file path=ppt/slides/slide14.xml><?xml version="1.0" encoding="utf-8"?>
+<p:sld xmlns:a="http://schemas.openxmlformats.org/drawingml/2006/main" xmlns:r="http://schemas.openxmlformats.org/officeDocument/2006/relationships" xmlns:p="http://schemas.openxmlformats.org/presentationml/2006/main">
+  <p:cSld>
+    <p:spTree>
+      <p:nvGrpSpPr>
+        <p:cNvPr id="1" name=""/>
+        <p:cNvGrpSpPr/>
+        <p:nvPr/>
+      </p:nvGrpSpPr>
+      <p:grpSpPr>
+        <a:xfrm>
+          <a:off x="0" y="0"/>
+          <a:ext cx="0" cy="0"/>
+          <a:chOff x="0" y="0"/>
+          <a:chExt cx="0" cy="0"/>
+        </a:xfrm>
+      </p:grpSpPr>
+      <p:sp>
+        <p:nvSpPr>
+          <p:cNvPr id="4" name="矩形 3">
+            <a:extLst>
+              <a:ext uri="{FF2B5EF4-FFF2-40B4-BE49-F238E27FC236}">
+                <a16:creationId xmlns:a16="http://schemas.microsoft.com/office/drawing/2014/main" id="{8C54B052-85EC-43C7-895F-390F52C4BF41}"/>
+              </a:ext>
+            </a:extLst>
+          </p:cNvPr>
+          <p:cNvSpPr/>
+          <p:nvPr/>
+        </p:nvSpPr>
+        <p:spPr>
+          <a:xfrm>
+            <a:off x="694706" y="1163783"/>
+            <a:ext cx="2511632" cy="2576946"/>
+          </a:xfrm>
+          <a:prstGeom prst="rect">
+            <a:avLst/>
+          </a:prstGeom>
+          <a:noFill/>
+          <a:ln w="28575">
+            <a:solidFill>
+              <a:schemeClr val="tx1"/>
+            </a:solidFill>
+          </a:ln>
+        </p:spPr>
+        <p:style>
+          <a:lnRef idx="2">
+            <a:schemeClr val="accent1">
+              <a:shade val="50000"/>
+            </a:schemeClr>
+          </a:lnRef>
+          <a:fillRef idx="1">
+            <a:schemeClr val="accent1"/>
+          </a:fillRef>
+          <a:effectRef idx="0">
+            <a:schemeClr val="accent1"/>
+          </a:effectRef>
+          <a:fontRef idx="minor">
+            <a:schemeClr val="lt1"/>
+          </a:fontRef>
+        </p:style>
+        <p:txBody>
+          <a:bodyPr rtlCol="0" anchor="ctr"/>
+          <a:lstStyle/>
+          <a:p>
+            <a:pPr algn="ctr"/>
+            <a:endParaRPr lang="zh-CN" altLang="en-US"/>
+          </a:p>
+        </p:txBody>
+      </p:sp>
+      <p:sp>
+        <p:nvSpPr>
+          <p:cNvPr id="5" name="文本框 4">
+            <a:extLst>
+              <a:ext uri="{FF2B5EF4-FFF2-40B4-BE49-F238E27FC236}">
+                <a16:creationId xmlns:a16="http://schemas.microsoft.com/office/drawing/2014/main" id="{959B3CC8-61B6-4C97-9146-47C90EB9958F}"/>
+              </a:ext>
+            </a:extLst>
+          </p:cNvPr>
+          <p:cNvSpPr txBox="1"/>
+          <p:nvPr/>
+        </p:nvSpPr>
+        <p:spPr>
+          <a:xfrm>
+            <a:off x="830664" y="1288474"/>
+            <a:ext cx="2276585" cy="369332"/>
+          </a:xfrm>
+          <a:prstGeom prst="rect">
+            <a:avLst/>
+          </a:prstGeom>
+          <a:noFill/>
+        </p:spPr>
+        <p:txBody>
+          <a:bodyPr wrap="none" rtlCol="0">
+            <a:spAutoFit/>
+          </a:bodyPr>
+          <a:lstStyle/>
+          <a:p>
+            <a:r>
+              <a:rPr lang="en-US" altLang="zh-CN" b="1" dirty="0">
+                <a:latin typeface="Times New Roman" panose="02020603050405020304" pitchFamily="18" charset="0"/>
+                <a:ea typeface="宋体" panose="02010600030101010101" pitchFamily="2" charset="-122"/>
+                <a:cs typeface="Times New Roman" panose="02020603050405020304" pitchFamily="18" charset="0"/>
+              </a:rPr>
+              <a:t>VM C++ </a:t>
+            </a:r>
+            <a:r>
+              <a:rPr lang="zh-CN" altLang="en-US" b="1" dirty="0">
+                <a:latin typeface="Times New Roman" panose="02020603050405020304" pitchFamily="18" charset="0"/>
+                <a:ea typeface="宋体" panose="02010600030101010101" pitchFamily="2" charset="-122"/>
+                <a:cs typeface="Times New Roman" panose="02020603050405020304" pitchFamily="18" charset="0"/>
+              </a:rPr>
+              <a:t>本地执行栈</a:t>
+            </a:r>
+          </a:p>
+        </p:txBody>
+      </p:sp>
+      <p:sp>
+        <p:nvSpPr>
+          <p:cNvPr id="7" name="矩形 6">
+            <a:extLst>
+              <a:ext uri="{FF2B5EF4-FFF2-40B4-BE49-F238E27FC236}">
+                <a16:creationId xmlns:a16="http://schemas.microsoft.com/office/drawing/2014/main" id="{5839B98B-0399-48AC-BA70-D6DF25FBDACB}"/>
+              </a:ext>
+            </a:extLst>
+          </p:cNvPr>
+          <p:cNvSpPr/>
+          <p:nvPr/>
+        </p:nvSpPr>
+        <p:spPr>
+          <a:xfrm>
+            <a:off x="923002" y="1764084"/>
+            <a:ext cx="2055040" cy="641267"/>
+          </a:xfrm>
+          <a:prstGeom prst="rect">
+            <a:avLst/>
+          </a:prstGeom>
+          <a:noFill/>
+          <a:ln w="28575">
+            <a:solidFill>
+              <a:schemeClr val="tx1"/>
+            </a:solidFill>
+          </a:ln>
+        </p:spPr>
+        <p:style>
+          <a:lnRef idx="2">
+            <a:schemeClr val="accent1">
+              <a:shade val="50000"/>
+            </a:schemeClr>
+          </a:lnRef>
+          <a:fillRef idx="1">
+            <a:schemeClr val="accent1"/>
+          </a:fillRef>
+          <a:effectRef idx="0">
+            <a:schemeClr val="accent1"/>
+          </a:effectRef>
+          <a:fontRef idx="minor">
+            <a:schemeClr val="lt1"/>
+          </a:fontRef>
+        </p:style>
+        <p:txBody>
+          <a:bodyPr rtlCol="0" anchor="ctr"/>
+          <a:lstStyle/>
+          <a:p>
+            <a:pPr algn="ctr"/>
+            <a:r>
+              <a:rPr lang="zh-CN" altLang="en-US" sz="1600" dirty="0">
+                <a:solidFill>
+                  <a:schemeClr val="tx1"/>
+                </a:solidFill>
+                <a:latin typeface="Times New Roman" panose="02020603050405020304" pitchFamily="18" charset="0"/>
+                <a:ea typeface="宋体" panose="02010600030101010101" pitchFamily="2" charset="-122"/>
+                <a:cs typeface="Times New Roman" panose="02020603050405020304" pitchFamily="18" charset="0"/>
+              </a:rPr>
+              <a:t>对象句柄 </a:t>
+            </a:r>
+            <a:r>
+              <a:rPr lang="en-US" altLang="zh-CN" sz="1600" dirty="0">
+                <a:solidFill>
+                  <a:schemeClr val="tx1"/>
+                </a:solidFill>
+                <a:latin typeface="Times New Roman" panose="02020603050405020304" pitchFamily="18" charset="0"/>
+                <a:ea typeface="宋体" panose="02010600030101010101" pitchFamily="2" charset="-122"/>
+                <a:cs typeface="Times New Roman" panose="02020603050405020304" pitchFamily="18" charset="0"/>
+              </a:rPr>
+              <a:t>1</a:t>
+            </a:r>
+          </a:p>
+          <a:p>
+            <a:pPr algn="ctr"/>
+            <a:r>
+              <a:rPr lang="en-US" altLang="zh-CN" sz="1600" dirty="0">
+                <a:solidFill>
+                  <a:schemeClr val="tx1"/>
+                </a:solidFill>
+                <a:latin typeface="Times New Roman" panose="02020603050405020304" pitchFamily="18" charset="0"/>
+                <a:ea typeface="宋体" panose="02010600030101010101" pitchFamily="2" charset="-122"/>
+                <a:cs typeface="Times New Roman" panose="02020603050405020304" pitchFamily="18" charset="0"/>
+              </a:rPr>
+              <a:t>Handle&lt;PyObject&gt; a</a:t>
+            </a:r>
+            <a:endParaRPr lang="zh-CN" altLang="en-US" sz="1600" dirty="0">
+              <a:solidFill>
+                <a:schemeClr val="tx1"/>
+              </a:solidFill>
+              <a:latin typeface="Times New Roman" panose="02020603050405020304" pitchFamily="18" charset="0"/>
+              <a:ea typeface="宋体" panose="02010600030101010101" pitchFamily="2" charset="-122"/>
+              <a:cs typeface="Times New Roman" panose="02020603050405020304" pitchFamily="18" charset="0"/>
+            </a:endParaRPr>
+          </a:p>
+        </p:txBody>
+      </p:sp>
+      <p:sp>
+        <p:nvSpPr>
+          <p:cNvPr id="8" name="矩形 7">
+            <a:extLst>
+              <a:ext uri="{FF2B5EF4-FFF2-40B4-BE49-F238E27FC236}">
+                <a16:creationId xmlns:a16="http://schemas.microsoft.com/office/drawing/2014/main" id="{9C59DB27-B462-48EF-A2D4-540A9BA5ED36}"/>
+              </a:ext>
+            </a:extLst>
+          </p:cNvPr>
+          <p:cNvSpPr/>
+          <p:nvPr/>
+        </p:nvSpPr>
+        <p:spPr>
+          <a:xfrm>
+            <a:off x="923002" y="2674915"/>
+            <a:ext cx="2055040" cy="641267"/>
+          </a:xfrm>
+          <a:prstGeom prst="rect">
+            <a:avLst/>
+          </a:prstGeom>
+          <a:noFill/>
+          <a:ln w="28575">
+            <a:solidFill>
+              <a:schemeClr val="tx1"/>
+            </a:solidFill>
+          </a:ln>
+        </p:spPr>
+        <p:style>
+          <a:lnRef idx="2">
+            <a:schemeClr val="accent1">
+              <a:shade val="50000"/>
+            </a:schemeClr>
+          </a:lnRef>
+          <a:fillRef idx="1">
+            <a:schemeClr val="accent1"/>
+          </a:fillRef>
+          <a:effectRef idx="0">
+            <a:schemeClr val="accent1"/>
+          </a:effectRef>
+          <a:fontRef idx="minor">
+            <a:schemeClr val="lt1"/>
+          </a:fontRef>
+        </p:style>
+        <p:txBody>
+          <a:bodyPr rtlCol="0" anchor="ctr"/>
+          <a:lstStyle/>
+          <a:p>
+            <a:pPr algn="ctr"/>
+            <a:r>
+              <a:rPr lang="zh-CN" altLang="en-US" sz="1600" dirty="0">
+                <a:solidFill>
+                  <a:schemeClr val="tx1"/>
+                </a:solidFill>
+                <a:latin typeface="Times New Roman" panose="02020603050405020304" pitchFamily="18" charset="0"/>
+                <a:ea typeface="宋体" panose="02010600030101010101" pitchFamily="2" charset="-122"/>
+                <a:cs typeface="Times New Roman" panose="02020603050405020304" pitchFamily="18" charset="0"/>
+              </a:rPr>
+              <a:t>对象句柄 </a:t>
+            </a:r>
+            <a:r>
+              <a:rPr lang="en-US" altLang="zh-CN" sz="1600" dirty="0">
+                <a:solidFill>
+                  <a:schemeClr val="tx1"/>
+                </a:solidFill>
+                <a:latin typeface="Times New Roman" panose="02020603050405020304" pitchFamily="18" charset="0"/>
+                <a:ea typeface="宋体" panose="02010600030101010101" pitchFamily="2" charset="-122"/>
+                <a:cs typeface="Times New Roman" panose="02020603050405020304" pitchFamily="18" charset="0"/>
+              </a:rPr>
+              <a:t>2</a:t>
+            </a:r>
+          </a:p>
+          <a:p>
+            <a:pPr algn="ctr"/>
+            <a:r>
+              <a:rPr lang="en-US" altLang="zh-CN" sz="1600" dirty="0">
+                <a:solidFill>
+                  <a:schemeClr val="tx1"/>
+                </a:solidFill>
+                <a:latin typeface="Times New Roman" panose="02020603050405020304" pitchFamily="18" charset="0"/>
+                <a:ea typeface="宋体" panose="02010600030101010101" pitchFamily="2" charset="-122"/>
+                <a:cs typeface="Times New Roman" panose="02020603050405020304" pitchFamily="18" charset="0"/>
+              </a:rPr>
+              <a:t>Handle&lt;PyObject&gt; b</a:t>
+            </a:r>
+            <a:endParaRPr lang="zh-CN" altLang="en-US" sz="1600" dirty="0">
+              <a:solidFill>
+                <a:schemeClr val="tx1"/>
+              </a:solidFill>
+              <a:latin typeface="Times New Roman" panose="02020603050405020304" pitchFamily="18" charset="0"/>
+              <a:ea typeface="宋体" panose="02010600030101010101" pitchFamily="2" charset="-122"/>
+              <a:cs typeface="Times New Roman" panose="02020603050405020304" pitchFamily="18" charset="0"/>
+            </a:endParaRPr>
+          </a:p>
+        </p:txBody>
+      </p:sp>
+      <p:sp>
+        <p:nvSpPr>
+          <p:cNvPr id="10" name="矩形 9">
+            <a:extLst>
+              <a:ext uri="{FF2B5EF4-FFF2-40B4-BE49-F238E27FC236}">
+                <a16:creationId xmlns:a16="http://schemas.microsoft.com/office/drawing/2014/main" id="{83DC939C-6419-4A67-B284-295C2E3CFB9B}"/>
+              </a:ext>
+            </a:extLst>
+          </p:cNvPr>
+          <p:cNvSpPr/>
+          <p:nvPr/>
+        </p:nvSpPr>
+        <p:spPr>
+          <a:xfrm>
+            <a:off x="3888475" y="1163781"/>
+            <a:ext cx="2837898" cy="3467597"/>
+          </a:xfrm>
+          <a:prstGeom prst="rect">
+            <a:avLst/>
+          </a:prstGeom>
+          <a:noFill/>
+          <a:ln w="28575">
+            <a:solidFill>
+              <a:schemeClr val="tx1"/>
+            </a:solidFill>
+          </a:ln>
+        </p:spPr>
+        <p:style>
+          <a:lnRef idx="2">
+            <a:schemeClr val="accent1">
+              <a:shade val="50000"/>
+            </a:schemeClr>
+          </a:lnRef>
+          <a:fillRef idx="1">
+            <a:schemeClr val="accent1"/>
+          </a:fillRef>
+          <a:effectRef idx="0">
+            <a:schemeClr val="accent1"/>
+          </a:effectRef>
+          <a:fontRef idx="minor">
+            <a:schemeClr val="lt1"/>
+          </a:fontRef>
+        </p:style>
+        <p:txBody>
+          <a:bodyPr rtlCol="0" anchor="ctr"/>
+          <a:lstStyle/>
+          <a:p>
+            <a:pPr algn="ctr"/>
+            <a:endParaRPr lang="zh-CN" altLang="en-US"/>
+          </a:p>
+        </p:txBody>
+      </p:sp>
+      <p:sp>
+        <p:nvSpPr>
+          <p:cNvPr id="11" name="文本框 10">
+            <a:extLst>
+              <a:ext uri="{FF2B5EF4-FFF2-40B4-BE49-F238E27FC236}">
+                <a16:creationId xmlns:a16="http://schemas.microsoft.com/office/drawing/2014/main" id="{813968E6-5953-4281-8061-4D02E367C50A}"/>
+              </a:ext>
+            </a:extLst>
+          </p:cNvPr>
+          <p:cNvSpPr txBox="1"/>
+          <p:nvPr/>
+        </p:nvSpPr>
+        <p:spPr>
+          <a:xfrm>
+            <a:off x="3993214" y="1288474"/>
+            <a:ext cx="2762295" cy="369332"/>
+          </a:xfrm>
+          <a:prstGeom prst="rect">
+            <a:avLst/>
+          </a:prstGeom>
+          <a:noFill/>
+        </p:spPr>
+        <p:txBody>
+          <a:bodyPr wrap="none" rtlCol="0">
+            <a:spAutoFit/>
+          </a:bodyPr>
+          <a:lstStyle/>
+          <a:p>
+            <a:r>
+              <a:rPr lang="en-US" altLang="zh-CN" b="1" dirty="0">
+                <a:effectLst/>
+                <a:latin typeface="Times New Roman" panose="02020603050405020304" pitchFamily="18" charset="0"/>
+                <a:cs typeface="Times New Roman" panose="02020603050405020304" pitchFamily="18" charset="0"/>
+              </a:rPr>
+              <a:t>HandleScopeImplementer</a:t>
+            </a:r>
+          </a:p>
+        </p:txBody>
+      </p:sp>
+      <p:sp>
+        <p:nvSpPr>
+          <p:cNvPr id="20" name="文本框 19">
+            <a:extLst>
+              <a:ext uri="{FF2B5EF4-FFF2-40B4-BE49-F238E27FC236}">
+                <a16:creationId xmlns:a16="http://schemas.microsoft.com/office/drawing/2014/main" id="{77F17227-4DA9-41A7-966A-D63C81105C34}"/>
+              </a:ext>
+            </a:extLst>
+          </p:cNvPr>
+          <p:cNvSpPr txBox="1"/>
+          <p:nvPr/>
+        </p:nvSpPr>
+        <p:spPr>
+          <a:xfrm>
+            <a:off x="1742773" y="3316182"/>
+            <a:ext cx="415498" cy="369332"/>
+          </a:xfrm>
+          <a:prstGeom prst="rect">
+            <a:avLst/>
+          </a:prstGeom>
+          <a:noFill/>
+        </p:spPr>
+        <p:txBody>
+          <a:bodyPr wrap="none" rtlCol="0">
+            <a:spAutoFit/>
+          </a:bodyPr>
+          <a:lstStyle/>
+          <a:p>
+            <a:r>
+              <a:rPr lang="en-US" altLang="zh-CN" dirty="0">
+                <a:latin typeface="Times New Roman" panose="02020603050405020304" pitchFamily="18" charset="0"/>
+                <a:ea typeface="宋体" panose="02010600030101010101" pitchFamily="2" charset="-122"/>
+                <a:cs typeface="Times New Roman" panose="02020603050405020304" pitchFamily="18" charset="0"/>
+              </a:rPr>
+              <a:t>…</a:t>
+            </a:r>
+            <a:endParaRPr lang="zh-CN" altLang="en-US" dirty="0">
+              <a:latin typeface="Times New Roman" panose="02020603050405020304" pitchFamily="18" charset="0"/>
+              <a:ea typeface="宋体" panose="02010600030101010101" pitchFamily="2" charset="-122"/>
+              <a:cs typeface="Times New Roman" panose="02020603050405020304" pitchFamily="18" charset="0"/>
+            </a:endParaRPr>
+          </a:p>
+        </p:txBody>
+      </p:sp>
+      <p:grpSp>
+        <p:nvGrpSpPr>
+          <p:cNvPr id="22" name="组合 21">
+            <a:extLst>
+              <a:ext uri="{FF2B5EF4-FFF2-40B4-BE49-F238E27FC236}">
+                <a16:creationId xmlns:a16="http://schemas.microsoft.com/office/drawing/2014/main" id="{038BC16A-FBA6-476F-9FC0-0C222D2BB8BE}"/>
+              </a:ext>
+            </a:extLst>
+          </p:cNvPr>
+          <p:cNvGrpSpPr/>
+          <p:nvPr/>
+        </p:nvGrpSpPr>
+        <p:grpSpPr>
+          <a:xfrm>
+            <a:off x="4063331" y="1764083"/>
+            <a:ext cx="2521537" cy="1507570"/>
+            <a:chOff x="4063331" y="1004061"/>
+            <a:chExt cx="2521537" cy="1507570"/>
+          </a:xfrm>
+        </p:grpSpPr>
+        <p:sp>
+          <p:nvSpPr>
+            <p:cNvPr id="12" name="矩形 11">
+              <a:extLst>
+                <a:ext uri="{FF2B5EF4-FFF2-40B4-BE49-F238E27FC236}">
+                  <a16:creationId xmlns:a16="http://schemas.microsoft.com/office/drawing/2014/main" id="{E1AACC79-074F-412B-BC66-89FFAA5E14CE}"/>
+                </a:ext>
+              </a:extLst>
+            </p:cNvPr>
+            <p:cNvSpPr/>
+            <p:nvPr/>
+          </p:nvSpPr>
+          <p:spPr>
+            <a:xfrm>
+              <a:off x="4067984" y="1004061"/>
+              <a:ext cx="2516884" cy="1507570"/>
+            </a:xfrm>
+            <a:prstGeom prst="rect">
+              <a:avLst/>
+            </a:prstGeom>
+            <a:noFill/>
+            <a:ln w="28575">
+              <a:solidFill>
+                <a:schemeClr val="tx1"/>
+              </a:solidFill>
+            </a:ln>
+          </p:spPr>
+          <p:style>
+            <a:lnRef idx="2">
+              <a:schemeClr val="accent1">
+                <a:shade val="50000"/>
+              </a:schemeClr>
+            </a:lnRef>
+            <a:fillRef idx="1">
+              <a:schemeClr val="accent1"/>
+            </a:fillRef>
+            <a:effectRef idx="0">
+              <a:schemeClr val="accent1"/>
+            </a:effectRef>
+            <a:fontRef idx="minor">
+              <a:schemeClr val="lt1"/>
+            </a:fontRef>
+          </p:style>
+          <p:txBody>
+            <a:bodyPr rtlCol="0" anchor="ctr"/>
+            <a:lstStyle/>
+            <a:p>
+              <a:pPr algn="ctr"/>
+              <a:endParaRPr lang="zh-CN" altLang="en-US" sz="1600" dirty="0">
+                <a:solidFill>
+                  <a:schemeClr val="tx1"/>
+                </a:solidFill>
+                <a:latin typeface="Times New Roman" panose="02020603050405020304" pitchFamily="18" charset="0"/>
+                <a:ea typeface="宋体" panose="02010600030101010101" pitchFamily="2" charset="-122"/>
+                <a:cs typeface="Times New Roman" panose="02020603050405020304" pitchFamily="18" charset="0"/>
+              </a:endParaRPr>
+            </a:p>
+          </p:txBody>
+        </p:sp>
+        <p:cxnSp>
+          <p:nvCxnSpPr>
+            <p:cNvPr id="14" name="直接连接符 13">
+              <a:extLst>
+                <a:ext uri="{FF2B5EF4-FFF2-40B4-BE49-F238E27FC236}">
+                  <a16:creationId xmlns:a16="http://schemas.microsoft.com/office/drawing/2014/main" id="{1E0A0A11-91B9-4A54-9945-F98074EBE5E6}"/>
+                </a:ext>
+              </a:extLst>
+            </p:cNvPr>
+            <p:cNvCxnSpPr/>
+            <p:nvPr/>
+          </p:nvCxnSpPr>
+          <p:spPr>
+            <a:xfrm>
+              <a:off x="4067984" y="1389413"/>
+              <a:ext cx="2516884" cy="0"/>
+            </a:xfrm>
+            <a:prstGeom prst="line">
+              <a:avLst/>
+            </a:prstGeom>
+            <a:ln w="28575">
+              <a:solidFill>
+                <a:schemeClr val="tx1"/>
+              </a:solidFill>
+            </a:ln>
+          </p:spPr>
+          <p:style>
+            <a:lnRef idx="1">
+              <a:schemeClr val="accent1"/>
+            </a:lnRef>
+            <a:fillRef idx="0">
+              <a:schemeClr val="accent1"/>
+            </a:fillRef>
+            <a:effectRef idx="0">
+              <a:schemeClr val="accent1"/>
+            </a:effectRef>
+            <a:fontRef idx="minor">
+              <a:schemeClr val="tx1"/>
+            </a:fontRef>
+          </p:style>
+        </p:cxnSp>
+        <p:sp>
+          <p:nvSpPr>
+            <p:cNvPr id="15" name="文本框 14">
+              <a:extLst>
+                <a:ext uri="{FF2B5EF4-FFF2-40B4-BE49-F238E27FC236}">
+                  <a16:creationId xmlns:a16="http://schemas.microsoft.com/office/drawing/2014/main" id="{2CBA9AAC-C452-4ABF-90F1-5D44E221817C}"/>
+                </a:ext>
+              </a:extLst>
+            </p:cNvPr>
+            <p:cNvSpPr txBox="1"/>
+            <p:nvPr/>
+          </p:nvSpPr>
+          <p:spPr>
+            <a:xfrm>
+              <a:off x="4947312" y="1004061"/>
+              <a:ext cx="748923" cy="369332"/>
+            </a:xfrm>
+            <a:prstGeom prst="rect">
+              <a:avLst/>
+            </a:prstGeom>
+            <a:noFill/>
+          </p:spPr>
+          <p:txBody>
+            <a:bodyPr wrap="none" rtlCol="0">
+              <a:spAutoFit/>
+            </a:bodyPr>
+            <a:lstStyle/>
+            <a:p>
+              <a:r>
+                <a:rPr lang="en-US" altLang="zh-CN" b="1" dirty="0">
+                  <a:effectLst/>
+                  <a:latin typeface="Times New Roman" panose="02020603050405020304" pitchFamily="18" charset="0"/>
+                  <a:cs typeface="Times New Roman" panose="02020603050405020304" pitchFamily="18" charset="0"/>
+                </a:rPr>
+                <a:t>Block</a:t>
+              </a:r>
+            </a:p>
+          </p:txBody>
+        </p:sp>
+        <p:cxnSp>
+          <p:nvCxnSpPr>
+            <p:cNvPr id="16" name="直接连接符 15">
+              <a:extLst>
+                <a:ext uri="{FF2B5EF4-FFF2-40B4-BE49-F238E27FC236}">
+                  <a16:creationId xmlns:a16="http://schemas.microsoft.com/office/drawing/2014/main" id="{720AA229-441F-42B4-9835-C6270C2455F6}"/>
+                </a:ext>
+              </a:extLst>
+            </p:cNvPr>
+            <p:cNvCxnSpPr/>
+            <p:nvPr/>
+          </p:nvCxnSpPr>
+          <p:spPr>
+            <a:xfrm>
+              <a:off x="4063331" y="1757846"/>
+              <a:ext cx="2516884" cy="0"/>
+            </a:xfrm>
+            <a:prstGeom prst="line">
+              <a:avLst/>
+            </a:prstGeom>
+            <a:ln w="28575">
+              <a:solidFill>
+                <a:schemeClr val="tx1"/>
+              </a:solidFill>
+            </a:ln>
+          </p:spPr>
+          <p:style>
+            <a:lnRef idx="1">
+              <a:schemeClr val="accent1"/>
+            </a:lnRef>
+            <a:fillRef idx="0">
+              <a:schemeClr val="accent1"/>
+            </a:fillRef>
+            <a:effectRef idx="0">
+              <a:schemeClr val="accent1"/>
+            </a:effectRef>
+            <a:fontRef idx="minor">
+              <a:schemeClr val="tx1"/>
+            </a:fontRef>
+          </p:style>
+        </p:cxnSp>
+        <p:sp>
+          <p:nvSpPr>
+            <p:cNvPr id="17" name="文本框 16">
+              <a:extLst>
+                <a:ext uri="{FF2B5EF4-FFF2-40B4-BE49-F238E27FC236}">
+                  <a16:creationId xmlns:a16="http://schemas.microsoft.com/office/drawing/2014/main" id="{EBCD9CB9-FBF7-459F-AC24-D1D70325F491}"/>
+                </a:ext>
+              </a:extLst>
+            </p:cNvPr>
+            <p:cNvSpPr txBox="1"/>
+            <p:nvPr/>
+          </p:nvSpPr>
+          <p:spPr>
+            <a:xfrm>
+              <a:off x="4133318" y="1403271"/>
+              <a:ext cx="1241045" cy="338554"/>
+            </a:xfrm>
+            <a:prstGeom prst="rect">
+              <a:avLst/>
+            </a:prstGeom>
+            <a:noFill/>
+          </p:spPr>
+          <p:txBody>
+            <a:bodyPr wrap="none" rtlCol="0">
+              <a:spAutoFit/>
+            </a:bodyPr>
+            <a:lstStyle/>
+            <a:p>
+              <a:r>
+                <a:rPr lang="en-US" altLang="zh-CN" sz="1600" dirty="0">
+                  <a:latin typeface="Times New Roman" panose="02020603050405020304" pitchFamily="18" charset="0"/>
+                  <a:cs typeface="Times New Roman" panose="02020603050405020304" pitchFamily="18" charset="0"/>
+                </a:rPr>
+                <a:t>Address Slot</a:t>
+              </a:r>
+              <a:endParaRPr lang="zh-CN" altLang="en-US" sz="1600" dirty="0">
+                <a:latin typeface="Times New Roman" panose="02020603050405020304" pitchFamily="18" charset="0"/>
+                <a:cs typeface="Times New Roman" panose="02020603050405020304" pitchFamily="18" charset="0"/>
+              </a:endParaRPr>
+            </a:p>
+          </p:txBody>
+        </p:sp>
+        <p:sp>
+          <p:nvSpPr>
+            <p:cNvPr id="18" name="文本框 17">
+              <a:extLst>
+                <a:ext uri="{FF2B5EF4-FFF2-40B4-BE49-F238E27FC236}">
+                  <a16:creationId xmlns:a16="http://schemas.microsoft.com/office/drawing/2014/main" id="{BF165C30-4D85-45BF-8CC4-78F4317988C5}"/>
+                </a:ext>
+              </a:extLst>
+            </p:cNvPr>
+            <p:cNvSpPr txBox="1"/>
+            <p:nvPr/>
+          </p:nvSpPr>
+          <p:spPr>
+            <a:xfrm>
+              <a:off x="4133317" y="1789480"/>
+              <a:ext cx="1241045" cy="338554"/>
+            </a:xfrm>
+            <a:prstGeom prst="rect">
+              <a:avLst/>
+            </a:prstGeom>
+            <a:noFill/>
+          </p:spPr>
+          <p:txBody>
+            <a:bodyPr wrap="none" rtlCol="0">
+              <a:spAutoFit/>
+            </a:bodyPr>
+            <a:lstStyle/>
+            <a:p>
+              <a:r>
+                <a:rPr lang="en-US" altLang="zh-CN" sz="1600" dirty="0">
+                  <a:latin typeface="Times New Roman" panose="02020603050405020304" pitchFamily="18" charset="0"/>
+                  <a:cs typeface="Times New Roman" panose="02020603050405020304" pitchFamily="18" charset="0"/>
+                </a:rPr>
+                <a:t>Address Slot</a:t>
+              </a:r>
+              <a:endParaRPr lang="zh-CN" altLang="en-US" sz="1600" dirty="0">
+                <a:latin typeface="Times New Roman" panose="02020603050405020304" pitchFamily="18" charset="0"/>
+                <a:cs typeface="Times New Roman" panose="02020603050405020304" pitchFamily="18" charset="0"/>
+              </a:endParaRPr>
+            </a:p>
+          </p:txBody>
+        </p:sp>
+        <p:cxnSp>
+          <p:nvCxnSpPr>
+            <p:cNvPr id="19" name="直接连接符 18">
+              <a:extLst>
+                <a:ext uri="{FF2B5EF4-FFF2-40B4-BE49-F238E27FC236}">
+                  <a16:creationId xmlns:a16="http://schemas.microsoft.com/office/drawing/2014/main" id="{3278FE96-079D-410D-B98C-39D2D913EAB0}"/>
+                </a:ext>
+              </a:extLst>
+            </p:cNvPr>
+            <p:cNvCxnSpPr/>
+            <p:nvPr/>
+          </p:nvCxnSpPr>
+          <p:spPr>
+            <a:xfrm>
+              <a:off x="4063331" y="2128034"/>
+              <a:ext cx="2516884" cy="0"/>
+            </a:xfrm>
+            <a:prstGeom prst="line">
+              <a:avLst/>
+            </a:prstGeom>
+            <a:ln w="28575">
+              <a:solidFill>
+                <a:schemeClr val="tx1"/>
+              </a:solidFill>
+            </a:ln>
+          </p:spPr>
+          <p:style>
+            <a:lnRef idx="1">
+              <a:schemeClr val="accent1"/>
+            </a:lnRef>
+            <a:fillRef idx="0">
+              <a:schemeClr val="accent1"/>
+            </a:fillRef>
+            <a:effectRef idx="0">
+              <a:schemeClr val="accent1"/>
+            </a:effectRef>
+            <a:fontRef idx="minor">
+              <a:schemeClr val="tx1"/>
+            </a:fontRef>
+          </p:style>
+        </p:cxnSp>
+        <p:sp>
+          <p:nvSpPr>
+            <p:cNvPr id="21" name="文本框 20">
+              <a:extLst>
+                <a:ext uri="{FF2B5EF4-FFF2-40B4-BE49-F238E27FC236}">
+                  <a16:creationId xmlns:a16="http://schemas.microsoft.com/office/drawing/2014/main" id="{1A9FD83B-0492-4B7D-86E5-3FD41CF88389}"/>
+                </a:ext>
+              </a:extLst>
+            </p:cNvPr>
+            <p:cNvSpPr txBox="1"/>
+            <p:nvPr/>
+          </p:nvSpPr>
+          <p:spPr>
+            <a:xfrm>
+              <a:off x="4133316" y="2153729"/>
+              <a:ext cx="389850" cy="338554"/>
+            </a:xfrm>
+            <a:prstGeom prst="rect">
+              <a:avLst/>
+            </a:prstGeom>
+            <a:noFill/>
+          </p:spPr>
+          <p:txBody>
+            <a:bodyPr wrap="none" rtlCol="0">
+              <a:spAutoFit/>
+            </a:bodyPr>
+            <a:lstStyle/>
+            <a:p>
+              <a:r>
+                <a:rPr lang="en-US" altLang="zh-CN" sz="1600" dirty="0">
+                  <a:latin typeface="Times New Roman" panose="02020603050405020304" pitchFamily="18" charset="0"/>
+                  <a:cs typeface="Times New Roman" panose="02020603050405020304" pitchFamily="18" charset="0"/>
+                </a:rPr>
+                <a:t>…</a:t>
+              </a:r>
+              <a:endParaRPr lang="zh-CN" altLang="en-US" sz="1600" dirty="0">
+                <a:latin typeface="Times New Roman" panose="02020603050405020304" pitchFamily="18" charset="0"/>
+                <a:cs typeface="Times New Roman" panose="02020603050405020304" pitchFamily="18" charset="0"/>
+              </a:endParaRPr>
+            </a:p>
+          </p:txBody>
+        </p:sp>
+      </p:grpSp>
+      <p:grpSp>
+        <p:nvGrpSpPr>
+          <p:cNvPr id="23" name="组合 22">
+            <a:extLst>
+              <a:ext uri="{FF2B5EF4-FFF2-40B4-BE49-F238E27FC236}">
+                <a16:creationId xmlns:a16="http://schemas.microsoft.com/office/drawing/2014/main" id="{3DC4D194-8F66-46E1-89A4-194C74F2D542}"/>
+              </a:ext>
+            </a:extLst>
+          </p:cNvPr>
+          <p:cNvGrpSpPr/>
+          <p:nvPr/>
+        </p:nvGrpSpPr>
+        <p:grpSpPr>
+          <a:xfrm>
+            <a:off x="4063331" y="3478723"/>
+            <a:ext cx="2516884" cy="737764"/>
+            <a:chOff x="4067984" y="1004061"/>
+            <a:chExt cx="2516884" cy="737764"/>
+          </a:xfrm>
+        </p:grpSpPr>
+        <p:sp>
+          <p:nvSpPr>
+            <p:cNvPr id="24" name="矩形 23">
+              <a:extLst>
+                <a:ext uri="{FF2B5EF4-FFF2-40B4-BE49-F238E27FC236}">
+                  <a16:creationId xmlns:a16="http://schemas.microsoft.com/office/drawing/2014/main" id="{2369D7CB-553C-403B-AB33-CD2111C46C68}"/>
+                </a:ext>
+              </a:extLst>
+            </p:cNvPr>
+            <p:cNvSpPr/>
+            <p:nvPr/>
+          </p:nvSpPr>
+          <p:spPr>
+            <a:xfrm>
+              <a:off x="4067984" y="1004061"/>
+              <a:ext cx="2516884" cy="737764"/>
+            </a:xfrm>
+            <a:prstGeom prst="rect">
+              <a:avLst/>
+            </a:prstGeom>
+            <a:noFill/>
+            <a:ln w="28575">
+              <a:solidFill>
+                <a:schemeClr val="tx1"/>
+              </a:solidFill>
+            </a:ln>
+          </p:spPr>
+          <p:style>
+            <a:lnRef idx="2">
+              <a:schemeClr val="accent1">
+                <a:shade val="50000"/>
+              </a:schemeClr>
+            </a:lnRef>
+            <a:fillRef idx="1">
+              <a:schemeClr val="accent1"/>
+            </a:fillRef>
+            <a:effectRef idx="0">
+              <a:schemeClr val="accent1"/>
+            </a:effectRef>
+            <a:fontRef idx="minor">
+              <a:schemeClr val="lt1"/>
+            </a:fontRef>
+          </p:style>
+          <p:txBody>
+            <a:bodyPr rtlCol="0" anchor="ctr"/>
+            <a:lstStyle/>
+            <a:p>
+              <a:pPr algn="ctr"/>
+              <a:endParaRPr lang="zh-CN" altLang="en-US" sz="1600" dirty="0">
+                <a:solidFill>
+                  <a:schemeClr val="tx1"/>
+                </a:solidFill>
+                <a:latin typeface="Times New Roman" panose="02020603050405020304" pitchFamily="18" charset="0"/>
+                <a:ea typeface="宋体" panose="02010600030101010101" pitchFamily="2" charset="-122"/>
+                <a:cs typeface="Times New Roman" panose="02020603050405020304" pitchFamily="18" charset="0"/>
+              </a:endParaRPr>
+            </a:p>
+          </p:txBody>
+        </p:sp>
+        <p:cxnSp>
+          <p:nvCxnSpPr>
+            <p:cNvPr id="25" name="直接连接符 24">
+              <a:extLst>
+                <a:ext uri="{FF2B5EF4-FFF2-40B4-BE49-F238E27FC236}">
+                  <a16:creationId xmlns:a16="http://schemas.microsoft.com/office/drawing/2014/main" id="{38F6224C-6D82-4CF6-9B7A-9BD7874975F8}"/>
+                </a:ext>
+              </a:extLst>
+            </p:cNvPr>
+            <p:cNvCxnSpPr/>
+            <p:nvPr/>
+          </p:nvCxnSpPr>
+          <p:spPr>
+            <a:xfrm>
+              <a:off x="4067984" y="1389413"/>
+              <a:ext cx="2516884" cy="0"/>
+            </a:xfrm>
+            <a:prstGeom prst="line">
+              <a:avLst/>
+            </a:prstGeom>
+            <a:ln w="28575">
+              <a:solidFill>
+                <a:schemeClr val="tx1"/>
+              </a:solidFill>
+            </a:ln>
+          </p:spPr>
+          <p:style>
+            <a:lnRef idx="1">
+              <a:schemeClr val="accent1"/>
+            </a:lnRef>
+            <a:fillRef idx="0">
+              <a:schemeClr val="accent1"/>
+            </a:fillRef>
+            <a:effectRef idx="0">
+              <a:schemeClr val="accent1"/>
+            </a:effectRef>
+            <a:fontRef idx="minor">
+              <a:schemeClr val="tx1"/>
+            </a:fontRef>
+          </p:style>
+        </p:cxnSp>
+        <p:sp>
+          <p:nvSpPr>
+            <p:cNvPr id="26" name="文本框 25">
+              <a:extLst>
+                <a:ext uri="{FF2B5EF4-FFF2-40B4-BE49-F238E27FC236}">
+                  <a16:creationId xmlns:a16="http://schemas.microsoft.com/office/drawing/2014/main" id="{2DED7E44-C5D1-45FF-9B9A-174567A0EC1A}"/>
+                </a:ext>
+              </a:extLst>
+            </p:cNvPr>
+            <p:cNvSpPr txBox="1"/>
+            <p:nvPr/>
+          </p:nvSpPr>
+          <p:spPr>
+            <a:xfrm>
+              <a:off x="4947312" y="1004061"/>
+              <a:ext cx="748923" cy="369332"/>
+            </a:xfrm>
+            <a:prstGeom prst="rect">
+              <a:avLst/>
+            </a:prstGeom>
+            <a:noFill/>
+          </p:spPr>
+          <p:txBody>
+            <a:bodyPr wrap="none" rtlCol="0">
+              <a:spAutoFit/>
+            </a:bodyPr>
+            <a:lstStyle/>
+            <a:p>
+              <a:r>
+                <a:rPr lang="en-US" altLang="zh-CN" b="1" dirty="0">
+                  <a:effectLst/>
+                  <a:latin typeface="Times New Roman" panose="02020603050405020304" pitchFamily="18" charset="0"/>
+                  <a:cs typeface="Times New Roman" panose="02020603050405020304" pitchFamily="18" charset="0"/>
+                </a:rPr>
+                <a:t>Block</a:t>
+              </a:r>
+            </a:p>
+          </p:txBody>
+        </p:sp>
+        <p:sp>
+          <p:nvSpPr>
+            <p:cNvPr id="28" name="文本框 27">
+              <a:extLst>
+                <a:ext uri="{FF2B5EF4-FFF2-40B4-BE49-F238E27FC236}">
+                  <a16:creationId xmlns:a16="http://schemas.microsoft.com/office/drawing/2014/main" id="{D1F7EE96-DC05-4026-AB51-70358B9128DB}"/>
+                </a:ext>
+              </a:extLst>
+            </p:cNvPr>
+            <p:cNvSpPr txBox="1"/>
+            <p:nvPr/>
+          </p:nvSpPr>
+          <p:spPr>
+            <a:xfrm>
+              <a:off x="4133318" y="1403271"/>
+              <a:ext cx="389850" cy="338554"/>
+            </a:xfrm>
+            <a:prstGeom prst="rect">
+              <a:avLst/>
+            </a:prstGeom>
+            <a:noFill/>
+          </p:spPr>
+          <p:txBody>
+            <a:bodyPr wrap="none" rtlCol="0">
+              <a:spAutoFit/>
+            </a:bodyPr>
+            <a:lstStyle/>
+            <a:p>
+              <a:r>
+                <a:rPr lang="en-US" altLang="zh-CN" sz="1600" dirty="0">
+                  <a:latin typeface="Times New Roman" panose="02020603050405020304" pitchFamily="18" charset="0"/>
+                  <a:cs typeface="Times New Roman" panose="02020603050405020304" pitchFamily="18" charset="0"/>
+                </a:rPr>
+                <a:t>…</a:t>
+              </a:r>
+              <a:endParaRPr lang="zh-CN" altLang="en-US" sz="1600" dirty="0">
+                <a:latin typeface="Times New Roman" panose="02020603050405020304" pitchFamily="18" charset="0"/>
+                <a:cs typeface="Times New Roman" panose="02020603050405020304" pitchFamily="18" charset="0"/>
+              </a:endParaRPr>
+            </a:p>
+          </p:txBody>
+        </p:sp>
+      </p:grpSp>
+      <p:sp>
+        <p:nvSpPr>
+          <p:cNvPr id="32" name="文本框 31">
+            <a:extLst>
+              <a:ext uri="{FF2B5EF4-FFF2-40B4-BE49-F238E27FC236}">
+                <a16:creationId xmlns:a16="http://schemas.microsoft.com/office/drawing/2014/main" id="{A06BBB25-DB33-48CA-B5D3-7A91AE0F1AE4}"/>
+              </a:ext>
+            </a:extLst>
+          </p:cNvPr>
+          <p:cNvSpPr txBox="1"/>
+          <p:nvPr/>
+        </p:nvSpPr>
+        <p:spPr>
+          <a:xfrm>
+            <a:off x="5109371" y="4180915"/>
+            <a:ext cx="415498" cy="369332"/>
+          </a:xfrm>
+          <a:prstGeom prst="rect">
+            <a:avLst/>
+          </a:prstGeom>
+          <a:noFill/>
+        </p:spPr>
+        <p:txBody>
+          <a:bodyPr wrap="none" rtlCol="0">
+            <a:spAutoFit/>
+          </a:bodyPr>
+          <a:lstStyle/>
+          <a:p>
+            <a:r>
+              <a:rPr lang="en-US" altLang="zh-CN" dirty="0">
+                <a:latin typeface="Times New Roman" panose="02020603050405020304" pitchFamily="18" charset="0"/>
+                <a:ea typeface="宋体" panose="02010600030101010101" pitchFamily="2" charset="-122"/>
+                <a:cs typeface="Times New Roman" panose="02020603050405020304" pitchFamily="18" charset="0"/>
+              </a:rPr>
+              <a:t>…</a:t>
+            </a:r>
+            <a:endParaRPr lang="zh-CN" altLang="en-US" dirty="0">
+              <a:latin typeface="Times New Roman" panose="02020603050405020304" pitchFamily="18" charset="0"/>
+              <a:ea typeface="宋体" panose="02010600030101010101" pitchFamily="2" charset="-122"/>
+              <a:cs typeface="Times New Roman" panose="02020603050405020304" pitchFamily="18" charset="0"/>
+            </a:endParaRPr>
+          </a:p>
+        </p:txBody>
+      </p:sp>
+      <p:sp>
+        <p:nvSpPr>
+          <p:cNvPr id="33" name="矩形 32">
+            <a:extLst>
+              <a:ext uri="{FF2B5EF4-FFF2-40B4-BE49-F238E27FC236}">
+                <a16:creationId xmlns:a16="http://schemas.microsoft.com/office/drawing/2014/main" id="{A5BC759A-5196-4E63-B82F-90A18A5C7885}"/>
+              </a:ext>
+            </a:extLst>
+          </p:cNvPr>
+          <p:cNvSpPr/>
+          <p:nvPr/>
+        </p:nvSpPr>
+        <p:spPr>
+          <a:xfrm>
+            <a:off x="7440890" y="1175654"/>
+            <a:ext cx="2535381" cy="2974771"/>
+          </a:xfrm>
+          <a:prstGeom prst="rect">
+            <a:avLst/>
+          </a:prstGeom>
+          <a:noFill/>
+          <a:ln w="28575">
+            <a:solidFill>
+              <a:schemeClr val="tx1"/>
+            </a:solidFill>
+          </a:ln>
+        </p:spPr>
+        <p:style>
+          <a:lnRef idx="2">
+            <a:schemeClr val="accent1">
+              <a:shade val="50000"/>
+            </a:schemeClr>
+          </a:lnRef>
+          <a:fillRef idx="1">
+            <a:schemeClr val="accent1"/>
+          </a:fillRef>
+          <a:effectRef idx="0">
+            <a:schemeClr val="accent1"/>
+          </a:effectRef>
+          <a:fontRef idx="minor">
+            <a:schemeClr val="lt1"/>
+          </a:fontRef>
+        </p:style>
+        <p:txBody>
+          <a:bodyPr rtlCol="0" anchor="ctr"/>
+          <a:lstStyle/>
+          <a:p>
+            <a:pPr algn="ctr"/>
+            <a:endParaRPr lang="zh-CN" altLang="en-US"/>
+          </a:p>
+        </p:txBody>
+      </p:sp>
+      <p:sp>
+        <p:nvSpPr>
+          <p:cNvPr id="34" name="文本框 33">
+            <a:extLst>
+              <a:ext uri="{FF2B5EF4-FFF2-40B4-BE49-F238E27FC236}">
+                <a16:creationId xmlns:a16="http://schemas.microsoft.com/office/drawing/2014/main" id="{EC25AB7E-834F-4682-A7AC-3F3BA9010492}"/>
+              </a:ext>
+            </a:extLst>
+          </p:cNvPr>
+          <p:cNvSpPr txBox="1"/>
+          <p:nvPr/>
+        </p:nvSpPr>
+        <p:spPr>
+          <a:xfrm>
+            <a:off x="8101453" y="1200604"/>
+            <a:ext cx="1152880" cy="369332"/>
+          </a:xfrm>
+          <a:prstGeom prst="rect">
+            <a:avLst/>
+          </a:prstGeom>
+          <a:noFill/>
+        </p:spPr>
+        <p:txBody>
+          <a:bodyPr wrap="none" rtlCol="0">
+            <a:spAutoFit/>
+          </a:bodyPr>
+          <a:lstStyle/>
+          <a:p>
+            <a:r>
+              <a:rPr lang="en-US" altLang="zh-CN" b="1" dirty="0">
+                <a:effectLst/>
+                <a:latin typeface="Times New Roman" panose="02020603050405020304" pitchFamily="18" charset="0"/>
+                <a:cs typeface="Times New Roman" panose="02020603050405020304" pitchFamily="18" charset="0"/>
+              </a:rPr>
+              <a:t>VM Heap</a:t>
+            </a:r>
+          </a:p>
+        </p:txBody>
+      </p:sp>
+      <p:sp>
+        <p:nvSpPr>
+          <p:cNvPr id="35" name="矩形 34">
+            <a:extLst>
+              <a:ext uri="{FF2B5EF4-FFF2-40B4-BE49-F238E27FC236}">
+                <a16:creationId xmlns:a16="http://schemas.microsoft.com/office/drawing/2014/main" id="{E3FB0665-D084-4B96-9813-383F7F5D2E78}"/>
+              </a:ext>
+            </a:extLst>
+          </p:cNvPr>
+          <p:cNvSpPr/>
+          <p:nvPr/>
+        </p:nvSpPr>
+        <p:spPr>
+          <a:xfrm>
+            <a:off x="7629896" y="1681556"/>
+            <a:ext cx="1442852" cy="539731"/>
+          </a:xfrm>
+          <a:prstGeom prst="rect">
+            <a:avLst/>
+          </a:prstGeom>
+          <a:noFill/>
+          <a:ln w="28575">
+            <a:solidFill>
+              <a:schemeClr val="tx1"/>
+            </a:solidFill>
+          </a:ln>
+        </p:spPr>
+        <p:style>
+          <a:lnRef idx="2">
+            <a:schemeClr val="accent1">
+              <a:shade val="50000"/>
+            </a:schemeClr>
+          </a:lnRef>
+          <a:fillRef idx="1">
+            <a:schemeClr val="accent1"/>
+          </a:fillRef>
+          <a:effectRef idx="0">
+            <a:schemeClr val="accent1"/>
+          </a:effectRef>
+          <a:fontRef idx="minor">
+            <a:schemeClr val="lt1"/>
+          </a:fontRef>
+        </p:style>
+        <p:txBody>
+          <a:bodyPr rtlCol="0" anchor="ctr"/>
+          <a:lstStyle/>
+          <a:p>
+            <a:pPr algn="ctr"/>
+            <a:r>
+              <a:rPr lang="en-US" altLang="zh-CN" sz="1600" dirty="0">
+                <a:solidFill>
+                  <a:schemeClr val="tx1"/>
+                </a:solidFill>
+                <a:latin typeface="Times New Roman" panose="02020603050405020304" pitchFamily="18" charset="0"/>
+                <a:ea typeface="宋体" panose="02010600030101010101" pitchFamily="2" charset="-122"/>
+                <a:cs typeface="Times New Roman" panose="02020603050405020304" pitchFamily="18" charset="0"/>
+              </a:rPr>
+              <a:t>PyObject </a:t>
+            </a:r>
+            <a:r>
+              <a:rPr lang="zh-CN" altLang="en-US" sz="1600" dirty="0">
+                <a:solidFill>
+                  <a:schemeClr val="tx1"/>
+                </a:solidFill>
+                <a:latin typeface="Times New Roman" panose="02020603050405020304" pitchFamily="18" charset="0"/>
+                <a:ea typeface="宋体" panose="02010600030101010101" pitchFamily="2" charset="-122"/>
+                <a:cs typeface="Times New Roman" panose="02020603050405020304" pitchFamily="18" charset="0"/>
+              </a:rPr>
+              <a:t>实例</a:t>
+            </a:r>
+          </a:p>
+        </p:txBody>
+      </p:sp>
+      <p:sp>
+        <p:nvSpPr>
+          <p:cNvPr id="36" name="矩形 35">
+            <a:extLst>
+              <a:ext uri="{FF2B5EF4-FFF2-40B4-BE49-F238E27FC236}">
+                <a16:creationId xmlns:a16="http://schemas.microsoft.com/office/drawing/2014/main" id="{54DBEB3F-8A05-404D-BF59-56C56ECBF7E2}"/>
+              </a:ext>
+            </a:extLst>
+          </p:cNvPr>
+          <p:cNvSpPr/>
+          <p:nvPr/>
+        </p:nvSpPr>
+        <p:spPr>
+          <a:xfrm>
+            <a:off x="8351322" y="2423761"/>
+            <a:ext cx="1442852" cy="539731"/>
+          </a:xfrm>
+          <a:prstGeom prst="rect">
+            <a:avLst/>
+          </a:prstGeom>
+          <a:noFill/>
+          <a:ln w="28575">
+            <a:solidFill>
+              <a:schemeClr val="tx1"/>
+            </a:solidFill>
+          </a:ln>
+        </p:spPr>
+        <p:style>
+          <a:lnRef idx="2">
+            <a:schemeClr val="accent1">
+              <a:shade val="50000"/>
+            </a:schemeClr>
+          </a:lnRef>
+          <a:fillRef idx="1">
+            <a:schemeClr val="accent1"/>
+          </a:fillRef>
+          <a:effectRef idx="0">
+            <a:schemeClr val="accent1"/>
+          </a:effectRef>
+          <a:fontRef idx="minor">
+            <a:schemeClr val="lt1"/>
+          </a:fontRef>
+        </p:style>
+        <p:txBody>
+          <a:bodyPr rtlCol="0" anchor="ctr"/>
+          <a:lstStyle/>
+          <a:p>
+            <a:pPr algn="ctr"/>
+            <a:r>
+              <a:rPr lang="en-US" altLang="zh-CN" sz="1600" dirty="0">
+                <a:solidFill>
+                  <a:schemeClr val="tx1"/>
+                </a:solidFill>
+                <a:latin typeface="Times New Roman" panose="02020603050405020304" pitchFamily="18" charset="0"/>
+                <a:ea typeface="宋体" panose="02010600030101010101" pitchFamily="2" charset="-122"/>
+                <a:cs typeface="Times New Roman" panose="02020603050405020304" pitchFamily="18" charset="0"/>
+              </a:rPr>
+              <a:t>…</a:t>
+            </a:r>
+            <a:endParaRPr lang="zh-CN" altLang="en-US" sz="1600" dirty="0">
+              <a:solidFill>
+                <a:schemeClr val="tx1"/>
+              </a:solidFill>
+              <a:latin typeface="Times New Roman" panose="02020603050405020304" pitchFamily="18" charset="0"/>
+              <a:ea typeface="宋体" panose="02010600030101010101" pitchFamily="2" charset="-122"/>
+              <a:cs typeface="Times New Roman" panose="02020603050405020304" pitchFamily="18" charset="0"/>
+            </a:endParaRPr>
+          </a:p>
+        </p:txBody>
+      </p:sp>
+      <p:sp>
+        <p:nvSpPr>
+          <p:cNvPr id="37" name="矩形 36">
+            <a:extLst>
+              <a:ext uri="{FF2B5EF4-FFF2-40B4-BE49-F238E27FC236}">
+                <a16:creationId xmlns:a16="http://schemas.microsoft.com/office/drawing/2014/main" id="{007D3683-C109-4B13-A1E6-15F13DD6B934}"/>
+              </a:ext>
+            </a:extLst>
+          </p:cNvPr>
+          <p:cNvSpPr/>
+          <p:nvPr/>
+        </p:nvSpPr>
+        <p:spPr>
+          <a:xfrm>
+            <a:off x="7874330" y="3230982"/>
+            <a:ext cx="1442852" cy="539731"/>
+          </a:xfrm>
+          <a:prstGeom prst="rect">
+            <a:avLst/>
+          </a:prstGeom>
+          <a:noFill/>
+          <a:ln w="28575">
+            <a:solidFill>
+              <a:schemeClr val="tx1"/>
+            </a:solidFill>
+          </a:ln>
+        </p:spPr>
+        <p:style>
+          <a:lnRef idx="2">
+            <a:schemeClr val="accent1">
+              <a:shade val="50000"/>
+            </a:schemeClr>
+          </a:lnRef>
+          <a:fillRef idx="1">
+            <a:schemeClr val="accent1"/>
+          </a:fillRef>
+          <a:effectRef idx="0">
+            <a:schemeClr val="accent1"/>
+          </a:effectRef>
+          <a:fontRef idx="minor">
+            <a:schemeClr val="lt1"/>
+          </a:fontRef>
+        </p:style>
+        <p:txBody>
+          <a:bodyPr rtlCol="0" anchor="ctr"/>
+          <a:lstStyle/>
+          <a:p>
+            <a:pPr algn="ctr"/>
+            <a:r>
+              <a:rPr lang="en-US" altLang="zh-CN" sz="1600" dirty="0">
+                <a:solidFill>
+                  <a:schemeClr val="tx1"/>
+                </a:solidFill>
+                <a:latin typeface="Times New Roman" panose="02020603050405020304" pitchFamily="18" charset="0"/>
+                <a:ea typeface="宋体" panose="02010600030101010101" pitchFamily="2" charset="-122"/>
+                <a:cs typeface="Times New Roman" panose="02020603050405020304" pitchFamily="18" charset="0"/>
+              </a:rPr>
+              <a:t>PyObject </a:t>
+            </a:r>
+            <a:r>
+              <a:rPr lang="zh-CN" altLang="en-US" sz="1600" dirty="0">
+                <a:solidFill>
+                  <a:schemeClr val="tx1"/>
+                </a:solidFill>
+                <a:latin typeface="Times New Roman" panose="02020603050405020304" pitchFamily="18" charset="0"/>
+                <a:ea typeface="宋体" panose="02010600030101010101" pitchFamily="2" charset="-122"/>
+                <a:cs typeface="Times New Roman" panose="02020603050405020304" pitchFamily="18" charset="0"/>
+              </a:rPr>
+              <a:t>实例</a:t>
+            </a:r>
+          </a:p>
+        </p:txBody>
+      </p:sp>
+      <p:cxnSp>
+        <p:nvCxnSpPr>
+          <p:cNvPr id="39" name="连接符: 曲线 38">
+            <a:extLst>
+              <a:ext uri="{FF2B5EF4-FFF2-40B4-BE49-F238E27FC236}">
+                <a16:creationId xmlns:a16="http://schemas.microsoft.com/office/drawing/2014/main" id="{CE9BF615-963F-4217-97B8-87F053A55AC1}"/>
+              </a:ext>
+            </a:extLst>
+          </p:cNvPr>
+          <p:cNvCxnSpPr>
+            <a:cxnSpLocks/>
+          </p:cNvCxnSpPr>
+          <p:nvPr/>
+        </p:nvCxnSpPr>
+        <p:spPr>
+          <a:xfrm>
+            <a:off x="2967753" y="2084718"/>
+            <a:ext cx="1085289" cy="247852"/>
+          </a:xfrm>
+          <a:prstGeom prst="curvedConnector3">
+            <a:avLst/>
+          </a:prstGeom>
+          <a:ln w="28575">
+            <a:solidFill>
+              <a:schemeClr val="tx1"/>
+            </a:solidFill>
+            <a:tailEnd type="triangle"/>
+          </a:ln>
+        </p:spPr>
+        <p:style>
+          <a:lnRef idx="1">
+            <a:schemeClr val="accent1"/>
+          </a:lnRef>
+          <a:fillRef idx="0">
+            <a:schemeClr val="accent1"/>
+          </a:fillRef>
+          <a:effectRef idx="0">
+            <a:schemeClr val="accent1"/>
+          </a:effectRef>
+          <a:fontRef idx="minor">
+            <a:schemeClr val="tx1"/>
+          </a:fontRef>
+        </p:style>
+      </p:cxnSp>
+      <p:cxnSp>
+        <p:nvCxnSpPr>
+          <p:cNvPr id="41" name="连接符: 曲线 40">
+            <a:extLst>
+              <a:ext uri="{FF2B5EF4-FFF2-40B4-BE49-F238E27FC236}">
+                <a16:creationId xmlns:a16="http://schemas.microsoft.com/office/drawing/2014/main" id="{6FB9C4D7-C170-49C1-9D95-A803DCA75B33}"/>
+              </a:ext>
+            </a:extLst>
+          </p:cNvPr>
+          <p:cNvCxnSpPr>
+            <a:stCxn id="8" idx="3"/>
+          </p:cNvCxnSpPr>
+          <p:nvPr/>
+        </p:nvCxnSpPr>
+        <p:spPr>
+          <a:xfrm flipV="1">
+            <a:off x="2978042" y="2718779"/>
+            <a:ext cx="1085289" cy="276770"/>
+          </a:xfrm>
+          <a:prstGeom prst="curvedConnector3">
+            <a:avLst>
+              <a:gd name="adj1" fmla="val 48906"/>
+            </a:avLst>
+          </a:prstGeom>
+          <a:ln w="28575">
+            <a:solidFill>
+              <a:schemeClr val="tx1"/>
+            </a:solidFill>
+            <a:tailEnd type="triangle"/>
+          </a:ln>
+        </p:spPr>
+        <p:style>
+          <a:lnRef idx="1">
+            <a:schemeClr val="accent1"/>
+          </a:lnRef>
+          <a:fillRef idx="0">
+            <a:schemeClr val="accent1"/>
+          </a:fillRef>
+          <a:effectRef idx="0">
+            <a:schemeClr val="accent1"/>
+          </a:effectRef>
+          <a:fontRef idx="minor">
+            <a:schemeClr val="tx1"/>
+          </a:fontRef>
+        </p:style>
+      </p:cxnSp>
+      <p:cxnSp>
+        <p:nvCxnSpPr>
+          <p:cNvPr id="44" name="连接符: 曲线 43">
+            <a:extLst>
+              <a:ext uri="{FF2B5EF4-FFF2-40B4-BE49-F238E27FC236}">
+                <a16:creationId xmlns:a16="http://schemas.microsoft.com/office/drawing/2014/main" id="{834E3361-9E70-429A-8040-A432982F0C6C}"/>
+              </a:ext>
+            </a:extLst>
+          </p:cNvPr>
+          <p:cNvCxnSpPr>
+            <a:endCxn id="35" idx="1"/>
+          </p:cNvCxnSpPr>
+          <p:nvPr/>
+        </p:nvCxnSpPr>
+        <p:spPr>
+          <a:xfrm flipV="1">
+            <a:off x="6187044" y="1951422"/>
+            <a:ext cx="1442852" cy="381148"/>
+          </a:xfrm>
+          <a:prstGeom prst="curvedConnector3">
+            <a:avLst/>
+          </a:prstGeom>
+          <a:ln w="28575">
+            <a:solidFill>
+              <a:schemeClr val="tx1"/>
+            </a:solidFill>
+            <a:tailEnd type="triangle"/>
+          </a:ln>
+        </p:spPr>
+        <p:style>
+          <a:lnRef idx="1">
+            <a:schemeClr val="accent1"/>
+          </a:lnRef>
+          <a:fillRef idx="0">
+            <a:schemeClr val="accent1"/>
+          </a:fillRef>
+          <a:effectRef idx="0">
+            <a:schemeClr val="accent1"/>
+          </a:effectRef>
+          <a:fontRef idx="minor">
+            <a:schemeClr val="tx1"/>
+          </a:fontRef>
+        </p:style>
+      </p:cxnSp>
+      <p:cxnSp>
+        <p:nvCxnSpPr>
+          <p:cNvPr id="46" name="连接符: 曲线 45">
+            <a:extLst>
+              <a:ext uri="{FF2B5EF4-FFF2-40B4-BE49-F238E27FC236}">
+                <a16:creationId xmlns:a16="http://schemas.microsoft.com/office/drawing/2014/main" id="{EDE7FC62-6466-4E89-B32B-6BAD85AA0967}"/>
+              </a:ext>
+            </a:extLst>
+          </p:cNvPr>
+          <p:cNvCxnSpPr>
+            <a:endCxn id="37" idx="1"/>
+          </p:cNvCxnSpPr>
+          <p:nvPr/>
+        </p:nvCxnSpPr>
+        <p:spPr>
+          <a:xfrm>
+            <a:off x="6187044" y="2693626"/>
+            <a:ext cx="1687286" cy="807222"/>
+          </a:xfrm>
+          <a:prstGeom prst="curvedConnector3">
+            <a:avLst/>
+          </a:prstGeom>
+          <a:ln w="28575">
+            <a:solidFill>
+              <a:schemeClr val="tx1"/>
+            </a:solidFill>
+            <a:tailEnd type="triangle"/>
+          </a:ln>
+        </p:spPr>
+        <p:style>
+          <a:lnRef idx="1">
+            <a:schemeClr val="accent1"/>
+          </a:lnRef>
+          <a:fillRef idx="0">
+            <a:schemeClr val="accent1"/>
+          </a:fillRef>
+          <a:effectRef idx="0">
+            <a:schemeClr val="accent1"/>
+          </a:effectRef>
+          <a:fontRef idx="minor">
+            <a:schemeClr val="tx1"/>
+          </a:fontRef>
+        </p:style>
+      </p:cxnSp>
+      <p:sp>
+        <p:nvSpPr>
+          <p:cNvPr id="48" name="椭圆 47">
+            <a:extLst>
+              <a:ext uri="{FF2B5EF4-FFF2-40B4-BE49-F238E27FC236}">
+                <a16:creationId xmlns:a16="http://schemas.microsoft.com/office/drawing/2014/main" id="{FCA67E31-38A2-4F8C-AD6A-09046B59C8CB}"/>
+              </a:ext>
+            </a:extLst>
+          </p:cNvPr>
+          <p:cNvSpPr/>
+          <p:nvPr/>
+        </p:nvSpPr>
+        <p:spPr>
+          <a:xfrm>
+            <a:off x="2917230" y="2023786"/>
+            <a:ext cx="136566" cy="136566"/>
+          </a:xfrm>
+          <a:prstGeom prst="ellipse">
+            <a:avLst/>
+          </a:prstGeom>
+          <a:solidFill>
+            <a:schemeClr val="tx1"/>
+          </a:solidFill>
+          <a:ln>
+            <a:noFill/>
+          </a:ln>
+        </p:spPr>
+        <p:style>
+          <a:lnRef idx="2">
+            <a:schemeClr val="accent1">
+              <a:shade val="50000"/>
+            </a:schemeClr>
+          </a:lnRef>
+          <a:fillRef idx="1">
+            <a:schemeClr val="accent1"/>
+          </a:fillRef>
+          <a:effectRef idx="0">
+            <a:schemeClr val="accent1"/>
+          </a:effectRef>
+          <a:fontRef idx="minor">
+            <a:schemeClr val="lt1"/>
+          </a:fontRef>
+        </p:style>
+        <p:txBody>
+          <a:bodyPr rtlCol="0" anchor="ctr"/>
+          <a:lstStyle/>
+          <a:p>
+            <a:pPr algn="ctr"/>
+            <a:endParaRPr lang="zh-CN" altLang="en-US"/>
+          </a:p>
+        </p:txBody>
+      </p:sp>
+      <p:sp>
+        <p:nvSpPr>
+          <p:cNvPr id="49" name="椭圆 48">
+            <a:extLst>
+              <a:ext uri="{FF2B5EF4-FFF2-40B4-BE49-F238E27FC236}">
+                <a16:creationId xmlns:a16="http://schemas.microsoft.com/office/drawing/2014/main" id="{46645D00-F578-4342-B275-1479F5B8FDCE}"/>
+              </a:ext>
+            </a:extLst>
+          </p:cNvPr>
+          <p:cNvSpPr/>
+          <p:nvPr/>
+        </p:nvSpPr>
+        <p:spPr>
+          <a:xfrm>
+            <a:off x="2916152" y="2927504"/>
+            <a:ext cx="136566" cy="136566"/>
+          </a:xfrm>
+          <a:prstGeom prst="ellipse">
+            <a:avLst/>
+          </a:prstGeom>
+          <a:solidFill>
+            <a:schemeClr val="tx1"/>
+          </a:solidFill>
+          <a:ln>
+            <a:noFill/>
+          </a:ln>
+        </p:spPr>
+        <p:style>
+          <a:lnRef idx="2">
+            <a:schemeClr val="accent1">
+              <a:shade val="50000"/>
+            </a:schemeClr>
+          </a:lnRef>
+          <a:fillRef idx="1">
+            <a:schemeClr val="accent1"/>
+          </a:fillRef>
+          <a:effectRef idx="0">
+            <a:schemeClr val="accent1"/>
+          </a:effectRef>
+          <a:fontRef idx="minor">
+            <a:schemeClr val="lt1"/>
+          </a:fontRef>
+        </p:style>
+        <p:txBody>
+          <a:bodyPr rtlCol="0" anchor="ctr"/>
+          <a:lstStyle/>
+          <a:p>
+            <a:pPr algn="ctr"/>
+            <a:endParaRPr lang="zh-CN" altLang="en-US" dirty="0"/>
+          </a:p>
+        </p:txBody>
+      </p:sp>
+      <p:sp>
+        <p:nvSpPr>
+          <p:cNvPr id="50" name="椭圆 49">
+            <a:extLst>
+              <a:ext uri="{FF2B5EF4-FFF2-40B4-BE49-F238E27FC236}">
+                <a16:creationId xmlns:a16="http://schemas.microsoft.com/office/drawing/2014/main" id="{38A791B3-CE4D-4BCD-A8A5-319BD6B0B097}"/>
+              </a:ext>
+            </a:extLst>
+          </p:cNvPr>
+          <p:cNvSpPr/>
+          <p:nvPr/>
+        </p:nvSpPr>
+        <p:spPr>
+          <a:xfrm>
+            <a:off x="6118761" y="2265878"/>
+            <a:ext cx="136566" cy="136566"/>
+          </a:xfrm>
+          <a:prstGeom prst="ellipse">
+            <a:avLst/>
+          </a:prstGeom>
+          <a:solidFill>
+            <a:schemeClr val="tx1"/>
+          </a:solidFill>
+          <a:ln>
+            <a:noFill/>
+          </a:ln>
+        </p:spPr>
+        <p:style>
+          <a:lnRef idx="2">
+            <a:schemeClr val="accent1">
+              <a:shade val="50000"/>
+            </a:schemeClr>
+          </a:lnRef>
+          <a:fillRef idx="1">
+            <a:schemeClr val="accent1"/>
+          </a:fillRef>
+          <a:effectRef idx="0">
+            <a:schemeClr val="accent1"/>
+          </a:effectRef>
+          <a:fontRef idx="minor">
+            <a:schemeClr val="lt1"/>
+          </a:fontRef>
+        </p:style>
+        <p:txBody>
+          <a:bodyPr rtlCol="0" anchor="ctr"/>
+          <a:lstStyle/>
+          <a:p>
+            <a:pPr algn="ctr"/>
+            <a:endParaRPr lang="zh-CN" altLang="en-US"/>
+          </a:p>
+        </p:txBody>
+      </p:sp>
+      <p:sp>
+        <p:nvSpPr>
+          <p:cNvPr id="51" name="椭圆 50">
+            <a:extLst>
+              <a:ext uri="{FF2B5EF4-FFF2-40B4-BE49-F238E27FC236}">
+                <a16:creationId xmlns:a16="http://schemas.microsoft.com/office/drawing/2014/main" id="{0D8FD23D-36EF-49FF-866A-25A07B644D32}"/>
+              </a:ext>
+            </a:extLst>
+          </p:cNvPr>
+          <p:cNvSpPr/>
+          <p:nvPr/>
+        </p:nvSpPr>
+        <p:spPr>
+          <a:xfrm>
+            <a:off x="6119414" y="2632719"/>
+            <a:ext cx="136566" cy="136566"/>
+          </a:xfrm>
+          <a:prstGeom prst="ellipse">
+            <a:avLst/>
+          </a:prstGeom>
+          <a:solidFill>
+            <a:schemeClr val="tx1"/>
+          </a:solidFill>
+          <a:ln>
+            <a:noFill/>
+          </a:ln>
+        </p:spPr>
+        <p:style>
+          <a:lnRef idx="2">
+            <a:schemeClr val="accent1">
+              <a:shade val="50000"/>
+            </a:schemeClr>
+          </a:lnRef>
+          <a:fillRef idx="1">
+            <a:schemeClr val="accent1"/>
+          </a:fillRef>
+          <a:effectRef idx="0">
+            <a:schemeClr val="accent1"/>
+          </a:effectRef>
+          <a:fontRef idx="minor">
+            <a:schemeClr val="lt1"/>
+          </a:fontRef>
+        </p:style>
+        <p:txBody>
+          <a:bodyPr rtlCol="0" anchor="ctr"/>
+          <a:lstStyle/>
+          <a:p>
+            <a:pPr algn="ctr"/>
+            <a:endParaRPr lang="zh-CN" altLang="en-US"/>
+          </a:p>
+        </p:txBody>
+      </p:sp>
+      <p:sp>
+        <p:nvSpPr>
+          <p:cNvPr id="52" name="椭圆 51">
+            <a:extLst>
+              <a:ext uri="{FF2B5EF4-FFF2-40B4-BE49-F238E27FC236}">
+                <a16:creationId xmlns:a16="http://schemas.microsoft.com/office/drawing/2014/main" id="{1517FBA1-FEA6-45B6-889D-84A5A650A4D0}"/>
+              </a:ext>
+            </a:extLst>
+          </p:cNvPr>
+          <p:cNvSpPr/>
+          <p:nvPr/>
+        </p:nvSpPr>
+        <p:spPr>
+          <a:xfrm>
+            <a:off x="4682041" y="240095"/>
+            <a:ext cx="1250766" cy="546793"/>
+          </a:xfrm>
+          <a:prstGeom prst="ellipse">
+            <a:avLst/>
+          </a:prstGeom>
+          <a:noFill/>
+          <a:ln w="28575">
+            <a:solidFill>
+              <a:schemeClr val="tx1"/>
+            </a:solidFill>
+          </a:ln>
+        </p:spPr>
+        <p:style>
+          <a:lnRef idx="2">
+            <a:schemeClr val="accent1">
+              <a:shade val="50000"/>
+            </a:schemeClr>
+          </a:lnRef>
+          <a:fillRef idx="1">
+            <a:schemeClr val="accent1"/>
+          </a:fillRef>
+          <a:effectRef idx="0">
+            <a:schemeClr val="accent1"/>
+          </a:effectRef>
+          <a:fontRef idx="minor">
+            <a:schemeClr val="lt1"/>
+          </a:fontRef>
+        </p:style>
+        <p:txBody>
+          <a:bodyPr rtlCol="0" anchor="ctr"/>
+          <a:lstStyle/>
+          <a:p>
+            <a:pPr algn="ctr"/>
+            <a:r>
+              <a:rPr lang="zh-CN" altLang="en-US" dirty="0">
+                <a:solidFill>
+                  <a:schemeClr val="tx1"/>
+                </a:solidFill>
+                <a:latin typeface="宋体" panose="02010600030101010101" pitchFamily="2" charset="-122"/>
+                <a:ea typeface="宋体" panose="02010600030101010101" pitchFamily="2" charset="-122"/>
+              </a:rPr>
+              <a:t>根集合</a:t>
+            </a:r>
+          </a:p>
+        </p:txBody>
+      </p:sp>
+      <p:cxnSp>
+        <p:nvCxnSpPr>
+          <p:cNvPr id="58" name="直接箭头连接符 57">
+            <a:extLst>
+              <a:ext uri="{FF2B5EF4-FFF2-40B4-BE49-F238E27FC236}">
+                <a16:creationId xmlns:a16="http://schemas.microsoft.com/office/drawing/2014/main" id="{6932A383-4A4F-417D-9C59-ABC7C49AA812}"/>
+              </a:ext>
+            </a:extLst>
+          </p:cNvPr>
+          <p:cNvCxnSpPr>
+            <a:stCxn id="52" idx="4"/>
+            <a:endCxn id="10" idx="0"/>
+          </p:cNvCxnSpPr>
+          <p:nvPr/>
+        </p:nvCxnSpPr>
+        <p:spPr>
+          <a:xfrm>
+            <a:off x="5307424" y="786888"/>
+            <a:ext cx="0" cy="376893"/>
+          </a:xfrm>
+          <a:prstGeom prst="straightConnector1">
+            <a:avLst/>
+          </a:prstGeom>
+          <a:ln w="38100">
+            <a:solidFill>
+              <a:schemeClr val="tx1"/>
+            </a:solidFill>
+            <a:tailEnd type="triangle"/>
+          </a:ln>
+        </p:spPr>
+        <p:style>
+          <a:lnRef idx="1">
+            <a:schemeClr val="accent1"/>
+          </a:lnRef>
+          <a:fillRef idx="0">
+            <a:schemeClr val="accent1"/>
+          </a:fillRef>
+          <a:effectRef idx="0">
+            <a:schemeClr val="accent1"/>
+          </a:effectRef>
+          <a:fontRef idx="minor">
+            <a:schemeClr val="tx1"/>
+          </a:fontRef>
+        </p:style>
+      </p:cxnSp>
+    </p:spTree>
+    <p:extLst>
+      <p:ext uri="{BB962C8B-B14F-4D97-AF65-F5344CB8AC3E}">
+        <p14:creationId xmlns:p14="http://schemas.microsoft.com/office/powerpoint/2010/main" val="94626949"/>
       </p:ext>
     </p:extLst>
   </p:cSld>

--- a/docs/thesis/pictures.pptx
+++ b/docs/thesis/pictures.pptx
@@ -5,7 +5,7 @@
     <p:sldMasterId id="2147483648" r:id="rId1"/>
   </p:sldMasterIdLst>
   <p:notesMasterIdLst>
-    <p:notesMasterId r:id="rId16"/>
+    <p:notesMasterId r:id="rId17"/>
   </p:notesMasterIdLst>
   <p:sldIdLst>
     <p:sldId id="259" r:id="rId2"/>
@@ -22,6 +22,7 @@
     <p:sldId id="271" r:id="rId13"/>
     <p:sldId id="272" r:id="rId14"/>
     <p:sldId id="273" r:id="rId15"/>
+    <p:sldId id="274" r:id="rId16"/>
   </p:sldIdLst>
   <p:sldSz cx="12192000" cy="6858000"/>
   <p:notesSz cx="6858000" cy="9144000"/>
@@ -16522,6 +16523,2174 @@
     <p:extLst>
       <p:ext uri="{BB962C8B-B14F-4D97-AF65-F5344CB8AC3E}">
         <p14:creationId xmlns:p14="http://schemas.microsoft.com/office/powerpoint/2010/main" val="94626949"/>
+      </p:ext>
+    </p:extLst>
+  </p:cSld>
+  <p:clrMapOvr>
+    <a:masterClrMapping/>
+  </p:clrMapOvr>
+</p:sld>
+</file>
+
+<file path=ppt/slides/slide15.xml><?xml version="1.0" encoding="utf-8"?>
+<p:sld xmlns:a="http://schemas.openxmlformats.org/drawingml/2006/main" xmlns:r="http://schemas.openxmlformats.org/officeDocument/2006/relationships" xmlns:p="http://schemas.openxmlformats.org/presentationml/2006/main">
+  <p:cSld>
+    <p:spTree>
+      <p:nvGrpSpPr>
+        <p:cNvPr id="1" name=""/>
+        <p:cNvGrpSpPr/>
+        <p:nvPr/>
+      </p:nvGrpSpPr>
+      <p:grpSpPr>
+        <a:xfrm>
+          <a:off x="0" y="0"/>
+          <a:ext cx="0" cy="0"/>
+          <a:chOff x="0" y="0"/>
+          <a:chExt cx="0" cy="0"/>
+        </a:xfrm>
+      </p:grpSpPr>
+      <p:sp>
+        <p:nvSpPr>
+          <p:cNvPr id="7" name="矩形 6">
+            <a:extLst>
+              <a:ext uri="{FF2B5EF4-FFF2-40B4-BE49-F238E27FC236}">
+                <a16:creationId xmlns:a16="http://schemas.microsoft.com/office/drawing/2014/main" id="{0486FE83-4728-467C-B597-E355EE68544F}"/>
+              </a:ext>
+            </a:extLst>
+          </p:cNvPr>
+          <p:cNvSpPr/>
+          <p:nvPr/>
+        </p:nvSpPr>
+        <p:spPr>
+          <a:xfrm>
+            <a:off x="1509165" y="3740727"/>
+            <a:ext cx="3989110" cy="1062842"/>
+          </a:xfrm>
+          <a:prstGeom prst="rect">
+            <a:avLst/>
+          </a:prstGeom>
+          <a:solidFill>
+            <a:schemeClr val="accent3">
+              <a:lumMod val="20000"/>
+              <a:lumOff val="80000"/>
+            </a:schemeClr>
+          </a:solidFill>
+          <a:ln w="28575">
+            <a:solidFill>
+              <a:schemeClr val="tx1"/>
+            </a:solidFill>
+          </a:ln>
+        </p:spPr>
+        <p:style>
+          <a:lnRef idx="2">
+            <a:schemeClr val="accent1">
+              <a:shade val="50000"/>
+            </a:schemeClr>
+          </a:lnRef>
+          <a:fillRef idx="1">
+            <a:schemeClr val="accent1"/>
+          </a:fillRef>
+          <a:effectRef idx="0">
+            <a:schemeClr val="accent1"/>
+          </a:effectRef>
+          <a:fontRef idx="minor">
+            <a:schemeClr val="lt1"/>
+          </a:fontRef>
+        </p:style>
+        <p:txBody>
+          <a:bodyPr rtlCol="0" anchor="ctr"/>
+          <a:lstStyle/>
+          <a:p>
+            <a:pPr algn="ctr"/>
+            <a:endParaRPr lang="zh-CN" altLang="en-US" dirty="0"/>
+          </a:p>
+        </p:txBody>
+      </p:sp>
+      <p:sp>
+        <p:nvSpPr>
+          <p:cNvPr id="4" name="矩形 3">
+            <a:extLst>
+              <a:ext uri="{FF2B5EF4-FFF2-40B4-BE49-F238E27FC236}">
+                <a16:creationId xmlns:a16="http://schemas.microsoft.com/office/drawing/2014/main" id="{246F0398-BBA8-406B-BF43-3FD2BB355D7F}"/>
+              </a:ext>
+            </a:extLst>
+          </p:cNvPr>
+          <p:cNvSpPr/>
+          <p:nvPr/>
+        </p:nvSpPr>
+        <p:spPr>
+          <a:xfrm>
+            <a:off x="1509165" y="795644"/>
+            <a:ext cx="3989110" cy="2945083"/>
+          </a:xfrm>
+          <a:prstGeom prst="rect">
+            <a:avLst/>
+          </a:prstGeom>
+          <a:noFill/>
+          <a:ln w="28575">
+            <a:solidFill>
+              <a:schemeClr val="tx1"/>
+            </a:solidFill>
+          </a:ln>
+        </p:spPr>
+        <p:style>
+          <a:lnRef idx="2">
+            <a:schemeClr val="accent1">
+              <a:shade val="50000"/>
+            </a:schemeClr>
+          </a:lnRef>
+          <a:fillRef idx="1">
+            <a:schemeClr val="accent1"/>
+          </a:fillRef>
+          <a:effectRef idx="0">
+            <a:schemeClr val="accent1"/>
+          </a:effectRef>
+          <a:fontRef idx="minor">
+            <a:schemeClr val="lt1"/>
+          </a:fontRef>
+        </p:style>
+        <p:txBody>
+          <a:bodyPr rtlCol="0" anchor="ctr"/>
+          <a:lstStyle/>
+          <a:p>
+            <a:pPr algn="ctr"/>
+            <a:endParaRPr lang="zh-CN" altLang="en-US"/>
+          </a:p>
+        </p:txBody>
+      </p:sp>
+      <p:grpSp>
+        <p:nvGrpSpPr>
+          <p:cNvPr id="14" name="组合 13">
+            <a:extLst>
+              <a:ext uri="{FF2B5EF4-FFF2-40B4-BE49-F238E27FC236}">
+                <a16:creationId xmlns:a16="http://schemas.microsoft.com/office/drawing/2014/main" id="{54A22073-95F5-499C-B64D-557D152934E9}"/>
+              </a:ext>
+            </a:extLst>
+          </p:cNvPr>
+          <p:cNvGrpSpPr/>
+          <p:nvPr/>
+        </p:nvGrpSpPr>
+        <p:grpSpPr>
+          <a:xfrm>
+            <a:off x="2348342" y="3912919"/>
+            <a:ext cx="2723389" cy="718458"/>
+            <a:chOff x="1799111" y="3912919"/>
+            <a:chExt cx="2723389" cy="718458"/>
+          </a:xfrm>
+        </p:grpSpPr>
+        <p:sp>
+          <p:nvSpPr>
+            <p:cNvPr id="8" name="椭圆 7">
+              <a:extLst>
+                <a:ext uri="{FF2B5EF4-FFF2-40B4-BE49-F238E27FC236}">
+                  <a16:creationId xmlns:a16="http://schemas.microsoft.com/office/drawing/2014/main" id="{8C5C8E1C-D10F-4D47-B6C2-EBB0726483B1}"/>
+                </a:ext>
+              </a:extLst>
+            </p:cNvPr>
+            <p:cNvSpPr/>
+            <p:nvPr/>
+          </p:nvSpPr>
+          <p:spPr>
+            <a:xfrm>
+              <a:off x="1799111" y="3912920"/>
+              <a:ext cx="718457" cy="718457"/>
+            </a:xfrm>
+            <a:prstGeom prst="ellipse">
+              <a:avLst/>
+            </a:prstGeom>
+            <a:noFill/>
+            <a:ln w="28575">
+              <a:solidFill>
+                <a:schemeClr val="tx1"/>
+              </a:solidFill>
+            </a:ln>
+          </p:spPr>
+          <p:style>
+            <a:lnRef idx="2">
+              <a:schemeClr val="accent1">
+                <a:shade val="50000"/>
+              </a:schemeClr>
+            </a:lnRef>
+            <a:fillRef idx="1">
+              <a:schemeClr val="accent1"/>
+            </a:fillRef>
+            <a:effectRef idx="0">
+              <a:schemeClr val="accent1"/>
+            </a:effectRef>
+            <a:fontRef idx="minor">
+              <a:schemeClr val="lt1"/>
+            </a:fontRef>
+          </p:style>
+          <p:txBody>
+            <a:bodyPr rtlCol="0" anchor="ctr"/>
+            <a:lstStyle/>
+            <a:p>
+              <a:pPr algn="ctr"/>
+              <a:r>
+                <a:rPr lang="en-US" altLang="zh-CN" dirty="0">
+                  <a:solidFill>
+                    <a:schemeClr val="tx1"/>
+                  </a:solidFill>
+                  <a:latin typeface="Times New Roman" panose="02020603050405020304" pitchFamily="18" charset="0"/>
+                  <a:cs typeface="Times New Roman" panose="02020603050405020304" pitchFamily="18" charset="0"/>
+                </a:rPr>
+                <a:t>A</a:t>
+              </a:r>
+              <a:endParaRPr lang="zh-CN" altLang="en-US" dirty="0">
+                <a:solidFill>
+                  <a:schemeClr val="tx1"/>
+                </a:solidFill>
+                <a:latin typeface="Times New Roman" panose="02020603050405020304" pitchFamily="18" charset="0"/>
+                <a:cs typeface="Times New Roman" panose="02020603050405020304" pitchFamily="18" charset="0"/>
+              </a:endParaRPr>
+            </a:p>
+          </p:txBody>
+        </p:sp>
+        <p:sp>
+          <p:nvSpPr>
+            <p:cNvPr id="9" name="椭圆 8">
+              <a:extLst>
+                <a:ext uri="{FF2B5EF4-FFF2-40B4-BE49-F238E27FC236}">
+                  <a16:creationId xmlns:a16="http://schemas.microsoft.com/office/drawing/2014/main" id="{19972FB9-A551-4EA1-A850-BEF33F145DE3}"/>
+                </a:ext>
+              </a:extLst>
+            </p:cNvPr>
+            <p:cNvSpPr/>
+            <p:nvPr/>
+          </p:nvSpPr>
+          <p:spPr>
+            <a:xfrm>
+              <a:off x="2801577" y="3912919"/>
+              <a:ext cx="718457" cy="718457"/>
+            </a:xfrm>
+            <a:prstGeom prst="ellipse">
+              <a:avLst/>
+            </a:prstGeom>
+            <a:noFill/>
+            <a:ln w="28575">
+              <a:solidFill>
+                <a:schemeClr val="tx1"/>
+              </a:solidFill>
+            </a:ln>
+          </p:spPr>
+          <p:style>
+            <a:lnRef idx="2">
+              <a:schemeClr val="accent1">
+                <a:shade val="50000"/>
+              </a:schemeClr>
+            </a:lnRef>
+            <a:fillRef idx="1">
+              <a:schemeClr val="accent1"/>
+            </a:fillRef>
+            <a:effectRef idx="0">
+              <a:schemeClr val="accent1"/>
+            </a:effectRef>
+            <a:fontRef idx="minor">
+              <a:schemeClr val="lt1"/>
+            </a:fontRef>
+          </p:style>
+          <p:txBody>
+            <a:bodyPr rtlCol="0" anchor="ctr"/>
+            <a:lstStyle/>
+            <a:p>
+              <a:pPr algn="ctr"/>
+              <a:r>
+                <a:rPr lang="en-US" altLang="zh-CN" dirty="0">
+                  <a:solidFill>
+                    <a:schemeClr val="tx1"/>
+                  </a:solidFill>
+                  <a:latin typeface="Times New Roman" panose="02020603050405020304" pitchFamily="18" charset="0"/>
+                  <a:cs typeface="Times New Roman" panose="02020603050405020304" pitchFamily="18" charset="0"/>
+                </a:rPr>
+                <a:t>B</a:t>
+              </a:r>
+              <a:endParaRPr lang="zh-CN" altLang="en-US" dirty="0">
+                <a:solidFill>
+                  <a:schemeClr val="tx1"/>
+                </a:solidFill>
+                <a:latin typeface="Times New Roman" panose="02020603050405020304" pitchFamily="18" charset="0"/>
+                <a:cs typeface="Times New Roman" panose="02020603050405020304" pitchFamily="18" charset="0"/>
+              </a:endParaRPr>
+            </a:p>
+          </p:txBody>
+        </p:sp>
+        <p:sp>
+          <p:nvSpPr>
+            <p:cNvPr id="10" name="椭圆 9">
+              <a:extLst>
+                <a:ext uri="{FF2B5EF4-FFF2-40B4-BE49-F238E27FC236}">
+                  <a16:creationId xmlns:a16="http://schemas.microsoft.com/office/drawing/2014/main" id="{CDA41DD8-8B58-4E37-8EFD-E18EF7EB292C}"/>
+                </a:ext>
+              </a:extLst>
+            </p:cNvPr>
+            <p:cNvSpPr/>
+            <p:nvPr/>
+          </p:nvSpPr>
+          <p:spPr>
+            <a:xfrm>
+              <a:off x="3804043" y="3912919"/>
+              <a:ext cx="718457" cy="718457"/>
+            </a:xfrm>
+            <a:prstGeom prst="ellipse">
+              <a:avLst/>
+            </a:prstGeom>
+            <a:noFill/>
+            <a:ln w="28575">
+              <a:solidFill>
+                <a:schemeClr val="tx1"/>
+              </a:solidFill>
+            </a:ln>
+          </p:spPr>
+          <p:style>
+            <a:lnRef idx="2">
+              <a:schemeClr val="accent1">
+                <a:shade val="50000"/>
+              </a:schemeClr>
+            </a:lnRef>
+            <a:fillRef idx="1">
+              <a:schemeClr val="accent1"/>
+            </a:fillRef>
+            <a:effectRef idx="0">
+              <a:schemeClr val="accent1"/>
+            </a:effectRef>
+            <a:fontRef idx="minor">
+              <a:schemeClr val="lt1"/>
+            </a:fontRef>
+          </p:style>
+          <p:txBody>
+            <a:bodyPr rtlCol="0" anchor="ctr"/>
+            <a:lstStyle/>
+            <a:p>
+              <a:pPr algn="ctr"/>
+              <a:r>
+                <a:rPr lang="en-US" altLang="zh-CN" dirty="0">
+                  <a:solidFill>
+                    <a:schemeClr val="tx1"/>
+                  </a:solidFill>
+                  <a:latin typeface="Times New Roman" panose="02020603050405020304" pitchFamily="18" charset="0"/>
+                  <a:cs typeface="Times New Roman" panose="02020603050405020304" pitchFamily="18" charset="0"/>
+                </a:rPr>
+                <a:t>C</a:t>
+              </a:r>
+              <a:endParaRPr lang="zh-CN" altLang="en-US" dirty="0">
+                <a:solidFill>
+                  <a:schemeClr val="tx1"/>
+                </a:solidFill>
+                <a:latin typeface="Times New Roman" panose="02020603050405020304" pitchFamily="18" charset="0"/>
+                <a:cs typeface="Times New Roman" panose="02020603050405020304" pitchFamily="18" charset="0"/>
+              </a:endParaRPr>
+            </a:p>
+          </p:txBody>
+        </p:sp>
+      </p:grpSp>
+      <p:sp>
+        <p:nvSpPr>
+          <p:cNvPr id="11" name="椭圆 10">
+            <a:extLst>
+              <a:ext uri="{FF2B5EF4-FFF2-40B4-BE49-F238E27FC236}">
+                <a16:creationId xmlns:a16="http://schemas.microsoft.com/office/drawing/2014/main" id="{9423D84A-8B4C-42AF-A24B-F428D8DE0D68}"/>
+              </a:ext>
+            </a:extLst>
+          </p:cNvPr>
+          <p:cNvSpPr/>
+          <p:nvPr/>
+        </p:nvSpPr>
+        <p:spPr>
+          <a:xfrm>
+            <a:off x="1793172" y="2758044"/>
+            <a:ext cx="718457" cy="718457"/>
+          </a:xfrm>
+          <a:prstGeom prst="ellipse">
+            <a:avLst/>
+          </a:prstGeom>
+          <a:noFill/>
+          <a:ln w="28575">
+            <a:solidFill>
+              <a:schemeClr val="tx1"/>
+            </a:solidFill>
+          </a:ln>
+        </p:spPr>
+        <p:style>
+          <a:lnRef idx="2">
+            <a:schemeClr val="accent1">
+              <a:shade val="50000"/>
+            </a:schemeClr>
+          </a:lnRef>
+          <a:fillRef idx="1">
+            <a:schemeClr val="accent1"/>
+          </a:fillRef>
+          <a:effectRef idx="0">
+            <a:schemeClr val="accent1"/>
+          </a:effectRef>
+          <a:fontRef idx="minor">
+            <a:schemeClr val="lt1"/>
+          </a:fontRef>
+        </p:style>
+        <p:txBody>
+          <a:bodyPr rtlCol="0" anchor="ctr"/>
+          <a:lstStyle/>
+          <a:p>
+            <a:pPr algn="ctr"/>
+            <a:r>
+              <a:rPr lang="en-US" altLang="zh-CN" dirty="0">
+                <a:solidFill>
+                  <a:schemeClr val="tx1"/>
+                </a:solidFill>
+                <a:latin typeface="Times New Roman" panose="02020603050405020304" pitchFamily="18" charset="0"/>
+                <a:cs typeface="Times New Roman" panose="02020603050405020304" pitchFamily="18" charset="0"/>
+              </a:rPr>
+              <a:t>D</a:t>
+            </a:r>
+            <a:endParaRPr lang="zh-CN" altLang="en-US" dirty="0">
+              <a:solidFill>
+                <a:schemeClr val="tx1"/>
+              </a:solidFill>
+              <a:latin typeface="Times New Roman" panose="02020603050405020304" pitchFamily="18" charset="0"/>
+              <a:cs typeface="Times New Roman" panose="02020603050405020304" pitchFamily="18" charset="0"/>
+            </a:endParaRPr>
+          </a:p>
+        </p:txBody>
+      </p:sp>
+      <p:sp>
+        <p:nvSpPr>
+          <p:cNvPr id="12" name="椭圆 11">
+            <a:extLst>
+              <a:ext uri="{FF2B5EF4-FFF2-40B4-BE49-F238E27FC236}">
+                <a16:creationId xmlns:a16="http://schemas.microsoft.com/office/drawing/2014/main" id="{AC705939-6C51-4875-8958-2917174A2BA8}"/>
+              </a:ext>
+            </a:extLst>
+          </p:cNvPr>
+          <p:cNvSpPr/>
+          <p:nvPr/>
+        </p:nvSpPr>
+        <p:spPr>
+          <a:xfrm>
+            <a:off x="2712510" y="2749136"/>
+            <a:ext cx="718457" cy="718457"/>
+          </a:xfrm>
+          <a:prstGeom prst="ellipse">
+            <a:avLst/>
+          </a:prstGeom>
+          <a:noFill/>
+          <a:ln w="28575">
+            <a:solidFill>
+              <a:schemeClr val="tx1"/>
+            </a:solidFill>
+          </a:ln>
+        </p:spPr>
+        <p:style>
+          <a:lnRef idx="2">
+            <a:schemeClr val="accent1">
+              <a:shade val="50000"/>
+            </a:schemeClr>
+          </a:lnRef>
+          <a:fillRef idx="1">
+            <a:schemeClr val="accent1"/>
+          </a:fillRef>
+          <a:effectRef idx="0">
+            <a:schemeClr val="accent1"/>
+          </a:effectRef>
+          <a:fontRef idx="minor">
+            <a:schemeClr val="lt1"/>
+          </a:fontRef>
+        </p:style>
+        <p:txBody>
+          <a:bodyPr rtlCol="0" anchor="ctr"/>
+          <a:lstStyle/>
+          <a:p>
+            <a:pPr algn="ctr"/>
+            <a:r>
+              <a:rPr lang="en-US" altLang="zh-CN" dirty="0">
+                <a:solidFill>
+                  <a:schemeClr val="tx1"/>
+                </a:solidFill>
+                <a:latin typeface="Times New Roman" panose="02020603050405020304" pitchFamily="18" charset="0"/>
+                <a:cs typeface="Times New Roman" panose="02020603050405020304" pitchFamily="18" charset="0"/>
+              </a:rPr>
+              <a:t>E</a:t>
+            </a:r>
+            <a:endParaRPr lang="zh-CN" altLang="en-US" dirty="0">
+              <a:solidFill>
+                <a:schemeClr val="tx1"/>
+              </a:solidFill>
+              <a:latin typeface="Times New Roman" panose="02020603050405020304" pitchFamily="18" charset="0"/>
+              <a:cs typeface="Times New Roman" panose="02020603050405020304" pitchFamily="18" charset="0"/>
+            </a:endParaRPr>
+          </a:p>
+        </p:txBody>
+      </p:sp>
+      <p:sp>
+        <p:nvSpPr>
+          <p:cNvPr id="13" name="椭圆 12">
+            <a:extLst>
+              <a:ext uri="{FF2B5EF4-FFF2-40B4-BE49-F238E27FC236}">
+                <a16:creationId xmlns:a16="http://schemas.microsoft.com/office/drawing/2014/main" id="{DA2A6071-0EA9-428D-A9E3-F06D685774A3}"/>
+              </a:ext>
+            </a:extLst>
+          </p:cNvPr>
+          <p:cNvSpPr/>
+          <p:nvPr/>
+        </p:nvSpPr>
+        <p:spPr>
+          <a:xfrm>
+            <a:off x="3631848" y="2778825"/>
+            <a:ext cx="718457" cy="718457"/>
+          </a:xfrm>
+          <a:prstGeom prst="ellipse">
+            <a:avLst/>
+          </a:prstGeom>
+          <a:noFill/>
+          <a:ln w="28575">
+            <a:solidFill>
+              <a:schemeClr val="tx1"/>
+            </a:solidFill>
+          </a:ln>
+        </p:spPr>
+        <p:style>
+          <a:lnRef idx="2">
+            <a:schemeClr val="accent1">
+              <a:shade val="50000"/>
+            </a:schemeClr>
+          </a:lnRef>
+          <a:fillRef idx="1">
+            <a:schemeClr val="accent1"/>
+          </a:fillRef>
+          <a:effectRef idx="0">
+            <a:schemeClr val="accent1"/>
+          </a:effectRef>
+          <a:fontRef idx="minor">
+            <a:schemeClr val="lt1"/>
+          </a:fontRef>
+        </p:style>
+        <p:txBody>
+          <a:bodyPr rtlCol="0" anchor="ctr"/>
+          <a:lstStyle/>
+          <a:p>
+            <a:pPr algn="ctr"/>
+            <a:r>
+              <a:rPr lang="en-US" altLang="zh-CN" dirty="0">
+                <a:solidFill>
+                  <a:schemeClr val="tx1"/>
+                </a:solidFill>
+                <a:latin typeface="Times New Roman" panose="02020603050405020304" pitchFamily="18" charset="0"/>
+                <a:cs typeface="Times New Roman" panose="02020603050405020304" pitchFamily="18" charset="0"/>
+              </a:rPr>
+              <a:t>F</a:t>
+            </a:r>
+            <a:endParaRPr lang="zh-CN" altLang="en-US" dirty="0">
+              <a:solidFill>
+                <a:schemeClr val="tx1"/>
+              </a:solidFill>
+              <a:latin typeface="Times New Roman" panose="02020603050405020304" pitchFamily="18" charset="0"/>
+              <a:cs typeface="Times New Roman" panose="02020603050405020304" pitchFamily="18" charset="0"/>
+            </a:endParaRPr>
+          </a:p>
+        </p:txBody>
+      </p:sp>
+      <p:sp>
+        <p:nvSpPr>
+          <p:cNvPr id="15" name="椭圆 14">
+            <a:extLst>
+              <a:ext uri="{FF2B5EF4-FFF2-40B4-BE49-F238E27FC236}">
+                <a16:creationId xmlns:a16="http://schemas.microsoft.com/office/drawing/2014/main" id="{5BBC4A90-BB41-46F5-B0DF-847F28238C17}"/>
+              </a:ext>
+            </a:extLst>
+          </p:cNvPr>
+          <p:cNvSpPr/>
+          <p:nvPr/>
+        </p:nvSpPr>
+        <p:spPr>
+          <a:xfrm>
+            <a:off x="4551186" y="2758043"/>
+            <a:ext cx="718457" cy="718457"/>
+          </a:xfrm>
+          <a:prstGeom prst="ellipse">
+            <a:avLst/>
+          </a:prstGeom>
+          <a:noFill/>
+          <a:ln w="28575">
+            <a:solidFill>
+              <a:schemeClr val="tx1"/>
+            </a:solidFill>
+          </a:ln>
+        </p:spPr>
+        <p:style>
+          <a:lnRef idx="2">
+            <a:schemeClr val="accent1">
+              <a:shade val="50000"/>
+            </a:schemeClr>
+          </a:lnRef>
+          <a:fillRef idx="1">
+            <a:schemeClr val="accent1"/>
+          </a:fillRef>
+          <a:effectRef idx="0">
+            <a:schemeClr val="accent1"/>
+          </a:effectRef>
+          <a:fontRef idx="minor">
+            <a:schemeClr val="lt1"/>
+          </a:fontRef>
+        </p:style>
+        <p:txBody>
+          <a:bodyPr rtlCol="0" anchor="ctr"/>
+          <a:lstStyle/>
+          <a:p>
+            <a:pPr algn="ctr"/>
+            <a:r>
+              <a:rPr lang="en-US" altLang="zh-CN" dirty="0">
+                <a:solidFill>
+                  <a:schemeClr val="tx1"/>
+                </a:solidFill>
+                <a:latin typeface="Times New Roman" panose="02020603050405020304" pitchFamily="18" charset="0"/>
+                <a:cs typeface="Times New Roman" panose="02020603050405020304" pitchFamily="18" charset="0"/>
+              </a:rPr>
+              <a:t>G</a:t>
+            </a:r>
+            <a:endParaRPr lang="zh-CN" altLang="en-US" dirty="0">
+              <a:solidFill>
+                <a:schemeClr val="tx1"/>
+              </a:solidFill>
+              <a:latin typeface="Times New Roman" panose="02020603050405020304" pitchFamily="18" charset="0"/>
+              <a:cs typeface="Times New Roman" panose="02020603050405020304" pitchFamily="18" charset="0"/>
+            </a:endParaRPr>
+          </a:p>
+        </p:txBody>
+      </p:sp>
+      <p:sp>
+        <p:nvSpPr>
+          <p:cNvPr id="16" name="椭圆 15">
+            <a:extLst>
+              <a:ext uri="{FF2B5EF4-FFF2-40B4-BE49-F238E27FC236}">
+                <a16:creationId xmlns:a16="http://schemas.microsoft.com/office/drawing/2014/main" id="{1446F626-9CBC-4716-996A-D69A9BC74564}"/>
+              </a:ext>
+            </a:extLst>
+          </p:cNvPr>
+          <p:cNvSpPr/>
+          <p:nvPr/>
+        </p:nvSpPr>
+        <p:spPr>
+          <a:xfrm>
+            <a:off x="1793171" y="1270658"/>
+            <a:ext cx="718457" cy="718457"/>
+          </a:xfrm>
+          <a:prstGeom prst="ellipse">
+            <a:avLst/>
+          </a:prstGeom>
+          <a:noFill/>
+          <a:ln w="28575">
+            <a:solidFill>
+              <a:schemeClr val="tx1"/>
+            </a:solidFill>
+          </a:ln>
+        </p:spPr>
+        <p:style>
+          <a:lnRef idx="2">
+            <a:schemeClr val="accent1">
+              <a:shade val="50000"/>
+            </a:schemeClr>
+          </a:lnRef>
+          <a:fillRef idx="1">
+            <a:schemeClr val="accent1"/>
+          </a:fillRef>
+          <a:effectRef idx="0">
+            <a:schemeClr val="accent1"/>
+          </a:effectRef>
+          <a:fontRef idx="minor">
+            <a:schemeClr val="lt1"/>
+          </a:fontRef>
+        </p:style>
+        <p:txBody>
+          <a:bodyPr rtlCol="0" anchor="ctr"/>
+          <a:lstStyle/>
+          <a:p>
+            <a:pPr algn="ctr"/>
+            <a:r>
+              <a:rPr lang="en-US" altLang="zh-CN" dirty="0">
+                <a:solidFill>
+                  <a:schemeClr val="tx1"/>
+                </a:solidFill>
+                <a:latin typeface="Times New Roman" panose="02020603050405020304" pitchFamily="18" charset="0"/>
+                <a:cs typeface="Times New Roman" panose="02020603050405020304" pitchFamily="18" charset="0"/>
+              </a:rPr>
+              <a:t>H</a:t>
+            </a:r>
+            <a:endParaRPr lang="zh-CN" altLang="en-US" dirty="0">
+              <a:solidFill>
+                <a:schemeClr val="tx1"/>
+              </a:solidFill>
+              <a:latin typeface="Times New Roman" panose="02020603050405020304" pitchFamily="18" charset="0"/>
+              <a:cs typeface="Times New Roman" panose="02020603050405020304" pitchFamily="18" charset="0"/>
+            </a:endParaRPr>
+          </a:p>
+        </p:txBody>
+      </p:sp>
+      <p:sp>
+        <p:nvSpPr>
+          <p:cNvPr id="17" name="椭圆 16">
+            <a:extLst>
+              <a:ext uri="{FF2B5EF4-FFF2-40B4-BE49-F238E27FC236}">
+                <a16:creationId xmlns:a16="http://schemas.microsoft.com/office/drawing/2014/main" id="{FF63C8C8-3DA9-4729-AFF6-13C2B1F22EBA}"/>
+              </a:ext>
+            </a:extLst>
+          </p:cNvPr>
+          <p:cNvSpPr/>
+          <p:nvPr/>
+        </p:nvSpPr>
+        <p:spPr>
+          <a:xfrm>
+            <a:off x="2795634" y="1270653"/>
+            <a:ext cx="718457" cy="718457"/>
+          </a:xfrm>
+          <a:prstGeom prst="ellipse">
+            <a:avLst/>
+          </a:prstGeom>
+          <a:noFill/>
+          <a:ln w="28575">
+            <a:solidFill>
+              <a:schemeClr val="tx1"/>
+            </a:solidFill>
+          </a:ln>
+        </p:spPr>
+        <p:style>
+          <a:lnRef idx="2">
+            <a:schemeClr val="accent1">
+              <a:shade val="50000"/>
+            </a:schemeClr>
+          </a:lnRef>
+          <a:fillRef idx="1">
+            <a:schemeClr val="accent1"/>
+          </a:fillRef>
+          <a:effectRef idx="0">
+            <a:schemeClr val="accent1"/>
+          </a:effectRef>
+          <a:fontRef idx="minor">
+            <a:schemeClr val="lt1"/>
+          </a:fontRef>
+        </p:style>
+        <p:txBody>
+          <a:bodyPr rtlCol="0" anchor="ctr"/>
+          <a:lstStyle/>
+          <a:p>
+            <a:pPr algn="ctr"/>
+            <a:r>
+              <a:rPr lang="en-US" altLang="zh-CN" dirty="0">
+                <a:solidFill>
+                  <a:schemeClr val="tx1"/>
+                </a:solidFill>
+                <a:latin typeface="Times New Roman" panose="02020603050405020304" pitchFamily="18" charset="0"/>
+                <a:cs typeface="Times New Roman" panose="02020603050405020304" pitchFamily="18" charset="0"/>
+              </a:rPr>
+              <a:t>I</a:t>
+            </a:r>
+            <a:endParaRPr lang="zh-CN" altLang="en-US" dirty="0">
+              <a:solidFill>
+                <a:schemeClr val="tx1"/>
+              </a:solidFill>
+              <a:latin typeface="Times New Roman" panose="02020603050405020304" pitchFamily="18" charset="0"/>
+              <a:cs typeface="Times New Roman" panose="02020603050405020304" pitchFamily="18" charset="0"/>
+            </a:endParaRPr>
+          </a:p>
+        </p:txBody>
+      </p:sp>
+      <p:sp>
+        <p:nvSpPr>
+          <p:cNvPr id="18" name="椭圆 17">
+            <a:extLst>
+              <a:ext uri="{FF2B5EF4-FFF2-40B4-BE49-F238E27FC236}">
+                <a16:creationId xmlns:a16="http://schemas.microsoft.com/office/drawing/2014/main" id="{7164AAD3-4FA4-46D3-9CD9-BA6C400E1626}"/>
+              </a:ext>
+            </a:extLst>
+          </p:cNvPr>
+          <p:cNvSpPr/>
+          <p:nvPr/>
+        </p:nvSpPr>
+        <p:spPr>
+          <a:xfrm>
+            <a:off x="4350305" y="1270652"/>
+            <a:ext cx="718457" cy="718457"/>
+          </a:xfrm>
+          <a:prstGeom prst="ellipse">
+            <a:avLst/>
+          </a:prstGeom>
+          <a:noFill/>
+          <a:ln w="28575">
+            <a:solidFill>
+              <a:schemeClr val="tx1"/>
+            </a:solidFill>
+          </a:ln>
+        </p:spPr>
+        <p:style>
+          <a:lnRef idx="2">
+            <a:schemeClr val="accent1">
+              <a:shade val="50000"/>
+            </a:schemeClr>
+          </a:lnRef>
+          <a:fillRef idx="1">
+            <a:schemeClr val="accent1"/>
+          </a:fillRef>
+          <a:effectRef idx="0">
+            <a:schemeClr val="accent1"/>
+          </a:effectRef>
+          <a:fontRef idx="minor">
+            <a:schemeClr val="lt1"/>
+          </a:fontRef>
+        </p:style>
+        <p:txBody>
+          <a:bodyPr rtlCol="0" anchor="ctr"/>
+          <a:lstStyle/>
+          <a:p>
+            <a:pPr algn="ctr"/>
+            <a:r>
+              <a:rPr lang="en-US" altLang="zh-CN" dirty="0">
+                <a:solidFill>
+                  <a:schemeClr val="tx1"/>
+                </a:solidFill>
+                <a:latin typeface="Times New Roman" panose="02020603050405020304" pitchFamily="18" charset="0"/>
+                <a:cs typeface="Times New Roman" panose="02020603050405020304" pitchFamily="18" charset="0"/>
+              </a:rPr>
+              <a:t>J</a:t>
+            </a:r>
+            <a:endParaRPr lang="zh-CN" altLang="en-US" dirty="0">
+              <a:solidFill>
+                <a:schemeClr val="tx1"/>
+              </a:solidFill>
+              <a:latin typeface="Times New Roman" panose="02020603050405020304" pitchFamily="18" charset="0"/>
+              <a:cs typeface="Times New Roman" panose="02020603050405020304" pitchFamily="18" charset="0"/>
+            </a:endParaRPr>
+          </a:p>
+        </p:txBody>
+      </p:sp>
+      <p:cxnSp>
+        <p:nvCxnSpPr>
+          <p:cNvPr id="20" name="直接箭头连接符 19">
+            <a:extLst>
+              <a:ext uri="{FF2B5EF4-FFF2-40B4-BE49-F238E27FC236}">
+                <a16:creationId xmlns:a16="http://schemas.microsoft.com/office/drawing/2014/main" id="{BBB00FDD-894E-4461-A0E3-0D706D014306}"/>
+              </a:ext>
+            </a:extLst>
+          </p:cNvPr>
+          <p:cNvCxnSpPr>
+            <a:cxnSpLocks/>
+            <a:stCxn id="13" idx="0"/>
+            <a:endCxn id="18" idx="4"/>
+          </p:cNvCxnSpPr>
+          <p:nvPr/>
+        </p:nvCxnSpPr>
+        <p:spPr>
+          <a:xfrm flipV="1">
+            <a:off x="3991077" y="1989109"/>
+            <a:ext cx="718457" cy="789716"/>
+          </a:xfrm>
+          <a:prstGeom prst="straightConnector1">
+            <a:avLst/>
+          </a:prstGeom>
+          <a:ln w="28575">
+            <a:solidFill>
+              <a:schemeClr val="tx1"/>
+            </a:solidFill>
+            <a:tailEnd type="triangle"/>
+          </a:ln>
+        </p:spPr>
+        <p:style>
+          <a:lnRef idx="1">
+            <a:schemeClr val="accent1"/>
+          </a:lnRef>
+          <a:fillRef idx="0">
+            <a:schemeClr val="accent1"/>
+          </a:fillRef>
+          <a:effectRef idx="0">
+            <a:schemeClr val="accent1"/>
+          </a:effectRef>
+          <a:fontRef idx="minor">
+            <a:schemeClr val="tx1"/>
+          </a:fontRef>
+        </p:style>
+      </p:cxnSp>
+      <p:cxnSp>
+        <p:nvCxnSpPr>
+          <p:cNvPr id="25" name="连接符: 曲线 24">
+            <a:extLst>
+              <a:ext uri="{FF2B5EF4-FFF2-40B4-BE49-F238E27FC236}">
+                <a16:creationId xmlns:a16="http://schemas.microsoft.com/office/drawing/2014/main" id="{2FEA7F22-6FB4-4989-A3EC-1CD02F1BE393}"/>
+              </a:ext>
+            </a:extLst>
+          </p:cNvPr>
+          <p:cNvCxnSpPr>
+            <a:stCxn id="16" idx="0"/>
+            <a:endCxn id="17" idx="0"/>
+          </p:cNvCxnSpPr>
+          <p:nvPr/>
+        </p:nvCxnSpPr>
+        <p:spPr>
+          <a:xfrm rot="5400000" flipH="1" flipV="1">
+            <a:off x="2653629" y="769425"/>
+            <a:ext cx="5" cy="1002463"/>
+          </a:xfrm>
+          <a:prstGeom prst="curvedConnector3">
+            <a:avLst>
+              <a:gd name="adj1" fmla="val 4572100000"/>
+            </a:avLst>
+          </a:prstGeom>
+          <a:ln w="28575">
+            <a:solidFill>
+              <a:schemeClr val="tx1"/>
+            </a:solidFill>
+            <a:tailEnd type="triangle"/>
+          </a:ln>
+        </p:spPr>
+        <p:style>
+          <a:lnRef idx="1">
+            <a:schemeClr val="accent1"/>
+          </a:lnRef>
+          <a:fillRef idx="0">
+            <a:schemeClr val="accent1"/>
+          </a:fillRef>
+          <a:effectRef idx="0">
+            <a:schemeClr val="accent1"/>
+          </a:effectRef>
+          <a:fontRef idx="minor">
+            <a:schemeClr val="tx1"/>
+          </a:fontRef>
+        </p:style>
+      </p:cxnSp>
+      <p:cxnSp>
+        <p:nvCxnSpPr>
+          <p:cNvPr id="27" name="连接符: 曲线 26">
+            <a:extLst>
+              <a:ext uri="{FF2B5EF4-FFF2-40B4-BE49-F238E27FC236}">
+                <a16:creationId xmlns:a16="http://schemas.microsoft.com/office/drawing/2014/main" id="{153E52EF-2FBB-4250-918A-6BF520DF8769}"/>
+              </a:ext>
+            </a:extLst>
+          </p:cNvPr>
+          <p:cNvCxnSpPr>
+            <a:stCxn id="17" idx="4"/>
+            <a:endCxn id="16" idx="4"/>
+          </p:cNvCxnSpPr>
+          <p:nvPr/>
+        </p:nvCxnSpPr>
+        <p:spPr>
+          <a:xfrm rot="5400000">
+            <a:off x="2653630" y="1487881"/>
+            <a:ext cx="5" cy="1002463"/>
+          </a:xfrm>
+          <a:prstGeom prst="curvedConnector3">
+            <a:avLst>
+              <a:gd name="adj1" fmla="val 4572100000"/>
+            </a:avLst>
+          </a:prstGeom>
+          <a:ln w="28575">
+            <a:solidFill>
+              <a:schemeClr val="tx1"/>
+            </a:solidFill>
+            <a:tailEnd type="triangle"/>
+          </a:ln>
+        </p:spPr>
+        <p:style>
+          <a:lnRef idx="1">
+            <a:schemeClr val="accent1"/>
+          </a:lnRef>
+          <a:fillRef idx="0">
+            <a:schemeClr val="accent1"/>
+          </a:fillRef>
+          <a:effectRef idx="0">
+            <a:schemeClr val="accent1"/>
+          </a:effectRef>
+          <a:fontRef idx="minor">
+            <a:schemeClr val="tx1"/>
+          </a:fontRef>
+        </p:style>
+      </p:cxnSp>
+      <p:sp>
+        <p:nvSpPr>
+          <p:cNvPr id="28" name="文本框 27">
+            <a:extLst>
+              <a:ext uri="{FF2B5EF4-FFF2-40B4-BE49-F238E27FC236}">
+                <a16:creationId xmlns:a16="http://schemas.microsoft.com/office/drawing/2014/main" id="{C8AC2DC7-8B78-4808-822E-E43079056220}"/>
+              </a:ext>
+            </a:extLst>
+          </p:cNvPr>
+          <p:cNvSpPr txBox="1"/>
+          <p:nvPr/>
+        </p:nvSpPr>
+        <p:spPr>
+          <a:xfrm>
+            <a:off x="1531914" y="3817914"/>
+            <a:ext cx="261257" cy="855031"/>
+          </a:xfrm>
+          <a:prstGeom prst="rect">
+            <a:avLst/>
+          </a:prstGeom>
+          <a:noFill/>
+        </p:spPr>
+        <p:txBody>
+          <a:bodyPr wrap="square" rtlCol="0">
+            <a:spAutoFit/>
+          </a:bodyPr>
+          <a:lstStyle/>
+          <a:p>
+            <a:r>
+              <a:rPr lang="zh-CN" altLang="en-US" sz="1600" b="1" dirty="0">
+                <a:latin typeface="宋体" panose="02010600030101010101" pitchFamily="2" charset="-122"/>
+                <a:ea typeface="宋体" panose="02010600030101010101" pitchFamily="2" charset="-122"/>
+              </a:rPr>
+              <a:t>根集合</a:t>
+            </a:r>
+          </a:p>
+        </p:txBody>
+      </p:sp>
+      <p:cxnSp>
+        <p:nvCxnSpPr>
+          <p:cNvPr id="30" name="直接箭头连接符 29">
+            <a:extLst>
+              <a:ext uri="{FF2B5EF4-FFF2-40B4-BE49-F238E27FC236}">
+                <a16:creationId xmlns:a16="http://schemas.microsoft.com/office/drawing/2014/main" id="{E900DC83-4C54-4483-9480-80C4DF095EEF}"/>
+              </a:ext>
+            </a:extLst>
+          </p:cNvPr>
+          <p:cNvCxnSpPr>
+            <a:cxnSpLocks/>
+            <a:stCxn id="8" idx="0"/>
+            <a:endCxn id="11" idx="5"/>
+          </p:cNvCxnSpPr>
+          <p:nvPr/>
+        </p:nvCxnSpPr>
+        <p:spPr>
+          <a:xfrm flipH="1" flipV="1">
+            <a:off x="2406413" y="3371285"/>
+            <a:ext cx="301158" cy="541635"/>
+          </a:xfrm>
+          <a:prstGeom prst="straightConnector1">
+            <a:avLst/>
+          </a:prstGeom>
+          <a:ln w="28575">
+            <a:solidFill>
+              <a:schemeClr val="tx1"/>
+            </a:solidFill>
+            <a:tailEnd type="triangle"/>
+          </a:ln>
+        </p:spPr>
+        <p:style>
+          <a:lnRef idx="1">
+            <a:schemeClr val="accent1"/>
+          </a:lnRef>
+          <a:fillRef idx="0">
+            <a:schemeClr val="accent1"/>
+          </a:fillRef>
+          <a:effectRef idx="0">
+            <a:schemeClr val="accent1"/>
+          </a:effectRef>
+          <a:fontRef idx="minor">
+            <a:schemeClr val="tx1"/>
+          </a:fontRef>
+        </p:style>
+      </p:cxnSp>
+      <p:cxnSp>
+        <p:nvCxnSpPr>
+          <p:cNvPr id="33" name="直接箭头连接符 32">
+            <a:extLst>
+              <a:ext uri="{FF2B5EF4-FFF2-40B4-BE49-F238E27FC236}">
+                <a16:creationId xmlns:a16="http://schemas.microsoft.com/office/drawing/2014/main" id="{C37EDFFD-7CF9-4241-9420-C310A0E614C6}"/>
+              </a:ext>
+            </a:extLst>
+          </p:cNvPr>
+          <p:cNvCxnSpPr>
+            <a:stCxn id="8" idx="0"/>
+            <a:endCxn id="13" idx="3"/>
+          </p:cNvCxnSpPr>
+          <p:nvPr/>
+        </p:nvCxnSpPr>
+        <p:spPr>
+          <a:xfrm flipV="1">
+            <a:off x="2707571" y="3392066"/>
+            <a:ext cx="1029493" cy="520854"/>
+          </a:xfrm>
+          <a:prstGeom prst="straightConnector1">
+            <a:avLst/>
+          </a:prstGeom>
+          <a:ln w="28575">
+            <a:solidFill>
+              <a:schemeClr val="tx1"/>
+            </a:solidFill>
+            <a:tailEnd type="triangle"/>
+          </a:ln>
+        </p:spPr>
+        <p:style>
+          <a:lnRef idx="1">
+            <a:schemeClr val="accent1"/>
+          </a:lnRef>
+          <a:fillRef idx="0">
+            <a:schemeClr val="accent1"/>
+          </a:fillRef>
+          <a:effectRef idx="0">
+            <a:schemeClr val="accent1"/>
+          </a:effectRef>
+          <a:fontRef idx="minor">
+            <a:schemeClr val="tx1"/>
+          </a:fontRef>
+        </p:style>
+      </p:cxnSp>
+      <p:cxnSp>
+        <p:nvCxnSpPr>
+          <p:cNvPr id="35" name="直接箭头连接符 34">
+            <a:extLst>
+              <a:ext uri="{FF2B5EF4-FFF2-40B4-BE49-F238E27FC236}">
+                <a16:creationId xmlns:a16="http://schemas.microsoft.com/office/drawing/2014/main" id="{EB84A75E-6FEF-4877-B802-4E1FEC0385B2}"/>
+              </a:ext>
+            </a:extLst>
+          </p:cNvPr>
+          <p:cNvCxnSpPr>
+            <a:stCxn id="10" idx="0"/>
+            <a:endCxn id="15" idx="4"/>
+          </p:cNvCxnSpPr>
+          <p:nvPr/>
+        </p:nvCxnSpPr>
+        <p:spPr>
+          <a:xfrm flipV="1">
+            <a:off x="4712503" y="3476500"/>
+            <a:ext cx="197912" cy="436419"/>
+          </a:xfrm>
+          <a:prstGeom prst="straightConnector1">
+            <a:avLst/>
+          </a:prstGeom>
+          <a:ln w="28575">
+            <a:solidFill>
+              <a:schemeClr val="tx1"/>
+            </a:solidFill>
+            <a:tailEnd type="triangle"/>
+          </a:ln>
+        </p:spPr>
+        <p:style>
+          <a:lnRef idx="1">
+            <a:schemeClr val="accent1"/>
+          </a:lnRef>
+          <a:fillRef idx="0">
+            <a:schemeClr val="accent1"/>
+          </a:fillRef>
+          <a:effectRef idx="0">
+            <a:schemeClr val="accent1"/>
+          </a:effectRef>
+          <a:fontRef idx="minor">
+            <a:schemeClr val="tx1"/>
+          </a:fontRef>
+        </p:style>
+      </p:cxnSp>
+      <p:sp>
+        <p:nvSpPr>
+          <p:cNvPr id="36" name="文本框 35">
+            <a:extLst>
+              <a:ext uri="{FF2B5EF4-FFF2-40B4-BE49-F238E27FC236}">
+                <a16:creationId xmlns:a16="http://schemas.microsoft.com/office/drawing/2014/main" id="{E19D3064-8BDB-4708-B423-4F9906701212}"/>
+              </a:ext>
+            </a:extLst>
+          </p:cNvPr>
+          <p:cNvSpPr txBox="1"/>
+          <p:nvPr/>
+        </p:nvSpPr>
+        <p:spPr>
+          <a:xfrm>
+            <a:off x="2854527" y="415922"/>
+            <a:ext cx="1152880" cy="369332"/>
+          </a:xfrm>
+          <a:prstGeom prst="rect">
+            <a:avLst/>
+          </a:prstGeom>
+          <a:noFill/>
+        </p:spPr>
+        <p:txBody>
+          <a:bodyPr wrap="none" rtlCol="0">
+            <a:spAutoFit/>
+          </a:bodyPr>
+          <a:lstStyle/>
+          <a:p>
+            <a:r>
+              <a:rPr lang="en-US" altLang="zh-CN" b="1" dirty="0">
+                <a:effectLst/>
+                <a:latin typeface="Times New Roman" panose="02020603050405020304" pitchFamily="18" charset="0"/>
+                <a:cs typeface="Times New Roman" panose="02020603050405020304" pitchFamily="18" charset="0"/>
+              </a:rPr>
+              <a:t>VM Heap</a:t>
+            </a:r>
+          </a:p>
+        </p:txBody>
+      </p:sp>
+      <p:sp>
+        <p:nvSpPr>
+          <p:cNvPr id="37" name="矩形 36">
+            <a:extLst>
+              <a:ext uri="{FF2B5EF4-FFF2-40B4-BE49-F238E27FC236}">
+                <a16:creationId xmlns:a16="http://schemas.microsoft.com/office/drawing/2014/main" id="{8045D4FB-D32D-49E2-B0A8-98A9E6AA69E3}"/>
+              </a:ext>
+            </a:extLst>
+          </p:cNvPr>
+          <p:cNvSpPr/>
+          <p:nvPr/>
+        </p:nvSpPr>
+        <p:spPr>
+          <a:xfrm>
+            <a:off x="6188982" y="3740727"/>
+            <a:ext cx="3989110" cy="1062842"/>
+          </a:xfrm>
+          <a:prstGeom prst="rect">
+            <a:avLst/>
+          </a:prstGeom>
+          <a:solidFill>
+            <a:schemeClr val="accent3">
+              <a:lumMod val="20000"/>
+              <a:lumOff val="80000"/>
+            </a:schemeClr>
+          </a:solidFill>
+          <a:ln w="28575">
+            <a:solidFill>
+              <a:schemeClr val="tx1"/>
+            </a:solidFill>
+          </a:ln>
+        </p:spPr>
+        <p:style>
+          <a:lnRef idx="2">
+            <a:schemeClr val="accent1">
+              <a:shade val="50000"/>
+            </a:schemeClr>
+          </a:lnRef>
+          <a:fillRef idx="1">
+            <a:schemeClr val="accent1"/>
+          </a:fillRef>
+          <a:effectRef idx="0">
+            <a:schemeClr val="accent1"/>
+          </a:effectRef>
+          <a:fontRef idx="minor">
+            <a:schemeClr val="lt1"/>
+          </a:fontRef>
+        </p:style>
+        <p:txBody>
+          <a:bodyPr rtlCol="0" anchor="ctr"/>
+          <a:lstStyle/>
+          <a:p>
+            <a:pPr algn="ctr"/>
+            <a:endParaRPr lang="zh-CN" altLang="en-US" dirty="0"/>
+          </a:p>
+        </p:txBody>
+      </p:sp>
+      <p:sp>
+        <p:nvSpPr>
+          <p:cNvPr id="38" name="矩形 37">
+            <a:extLst>
+              <a:ext uri="{FF2B5EF4-FFF2-40B4-BE49-F238E27FC236}">
+                <a16:creationId xmlns:a16="http://schemas.microsoft.com/office/drawing/2014/main" id="{18CC72AD-04C3-4648-982A-3591EEB5C185}"/>
+              </a:ext>
+            </a:extLst>
+          </p:cNvPr>
+          <p:cNvSpPr/>
+          <p:nvPr/>
+        </p:nvSpPr>
+        <p:spPr>
+          <a:xfrm>
+            <a:off x="6188982" y="795644"/>
+            <a:ext cx="3989110" cy="2945083"/>
+          </a:xfrm>
+          <a:prstGeom prst="rect">
+            <a:avLst/>
+          </a:prstGeom>
+          <a:noFill/>
+          <a:ln w="28575">
+            <a:solidFill>
+              <a:schemeClr val="tx1"/>
+            </a:solidFill>
+          </a:ln>
+        </p:spPr>
+        <p:style>
+          <a:lnRef idx="2">
+            <a:schemeClr val="accent1">
+              <a:shade val="50000"/>
+            </a:schemeClr>
+          </a:lnRef>
+          <a:fillRef idx="1">
+            <a:schemeClr val="accent1"/>
+          </a:fillRef>
+          <a:effectRef idx="0">
+            <a:schemeClr val="accent1"/>
+          </a:effectRef>
+          <a:fontRef idx="minor">
+            <a:schemeClr val="lt1"/>
+          </a:fontRef>
+        </p:style>
+        <p:txBody>
+          <a:bodyPr rtlCol="0" anchor="ctr"/>
+          <a:lstStyle/>
+          <a:p>
+            <a:pPr algn="ctr"/>
+            <a:endParaRPr lang="zh-CN" altLang="en-US"/>
+          </a:p>
+        </p:txBody>
+      </p:sp>
+      <p:grpSp>
+        <p:nvGrpSpPr>
+          <p:cNvPr id="39" name="组合 38">
+            <a:extLst>
+              <a:ext uri="{FF2B5EF4-FFF2-40B4-BE49-F238E27FC236}">
+                <a16:creationId xmlns:a16="http://schemas.microsoft.com/office/drawing/2014/main" id="{C20E0FD5-FD50-4937-874D-EBA464646311}"/>
+              </a:ext>
+            </a:extLst>
+          </p:cNvPr>
+          <p:cNvGrpSpPr/>
+          <p:nvPr/>
+        </p:nvGrpSpPr>
+        <p:grpSpPr>
+          <a:xfrm>
+            <a:off x="7028159" y="3912919"/>
+            <a:ext cx="2723389" cy="718458"/>
+            <a:chOff x="1799111" y="3912919"/>
+            <a:chExt cx="2723389" cy="718458"/>
+          </a:xfrm>
+        </p:grpSpPr>
+        <p:sp>
+          <p:nvSpPr>
+            <p:cNvPr id="40" name="椭圆 39">
+              <a:extLst>
+                <a:ext uri="{FF2B5EF4-FFF2-40B4-BE49-F238E27FC236}">
+                  <a16:creationId xmlns:a16="http://schemas.microsoft.com/office/drawing/2014/main" id="{1A1A424C-D809-4036-B122-B1F27DF608DA}"/>
+                </a:ext>
+              </a:extLst>
+            </p:cNvPr>
+            <p:cNvSpPr/>
+            <p:nvPr/>
+          </p:nvSpPr>
+          <p:spPr>
+            <a:xfrm>
+              <a:off x="1799111" y="3912920"/>
+              <a:ext cx="718457" cy="718457"/>
+            </a:xfrm>
+            <a:prstGeom prst="ellipse">
+              <a:avLst/>
+            </a:prstGeom>
+            <a:noFill/>
+            <a:ln w="28575">
+              <a:solidFill>
+                <a:schemeClr val="tx1"/>
+              </a:solidFill>
+            </a:ln>
+          </p:spPr>
+          <p:style>
+            <a:lnRef idx="2">
+              <a:schemeClr val="accent1">
+                <a:shade val="50000"/>
+              </a:schemeClr>
+            </a:lnRef>
+            <a:fillRef idx="1">
+              <a:schemeClr val="accent1"/>
+            </a:fillRef>
+            <a:effectRef idx="0">
+              <a:schemeClr val="accent1"/>
+            </a:effectRef>
+            <a:fontRef idx="minor">
+              <a:schemeClr val="lt1"/>
+            </a:fontRef>
+          </p:style>
+          <p:txBody>
+            <a:bodyPr rtlCol="0" anchor="ctr"/>
+            <a:lstStyle/>
+            <a:p>
+              <a:pPr algn="ctr"/>
+              <a:r>
+                <a:rPr lang="en-US" altLang="zh-CN" dirty="0">
+                  <a:solidFill>
+                    <a:schemeClr val="tx1"/>
+                  </a:solidFill>
+                  <a:latin typeface="Times New Roman" panose="02020603050405020304" pitchFamily="18" charset="0"/>
+                  <a:cs typeface="Times New Roman" panose="02020603050405020304" pitchFamily="18" charset="0"/>
+                </a:rPr>
+                <a:t>A</a:t>
+              </a:r>
+              <a:endParaRPr lang="zh-CN" altLang="en-US" dirty="0">
+                <a:solidFill>
+                  <a:schemeClr val="tx1"/>
+                </a:solidFill>
+                <a:latin typeface="Times New Roman" panose="02020603050405020304" pitchFamily="18" charset="0"/>
+                <a:cs typeface="Times New Roman" panose="02020603050405020304" pitchFamily="18" charset="0"/>
+              </a:endParaRPr>
+            </a:p>
+          </p:txBody>
+        </p:sp>
+        <p:sp>
+          <p:nvSpPr>
+            <p:cNvPr id="41" name="椭圆 40">
+              <a:extLst>
+                <a:ext uri="{FF2B5EF4-FFF2-40B4-BE49-F238E27FC236}">
+                  <a16:creationId xmlns:a16="http://schemas.microsoft.com/office/drawing/2014/main" id="{5BDBF705-86CA-4F0E-9AB7-AEBD008228B0}"/>
+                </a:ext>
+              </a:extLst>
+            </p:cNvPr>
+            <p:cNvSpPr/>
+            <p:nvPr/>
+          </p:nvSpPr>
+          <p:spPr>
+            <a:xfrm>
+              <a:off x="2801577" y="3912919"/>
+              <a:ext cx="718457" cy="718457"/>
+            </a:xfrm>
+            <a:prstGeom prst="ellipse">
+              <a:avLst/>
+            </a:prstGeom>
+            <a:noFill/>
+            <a:ln w="28575">
+              <a:solidFill>
+                <a:schemeClr val="tx1"/>
+              </a:solidFill>
+            </a:ln>
+          </p:spPr>
+          <p:style>
+            <a:lnRef idx="2">
+              <a:schemeClr val="accent1">
+                <a:shade val="50000"/>
+              </a:schemeClr>
+            </a:lnRef>
+            <a:fillRef idx="1">
+              <a:schemeClr val="accent1"/>
+            </a:fillRef>
+            <a:effectRef idx="0">
+              <a:schemeClr val="accent1"/>
+            </a:effectRef>
+            <a:fontRef idx="minor">
+              <a:schemeClr val="lt1"/>
+            </a:fontRef>
+          </p:style>
+          <p:txBody>
+            <a:bodyPr rtlCol="0" anchor="ctr"/>
+            <a:lstStyle/>
+            <a:p>
+              <a:pPr algn="ctr"/>
+              <a:r>
+                <a:rPr lang="en-US" altLang="zh-CN" dirty="0">
+                  <a:solidFill>
+                    <a:schemeClr val="tx1"/>
+                  </a:solidFill>
+                  <a:latin typeface="Times New Roman" panose="02020603050405020304" pitchFamily="18" charset="0"/>
+                  <a:cs typeface="Times New Roman" panose="02020603050405020304" pitchFamily="18" charset="0"/>
+                </a:rPr>
+                <a:t>B</a:t>
+              </a:r>
+              <a:endParaRPr lang="zh-CN" altLang="en-US" dirty="0">
+                <a:solidFill>
+                  <a:schemeClr val="tx1"/>
+                </a:solidFill>
+                <a:latin typeface="Times New Roman" panose="02020603050405020304" pitchFamily="18" charset="0"/>
+                <a:cs typeface="Times New Roman" panose="02020603050405020304" pitchFamily="18" charset="0"/>
+              </a:endParaRPr>
+            </a:p>
+          </p:txBody>
+        </p:sp>
+        <p:sp>
+          <p:nvSpPr>
+            <p:cNvPr id="42" name="椭圆 41">
+              <a:extLst>
+                <a:ext uri="{FF2B5EF4-FFF2-40B4-BE49-F238E27FC236}">
+                  <a16:creationId xmlns:a16="http://schemas.microsoft.com/office/drawing/2014/main" id="{1A2F5118-8368-425F-936E-735519CF2E30}"/>
+                </a:ext>
+              </a:extLst>
+            </p:cNvPr>
+            <p:cNvSpPr/>
+            <p:nvPr/>
+          </p:nvSpPr>
+          <p:spPr>
+            <a:xfrm>
+              <a:off x="3804043" y="3912919"/>
+              <a:ext cx="718457" cy="718457"/>
+            </a:xfrm>
+            <a:prstGeom prst="ellipse">
+              <a:avLst/>
+            </a:prstGeom>
+            <a:noFill/>
+            <a:ln w="28575">
+              <a:solidFill>
+                <a:schemeClr val="tx1"/>
+              </a:solidFill>
+            </a:ln>
+          </p:spPr>
+          <p:style>
+            <a:lnRef idx="2">
+              <a:schemeClr val="accent1">
+                <a:shade val="50000"/>
+              </a:schemeClr>
+            </a:lnRef>
+            <a:fillRef idx="1">
+              <a:schemeClr val="accent1"/>
+            </a:fillRef>
+            <a:effectRef idx="0">
+              <a:schemeClr val="accent1"/>
+            </a:effectRef>
+            <a:fontRef idx="minor">
+              <a:schemeClr val="lt1"/>
+            </a:fontRef>
+          </p:style>
+          <p:txBody>
+            <a:bodyPr rtlCol="0" anchor="ctr"/>
+            <a:lstStyle/>
+            <a:p>
+              <a:pPr algn="ctr"/>
+              <a:r>
+                <a:rPr lang="en-US" altLang="zh-CN" dirty="0">
+                  <a:solidFill>
+                    <a:schemeClr val="tx1"/>
+                  </a:solidFill>
+                  <a:latin typeface="Times New Roman" panose="02020603050405020304" pitchFamily="18" charset="0"/>
+                  <a:cs typeface="Times New Roman" panose="02020603050405020304" pitchFamily="18" charset="0"/>
+                </a:rPr>
+                <a:t>C</a:t>
+              </a:r>
+              <a:endParaRPr lang="zh-CN" altLang="en-US" dirty="0">
+                <a:solidFill>
+                  <a:schemeClr val="tx1"/>
+                </a:solidFill>
+                <a:latin typeface="Times New Roman" panose="02020603050405020304" pitchFamily="18" charset="0"/>
+                <a:cs typeface="Times New Roman" panose="02020603050405020304" pitchFamily="18" charset="0"/>
+              </a:endParaRPr>
+            </a:p>
+          </p:txBody>
+        </p:sp>
+      </p:grpSp>
+      <p:sp>
+        <p:nvSpPr>
+          <p:cNvPr id="43" name="椭圆 42">
+            <a:extLst>
+              <a:ext uri="{FF2B5EF4-FFF2-40B4-BE49-F238E27FC236}">
+                <a16:creationId xmlns:a16="http://schemas.microsoft.com/office/drawing/2014/main" id="{E93F0D8C-B25C-4ADF-813A-A1AF547804A8}"/>
+              </a:ext>
+            </a:extLst>
+          </p:cNvPr>
+          <p:cNvSpPr/>
+          <p:nvPr/>
+        </p:nvSpPr>
+        <p:spPr>
+          <a:xfrm>
+            <a:off x="6472989" y="2758044"/>
+            <a:ext cx="718457" cy="718457"/>
+          </a:xfrm>
+          <a:prstGeom prst="ellipse">
+            <a:avLst/>
+          </a:prstGeom>
+          <a:noFill/>
+          <a:ln w="28575">
+            <a:solidFill>
+              <a:schemeClr val="tx1"/>
+            </a:solidFill>
+          </a:ln>
+        </p:spPr>
+        <p:style>
+          <a:lnRef idx="2">
+            <a:schemeClr val="accent1">
+              <a:shade val="50000"/>
+            </a:schemeClr>
+          </a:lnRef>
+          <a:fillRef idx="1">
+            <a:schemeClr val="accent1"/>
+          </a:fillRef>
+          <a:effectRef idx="0">
+            <a:schemeClr val="accent1"/>
+          </a:effectRef>
+          <a:fontRef idx="minor">
+            <a:schemeClr val="lt1"/>
+          </a:fontRef>
+        </p:style>
+        <p:txBody>
+          <a:bodyPr rtlCol="0" anchor="ctr"/>
+          <a:lstStyle/>
+          <a:p>
+            <a:pPr algn="ctr"/>
+            <a:r>
+              <a:rPr lang="en-US" altLang="zh-CN" dirty="0">
+                <a:solidFill>
+                  <a:schemeClr val="tx1"/>
+                </a:solidFill>
+                <a:latin typeface="Times New Roman" panose="02020603050405020304" pitchFamily="18" charset="0"/>
+                <a:cs typeface="Times New Roman" panose="02020603050405020304" pitchFamily="18" charset="0"/>
+              </a:rPr>
+              <a:t>D</a:t>
+            </a:r>
+            <a:endParaRPr lang="zh-CN" altLang="en-US" dirty="0">
+              <a:solidFill>
+                <a:schemeClr val="tx1"/>
+              </a:solidFill>
+              <a:latin typeface="Times New Roman" panose="02020603050405020304" pitchFamily="18" charset="0"/>
+              <a:cs typeface="Times New Roman" panose="02020603050405020304" pitchFamily="18" charset="0"/>
+            </a:endParaRPr>
+          </a:p>
+        </p:txBody>
+      </p:sp>
+      <p:sp>
+        <p:nvSpPr>
+          <p:cNvPr id="45" name="椭圆 44">
+            <a:extLst>
+              <a:ext uri="{FF2B5EF4-FFF2-40B4-BE49-F238E27FC236}">
+                <a16:creationId xmlns:a16="http://schemas.microsoft.com/office/drawing/2014/main" id="{9B3998DD-3E76-447F-A848-02608F3C8919}"/>
+              </a:ext>
+            </a:extLst>
+          </p:cNvPr>
+          <p:cNvSpPr/>
+          <p:nvPr/>
+        </p:nvSpPr>
+        <p:spPr>
+          <a:xfrm>
+            <a:off x="8311665" y="2778825"/>
+            <a:ext cx="718457" cy="718457"/>
+          </a:xfrm>
+          <a:prstGeom prst="ellipse">
+            <a:avLst/>
+          </a:prstGeom>
+          <a:noFill/>
+          <a:ln w="28575">
+            <a:solidFill>
+              <a:schemeClr val="tx1"/>
+            </a:solidFill>
+          </a:ln>
+        </p:spPr>
+        <p:style>
+          <a:lnRef idx="2">
+            <a:schemeClr val="accent1">
+              <a:shade val="50000"/>
+            </a:schemeClr>
+          </a:lnRef>
+          <a:fillRef idx="1">
+            <a:schemeClr val="accent1"/>
+          </a:fillRef>
+          <a:effectRef idx="0">
+            <a:schemeClr val="accent1"/>
+          </a:effectRef>
+          <a:fontRef idx="minor">
+            <a:schemeClr val="lt1"/>
+          </a:fontRef>
+        </p:style>
+        <p:txBody>
+          <a:bodyPr rtlCol="0" anchor="ctr"/>
+          <a:lstStyle/>
+          <a:p>
+            <a:pPr algn="ctr"/>
+            <a:r>
+              <a:rPr lang="en-US" altLang="zh-CN" dirty="0">
+                <a:solidFill>
+                  <a:schemeClr val="tx1"/>
+                </a:solidFill>
+                <a:latin typeface="Times New Roman" panose="02020603050405020304" pitchFamily="18" charset="0"/>
+                <a:cs typeface="Times New Roman" panose="02020603050405020304" pitchFamily="18" charset="0"/>
+              </a:rPr>
+              <a:t>F</a:t>
+            </a:r>
+            <a:endParaRPr lang="zh-CN" altLang="en-US" dirty="0">
+              <a:solidFill>
+                <a:schemeClr val="tx1"/>
+              </a:solidFill>
+              <a:latin typeface="Times New Roman" panose="02020603050405020304" pitchFamily="18" charset="0"/>
+              <a:cs typeface="Times New Roman" panose="02020603050405020304" pitchFamily="18" charset="0"/>
+            </a:endParaRPr>
+          </a:p>
+        </p:txBody>
+      </p:sp>
+      <p:sp>
+        <p:nvSpPr>
+          <p:cNvPr id="46" name="椭圆 45">
+            <a:extLst>
+              <a:ext uri="{FF2B5EF4-FFF2-40B4-BE49-F238E27FC236}">
+                <a16:creationId xmlns:a16="http://schemas.microsoft.com/office/drawing/2014/main" id="{8B744414-87E7-4611-BC2A-B10D1EC716D7}"/>
+              </a:ext>
+            </a:extLst>
+          </p:cNvPr>
+          <p:cNvSpPr/>
+          <p:nvPr/>
+        </p:nvSpPr>
+        <p:spPr>
+          <a:xfrm>
+            <a:off x="9231003" y="2758043"/>
+            <a:ext cx="718457" cy="718457"/>
+          </a:xfrm>
+          <a:prstGeom prst="ellipse">
+            <a:avLst/>
+          </a:prstGeom>
+          <a:noFill/>
+          <a:ln w="28575">
+            <a:solidFill>
+              <a:schemeClr val="tx1"/>
+            </a:solidFill>
+          </a:ln>
+        </p:spPr>
+        <p:style>
+          <a:lnRef idx="2">
+            <a:schemeClr val="accent1">
+              <a:shade val="50000"/>
+            </a:schemeClr>
+          </a:lnRef>
+          <a:fillRef idx="1">
+            <a:schemeClr val="accent1"/>
+          </a:fillRef>
+          <a:effectRef idx="0">
+            <a:schemeClr val="accent1"/>
+          </a:effectRef>
+          <a:fontRef idx="minor">
+            <a:schemeClr val="lt1"/>
+          </a:fontRef>
+        </p:style>
+        <p:txBody>
+          <a:bodyPr rtlCol="0" anchor="ctr"/>
+          <a:lstStyle/>
+          <a:p>
+            <a:pPr algn="ctr"/>
+            <a:r>
+              <a:rPr lang="en-US" altLang="zh-CN" dirty="0">
+                <a:solidFill>
+                  <a:schemeClr val="tx1"/>
+                </a:solidFill>
+                <a:latin typeface="Times New Roman" panose="02020603050405020304" pitchFamily="18" charset="0"/>
+                <a:cs typeface="Times New Roman" panose="02020603050405020304" pitchFamily="18" charset="0"/>
+              </a:rPr>
+              <a:t>G</a:t>
+            </a:r>
+            <a:endParaRPr lang="zh-CN" altLang="en-US" dirty="0">
+              <a:solidFill>
+                <a:schemeClr val="tx1"/>
+              </a:solidFill>
+              <a:latin typeface="Times New Roman" panose="02020603050405020304" pitchFamily="18" charset="0"/>
+              <a:cs typeface="Times New Roman" panose="02020603050405020304" pitchFamily="18" charset="0"/>
+            </a:endParaRPr>
+          </a:p>
+        </p:txBody>
+      </p:sp>
+      <p:sp>
+        <p:nvSpPr>
+          <p:cNvPr id="49" name="椭圆 48">
+            <a:extLst>
+              <a:ext uri="{FF2B5EF4-FFF2-40B4-BE49-F238E27FC236}">
+                <a16:creationId xmlns:a16="http://schemas.microsoft.com/office/drawing/2014/main" id="{D1F95266-A983-49D6-A1AA-03E7A74690C8}"/>
+              </a:ext>
+            </a:extLst>
+          </p:cNvPr>
+          <p:cNvSpPr/>
+          <p:nvPr/>
+        </p:nvSpPr>
+        <p:spPr>
+          <a:xfrm>
+            <a:off x="9030122" y="1270652"/>
+            <a:ext cx="718457" cy="718457"/>
+          </a:xfrm>
+          <a:prstGeom prst="ellipse">
+            <a:avLst/>
+          </a:prstGeom>
+          <a:noFill/>
+          <a:ln w="28575">
+            <a:solidFill>
+              <a:schemeClr val="tx1"/>
+            </a:solidFill>
+          </a:ln>
+        </p:spPr>
+        <p:style>
+          <a:lnRef idx="2">
+            <a:schemeClr val="accent1">
+              <a:shade val="50000"/>
+            </a:schemeClr>
+          </a:lnRef>
+          <a:fillRef idx="1">
+            <a:schemeClr val="accent1"/>
+          </a:fillRef>
+          <a:effectRef idx="0">
+            <a:schemeClr val="accent1"/>
+          </a:effectRef>
+          <a:fontRef idx="minor">
+            <a:schemeClr val="lt1"/>
+          </a:fontRef>
+        </p:style>
+        <p:txBody>
+          <a:bodyPr rtlCol="0" anchor="ctr"/>
+          <a:lstStyle/>
+          <a:p>
+            <a:pPr algn="ctr"/>
+            <a:r>
+              <a:rPr lang="en-US" altLang="zh-CN" dirty="0">
+                <a:solidFill>
+                  <a:schemeClr val="tx1"/>
+                </a:solidFill>
+                <a:latin typeface="Times New Roman" panose="02020603050405020304" pitchFamily="18" charset="0"/>
+                <a:cs typeface="Times New Roman" panose="02020603050405020304" pitchFamily="18" charset="0"/>
+              </a:rPr>
+              <a:t>J</a:t>
+            </a:r>
+            <a:endParaRPr lang="zh-CN" altLang="en-US" dirty="0">
+              <a:solidFill>
+                <a:schemeClr val="tx1"/>
+              </a:solidFill>
+              <a:latin typeface="Times New Roman" panose="02020603050405020304" pitchFamily="18" charset="0"/>
+              <a:cs typeface="Times New Roman" panose="02020603050405020304" pitchFamily="18" charset="0"/>
+            </a:endParaRPr>
+          </a:p>
+        </p:txBody>
+      </p:sp>
+      <p:cxnSp>
+        <p:nvCxnSpPr>
+          <p:cNvPr id="50" name="直接箭头连接符 49">
+            <a:extLst>
+              <a:ext uri="{FF2B5EF4-FFF2-40B4-BE49-F238E27FC236}">
+                <a16:creationId xmlns:a16="http://schemas.microsoft.com/office/drawing/2014/main" id="{9C3A2D7F-052F-4ADB-BFAA-82B4CDE70413}"/>
+              </a:ext>
+            </a:extLst>
+          </p:cNvPr>
+          <p:cNvCxnSpPr>
+            <a:cxnSpLocks/>
+            <a:stCxn id="45" idx="0"/>
+            <a:endCxn id="49" idx="4"/>
+          </p:cNvCxnSpPr>
+          <p:nvPr/>
+        </p:nvCxnSpPr>
+        <p:spPr>
+          <a:xfrm flipV="1">
+            <a:off x="8670894" y="1989109"/>
+            <a:ext cx="718457" cy="789716"/>
+          </a:xfrm>
+          <a:prstGeom prst="straightConnector1">
+            <a:avLst/>
+          </a:prstGeom>
+          <a:ln w="28575">
+            <a:solidFill>
+              <a:schemeClr val="tx1"/>
+            </a:solidFill>
+            <a:tailEnd type="triangle"/>
+          </a:ln>
+        </p:spPr>
+        <p:style>
+          <a:lnRef idx="1">
+            <a:schemeClr val="accent1"/>
+          </a:lnRef>
+          <a:fillRef idx="0">
+            <a:schemeClr val="accent1"/>
+          </a:fillRef>
+          <a:effectRef idx="0">
+            <a:schemeClr val="accent1"/>
+          </a:effectRef>
+          <a:fontRef idx="minor">
+            <a:schemeClr val="tx1"/>
+          </a:fontRef>
+        </p:style>
+      </p:cxnSp>
+      <p:sp>
+        <p:nvSpPr>
+          <p:cNvPr id="53" name="文本框 52">
+            <a:extLst>
+              <a:ext uri="{FF2B5EF4-FFF2-40B4-BE49-F238E27FC236}">
+                <a16:creationId xmlns:a16="http://schemas.microsoft.com/office/drawing/2014/main" id="{EF545404-6F4C-43DB-AC2E-6DCFC11AAE12}"/>
+              </a:ext>
+            </a:extLst>
+          </p:cNvPr>
+          <p:cNvSpPr txBox="1"/>
+          <p:nvPr/>
+        </p:nvSpPr>
+        <p:spPr>
+          <a:xfrm>
+            <a:off x="6211731" y="3817914"/>
+            <a:ext cx="261257" cy="855031"/>
+          </a:xfrm>
+          <a:prstGeom prst="rect">
+            <a:avLst/>
+          </a:prstGeom>
+          <a:noFill/>
+        </p:spPr>
+        <p:txBody>
+          <a:bodyPr wrap="square" rtlCol="0">
+            <a:spAutoFit/>
+          </a:bodyPr>
+          <a:lstStyle/>
+          <a:p>
+            <a:r>
+              <a:rPr lang="zh-CN" altLang="en-US" sz="1600" b="1" dirty="0">
+                <a:latin typeface="宋体" panose="02010600030101010101" pitchFamily="2" charset="-122"/>
+                <a:ea typeface="宋体" panose="02010600030101010101" pitchFamily="2" charset="-122"/>
+              </a:rPr>
+              <a:t>根集合</a:t>
+            </a:r>
+          </a:p>
+        </p:txBody>
+      </p:sp>
+      <p:cxnSp>
+        <p:nvCxnSpPr>
+          <p:cNvPr id="54" name="直接箭头连接符 53">
+            <a:extLst>
+              <a:ext uri="{FF2B5EF4-FFF2-40B4-BE49-F238E27FC236}">
+                <a16:creationId xmlns:a16="http://schemas.microsoft.com/office/drawing/2014/main" id="{624858D9-DB46-4EB5-B24D-28D9C1E27FDF}"/>
+              </a:ext>
+            </a:extLst>
+          </p:cNvPr>
+          <p:cNvCxnSpPr>
+            <a:cxnSpLocks/>
+            <a:stCxn id="40" idx="0"/>
+            <a:endCxn id="43" idx="5"/>
+          </p:cNvCxnSpPr>
+          <p:nvPr/>
+        </p:nvCxnSpPr>
+        <p:spPr>
+          <a:xfrm flipH="1" flipV="1">
+            <a:off x="7086230" y="3371285"/>
+            <a:ext cx="301158" cy="541635"/>
+          </a:xfrm>
+          <a:prstGeom prst="straightConnector1">
+            <a:avLst/>
+          </a:prstGeom>
+          <a:ln w="28575">
+            <a:solidFill>
+              <a:schemeClr val="tx1"/>
+            </a:solidFill>
+            <a:tailEnd type="triangle"/>
+          </a:ln>
+        </p:spPr>
+        <p:style>
+          <a:lnRef idx="1">
+            <a:schemeClr val="accent1"/>
+          </a:lnRef>
+          <a:fillRef idx="0">
+            <a:schemeClr val="accent1"/>
+          </a:fillRef>
+          <a:effectRef idx="0">
+            <a:schemeClr val="accent1"/>
+          </a:effectRef>
+          <a:fontRef idx="minor">
+            <a:schemeClr val="tx1"/>
+          </a:fontRef>
+        </p:style>
+      </p:cxnSp>
+      <p:cxnSp>
+        <p:nvCxnSpPr>
+          <p:cNvPr id="55" name="直接箭头连接符 54">
+            <a:extLst>
+              <a:ext uri="{FF2B5EF4-FFF2-40B4-BE49-F238E27FC236}">
+                <a16:creationId xmlns:a16="http://schemas.microsoft.com/office/drawing/2014/main" id="{5829B2DF-7ED9-41DB-A7C1-0EE7191F060A}"/>
+              </a:ext>
+            </a:extLst>
+          </p:cNvPr>
+          <p:cNvCxnSpPr>
+            <a:stCxn id="40" idx="0"/>
+            <a:endCxn id="45" idx="3"/>
+          </p:cNvCxnSpPr>
+          <p:nvPr/>
+        </p:nvCxnSpPr>
+        <p:spPr>
+          <a:xfrm flipV="1">
+            <a:off x="7387388" y="3392066"/>
+            <a:ext cx="1029493" cy="520854"/>
+          </a:xfrm>
+          <a:prstGeom prst="straightConnector1">
+            <a:avLst/>
+          </a:prstGeom>
+          <a:ln w="28575">
+            <a:solidFill>
+              <a:schemeClr val="tx1"/>
+            </a:solidFill>
+            <a:tailEnd type="triangle"/>
+          </a:ln>
+        </p:spPr>
+        <p:style>
+          <a:lnRef idx="1">
+            <a:schemeClr val="accent1"/>
+          </a:lnRef>
+          <a:fillRef idx="0">
+            <a:schemeClr val="accent1"/>
+          </a:fillRef>
+          <a:effectRef idx="0">
+            <a:schemeClr val="accent1"/>
+          </a:effectRef>
+          <a:fontRef idx="minor">
+            <a:schemeClr val="tx1"/>
+          </a:fontRef>
+        </p:style>
+      </p:cxnSp>
+      <p:cxnSp>
+        <p:nvCxnSpPr>
+          <p:cNvPr id="56" name="直接箭头连接符 55">
+            <a:extLst>
+              <a:ext uri="{FF2B5EF4-FFF2-40B4-BE49-F238E27FC236}">
+                <a16:creationId xmlns:a16="http://schemas.microsoft.com/office/drawing/2014/main" id="{8A4AA053-7B7A-41EC-B9CC-E9A29C04E713}"/>
+              </a:ext>
+            </a:extLst>
+          </p:cNvPr>
+          <p:cNvCxnSpPr>
+            <a:stCxn id="42" idx="0"/>
+            <a:endCxn id="46" idx="4"/>
+          </p:cNvCxnSpPr>
+          <p:nvPr/>
+        </p:nvCxnSpPr>
+        <p:spPr>
+          <a:xfrm flipV="1">
+            <a:off x="9392320" y="3476500"/>
+            <a:ext cx="197912" cy="436419"/>
+          </a:xfrm>
+          <a:prstGeom prst="straightConnector1">
+            <a:avLst/>
+          </a:prstGeom>
+          <a:ln w="28575">
+            <a:solidFill>
+              <a:schemeClr val="tx1"/>
+            </a:solidFill>
+            <a:tailEnd type="triangle"/>
+          </a:ln>
+        </p:spPr>
+        <p:style>
+          <a:lnRef idx="1">
+            <a:schemeClr val="accent1"/>
+          </a:lnRef>
+          <a:fillRef idx="0">
+            <a:schemeClr val="accent1"/>
+          </a:fillRef>
+          <a:effectRef idx="0">
+            <a:schemeClr val="accent1"/>
+          </a:effectRef>
+          <a:fontRef idx="minor">
+            <a:schemeClr val="tx1"/>
+          </a:fontRef>
+        </p:style>
+      </p:cxnSp>
+      <p:sp>
+        <p:nvSpPr>
+          <p:cNvPr id="57" name="文本框 56">
+            <a:extLst>
+              <a:ext uri="{FF2B5EF4-FFF2-40B4-BE49-F238E27FC236}">
+                <a16:creationId xmlns:a16="http://schemas.microsoft.com/office/drawing/2014/main" id="{4088E719-A248-47D5-AF20-173E4DD1B447}"/>
+              </a:ext>
+            </a:extLst>
+          </p:cNvPr>
+          <p:cNvSpPr txBox="1"/>
+          <p:nvPr/>
+        </p:nvSpPr>
+        <p:spPr>
+          <a:xfrm>
+            <a:off x="7534344" y="415922"/>
+            <a:ext cx="1152880" cy="369332"/>
+          </a:xfrm>
+          <a:prstGeom prst="rect">
+            <a:avLst/>
+          </a:prstGeom>
+          <a:noFill/>
+        </p:spPr>
+        <p:txBody>
+          <a:bodyPr wrap="none" rtlCol="0">
+            <a:spAutoFit/>
+          </a:bodyPr>
+          <a:lstStyle/>
+          <a:p>
+            <a:r>
+              <a:rPr lang="en-US" altLang="zh-CN" b="1" dirty="0">
+                <a:effectLst/>
+                <a:latin typeface="Times New Roman" panose="02020603050405020304" pitchFamily="18" charset="0"/>
+                <a:cs typeface="Times New Roman" panose="02020603050405020304" pitchFamily="18" charset="0"/>
+              </a:rPr>
+              <a:t>VM Heap</a:t>
+            </a:r>
+          </a:p>
+        </p:txBody>
+      </p:sp>
+      <p:sp>
+        <p:nvSpPr>
+          <p:cNvPr id="58" name="文本框 57">
+            <a:extLst>
+              <a:ext uri="{FF2B5EF4-FFF2-40B4-BE49-F238E27FC236}">
+                <a16:creationId xmlns:a16="http://schemas.microsoft.com/office/drawing/2014/main" id="{C8BAE0D6-BA5C-4050-9692-AC3AE9512B57}"/>
+              </a:ext>
+            </a:extLst>
+          </p:cNvPr>
+          <p:cNvSpPr txBox="1"/>
+          <p:nvPr/>
+        </p:nvSpPr>
+        <p:spPr>
+          <a:xfrm>
+            <a:off x="2493619" y="4981701"/>
+            <a:ext cx="2040943" cy="369332"/>
+          </a:xfrm>
+          <a:prstGeom prst="rect">
+            <a:avLst/>
+          </a:prstGeom>
+          <a:noFill/>
+        </p:spPr>
+        <p:txBody>
+          <a:bodyPr wrap="none" rtlCol="0">
+            <a:spAutoFit/>
+          </a:bodyPr>
+          <a:lstStyle/>
+          <a:p>
+            <a:r>
+              <a:rPr lang="zh-CN" altLang="en-US" b="1" dirty="0">
+                <a:latin typeface="Times New Roman" panose="02020603050405020304" pitchFamily="18" charset="0"/>
+                <a:ea typeface="宋体" panose="02010600030101010101" pitchFamily="2" charset="-122"/>
+                <a:cs typeface="Times New Roman" panose="02020603050405020304" pitchFamily="18" charset="0"/>
+              </a:rPr>
+              <a:t>① </a:t>
+            </a:r>
+            <a:r>
+              <a:rPr lang="en-US" altLang="zh-CN" b="1" dirty="0">
+                <a:latin typeface="Times New Roman" panose="02020603050405020304" pitchFamily="18" charset="0"/>
+                <a:ea typeface="宋体" panose="02010600030101010101" pitchFamily="2" charset="-122"/>
+                <a:cs typeface="Times New Roman" panose="02020603050405020304" pitchFamily="18" charset="0"/>
+              </a:rPr>
+              <a:t>GC </a:t>
+            </a:r>
+            <a:r>
+              <a:rPr lang="zh-CN" altLang="en-US" b="1" dirty="0">
+                <a:latin typeface="Times New Roman" panose="02020603050405020304" pitchFamily="18" charset="0"/>
+                <a:ea typeface="宋体" panose="02010600030101010101" pitchFamily="2" charset="-122"/>
+                <a:cs typeface="Times New Roman" panose="02020603050405020304" pitchFamily="18" charset="0"/>
+              </a:rPr>
+              <a:t>算法运行前</a:t>
+            </a:r>
+          </a:p>
+        </p:txBody>
+      </p:sp>
+      <p:sp>
+        <p:nvSpPr>
+          <p:cNvPr id="59" name="文本框 58">
+            <a:extLst>
+              <a:ext uri="{FF2B5EF4-FFF2-40B4-BE49-F238E27FC236}">
+                <a16:creationId xmlns:a16="http://schemas.microsoft.com/office/drawing/2014/main" id="{9F051F5E-D385-4B3E-9403-792757534194}"/>
+              </a:ext>
+            </a:extLst>
+          </p:cNvPr>
+          <p:cNvSpPr txBox="1"/>
+          <p:nvPr/>
+        </p:nvSpPr>
+        <p:spPr>
+          <a:xfrm>
+            <a:off x="7163065" y="4975761"/>
+            <a:ext cx="2040943" cy="369332"/>
+          </a:xfrm>
+          <a:prstGeom prst="rect">
+            <a:avLst/>
+          </a:prstGeom>
+          <a:noFill/>
+        </p:spPr>
+        <p:txBody>
+          <a:bodyPr wrap="none" rtlCol="0">
+            <a:spAutoFit/>
+          </a:bodyPr>
+          <a:lstStyle/>
+          <a:p>
+            <a:r>
+              <a:rPr lang="zh-CN" altLang="en-US" b="1">
+                <a:latin typeface="Times New Roman" panose="02020603050405020304" pitchFamily="18" charset="0"/>
+                <a:ea typeface="宋体" panose="02010600030101010101" pitchFamily="2" charset="-122"/>
+                <a:cs typeface="Times New Roman" panose="02020603050405020304" pitchFamily="18" charset="0"/>
+              </a:rPr>
+              <a:t>② </a:t>
+            </a:r>
+            <a:r>
+              <a:rPr lang="en-US" altLang="zh-CN" b="1" dirty="0">
+                <a:latin typeface="Times New Roman" panose="02020603050405020304" pitchFamily="18" charset="0"/>
+                <a:ea typeface="宋体" panose="02010600030101010101" pitchFamily="2" charset="-122"/>
+                <a:cs typeface="Times New Roman" panose="02020603050405020304" pitchFamily="18" charset="0"/>
+              </a:rPr>
+              <a:t>GC </a:t>
+            </a:r>
+            <a:r>
+              <a:rPr lang="zh-CN" altLang="en-US" b="1" dirty="0">
+                <a:latin typeface="Times New Roman" panose="02020603050405020304" pitchFamily="18" charset="0"/>
+                <a:ea typeface="宋体" panose="02010600030101010101" pitchFamily="2" charset="-122"/>
+                <a:cs typeface="Times New Roman" panose="02020603050405020304" pitchFamily="18" charset="0"/>
+              </a:rPr>
+              <a:t>算法运行后</a:t>
+            </a:r>
+          </a:p>
+        </p:txBody>
+      </p:sp>
+    </p:spTree>
+    <p:extLst>
+      <p:ext uri="{BB962C8B-B14F-4D97-AF65-F5344CB8AC3E}">
+        <p14:creationId xmlns:p14="http://schemas.microsoft.com/office/powerpoint/2010/main" val="3076704768"/>
       </p:ext>
     </p:extLst>
   </p:cSld>

--- a/docs/thesis/pictures.pptx
+++ b/docs/thesis/pictures.pptx
@@ -18661,7 +18661,7 @@
           <a:lstStyle/>
           <a:p>
             <a:r>
-              <a:rPr lang="zh-CN" altLang="en-US" b="1">
+              <a:rPr lang="zh-CN" altLang="en-US" b="1" dirty="0">
                 <a:latin typeface="Times New Roman" panose="02020603050405020304" pitchFamily="18" charset="0"/>
                 <a:ea typeface="宋体" panose="02010600030101010101" pitchFamily="2" charset="-122"/>
                 <a:cs typeface="Times New Roman" panose="02020603050405020304" pitchFamily="18" charset="0"/>
@@ -18687,6 +18687,96 @@
           </a:p>
         </p:txBody>
       </p:sp>
+      <p:cxnSp>
+        <p:nvCxnSpPr>
+          <p:cNvPr id="61" name="直接箭头连接符 60">
+            <a:extLst>
+              <a:ext uri="{FF2B5EF4-FFF2-40B4-BE49-F238E27FC236}">
+                <a16:creationId xmlns:a16="http://schemas.microsoft.com/office/drawing/2014/main" id="{8AF1B993-DBE4-4B2D-AE37-DB206652DBFE}"/>
+              </a:ext>
+            </a:extLst>
+          </p:cNvPr>
+          <p:cNvCxnSpPr>
+            <a:stCxn id="13" idx="6"/>
+            <a:endCxn id="15" idx="2"/>
+          </p:cNvCxnSpPr>
+          <p:nvPr/>
+        </p:nvCxnSpPr>
+        <p:spPr>
+          <a:xfrm flipV="1">
+            <a:off x="4350305" y="3117272"/>
+            <a:ext cx="200881" cy="20782"/>
+          </a:xfrm>
+          <a:prstGeom prst="straightConnector1">
+            <a:avLst/>
+          </a:prstGeom>
+          <a:ln w="28575">
+            <a:solidFill>
+              <a:schemeClr val="tx1"/>
+            </a:solidFill>
+            <a:tailEnd type="triangle"/>
+          </a:ln>
+        </p:spPr>
+        <p:style>
+          <a:lnRef idx="1">
+            <a:schemeClr val="accent1"/>
+          </a:lnRef>
+          <a:fillRef idx="0">
+            <a:schemeClr val="accent1"/>
+          </a:fillRef>
+          <a:effectRef idx="0">
+            <a:schemeClr val="accent1"/>
+          </a:effectRef>
+          <a:fontRef idx="minor">
+            <a:schemeClr val="tx1"/>
+          </a:fontRef>
+        </p:style>
+      </p:cxnSp>
+      <p:cxnSp>
+        <p:nvCxnSpPr>
+          <p:cNvPr id="65" name="直接箭头连接符 64">
+            <a:extLst>
+              <a:ext uri="{FF2B5EF4-FFF2-40B4-BE49-F238E27FC236}">
+                <a16:creationId xmlns:a16="http://schemas.microsoft.com/office/drawing/2014/main" id="{20177C56-A2C1-4F6C-9E75-BF8C8CC3A21A}"/>
+              </a:ext>
+            </a:extLst>
+          </p:cNvPr>
+          <p:cNvCxnSpPr>
+            <a:stCxn id="45" idx="6"/>
+            <a:endCxn id="46" idx="2"/>
+          </p:cNvCxnSpPr>
+          <p:nvPr/>
+        </p:nvCxnSpPr>
+        <p:spPr>
+          <a:xfrm flipV="1">
+            <a:off x="9030122" y="3117272"/>
+            <a:ext cx="200881" cy="20782"/>
+          </a:xfrm>
+          <a:prstGeom prst="straightConnector1">
+            <a:avLst/>
+          </a:prstGeom>
+          <a:ln w="28575">
+            <a:solidFill>
+              <a:schemeClr val="tx1"/>
+            </a:solidFill>
+            <a:tailEnd type="triangle"/>
+          </a:ln>
+        </p:spPr>
+        <p:style>
+          <a:lnRef idx="1">
+            <a:schemeClr val="accent1"/>
+          </a:lnRef>
+          <a:fillRef idx="0">
+            <a:schemeClr val="accent1"/>
+          </a:fillRef>
+          <a:effectRef idx="0">
+            <a:schemeClr val="accent1"/>
+          </a:effectRef>
+          <a:fontRef idx="minor">
+            <a:schemeClr val="tx1"/>
+          </a:fontRef>
+        </p:style>
+      </p:cxnSp>
     </p:spTree>
     <p:extLst>
       <p:ext uri="{BB962C8B-B14F-4D97-AF65-F5344CB8AC3E}">

--- a/docs/thesis/pictures.pptx
+++ b/docs/thesis/pictures.pptx
@@ -5,7 +5,7 @@
     <p:sldMasterId id="2147483648" r:id="rId1"/>
   </p:sldMasterIdLst>
   <p:notesMasterIdLst>
-    <p:notesMasterId r:id="rId17"/>
+    <p:notesMasterId r:id="rId18"/>
   </p:notesMasterIdLst>
   <p:sldIdLst>
     <p:sldId id="259" r:id="rId2"/>
@@ -23,6 +23,7 @@
     <p:sldId id="272" r:id="rId14"/>
     <p:sldId id="273" r:id="rId15"/>
     <p:sldId id="266" r:id="rId16"/>
+    <p:sldId id="275" r:id="rId17"/>
   </p:sldIdLst>
   <p:sldSz cx="12192000" cy="6858000"/>
   <p:notesSz cx="6858000" cy="9144000"/>
@@ -223,7 +224,7 @@
           <a:p>
             <a:fld id="{C66A8157-93E0-41B4-A777-149D15F966ED}" type="datetimeFigureOut">
               <a:rPr lang="zh-CN" altLang="en-US" smtClean="0"/>
-              <a:t>2026/4/28</a:t>
+              <a:t>2026/4/29</a:t>
             </a:fld>
             <a:endParaRPr lang="zh-CN" altLang="en-US"/>
           </a:p>
@@ -1072,7 +1073,7 @@
           <a:p>
             <a:fld id="{E7097275-6DBD-4E45-A854-72B05E8D007C}" type="datetimeFigureOut">
               <a:rPr lang="zh-CN" altLang="en-US" smtClean="0"/>
-              <a:t>2026/4/28</a:t>
+              <a:t>2026/4/29</a:t>
             </a:fld>
             <a:endParaRPr lang="zh-CN" altLang="en-US"/>
           </a:p>
@@ -1270,7 +1271,7 @@
           <a:p>
             <a:fld id="{E7097275-6DBD-4E45-A854-72B05E8D007C}" type="datetimeFigureOut">
               <a:rPr lang="zh-CN" altLang="en-US" smtClean="0"/>
-              <a:t>2026/4/28</a:t>
+              <a:t>2026/4/29</a:t>
             </a:fld>
             <a:endParaRPr lang="zh-CN" altLang="en-US"/>
           </a:p>
@@ -1478,7 +1479,7 @@
           <a:p>
             <a:fld id="{E7097275-6DBD-4E45-A854-72B05E8D007C}" type="datetimeFigureOut">
               <a:rPr lang="zh-CN" altLang="en-US" smtClean="0"/>
-              <a:t>2026/4/28</a:t>
+              <a:t>2026/4/29</a:t>
             </a:fld>
             <a:endParaRPr lang="zh-CN" altLang="en-US"/>
           </a:p>
@@ -1676,7 +1677,7 @@
           <a:p>
             <a:fld id="{E7097275-6DBD-4E45-A854-72B05E8D007C}" type="datetimeFigureOut">
               <a:rPr lang="zh-CN" altLang="en-US" smtClean="0"/>
-              <a:t>2026/4/28</a:t>
+              <a:t>2026/4/29</a:t>
             </a:fld>
             <a:endParaRPr lang="zh-CN" altLang="en-US"/>
           </a:p>
@@ -1951,7 +1952,7 @@
           <a:p>
             <a:fld id="{E7097275-6DBD-4E45-A854-72B05E8D007C}" type="datetimeFigureOut">
               <a:rPr lang="zh-CN" altLang="en-US" smtClean="0"/>
-              <a:t>2026/4/28</a:t>
+              <a:t>2026/4/29</a:t>
             </a:fld>
             <a:endParaRPr lang="zh-CN" altLang="en-US"/>
           </a:p>
@@ -2216,7 +2217,7 @@
           <a:p>
             <a:fld id="{E7097275-6DBD-4E45-A854-72B05E8D007C}" type="datetimeFigureOut">
               <a:rPr lang="zh-CN" altLang="en-US" smtClean="0"/>
-              <a:t>2026/4/28</a:t>
+              <a:t>2026/4/29</a:t>
             </a:fld>
             <a:endParaRPr lang="zh-CN" altLang="en-US"/>
           </a:p>
@@ -2628,7 +2629,7 @@
           <a:p>
             <a:fld id="{E7097275-6DBD-4E45-A854-72B05E8D007C}" type="datetimeFigureOut">
               <a:rPr lang="zh-CN" altLang="en-US" smtClean="0"/>
-              <a:t>2026/4/28</a:t>
+              <a:t>2026/4/29</a:t>
             </a:fld>
             <a:endParaRPr lang="zh-CN" altLang="en-US"/>
           </a:p>
@@ -2769,7 +2770,7 @@
           <a:p>
             <a:fld id="{E7097275-6DBD-4E45-A854-72B05E8D007C}" type="datetimeFigureOut">
               <a:rPr lang="zh-CN" altLang="en-US" smtClean="0"/>
-              <a:t>2026/4/28</a:t>
+              <a:t>2026/4/29</a:t>
             </a:fld>
             <a:endParaRPr lang="zh-CN" altLang="en-US"/>
           </a:p>
@@ -2882,7 +2883,7 @@
           <a:p>
             <a:fld id="{E7097275-6DBD-4E45-A854-72B05E8D007C}" type="datetimeFigureOut">
               <a:rPr lang="zh-CN" altLang="en-US" smtClean="0"/>
-              <a:t>2026/4/28</a:t>
+              <a:t>2026/4/29</a:t>
             </a:fld>
             <a:endParaRPr lang="zh-CN" altLang="en-US"/>
           </a:p>
@@ -3193,7 +3194,7 @@
           <a:p>
             <a:fld id="{E7097275-6DBD-4E45-A854-72B05E8D007C}" type="datetimeFigureOut">
               <a:rPr lang="zh-CN" altLang="en-US" smtClean="0"/>
-              <a:t>2026/4/28</a:t>
+              <a:t>2026/4/29</a:t>
             </a:fld>
             <a:endParaRPr lang="zh-CN" altLang="en-US"/>
           </a:p>
@@ -3481,7 +3482,7 @@
           <a:p>
             <a:fld id="{E7097275-6DBD-4E45-A854-72B05E8D007C}" type="datetimeFigureOut">
               <a:rPr lang="zh-CN" altLang="en-US" smtClean="0"/>
-              <a:t>2026/4/28</a:t>
+              <a:t>2026/4/29</a:t>
             </a:fld>
             <a:endParaRPr lang="zh-CN" altLang="en-US"/>
           </a:p>
@@ -3722,7 +3723,7 @@
           <a:p>
             <a:fld id="{E7097275-6DBD-4E45-A854-72B05E8D007C}" type="datetimeFigureOut">
               <a:rPr lang="zh-CN" altLang="en-US" smtClean="0"/>
-              <a:t>2026/4/28</a:t>
+              <a:t>2026/4/29</a:t>
             </a:fld>
             <a:endParaRPr lang="zh-CN" altLang="en-US"/>
           </a:p>
@@ -16965,7 +16966,8 @@
                 <a:solidFill>
                   <a:schemeClr val="tx1"/>
                 </a:solidFill>
-                <a:latin typeface="Times New Roman" panose="02020603050405020304" pitchFamily="18" charset="0"/>
+                <a:latin typeface="宋体" panose="02010600030101010101" pitchFamily="2" charset="-122"/>
+                <a:ea typeface="宋体" panose="02010600030101010101" pitchFamily="2" charset="-122"/>
                 <a:cs typeface="Times New Roman" panose="02020603050405020304" pitchFamily="18" charset="0"/>
               </a:rPr>
               <a:t>有待处理异常</a:t>
@@ -18458,6 +18460,529 @@
     <p:extLst>
       <p:ext uri="{BB962C8B-B14F-4D97-AF65-F5344CB8AC3E}">
         <p14:creationId xmlns:p14="http://schemas.microsoft.com/office/powerpoint/2010/main" val="3466348852"/>
+      </p:ext>
+    </p:extLst>
+  </p:cSld>
+  <p:clrMapOvr>
+    <a:masterClrMapping/>
+  </p:clrMapOvr>
+</p:sld>
+</file>
+
+<file path=ppt/slides/slide16.xml><?xml version="1.0" encoding="utf-8"?>
+<p:sld xmlns:a="http://schemas.openxmlformats.org/drawingml/2006/main" xmlns:r="http://schemas.openxmlformats.org/officeDocument/2006/relationships" xmlns:p="http://schemas.openxmlformats.org/presentationml/2006/main">
+  <p:cSld>
+    <p:spTree>
+      <p:nvGrpSpPr>
+        <p:cNvPr id="1" name=""/>
+        <p:cNvGrpSpPr/>
+        <p:nvPr/>
+      </p:nvGrpSpPr>
+      <p:grpSpPr>
+        <a:xfrm>
+          <a:off x="0" y="0"/>
+          <a:ext cx="0" cy="0"/>
+          <a:chOff x="0" y="0"/>
+          <a:chExt cx="0" cy="0"/>
+        </a:xfrm>
+      </p:grpSpPr>
+      <p:sp>
+        <p:nvSpPr>
+          <p:cNvPr id="4" name="矩形 3">
+            <a:extLst>
+              <a:ext uri="{FF2B5EF4-FFF2-40B4-BE49-F238E27FC236}">
+                <a16:creationId xmlns:a16="http://schemas.microsoft.com/office/drawing/2014/main" id="{68FFC391-859B-4500-8598-B17E9DF5C8E3}"/>
+              </a:ext>
+            </a:extLst>
+          </p:cNvPr>
+          <p:cNvSpPr/>
+          <p:nvPr/>
+        </p:nvSpPr>
+        <p:spPr>
+          <a:xfrm>
+            <a:off x="3786249" y="1033153"/>
+            <a:ext cx="4619502" cy="783772"/>
+          </a:xfrm>
+          <a:prstGeom prst="rect">
+            <a:avLst/>
+          </a:prstGeom>
+          <a:noFill/>
+          <a:ln w="28575">
+            <a:solidFill>
+              <a:schemeClr val="tx1"/>
+            </a:solidFill>
+          </a:ln>
+        </p:spPr>
+        <p:style>
+          <a:lnRef idx="2">
+            <a:schemeClr val="accent1">
+              <a:shade val="50000"/>
+            </a:schemeClr>
+          </a:lnRef>
+          <a:fillRef idx="1">
+            <a:schemeClr val="accent1"/>
+          </a:fillRef>
+          <a:effectRef idx="0">
+            <a:schemeClr val="accent1"/>
+          </a:effectRef>
+          <a:fontRef idx="minor">
+            <a:schemeClr val="lt1"/>
+          </a:fontRef>
+        </p:style>
+        <p:txBody>
+          <a:bodyPr rtlCol="0" anchor="ctr"/>
+          <a:lstStyle/>
+          <a:p>
+            <a:pPr algn="ctr"/>
+            <a:r>
+              <a:rPr lang="zh-CN" altLang="en-US" b="1" dirty="0">
+                <a:solidFill>
+                  <a:schemeClr val="tx1"/>
+                </a:solidFill>
+                <a:effectLst/>
+                <a:latin typeface="Times New Roman" panose="02020603050405020304" pitchFamily="18" charset="0"/>
+                <a:ea typeface="宋体" panose="02010600030101010101" pitchFamily="2" charset="-122"/>
+                <a:cs typeface="Times New Roman" panose="02020603050405020304" pitchFamily="18" charset="0"/>
+              </a:rPr>
+              <a:t>面向宿主公开稳定抽象</a:t>
+            </a:r>
+            <a:r>
+              <a:rPr lang="en-US" altLang="zh-CN" b="1" dirty="0">
+                <a:solidFill>
+                  <a:schemeClr val="tx1"/>
+                </a:solidFill>
+                <a:effectLst/>
+                <a:latin typeface="Times New Roman" panose="02020603050405020304" pitchFamily="18" charset="0"/>
+                <a:cs typeface="Times New Roman" panose="02020603050405020304" pitchFamily="18" charset="0"/>
+              </a:rPr>
+              <a:t>API</a:t>
+            </a:r>
+          </a:p>
+          <a:p>
+            <a:pPr algn="ctr"/>
+            <a:r>
+              <a:rPr lang="en-US" altLang="zh-CN" sz="1600" b="0" dirty="0">
+                <a:solidFill>
+                  <a:schemeClr val="tx1"/>
+                </a:solidFill>
+                <a:effectLst/>
+                <a:latin typeface="Times New Roman" panose="02020603050405020304" pitchFamily="18" charset="0"/>
+                <a:cs typeface="Times New Roman" panose="02020603050405020304" pitchFamily="18" charset="0"/>
+              </a:rPr>
+              <a:t>Isolate / Context / Script / Value / Function / TryCatch</a:t>
+            </a:r>
+            <a:endParaRPr lang="zh-CN" altLang="en-US" sz="1600" b="0" dirty="0">
+              <a:solidFill>
+                <a:schemeClr val="tx1"/>
+              </a:solidFill>
+              <a:effectLst/>
+              <a:latin typeface="Times New Roman" panose="02020603050405020304" pitchFamily="18" charset="0"/>
+              <a:cs typeface="Times New Roman" panose="02020603050405020304" pitchFamily="18" charset="0"/>
+            </a:endParaRPr>
+          </a:p>
+        </p:txBody>
+      </p:sp>
+      <p:sp>
+        <p:nvSpPr>
+          <p:cNvPr id="5" name="矩形 4">
+            <a:extLst>
+              <a:ext uri="{FF2B5EF4-FFF2-40B4-BE49-F238E27FC236}">
+                <a16:creationId xmlns:a16="http://schemas.microsoft.com/office/drawing/2014/main" id="{90B8E369-08F9-4E9D-B3C1-E828393130F4}"/>
+              </a:ext>
+            </a:extLst>
+          </p:cNvPr>
+          <p:cNvSpPr/>
+          <p:nvPr/>
+        </p:nvSpPr>
+        <p:spPr>
+          <a:xfrm>
+            <a:off x="3786249" y="2141517"/>
+            <a:ext cx="4619502" cy="783772"/>
+          </a:xfrm>
+          <a:prstGeom prst="rect">
+            <a:avLst/>
+          </a:prstGeom>
+          <a:noFill/>
+          <a:ln w="28575">
+            <a:solidFill>
+              <a:schemeClr val="tx1"/>
+            </a:solidFill>
+          </a:ln>
+        </p:spPr>
+        <p:style>
+          <a:lnRef idx="2">
+            <a:schemeClr val="accent1">
+              <a:shade val="50000"/>
+            </a:schemeClr>
+          </a:lnRef>
+          <a:fillRef idx="1">
+            <a:schemeClr val="accent1"/>
+          </a:fillRef>
+          <a:effectRef idx="0">
+            <a:schemeClr val="accent1"/>
+          </a:effectRef>
+          <a:fontRef idx="minor">
+            <a:schemeClr val="lt1"/>
+          </a:fontRef>
+        </p:style>
+        <p:txBody>
+          <a:bodyPr rtlCol="0" anchor="ctr"/>
+          <a:lstStyle/>
+          <a:p>
+            <a:pPr algn="ctr"/>
+            <a:r>
+              <a:rPr lang="zh-CN" altLang="en-US" b="1" dirty="0">
+                <a:solidFill>
+                  <a:schemeClr val="tx1"/>
+                </a:solidFill>
+                <a:effectLst/>
+                <a:latin typeface="Times New Roman" panose="02020603050405020304" pitchFamily="18" charset="0"/>
+                <a:ea typeface="宋体" panose="02010600030101010101" pitchFamily="2" charset="-122"/>
+                <a:cs typeface="Times New Roman" panose="02020603050405020304" pitchFamily="18" charset="0"/>
+              </a:rPr>
+              <a:t>桥阶层（</a:t>
+            </a:r>
+            <a:r>
+              <a:rPr lang="en-US" altLang="zh-CN" b="1" dirty="0">
+                <a:solidFill>
+                  <a:schemeClr val="tx1"/>
+                </a:solidFill>
+                <a:effectLst/>
+                <a:latin typeface="Times New Roman" panose="02020603050405020304" pitchFamily="18" charset="0"/>
+                <a:ea typeface="宋体" panose="02010600030101010101" pitchFamily="2" charset="-122"/>
+                <a:cs typeface="Times New Roman" panose="02020603050405020304" pitchFamily="18" charset="0"/>
+              </a:rPr>
+              <a:t>API Bridge</a:t>
+            </a:r>
+            <a:r>
+              <a:rPr lang="zh-CN" altLang="en-US" b="1" dirty="0">
+                <a:solidFill>
+                  <a:schemeClr val="tx1"/>
+                </a:solidFill>
+                <a:effectLst/>
+                <a:latin typeface="Times New Roman" panose="02020603050405020304" pitchFamily="18" charset="0"/>
+                <a:ea typeface="宋体" panose="02010600030101010101" pitchFamily="2" charset="-122"/>
+                <a:cs typeface="Times New Roman" panose="02020603050405020304" pitchFamily="18" charset="0"/>
+              </a:rPr>
+              <a:t>）</a:t>
+            </a:r>
+            <a:endParaRPr lang="en-US" altLang="zh-CN" b="1" dirty="0">
+              <a:solidFill>
+                <a:schemeClr val="tx1"/>
+              </a:solidFill>
+              <a:effectLst/>
+              <a:latin typeface="Times New Roman" panose="02020603050405020304" pitchFamily="18" charset="0"/>
+              <a:ea typeface="宋体" panose="02010600030101010101" pitchFamily="2" charset="-122"/>
+              <a:cs typeface="Times New Roman" panose="02020603050405020304" pitchFamily="18" charset="0"/>
+            </a:endParaRPr>
+          </a:p>
+          <a:p>
+            <a:pPr algn="ctr"/>
+            <a:r>
+              <a:rPr lang="zh-CN" altLang="en-US" sz="1600" b="0" dirty="0">
+                <a:solidFill>
+                  <a:schemeClr val="tx1"/>
+                </a:solidFill>
+                <a:effectLst/>
+                <a:latin typeface="Times New Roman" panose="02020603050405020304" pitchFamily="18" charset="0"/>
+                <a:ea typeface="宋体" panose="02010600030101010101" pitchFamily="2" charset="-122"/>
+                <a:cs typeface="Times New Roman" panose="02020603050405020304" pitchFamily="18" charset="0"/>
+              </a:rPr>
+              <a:t>把公开接口抽象转换为 </a:t>
+            </a:r>
+            <a:r>
+              <a:rPr lang="en-US" altLang="zh-CN" sz="1600" b="0" dirty="0">
+                <a:solidFill>
+                  <a:schemeClr val="tx1"/>
+                </a:solidFill>
+                <a:effectLst/>
+                <a:latin typeface="Times New Roman" panose="02020603050405020304" pitchFamily="18" charset="0"/>
+                <a:ea typeface="宋体" panose="02010600030101010101" pitchFamily="2" charset="-122"/>
+                <a:cs typeface="Times New Roman" panose="02020603050405020304" pitchFamily="18" charset="0"/>
+              </a:rPr>
+              <a:t>VM </a:t>
+            </a:r>
+            <a:r>
+              <a:rPr lang="zh-CN" altLang="en-US" sz="1600" b="0" dirty="0">
+                <a:solidFill>
+                  <a:schemeClr val="tx1"/>
+                </a:solidFill>
+                <a:effectLst/>
+                <a:latin typeface="Times New Roman" panose="02020603050405020304" pitchFamily="18" charset="0"/>
+                <a:ea typeface="宋体" panose="02010600030101010101" pitchFamily="2" charset="-122"/>
+                <a:cs typeface="Times New Roman" panose="02020603050405020304" pitchFamily="18" charset="0"/>
+              </a:rPr>
+              <a:t>内部可理解的表示</a:t>
+            </a:r>
+          </a:p>
+        </p:txBody>
+      </p:sp>
+      <p:sp>
+        <p:nvSpPr>
+          <p:cNvPr id="6" name="矩形 5">
+            <a:extLst>
+              <a:ext uri="{FF2B5EF4-FFF2-40B4-BE49-F238E27FC236}">
+                <a16:creationId xmlns:a16="http://schemas.microsoft.com/office/drawing/2014/main" id="{6CB33866-C481-44AB-A97A-195F140303C1}"/>
+              </a:ext>
+            </a:extLst>
+          </p:cNvPr>
+          <p:cNvSpPr/>
+          <p:nvPr/>
+        </p:nvSpPr>
+        <p:spPr>
+          <a:xfrm>
+            <a:off x="3786249" y="3249881"/>
+            <a:ext cx="4619502" cy="783772"/>
+          </a:xfrm>
+          <a:prstGeom prst="rect">
+            <a:avLst/>
+          </a:prstGeom>
+          <a:noFill/>
+          <a:ln w="28575">
+            <a:solidFill>
+              <a:schemeClr val="tx1"/>
+            </a:solidFill>
+          </a:ln>
+        </p:spPr>
+        <p:style>
+          <a:lnRef idx="2">
+            <a:schemeClr val="accent1">
+              <a:shade val="50000"/>
+            </a:schemeClr>
+          </a:lnRef>
+          <a:fillRef idx="1">
+            <a:schemeClr val="accent1"/>
+          </a:fillRef>
+          <a:effectRef idx="0">
+            <a:schemeClr val="accent1"/>
+          </a:effectRef>
+          <a:fontRef idx="minor">
+            <a:schemeClr val="lt1"/>
+          </a:fontRef>
+        </p:style>
+        <p:txBody>
+          <a:bodyPr rtlCol="0" anchor="ctr"/>
+          <a:lstStyle/>
+          <a:p>
+            <a:pPr algn="ctr"/>
+            <a:r>
+              <a:rPr lang="en-US" altLang="zh-CN" b="1" dirty="0">
+                <a:solidFill>
+                  <a:schemeClr val="tx1"/>
+                </a:solidFill>
+                <a:latin typeface="Times New Roman" panose="02020603050405020304" pitchFamily="18" charset="0"/>
+                <a:ea typeface="宋体" panose="02010600030101010101" pitchFamily="2" charset="-122"/>
+                <a:cs typeface="Times New Roman" panose="02020603050405020304" pitchFamily="18" charset="0"/>
+              </a:rPr>
+              <a:t>VM</a:t>
+            </a:r>
+            <a:r>
+              <a:rPr lang="zh-CN" altLang="en-US" b="1" dirty="0">
+                <a:solidFill>
+                  <a:schemeClr val="tx1"/>
+                </a:solidFill>
+                <a:latin typeface="Times New Roman" panose="02020603050405020304" pitchFamily="18" charset="0"/>
+                <a:ea typeface="宋体" panose="02010600030101010101" pitchFamily="2" charset="-122"/>
+                <a:cs typeface="Times New Roman" panose="02020603050405020304" pitchFamily="18" charset="0"/>
+              </a:rPr>
+              <a:t> 内核</a:t>
+            </a:r>
+            <a:endParaRPr lang="en-US" altLang="zh-CN" b="1" dirty="0">
+              <a:solidFill>
+                <a:schemeClr val="tx1"/>
+              </a:solidFill>
+              <a:effectLst/>
+              <a:latin typeface="Times New Roman" panose="02020603050405020304" pitchFamily="18" charset="0"/>
+              <a:ea typeface="宋体" panose="02010600030101010101" pitchFamily="2" charset="-122"/>
+              <a:cs typeface="Times New Roman" panose="02020603050405020304" pitchFamily="18" charset="0"/>
+            </a:endParaRPr>
+          </a:p>
+        </p:txBody>
+      </p:sp>
+      <p:cxnSp>
+        <p:nvCxnSpPr>
+          <p:cNvPr id="8" name="直接箭头连接符 7">
+            <a:extLst>
+              <a:ext uri="{FF2B5EF4-FFF2-40B4-BE49-F238E27FC236}">
+                <a16:creationId xmlns:a16="http://schemas.microsoft.com/office/drawing/2014/main" id="{CD2F5DF1-AF45-4804-943D-0BFD2A0CBE3A}"/>
+              </a:ext>
+            </a:extLst>
+          </p:cNvPr>
+          <p:cNvCxnSpPr>
+            <a:stCxn id="4" idx="2"/>
+            <a:endCxn id="5" idx="0"/>
+          </p:cNvCxnSpPr>
+          <p:nvPr/>
+        </p:nvCxnSpPr>
+        <p:spPr>
+          <a:xfrm>
+            <a:off x="6096000" y="1816925"/>
+            <a:ext cx="0" cy="324592"/>
+          </a:xfrm>
+          <a:prstGeom prst="straightConnector1">
+            <a:avLst/>
+          </a:prstGeom>
+          <a:ln w="38100">
+            <a:solidFill>
+              <a:schemeClr val="tx1"/>
+            </a:solidFill>
+            <a:tailEnd type="triangle"/>
+          </a:ln>
+        </p:spPr>
+        <p:style>
+          <a:lnRef idx="1">
+            <a:schemeClr val="accent1"/>
+          </a:lnRef>
+          <a:fillRef idx="0">
+            <a:schemeClr val="accent1"/>
+          </a:fillRef>
+          <a:effectRef idx="0">
+            <a:schemeClr val="accent1"/>
+          </a:effectRef>
+          <a:fontRef idx="minor">
+            <a:schemeClr val="tx1"/>
+          </a:fontRef>
+        </p:style>
+      </p:cxnSp>
+      <p:cxnSp>
+        <p:nvCxnSpPr>
+          <p:cNvPr id="10" name="直接箭头连接符 9">
+            <a:extLst>
+              <a:ext uri="{FF2B5EF4-FFF2-40B4-BE49-F238E27FC236}">
+                <a16:creationId xmlns:a16="http://schemas.microsoft.com/office/drawing/2014/main" id="{B811CD8A-5028-46AA-B285-044862774606}"/>
+              </a:ext>
+            </a:extLst>
+          </p:cNvPr>
+          <p:cNvCxnSpPr>
+            <a:stCxn id="5" idx="2"/>
+            <a:endCxn id="6" idx="0"/>
+          </p:cNvCxnSpPr>
+          <p:nvPr/>
+        </p:nvCxnSpPr>
+        <p:spPr>
+          <a:xfrm>
+            <a:off x="6096000" y="2925289"/>
+            <a:ext cx="0" cy="324592"/>
+          </a:xfrm>
+          <a:prstGeom prst="straightConnector1">
+            <a:avLst/>
+          </a:prstGeom>
+          <a:ln w="38100">
+            <a:solidFill>
+              <a:schemeClr val="tx1"/>
+            </a:solidFill>
+            <a:tailEnd type="triangle"/>
+          </a:ln>
+        </p:spPr>
+        <p:style>
+          <a:lnRef idx="1">
+            <a:schemeClr val="accent1"/>
+          </a:lnRef>
+          <a:fillRef idx="0">
+            <a:schemeClr val="accent1"/>
+          </a:fillRef>
+          <a:effectRef idx="0">
+            <a:schemeClr val="accent1"/>
+          </a:effectRef>
+          <a:fontRef idx="minor">
+            <a:schemeClr val="tx1"/>
+          </a:fontRef>
+        </p:style>
+      </p:cxnSp>
+      <p:sp>
+        <p:nvSpPr>
+          <p:cNvPr id="11" name="右中括号 10">
+            <a:extLst>
+              <a:ext uri="{FF2B5EF4-FFF2-40B4-BE49-F238E27FC236}">
+                <a16:creationId xmlns:a16="http://schemas.microsoft.com/office/drawing/2014/main" id="{396EE085-64E5-45F4-9A09-B6025013ADF7}"/>
+              </a:ext>
+            </a:extLst>
+          </p:cNvPr>
+          <p:cNvSpPr/>
+          <p:nvPr/>
+        </p:nvSpPr>
+        <p:spPr>
+          <a:xfrm>
+            <a:off x="8651173" y="1246702"/>
+            <a:ext cx="79347" cy="1499467"/>
+          </a:xfrm>
+          <a:prstGeom prst="rightBracket">
+            <a:avLst/>
+          </a:prstGeom>
+          <a:noFill/>
+          <a:ln w="28575">
+            <a:solidFill>
+              <a:schemeClr val="tx1"/>
+            </a:solidFill>
+          </a:ln>
+        </p:spPr>
+        <p:style>
+          <a:lnRef idx="1">
+            <a:schemeClr val="accent1"/>
+          </a:lnRef>
+          <a:fillRef idx="0">
+            <a:schemeClr val="accent1"/>
+          </a:fillRef>
+          <a:effectRef idx="0">
+            <a:schemeClr val="accent1"/>
+          </a:effectRef>
+          <a:fontRef idx="minor">
+            <a:schemeClr val="tx1"/>
+          </a:fontRef>
+        </p:style>
+        <p:txBody>
+          <a:bodyPr rtlCol="0" anchor="ctr"/>
+          <a:lstStyle/>
+          <a:p>
+            <a:pPr algn="ctr"/>
+            <a:endParaRPr lang="zh-CN" altLang="en-US"/>
+          </a:p>
+        </p:txBody>
+      </p:sp>
+      <p:sp>
+        <p:nvSpPr>
+          <p:cNvPr id="12" name="文本框 11">
+            <a:extLst>
+              <a:ext uri="{FF2B5EF4-FFF2-40B4-BE49-F238E27FC236}">
+                <a16:creationId xmlns:a16="http://schemas.microsoft.com/office/drawing/2014/main" id="{09A7B51C-3199-403C-AF6F-93961974B7E9}"/>
+              </a:ext>
+            </a:extLst>
+          </p:cNvPr>
+          <p:cNvSpPr txBox="1"/>
+          <p:nvPr/>
+        </p:nvSpPr>
+        <p:spPr>
+          <a:xfrm>
+            <a:off x="8730520" y="1816925"/>
+            <a:ext cx="1346843" cy="369332"/>
+          </a:xfrm>
+          <a:prstGeom prst="rect">
+            <a:avLst/>
+          </a:prstGeom>
+          <a:noFill/>
+        </p:spPr>
+        <p:txBody>
+          <a:bodyPr wrap="none" rtlCol="0">
+            <a:spAutoFit/>
+          </a:bodyPr>
+          <a:lstStyle/>
+          <a:p>
+            <a:pPr algn="ctr"/>
+            <a:r>
+              <a:rPr lang="zh-CN" altLang="en-US" b="1" dirty="0">
+                <a:latin typeface="Times New Roman" panose="02020603050405020304" pitchFamily="18" charset="0"/>
+                <a:ea typeface="宋体" panose="02010600030101010101" pitchFamily="2" charset="-122"/>
+                <a:cs typeface="Times New Roman" panose="02020603050405020304" pitchFamily="18" charset="0"/>
+              </a:rPr>
+              <a:t>嵌入接口层</a:t>
+            </a:r>
+          </a:p>
+        </p:txBody>
+      </p:sp>
+    </p:spTree>
+    <p:extLst>
+      <p:ext uri="{BB962C8B-B14F-4D97-AF65-F5344CB8AC3E}">
+        <p14:creationId xmlns:p14="http://schemas.microsoft.com/office/powerpoint/2010/main" val="3294987052"/>
       </p:ext>
     </p:extLst>
   </p:cSld>

--- a/docs/thesis/pictures.pptx
+++ b/docs/thesis/pictures.pptx
@@ -5,7 +5,7 @@
     <p:sldMasterId id="2147483648" r:id="rId1"/>
   </p:sldMasterIdLst>
   <p:notesMasterIdLst>
-    <p:notesMasterId r:id="rId18"/>
+    <p:notesMasterId r:id="rId19"/>
   </p:notesMasterIdLst>
   <p:sldIdLst>
     <p:sldId id="259" r:id="rId2"/>
@@ -24,6 +24,7 @@
     <p:sldId id="273" r:id="rId15"/>
     <p:sldId id="266" r:id="rId16"/>
     <p:sldId id="275" r:id="rId17"/>
+    <p:sldId id="276" r:id="rId18"/>
   </p:sldIdLst>
   <p:sldSz cx="12192000" cy="6858000"/>
   <p:notesSz cx="6858000" cy="9144000"/>
@@ -18992,6 +18993,2217 @@
 </p:sld>
 </file>
 
+<file path=ppt/slides/slide17.xml><?xml version="1.0" encoding="utf-8"?>
+<p:sld xmlns:a="http://schemas.openxmlformats.org/drawingml/2006/main" xmlns:r="http://schemas.openxmlformats.org/officeDocument/2006/relationships" xmlns:p="http://schemas.openxmlformats.org/presentationml/2006/main">
+  <p:cSld>
+    <p:spTree>
+      <p:nvGrpSpPr>
+        <p:cNvPr id="1" name=""/>
+        <p:cNvGrpSpPr/>
+        <p:nvPr/>
+      </p:nvGrpSpPr>
+      <p:grpSpPr>
+        <a:xfrm>
+          <a:off x="0" y="0"/>
+          <a:ext cx="0" cy="0"/>
+          <a:chOff x="0" y="0"/>
+          <a:chExt cx="0" cy="0"/>
+        </a:xfrm>
+      </p:grpSpPr>
+      <p:sp>
+        <p:nvSpPr>
+          <p:cNvPr id="4" name="矩形: 圆角 3">
+            <a:extLst>
+              <a:ext uri="{FF2B5EF4-FFF2-40B4-BE49-F238E27FC236}">
+                <a16:creationId xmlns:a16="http://schemas.microsoft.com/office/drawing/2014/main" id="{44CF39BA-C2B0-4FEA-85BD-E2473E1932FA}"/>
+              </a:ext>
+            </a:extLst>
+          </p:cNvPr>
+          <p:cNvSpPr/>
+          <p:nvPr/>
+        </p:nvSpPr>
+        <p:spPr>
+          <a:xfrm>
+            <a:off x="3298370" y="4239487"/>
+            <a:ext cx="2559134" cy="886995"/>
+          </a:xfrm>
+          <a:prstGeom prst="roundRect">
+            <a:avLst/>
+          </a:prstGeom>
+          <a:noFill/>
+          <a:ln w="28575">
+            <a:solidFill>
+              <a:schemeClr val="tx1"/>
+            </a:solidFill>
+          </a:ln>
+        </p:spPr>
+        <p:style>
+          <a:lnRef idx="2">
+            <a:schemeClr val="accent1">
+              <a:shade val="50000"/>
+            </a:schemeClr>
+          </a:lnRef>
+          <a:fillRef idx="1">
+            <a:schemeClr val="accent1"/>
+          </a:fillRef>
+          <a:effectRef idx="0">
+            <a:schemeClr val="accent1"/>
+          </a:effectRef>
+          <a:fontRef idx="minor">
+            <a:schemeClr val="lt1"/>
+          </a:fontRef>
+        </p:style>
+        <p:txBody>
+          <a:bodyPr rtlCol="0" anchor="ctr"/>
+          <a:lstStyle/>
+          <a:p>
+            <a:pPr algn="ctr"/>
+            <a:r>
+              <a:rPr lang="zh-CN" altLang="en-US" sz="1600" dirty="0">
+                <a:solidFill>
+                  <a:schemeClr val="tx1"/>
+                </a:solidFill>
+                <a:latin typeface="Times New Roman" panose="02020603050405020304" pitchFamily="18" charset="0"/>
+                <a:ea typeface="宋体" panose="02010600030101010101" pitchFamily="2" charset="-122"/>
+                <a:cs typeface="Times New Roman" panose="02020603050405020304" pitchFamily="18" charset="0"/>
+              </a:rPr>
+              <a:t>解释器执行模块导入指令</a:t>
+            </a:r>
+            <a:endParaRPr lang="en-US" altLang="zh-CN" sz="1600" dirty="0">
+              <a:solidFill>
+                <a:schemeClr val="tx1"/>
+              </a:solidFill>
+              <a:latin typeface="Times New Roman" panose="02020603050405020304" pitchFamily="18" charset="0"/>
+              <a:ea typeface="宋体" panose="02010600030101010101" pitchFamily="2" charset="-122"/>
+              <a:cs typeface="Times New Roman" panose="02020603050405020304" pitchFamily="18" charset="0"/>
+            </a:endParaRPr>
+          </a:p>
+          <a:p>
+            <a:pPr algn="ctr"/>
+            <a:r>
+              <a:rPr lang="en-US" altLang="zh-CN" sz="1600" dirty="0">
+                <a:solidFill>
+                  <a:schemeClr val="tx1"/>
+                </a:solidFill>
+                <a:latin typeface="Times New Roman" panose="02020603050405020304" pitchFamily="18" charset="0"/>
+                <a:ea typeface="宋体" panose="02010600030101010101" pitchFamily="2" charset="-122"/>
+                <a:cs typeface="Times New Roman" panose="02020603050405020304" pitchFamily="18" charset="0"/>
+              </a:rPr>
+              <a:t>IMPORT_NAME</a:t>
+            </a:r>
+          </a:p>
+          <a:p>
+            <a:pPr algn="ctr"/>
+            <a:r>
+              <a:rPr lang="en-US" altLang="zh-CN" sz="1600" dirty="0">
+                <a:solidFill>
+                  <a:schemeClr val="tx1"/>
+                </a:solidFill>
+                <a:latin typeface="Times New Roman" panose="02020603050405020304" pitchFamily="18" charset="0"/>
+                <a:ea typeface="宋体" panose="02010600030101010101" pitchFamily="2" charset="-122"/>
+                <a:cs typeface="Times New Roman" panose="02020603050405020304" pitchFamily="18" charset="0"/>
+              </a:rPr>
+              <a:t>IMPORT_FROM</a:t>
+            </a:r>
+          </a:p>
+        </p:txBody>
+      </p:sp>
+      <p:sp>
+        <p:nvSpPr>
+          <p:cNvPr id="5" name="矩形 4">
+            <a:extLst>
+              <a:ext uri="{FF2B5EF4-FFF2-40B4-BE49-F238E27FC236}">
+                <a16:creationId xmlns:a16="http://schemas.microsoft.com/office/drawing/2014/main" id="{56FA3249-E442-4064-A494-0688B465B2ED}"/>
+              </a:ext>
+            </a:extLst>
+          </p:cNvPr>
+          <p:cNvSpPr/>
+          <p:nvPr/>
+        </p:nvSpPr>
+        <p:spPr>
+          <a:xfrm>
+            <a:off x="3610098" y="3057892"/>
+            <a:ext cx="1935678" cy="789713"/>
+          </a:xfrm>
+          <a:prstGeom prst="rect">
+            <a:avLst/>
+          </a:prstGeom>
+          <a:noFill/>
+          <a:ln w="28575">
+            <a:solidFill>
+              <a:schemeClr val="tx1"/>
+            </a:solidFill>
+          </a:ln>
+        </p:spPr>
+        <p:style>
+          <a:lnRef idx="2">
+            <a:schemeClr val="accent1">
+              <a:shade val="50000"/>
+            </a:schemeClr>
+          </a:lnRef>
+          <a:fillRef idx="1">
+            <a:schemeClr val="accent1"/>
+          </a:fillRef>
+          <a:effectRef idx="0">
+            <a:schemeClr val="accent1"/>
+          </a:effectRef>
+          <a:fontRef idx="minor">
+            <a:schemeClr val="lt1"/>
+          </a:fontRef>
+        </p:style>
+        <p:txBody>
+          <a:bodyPr rtlCol="0" anchor="ctr"/>
+          <a:lstStyle/>
+          <a:p>
+            <a:pPr algn="ctr"/>
+            <a:r>
+              <a:rPr lang="en-US" altLang="zh-CN" sz="1600" b="1" dirty="0">
+                <a:solidFill>
+                  <a:schemeClr val="tx1"/>
+                </a:solidFill>
+                <a:latin typeface="Times New Roman" panose="02020603050405020304" pitchFamily="18" charset="0"/>
+                <a:cs typeface="Times New Roman" panose="02020603050405020304" pitchFamily="18" charset="0"/>
+              </a:rPr>
+              <a:t>ModuleImporter</a:t>
+            </a:r>
+          </a:p>
+          <a:p>
+            <a:pPr algn="ctr"/>
+            <a:r>
+              <a:rPr lang="zh-CN" altLang="en-US" sz="1600" dirty="0">
+                <a:solidFill>
+                  <a:schemeClr val="tx1"/>
+                </a:solidFill>
+                <a:latin typeface="宋体" panose="02010600030101010101" pitchFamily="2" charset="-122"/>
+                <a:ea typeface="宋体" panose="02010600030101010101" pitchFamily="2" charset="-122"/>
+                <a:cs typeface="Times New Roman" panose="02020603050405020304" pitchFamily="18" charset="0"/>
+              </a:rPr>
+              <a:t>统一调度各个组件完成导入操作</a:t>
+            </a:r>
+          </a:p>
+        </p:txBody>
+      </p:sp>
+      <p:sp>
+        <p:nvSpPr>
+          <p:cNvPr id="6" name="矩形 5">
+            <a:extLst>
+              <a:ext uri="{FF2B5EF4-FFF2-40B4-BE49-F238E27FC236}">
+                <a16:creationId xmlns:a16="http://schemas.microsoft.com/office/drawing/2014/main" id="{121D104B-81E1-42B1-870D-ED99E5E4E491}"/>
+              </a:ext>
+            </a:extLst>
+          </p:cNvPr>
+          <p:cNvSpPr/>
+          <p:nvPr/>
+        </p:nvSpPr>
+        <p:spPr>
+          <a:xfrm>
+            <a:off x="3516645" y="1678378"/>
+            <a:ext cx="2115783" cy="940132"/>
+          </a:xfrm>
+          <a:prstGeom prst="rect">
+            <a:avLst/>
+          </a:prstGeom>
+          <a:noFill/>
+          <a:ln w="28575">
+            <a:solidFill>
+              <a:schemeClr val="tx1"/>
+            </a:solidFill>
+          </a:ln>
+        </p:spPr>
+        <p:style>
+          <a:lnRef idx="2">
+            <a:schemeClr val="accent1">
+              <a:shade val="50000"/>
+            </a:schemeClr>
+          </a:lnRef>
+          <a:fillRef idx="1">
+            <a:schemeClr val="accent1"/>
+          </a:fillRef>
+          <a:effectRef idx="0">
+            <a:schemeClr val="accent1"/>
+          </a:effectRef>
+          <a:fontRef idx="minor">
+            <a:schemeClr val="lt1"/>
+          </a:fontRef>
+        </p:style>
+        <p:txBody>
+          <a:bodyPr rtlCol="0" anchor="ctr"/>
+          <a:lstStyle/>
+          <a:p>
+            <a:pPr algn="ctr"/>
+            <a:r>
+              <a:rPr lang="en-US" altLang="zh-CN" sz="1600" b="1" dirty="0">
+                <a:solidFill>
+                  <a:schemeClr val="tx1"/>
+                </a:solidFill>
+                <a:latin typeface="Times New Roman" panose="02020603050405020304" pitchFamily="18" charset="0"/>
+                <a:cs typeface="Times New Roman" panose="02020603050405020304" pitchFamily="18" charset="0"/>
+              </a:rPr>
+              <a:t>ModuleNameResolver</a:t>
+            </a:r>
+          </a:p>
+          <a:p>
+            <a:pPr algn="ctr"/>
+            <a:r>
+              <a:rPr lang="zh-CN" altLang="en-US" sz="1600" dirty="0">
+                <a:solidFill>
+                  <a:schemeClr val="tx1"/>
+                </a:solidFill>
+                <a:latin typeface="宋体" panose="02010600030101010101" pitchFamily="2" charset="-122"/>
+                <a:ea typeface="宋体" panose="02010600030101010101" pitchFamily="2" charset="-122"/>
+                <a:cs typeface="Times New Roman" panose="02020603050405020304" pitchFamily="18" charset="0"/>
+              </a:rPr>
+              <a:t>解析相对导入，得到完整目标模块名</a:t>
+            </a:r>
+          </a:p>
+        </p:txBody>
+      </p:sp>
+      <p:sp>
+        <p:nvSpPr>
+          <p:cNvPr id="7" name="矩形 6">
+            <a:extLst>
+              <a:ext uri="{FF2B5EF4-FFF2-40B4-BE49-F238E27FC236}">
+                <a16:creationId xmlns:a16="http://schemas.microsoft.com/office/drawing/2014/main" id="{276BC786-FCED-40D3-889A-1947DE2E750D}"/>
+              </a:ext>
+            </a:extLst>
+          </p:cNvPr>
+          <p:cNvSpPr/>
+          <p:nvPr/>
+        </p:nvSpPr>
+        <p:spPr>
+          <a:xfrm>
+            <a:off x="6199067" y="3581087"/>
+            <a:ext cx="2529210" cy="886995"/>
+          </a:xfrm>
+          <a:prstGeom prst="rect">
+            <a:avLst/>
+          </a:prstGeom>
+          <a:noFill/>
+          <a:ln w="28575">
+            <a:solidFill>
+              <a:schemeClr val="tx1"/>
+            </a:solidFill>
+          </a:ln>
+        </p:spPr>
+        <p:style>
+          <a:lnRef idx="2">
+            <a:schemeClr val="accent1">
+              <a:shade val="50000"/>
+            </a:schemeClr>
+          </a:lnRef>
+          <a:fillRef idx="1">
+            <a:schemeClr val="accent1"/>
+          </a:fillRef>
+          <a:effectRef idx="0">
+            <a:schemeClr val="accent1"/>
+          </a:effectRef>
+          <a:fontRef idx="minor">
+            <a:schemeClr val="lt1"/>
+          </a:fontRef>
+        </p:style>
+        <p:txBody>
+          <a:bodyPr rtlCol="0" anchor="ctr"/>
+          <a:lstStyle/>
+          <a:p>
+            <a:pPr algn="ctr"/>
+            <a:r>
+              <a:rPr lang="en-US" altLang="zh-CN" sz="1600" b="1" dirty="0">
+                <a:solidFill>
+                  <a:schemeClr val="tx1"/>
+                </a:solidFill>
+                <a:latin typeface="Times New Roman" panose="02020603050405020304" pitchFamily="18" charset="0"/>
+                <a:cs typeface="Times New Roman" panose="02020603050405020304" pitchFamily="18" charset="0"/>
+              </a:rPr>
+              <a:t>ModuleFinder</a:t>
+            </a:r>
+          </a:p>
+          <a:p>
+            <a:pPr algn="ctr"/>
+            <a:r>
+              <a:rPr lang="zh-CN" altLang="en-US" sz="1600" dirty="0">
+                <a:solidFill>
+                  <a:schemeClr val="tx1"/>
+                </a:solidFill>
+                <a:latin typeface="Times New Roman" panose="02020603050405020304" pitchFamily="18" charset="0"/>
+                <a:ea typeface="宋体" panose="02010600030101010101" pitchFamily="2" charset="-122"/>
+                <a:cs typeface="Times New Roman" panose="02020603050405020304" pitchFamily="18" charset="0"/>
+              </a:rPr>
+              <a:t>结合</a:t>
+            </a:r>
+            <a:r>
+              <a:rPr lang="en-US" altLang="zh-CN" sz="1600" dirty="0">
+                <a:solidFill>
+                  <a:schemeClr val="tx1"/>
+                </a:solidFill>
+                <a:latin typeface="Times New Roman" panose="02020603050405020304" pitchFamily="18" charset="0"/>
+                <a:ea typeface="宋体" panose="02010600030101010101" pitchFamily="2" charset="-122"/>
+                <a:cs typeface="Times New Roman" panose="02020603050405020304" pitchFamily="18" charset="0"/>
+              </a:rPr>
+              <a:t>sys.path / package.path</a:t>
+            </a:r>
+            <a:r>
+              <a:rPr lang="zh-CN" altLang="en-US" sz="1600" dirty="0">
+                <a:solidFill>
+                  <a:schemeClr val="tx1"/>
+                </a:solidFill>
+                <a:latin typeface="Times New Roman" panose="02020603050405020304" pitchFamily="18" charset="0"/>
+                <a:ea typeface="宋体" panose="02010600030101010101" pitchFamily="2" charset="-122"/>
+                <a:cs typeface="Times New Roman" panose="02020603050405020304" pitchFamily="18" charset="0"/>
+              </a:rPr>
+              <a:t>在磁盘查找模块文件</a:t>
+            </a:r>
+          </a:p>
+        </p:txBody>
+      </p:sp>
+      <p:sp>
+        <p:nvSpPr>
+          <p:cNvPr id="8" name="矩形 7">
+            <a:extLst>
+              <a:ext uri="{FF2B5EF4-FFF2-40B4-BE49-F238E27FC236}">
+                <a16:creationId xmlns:a16="http://schemas.microsoft.com/office/drawing/2014/main" id="{FD4804A8-1288-4C9B-8900-C61CFDD21CE1}"/>
+              </a:ext>
+            </a:extLst>
+          </p:cNvPr>
+          <p:cNvSpPr/>
+          <p:nvPr/>
+        </p:nvSpPr>
+        <p:spPr>
+          <a:xfrm>
+            <a:off x="7761589" y="5009158"/>
+            <a:ext cx="2662051" cy="1024256"/>
+          </a:xfrm>
+          <a:prstGeom prst="rect">
+            <a:avLst/>
+          </a:prstGeom>
+          <a:noFill/>
+          <a:ln w="28575">
+            <a:solidFill>
+              <a:schemeClr val="tx1"/>
+            </a:solidFill>
+          </a:ln>
+        </p:spPr>
+        <p:style>
+          <a:lnRef idx="2">
+            <a:schemeClr val="accent1">
+              <a:shade val="50000"/>
+            </a:schemeClr>
+          </a:lnRef>
+          <a:fillRef idx="1">
+            <a:schemeClr val="accent1"/>
+          </a:fillRef>
+          <a:effectRef idx="0">
+            <a:schemeClr val="accent1"/>
+          </a:effectRef>
+          <a:fontRef idx="minor">
+            <a:schemeClr val="lt1"/>
+          </a:fontRef>
+        </p:style>
+        <p:txBody>
+          <a:bodyPr rtlCol="0" anchor="ctr"/>
+          <a:lstStyle/>
+          <a:p>
+            <a:pPr algn="ctr"/>
+            <a:r>
+              <a:rPr lang="en-US" altLang="zh-CN" sz="1600" b="1" dirty="0">
+                <a:solidFill>
+                  <a:schemeClr val="tx1"/>
+                </a:solidFill>
+                <a:latin typeface="Times New Roman" panose="02020603050405020304" pitchFamily="18" charset="0"/>
+                <a:cs typeface="Times New Roman" panose="02020603050405020304" pitchFamily="18" charset="0"/>
+              </a:rPr>
+              <a:t>ModuleLoader</a:t>
+            </a:r>
+          </a:p>
+          <a:p>
+            <a:pPr algn="ctr"/>
+            <a:r>
+              <a:rPr lang="zh-CN" altLang="en-US" sz="1600" dirty="0">
+                <a:solidFill>
+                  <a:schemeClr val="tx1"/>
+                </a:solidFill>
+                <a:latin typeface="宋体" panose="02010600030101010101" pitchFamily="2" charset="-122"/>
+                <a:ea typeface="宋体" panose="02010600030101010101" pitchFamily="2" charset="-122"/>
+                <a:cs typeface="Times New Roman" panose="02020603050405020304" pitchFamily="18" charset="0"/>
+              </a:rPr>
+              <a:t>创建模块对象、读取并执行模块代码，得到模块内容</a:t>
+            </a:r>
+            <a:endParaRPr lang="en-US" altLang="zh-CN" sz="1600" dirty="0">
+              <a:solidFill>
+                <a:schemeClr val="tx1"/>
+              </a:solidFill>
+              <a:latin typeface="宋体" panose="02010600030101010101" pitchFamily="2" charset="-122"/>
+              <a:ea typeface="宋体" panose="02010600030101010101" pitchFamily="2" charset="-122"/>
+              <a:cs typeface="Times New Roman" panose="02020603050405020304" pitchFamily="18" charset="0"/>
+            </a:endParaRPr>
+          </a:p>
+        </p:txBody>
+      </p:sp>
+      <p:sp>
+        <p:nvSpPr>
+          <p:cNvPr id="9" name="矩形 8">
+            <a:extLst>
+              <a:ext uri="{FF2B5EF4-FFF2-40B4-BE49-F238E27FC236}">
+                <a16:creationId xmlns:a16="http://schemas.microsoft.com/office/drawing/2014/main" id="{3C9C2599-1E2E-45DF-B1FE-7AB7410C8D54}"/>
+              </a:ext>
+            </a:extLst>
+          </p:cNvPr>
+          <p:cNvSpPr/>
+          <p:nvPr/>
+        </p:nvSpPr>
+        <p:spPr>
+          <a:xfrm>
+            <a:off x="3489367" y="619992"/>
+            <a:ext cx="2177141" cy="696190"/>
+          </a:xfrm>
+          <a:prstGeom prst="rect">
+            <a:avLst/>
+          </a:prstGeom>
+          <a:noFill/>
+          <a:ln w="28575">
+            <a:solidFill>
+              <a:schemeClr val="tx1"/>
+            </a:solidFill>
+          </a:ln>
+        </p:spPr>
+        <p:style>
+          <a:lnRef idx="2">
+            <a:schemeClr val="accent1">
+              <a:shade val="50000"/>
+            </a:schemeClr>
+          </a:lnRef>
+          <a:fillRef idx="1">
+            <a:schemeClr val="accent1"/>
+          </a:fillRef>
+          <a:effectRef idx="0">
+            <a:schemeClr val="accent1"/>
+          </a:effectRef>
+          <a:fontRef idx="minor">
+            <a:schemeClr val="lt1"/>
+          </a:fontRef>
+        </p:style>
+        <p:txBody>
+          <a:bodyPr rtlCol="0" anchor="ctr"/>
+          <a:lstStyle/>
+          <a:p>
+            <a:pPr algn="ctr"/>
+            <a:r>
+              <a:rPr lang="en-US" altLang="zh-CN" sz="1600" b="1" dirty="0">
+                <a:solidFill>
+                  <a:schemeClr val="tx1"/>
+                </a:solidFill>
+                <a:latin typeface="Times New Roman" panose="02020603050405020304" pitchFamily="18" charset="0"/>
+                <a:cs typeface="Times New Roman" panose="02020603050405020304" pitchFamily="18" charset="0"/>
+              </a:rPr>
+              <a:t>ModuleManager</a:t>
+            </a:r>
+          </a:p>
+          <a:p>
+            <a:pPr algn="ctr"/>
+            <a:r>
+              <a:rPr lang="zh-CN" altLang="en-US" sz="1600" dirty="0">
+                <a:solidFill>
+                  <a:schemeClr val="tx1"/>
+                </a:solidFill>
+                <a:latin typeface="Times New Roman" panose="02020603050405020304" pitchFamily="18" charset="0"/>
+                <a:ea typeface="宋体" panose="02010600030101010101" pitchFamily="2" charset="-122"/>
+                <a:cs typeface="Times New Roman" panose="02020603050405020304" pitchFamily="18" charset="0"/>
+              </a:rPr>
+              <a:t>检查缓存</a:t>
+            </a:r>
+            <a:r>
+              <a:rPr lang="en-US" altLang="zh-CN" sz="1600" dirty="0">
+                <a:solidFill>
+                  <a:schemeClr val="tx1"/>
+                </a:solidFill>
+                <a:latin typeface="Times New Roman" panose="02020603050405020304" pitchFamily="18" charset="0"/>
+                <a:ea typeface="宋体" panose="02010600030101010101" pitchFamily="2" charset="-122"/>
+                <a:cs typeface="Times New Roman" panose="02020603050405020304" pitchFamily="18" charset="0"/>
+              </a:rPr>
+              <a:t>sys.modules</a:t>
+            </a:r>
+            <a:endParaRPr lang="zh-CN" altLang="en-US" sz="1600" dirty="0">
+              <a:solidFill>
+                <a:schemeClr val="tx1"/>
+              </a:solidFill>
+              <a:latin typeface="Times New Roman" panose="02020603050405020304" pitchFamily="18" charset="0"/>
+              <a:ea typeface="宋体" panose="02010600030101010101" pitchFamily="2" charset="-122"/>
+              <a:cs typeface="Times New Roman" panose="02020603050405020304" pitchFamily="18" charset="0"/>
+            </a:endParaRPr>
+          </a:p>
+        </p:txBody>
+      </p:sp>
+      <p:sp>
+        <p:nvSpPr>
+          <p:cNvPr id="10" name="流程图: 决策 9">
+            <a:extLst>
+              <a:ext uri="{FF2B5EF4-FFF2-40B4-BE49-F238E27FC236}">
+                <a16:creationId xmlns:a16="http://schemas.microsoft.com/office/drawing/2014/main" id="{2007B123-C9EE-4231-AFCD-F2A762D1EF2E}"/>
+              </a:ext>
+            </a:extLst>
+          </p:cNvPr>
+          <p:cNvSpPr/>
+          <p:nvPr/>
+        </p:nvSpPr>
+        <p:spPr>
+          <a:xfrm>
+            <a:off x="6240483" y="417772"/>
+            <a:ext cx="2432219" cy="1100630"/>
+          </a:xfrm>
+          <a:prstGeom prst="flowChartDecision">
+            <a:avLst/>
+          </a:prstGeom>
+          <a:noFill/>
+          <a:ln w="28575">
+            <a:solidFill>
+              <a:schemeClr val="tx1"/>
+            </a:solidFill>
+          </a:ln>
+        </p:spPr>
+        <p:style>
+          <a:lnRef idx="2">
+            <a:schemeClr val="accent1">
+              <a:shade val="50000"/>
+            </a:schemeClr>
+          </a:lnRef>
+          <a:fillRef idx="1">
+            <a:schemeClr val="accent1"/>
+          </a:fillRef>
+          <a:effectRef idx="0">
+            <a:schemeClr val="accent1"/>
+          </a:effectRef>
+          <a:fontRef idx="minor">
+            <a:schemeClr val="lt1"/>
+          </a:fontRef>
+        </p:style>
+        <p:txBody>
+          <a:bodyPr rtlCol="0" anchor="ctr"/>
+          <a:lstStyle/>
+          <a:p>
+            <a:pPr algn="ctr"/>
+            <a:r>
+              <a:rPr lang="zh-CN" altLang="en-US" sz="1600" dirty="0">
+                <a:solidFill>
+                  <a:schemeClr val="tx1"/>
+                </a:solidFill>
+                <a:latin typeface="宋体" panose="02010600030101010101" pitchFamily="2" charset="-122"/>
+                <a:ea typeface="宋体" panose="02010600030101010101" pitchFamily="2" charset="-122"/>
+                <a:cs typeface="Times New Roman" panose="02020603050405020304" pitchFamily="18" charset="0"/>
+              </a:rPr>
+              <a:t>缓存中已存在目标模块</a:t>
+            </a:r>
+          </a:p>
+        </p:txBody>
+      </p:sp>
+      <p:cxnSp>
+        <p:nvCxnSpPr>
+          <p:cNvPr id="14" name="直接箭头连接符 13">
+            <a:extLst>
+              <a:ext uri="{FF2B5EF4-FFF2-40B4-BE49-F238E27FC236}">
+                <a16:creationId xmlns:a16="http://schemas.microsoft.com/office/drawing/2014/main" id="{5542B9F0-8B81-4195-9A90-7AD42C6CA550}"/>
+              </a:ext>
+            </a:extLst>
+          </p:cNvPr>
+          <p:cNvCxnSpPr>
+            <a:cxnSpLocks/>
+            <a:stCxn id="5" idx="0"/>
+            <a:endCxn id="6" idx="2"/>
+          </p:cNvCxnSpPr>
+          <p:nvPr/>
+        </p:nvCxnSpPr>
+        <p:spPr>
+          <a:xfrm flipH="1" flipV="1">
+            <a:off x="4574537" y="2618510"/>
+            <a:ext cx="3400" cy="439382"/>
+          </a:xfrm>
+          <a:prstGeom prst="straightConnector1">
+            <a:avLst/>
+          </a:prstGeom>
+          <a:ln w="28575">
+            <a:solidFill>
+              <a:schemeClr val="tx1"/>
+            </a:solidFill>
+            <a:tailEnd type="triangle"/>
+          </a:ln>
+        </p:spPr>
+        <p:style>
+          <a:lnRef idx="1">
+            <a:schemeClr val="accent1"/>
+          </a:lnRef>
+          <a:fillRef idx="0">
+            <a:schemeClr val="accent1"/>
+          </a:fillRef>
+          <a:effectRef idx="0">
+            <a:schemeClr val="accent1"/>
+          </a:effectRef>
+          <a:fontRef idx="minor">
+            <a:schemeClr val="tx1"/>
+          </a:fontRef>
+        </p:style>
+      </p:cxnSp>
+      <p:cxnSp>
+        <p:nvCxnSpPr>
+          <p:cNvPr id="16" name="直接箭头连接符 15">
+            <a:extLst>
+              <a:ext uri="{FF2B5EF4-FFF2-40B4-BE49-F238E27FC236}">
+                <a16:creationId xmlns:a16="http://schemas.microsoft.com/office/drawing/2014/main" id="{2B371BFC-351C-456E-8D95-FB1121F2FD3F}"/>
+              </a:ext>
+            </a:extLst>
+          </p:cNvPr>
+          <p:cNvCxnSpPr>
+            <a:cxnSpLocks/>
+            <a:stCxn id="6" idx="0"/>
+            <a:endCxn id="9" idx="2"/>
+          </p:cNvCxnSpPr>
+          <p:nvPr/>
+        </p:nvCxnSpPr>
+        <p:spPr>
+          <a:xfrm flipV="1">
+            <a:off x="4574537" y="1316182"/>
+            <a:ext cx="3401" cy="362196"/>
+          </a:xfrm>
+          <a:prstGeom prst="straightConnector1">
+            <a:avLst/>
+          </a:prstGeom>
+          <a:ln w="28575">
+            <a:solidFill>
+              <a:schemeClr val="tx1"/>
+            </a:solidFill>
+            <a:tailEnd type="triangle"/>
+          </a:ln>
+        </p:spPr>
+        <p:style>
+          <a:lnRef idx="1">
+            <a:schemeClr val="accent1"/>
+          </a:lnRef>
+          <a:fillRef idx="0">
+            <a:schemeClr val="accent1"/>
+          </a:fillRef>
+          <a:effectRef idx="0">
+            <a:schemeClr val="accent1"/>
+          </a:effectRef>
+          <a:fontRef idx="minor">
+            <a:schemeClr val="tx1"/>
+          </a:fontRef>
+        </p:style>
+      </p:cxnSp>
+      <p:cxnSp>
+        <p:nvCxnSpPr>
+          <p:cNvPr id="18" name="直接箭头连接符 17">
+            <a:extLst>
+              <a:ext uri="{FF2B5EF4-FFF2-40B4-BE49-F238E27FC236}">
+                <a16:creationId xmlns:a16="http://schemas.microsoft.com/office/drawing/2014/main" id="{52262966-F2C5-47D5-A17B-0746D005F227}"/>
+              </a:ext>
+            </a:extLst>
+          </p:cNvPr>
+          <p:cNvCxnSpPr>
+            <a:cxnSpLocks/>
+            <a:stCxn id="9" idx="3"/>
+            <a:endCxn id="10" idx="1"/>
+          </p:cNvCxnSpPr>
+          <p:nvPr/>
+        </p:nvCxnSpPr>
+        <p:spPr>
+          <a:xfrm>
+            <a:off x="5666508" y="968087"/>
+            <a:ext cx="573975" cy="0"/>
+          </a:xfrm>
+          <a:prstGeom prst="straightConnector1">
+            <a:avLst/>
+          </a:prstGeom>
+          <a:ln w="28575">
+            <a:solidFill>
+              <a:schemeClr val="tx1"/>
+            </a:solidFill>
+            <a:tailEnd type="triangle"/>
+          </a:ln>
+        </p:spPr>
+        <p:style>
+          <a:lnRef idx="1">
+            <a:schemeClr val="accent1"/>
+          </a:lnRef>
+          <a:fillRef idx="0">
+            <a:schemeClr val="accent1"/>
+          </a:fillRef>
+          <a:effectRef idx="0">
+            <a:schemeClr val="accent1"/>
+          </a:effectRef>
+          <a:fontRef idx="minor">
+            <a:schemeClr val="tx1"/>
+          </a:fontRef>
+        </p:style>
+      </p:cxnSp>
+      <p:sp>
+        <p:nvSpPr>
+          <p:cNvPr id="19" name="矩形: 圆角 18">
+            <a:extLst>
+              <a:ext uri="{FF2B5EF4-FFF2-40B4-BE49-F238E27FC236}">
+                <a16:creationId xmlns:a16="http://schemas.microsoft.com/office/drawing/2014/main" id="{89E48BD2-82FB-44C0-B225-1639767FE087}"/>
+              </a:ext>
+            </a:extLst>
+          </p:cNvPr>
+          <p:cNvSpPr/>
+          <p:nvPr/>
+        </p:nvSpPr>
+        <p:spPr>
+          <a:xfrm>
+            <a:off x="9373592" y="696630"/>
+            <a:ext cx="2559134" cy="546265"/>
+          </a:xfrm>
+          <a:prstGeom prst="roundRect">
+            <a:avLst/>
+          </a:prstGeom>
+          <a:noFill/>
+          <a:ln w="28575">
+            <a:solidFill>
+              <a:schemeClr val="tx1"/>
+            </a:solidFill>
+          </a:ln>
+        </p:spPr>
+        <p:style>
+          <a:lnRef idx="2">
+            <a:schemeClr val="accent1">
+              <a:shade val="50000"/>
+            </a:schemeClr>
+          </a:lnRef>
+          <a:fillRef idx="1">
+            <a:schemeClr val="accent1"/>
+          </a:fillRef>
+          <a:effectRef idx="0">
+            <a:schemeClr val="accent1"/>
+          </a:effectRef>
+          <a:fontRef idx="minor">
+            <a:schemeClr val="lt1"/>
+          </a:fontRef>
+        </p:style>
+        <p:txBody>
+          <a:bodyPr rtlCol="0" anchor="ctr"/>
+          <a:lstStyle/>
+          <a:p>
+            <a:pPr algn="ctr"/>
+            <a:r>
+              <a:rPr lang="zh-CN" altLang="en-US" sz="1600" dirty="0">
+                <a:solidFill>
+                  <a:schemeClr val="tx1"/>
+                </a:solidFill>
+                <a:latin typeface="Times New Roman" panose="02020603050405020304" pitchFamily="18" charset="0"/>
+                <a:ea typeface="宋体" panose="02010600030101010101" pitchFamily="2" charset="-122"/>
+                <a:cs typeface="Times New Roman" panose="02020603050405020304" pitchFamily="18" charset="0"/>
+              </a:rPr>
+              <a:t>返回目标模块对象</a:t>
+            </a:r>
+          </a:p>
+        </p:txBody>
+      </p:sp>
+      <p:cxnSp>
+        <p:nvCxnSpPr>
+          <p:cNvPr id="21" name="直接箭头连接符 20">
+            <a:extLst>
+              <a:ext uri="{FF2B5EF4-FFF2-40B4-BE49-F238E27FC236}">
+                <a16:creationId xmlns:a16="http://schemas.microsoft.com/office/drawing/2014/main" id="{180A4799-3136-4358-B224-206D9AF78A9B}"/>
+              </a:ext>
+            </a:extLst>
+          </p:cNvPr>
+          <p:cNvCxnSpPr>
+            <a:cxnSpLocks/>
+            <a:stCxn id="10" idx="3"/>
+            <a:endCxn id="19" idx="1"/>
+          </p:cNvCxnSpPr>
+          <p:nvPr/>
+        </p:nvCxnSpPr>
+        <p:spPr>
+          <a:xfrm>
+            <a:off x="8672702" y="968087"/>
+            <a:ext cx="700890" cy="1676"/>
+          </a:xfrm>
+          <a:prstGeom prst="straightConnector1">
+            <a:avLst/>
+          </a:prstGeom>
+          <a:ln w="28575">
+            <a:solidFill>
+              <a:schemeClr val="tx1"/>
+            </a:solidFill>
+            <a:tailEnd type="triangle"/>
+          </a:ln>
+        </p:spPr>
+        <p:style>
+          <a:lnRef idx="1">
+            <a:schemeClr val="accent1"/>
+          </a:lnRef>
+          <a:fillRef idx="0">
+            <a:schemeClr val="accent1"/>
+          </a:fillRef>
+          <a:effectRef idx="0">
+            <a:schemeClr val="accent1"/>
+          </a:effectRef>
+          <a:fontRef idx="minor">
+            <a:schemeClr val="tx1"/>
+          </a:fontRef>
+        </p:style>
+      </p:cxnSp>
+      <p:sp>
+        <p:nvSpPr>
+          <p:cNvPr id="22" name="文本框 21">
+            <a:extLst>
+              <a:ext uri="{FF2B5EF4-FFF2-40B4-BE49-F238E27FC236}">
+                <a16:creationId xmlns:a16="http://schemas.microsoft.com/office/drawing/2014/main" id="{55F8ADC0-7CD6-4EBE-86E9-0654FC1844E4}"/>
+              </a:ext>
+            </a:extLst>
+          </p:cNvPr>
+          <p:cNvSpPr txBox="1"/>
+          <p:nvPr/>
+        </p:nvSpPr>
+        <p:spPr>
+          <a:xfrm>
+            <a:off x="8720681" y="631405"/>
+            <a:ext cx="565348" cy="338554"/>
+          </a:xfrm>
+          <a:prstGeom prst="rect">
+            <a:avLst/>
+          </a:prstGeom>
+          <a:noFill/>
+        </p:spPr>
+        <p:txBody>
+          <a:bodyPr wrap="none" rtlCol="0">
+            <a:spAutoFit/>
+          </a:bodyPr>
+          <a:lstStyle/>
+          <a:p>
+            <a:r>
+              <a:rPr lang="en-US" altLang="zh-CN" sz="1600" dirty="0">
+                <a:latin typeface="Times New Roman" panose="02020603050405020304" pitchFamily="18" charset="0"/>
+                <a:cs typeface="Times New Roman" panose="02020603050405020304" pitchFamily="18" charset="0"/>
+              </a:rPr>
+              <a:t>True</a:t>
+            </a:r>
+            <a:endParaRPr lang="zh-CN" altLang="en-US" sz="1600" dirty="0">
+              <a:latin typeface="Times New Roman" panose="02020603050405020304" pitchFamily="18" charset="0"/>
+              <a:cs typeface="Times New Roman" panose="02020603050405020304" pitchFamily="18" charset="0"/>
+            </a:endParaRPr>
+          </a:p>
+        </p:txBody>
+      </p:sp>
+      <p:sp>
+        <p:nvSpPr>
+          <p:cNvPr id="40" name="流程图: 决策 39">
+            <a:extLst>
+              <a:ext uri="{FF2B5EF4-FFF2-40B4-BE49-F238E27FC236}">
+                <a16:creationId xmlns:a16="http://schemas.microsoft.com/office/drawing/2014/main" id="{E792C7FF-A639-40E3-A4DB-383A938A7DB3}"/>
+              </a:ext>
+            </a:extLst>
+          </p:cNvPr>
+          <p:cNvSpPr/>
+          <p:nvPr/>
+        </p:nvSpPr>
+        <p:spPr>
+          <a:xfrm>
+            <a:off x="6240483" y="1930142"/>
+            <a:ext cx="2432219" cy="1100630"/>
+          </a:xfrm>
+          <a:prstGeom prst="flowChartDecision">
+            <a:avLst/>
+          </a:prstGeom>
+          <a:noFill/>
+          <a:ln w="28575">
+            <a:solidFill>
+              <a:schemeClr val="tx1"/>
+            </a:solidFill>
+          </a:ln>
+        </p:spPr>
+        <p:style>
+          <a:lnRef idx="2">
+            <a:schemeClr val="accent1">
+              <a:shade val="50000"/>
+            </a:schemeClr>
+          </a:lnRef>
+          <a:fillRef idx="1">
+            <a:schemeClr val="accent1"/>
+          </a:fillRef>
+          <a:effectRef idx="0">
+            <a:schemeClr val="accent1"/>
+          </a:effectRef>
+          <a:fontRef idx="minor">
+            <a:schemeClr val="lt1"/>
+          </a:fontRef>
+        </p:style>
+        <p:txBody>
+          <a:bodyPr rtlCol="0" anchor="ctr"/>
+          <a:lstStyle/>
+          <a:p>
+            <a:pPr algn="ctr"/>
+            <a:r>
+              <a:rPr lang="zh-CN" altLang="en-US" sz="1600" dirty="0">
+                <a:solidFill>
+                  <a:schemeClr val="tx1"/>
+                </a:solidFill>
+                <a:latin typeface="宋体" panose="02010600030101010101" pitchFamily="2" charset="-122"/>
+                <a:ea typeface="宋体" panose="02010600030101010101" pitchFamily="2" charset="-122"/>
+                <a:cs typeface="Times New Roman" panose="02020603050405020304" pitchFamily="18" charset="0"/>
+              </a:rPr>
+              <a:t>目标模块是</a:t>
+            </a:r>
+            <a:r>
+              <a:rPr lang="en-US" altLang="zh-CN" sz="1600" dirty="0">
+                <a:solidFill>
+                  <a:schemeClr val="tx1"/>
+                </a:solidFill>
+                <a:latin typeface="Times New Roman" panose="02020603050405020304" pitchFamily="18" charset="0"/>
+                <a:ea typeface="宋体" panose="02010600030101010101" pitchFamily="2" charset="-122"/>
+                <a:cs typeface="Times New Roman" panose="02020603050405020304" pitchFamily="18" charset="0"/>
+              </a:rPr>
+              <a:t>builtin</a:t>
+            </a:r>
+            <a:r>
+              <a:rPr lang="zh-CN" altLang="en-US" sz="1600" dirty="0">
+                <a:solidFill>
+                  <a:schemeClr val="tx1"/>
+                </a:solidFill>
+                <a:latin typeface="宋体" panose="02010600030101010101" pitchFamily="2" charset="-122"/>
+                <a:ea typeface="宋体" panose="02010600030101010101" pitchFamily="2" charset="-122"/>
+                <a:cs typeface="Times New Roman" panose="02020603050405020304" pitchFamily="18" charset="0"/>
+              </a:rPr>
+              <a:t>模块</a:t>
+            </a:r>
+          </a:p>
+        </p:txBody>
+      </p:sp>
+      <p:cxnSp>
+        <p:nvCxnSpPr>
+          <p:cNvPr id="42" name="直接箭头连接符 41">
+            <a:extLst>
+              <a:ext uri="{FF2B5EF4-FFF2-40B4-BE49-F238E27FC236}">
+                <a16:creationId xmlns:a16="http://schemas.microsoft.com/office/drawing/2014/main" id="{6C296F8F-D21F-453F-AF45-52023D3A20B9}"/>
+              </a:ext>
+            </a:extLst>
+          </p:cNvPr>
+          <p:cNvCxnSpPr>
+            <a:cxnSpLocks/>
+            <a:stCxn id="10" idx="2"/>
+            <a:endCxn id="40" idx="0"/>
+          </p:cNvCxnSpPr>
+          <p:nvPr/>
+        </p:nvCxnSpPr>
+        <p:spPr>
+          <a:xfrm>
+            <a:off x="7456593" y="1518402"/>
+            <a:ext cx="0" cy="411740"/>
+          </a:xfrm>
+          <a:prstGeom prst="straightConnector1">
+            <a:avLst/>
+          </a:prstGeom>
+          <a:ln w="28575">
+            <a:solidFill>
+              <a:schemeClr val="tx1"/>
+            </a:solidFill>
+            <a:tailEnd type="triangle"/>
+          </a:ln>
+        </p:spPr>
+        <p:style>
+          <a:lnRef idx="1">
+            <a:schemeClr val="accent1"/>
+          </a:lnRef>
+          <a:fillRef idx="0">
+            <a:schemeClr val="accent1"/>
+          </a:fillRef>
+          <a:effectRef idx="0">
+            <a:schemeClr val="accent1"/>
+          </a:effectRef>
+          <a:fontRef idx="minor">
+            <a:schemeClr val="tx1"/>
+          </a:fontRef>
+        </p:style>
+      </p:cxnSp>
+      <p:sp>
+        <p:nvSpPr>
+          <p:cNvPr id="43" name="矩形 42">
+            <a:extLst>
+              <a:ext uri="{FF2B5EF4-FFF2-40B4-BE49-F238E27FC236}">
+                <a16:creationId xmlns:a16="http://schemas.microsoft.com/office/drawing/2014/main" id="{D22E2F3F-3AAB-46CE-981F-73954F73023F}"/>
+              </a:ext>
+            </a:extLst>
+          </p:cNvPr>
+          <p:cNvSpPr/>
+          <p:nvPr/>
+        </p:nvSpPr>
+        <p:spPr>
+          <a:xfrm>
+            <a:off x="9591308" y="2045023"/>
+            <a:ext cx="2123702" cy="868990"/>
+          </a:xfrm>
+          <a:prstGeom prst="rect">
+            <a:avLst/>
+          </a:prstGeom>
+          <a:noFill/>
+          <a:ln w="28575">
+            <a:solidFill>
+              <a:schemeClr val="tx1"/>
+            </a:solidFill>
+          </a:ln>
+        </p:spPr>
+        <p:style>
+          <a:lnRef idx="2">
+            <a:schemeClr val="accent1">
+              <a:shade val="50000"/>
+            </a:schemeClr>
+          </a:lnRef>
+          <a:fillRef idx="1">
+            <a:schemeClr val="accent1"/>
+          </a:fillRef>
+          <a:effectRef idx="0">
+            <a:schemeClr val="accent1"/>
+          </a:effectRef>
+          <a:fontRef idx="minor">
+            <a:schemeClr val="lt1"/>
+          </a:fontRef>
+        </p:style>
+        <p:txBody>
+          <a:bodyPr rtlCol="0" anchor="ctr"/>
+          <a:lstStyle/>
+          <a:p>
+            <a:pPr algn="ctr"/>
+            <a:r>
+              <a:rPr lang="en-US" altLang="zh-CN" sz="1600" b="1" dirty="0">
+                <a:solidFill>
+                  <a:schemeClr val="tx1"/>
+                </a:solidFill>
+                <a:latin typeface="Times New Roman" panose="02020603050405020304" pitchFamily="18" charset="0"/>
+                <a:cs typeface="Times New Roman" panose="02020603050405020304" pitchFamily="18" charset="0"/>
+              </a:rPr>
+              <a:t>ModuleManager</a:t>
+            </a:r>
+            <a:endParaRPr lang="en-US" altLang="zh-CN" sz="1600" dirty="0">
+              <a:solidFill>
+                <a:schemeClr val="tx1"/>
+              </a:solidFill>
+              <a:latin typeface="Times New Roman" panose="02020603050405020304" pitchFamily="18" charset="0"/>
+              <a:ea typeface="宋体" panose="02010600030101010101" pitchFamily="2" charset="-122"/>
+              <a:cs typeface="Times New Roman" panose="02020603050405020304" pitchFamily="18" charset="0"/>
+            </a:endParaRPr>
+          </a:p>
+          <a:p>
+            <a:pPr algn="ctr"/>
+            <a:r>
+              <a:rPr lang="zh-CN" altLang="en-US" sz="1600" dirty="0">
+                <a:solidFill>
+                  <a:schemeClr val="tx1"/>
+                </a:solidFill>
+                <a:latin typeface="Times New Roman" panose="02020603050405020304" pitchFamily="18" charset="0"/>
+                <a:ea typeface="宋体" panose="02010600030101010101" pitchFamily="2" charset="-122"/>
+                <a:cs typeface="Times New Roman" panose="02020603050405020304" pitchFamily="18" charset="0"/>
+              </a:rPr>
+              <a:t>模块对象写入</a:t>
+            </a:r>
+            <a:r>
+              <a:rPr lang="en-US" altLang="zh-CN" sz="1600" dirty="0">
+                <a:solidFill>
+                  <a:schemeClr val="tx1"/>
+                </a:solidFill>
+                <a:latin typeface="Times New Roman" panose="02020603050405020304" pitchFamily="18" charset="0"/>
+                <a:ea typeface="宋体" panose="02010600030101010101" pitchFamily="2" charset="-122"/>
+                <a:cs typeface="Times New Roman" panose="02020603050405020304" pitchFamily="18" charset="0"/>
+              </a:rPr>
+              <a:t>sys.modules</a:t>
+            </a:r>
+            <a:r>
+              <a:rPr lang="zh-CN" altLang="en-US" sz="1600" dirty="0">
+                <a:solidFill>
+                  <a:schemeClr val="tx1"/>
+                </a:solidFill>
+                <a:latin typeface="Times New Roman" panose="02020603050405020304" pitchFamily="18" charset="0"/>
+                <a:ea typeface="宋体" panose="02010600030101010101" pitchFamily="2" charset="-122"/>
+                <a:cs typeface="Times New Roman" panose="02020603050405020304" pitchFamily="18" charset="0"/>
+              </a:rPr>
+              <a:t>缓存</a:t>
+            </a:r>
+          </a:p>
+        </p:txBody>
+      </p:sp>
+      <p:cxnSp>
+        <p:nvCxnSpPr>
+          <p:cNvPr id="45" name="直接箭头连接符 44">
+            <a:extLst>
+              <a:ext uri="{FF2B5EF4-FFF2-40B4-BE49-F238E27FC236}">
+                <a16:creationId xmlns:a16="http://schemas.microsoft.com/office/drawing/2014/main" id="{E0374290-5C45-482B-950F-2CBF1862ED11}"/>
+              </a:ext>
+            </a:extLst>
+          </p:cNvPr>
+          <p:cNvCxnSpPr>
+            <a:cxnSpLocks/>
+            <a:stCxn id="40" idx="3"/>
+            <a:endCxn id="43" idx="1"/>
+          </p:cNvCxnSpPr>
+          <p:nvPr/>
+        </p:nvCxnSpPr>
+        <p:spPr>
+          <a:xfrm flipV="1">
+            <a:off x="8672702" y="2479518"/>
+            <a:ext cx="918606" cy="939"/>
+          </a:xfrm>
+          <a:prstGeom prst="straightConnector1">
+            <a:avLst/>
+          </a:prstGeom>
+          <a:ln w="28575">
+            <a:solidFill>
+              <a:schemeClr val="tx1"/>
+            </a:solidFill>
+            <a:tailEnd type="triangle"/>
+          </a:ln>
+        </p:spPr>
+        <p:style>
+          <a:lnRef idx="1">
+            <a:schemeClr val="accent1"/>
+          </a:lnRef>
+          <a:fillRef idx="0">
+            <a:schemeClr val="accent1"/>
+          </a:fillRef>
+          <a:effectRef idx="0">
+            <a:schemeClr val="accent1"/>
+          </a:effectRef>
+          <a:fontRef idx="minor">
+            <a:schemeClr val="tx1"/>
+          </a:fontRef>
+        </p:style>
+      </p:cxnSp>
+      <p:cxnSp>
+        <p:nvCxnSpPr>
+          <p:cNvPr id="47" name="直接箭头连接符 46">
+            <a:extLst>
+              <a:ext uri="{FF2B5EF4-FFF2-40B4-BE49-F238E27FC236}">
+                <a16:creationId xmlns:a16="http://schemas.microsoft.com/office/drawing/2014/main" id="{6911165B-E55F-4A6F-9F61-ECA551108719}"/>
+              </a:ext>
+            </a:extLst>
+          </p:cNvPr>
+          <p:cNvCxnSpPr>
+            <a:cxnSpLocks/>
+            <a:stCxn id="43" idx="0"/>
+            <a:endCxn id="19" idx="2"/>
+          </p:cNvCxnSpPr>
+          <p:nvPr/>
+        </p:nvCxnSpPr>
+        <p:spPr>
+          <a:xfrm flipV="1">
+            <a:off x="10653159" y="1242895"/>
+            <a:ext cx="0" cy="802128"/>
+          </a:xfrm>
+          <a:prstGeom prst="straightConnector1">
+            <a:avLst/>
+          </a:prstGeom>
+          <a:ln w="28575">
+            <a:solidFill>
+              <a:schemeClr val="tx1"/>
+            </a:solidFill>
+            <a:tailEnd type="triangle"/>
+          </a:ln>
+        </p:spPr>
+        <p:style>
+          <a:lnRef idx="1">
+            <a:schemeClr val="accent1"/>
+          </a:lnRef>
+          <a:fillRef idx="0">
+            <a:schemeClr val="accent1"/>
+          </a:fillRef>
+          <a:effectRef idx="0">
+            <a:schemeClr val="accent1"/>
+          </a:effectRef>
+          <a:fontRef idx="minor">
+            <a:schemeClr val="tx1"/>
+          </a:fontRef>
+        </p:style>
+      </p:cxnSp>
+      <p:sp>
+        <p:nvSpPr>
+          <p:cNvPr id="50" name="文本框 49">
+            <a:extLst>
+              <a:ext uri="{FF2B5EF4-FFF2-40B4-BE49-F238E27FC236}">
+                <a16:creationId xmlns:a16="http://schemas.microsoft.com/office/drawing/2014/main" id="{61B640C9-C20F-4CBE-8D33-FFE8FDAE150E}"/>
+              </a:ext>
+            </a:extLst>
+          </p:cNvPr>
+          <p:cNvSpPr txBox="1"/>
+          <p:nvPr/>
+        </p:nvSpPr>
+        <p:spPr>
+          <a:xfrm>
+            <a:off x="7540862" y="1554081"/>
+            <a:ext cx="619080" cy="338554"/>
+          </a:xfrm>
+          <a:prstGeom prst="rect">
+            <a:avLst/>
+          </a:prstGeom>
+          <a:noFill/>
+        </p:spPr>
+        <p:txBody>
+          <a:bodyPr wrap="none" rtlCol="0">
+            <a:spAutoFit/>
+          </a:bodyPr>
+          <a:lstStyle/>
+          <a:p>
+            <a:r>
+              <a:rPr lang="en-US" altLang="zh-CN" sz="1600" dirty="0">
+                <a:latin typeface="Times New Roman" panose="02020603050405020304" pitchFamily="18" charset="0"/>
+                <a:cs typeface="Times New Roman" panose="02020603050405020304" pitchFamily="18" charset="0"/>
+              </a:rPr>
+              <a:t>False</a:t>
+            </a:r>
+            <a:endParaRPr lang="zh-CN" altLang="en-US" sz="1600" dirty="0">
+              <a:latin typeface="Times New Roman" panose="02020603050405020304" pitchFamily="18" charset="0"/>
+              <a:cs typeface="Times New Roman" panose="02020603050405020304" pitchFamily="18" charset="0"/>
+            </a:endParaRPr>
+          </a:p>
+        </p:txBody>
+      </p:sp>
+      <p:sp>
+        <p:nvSpPr>
+          <p:cNvPr id="51" name="文本框 50">
+            <a:extLst>
+              <a:ext uri="{FF2B5EF4-FFF2-40B4-BE49-F238E27FC236}">
+                <a16:creationId xmlns:a16="http://schemas.microsoft.com/office/drawing/2014/main" id="{901E1564-68EF-4725-B685-3BA70AEE5FC5}"/>
+              </a:ext>
+            </a:extLst>
+          </p:cNvPr>
+          <p:cNvSpPr txBox="1"/>
+          <p:nvPr/>
+        </p:nvSpPr>
+        <p:spPr>
+          <a:xfrm>
+            <a:off x="8685783" y="2140964"/>
+            <a:ext cx="565348" cy="338554"/>
+          </a:xfrm>
+          <a:prstGeom prst="rect">
+            <a:avLst/>
+          </a:prstGeom>
+          <a:noFill/>
+        </p:spPr>
+        <p:txBody>
+          <a:bodyPr wrap="none" rtlCol="0">
+            <a:spAutoFit/>
+          </a:bodyPr>
+          <a:lstStyle/>
+          <a:p>
+            <a:r>
+              <a:rPr lang="en-US" altLang="zh-CN" sz="1600" dirty="0">
+                <a:latin typeface="Times New Roman" panose="02020603050405020304" pitchFamily="18" charset="0"/>
+                <a:cs typeface="Times New Roman" panose="02020603050405020304" pitchFamily="18" charset="0"/>
+              </a:rPr>
+              <a:t>True</a:t>
+            </a:r>
+            <a:endParaRPr lang="zh-CN" altLang="en-US" sz="1600" dirty="0">
+              <a:latin typeface="Times New Roman" panose="02020603050405020304" pitchFamily="18" charset="0"/>
+              <a:cs typeface="Times New Roman" panose="02020603050405020304" pitchFamily="18" charset="0"/>
+            </a:endParaRPr>
+          </a:p>
+        </p:txBody>
+      </p:sp>
+      <p:sp>
+        <p:nvSpPr>
+          <p:cNvPr id="52" name="矩形 51">
+            <a:extLst>
+              <a:ext uri="{FF2B5EF4-FFF2-40B4-BE49-F238E27FC236}">
+                <a16:creationId xmlns:a16="http://schemas.microsoft.com/office/drawing/2014/main" id="{37500F39-A76E-4BAF-8530-D5028D50129B}"/>
+              </a:ext>
+            </a:extLst>
+          </p:cNvPr>
+          <p:cNvSpPr/>
+          <p:nvPr/>
+        </p:nvSpPr>
+        <p:spPr>
+          <a:xfrm>
+            <a:off x="9403516" y="3583382"/>
+            <a:ext cx="2529210" cy="886995"/>
+          </a:xfrm>
+          <a:prstGeom prst="rect">
+            <a:avLst/>
+          </a:prstGeom>
+          <a:noFill/>
+          <a:ln w="28575">
+            <a:solidFill>
+              <a:schemeClr val="tx1"/>
+            </a:solidFill>
+          </a:ln>
+        </p:spPr>
+        <p:style>
+          <a:lnRef idx="2">
+            <a:schemeClr val="accent1">
+              <a:shade val="50000"/>
+            </a:schemeClr>
+          </a:lnRef>
+          <a:fillRef idx="1">
+            <a:schemeClr val="accent1"/>
+          </a:fillRef>
+          <a:effectRef idx="0">
+            <a:schemeClr val="accent1"/>
+          </a:effectRef>
+          <a:fontRef idx="minor">
+            <a:schemeClr val="lt1"/>
+          </a:fontRef>
+        </p:style>
+        <p:txBody>
+          <a:bodyPr rtlCol="0" anchor="ctr"/>
+          <a:lstStyle/>
+          <a:p>
+            <a:pPr algn="ctr"/>
+            <a:r>
+              <a:rPr lang="zh-CN" altLang="en-US" sz="1600" dirty="0">
+                <a:solidFill>
+                  <a:schemeClr val="tx1"/>
+                </a:solidFill>
+                <a:latin typeface="宋体" panose="02010600030101010101" pitchFamily="2" charset="-122"/>
+                <a:ea typeface="宋体" panose="02010600030101010101" pitchFamily="2" charset="-122"/>
+                <a:cs typeface="Times New Roman" panose="02020603050405020304" pitchFamily="18" charset="0"/>
+              </a:rPr>
+              <a:t>若该模块存在父包，则</a:t>
+            </a:r>
+            <a:endParaRPr lang="en-US" altLang="zh-CN" sz="1600" dirty="0">
+              <a:solidFill>
+                <a:schemeClr val="tx1"/>
+              </a:solidFill>
+              <a:latin typeface="宋体" panose="02010600030101010101" pitchFamily="2" charset="-122"/>
+              <a:ea typeface="宋体" panose="02010600030101010101" pitchFamily="2" charset="-122"/>
+              <a:cs typeface="Times New Roman" panose="02020603050405020304" pitchFamily="18" charset="0"/>
+            </a:endParaRPr>
+          </a:p>
+          <a:p>
+            <a:pPr algn="ctr"/>
+            <a:r>
+              <a:rPr lang="zh-CN" altLang="en-US" sz="1600" dirty="0">
+                <a:solidFill>
+                  <a:schemeClr val="tx1"/>
+                </a:solidFill>
+                <a:latin typeface="宋体" panose="02010600030101010101" pitchFamily="2" charset="-122"/>
+                <a:ea typeface="宋体" panose="02010600030101010101" pitchFamily="2" charset="-122"/>
+                <a:cs typeface="Times New Roman" panose="02020603050405020304" pitchFamily="18" charset="0"/>
+              </a:rPr>
+              <a:t>建立父子绑定</a:t>
+            </a:r>
+          </a:p>
+        </p:txBody>
+      </p:sp>
+      <p:cxnSp>
+        <p:nvCxnSpPr>
+          <p:cNvPr id="54" name="直接箭头连接符 53">
+            <a:extLst>
+              <a:ext uri="{FF2B5EF4-FFF2-40B4-BE49-F238E27FC236}">
+                <a16:creationId xmlns:a16="http://schemas.microsoft.com/office/drawing/2014/main" id="{56E51543-ED67-4782-9F8D-8B0C65F7B972}"/>
+              </a:ext>
+            </a:extLst>
+          </p:cNvPr>
+          <p:cNvCxnSpPr>
+            <a:stCxn id="40" idx="2"/>
+            <a:endCxn id="7" idx="0"/>
+          </p:cNvCxnSpPr>
+          <p:nvPr/>
+        </p:nvCxnSpPr>
+        <p:spPr>
+          <a:xfrm>
+            <a:off x="7456593" y="3030772"/>
+            <a:ext cx="7079" cy="550315"/>
+          </a:xfrm>
+          <a:prstGeom prst="straightConnector1">
+            <a:avLst/>
+          </a:prstGeom>
+          <a:ln w="28575">
+            <a:solidFill>
+              <a:schemeClr val="tx1"/>
+            </a:solidFill>
+            <a:tailEnd type="triangle"/>
+          </a:ln>
+        </p:spPr>
+        <p:style>
+          <a:lnRef idx="1">
+            <a:schemeClr val="accent1"/>
+          </a:lnRef>
+          <a:fillRef idx="0">
+            <a:schemeClr val="accent1"/>
+          </a:fillRef>
+          <a:effectRef idx="0">
+            <a:schemeClr val="accent1"/>
+          </a:effectRef>
+          <a:fontRef idx="minor">
+            <a:schemeClr val="tx1"/>
+          </a:fontRef>
+        </p:style>
+      </p:cxnSp>
+      <p:cxnSp>
+        <p:nvCxnSpPr>
+          <p:cNvPr id="56" name="连接符: 肘形 55">
+            <a:extLst>
+              <a:ext uri="{FF2B5EF4-FFF2-40B4-BE49-F238E27FC236}">
+                <a16:creationId xmlns:a16="http://schemas.microsoft.com/office/drawing/2014/main" id="{112AE938-E8B5-4D22-B738-4D1BA8DD902A}"/>
+              </a:ext>
+            </a:extLst>
+          </p:cNvPr>
+          <p:cNvCxnSpPr>
+            <a:stCxn id="7" idx="2"/>
+            <a:endCxn id="8" idx="1"/>
+          </p:cNvCxnSpPr>
+          <p:nvPr/>
+        </p:nvCxnSpPr>
+        <p:spPr>
+          <a:xfrm rot="16200000" flipH="1">
+            <a:off x="7086028" y="4845725"/>
+            <a:ext cx="1053204" cy="297917"/>
+          </a:xfrm>
+          <a:prstGeom prst="bentConnector2">
+            <a:avLst/>
+          </a:prstGeom>
+          <a:ln w="28575">
+            <a:solidFill>
+              <a:schemeClr val="tx1"/>
+            </a:solidFill>
+            <a:tailEnd type="triangle"/>
+          </a:ln>
+        </p:spPr>
+        <p:style>
+          <a:lnRef idx="1">
+            <a:schemeClr val="accent1"/>
+          </a:lnRef>
+          <a:fillRef idx="0">
+            <a:schemeClr val="accent1"/>
+          </a:fillRef>
+          <a:effectRef idx="0">
+            <a:schemeClr val="accent1"/>
+          </a:effectRef>
+          <a:fontRef idx="minor">
+            <a:schemeClr val="tx1"/>
+          </a:fontRef>
+        </p:style>
+      </p:cxnSp>
+      <p:cxnSp>
+        <p:nvCxnSpPr>
+          <p:cNvPr id="58" name="连接符: 肘形 57">
+            <a:extLst>
+              <a:ext uri="{FF2B5EF4-FFF2-40B4-BE49-F238E27FC236}">
+                <a16:creationId xmlns:a16="http://schemas.microsoft.com/office/drawing/2014/main" id="{5485E3C4-95A5-4A88-8B75-7AFA20E2F517}"/>
+              </a:ext>
+            </a:extLst>
+          </p:cNvPr>
+          <p:cNvCxnSpPr>
+            <a:stCxn id="8" idx="3"/>
+            <a:endCxn id="52" idx="2"/>
+          </p:cNvCxnSpPr>
+          <p:nvPr/>
+        </p:nvCxnSpPr>
+        <p:spPr>
+          <a:xfrm flipV="1">
+            <a:off x="10423640" y="4470377"/>
+            <a:ext cx="244481" cy="1050909"/>
+          </a:xfrm>
+          <a:prstGeom prst="bentConnector2">
+            <a:avLst/>
+          </a:prstGeom>
+          <a:ln w="28575">
+            <a:solidFill>
+              <a:schemeClr val="tx1"/>
+            </a:solidFill>
+            <a:tailEnd type="triangle"/>
+          </a:ln>
+        </p:spPr>
+        <p:style>
+          <a:lnRef idx="1">
+            <a:schemeClr val="accent1"/>
+          </a:lnRef>
+          <a:fillRef idx="0">
+            <a:schemeClr val="accent1"/>
+          </a:fillRef>
+          <a:effectRef idx="0">
+            <a:schemeClr val="accent1"/>
+          </a:effectRef>
+          <a:fontRef idx="minor">
+            <a:schemeClr val="tx1"/>
+          </a:fontRef>
+        </p:style>
+      </p:cxnSp>
+      <p:cxnSp>
+        <p:nvCxnSpPr>
+          <p:cNvPr id="64" name="直接箭头连接符 63">
+            <a:extLst>
+              <a:ext uri="{FF2B5EF4-FFF2-40B4-BE49-F238E27FC236}">
+                <a16:creationId xmlns:a16="http://schemas.microsoft.com/office/drawing/2014/main" id="{52D83A80-07D7-4E56-B1FA-10C303C4AB26}"/>
+              </a:ext>
+            </a:extLst>
+          </p:cNvPr>
+          <p:cNvCxnSpPr>
+            <a:cxnSpLocks/>
+            <a:stCxn id="52" idx="0"/>
+            <a:endCxn id="43" idx="2"/>
+          </p:cNvCxnSpPr>
+          <p:nvPr/>
+        </p:nvCxnSpPr>
+        <p:spPr>
+          <a:xfrm flipH="1" flipV="1">
+            <a:off x="10653159" y="2914013"/>
+            <a:ext cx="14962" cy="669369"/>
+          </a:xfrm>
+          <a:prstGeom prst="straightConnector1">
+            <a:avLst/>
+          </a:prstGeom>
+          <a:ln w="28575">
+            <a:solidFill>
+              <a:schemeClr val="tx1"/>
+            </a:solidFill>
+            <a:tailEnd type="triangle"/>
+          </a:ln>
+        </p:spPr>
+        <p:style>
+          <a:lnRef idx="1">
+            <a:schemeClr val="accent1"/>
+          </a:lnRef>
+          <a:fillRef idx="0">
+            <a:schemeClr val="accent1"/>
+          </a:fillRef>
+          <a:effectRef idx="0">
+            <a:schemeClr val="accent1"/>
+          </a:effectRef>
+          <a:fontRef idx="minor">
+            <a:schemeClr val="tx1"/>
+          </a:fontRef>
+        </p:style>
+      </p:cxnSp>
+      <p:sp>
+        <p:nvSpPr>
+          <p:cNvPr id="69" name="文本框 68">
+            <a:extLst>
+              <a:ext uri="{FF2B5EF4-FFF2-40B4-BE49-F238E27FC236}">
+                <a16:creationId xmlns:a16="http://schemas.microsoft.com/office/drawing/2014/main" id="{17CBBCB3-FC93-4AC3-B999-A05F3A75F3C2}"/>
+              </a:ext>
+            </a:extLst>
+          </p:cNvPr>
+          <p:cNvSpPr txBox="1"/>
+          <p:nvPr/>
+        </p:nvSpPr>
+        <p:spPr>
+          <a:xfrm>
+            <a:off x="7540862" y="3068279"/>
+            <a:ext cx="619080" cy="338554"/>
+          </a:xfrm>
+          <a:prstGeom prst="rect">
+            <a:avLst/>
+          </a:prstGeom>
+          <a:noFill/>
+        </p:spPr>
+        <p:txBody>
+          <a:bodyPr wrap="none" rtlCol="0">
+            <a:spAutoFit/>
+          </a:bodyPr>
+          <a:lstStyle/>
+          <a:p>
+            <a:r>
+              <a:rPr lang="en-US" altLang="zh-CN" sz="1600" dirty="0">
+                <a:latin typeface="Times New Roman" panose="02020603050405020304" pitchFamily="18" charset="0"/>
+                <a:cs typeface="Times New Roman" panose="02020603050405020304" pitchFamily="18" charset="0"/>
+              </a:rPr>
+              <a:t>False</a:t>
+            </a:r>
+            <a:endParaRPr lang="zh-CN" altLang="en-US" sz="1600" dirty="0">
+              <a:latin typeface="Times New Roman" panose="02020603050405020304" pitchFamily="18" charset="0"/>
+              <a:cs typeface="Times New Roman" panose="02020603050405020304" pitchFamily="18" charset="0"/>
+            </a:endParaRPr>
+          </a:p>
+        </p:txBody>
+      </p:sp>
+      <p:cxnSp>
+        <p:nvCxnSpPr>
+          <p:cNvPr id="71" name="直接箭头连接符 70">
+            <a:extLst>
+              <a:ext uri="{FF2B5EF4-FFF2-40B4-BE49-F238E27FC236}">
+                <a16:creationId xmlns:a16="http://schemas.microsoft.com/office/drawing/2014/main" id="{734CCF3E-7BFE-4169-B596-F1845C3D4A1F}"/>
+              </a:ext>
+            </a:extLst>
+          </p:cNvPr>
+          <p:cNvCxnSpPr>
+            <a:cxnSpLocks/>
+            <a:stCxn id="4" idx="0"/>
+            <a:endCxn id="5" idx="2"/>
+          </p:cNvCxnSpPr>
+          <p:nvPr/>
+        </p:nvCxnSpPr>
+        <p:spPr>
+          <a:xfrm flipV="1">
+            <a:off x="4577937" y="3847605"/>
+            <a:ext cx="0" cy="391882"/>
+          </a:xfrm>
+          <a:prstGeom prst="straightConnector1">
+            <a:avLst/>
+          </a:prstGeom>
+          <a:ln w="28575">
+            <a:solidFill>
+              <a:schemeClr val="tx1"/>
+            </a:solidFill>
+            <a:tailEnd type="triangle"/>
+          </a:ln>
+        </p:spPr>
+        <p:style>
+          <a:lnRef idx="1">
+            <a:schemeClr val="accent1"/>
+          </a:lnRef>
+          <a:fillRef idx="0">
+            <a:schemeClr val="accent1"/>
+          </a:fillRef>
+          <a:effectRef idx="0">
+            <a:schemeClr val="accent1"/>
+          </a:effectRef>
+          <a:fontRef idx="minor">
+            <a:schemeClr val="tx1"/>
+          </a:fontRef>
+        </p:style>
+      </p:cxnSp>
+      <p:sp>
+        <p:nvSpPr>
+          <p:cNvPr id="80" name="矩形 79">
+            <a:extLst>
+              <a:ext uri="{FF2B5EF4-FFF2-40B4-BE49-F238E27FC236}">
+                <a16:creationId xmlns:a16="http://schemas.microsoft.com/office/drawing/2014/main" id="{BC937CA7-71C7-402C-B1DA-C79B0EF08EEB}"/>
+              </a:ext>
+            </a:extLst>
+          </p:cNvPr>
+          <p:cNvSpPr/>
+          <p:nvPr/>
+        </p:nvSpPr>
+        <p:spPr>
+          <a:xfrm>
+            <a:off x="724641" y="1856019"/>
+            <a:ext cx="1935678" cy="724395"/>
+          </a:xfrm>
+          <a:prstGeom prst="rect">
+            <a:avLst/>
+          </a:prstGeom>
+          <a:noFill/>
+          <a:ln w="28575">
+            <a:solidFill>
+              <a:schemeClr val="tx1"/>
+            </a:solidFill>
+          </a:ln>
+        </p:spPr>
+        <p:style>
+          <a:lnRef idx="2">
+            <a:schemeClr val="accent1">
+              <a:shade val="50000"/>
+            </a:schemeClr>
+          </a:lnRef>
+          <a:fillRef idx="1">
+            <a:schemeClr val="accent1"/>
+          </a:fillRef>
+          <a:effectRef idx="0">
+            <a:schemeClr val="accent1"/>
+          </a:effectRef>
+          <a:fontRef idx="minor">
+            <a:schemeClr val="lt1"/>
+          </a:fontRef>
+        </p:style>
+        <p:txBody>
+          <a:bodyPr rtlCol="0" anchor="ctr"/>
+          <a:lstStyle/>
+          <a:p>
+            <a:pPr algn="ctr"/>
+            <a:r>
+              <a:rPr lang="en-US" altLang="zh-CN" sz="1600" b="1" dirty="0">
+                <a:solidFill>
+                  <a:schemeClr val="tx1"/>
+                </a:solidFill>
+                <a:latin typeface="Times New Roman" panose="02020603050405020304" pitchFamily="18" charset="0"/>
+                <a:cs typeface="Times New Roman" panose="02020603050405020304" pitchFamily="18" charset="0"/>
+              </a:rPr>
+              <a:t>ModuleManager</a:t>
+            </a:r>
+          </a:p>
+          <a:p>
+            <a:pPr algn="ctr"/>
+            <a:r>
+              <a:rPr lang="zh-CN" altLang="en-US" sz="1600" dirty="0">
+                <a:solidFill>
+                  <a:schemeClr val="tx1"/>
+                </a:solidFill>
+                <a:latin typeface="宋体" panose="02010600030101010101" pitchFamily="2" charset="-122"/>
+                <a:ea typeface="宋体" panose="02010600030101010101" pitchFamily="2" charset="-122"/>
+                <a:cs typeface="Times New Roman" panose="02020603050405020304" pitchFamily="18" charset="0"/>
+              </a:rPr>
+              <a:t>模块导入门面</a:t>
+            </a:r>
+          </a:p>
+        </p:txBody>
+      </p:sp>
+      <p:sp>
+        <p:nvSpPr>
+          <p:cNvPr id="91" name="流程图: 磁盘 90">
+            <a:extLst>
+              <a:ext uri="{FF2B5EF4-FFF2-40B4-BE49-F238E27FC236}">
+                <a16:creationId xmlns:a16="http://schemas.microsoft.com/office/drawing/2014/main" id="{E10682ED-4DE8-4E16-8C2E-08E60E3A0956}"/>
+              </a:ext>
+            </a:extLst>
+          </p:cNvPr>
+          <p:cNvSpPr/>
+          <p:nvPr/>
+        </p:nvSpPr>
+        <p:spPr>
+          <a:xfrm>
+            <a:off x="259274" y="3135085"/>
+            <a:ext cx="1224263" cy="1449520"/>
+          </a:xfrm>
+          <a:prstGeom prst="flowChartMagneticDisk">
+            <a:avLst/>
+          </a:prstGeom>
+          <a:noFill/>
+          <a:ln w="28575">
+            <a:solidFill>
+              <a:schemeClr val="tx1"/>
+            </a:solidFill>
+          </a:ln>
+        </p:spPr>
+        <p:style>
+          <a:lnRef idx="2">
+            <a:schemeClr val="accent1">
+              <a:shade val="50000"/>
+            </a:schemeClr>
+          </a:lnRef>
+          <a:fillRef idx="1">
+            <a:schemeClr val="accent1"/>
+          </a:fillRef>
+          <a:effectRef idx="0">
+            <a:schemeClr val="accent1"/>
+          </a:effectRef>
+          <a:fontRef idx="minor">
+            <a:schemeClr val="lt1"/>
+          </a:fontRef>
+        </p:style>
+        <p:txBody>
+          <a:bodyPr rtlCol="0" anchor="ctr"/>
+          <a:lstStyle/>
+          <a:p>
+            <a:pPr algn="ctr"/>
+            <a:r>
+              <a:rPr lang="zh-CN" altLang="en-US" sz="1600" dirty="0">
+                <a:solidFill>
+                  <a:schemeClr val="tx1"/>
+                </a:solidFill>
+                <a:latin typeface="宋体" panose="02010600030101010101" pitchFamily="2" charset="-122"/>
+                <a:ea typeface="宋体" panose="02010600030101010101" pitchFamily="2" charset="-122"/>
+              </a:rPr>
+              <a:t>模块缓存</a:t>
+            </a:r>
+            <a:endParaRPr lang="en-US" altLang="zh-CN" sz="1600" dirty="0">
+              <a:solidFill>
+                <a:schemeClr val="tx1"/>
+              </a:solidFill>
+              <a:latin typeface="宋体" panose="02010600030101010101" pitchFamily="2" charset="-122"/>
+              <a:ea typeface="宋体" panose="02010600030101010101" pitchFamily="2" charset="-122"/>
+            </a:endParaRPr>
+          </a:p>
+          <a:p>
+            <a:pPr algn="ctr"/>
+            <a:r>
+              <a:rPr lang="en-US" altLang="zh-CN" sz="1600" dirty="0">
+                <a:solidFill>
+                  <a:schemeClr val="tx1"/>
+                </a:solidFill>
+                <a:latin typeface="Times New Roman" panose="02020603050405020304" pitchFamily="18" charset="0"/>
+                <a:ea typeface="宋体" panose="02010600030101010101" pitchFamily="2" charset="-122"/>
+                <a:cs typeface="Times New Roman" panose="02020603050405020304" pitchFamily="18" charset="0"/>
+              </a:rPr>
+              <a:t>sys.modules</a:t>
+            </a:r>
+            <a:endParaRPr lang="zh-CN" altLang="en-US" sz="1600" dirty="0">
+              <a:solidFill>
+                <a:schemeClr val="tx1"/>
+              </a:solidFill>
+              <a:latin typeface="Times New Roman" panose="02020603050405020304" pitchFamily="18" charset="0"/>
+              <a:ea typeface="宋体" panose="02010600030101010101" pitchFamily="2" charset="-122"/>
+              <a:cs typeface="Times New Roman" panose="02020603050405020304" pitchFamily="18" charset="0"/>
+            </a:endParaRPr>
+          </a:p>
+        </p:txBody>
+      </p:sp>
+      <p:sp>
+        <p:nvSpPr>
+          <p:cNvPr id="92" name="流程图: 磁盘 91">
+            <a:extLst>
+              <a:ext uri="{FF2B5EF4-FFF2-40B4-BE49-F238E27FC236}">
+                <a16:creationId xmlns:a16="http://schemas.microsoft.com/office/drawing/2014/main" id="{EBC81AE2-6B7E-4BE9-A87D-38EE7DE79AC9}"/>
+              </a:ext>
+            </a:extLst>
+          </p:cNvPr>
+          <p:cNvSpPr/>
+          <p:nvPr/>
+        </p:nvSpPr>
+        <p:spPr>
+          <a:xfrm>
+            <a:off x="1777780" y="3135085"/>
+            <a:ext cx="1224263" cy="1449520"/>
+          </a:xfrm>
+          <a:prstGeom prst="flowChartMagneticDisk">
+            <a:avLst/>
+          </a:prstGeom>
+          <a:noFill/>
+          <a:ln w="28575">
+            <a:solidFill>
+              <a:schemeClr val="tx1"/>
+            </a:solidFill>
+          </a:ln>
+        </p:spPr>
+        <p:style>
+          <a:lnRef idx="2">
+            <a:schemeClr val="accent1">
+              <a:shade val="50000"/>
+            </a:schemeClr>
+          </a:lnRef>
+          <a:fillRef idx="1">
+            <a:schemeClr val="accent1"/>
+          </a:fillRef>
+          <a:effectRef idx="0">
+            <a:schemeClr val="accent1"/>
+          </a:effectRef>
+          <a:fontRef idx="minor">
+            <a:schemeClr val="lt1"/>
+          </a:fontRef>
+        </p:style>
+        <p:txBody>
+          <a:bodyPr rtlCol="0" anchor="ctr"/>
+          <a:lstStyle/>
+          <a:p>
+            <a:pPr algn="ctr"/>
+            <a:r>
+              <a:rPr lang="zh-CN" altLang="en-US" sz="1600" dirty="0">
+                <a:solidFill>
+                  <a:schemeClr val="tx1"/>
+                </a:solidFill>
+                <a:latin typeface="宋体" panose="02010600030101010101" pitchFamily="2" charset="-122"/>
+                <a:ea typeface="宋体" panose="02010600030101010101" pitchFamily="2" charset="-122"/>
+              </a:rPr>
+              <a:t>预设模块</a:t>
+            </a:r>
+            <a:endParaRPr lang="en-US" altLang="zh-CN" sz="1600" dirty="0">
+              <a:solidFill>
+                <a:schemeClr val="tx1"/>
+              </a:solidFill>
+              <a:latin typeface="宋体" panose="02010600030101010101" pitchFamily="2" charset="-122"/>
+              <a:ea typeface="宋体" panose="02010600030101010101" pitchFamily="2" charset="-122"/>
+            </a:endParaRPr>
+          </a:p>
+          <a:p>
+            <a:pPr algn="ctr"/>
+            <a:r>
+              <a:rPr lang="zh-CN" altLang="en-US" sz="1600" dirty="0">
+                <a:solidFill>
+                  <a:schemeClr val="tx1"/>
+                </a:solidFill>
+                <a:latin typeface="宋体" panose="02010600030101010101" pitchFamily="2" charset="-122"/>
+                <a:ea typeface="宋体" panose="02010600030101010101" pitchFamily="2" charset="-122"/>
+              </a:rPr>
+              <a:t>查找路径集</a:t>
+            </a:r>
+            <a:endParaRPr lang="en-US" altLang="zh-CN" sz="1600" dirty="0">
+              <a:solidFill>
+                <a:schemeClr val="tx1"/>
+              </a:solidFill>
+              <a:latin typeface="宋体" panose="02010600030101010101" pitchFamily="2" charset="-122"/>
+              <a:ea typeface="宋体" panose="02010600030101010101" pitchFamily="2" charset="-122"/>
+            </a:endParaRPr>
+          </a:p>
+          <a:p>
+            <a:pPr algn="ctr"/>
+            <a:r>
+              <a:rPr lang="en-US" altLang="zh-CN" sz="1600" dirty="0">
+                <a:solidFill>
+                  <a:schemeClr val="tx1"/>
+                </a:solidFill>
+                <a:latin typeface="Times New Roman" panose="02020603050405020304" pitchFamily="18" charset="0"/>
+                <a:ea typeface="宋体" panose="02010600030101010101" pitchFamily="2" charset="-122"/>
+                <a:cs typeface="Times New Roman" panose="02020603050405020304" pitchFamily="18" charset="0"/>
+              </a:rPr>
+              <a:t>sys.path</a:t>
+            </a:r>
+            <a:endParaRPr lang="zh-CN" altLang="en-US" sz="1600" dirty="0">
+              <a:solidFill>
+                <a:schemeClr val="tx1"/>
+              </a:solidFill>
+              <a:latin typeface="Times New Roman" panose="02020603050405020304" pitchFamily="18" charset="0"/>
+              <a:ea typeface="宋体" panose="02010600030101010101" pitchFamily="2" charset="-122"/>
+              <a:cs typeface="Times New Roman" panose="02020603050405020304" pitchFamily="18" charset="0"/>
+            </a:endParaRPr>
+          </a:p>
+        </p:txBody>
+      </p:sp>
+      <p:cxnSp>
+        <p:nvCxnSpPr>
+          <p:cNvPr id="94" name="连接符: 曲线 93">
+            <a:extLst>
+              <a:ext uri="{FF2B5EF4-FFF2-40B4-BE49-F238E27FC236}">
+                <a16:creationId xmlns:a16="http://schemas.microsoft.com/office/drawing/2014/main" id="{EAAE6681-12B7-4A5C-9867-8802F9637007}"/>
+              </a:ext>
+            </a:extLst>
+          </p:cNvPr>
+          <p:cNvCxnSpPr>
+            <a:endCxn id="91" idx="1"/>
+          </p:cNvCxnSpPr>
+          <p:nvPr/>
+        </p:nvCxnSpPr>
+        <p:spPr>
+          <a:xfrm rot="5400000">
+            <a:off x="796667" y="2655154"/>
+            <a:ext cx="554671" cy="405191"/>
+          </a:xfrm>
+          <a:prstGeom prst="curvedConnector3">
+            <a:avLst/>
+          </a:prstGeom>
+          <a:ln w="28575">
+            <a:solidFill>
+              <a:schemeClr val="tx1"/>
+            </a:solidFill>
+            <a:tailEnd type="triangle"/>
+          </a:ln>
+        </p:spPr>
+        <p:style>
+          <a:lnRef idx="1">
+            <a:schemeClr val="accent1"/>
+          </a:lnRef>
+          <a:fillRef idx="0">
+            <a:schemeClr val="accent1"/>
+          </a:fillRef>
+          <a:effectRef idx="0">
+            <a:schemeClr val="accent1"/>
+          </a:effectRef>
+          <a:fontRef idx="minor">
+            <a:schemeClr val="tx1"/>
+          </a:fontRef>
+        </p:style>
+      </p:cxnSp>
+      <p:cxnSp>
+        <p:nvCxnSpPr>
+          <p:cNvPr id="96" name="连接符: 曲线 95">
+            <a:extLst>
+              <a:ext uri="{FF2B5EF4-FFF2-40B4-BE49-F238E27FC236}">
+                <a16:creationId xmlns:a16="http://schemas.microsoft.com/office/drawing/2014/main" id="{70509AC5-74F5-43BA-81E2-BF2ADB313EFA}"/>
+              </a:ext>
+            </a:extLst>
+          </p:cNvPr>
+          <p:cNvCxnSpPr>
+            <a:endCxn id="92" idx="1"/>
+          </p:cNvCxnSpPr>
+          <p:nvPr/>
+        </p:nvCxnSpPr>
+        <p:spPr>
+          <a:xfrm rot="16200000" flipH="1">
+            <a:off x="1921086" y="2666258"/>
+            <a:ext cx="554671" cy="382982"/>
+          </a:xfrm>
+          <a:prstGeom prst="curvedConnector3">
+            <a:avLst/>
+          </a:prstGeom>
+          <a:ln w="28575">
+            <a:solidFill>
+              <a:schemeClr val="tx1"/>
+            </a:solidFill>
+            <a:tailEnd type="triangle"/>
+          </a:ln>
+        </p:spPr>
+        <p:style>
+          <a:lnRef idx="1">
+            <a:schemeClr val="accent1"/>
+          </a:lnRef>
+          <a:fillRef idx="0">
+            <a:schemeClr val="accent1"/>
+          </a:fillRef>
+          <a:effectRef idx="0">
+            <a:schemeClr val="accent1"/>
+          </a:effectRef>
+          <a:fontRef idx="minor">
+            <a:schemeClr val="tx1"/>
+          </a:fontRef>
+        </p:style>
+      </p:cxnSp>
+      <p:sp>
+        <p:nvSpPr>
+          <p:cNvPr id="97" name="椭圆 96">
+            <a:extLst>
+              <a:ext uri="{FF2B5EF4-FFF2-40B4-BE49-F238E27FC236}">
+                <a16:creationId xmlns:a16="http://schemas.microsoft.com/office/drawing/2014/main" id="{06A4A422-C96C-4085-9B3C-DDB254052E6B}"/>
+              </a:ext>
+            </a:extLst>
+          </p:cNvPr>
+          <p:cNvSpPr/>
+          <p:nvPr/>
+        </p:nvSpPr>
+        <p:spPr>
+          <a:xfrm>
+            <a:off x="1214856" y="2512130"/>
+            <a:ext cx="136566" cy="136566"/>
+          </a:xfrm>
+          <a:prstGeom prst="ellipse">
+            <a:avLst/>
+          </a:prstGeom>
+          <a:solidFill>
+            <a:schemeClr val="tx1"/>
+          </a:solidFill>
+          <a:ln>
+            <a:noFill/>
+          </a:ln>
+        </p:spPr>
+        <p:style>
+          <a:lnRef idx="2">
+            <a:schemeClr val="accent1">
+              <a:shade val="50000"/>
+            </a:schemeClr>
+          </a:lnRef>
+          <a:fillRef idx="1">
+            <a:schemeClr val="accent1"/>
+          </a:fillRef>
+          <a:effectRef idx="0">
+            <a:schemeClr val="accent1"/>
+          </a:effectRef>
+          <a:fontRef idx="minor">
+            <a:schemeClr val="lt1"/>
+          </a:fontRef>
+        </p:style>
+        <p:txBody>
+          <a:bodyPr rtlCol="0" anchor="ctr"/>
+          <a:lstStyle/>
+          <a:p>
+            <a:pPr algn="ctr"/>
+            <a:endParaRPr lang="zh-CN" altLang="en-US"/>
+          </a:p>
+        </p:txBody>
+      </p:sp>
+      <p:sp>
+        <p:nvSpPr>
+          <p:cNvPr id="98" name="椭圆 97">
+            <a:extLst>
+              <a:ext uri="{FF2B5EF4-FFF2-40B4-BE49-F238E27FC236}">
+                <a16:creationId xmlns:a16="http://schemas.microsoft.com/office/drawing/2014/main" id="{04B07519-6BB4-4550-A16F-6E29878FCFAB}"/>
+              </a:ext>
+            </a:extLst>
+          </p:cNvPr>
+          <p:cNvSpPr/>
+          <p:nvPr/>
+        </p:nvSpPr>
+        <p:spPr>
+          <a:xfrm>
+            <a:off x="1938647" y="2512130"/>
+            <a:ext cx="136566" cy="136566"/>
+          </a:xfrm>
+          <a:prstGeom prst="ellipse">
+            <a:avLst/>
+          </a:prstGeom>
+          <a:solidFill>
+            <a:schemeClr val="tx1"/>
+          </a:solidFill>
+          <a:ln>
+            <a:noFill/>
+          </a:ln>
+        </p:spPr>
+        <p:style>
+          <a:lnRef idx="2">
+            <a:schemeClr val="accent1">
+              <a:shade val="50000"/>
+            </a:schemeClr>
+          </a:lnRef>
+          <a:fillRef idx="1">
+            <a:schemeClr val="accent1"/>
+          </a:fillRef>
+          <a:effectRef idx="0">
+            <a:schemeClr val="accent1"/>
+          </a:effectRef>
+          <a:fontRef idx="minor">
+            <a:schemeClr val="lt1"/>
+          </a:fontRef>
+        </p:style>
+        <p:txBody>
+          <a:bodyPr rtlCol="0" anchor="ctr"/>
+          <a:lstStyle/>
+          <a:p>
+            <a:pPr algn="ctr"/>
+            <a:endParaRPr lang="zh-CN" altLang="en-US"/>
+          </a:p>
+        </p:txBody>
+      </p:sp>
+      <p:sp>
+        <p:nvSpPr>
+          <p:cNvPr id="99" name="文本框 98">
+            <a:extLst>
+              <a:ext uri="{FF2B5EF4-FFF2-40B4-BE49-F238E27FC236}">
+                <a16:creationId xmlns:a16="http://schemas.microsoft.com/office/drawing/2014/main" id="{0B37F8D0-F2BC-4E2A-BE38-76CD57067338}"/>
+              </a:ext>
+            </a:extLst>
+          </p:cNvPr>
+          <p:cNvSpPr txBox="1"/>
+          <p:nvPr/>
+        </p:nvSpPr>
+        <p:spPr>
+          <a:xfrm>
+            <a:off x="353248" y="2673378"/>
+            <a:ext cx="595035" cy="338554"/>
+          </a:xfrm>
+          <a:prstGeom prst="rect">
+            <a:avLst/>
+          </a:prstGeom>
+          <a:noFill/>
+        </p:spPr>
+        <p:txBody>
+          <a:bodyPr wrap="none" rtlCol="0">
+            <a:spAutoFit/>
+          </a:bodyPr>
+          <a:lstStyle/>
+          <a:p>
+            <a:r>
+              <a:rPr lang="zh-CN" altLang="en-US" sz="1600" dirty="0">
+                <a:latin typeface="宋体" panose="02010600030101010101" pitchFamily="2" charset="-122"/>
+                <a:ea typeface="宋体" panose="02010600030101010101" pitchFamily="2" charset="-122"/>
+                <a:cs typeface="Times New Roman" panose="02020603050405020304" pitchFamily="18" charset="0"/>
+              </a:rPr>
+              <a:t>持有</a:t>
+            </a:r>
+          </a:p>
+        </p:txBody>
+      </p:sp>
+      <p:sp>
+        <p:nvSpPr>
+          <p:cNvPr id="100" name="文本框 99">
+            <a:extLst>
+              <a:ext uri="{FF2B5EF4-FFF2-40B4-BE49-F238E27FC236}">
+                <a16:creationId xmlns:a16="http://schemas.microsoft.com/office/drawing/2014/main" id="{3622FEDF-8F5A-46F6-8487-8E78BE86E07A}"/>
+              </a:ext>
+            </a:extLst>
+          </p:cNvPr>
+          <p:cNvSpPr txBox="1"/>
+          <p:nvPr/>
+        </p:nvSpPr>
+        <p:spPr>
+          <a:xfrm>
+            <a:off x="2295718" y="2648696"/>
+            <a:ext cx="595035" cy="338554"/>
+          </a:xfrm>
+          <a:prstGeom prst="rect">
+            <a:avLst/>
+          </a:prstGeom>
+          <a:noFill/>
+        </p:spPr>
+        <p:txBody>
+          <a:bodyPr wrap="none" rtlCol="0">
+            <a:spAutoFit/>
+          </a:bodyPr>
+          <a:lstStyle/>
+          <a:p>
+            <a:r>
+              <a:rPr lang="zh-CN" altLang="en-US" sz="1600" dirty="0">
+                <a:latin typeface="宋体" panose="02010600030101010101" pitchFamily="2" charset="-122"/>
+                <a:ea typeface="宋体" panose="02010600030101010101" pitchFamily="2" charset="-122"/>
+                <a:cs typeface="Times New Roman" panose="02020603050405020304" pitchFamily="18" charset="0"/>
+              </a:rPr>
+              <a:t>持有</a:t>
+            </a:r>
+          </a:p>
+        </p:txBody>
+      </p:sp>
+    </p:spTree>
+    <p:extLst>
+      <p:ext uri="{BB962C8B-B14F-4D97-AF65-F5344CB8AC3E}">
+        <p14:creationId xmlns:p14="http://schemas.microsoft.com/office/powerpoint/2010/main" val="2956412141"/>
+      </p:ext>
+    </p:extLst>
+  </p:cSld>
+  <p:clrMapOvr>
+    <a:masterClrMapping/>
+  </p:clrMapOvr>
+</p:sld>
+</file>
+
 <file path=ppt/slides/slide2.xml><?xml version="1.0" encoding="utf-8"?>
 <p:sld xmlns:a="http://schemas.openxmlformats.org/drawingml/2006/main" xmlns:r="http://schemas.openxmlformats.org/officeDocument/2006/relationships" xmlns:p="http://schemas.openxmlformats.org/presentationml/2006/main">
   <p:cSld>

--- a/docs/thesis/pictures.pptx
+++ b/docs/thesis/pictures.pptx
@@ -225,7 +225,7 @@
           <a:p>
             <a:fld id="{C66A8157-93E0-41B4-A777-149D15F966ED}" type="datetimeFigureOut">
               <a:rPr lang="zh-CN" altLang="en-US" smtClean="0"/>
-              <a:t>2026/4/29</a:t>
+              <a:t>2026/5/1</a:t>
             </a:fld>
             <a:endParaRPr lang="zh-CN" altLang="en-US"/>
           </a:p>
@@ -1074,7 +1074,7 @@
           <a:p>
             <a:fld id="{E7097275-6DBD-4E45-A854-72B05E8D007C}" type="datetimeFigureOut">
               <a:rPr lang="zh-CN" altLang="en-US" smtClean="0"/>
-              <a:t>2026/4/29</a:t>
+              <a:t>2026/5/1</a:t>
             </a:fld>
             <a:endParaRPr lang="zh-CN" altLang="en-US"/>
           </a:p>
@@ -1272,7 +1272,7 @@
           <a:p>
             <a:fld id="{E7097275-6DBD-4E45-A854-72B05E8D007C}" type="datetimeFigureOut">
               <a:rPr lang="zh-CN" altLang="en-US" smtClean="0"/>
-              <a:t>2026/4/29</a:t>
+              <a:t>2026/5/1</a:t>
             </a:fld>
             <a:endParaRPr lang="zh-CN" altLang="en-US"/>
           </a:p>
@@ -1480,7 +1480,7 @@
           <a:p>
             <a:fld id="{E7097275-6DBD-4E45-A854-72B05E8D007C}" type="datetimeFigureOut">
               <a:rPr lang="zh-CN" altLang="en-US" smtClean="0"/>
-              <a:t>2026/4/29</a:t>
+              <a:t>2026/5/1</a:t>
             </a:fld>
             <a:endParaRPr lang="zh-CN" altLang="en-US"/>
           </a:p>
@@ -1678,7 +1678,7 @@
           <a:p>
             <a:fld id="{E7097275-6DBD-4E45-A854-72B05E8D007C}" type="datetimeFigureOut">
               <a:rPr lang="zh-CN" altLang="en-US" smtClean="0"/>
-              <a:t>2026/4/29</a:t>
+              <a:t>2026/5/1</a:t>
             </a:fld>
             <a:endParaRPr lang="zh-CN" altLang="en-US"/>
           </a:p>
@@ -1953,7 +1953,7 @@
           <a:p>
             <a:fld id="{E7097275-6DBD-4E45-A854-72B05E8D007C}" type="datetimeFigureOut">
               <a:rPr lang="zh-CN" altLang="en-US" smtClean="0"/>
-              <a:t>2026/4/29</a:t>
+              <a:t>2026/5/1</a:t>
             </a:fld>
             <a:endParaRPr lang="zh-CN" altLang="en-US"/>
           </a:p>
@@ -2218,7 +2218,7 @@
           <a:p>
             <a:fld id="{E7097275-6DBD-4E45-A854-72B05E8D007C}" type="datetimeFigureOut">
               <a:rPr lang="zh-CN" altLang="en-US" smtClean="0"/>
-              <a:t>2026/4/29</a:t>
+              <a:t>2026/5/1</a:t>
             </a:fld>
             <a:endParaRPr lang="zh-CN" altLang="en-US"/>
           </a:p>
@@ -2630,7 +2630,7 @@
           <a:p>
             <a:fld id="{E7097275-6DBD-4E45-A854-72B05E8D007C}" type="datetimeFigureOut">
               <a:rPr lang="zh-CN" altLang="en-US" smtClean="0"/>
-              <a:t>2026/4/29</a:t>
+              <a:t>2026/5/1</a:t>
             </a:fld>
             <a:endParaRPr lang="zh-CN" altLang="en-US"/>
           </a:p>
@@ -2771,7 +2771,7 @@
           <a:p>
             <a:fld id="{E7097275-6DBD-4E45-A854-72B05E8D007C}" type="datetimeFigureOut">
               <a:rPr lang="zh-CN" altLang="en-US" smtClean="0"/>
-              <a:t>2026/4/29</a:t>
+              <a:t>2026/5/1</a:t>
             </a:fld>
             <a:endParaRPr lang="zh-CN" altLang="en-US"/>
           </a:p>
@@ -2884,7 +2884,7 @@
           <a:p>
             <a:fld id="{E7097275-6DBD-4E45-A854-72B05E8D007C}" type="datetimeFigureOut">
               <a:rPr lang="zh-CN" altLang="en-US" smtClean="0"/>
-              <a:t>2026/4/29</a:t>
+              <a:t>2026/5/1</a:t>
             </a:fld>
             <a:endParaRPr lang="zh-CN" altLang="en-US"/>
           </a:p>
@@ -3195,7 +3195,7 @@
           <a:p>
             <a:fld id="{E7097275-6DBD-4E45-A854-72B05E8D007C}" type="datetimeFigureOut">
               <a:rPr lang="zh-CN" altLang="en-US" smtClean="0"/>
-              <a:t>2026/4/29</a:t>
+              <a:t>2026/5/1</a:t>
             </a:fld>
             <a:endParaRPr lang="zh-CN" altLang="en-US"/>
           </a:p>
@@ -3483,7 +3483,7 @@
           <a:p>
             <a:fld id="{E7097275-6DBD-4E45-A854-72B05E8D007C}" type="datetimeFigureOut">
               <a:rPr lang="zh-CN" altLang="en-US" smtClean="0"/>
-              <a:t>2026/4/29</a:t>
+              <a:t>2026/5/1</a:t>
             </a:fld>
             <a:endParaRPr lang="zh-CN" altLang="en-US"/>
           </a:p>
@@ -3724,7 +3724,7 @@
           <a:p>
             <a:fld id="{E7097275-6DBD-4E45-A854-72B05E8D007C}" type="datetimeFigureOut">
               <a:rPr lang="zh-CN" altLang="en-US" smtClean="0"/>
-              <a:t>2026/4/29</a:t>
+              <a:t>2026/5/1</a:t>
             </a:fld>
             <a:endParaRPr lang="zh-CN" altLang="en-US"/>
           </a:p>
@@ -21235,8 +21235,8 @@
         </p:nvSpPr>
         <p:spPr>
           <a:xfrm>
-            <a:off x="584132" y="686895"/>
-            <a:ext cx="1027945" cy="2092881"/>
+            <a:off x="698435" y="519731"/>
+            <a:ext cx="1027945" cy="2308324"/>
           </a:xfrm>
           <a:prstGeom prst="rect">
             <a:avLst/>
@@ -21250,7 +21250,7 @@
           <a:lstStyle/>
           <a:p>
             <a:r>
-              <a:rPr lang="en-US" altLang="zh-CN" sz="1600" b="0" dirty="0">
+              <a:rPr lang="en-US" altLang="zh-CN" b="0" dirty="0">
                 <a:effectLst/>
                 <a:latin typeface="Times New Roman" panose="02020603050405020304" pitchFamily="18" charset="0"/>
                 <a:cs typeface="Times New Roman" panose="02020603050405020304" pitchFamily="18" charset="0"/>
@@ -21260,7 +21260,7 @@
           </a:p>
           <a:p>
             <a:r>
-              <a:rPr lang="en-US" altLang="zh-CN" sz="1600" b="0" dirty="0">
+              <a:rPr lang="en-US" altLang="zh-CN" b="0" dirty="0">
                 <a:effectLst/>
                 <a:latin typeface="Times New Roman" panose="02020603050405020304" pitchFamily="18" charset="0"/>
                 <a:cs typeface="Times New Roman" panose="02020603050405020304" pitchFamily="18" charset="0"/>
@@ -21270,14 +21270,14 @@
           </a:p>
           <a:p>
             <a:br>
-              <a:rPr lang="en-US" altLang="zh-CN" sz="1600" b="1" dirty="0">
+              <a:rPr lang="en-US" altLang="zh-CN" b="1" dirty="0">
                 <a:effectLst/>
                 <a:latin typeface="Times New Roman" panose="02020603050405020304" pitchFamily="18" charset="0"/>
                 <a:cs typeface="Times New Roman" panose="02020603050405020304" pitchFamily="18" charset="0"/>
               </a:rPr>
             </a:br>
             <a:r>
-              <a:rPr lang="en-US" altLang="zh-CN" sz="1600" b="1" dirty="0">
+              <a:rPr lang="en-US" altLang="zh-CN" b="1" dirty="0">
                 <a:effectLst/>
                 <a:latin typeface="Times New Roman" panose="02020603050405020304" pitchFamily="18" charset="0"/>
                 <a:cs typeface="Times New Roman" panose="02020603050405020304" pitchFamily="18" charset="0"/>
@@ -21287,7 +21287,7 @@
           </a:p>
           <a:p>
             <a:r>
-              <a:rPr lang="en-US" altLang="zh-CN" sz="1600" b="0" dirty="0">
+              <a:rPr lang="en-US" altLang="zh-CN" b="0" dirty="0">
                 <a:effectLst/>
                 <a:latin typeface="Times New Roman" panose="02020603050405020304" pitchFamily="18" charset="0"/>
                 <a:cs typeface="Times New Roman" panose="02020603050405020304" pitchFamily="18" charset="0"/>
@@ -21297,21 +21297,21 @@
           </a:p>
           <a:p>
             <a:r>
-              <a:rPr lang="en-US" altLang="zh-CN" sz="1600" b="0" dirty="0">
+              <a:rPr lang="en-US" altLang="zh-CN" b="0" dirty="0">
                 <a:effectLst/>
                 <a:latin typeface="Times New Roman" panose="02020603050405020304" pitchFamily="18" charset="0"/>
                 <a:cs typeface="Times New Roman" panose="02020603050405020304" pitchFamily="18" charset="0"/>
               </a:rPr>
               <a:t>    b = 4</a:t>
             </a:r>
-            <a:endParaRPr lang="en-US" altLang="zh-CN" sz="1600" dirty="0">
+            <a:endParaRPr lang="en-US" altLang="zh-CN" dirty="0">
               <a:latin typeface="Times New Roman" panose="02020603050405020304" pitchFamily="18" charset="0"/>
               <a:cs typeface="Times New Roman" panose="02020603050405020304" pitchFamily="18" charset="0"/>
             </a:endParaRPr>
           </a:p>
           <a:p>
             <a:r>
-              <a:rPr lang="en-US" altLang="zh-CN" sz="1600" b="0" dirty="0">
+              <a:rPr lang="en-US" altLang="zh-CN" b="0" dirty="0">
                 <a:effectLst/>
                 <a:latin typeface="Times New Roman" panose="02020603050405020304" pitchFamily="18" charset="0"/>
                 <a:cs typeface="Times New Roman" panose="02020603050405020304" pitchFamily="18" charset="0"/>
@@ -39706,7 +39706,7 @@
         <a:sysClr val="windowText" lastClr="000000"/>
       </a:dk1>
       <a:lt1>
-        <a:sysClr val="window" lastClr="CAEACE"/>
+        <a:sysClr val="window" lastClr="FFFFFF"/>
       </a:lt1>
       <a:dk2>
         <a:srgbClr val="44546A"/>
@@ -40001,7 +40001,7 @@
         <a:sysClr val="windowText" lastClr="000000"/>
       </a:dk1>
       <a:lt1>
-        <a:sysClr val="window" lastClr="CAEACE"/>
+        <a:sysClr val="window" lastClr="FFFFFF"/>
       </a:lt1>
       <a:dk2>
         <a:srgbClr val="44546A"/>

--- a/docs/thesis/pictures.pptx
+++ b/docs/thesis/pictures.pptx
@@ -127,7 +127,18 @@
   </p:defaultTextStyle>
   <p:extLst>
     <p:ext uri="{EFAFB233-063F-42B5-8137-9DF3F51BA10A}">
-      <p15:sldGuideLst xmlns:p15="http://schemas.microsoft.com/office/powerpoint/2012/main"/>
+      <p15:sldGuideLst xmlns:p15="http://schemas.microsoft.com/office/powerpoint/2012/main">
+        <p15:guide id="2" pos="3522" userDrawn="1">
+          <p15:clr>
+            <a:srgbClr val="A4A3A4"/>
+          </p15:clr>
+        </p15:guide>
+        <p15:guide id="3" orient="horz" pos="2160">
+          <p15:clr>
+            <a:srgbClr val="A4A3A4"/>
+          </p15:clr>
+        </p15:guide>
+      </p15:sldGuideLst>
     </p:ext>
   </p:extLst>
 </p:presentation>
@@ -227,7 +238,7 @@
           <a:p>
             <a:fld id="{C66A8157-93E0-41B4-A777-149D15F966ED}" type="datetimeFigureOut">
               <a:rPr lang="zh-CN" altLang="en-US" smtClean="0"/>
-              <a:t>2026/5/2</a:t>
+              <a:t>2026/5/3</a:t>
             </a:fld>
             <a:endParaRPr lang="zh-CN" altLang="en-US"/>
           </a:p>
@@ -1101,7 +1112,7 @@
           <a:p>
             <a:fld id="{E7097275-6DBD-4E45-A854-72B05E8D007C}" type="datetimeFigureOut">
               <a:rPr lang="zh-CN" altLang="en-US" smtClean="0"/>
-              <a:t>2026/5/2</a:t>
+              <a:t>2026/5/3</a:t>
             </a:fld>
             <a:endParaRPr lang="zh-CN" altLang="en-US"/>
           </a:p>
@@ -1299,7 +1310,7 @@
           <a:p>
             <a:fld id="{E7097275-6DBD-4E45-A854-72B05E8D007C}" type="datetimeFigureOut">
               <a:rPr lang="zh-CN" altLang="en-US" smtClean="0"/>
-              <a:t>2026/5/2</a:t>
+              <a:t>2026/5/3</a:t>
             </a:fld>
             <a:endParaRPr lang="zh-CN" altLang="en-US"/>
           </a:p>
@@ -1507,7 +1518,7 @@
           <a:p>
             <a:fld id="{E7097275-6DBD-4E45-A854-72B05E8D007C}" type="datetimeFigureOut">
               <a:rPr lang="zh-CN" altLang="en-US" smtClean="0"/>
-              <a:t>2026/5/2</a:t>
+              <a:t>2026/5/3</a:t>
             </a:fld>
             <a:endParaRPr lang="zh-CN" altLang="en-US"/>
           </a:p>
@@ -1705,7 +1716,7 @@
           <a:p>
             <a:fld id="{E7097275-6DBD-4E45-A854-72B05E8D007C}" type="datetimeFigureOut">
               <a:rPr lang="zh-CN" altLang="en-US" smtClean="0"/>
-              <a:t>2026/5/2</a:t>
+              <a:t>2026/5/3</a:t>
             </a:fld>
             <a:endParaRPr lang="zh-CN" altLang="en-US"/>
           </a:p>
@@ -1980,7 +1991,7 @@
           <a:p>
             <a:fld id="{E7097275-6DBD-4E45-A854-72B05E8D007C}" type="datetimeFigureOut">
               <a:rPr lang="zh-CN" altLang="en-US" smtClean="0"/>
-              <a:t>2026/5/2</a:t>
+              <a:t>2026/5/3</a:t>
             </a:fld>
             <a:endParaRPr lang="zh-CN" altLang="en-US"/>
           </a:p>
@@ -2245,7 +2256,7 @@
           <a:p>
             <a:fld id="{E7097275-6DBD-4E45-A854-72B05E8D007C}" type="datetimeFigureOut">
               <a:rPr lang="zh-CN" altLang="en-US" smtClean="0"/>
-              <a:t>2026/5/2</a:t>
+              <a:t>2026/5/3</a:t>
             </a:fld>
             <a:endParaRPr lang="zh-CN" altLang="en-US"/>
           </a:p>
@@ -2657,7 +2668,7 @@
           <a:p>
             <a:fld id="{E7097275-6DBD-4E45-A854-72B05E8D007C}" type="datetimeFigureOut">
               <a:rPr lang="zh-CN" altLang="en-US" smtClean="0"/>
-              <a:t>2026/5/2</a:t>
+              <a:t>2026/5/3</a:t>
             </a:fld>
             <a:endParaRPr lang="zh-CN" altLang="en-US"/>
           </a:p>
@@ -2798,7 +2809,7 @@
           <a:p>
             <a:fld id="{E7097275-6DBD-4E45-A854-72B05E8D007C}" type="datetimeFigureOut">
               <a:rPr lang="zh-CN" altLang="en-US" smtClean="0"/>
-              <a:t>2026/5/2</a:t>
+              <a:t>2026/5/3</a:t>
             </a:fld>
             <a:endParaRPr lang="zh-CN" altLang="en-US"/>
           </a:p>
@@ -2911,7 +2922,7 @@
           <a:p>
             <a:fld id="{E7097275-6DBD-4E45-A854-72B05E8D007C}" type="datetimeFigureOut">
               <a:rPr lang="zh-CN" altLang="en-US" smtClean="0"/>
-              <a:t>2026/5/2</a:t>
+              <a:t>2026/5/3</a:t>
             </a:fld>
             <a:endParaRPr lang="zh-CN" altLang="en-US"/>
           </a:p>
@@ -3222,7 +3233,7 @@
           <a:p>
             <a:fld id="{E7097275-6DBD-4E45-A854-72B05E8D007C}" type="datetimeFigureOut">
               <a:rPr lang="zh-CN" altLang="en-US" smtClean="0"/>
-              <a:t>2026/5/2</a:t>
+              <a:t>2026/5/3</a:t>
             </a:fld>
             <a:endParaRPr lang="zh-CN" altLang="en-US"/>
           </a:p>
@@ -3510,7 +3521,7 @@
           <a:p>
             <a:fld id="{E7097275-6DBD-4E45-A854-72B05E8D007C}" type="datetimeFigureOut">
               <a:rPr lang="zh-CN" altLang="en-US" smtClean="0"/>
-              <a:t>2026/5/2</a:t>
+              <a:t>2026/5/3</a:t>
             </a:fld>
             <a:endParaRPr lang="zh-CN" altLang="en-US"/>
           </a:p>
@@ -3751,7 +3762,7 @@
           <a:p>
             <a:fld id="{E7097275-6DBD-4E45-A854-72B05E8D007C}" type="datetimeFigureOut">
               <a:rPr lang="zh-CN" altLang="en-US" smtClean="0"/>
-              <a:t>2026/5/2</a:t>
+              <a:t>2026/5/3</a:t>
             </a:fld>
             <a:endParaRPr lang="zh-CN" altLang="en-US"/>
           </a:p>
@@ -10912,8 +10923,8 @@
         </p:nvSpPr>
         <p:spPr>
           <a:xfrm>
-            <a:off x="4450666" y="2400586"/>
-            <a:ext cx="3555782" cy="369332"/>
+            <a:off x="3632780" y="2360743"/>
+            <a:ext cx="3927678" cy="400110"/>
           </a:xfrm>
           <a:prstGeom prst="rect">
             <a:avLst/>
@@ -10927,7 +10938,7 @@
           <a:lstStyle/>
           <a:p>
             <a:r>
-              <a:rPr lang="zh-CN" altLang="en-US" b="1" dirty="0">
+              <a:rPr lang="zh-CN" altLang="en-US" sz="2000" b="1" dirty="0">
                 <a:latin typeface="Times New Roman" panose="02020603050405020304" pitchFamily="18" charset="0"/>
                 <a:ea typeface="宋体" panose="02010600030101010101" pitchFamily="2" charset="-122"/>
                 <a:cs typeface="Times New Roman" panose="02020603050405020304" pitchFamily="18" charset="0"/>
@@ -10935,7 +10946,7 @@
               <a:t>①</a:t>
             </a:r>
             <a:r>
-              <a:rPr lang="zh-CN" altLang="en-US" b="1" dirty="0">
+              <a:rPr lang="zh-CN" altLang="en-US" sz="2000" b="1" dirty="0">
                 <a:latin typeface="宋体" panose="02010600030101010101" pitchFamily="2" charset="-122"/>
                 <a:ea typeface="宋体" panose="02010600030101010101" pitchFamily="2" charset="-122"/>
               </a:rPr>
@@ -10959,9 +10970,9 @@
         <p:grpSpPr>
           <a:xfrm>
             <a:off x="296934" y="383086"/>
-            <a:ext cx="10598676" cy="1332843"/>
+            <a:ext cx="10598676" cy="1357656"/>
             <a:chOff x="296934" y="371210"/>
-            <a:chExt cx="10598676" cy="1332843"/>
+            <a:chExt cx="10598676" cy="1357656"/>
           </a:xfrm>
         </p:grpSpPr>
         <p:sp>
@@ -11013,7 +11024,7 @@
             <a:p>
               <a:pPr algn="ctr"/>
               <a:r>
-                <a:rPr lang="en-US" altLang="zh-CN" dirty="0">
+                <a:rPr lang="en-US" altLang="zh-CN" b="1" dirty="0">
                   <a:solidFill>
                     <a:schemeClr val="tx1"/>
                   </a:solidFill>
@@ -11022,7 +11033,7 @@
                 </a:rPr>
                 <a:t>A</a:t>
               </a:r>
-              <a:endParaRPr lang="zh-CN" altLang="en-US" dirty="0">
+              <a:endParaRPr lang="zh-CN" altLang="en-US" b="1" dirty="0">
                 <a:solidFill>
                   <a:schemeClr val="tx1"/>
                 </a:solidFill>
@@ -11081,7 +11092,7 @@
             <a:p>
               <a:pPr algn="ctr"/>
               <a:r>
-                <a:rPr lang="en-US" altLang="zh-CN" dirty="0">
+                <a:rPr lang="en-US" altLang="zh-CN" b="1" dirty="0">
                   <a:solidFill>
                     <a:schemeClr val="tx1"/>
                   </a:solidFill>
@@ -11090,7 +11101,7 @@
                 </a:rPr>
                 <a:t>B</a:t>
               </a:r>
-              <a:endParaRPr lang="zh-CN" altLang="en-US" dirty="0">
+              <a:endParaRPr lang="zh-CN" altLang="en-US" b="1" dirty="0">
                 <a:solidFill>
                   <a:schemeClr val="tx1"/>
                 </a:solidFill>
@@ -11149,7 +11160,7 @@
             <a:p>
               <a:pPr algn="ctr"/>
               <a:r>
-                <a:rPr lang="en-US" altLang="zh-CN" dirty="0">
+                <a:rPr lang="en-US" altLang="zh-CN" b="1" dirty="0">
                   <a:solidFill>
                     <a:schemeClr val="tx1"/>
                   </a:solidFill>
@@ -11158,7 +11169,7 @@
                 </a:rPr>
                 <a:t>C</a:t>
               </a:r>
-              <a:endParaRPr lang="zh-CN" altLang="en-US" dirty="0">
+              <a:endParaRPr lang="zh-CN" altLang="en-US" b="1" dirty="0">
                 <a:solidFill>
                   <a:schemeClr val="tx1"/>
                 </a:solidFill>
@@ -11235,7 +11246,7 @@
           <p:spPr>
             <a:xfrm>
               <a:off x="3726656" y="1359534"/>
-              <a:ext cx="862737" cy="338554"/>
+              <a:ext cx="947695" cy="369332"/>
             </a:xfrm>
             <a:prstGeom prst="rect">
               <a:avLst/>
@@ -11249,7 +11260,7 @@
             <a:lstStyle/>
             <a:p>
               <a:r>
-                <a:rPr lang="en-US" altLang="zh-CN" sz="1600" dirty="0">
+                <a:rPr lang="en-US" altLang="zh-CN" dirty="0">
                   <a:latin typeface="Times New Roman" panose="02020603050405020304" pitchFamily="18" charset="0"/>
                   <a:ea typeface="宋体" panose="02010600030101010101" pitchFamily="2" charset="-122"/>
                   <a:cs typeface="Times New Roman" panose="02020603050405020304" pitchFamily="18" charset="0"/>
@@ -11257,7 +11268,7 @@
                 <a:t>Eden </a:t>
               </a:r>
               <a:r>
-                <a:rPr lang="zh-CN" altLang="en-US" sz="1600" dirty="0">
+                <a:rPr lang="zh-CN" altLang="en-US" dirty="0">
                   <a:latin typeface="Times New Roman" panose="02020603050405020304" pitchFamily="18" charset="0"/>
                   <a:ea typeface="宋体" panose="02010600030101010101" pitchFamily="2" charset="-122"/>
                   <a:cs typeface="Times New Roman" panose="02020603050405020304" pitchFamily="18" charset="0"/>
@@ -11282,7 +11293,7 @@
           <p:spPr>
             <a:xfrm>
               <a:off x="8073188" y="1359534"/>
-              <a:ext cx="1160895" cy="338554"/>
+              <a:ext cx="1281120" cy="369332"/>
             </a:xfrm>
             <a:prstGeom prst="rect">
               <a:avLst/>
@@ -11296,7 +11307,7 @@
             <a:lstStyle/>
             <a:p>
               <a:r>
-                <a:rPr lang="en-US" altLang="zh-CN" sz="1600" dirty="0">
+                <a:rPr lang="en-US" altLang="zh-CN" dirty="0">
                   <a:latin typeface="Times New Roman" panose="02020603050405020304" pitchFamily="18" charset="0"/>
                   <a:ea typeface="宋体" panose="02010600030101010101" pitchFamily="2" charset="-122"/>
                   <a:cs typeface="Times New Roman" panose="02020603050405020304" pitchFamily="18" charset="0"/>
@@ -11304,7 +11315,7 @@
                 <a:t>Survivor </a:t>
               </a:r>
               <a:r>
-                <a:rPr lang="zh-CN" altLang="en-US" sz="1600" dirty="0">
+                <a:rPr lang="zh-CN" altLang="en-US" dirty="0">
                   <a:latin typeface="Times New Roman" panose="02020603050405020304" pitchFamily="18" charset="0"/>
                   <a:ea typeface="宋体" panose="02010600030101010101" pitchFamily="2" charset="-122"/>
                   <a:cs typeface="Times New Roman" panose="02020603050405020304" pitchFamily="18" charset="0"/>
@@ -11363,7 +11374,7 @@
             <a:p>
               <a:pPr algn="ctr"/>
               <a:r>
-                <a:rPr lang="zh-CN" altLang="en-US" dirty="0">
+                <a:rPr lang="zh-CN" altLang="en-US" b="1" dirty="0">
                   <a:solidFill>
                     <a:schemeClr val="tx1"/>
                   </a:solidFill>
@@ -11424,7 +11435,7 @@
             <a:p>
               <a:pPr algn="ctr"/>
               <a:r>
-                <a:rPr lang="en-US" altLang="zh-CN" dirty="0">
+                <a:rPr lang="en-US" altLang="zh-CN" b="1" dirty="0">
                   <a:solidFill>
                     <a:schemeClr val="tx1"/>
                   </a:solidFill>
@@ -11433,7 +11444,7 @@
                 </a:rPr>
                 <a:t>D</a:t>
               </a:r>
-              <a:endParaRPr lang="zh-CN" altLang="en-US" dirty="0">
+              <a:endParaRPr lang="zh-CN" altLang="en-US" b="1" dirty="0">
                 <a:solidFill>
                   <a:schemeClr val="tx1"/>
                 </a:solidFill>
@@ -11735,8 +11746,8 @@
         </p:nvSpPr>
         <p:spPr>
           <a:xfrm>
-            <a:off x="4589393" y="6467094"/>
-            <a:ext cx="3232616" cy="369332"/>
+            <a:off x="3790166" y="6457890"/>
+            <a:ext cx="3603872" cy="400110"/>
           </a:xfrm>
           <a:prstGeom prst="rect">
             <a:avLst/>
@@ -11750,7 +11761,7 @@
           <a:lstStyle/>
           <a:p>
             <a:r>
-              <a:rPr lang="zh-CN" altLang="en-US" b="1" dirty="0">
+              <a:rPr lang="zh-CN" altLang="en-US" sz="2000" b="1" dirty="0">
                 <a:latin typeface="Times New Roman" panose="02020603050405020304" pitchFamily="18" charset="0"/>
                 <a:ea typeface="宋体" panose="02010600030101010101" pitchFamily="2" charset="-122"/>
                 <a:cs typeface="Times New Roman" panose="02020603050405020304" pitchFamily="18" charset="0"/>
@@ -11758,7 +11769,7 @@
               <a:t>② </a:t>
             </a:r>
             <a:r>
-              <a:rPr lang="zh-CN" altLang="en-US" b="1" dirty="0">
+              <a:rPr lang="zh-CN" altLang="en-US" sz="2000" b="1" dirty="0">
                 <a:latin typeface="宋体" panose="02010600030101010101" pitchFamily="2" charset="-122"/>
                 <a:ea typeface="宋体" panose="02010600030101010101" pitchFamily="2" charset="-122"/>
               </a:rPr>
@@ -11782,9 +11793,9 @@
         <p:grpSpPr>
           <a:xfrm>
             <a:off x="296934" y="3413562"/>
-            <a:ext cx="10598676" cy="2942283"/>
+            <a:ext cx="10598676" cy="2973061"/>
             <a:chOff x="296934" y="3486440"/>
-            <a:chExt cx="10598676" cy="2942283"/>
+            <a:chExt cx="10598676" cy="2973061"/>
           </a:xfrm>
         </p:grpSpPr>
         <p:sp>
@@ -11837,7 +11848,7 @@
             <a:p>
               <a:pPr algn="ctr"/>
               <a:r>
-                <a:rPr lang="en-US" altLang="zh-CN" dirty="0">
+                <a:rPr lang="en-US" altLang="zh-CN" b="1" dirty="0">
                   <a:solidFill>
                     <a:schemeClr val="tx1"/>
                   </a:solidFill>
@@ -11846,7 +11857,7 @@
                 </a:rPr>
                 <a:t>A</a:t>
               </a:r>
-              <a:endParaRPr lang="zh-CN" altLang="en-US" dirty="0">
+              <a:endParaRPr lang="zh-CN" altLang="en-US" b="1" dirty="0">
                 <a:solidFill>
                   <a:schemeClr val="tx1"/>
                 </a:solidFill>
@@ -11906,7 +11917,7 @@
             <a:p>
               <a:pPr algn="ctr"/>
               <a:r>
-                <a:rPr lang="en-US" altLang="zh-CN" dirty="0">
+                <a:rPr lang="en-US" altLang="zh-CN" b="1" dirty="0">
                   <a:solidFill>
                     <a:schemeClr val="tx1"/>
                   </a:solidFill>
@@ -11915,7 +11926,7 @@
                 </a:rPr>
                 <a:t>B</a:t>
               </a:r>
-              <a:endParaRPr lang="zh-CN" altLang="en-US" dirty="0">
+              <a:endParaRPr lang="zh-CN" altLang="en-US" b="1" dirty="0">
                 <a:solidFill>
                   <a:schemeClr val="tx1"/>
                 </a:solidFill>
@@ -11974,7 +11985,7 @@
             <a:p>
               <a:pPr algn="ctr"/>
               <a:r>
-                <a:rPr lang="en-US" altLang="zh-CN" dirty="0">
+                <a:rPr lang="en-US" altLang="zh-CN" b="1" dirty="0">
                   <a:solidFill>
                     <a:schemeClr val="tx1"/>
                   </a:solidFill>
@@ -11983,7 +11994,7 @@
                 </a:rPr>
                 <a:t>C</a:t>
               </a:r>
-              <a:endParaRPr lang="zh-CN" altLang="en-US" dirty="0">
+              <a:endParaRPr lang="zh-CN" altLang="en-US" b="1" dirty="0">
                 <a:solidFill>
                   <a:schemeClr val="tx1"/>
                 </a:solidFill>
@@ -12060,7 +12071,7 @@
           <p:spPr>
             <a:xfrm>
               <a:off x="3726656" y="4854839"/>
-              <a:ext cx="862737" cy="338554"/>
+              <a:ext cx="947695" cy="369332"/>
             </a:xfrm>
             <a:prstGeom prst="rect">
               <a:avLst/>
@@ -12074,7 +12085,7 @@
             <a:lstStyle/>
             <a:p>
               <a:r>
-                <a:rPr lang="en-US" altLang="zh-CN" sz="1600" dirty="0">
+                <a:rPr lang="en-US" altLang="zh-CN" dirty="0">
                   <a:latin typeface="Times New Roman" panose="02020603050405020304" pitchFamily="18" charset="0"/>
                   <a:ea typeface="宋体" panose="02010600030101010101" pitchFamily="2" charset="-122"/>
                   <a:cs typeface="Times New Roman" panose="02020603050405020304" pitchFamily="18" charset="0"/>
@@ -12082,7 +12093,7 @@
                 <a:t>Eden </a:t>
               </a:r>
               <a:r>
-                <a:rPr lang="zh-CN" altLang="en-US" sz="1600" dirty="0">
+                <a:rPr lang="zh-CN" altLang="en-US" dirty="0">
                   <a:latin typeface="Times New Roman" panose="02020603050405020304" pitchFamily="18" charset="0"/>
                   <a:ea typeface="宋体" panose="02010600030101010101" pitchFamily="2" charset="-122"/>
                   <a:cs typeface="Times New Roman" panose="02020603050405020304" pitchFamily="18" charset="0"/>
@@ -12107,7 +12118,7 @@
           <p:spPr>
             <a:xfrm>
               <a:off x="8073188" y="4854839"/>
-              <a:ext cx="1160895" cy="338554"/>
+              <a:ext cx="1281120" cy="369332"/>
             </a:xfrm>
             <a:prstGeom prst="rect">
               <a:avLst/>
@@ -12121,7 +12132,7 @@
             <a:lstStyle/>
             <a:p>
               <a:r>
-                <a:rPr lang="en-US" altLang="zh-CN" sz="1600" dirty="0">
+                <a:rPr lang="en-US" altLang="zh-CN" dirty="0">
                   <a:latin typeface="Times New Roman" panose="02020603050405020304" pitchFamily="18" charset="0"/>
                   <a:ea typeface="宋体" panose="02010600030101010101" pitchFamily="2" charset="-122"/>
                   <a:cs typeface="Times New Roman" panose="02020603050405020304" pitchFamily="18" charset="0"/>
@@ -12129,7 +12140,7 @@
                 <a:t>Survivor </a:t>
               </a:r>
               <a:r>
-                <a:rPr lang="zh-CN" altLang="en-US" sz="1600" dirty="0">
+                <a:rPr lang="zh-CN" altLang="en-US" dirty="0">
                   <a:latin typeface="Times New Roman" panose="02020603050405020304" pitchFamily="18" charset="0"/>
                   <a:ea typeface="宋体" panose="02010600030101010101" pitchFamily="2" charset="-122"/>
                   <a:cs typeface="Times New Roman" panose="02020603050405020304" pitchFamily="18" charset="0"/>
@@ -12188,7 +12199,7 @@
             <a:p>
               <a:pPr algn="ctr"/>
               <a:r>
-                <a:rPr lang="zh-CN" altLang="en-US" dirty="0">
+                <a:rPr lang="zh-CN" altLang="en-US" b="1" dirty="0">
                   <a:solidFill>
                     <a:schemeClr val="tx1"/>
                   </a:solidFill>
@@ -12249,7 +12260,7 @@
             <a:p>
               <a:pPr algn="ctr"/>
               <a:r>
-                <a:rPr lang="en-US" altLang="zh-CN" dirty="0">
+                <a:rPr lang="en-US" altLang="zh-CN" b="1" dirty="0">
                   <a:solidFill>
                     <a:schemeClr val="tx1"/>
                   </a:solidFill>
@@ -12258,7 +12269,7 @@
                 </a:rPr>
                 <a:t>D</a:t>
               </a:r>
-              <a:endParaRPr lang="zh-CN" altLang="en-US" dirty="0">
+              <a:endParaRPr lang="zh-CN" altLang="en-US" b="1" dirty="0">
                 <a:solidFill>
                   <a:schemeClr val="tx1"/>
                 </a:solidFill>
@@ -12502,7 +12513,7 @@
             <a:p>
               <a:pPr algn="ctr"/>
               <a:r>
-                <a:rPr lang="en-US" altLang="zh-CN" dirty="0">
+                <a:rPr lang="en-US" altLang="zh-CN" b="1" dirty="0">
                   <a:solidFill>
                     <a:schemeClr val="tx1"/>
                   </a:solidFill>
@@ -12511,7 +12522,7 @@
                 </a:rPr>
                 <a:t>A</a:t>
               </a:r>
-              <a:endParaRPr lang="zh-CN" altLang="en-US" dirty="0">
+              <a:endParaRPr lang="zh-CN" altLang="en-US" b="1" dirty="0">
                 <a:solidFill>
                   <a:schemeClr val="tx1"/>
                 </a:solidFill>
@@ -12570,7 +12581,7 @@
             <a:p>
               <a:pPr algn="ctr"/>
               <a:r>
-                <a:rPr lang="en-US" altLang="zh-CN" dirty="0">
+                <a:rPr lang="en-US" altLang="zh-CN" b="1" dirty="0">
                   <a:solidFill>
                     <a:schemeClr val="tx1"/>
                   </a:solidFill>
@@ -12579,7 +12590,7 @@
                 </a:rPr>
                 <a:t>B</a:t>
               </a:r>
-              <a:endParaRPr lang="zh-CN" altLang="en-US" dirty="0">
+              <a:endParaRPr lang="zh-CN" altLang="en-US" b="1" dirty="0">
                 <a:solidFill>
                   <a:schemeClr val="tx1"/>
                 </a:solidFill>
@@ -12699,7 +12710,7 @@
           <p:spPr>
             <a:xfrm>
               <a:off x="2721088" y="6090169"/>
-              <a:ext cx="3254417" cy="338554"/>
+              <a:ext cx="3647152" cy="369332"/>
             </a:xfrm>
             <a:prstGeom prst="rect">
               <a:avLst/>
@@ -12713,7 +12724,7 @@
             <a:lstStyle/>
             <a:p>
               <a:r>
-                <a:rPr lang="zh-CN" altLang="en-US" sz="1600" dirty="0">
+                <a:rPr lang="zh-CN" altLang="en-US" b="1" dirty="0">
                   <a:latin typeface="Times New Roman" panose="02020603050405020304" pitchFamily="18" charset="0"/>
                   <a:ea typeface="宋体" panose="02010600030101010101" pitchFamily="2" charset="-122"/>
                   <a:cs typeface="Times New Roman" panose="02020603050405020304" pitchFamily="18" charset="0"/>
@@ -12786,7 +12797,7 @@
           <p:spPr>
             <a:xfrm>
               <a:off x="3809372" y="5406872"/>
-              <a:ext cx="1560042" cy="338554"/>
+              <a:ext cx="1107996" cy="369332"/>
             </a:xfrm>
             <a:prstGeom prst="rect">
               <a:avLst/>
@@ -12800,20 +12811,12 @@
             <a:lstStyle/>
             <a:p>
               <a:r>
-                <a:rPr lang="en-US" altLang="zh-CN" sz="1600" dirty="0">
+                <a:rPr lang="zh-CN" altLang="en-US" b="1" dirty="0">
                   <a:latin typeface="Times New Roman" panose="02020603050405020304" pitchFamily="18" charset="0"/>
                   <a:ea typeface="宋体" panose="02010600030101010101" pitchFamily="2" charset="-122"/>
                   <a:cs typeface="Times New Roman" panose="02020603050405020304" pitchFamily="18" charset="0"/>
                 </a:rPr>
-                <a:t>forwarding </a:t>
-              </a:r>
-              <a:r>
-                <a:rPr lang="zh-CN" altLang="en-US" sz="1600" dirty="0">
-                  <a:latin typeface="Times New Roman" panose="02020603050405020304" pitchFamily="18" charset="0"/>
-                  <a:ea typeface="宋体" panose="02010600030101010101" pitchFamily="2" charset="-122"/>
-                  <a:cs typeface="Times New Roman" panose="02020603050405020304" pitchFamily="18" charset="0"/>
-                </a:rPr>
-                <a:t>指针</a:t>
+                <a:t>转发指针</a:t>
               </a:r>
             </a:p>
           </p:txBody>
@@ -12881,7 +12884,7 @@
           <p:spPr>
             <a:xfrm>
               <a:off x="3908494" y="3486440"/>
-              <a:ext cx="1560042" cy="338554"/>
+              <a:ext cx="1107996" cy="369332"/>
             </a:xfrm>
             <a:prstGeom prst="rect">
               <a:avLst/>
@@ -12895,20 +12898,12 @@
             <a:lstStyle/>
             <a:p>
               <a:r>
-                <a:rPr lang="en-US" altLang="zh-CN" sz="1600" dirty="0">
+                <a:rPr lang="zh-CN" altLang="en-US" b="1" dirty="0">
                   <a:latin typeface="Times New Roman" panose="02020603050405020304" pitchFamily="18" charset="0"/>
                   <a:ea typeface="宋体" panose="02010600030101010101" pitchFamily="2" charset="-122"/>
                   <a:cs typeface="Times New Roman" panose="02020603050405020304" pitchFamily="18" charset="0"/>
                 </a:rPr>
-                <a:t>forwarding </a:t>
-              </a:r>
-              <a:r>
-                <a:rPr lang="zh-CN" altLang="en-US" sz="1600" dirty="0">
-                  <a:latin typeface="Times New Roman" panose="02020603050405020304" pitchFamily="18" charset="0"/>
-                  <a:ea typeface="宋体" panose="02010600030101010101" pitchFamily="2" charset="-122"/>
-                  <a:cs typeface="Times New Roman" panose="02020603050405020304" pitchFamily="18" charset="0"/>
-                </a:rPr>
-                <a:t>指针</a:t>
+                <a:t>转发指针</a:t>
               </a:r>
             </a:p>
           </p:txBody>
@@ -12958,8 +12953,8 @@
         </p:nvSpPr>
         <p:spPr>
           <a:xfrm>
-            <a:off x="3756245" y="2888142"/>
-            <a:ext cx="4944623" cy="369332"/>
+            <a:off x="2806993" y="2862299"/>
+            <a:ext cx="5469959" cy="400110"/>
           </a:xfrm>
           <a:prstGeom prst="rect">
             <a:avLst/>
@@ -12973,7 +12968,7 @@
           <a:lstStyle/>
           <a:p>
             <a:r>
-              <a:rPr lang="zh-CN" altLang="en-US" b="1" dirty="0">
+              <a:rPr lang="zh-CN" altLang="en-US" sz="2000" b="1" dirty="0">
                 <a:latin typeface="Times New Roman" panose="02020603050405020304" pitchFamily="18" charset="0"/>
                 <a:ea typeface="宋体" panose="02010600030101010101" pitchFamily="2" charset="-122"/>
                 <a:cs typeface="Times New Roman" panose="02020603050405020304" pitchFamily="18" charset="0"/>
@@ -12981,7 +12976,7 @@
               <a:t>③ 扫描 </a:t>
             </a:r>
             <a:r>
-              <a:rPr lang="en-US" altLang="zh-CN" b="1" dirty="0">
+              <a:rPr lang="en-US" altLang="zh-CN" sz="2000" b="1" dirty="0">
                 <a:latin typeface="Times New Roman" panose="02020603050405020304" pitchFamily="18" charset="0"/>
                 <a:ea typeface="宋体" panose="02010600030101010101" pitchFamily="2" charset="-122"/>
                 <a:cs typeface="Times New Roman" panose="02020603050405020304" pitchFamily="18" charset="0"/>
@@ -12989,14 +12984,14 @@
               <a:t>Survivor </a:t>
             </a:r>
             <a:r>
-              <a:rPr lang="zh-CN" altLang="en-US" b="1" dirty="0">
+              <a:rPr lang="zh-CN" altLang="en-US" sz="2000" b="1" dirty="0">
                 <a:latin typeface="Times New Roman" panose="02020603050405020304" pitchFamily="18" charset="0"/>
                 <a:ea typeface="宋体" panose="02010600030101010101" pitchFamily="2" charset="-122"/>
                 <a:cs typeface="Times New Roman" panose="02020603050405020304" pitchFamily="18" charset="0"/>
               </a:rPr>
               <a:t>区，处理新复制对象的子引用</a:t>
             </a:r>
-            <a:endParaRPr lang="zh-CN" altLang="en-US" b="1" dirty="0">
+            <a:endParaRPr lang="zh-CN" altLang="en-US" sz="2000" b="1" dirty="0">
               <a:latin typeface="宋体" panose="02010600030101010101" pitchFamily="2" charset="-122"/>
               <a:ea typeface="宋体" panose="02010600030101010101" pitchFamily="2" charset="-122"/>
             </a:endParaRPr>
@@ -13053,7 +13048,7 @@
           <a:p>
             <a:pPr algn="ctr"/>
             <a:r>
-              <a:rPr lang="en-US" altLang="zh-CN" dirty="0">
+              <a:rPr lang="en-US" altLang="zh-CN" b="1" dirty="0">
                 <a:solidFill>
                   <a:schemeClr val="tx1"/>
                 </a:solidFill>
@@ -13062,7 +13057,7 @@
               </a:rPr>
               <a:t>A</a:t>
             </a:r>
-            <a:endParaRPr lang="zh-CN" altLang="en-US" dirty="0">
+            <a:endParaRPr lang="zh-CN" altLang="en-US" b="1" dirty="0">
               <a:solidFill>
                 <a:schemeClr val="tx1"/>
               </a:solidFill>
@@ -13122,7 +13117,7 @@
           <a:p>
             <a:pPr algn="ctr"/>
             <a:r>
-              <a:rPr lang="en-US" altLang="zh-CN" dirty="0">
+              <a:rPr lang="en-US" altLang="zh-CN" b="1" dirty="0">
                 <a:solidFill>
                   <a:schemeClr val="tx1"/>
                 </a:solidFill>
@@ -13131,7 +13126,7 @@
               </a:rPr>
               <a:t>B</a:t>
             </a:r>
-            <a:endParaRPr lang="zh-CN" altLang="en-US" dirty="0">
+            <a:endParaRPr lang="zh-CN" altLang="en-US" b="1" dirty="0">
               <a:solidFill>
                 <a:schemeClr val="tx1"/>
               </a:solidFill>
@@ -13190,7 +13185,7 @@
           <a:p>
             <a:pPr algn="ctr"/>
             <a:r>
-              <a:rPr lang="en-US" altLang="zh-CN" dirty="0">
+              <a:rPr lang="en-US" altLang="zh-CN" b="1" dirty="0">
                 <a:solidFill>
                   <a:schemeClr val="tx1"/>
                 </a:solidFill>
@@ -13199,7 +13194,7 @@
               </a:rPr>
               <a:t>C</a:t>
             </a:r>
-            <a:endParaRPr lang="zh-CN" altLang="en-US" dirty="0">
+            <a:endParaRPr lang="zh-CN" altLang="en-US" b="1" dirty="0">
               <a:solidFill>
                 <a:schemeClr val="tx1"/>
               </a:solidFill>
@@ -13276,7 +13271,7 @@
         <p:spPr>
           <a:xfrm>
             <a:off x="3726656" y="1742667"/>
-            <a:ext cx="862737" cy="338554"/>
+            <a:ext cx="947695" cy="369332"/>
           </a:xfrm>
           <a:prstGeom prst="rect">
             <a:avLst/>
@@ -13290,7 +13285,7 @@
           <a:lstStyle/>
           <a:p>
             <a:r>
-              <a:rPr lang="en-US" altLang="zh-CN" sz="1600" dirty="0">
+              <a:rPr lang="en-US" altLang="zh-CN" dirty="0">
                 <a:latin typeface="Times New Roman" panose="02020603050405020304" pitchFamily="18" charset="0"/>
                 <a:ea typeface="宋体" panose="02010600030101010101" pitchFamily="2" charset="-122"/>
                 <a:cs typeface="Times New Roman" panose="02020603050405020304" pitchFamily="18" charset="0"/>
@@ -13298,7 +13293,7 @@
               <a:t>Eden </a:t>
             </a:r>
             <a:r>
-              <a:rPr lang="zh-CN" altLang="en-US" sz="1600" dirty="0">
+              <a:rPr lang="zh-CN" altLang="en-US" dirty="0">
                 <a:latin typeface="Times New Roman" panose="02020603050405020304" pitchFamily="18" charset="0"/>
                 <a:ea typeface="宋体" panose="02010600030101010101" pitchFamily="2" charset="-122"/>
                 <a:cs typeface="Times New Roman" panose="02020603050405020304" pitchFamily="18" charset="0"/>
@@ -13323,7 +13318,7 @@
         <p:spPr>
           <a:xfrm>
             <a:off x="8073188" y="1742667"/>
-            <a:ext cx="1160895" cy="338554"/>
+            <a:ext cx="1281120" cy="369332"/>
           </a:xfrm>
           <a:prstGeom prst="rect">
             <a:avLst/>
@@ -13337,7 +13332,7 @@
           <a:lstStyle/>
           <a:p>
             <a:r>
-              <a:rPr lang="en-US" altLang="zh-CN" sz="1600" dirty="0">
+              <a:rPr lang="en-US" altLang="zh-CN" dirty="0">
                 <a:latin typeface="Times New Roman" panose="02020603050405020304" pitchFamily="18" charset="0"/>
                 <a:ea typeface="宋体" panose="02010600030101010101" pitchFamily="2" charset="-122"/>
                 <a:cs typeface="Times New Roman" panose="02020603050405020304" pitchFamily="18" charset="0"/>
@@ -13345,7 +13340,7 @@
               <a:t>Survivor </a:t>
             </a:r>
             <a:r>
-              <a:rPr lang="zh-CN" altLang="en-US" sz="1600" dirty="0">
+              <a:rPr lang="zh-CN" altLang="en-US" dirty="0">
                 <a:latin typeface="Times New Roman" panose="02020603050405020304" pitchFamily="18" charset="0"/>
                 <a:ea typeface="宋体" panose="02010600030101010101" pitchFamily="2" charset="-122"/>
                 <a:cs typeface="Times New Roman" panose="02020603050405020304" pitchFamily="18" charset="0"/>
@@ -13404,7 +13399,7 @@
           <a:p>
             <a:pPr algn="ctr"/>
             <a:r>
-              <a:rPr lang="zh-CN" altLang="en-US" dirty="0">
+              <a:rPr lang="zh-CN" altLang="en-US" b="1" dirty="0">
                 <a:solidFill>
                   <a:schemeClr val="tx1"/>
                 </a:solidFill>
@@ -13466,7 +13461,7 @@
           <a:p>
             <a:pPr algn="ctr"/>
             <a:r>
-              <a:rPr lang="en-US" altLang="zh-CN" dirty="0">
+              <a:rPr lang="en-US" altLang="zh-CN" b="1" dirty="0">
                 <a:solidFill>
                   <a:schemeClr val="tx1"/>
                 </a:solidFill>
@@ -13475,7 +13470,7 @@
               </a:rPr>
               <a:t>D</a:t>
             </a:r>
-            <a:endParaRPr lang="zh-CN" altLang="en-US" dirty="0">
+            <a:endParaRPr lang="zh-CN" altLang="en-US" b="1" dirty="0">
               <a:solidFill>
                 <a:schemeClr val="tx1"/>
               </a:solidFill>
@@ -13721,7 +13716,7 @@
           <a:p>
             <a:pPr algn="ctr"/>
             <a:r>
-              <a:rPr lang="en-US" altLang="zh-CN" b="1" i="1" dirty="0">
+              <a:rPr lang="en-US" altLang="zh-CN" b="1" i="1" u="sng" dirty="0">
                 <a:solidFill>
                   <a:srgbClr val="FF0000"/>
                 </a:solidFill>
@@ -13730,7 +13725,7 @@
               </a:rPr>
               <a:t>A</a:t>
             </a:r>
-            <a:endParaRPr lang="zh-CN" altLang="en-US" b="1" i="1" dirty="0">
+            <a:endParaRPr lang="zh-CN" altLang="en-US" b="1" i="1" u="sng" dirty="0">
               <a:solidFill>
                 <a:srgbClr val="FF0000"/>
               </a:solidFill>
@@ -13789,7 +13784,7 @@
           <a:p>
             <a:pPr algn="ctr"/>
             <a:r>
-              <a:rPr lang="en-US" altLang="zh-CN" b="1" i="1" dirty="0">
+              <a:rPr lang="en-US" altLang="zh-CN" b="1" i="1" u="sng" dirty="0">
                 <a:solidFill>
                   <a:srgbClr val="FF0000"/>
                 </a:solidFill>
@@ -13798,7 +13793,7 @@
               </a:rPr>
               <a:t>B</a:t>
             </a:r>
-            <a:endParaRPr lang="zh-CN" altLang="en-US" b="1" i="1" dirty="0">
+            <a:endParaRPr lang="zh-CN" altLang="en-US" b="1" i="1" u="sng" dirty="0">
               <a:solidFill>
                 <a:srgbClr val="FF0000"/>
               </a:solidFill>
@@ -14000,7 +13995,7 @@
           <a:p>
             <a:pPr algn="ctr"/>
             <a:r>
-              <a:rPr lang="en-US" altLang="zh-CN" dirty="0">
+              <a:rPr lang="en-US" altLang="zh-CN" b="1" dirty="0">
                 <a:solidFill>
                   <a:schemeClr val="tx1"/>
                 </a:solidFill>
@@ -14009,7 +14004,7 @@
               </a:rPr>
               <a:t>D</a:t>
             </a:r>
-            <a:endParaRPr lang="zh-CN" altLang="en-US" dirty="0">
+            <a:endParaRPr lang="zh-CN" altLang="en-US" b="1" dirty="0">
               <a:solidFill>
                 <a:schemeClr val="tx1"/>
               </a:solidFill>
@@ -14130,7 +14125,7 @@
         <p:spPr>
           <a:xfrm>
             <a:off x="9470571" y="395107"/>
-            <a:ext cx="1560042" cy="338554"/>
+            <a:ext cx="1107996" cy="369332"/>
           </a:xfrm>
           <a:prstGeom prst="rect">
             <a:avLst/>
@@ -14144,20 +14139,12 @@
           <a:lstStyle/>
           <a:p>
             <a:r>
-              <a:rPr lang="en-US" altLang="zh-CN" sz="1600" dirty="0">
+              <a:rPr lang="zh-CN" altLang="en-US" b="1" dirty="0">
                 <a:latin typeface="Times New Roman" panose="02020603050405020304" pitchFamily="18" charset="0"/>
                 <a:ea typeface="宋体" panose="02010600030101010101" pitchFamily="2" charset="-122"/>
                 <a:cs typeface="Times New Roman" panose="02020603050405020304" pitchFamily="18" charset="0"/>
               </a:rPr>
-              <a:t>forwarding </a:t>
-            </a:r>
-            <a:r>
-              <a:rPr lang="zh-CN" altLang="en-US" sz="1600" dirty="0">
-                <a:latin typeface="Times New Roman" panose="02020603050405020304" pitchFamily="18" charset="0"/>
-                <a:ea typeface="宋体" panose="02010600030101010101" pitchFamily="2" charset="-122"/>
-                <a:cs typeface="Times New Roman" panose="02020603050405020304" pitchFamily="18" charset="0"/>
-              </a:rPr>
-              <a:t>指针</a:t>
+              <a:t>转发指针</a:t>
             </a:r>
           </a:p>
         </p:txBody>
@@ -14176,8 +14163,8 @@
         </p:nvSpPr>
         <p:spPr>
           <a:xfrm>
-            <a:off x="4363434" y="6156505"/>
-            <a:ext cx="4456669" cy="369332"/>
+            <a:off x="3185873" y="6222975"/>
+            <a:ext cx="4818948" cy="400110"/>
           </a:xfrm>
           <a:prstGeom prst="rect">
             <a:avLst/>
@@ -14191,7 +14178,7 @@
           <a:lstStyle/>
           <a:p>
             <a:r>
-              <a:rPr lang="zh-CN" altLang="en-US" b="1" dirty="0">
+              <a:rPr lang="zh-CN" altLang="en-US" sz="2000" b="1" dirty="0">
                 <a:latin typeface="Times New Roman" panose="02020603050405020304" pitchFamily="18" charset="0"/>
                 <a:ea typeface="宋体" panose="02010600030101010101" pitchFamily="2" charset="-122"/>
                 <a:cs typeface="Times New Roman" panose="02020603050405020304" pitchFamily="18" charset="0"/>
@@ -14199,7 +14186,7 @@
               <a:t>④ 循环结束，清空旧 </a:t>
             </a:r>
             <a:r>
-              <a:rPr lang="en-US" altLang="zh-CN" b="1" dirty="0">
+              <a:rPr lang="en-US" altLang="zh-CN" sz="2000" b="1" dirty="0">
                 <a:latin typeface="Times New Roman" panose="02020603050405020304" pitchFamily="18" charset="0"/>
                 <a:ea typeface="宋体" panose="02010600030101010101" pitchFamily="2" charset="-122"/>
                 <a:cs typeface="Times New Roman" panose="02020603050405020304" pitchFamily="18" charset="0"/>
@@ -14207,7 +14194,7 @@
               <a:t>Eden </a:t>
             </a:r>
             <a:r>
-              <a:rPr lang="zh-CN" altLang="en-US" b="1" dirty="0">
+              <a:rPr lang="zh-CN" altLang="en-US" sz="2000" b="1" dirty="0">
                 <a:latin typeface="Times New Roman" panose="02020603050405020304" pitchFamily="18" charset="0"/>
                 <a:ea typeface="宋体" panose="02010600030101010101" pitchFamily="2" charset="-122"/>
                 <a:cs typeface="Times New Roman" panose="02020603050405020304" pitchFamily="18" charset="0"/>
@@ -14232,9 +14219,9 @@
         <p:grpSpPr>
           <a:xfrm>
             <a:off x="296934" y="4201023"/>
-            <a:ext cx="10598676" cy="1332843"/>
+            <a:ext cx="10598676" cy="1357656"/>
             <a:chOff x="296934" y="371210"/>
-            <a:chExt cx="10598676" cy="1332843"/>
+            <a:chExt cx="10598676" cy="1357656"/>
           </a:xfrm>
         </p:grpSpPr>
         <p:sp>
@@ -14440,7 +14427,7 @@
           <p:spPr>
             <a:xfrm>
               <a:off x="3726656" y="1359534"/>
-              <a:ext cx="862737" cy="338554"/>
+              <a:ext cx="947695" cy="369332"/>
             </a:xfrm>
             <a:prstGeom prst="rect">
               <a:avLst/>
@@ -14454,7 +14441,7 @@
             <a:lstStyle/>
             <a:p>
               <a:r>
-                <a:rPr lang="en-US" altLang="zh-CN" sz="1600" dirty="0">
+                <a:rPr lang="en-US" altLang="zh-CN" dirty="0">
                   <a:latin typeface="Times New Roman" panose="02020603050405020304" pitchFamily="18" charset="0"/>
                   <a:ea typeface="宋体" panose="02010600030101010101" pitchFamily="2" charset="-122"/>
                   <a:cs typeface="Times New Roman" panose="02020603050405020304" pitchFamily="18" charset="0"/>
@@ -14462,7 +14449,7 @@
                 <a:t>Eden </a:t>
               </a:r>
               <a:r>
-                <a:rPr lang="zh-CN" altLang="en-US" sz="1600" dirty="0">
+                <a:rPr lang="zh-CN" altLang="en-US" dirty="0">
                   <a:latin typeface="Times New Roman" panose="02020603050405020304" pitchFamily="18" charset="0"/>
                   <a:ea typeface="宋体" panose="02010600030101010101" pitchFamily="2" charset="-122"/>
                   <a:cs typeface="Times New Roman" panose="02020603050405020304" pitchFamily="18" charset="0"/>
@@ -14487,7 +14474,7 @@
           <p:spPr>
             <a:xfrm>
               <a:off x="8073188" y="1359534"/>
-              <a:ext cx="1160895" cy="338554"/>
+              <a:ext cx="1281120" cy="369332"/>
             </a:xfrm>
             <a:prstGeom prst="rect">
               <a:avLst/>
@@ -14501,7 +14488,7 @@
             <a:lstStyle/>
             <a:p>
               <a:r>
-                <a:rPr lang="en-US" altLang="zh-CN" sz="1600" dirty="0">
+                <a:rPr lang="en-US" altLang="zh-CN" dirty="0">
                   <a:latin typeface="Times New Roman" panose="02020603050405020304" pitchFamily="18" charset="0"/>
                   <a:ea typeface="宋体" panose="02010600030101010101" pitchFamily="2" charset="-122"/>
                   <a:cs typeface="Times New Roman" panose="02020603050405020304" pitchFamily="18" charset="0"/>
@@ -14509,7 +14496,7 @@
                 <a:t>Survivor </a:t>
               </a:r>
               <a:r>
-                <a:rPr lang="zh-CN" altLang="en-US" sz="1600" dirty="0">
+                <a:rPr lang="zh-CN" altLang="en-US" dirty="0">
                   <a:latin typeface="Times New Roman" panose="02020603050405020304" pitchFamily="18" charset="0"/>
                   <a:ea typeface="宋体" panose="02010600030101010101" pitchFamily="2" charset="-122"/>
                   <a:cs typeface="Times New Roman" panose="02020603050405020304" pitchFamily="18" charset="0"/>
@@ -14568,7 +14555,7 @@
             <a:p>
               <a:pPr algn="ctr"/>
               <a:r>
-                <a:rPr lang="zh-CN" altLang="en-US" dirty="0">
+                <a:rPr lang="zh-CN" altLang="en-US" b="1" dirty="0">
                   <a:solidFill>
                     <a:schemeClr val="tx1"/>
                   </a:solidFill>
@@ -18877,121 +18864,100 @@
           </a:fontRef>
         </p:style>
       </p:cxnSp>
-      <p:grpSp>
-        <p:nvGrpSpPr>
-          <p:cNvPr id="34" name="组合 33">
+      <p:sp>
+        <p:nvSpPr>
+          <p:cNvPr id="17" name="箭头: 上弧形 16">
             <a:extLst>
               <a:ext uri="{FF2B5EF4-FFF2-40B4-BE49-F238E27FC236}">
-                <a16:creationId xmlns:a16="http://schemas.microsoft.com/office/drawing/2014/main" id="{F488B756-E70D-4AA3-9760-4C2D6F1CEEB0}"/>
+                <a16:creationId xmlns:a16="http://schemas.microsoft.com/office/drawing/2014/main" id="{5FCBA98E-0F47-43D3-93C6-2E60C57C647B}"/>
               </a:ext>
             </a:extLst>
           </p:cNvPr>
-          <p:cNvGrpSpPr/>
+          <p:cNvSpPr/>
           <p:nvPr/>
-        </p:nvGrpSpPr>
-        <p:grpSpPr>
-          <a:xfrm>
-            <a:off x="4841537" y="1012582"/>
-            <a:ext cx="1415772" cy="948719"/>
-            <a:chOff x="2537046" y="3076452"/>
-            <a:chExt cx="1415772" cy="948719"/>
+        </p:nvSpPr>
+        <p:spPr>
+          <a:xfrm flipH="1">
+            <a:off x="5154568" y="1012582"/>
+            <a:ext cx="789710" cy="504702"/>
           </a:xfrm>
-        </p:grpSpPr>
-        <p:sp>
-          <p:nvSpPr>
-            <p:cNvPr id="17" name="箭头: 上弧形 16">
-              <a:extLst>
-                <a:ext uri="{FF2B5EF4-FFF2-40B4-BE49-F238E27FC236}">
-                  <a16:creationId xmlns:a16="http://schemas.microsoft.com/office/drawing/2014/main" id="{5FCBA98E-0F47-43D3-93C6-2E60C57C647B}"/>
-                </a:ext>
-              </a:extLst>
-            </p:cNvPr>
-            <p:cNvSpPr/>
-            <p:nvPr/>
-          </p:nvSpPr>
-          <p:spPr>
-            <a:xfrm>
-              <a:off x="2850077" y="3076452"/>
-              <a:ext cx="789710" cy="504702"/>
-            </a:xfrm>
-            <a:prstGeom prst="curvedDownArrow">
-              <a:avLst/>
-            </a:prstGeom>
-            <a:noFill/>
-            <a:ln w="28575">
+          <a:prstGeom prst="curvedDownArrow">
+            <a:avLst/>
+          </a:prstGeom>
+          <a:noFill/>
+          <a:ln w="28575">
+            <a:solidFill>
+              <a:schemeClr val="tx1"/>
+            </a:solidFill>
+          </a:ln>
+        </p:spPr>
+        <p:style>
+          <a:lnRef idx="2">
+            <a:schemeClr val="accent1">
+              <a:shade val="50000"/>
+            </a:schemeClr>
+          </a:lnRef>
+          <a:fillRef idx="1">
+            <a:schemeClr val="accent1"/>
+          </a:fillRef>
+          <a:effectRef idx="0">
+            <a:schemeClr val="accent1"/>
+          </a:effectRef>
+          <a:fontRef idx="minor">
+            <a:schemeClr val="lt1"/>
+          </a:fontRef>
+        </p:style>
+        <p:txBody>
+          <a:bodyPr rtlCol="0" anchor="ctr"/>
+          <a:lstStyle/>
+          <a:p>
+            <a:pPr algn="ctr"/>
+            <a:endParaRPr lang="zh-CN" altLang="en-US">
               <a:solidFill>
                 <a:schemeClr val="tx1"/>
               </a:solidFill>
-            </a:ln>
-          </p:spPr>
-          <p:style>
-            <a:lnRef idx="2">
-              <a:schemeClr val="accent1">
-                <a:shade val="50000"/>
-              </a:schemeClr>
-            </a:lnRef>
-            <a:fillRef idx="1">
-              <a:schemeClr val="accent1"/>
-            </a:fillRef>
-            <a:effectRef idx="0">
-              <a:schemeClr val="accent1"/>
-            </a:effectRef>
-            <a:fontRef idx="minor">
-              <a:schemeClr val="lt1"/>
-            </a:fontRef>
-          </p:style>
-          <p:txBody>
-            <a:bodyPr rtlCol="0" anchor="ctr"/>
-            <a:lstStyle/>
-            <a:p>
-              <a:pPr algn="ctr"/>
-              <a:endParaRPr lang="zh-CN" altLang="en-US">
-                <a:solidFill>
-                  <a:schemeClr val="tx1"/>
-                </a:solidFill>
-              </a:endParaRPr>
-            </a:p>
-          </p:txBody>
-        </p:sp>
-        <p:sp>
-          <p:nvSpPr>
-            <p:cNvPr id="20" name="文本框 19">
-              <a:extLst>
-                <a:ext uri="{FF2B5EF4-FFF2-40B4-BE49-F238E27FC236}">
-                  <a16:creationId xmlns:a16="http://schemas.microsoft.com/office/drawing/2014/main" id="{6C02E4F0-01C7-45C5-A0A0-A89093063A8E}"/>
-                </a:ext>
-              </a:extLst>
-            </p:cNvPr>
-            <p:cNvSpPr txBox="1"/>
-            <p:nvPr/>
-          </p:nvSpPr>
-          <p:spPr>
-            <a:xfrm>
-              <a:off x="2537046" y="3686617"/>
-              <a:ext cx="1415772" cy="338554"/>
-            </a:xfrm>
-            <a:prstGeom prst="rect">
-              <a:avLst/>
-            </a:prstGeom>
-            <a:noFill/>
-          </p:spPr>
-          <p:txBody>
-            <a:bodyPr wrap="none" rtlCol="0">
-              <a:spAutoFit/>
-            </a:bodyPr>
-            <a:lstStyle/>
-            <a:p>
-              <a:r>
-                <a:rPr lang="zh-CN" altLang="en-US" sz="1600" dirty="0">
-                  <a:latin typeface="宋体" panose="02010600030101010101" pitchFamily="2" charset="-122"/>
-                  <a:ea typeface="宋体" panose="02010600030101010101" pitchFamily="2" charset="-122"/>
-                </a:rPr>
-                <a:t>解释器主循环</a:t>
-              </a:r>
-            </a:p>
-          </p:txBody>
-        </p:sp>
-      </p:grpSp>
+            </a:endParaRPr>
+          </a:p>
+        </p:txBody>
+      </p:sp>
+      <p:sp>
+        <p:nvSpPr>
+          <p:cNvPr id="20" name="文本框 19">
+            <a:extLst>
+              <a:ext uri="{FF2B5EF4-FFF2-40B4-BE49-F238E27FC236}">
+                <a16:creationId xmlns:a16="http://schemas.microsoft.com/office/drawing/2014/main" id="{6C02E4F0-01C7-45C5-A0A0-A89093063A8E}"/>
+              </a:ext>
+            </a:extLst>
+          </p:cNvPr>
+          <p:cNvSpPr txBox="1"/>
+          <p:nvPr/>
+        </p:nvSpPr>
+        <p:spPr>
+          <a:xfrm>
+            <a:off x="4841537" y="1622747"/>
+            <a:ext cx="1415772" cy="338554"/>
+          </a:xfrm>
+          <a:prstGeom prst="rect">
+            <a:avLst/>
+          </a:prstGeom>
+          <a:noFill/>
+        </p:spPr>
+        <p:txBody>
+          <a:bodyPr wrap="none" rtlCol="0">
+            <a:spAutoFit/>
+          </a:bodyPr>
+          <a:lstStyle/>
+          <a:p>
+            <a:r>
+              <a:rPr lang="zh-CN" altLang="en-US" sz="1600" dirty="0">
+                <a:latin typeface="宋体" panose="02010600030101010101" pitchFamily="2" charset="-122"/>
+                <a:ea typeface="宋体" panose="02010600030101010101" pitchFamily="2" charset="-122"/>
+              </a:rPr>
+              <a:t>解释器主循环</a:t>
+            </a:r>
+          </a:p>
+        </p:txBody>
+      </p:sp>
       <p:sp>
         <p:nvSpPr>
           <p:cNvPr id="23" name="文本框 22">
@@ -20371,7 +20337,7 @@
                 <a:ea typeface="宋体" panose="02010600030101010101" pitchFamily="2" charset="-122"/>
                 <a:cs typeface="Times New Roman" panose="02020603050405020304" pitchFamily="18" charset="0"/>
               </a:rPr>
-              <a:t>桥阶层（</a:t>
+              <a:t>桥接层（</a:t>
             </a:r>
             <a:r>
               <a:rPr lang="en-US" altLang="zh-CN" b="1" dirty="0">
@@ -33480,9 +33446,9 @@
         <p:grpSpPr>
           <a:xfrm>
             <a:off x="2624436" y="703738"/>
-            <a:ext cx="7684732" cy="5648675"/>
+            <a:ext cx="7635308" cy="5648675"/>
             <a:chOff x="1805039" y="1089686"/>
-            <a:chExt cx="7684732" cy="5648675"/>
+            <a:chExt cx="7635308" cy="5648675"/>
           </a:xfrm>
         </p:grpSpPr>
         <p:grpSp>
@@ -35262,9 +35228,9 @@
           </p:nvGrpSpPr>
           <p:grpSpPr>
             <a:xfrm>
-              <a:off x="7852784" y="1929533"/>
+              <a:off x="7803360" y="1929533"/>
               <a:ext cx="1636987" cy="1499467"/>
-              <a:chOff x="7852784" y="1929533"/>
+              <a:chOff x="7803360" y="1929533"/>
               <a:chExt cx="1636987" cy="1499467"/>
             </a:xfrm>
           </p:grpSpPr>
@@ -35332,7 +35298,7 @@
             </p:nvSpPr>
             <p:spPr>
               <a:xfrm>
-                <a:off x="7852784" y="2405591"/>
+                <a:off x="7803360" y="2405591"/>
                 <a:ext cx="1636987" cy="646331"/>
               </a:xfrm>
               <a:prstGeom prst="rect">
@@ -35456,7 +35422,7 @@
         </p:nvSpPr>
         <p:spPr>
           <a:xfrm>
-            <a:off x="867157" y="3366962"/>
+            <a:off x="953656" y="3366962"/>
             <a:ext cx="1575111" cy="646331"/>
           </a:xfrm>
           <a:prstGeom prst="rect">
